--- a/materials/week7/w7-slides.pptx
+++ b/materials/week7/w7-slides.pptx
@@ -8791,7 +8791,130 @@
       <p:grpSpPr/>
       <p:sp>
         <p:nvSpPr>
-          <p:cNvPr id="2" name="TextBox 1"/>
+          <p:cNvPr id="2" name="Rectangle 1"/>
+          <p:cNvSpPr/>
+          <p:nvPr/>
+        </p:nvSpPr>
+        <p:spPr>
+          <a:xfrm>
+            <a:off x="0" y="0"/>
+            <a:ext cx="12191695" cy="6858000"/>
+          </a:xfrm>
+          <a:prstGeom prst="rect">
+            <a:avLst/>
+          </a:prstGeom>
+          <a:solidFill>
+            <a:srgbClr val="FFF3DF"/>
+          </a:solidFill>
+          <a:ln>
+            <a:noFill/>
+          </a:ln>
+        </p:spPr>
+        <p:style>
+          <a:lnRef idx="1">
+            <a:schemeClr val="accent1"/>
+          </a:lnRef>
+          <a:fillRef idx="3">
+            <a:schemeClr val="accent1"/>
+          </a:fillRef>
+          <a:effectRef idx="2">
+            <a:schemeClr val="accent1"/>
+          </a:effectRef>
+          <a:fontRef idx="minor">
+            <a:schemeClr val="lt1"/>
+          </a:fontRef>
+        </p:style>
+        <p:txBody>
+          <a:bodyPr rtlCol="0" anchor="ctr"/>
+          <a:lstStyle/>
+          <a:p>
+            <a:pPr algn="ctr"/>
+          </a:p>
+        </p:txBody>
+      </p:sp>
+      <p:sp>
+        <p:nvSpPr>
+          <p:cNvPr id="3" name="Rectangle 2"/>
+          <p:cNvSpPr/>
+          <p:nvPr/>
+        </p:nvSpPr>
+        <p:spPr>
+          <a:xfrm>
+            <a:off x="0" y="0"/>
+            <a:ext cx="146304" cy="6858000"/>
+          </a:xfrm>
+          <a:prstGeom prst="rect">
+            <a:avLst/>
+          </a:prstGeom>
+          <a:solidFill>
+            <a:srgbClr val="E0A02C"/>
+          </a:solidFill>
+          <a:ln>
+            <a:noFill/>
+          </a:ln>
+        </p:spPr>
+        <p:style>
+          <a:lnRef idx="1">
+            <a:schemeClr val="accent1"/>
+          </a:lnRef>
+          <a:fillRef idx="3">
+            <a:schemeClr val="accent1"/>
+          </a:fillRef>
+          <a:effectRef idx="2">
+            <a:schemeClr val="accent1"/>
+          </a:effectRef>
+          <a:fontRef idx="minor">
+            <a:schemeClr val="lt1"/>
+          </a:fontRef>
+        </p:style>
+        <p:txBody>
+          <a:bodyPr rtlCol="0" anchor="ctr"/>
+          <a:lstStyle/>
+          <a:p>
+            <a:pPr algn="ctr"/>
+          </a:p>
+        </p:txBody>
+      </p:sp>
+      <p:sp>
+        <p:nvSpPr>
+          <p:cNvPr id="4" name="TextBox 3"/>
+          <p:cNvSpPr txBox="1"/>
+          <p:nvPr/>
+        </p:nvSpPr>
+        <p:spPr>
+          <a:xfrm>
+            <a:off x="9082735" y="109728"/>
+            <a:ext cx="2834640" cy="384048"/>
+          </a:xfrm>
+          <a:prstGeom prst="rect">
+            <a:avLst/>
+          </a:prstGeom>
+          <a:noFill/>
+        </p:spPr>
+        <p:txBody>
+          <a:bodyPr wrap="square">
+            <a:spAutoFit/>
+          </a:bodyPr>
+          <a:lstStyle/>
+          <a:p>
+            <a:pPr algn="r"/>
+            <a:r>
+              <a:rPr sz="1400" b="1">
+                <a:solidFill>
+                  <a:srgbClr val="8A5400"/>
+                </a:solidFill>
+                <a:latin typeface="Leelawadee UI"/>
+                <a:ea typeface="Leelawadee UI"/>
+                <a:cs typeface="Leelawadee UI"/>
+              </a:rPr>
+              <a:t>🎬 สลับไปหน้าจอสาธิตสด</a:t>
+            </a:r>
+          </a:p>
+        </p:txBody>
+      </p:sp>
+      <p:sp>
+        <p:nvSpPr>
+          <p:cNvPr id="5" name="TextBox 4"/>
           <p:cNvSpPr txBox="1"/>
           <p:nvPr/>
         </p:nvSpPr>
@@ -8815,7 +8938,7 @@
             <a:r>
               <a:rPr sz="3600" b="1">
                 <a:solidFill>
-                  <a:srgbClr val="1F5FA8"/>
+                  <a:srgbClr val="8A5400"/>
                 </a:solidFill>
                 <a:latin typeface="Leelawadee UI"/>
                 <a:ea typeface="Leelawadee UI"/>
@@ -8828,7 +8951,7 @@
       </p:sp>
       <p:sp>
         <p:nvSpPr>
-          <p:cNvPr id="3" name="TextBox 2"/>
+          <p:cNvPr id="6" name="TextBox 5"/>
           <p:cNvSpPr txBox="1"/>
           <p:nvPr/>
         </p:nvSpPr>
@@ -8865,7 +8988,7 @@
       </p:sp>
       <p:sp>
         <p:nvSpPr>
-          <p:cNvPr id="4" name="TextBox 3"/>
+          <p:cNvPr id="7" name="TextBox 6"/>
           <p:cNvSpPr txBox="1"/>
           <p:nvPr/>
         </p:nvSpPr>
@@ -8902,7 +9025,7 @@
       </p:sp>
       <p:sp>
         <p:nvSpPr>
-          <p:cNvPr id="5" name="TextBox 4"/>
+          <p:cNvPr id="8" name="TextBox 7"/>
           <p:cNvSpPr txBox="1"/>
           <p:nvPr/>
         </p:nvSpPr>
@@ -8939,7 +9062,7 @@
       </p:sp>
       <p:sp>
         <p:nvSpPr>
-          <p:cNvPr id="6" name="TextBox 5"/>
+          <p:cNvPr id="9" name="TextBox 8"/>
           <p:cNvSpPr txBox="1"/>
           <p:nvPr/>
         </p:nvSpPr>
@@ -11041,7 +11164,130 @@
       <p:grpSpPr/>
       <p:sp>
         <p:nvSpPr>
-          <p:cNvPr id="2" name="TextBox 1"/>
+          <p:cNvPr id="2" name="Rectangle 1"/>
+          <p:cNvSpPr/>
+          <p:nvPr/>
+        </p:nvSpPr>
+        <p:spPr>
+          <a:xfrm>
+            <a:off x="0" y="0"/>
+            <a:ext cx="12191695" cy="6858000"/>
+          </a:xfrm>
+          <a:prstGeom prst="rect">
+            <a:avLst/>
+          </a:prstGeom>
+          <a:solidFill>
+            <a:srgbClr val="FFF3DF"/>
+          </a:solidFill>
+          <a:ln>
+            <a:noFill/>
+          </a:ln>
+        </p:spPr>
+        <p:style>
+          <a:lnRef idx="1">
+            <a:schemeClr val="accent1"/>
+          </a:lnRef>
+          <a:fillRef idx="3">
+            <a:schemeClr val="accent1"/>
+          </a:fillRef>
+          <a:effectRef idx="2">
+            <a:schemeClr val="accent1"/>
+          </a:effectRef>
+          <a:fontRef idx="minor">
+            <a:schemeClr val="lt1"/>
+          </a:fontRef>
+        </p:style>
+        <p:txBody>
+          <a:bodyPr rtlCol="0" anchor="ctr"/>
+          <a:lstStyle/>
+          <a:p>
+            <a:pPr algn="ctr"/>
+          </a:p>
+        </p:txBody>
+      </p:sp>
+      <p:sp>
+        <p:nvSpPr>
+          <p:cNvPr id="3" name="Rectangle 2"/>
+          <p:cNvSpPr/>
+          <p:nvPr/>
+        </p:nvSpPr>
+        <p:spPr>
+          <a:xfrm>
+            <a:off x="0" y="0"/>
+            <a:ext cx="146304" cy="6858000"/>
+          </a:xfrm>
+          <a:prstGeom prst="rect">
+            <a:avLst/>
+          </a:prstGeom>
+          <a:solidFill>
+            <a:srgbClr val="E0A02C"/>
+          </a:solidFill>
+          <a:ln>
+            <a:noFill/>
+          </a:ln>
+        </p:spPr>
+        <p:style>
+          <a:lnRef idx="1">
+            <a:schemeClr val="accent1"/>
+          </a:lnRef>
+          <a:fillRef idx="3">
+            <a:schemeClr val="accent1"/>
+          </a:fillRef>
+          <a:effectRef idx="2">
+            <a:schemeClr val="accent1"/>
+          </a:effectRef>
+          <a:fontRef idx="minor">
+            <a:schemeClr val="lt1"/>
+          </a:fontRef>
+        </p:style>
+        <p:txBody>
+          <a:bodyPr rtlCol="0" anchor="ctr"/>
+          <a:lstStyle/>
+          <a:p>
+            <a:pPr algn="ctr"/>
+          </a:p>
+        </p:txBody>
+      </p:sp>
+      <p:sp>
+        <p:nvSpPr>
+          <p:cNvPr id="4" name="TextBox 3"/>
+          <p:cNvSpPr txBox="1"/>
+          <p:nvPr/>
+        </p:nvSpPr>
+        <p:spPr>
+          <a:xfrm>
+            <a:off x="9082735" y="109728"/>
+            <a:ext cx="2834640" cy="384048"/>
+          </a:xfrm>
+          <a:prstGeom prst="rect">
+            <a:avLst/>
+          </a:prstGeom>
+          <a:noFill/>
+        </p:spPr>
+        <p:txBody>
+          <a:bodyPr wrap="square">
+            <a:spAutoFit/>
+          </a:bodyPr>
+          <a:lstStyle/>
+          <a:p>
+            <a:pPr algn="r"/>
+            <a:r>
+              <a:rPr sz="1400" b="1">
+                <a:solidFill>
+                  <a:srgbClr val="8A5400"/>
+                </a:solidFill>
+                <a:latin typeface="Leelawadee UI"/>
+                <a:ea typeface="Leelawadee UI"/>
+                <a:cs typeface="Leelawadee UI"/>
+              </a:rPr>
+              <a:t>🎬 สลับไปหน้าจอสาธิตสด</a:t>
+            </a:r>
+          </a:p>
+        </p:txBody>
+      </p:sp>
+      <p:sp>
+        <p:nvSpPr>
+          <p:cNvPr id="5" name="TextBox 4"/>
           <p:cNvSpPr txBox="1"/>
           <p:nvPr/>
         </p:nvSpPr>
@@ -11065,7 +11311,7 @@
             <a:r>
               <a:rPr sz="3600" b="1">
                 <a:solidFill>
-                  <a:srgbClr val="1F5FA8"/>
+                  <a:srgbClr val="8A5400"/>
                 </a:solidFill>
                 <a:latin typeface="Leelawadee UI"/>
                 <a:ea typeface="Leelawadee UI"/>
@@ -11078,7 +11324,7 @@
       </p:sp>
       <p:sp>
         <p:nvSpPr>
-          <p:cNvPr id="3" name="TextBox 2"/>
+          <p:cNvPr id="6" name="TextBox 5"/>
           <p:cNvSpPr txBox="1"/>
           <p:nvPr/>
         </p:nvSpPr>
@@ -11115,7 +11361,7 @@
       </p:sp>
       <p:sp>
         <p:nvSpPr>
-          <p:cNvPr id="4" name="TextBox 3"/>
+          <p:cNvPr id="7" name="TextBox 6"/>
           <p:cNvSpPr txBox="1"/>
           <p:nvPr/>
         </p:nvSpPr>
@@ -11152,7 +11398,7 @@
       </p:sp>
       <p:sp>
         <p:nvSpPr>
-          <p:cNvPr id="5" name="TextBox 4"/>
+          <p:cNvPr id="8" name="TextBox 7"/>
           <p:cNvSpPr txBox="1"/>
           <p:nvPr/>
         </p:nvSpPr>
@@ -11189,7 +11435,7 @@
       </p:sp>
       <p:sp>
         <p:nvSpPr>
-          <p:cNvPr id="6" name="TextBox 5"/>
+          <p:cNvPr id="9" name="TextBox 8"/>
           <p:cNvSpPr txBox="1"/>
           <p:nvPr/>
         </p:nvSpPr>
@@ -11721,7 +11967,130 @@
       <p:grpSpPr/>
       <p:sp>
         <p:nvSpPr>
-          <p:cNvPr id="2" name="TextBox 1"/>
+          <p:cNvPr id="2" name="Rectangle 1"/>
+          <p:cNvSpPr/>
+          <p:nvPr/>
+        </p:nvSpPr>
+        <p:spPr>
+          <a:xfrm>
+            <a:off x="0" y="0"/>
+            <a:ext cx="12191695" cy="6858000"/>
+          </a:xfrm>
+          <a:prstGeom prst="rect">
+            <a:avLst/>
+          </a:prstGeom>
+          <a:solidFill>
+            <a:srgbClr val="FFF3DF"/>
+          </a:solidFill>
+          <a:ln>
+            <a:noFill/>
+          </a:ln>
+        </p:spPr>
+        <p:style>
+          <a:lnRef idx="1">
+            <a:schemeClr val="accent1"/>
+          </a:lnRef>
+          <a:fillRef idx="3">
+            <a:schemeClr val="accent1"/>
+          </a:fillRef>
+          <a:effectRef idx="2">
+            <a:schemeClr val="accent1"/>
+          </a:effectRef>
+          <a:fontRef idx="minor">
+            <a:schemeClr val="lt1"/>
+          </a:fontRef>
+        </p:style>
+        <p:txBody>
+          <a:bodyPr rtlCol="0" anchor="ctr"/>
+          <a:lstStyle/>
+          <a:p>
+            <a:pPr algn="ctr"/>
+          </a:p>
+        </p:txBody>
+      </p:sp>
+      <p:sp>
+        <p:nvSpPr>
+          <p:cNvPr id="3" name="Rectangle 2"/>
+          <p:cNvSpPr/>
+          <p:nvPr/>
+        </p:nvSpPr>
+        <p:spPr>
+          <a:xfrm>
+            <a:off x="0" y="0"/>
+            <a:ext cx="146304" cy="6858000"/>
+          </a:xfrm>
+          <a:prstGeom prst="rect">
+            <a:avLst/>
+          </a:prstGeom>
+          <a:solidFill>
+            <a:srgbClr val="E0A02C"/>
+          </a:solidFill>
+          <a:ln>
+            <a:noFill/>
+          </a:ln>
+        </p:spPr>
+        <p:style>
+          <a:lnRef idx="1">
+            <a:schemeClr val="accent1"/>
+          </a:lnRef>
+          <a:fillRef idx="3">
+            <a:schemeClr val="accent1"/>
+          </a:fillRef>
+          <a:effectRef idx="2">
+            <a:schemeClr val="accent1"/>
+          </a:effectRef>
+          <a:fontRef idx="minor">
+            <a:schemeClr val="lt1"/>
+          </a:fontRef>
+        </p:style>
+        <p:txBody>
+          <a:bodyPr rtlCol="0" anchor="ctr"/>
+          <a:lstStyle/>
+          <a:p>
+            <a:pPr algn="ctr"/>
+          </a:p>
+        </p:txBody>
+      </p:sp>
+      <p:sp>
+        <p:nvSpPr>
+          <p:cNvPr id="4" name="TextBox 3"/>
+          <p:cNvSpPr txBox="1"/>
+          <p:nvPr/>
+        </p:nvSpPr>
+        <p:spPr>
+          <a:xfrm>
+            <a:off x="9082735" y="109728"/>
+            <a:ext cx="2834640" cy="384048"/>
+          </a:xfrm>
+          <a:prstGeom prst="rect">
+            <a:avLst/>
+          </a:prstGeom>
+          <a:noFill/>
+        </p:spPr>
+        <p:txBody>
+          <a:bodyPr wrap="square">
+            <a:spAutoFit/>
+          </a:bodyPr>
+          <a:lstStyle/>
+          <a:p>
+            <a:pPr algn="r"/>
+            <a:r>
+              <a:rPr sz="1400" b="1">
+                <a:solidFill>
+                  <a:srgbClr val="8A5400"/>
+                </a:solidFill>
+                <a:latin typeface="Leelawadee UI"/>
+                <a:ea typeface="Leelawadee UI"/>
+                <a:cs typeface="Leelawadee UI"/>
+              </a:rPr>
+              <a:t>🎬 สลับไปหน้าจอสาธิตสด</a:t>
+            </a:r>
+          </a:p>
+        </p:txBody>
+      </p:sp>
+      <p:sp>
+        <p:nvSpPr>
+          <p:cNvPr id="5" name="TextBox 4"/>
           <p:cNvSpPr txBox="1"/>
           <p:nvPr/>
         </p:nvSpPr>
@@ -11745,7 +12114,7 @@
             <a:r>
               <a:rPr sz="3600" b="1">
                 <a:solidFill>
-                  <a:srgbClr val="1F5FA8"/>
+                  <a:srgbClr val="8A5400"/>
                 </a:solidFill>
                 <a:latin typeface="Leelawadee UI"/>
                 <a:ea typeface="Leelawadee UI"/>
@@ -11758,7 +12127,7 @@
       </p:sp>
       <p:sp>
         <p:nvSpPr>
-          <p:cNvPr id="3" name="TextBox 2"/>
+          <p:cNvPr id="6" name="TextBox 5"/>
           <p:cNvSpPr txBox="1"/>
           <p:nvPr/>
         </p:nvSpPr>
@@ -11795,7 +12164,7 @@
       </p:sp>
       <p:sp>
         <p:nvSpPr>
-          <p:cNvPr id="4" name="TextBox 3"/>
+          <p:cNvPr id="7" name="TextBox 6"/>
           <p:cNvSpPr txBox="1"/>
           <p:nvPr/>
         </p:nvSpPr>
@@ -11832,7 +12201,7 @@
       </p:sp>
       <p:sp>
         <p:nvSpPr>
-          <p:cNvPr id="5" name="TextBox 4"/>
+          <p:cNvPr id="8" name="TextBox 7"/>
           <p:cNvSpPr txBox="1"/>
           <p:nvPr/>
         </p:nvSpPr>
@@ -11869,7 +12238,7 @@
       </p:sp>
       <p:sp>
         <p:nvSpPr>
-          <p:cNvPr id="6" name="TextBox 5"/>
+          <p:cNvPr id="9" name="TextBox 8"/>
           <p:cNvSpPr txBox="1"/>
           <p:nvPr/>
         </p:nvSpPr>
@@ -12125,7 +12494,130 @@
       <p:grpSpPr/>
       <p:sp>
         <p:nvSpPr>
-          <p:cNvPr id="2" name="TextBox 1"/>
+          <p:cNvPr id="2" name="Rectangle 1"/>
+          <p:cNvSpPr/>
+          <p:nvPr/>
+        </p:nvSpPr>
+        <p:spPr>
+          <a:xfrm>
+            <a:off x="0" y="0"/>
+            <a:ext cx="12191695" cy="6858000"/>
+          </a:xfrm>
+          <a:prstGeom prst="rect">
+            <a:avLst/>
+          </a:prstGeom>
+          <a:solidFill>
+            <a:srgbClr val="FFF3DF"/>
+          </a:solidFill>
+          <a:ln>
+            <a:noFill/>
+          </a:ln>
+        </p:spPr>
+        <p:style>
+          <a:lnRef idx="1">
+            <a:schemeClr val="accent1"/>
+          </a:lnRef>
+          <a:fillRef idx="3">
+            <a:schemeClr val="accent1"/>
+          </a:fillRef>
+          <a:effectRef idx="2">
+            <a:schemeClr val="accent1"/>
+          </a:effectRef>
+          <a:fontRef idx="minor">
+            <a:schemeClr val="lt1"/>
+          </a:fontRef>
+        </p:style>
+        <p:txBody>
+          <a:bodyPr rtlCol="0" anchor="ctr"/>
+          <a:lstStyle/>
+          <a:p>
+            <a:pPr algn="ctr"/>
+          </a:p>
+        </p:txBody>
+      </p:sp>
+      <p:sp>
+        <p:nvSpPr>
+          <p:cNvPr id="3" name="Rectangle 2"/>
+          <p:cNvSpPr/>
+          <p:nvPr/>
+        </p:nvSpPr>
+        <p:spPr>
+          <a:xfrm>
+            <a:off x="0" y="0"/>
+            <a:ext cx="146304" cy="6858000"/>
+          </a:xfrm>
+          <a:prstGeom prst="rect">
+            <a:avLst/>
+          </a:prstGeom>
+          <a:solidFill>
+            <a:srgbClr val="E0A02C"/>
+          </a:solidFill>
+          <a:ln>
+            <a:noFill/>
+          </a:ln>
+        </p:spPr>
+        <p:style>
+          <a:lnRef idx="1">
+            <a:schemeClr val="accent1"/>
+          </a:lnRef>
+          <a:fillRef idx="3">
+            <a:schemeClr val="accent1"/>
+          </a:fillRef>
+          <a:effectRef idx="2">
+            <a:schemeClr val="accent1"/>
+          </a:effectRef>
+          <a:fontRef idx="minor">
+            <a:schemeClr val="lt1"/>
+          </a:fontRef>
+        </p:style>
+        <p:txBody>
+          <a:bodyPr rtlCol="0" anchor="ctr"/>
+          <a:lstStyle/>
+          <a:p>
+            <a:pPr algn="ctr"/>
+          </a:p>
+        </p:txBody>
+      </p:sp>
+      <p:sp>
+        <p:nvSpPr>
+          <p:cNvPr id="4" name="TextBox 3"/>
+          <p:cNvSpPr txBox="1"/>
+          <p:nvPr/>
+        </p:nvSpPr>
+        <p:spPr>
+          <a:xfrm>
+            <a:off x="9082735" y="109728"/>
+            <a:ext cx="2834640" cy="384048"/>
+          </a:xfrm>
+          <a:prstGeom prst="rect">
+            <a:avLst/>
+          </a:prstGeom>
+          <a:noFill/>
+        </p:spPr>
+        <p:txBody>
+          <a:bodyPr wrap="square">
+            <a:spAutoFit/>
+          </a:bodyPr>
+          <a:lstStyle/>
+          <a:p>
+            <a:pPr algn="r"/>
+            <a:r>
+              <a:rPr sz="1400" b="1">
+                <a:solidFill>
+                  <a:srgbClr val="8A5400"/>
+                </a:solidFill>
+                <a:latin typeface="Leelawadee UI"/>
+                <a:ea typeface="Leelawadee UI"/>
+                <a:cs typeface="Leelawadee UI"/>
+              </a:rPr>
+              <a:t>🎬 สลับไปหน้าจอสาธิตสด</a:t>
+            </a:r>
+          </a:p>
+        </p:txBody>
+      </p:sp>
+      <p:sp>
+        <p:nvSpPr>
+          <p:cNvPr id="5" name="TextBox 4"/>
           <p:cNvSpPr txBox="1"/>
           <p:nvPr/>
         </p:nvSpPr>
@@ -12149,7 +12641,7 @@
             <a:r>
               <a:rPr sz="3600" b="1">
                 <a:solidFill>
-                  <a:srgbClr val="1F5FA8"/>
+                  <a:srgbClr val="8A5400"/>
                 </a:solidFill>
                 <a:latin typeface="Leelawadee UI"/>
                 <a:ea typeface="Leelawadee UI"/>
@@ -12162,7 +12654,7 @@
       </p:sp>
       <p:sp>
         <p:nvSpPr>
-          <p:cNvPr id="3" name="TextBox 2"/>
+          <p:cNvPr id="6" name="TextBox 5"/>
           <p:cNvSpPr txBox="1"/>
           <p:nvPr/>
         </p:nvSpPr>
@@ -12199,7 +12691,7 @@
       </p:sp>
       <p:sp>
         <p:nvSpPr>
-          <p:cNvPr id="4" name="TextBox 3"/>
+          <p:cNvPr id="7" name="TextBox 6"/>
           <p:cNvSpPr txBox="1"/>
           <p:nvPr/>
         </p:nvSpPr>
@@ -12236,7 +12728,7 @@
       </p:sp>
       <p:sp>
         <p:nvSpPr>
-          <p:cNvPr id="5" name="TextBox 4"/>
+          <p:cNvPr id="8" name="TextBox 7"/>
           <p:cNvSpPr txBox="1"/>
           <p:nvPr/>
         </p:nvSpPr>
@@ -12273,7 +12765,7 @@
       </p:sp>
       <p:sp>
         <p:nvSpPr>
-          <p:cNvPr id="6" name="TextBox 5"/>
+          <p:cNvPr id="9" name="TextBox 8"/>
           <p:cNvSpPr txBox="1"/>
           <p:nvPr/>
         </p:nvSpPr>
@@ -14718,7 +15210,130 @@
       <p:grpSpPr/>
       <p:sp>
         <p:nvSpPr>
-          <p:cNvPr id="2" name="TextBox 1"/>
+          <p:cNvPr id="2" name="Rectangle 1"/>
+          <p:cNvSpPr/>
+          <p:nvPr/>
+        </p:nvSpPr>
+        <p:spPr>
+          <a:xfrm>
+            <a:off x="0" y="0"/>
+            <a:ext cx="12191695" cy="6858000"/>
+          </a:xfrm>
+          <a:prstGeom prst="rect">
+            <a:avLst/>
+          </a:prstGeom>
+          <a:solidFill>
+            <a:srgbClr val="FFF3DF"/>
+          </a:solidFill>
+          <a:ln>
+            <a:noFill/>
+          </a:ln>
+        </p:spPr>
+        <p:style>
+          <a:lnRef idx="1">
+            <a:schemeClr val="accent1"/>
+          </a:lnRef>
+          <a:fillRef idx="3">
+            <a:schemeClr val="accent1"/>
+          </a:fillRef>
+          <a:effectRef idx="2">
+            <a:schemeClr val="accent1"/>
+          </a:effectRef>
+          <a:fontRef idx="minor">
+            <a:schemeClr val="lt1"/>
+          </a:fontRef>
+        </p:style>
+        <p:txBody>
+          <a:bodyPr rtlCol="0" anchor="ctr"/>
+          <a:lstStyle/>
+          <a:p>
+            <a:pPr algn="ctr"/>
+          </a:p>
+        </p:txBody>
+      </p:sp>
+      <p:sp>
+        <p:nvSpPr>
+          <p:cNvPr id="3" name="Rectangle 2"/>
+          <p:cNvSpPr/>
+          <p:nvPr/>
+        </p:nvSpPr>
+        <p:spPr>
+          <a:xfrm>
+            <a:off x="0" y="0"/>
+            <a:ext cx="146304" cy="6858000"/>
+          </a:xfrm>
+          <a:prstGeom prst="rect">
+            <a:avLst/>
+          </a:prstGeom>
+          <a:solidFill>
+            <a:srgbClr val="E0A02C"/>
+          </a:solidFill>
+          <a:ln>
+            <a:noFill/>
+          </a:ln>
+        </p:spPr>
+        <p:style>
+          <a:lnRef idx="1">
+            <a:schemeClr val="accent1"/>
+          </a:lnRef>
+          <a:fillRef idx="3">
+            <a:schemeClr val="accent1"/>
+          </a:fillRef>
+          <a:effectRef idx="2">
+            <a:schemeClr val="accent1"/>
+          </a:effectRef>
+          <a:fontRef idx="minor">
+            <a:schemeClr val="lt1"/>
+          </a:fontRef>
+        </p:style>
+        <p:txBody>
+          <a:bodyPr rtlCol="0" anchor="ctr"/>
+          <a:lstStyle/>
+          <a:p>
+            <a:pPr algn="ctr"/>
+          </a:p>
+        </p:txBody>
+      </p:sp>
+      <p:sp>
+        <p:nvSpPr>
+          <p:cNvPr id="4" name="TextBox 3"/>
+          <p:cNvSpPr txBox="1"/>
+          <p:nvPr/>
+        </p:nvSpPr>
+        <p:spPr>
+          <a:xfrm>
+            <a:off x="9082735" y="109728"/>
+            <a:ext cx="2834640" cy="384048"/>
+          </a:xfrm>
+          <a:prstGeom prst="rect">
+            <a:avLst/>
+          </a:prstGeom>
+          <a:noFill/>
+        </p:spPr>
+        <p:txBody>
+          <a:bodyPr wrap="square">
+            <a:spAutoFit/>
+          </a:bodyPr>
+          <a:lstStyle/>
+          <a:p>
+            <a:pPr algn="r"/>
+            <a:r>
+              <a:rPr sz="1400" b="1">
+                <a:solidFill>
+                  <a:srgbClr val="8A5400"/>
+                </a:solidFill>
+                <a:latin typeface="Leelawadee UI"/>
+                <a:ea typeface="Leelawadee UI"/>
+                <a:cs typeface="Leelawadee UI"/>
+              </a:rPr>
+              <a:t>🎬 สลับไปหน้าจอสาธิตสด</a:t>
+            </a:r>
+          </a:p>
+        </p:txBody>
+      </p:sp>
+      <p:sp>
+        <p:nvSpPr>
+          <p:cNvPr id="5" name="TextBox 4"/>
           <p:cNvSpPr txBox="1"/>
           <p:nvPr/>
         </p:nvSpPr>
@@ -14742,7 +15357,7 @@
             <a:r>
               <a:rPr sz="3600" b="1">
                 <a:solidFill>
-                  <a:srgbClr val="1F5FA8"/>
+                  <a:srgbClr val="8A5400"/>
                 </a:solidFill>
                 <a:latin typeface="Leelawadee UI"/>
                 <a:ea typeface="Leelawadee UI"/>
@@ -14755,7 +15370,7 @@
       </p:sp>
       <p:sp>
         <p:nvSpPr>
-          <p:cNvPr id="3" name="TextBox 2"/>
+          <p:cNvPr id="6" name="TextBox 5"/>
           <p:cNvSpPr txBox="1"/>
           <p:nvPr/>
         </p:nvSpPr>
@@ -14792,7 +15407,7 @@
       </p:sp>
       <p:sp>
         <p:nvSpPr>
-          <p:cNvPr id="4" name="TextBox 3"/>
+          <p:cNvPr id="7" name="TextBox 6"/>
           <p:cNvSpPr txBox="1"/>
           <p:nvPr/>
         </p:nvSpPr>
@@ -14829,7 +15444,7 @@
       </p:sp>
       <p:sp>
         <p:nvSpPr>
-          <p:cNvPr id="5" name="TextBox 4"/>
+          <p:cNvPr id="8" name="TextBox 7"/>
           <p:cNvSpPr txBox="1"/>
           <p:nvPr/>
         </p:nvSpPr>
@@ -14866,7 +15481,7 @@
       </p:sp>
       <p:sp>
         <p:nvSpPr>
-          <p:cNvPr id="6" name="TextBox 5"/>
+          <p:cNvPr id="9" name="TextBox 8"/>
           <p:cNvSpPr txBox="1"/>
           <p:nvPr/>
         </p:nvSpPr>
@@ -16320,7 +16935,130 @@
       <p:grpSpPr/>
       <p:sp>
         <p:nvSpPr>
-          <p:cNvPr id="2" name="TextBox 1"/>
+          <p:cNvPr id="2" name="Rectangle 1"/>
+          <p:cNvSpPr/>
+          <p:nvPr/>
+        </p:nvSpPr>
+        <p:spPr>
+          <a:xfrm>
+            <a:off x="0" y="0"/>
+            <a:ext cx="12191695" cy="6858000"/>
+          </a:xfrm>
+          <a:prstGeom prst="rect">
+            <a:avLst/>
+          </a:prstGeom>
+          <a:solidFill>
+            <a:srgbClr val="FFF3DF"/>
+          </a:solidFill>
+          <a:ln>
+            <a:noFill/>
+          </a:ln>
+        </p:spPr>
+        <p:style>
+          <a:lnRef idx="1">
+            <a:schemeClr val="accent1"/>
+          </a:lnRef>
+          <a:fillRef idx="3">
+            <a:schemeClr val="accent1"/>
+          </a:fillRef>
+          <a:effectRef idx="2">
+            <a:schemeClr val="accent1"/>
+          </a:effectRef>
+          <a:fontRef idx="minor">
+            <a:schemeClr val="lt1"/>
+          </a:fontRef>
+        </p:style>
+        <p:txBody>
+          <a:bodyPr rtlCol="0" anchor="ctr"/>
+          <a:lstStyle/>
+          <a:p>
+            <a:pPr algn="ctr"/>
+          </a:p>
+        </p:txBody>
+      </p:sp>
+      <p:sp>
+        <p:nvSpPr>
+          <p:cNvPr id="3" name="Rectangle 2"/>
+          <p:cNvSpPr/>
+          <p:nvPr/>
+        </p:nvSpPr>
+        <p:spPr>
+          <a:xfrm>
+            <a:off x="0" y="0"/>
+            <a:ext cx="146304" cy="6858000"/>
+          </a:xfrm>
+          <a:prstGeom prst="rect">
+            <a:avLst/>
+          </a:prstGeom>
+          <a:solidFill>
+            <a:srgbClr val="E0A02C"/>
+          </a:solidFill>
+          <a:ln>
+            <a:noFill/>
+          </a:ln>
+        </p:spPr>
+        <p:style>
+          <a:lnRef idx="1">
+            <a:schemeClr val="accent1"/>
+          </a:lnRef>
+          <a:fillRef idx="3">
+            <a:schemeClr val="accent1"/>
+          </a:fillRef>
+          <a:effectRef idx="2">
+            <a:schemeClr val="accent1"/>
+          </a:effectRef>
+          <a:fontRef idx="minor">
+            <a:schemeClr val="lt1"/>
+          </a:fontRef>
+        </p:style>
+        <p:txBody>
+          <a:bodyPr rtlCol="0" anchor="ctr"/>
+          <a:lstStyle/>
+          <a:p>
+            <a:pPr algn="ctr"/>
+          </a:p>
+        </p:txBody>
+      </p:sp>
+      <p:sp>
+        <p:nvSpPr>
+          <p:cNvPr id="4" name="TextBox 3"/>
+          <p:cNvSpPr txBox="1"/>
+          <p:nvPr/>
+        </p:nvSpPr>
+        <p:spPr>
+          <a:xfrm>
+            <a:off x="9082735" y="109728"/>
+            <a:ext cx="2834640" cy="384048"/>
+          </a:xfrm>
+          <a:prstGeom prst="rect">
+            <a:avLst/>
+          </a:prstGeom>
+          <a:noFill/>
+        </p:spPr>
+        <p:txBody>
+          <a:bodyPr wrap="square">
+            <a:spAutoFit/>
+          </a:bodyPr>
+          <a:lstStyle/>
+          <a:p>
+            <a:pPr algn="r"/>
+            <a:r>
+              <a:rPr sz="1400" b="1">
+                <a:solidFill>
+                  <a:srgbClr val="8A5400"/>
+                </a:solidFill>
+                <a:latin typeface="Leelawadee UI"/>
+                <a:ea typeface="Leelawadee UI"/>
+                <a:cs typeface="Leelawadee UI"/>
+              </a:rPr>
+              <a:t>🎬 สลับไปหน้าจอสาธิตสด</a:t>
+            </a:r>
+          </a:p>
+        </p:txBody>
+      </p:sp>
+      <p:sp>
+        <p:nvSpPr>
+          <p:cNvPr id="5" name="TextBox 4"/>
           <p:cNvSpPr txBox="1"/>
           <p:nvPr/>
         </p:nvSpPr>
@@ -16344,7 +17082,7 @@
             <a:r>
               <a:rPr sz="3600" b="1">
                 <a:solidFill>
-                  <a:srgbClr val="1F5FA8"/>
+                  <a:srgbClr val="8A5400"/>
                 </a:solidFill>
                 <a:latin typeface="Leelawadee UI"/>
                 <a:ea typeface="Leelawadee UI"/>
@@ -16357,7 +17095,7 @@
       </p:sp>
       <p:sp>
         <p:nvSpPr>
-          <p:cNvPr id="3" name="TextBox 2"/>
+          <p:cNvPr id="6" name="TextBox 5"/>
           <p:cNvSpPr txBox="1"/>
           <p:nvPr/>
         </p:nvSpPr>
@@ -16394,7 +17132,7 @@
       </p:sp>
       <p:sp>
         <p:nvSpPr>
-          <p:cNvPr id="4" name="TextBox 3"/>
+          <p:cNvPr id="7" name="TextBox 6"/>
           <p:cNvSpPr txBox="1"/>
           <p:nvPr/>
         </p:nvSpPr>
@@ -16431,7 +17169,7 @@
       </p:sp>
       <p:sp>
         <p:nvSpPr>
-          <p:cNvPr id="5" name="TextBox 4"/>
+          <p:cNvPr id="8" name="TextBox 7"/>
           <p:cNvSpPr txBox="1"/>
           <p:nvPr/>
         </p:nvSpPr>
@@ -16468,7 +17206,7 @@
       </p:sp>
       <p:sp>
         <p:nvSpPr>
-          <p:cNvPr id="6" name="TextBox 5"/>
+          <p:cNvPr id="9" name="TextBox 8"/>
           <p:cNvSpPr txBox="1"/>
           <p:nvPr/>
         </p:nvSpPr>
@@ -16505,7 +17243,7 @@
       </p:sp>
       <p:sp>
         <p:nvSpPr>
-          <p:cNvPr id="7" name="TextBox 6"/>
+          <p:cNvPr id="10" name="TextBox 9"/>
           <p:cNvSpPr txBox="1"/>
           <p:nvPr/>
         </p:nvSpPr>
@@ -18983,7 +19721,130 @@
       <p:grpSpPr/>
       <p:sp>
         <p:nvSpPr>
-          <p:cNvPr id="2" name="TextBox 1"/>
+          <p:cNvPr id="2" name="Rectangle 1"/>
+          <p:cNvSpPr/>
+          <p:nvPr/>
+        </p:nvSpPr>
+        <p:spPr>
+          <a:xfrm>
+            <a:off x="0" y="0"/>
+            <a:ext cx="12191695" cy="6858000"/>
+          </a:xfrm>
+          <a:prstGeom prst="rect">
+            <a:avLst/>
+          </a:prstGeom>
+          <a:solidFill>
+            <a:srgbClr val="FFF3DF"/>
+          </a:solidFill>
+          <a:ln>
+            <a:noFill/>
+          </a:ln>
+        </p:spPr>
+        <p:style>
+          <a:lnRef idx="1">
+            <a:schemeClr val="accent1"/>
+          </a:lnRef>
+          <a:fillRef idx="3">
+            <a:schemeClr val="accent1"/>
+          </a:fillRef>
+          <a:effectRef idx="2">
+            <a:schemeClr val="accent1"/>
+          </a:effectRef>
+          <a:fontRef idx="minor">
+            <a:schemeClr val="lt1"/>
+          </a:fontRef>
+        </p:style>
+        <p:txBody>
+          <a:bodyPr rtlCol="0" anchor="ctr"/>
+          <a:lstStyle/>
+          <a:p>
+            <a:pPr algn="ctr"/>
+          </a:p>
+        </p:txBody>
+      </p:sp>
+      <p:sp>
+        <p:nvSpPr>
+          <p:cNvPr id="3" name="Rectangle 2"/>
+          <p:cNvSpPr/>
+          <p:nvPr/>
+        </p:nvSpPr>
+        <p:spPr>
+          <a:xfrm>
+            <a:off x="0" y="0"/>
+            <a:ext cx="146304" cy="6858000"/>
+          </a:xfrm>
+          <a:prstGeom prst="rect">
+            <a:avLst/>
+          </a:prstGeom>
+          <a:solidFill>
+            <a:srgbClr val="E0A02C"/>
+          </a:solidFill>
+          <a:ln>
+            <a:noFill/>
+          </a:ln>
+        </p:spPr>
+        <p:style>
+          <a:lnRef idx="1">
+            <a:schemeClr val="accent1"/>
+          </a:lnRef>
+          <a:fillRef idx="3">
+            <a:schemeClr val="accent1"/>
+          </a:fillRef>
+          <a:effectRef idx="2">
+            <a:schemeClr val="accent1"/>
+          </a:effectRef>
+          <a:fontRef idx="minor">
+            <a:schemeClr val="lt1"/>
+          </a:fontRef>
+        </p:style>
+        <p:txBody>
+          <a:bodyPr rtlCol="0" anchor="ctr"/>
+          <a:lstStyle/>
+          <a:p>
+            <a:pPr algn="ctr"/>
+          </a:p>
+        </p:txBody>
+      </p:sp>
+      <p:sp>
+        <p:nvSpPr>
+          <p:cNvPr id="4" name="TextBox 3"/>
+          <p:cNvSpPr txBox="1"/>
+          <p:nvPr/>
+        </p:nvSpPr>
+        <p:spPr>
+          <a:xfrm>
+            <a:off x="9082735" y="109728"/>
+            <a:ext cx="2834640" cy="384048"/>
+          </a:xfrm>
+          <a:prstGeom prst="rect">
+            <a:avLst/>
+          </a:prstGeom>
+          <a:noFill/>
+        </p:spPr>
+        <p:txBody>
+          <a:bodyPr wrap="square">
+            <a:spAutoFit/>
+          </a:bodyPr>
+          <a:lstStyle/>
+          <a:p>
+            <a:pPr algn="r"/>
+            <a:r>
+              <a:rPr sz="1400" b="1">
+                <a:solidFill>
+                  <a:srgbClr val="8A5400"/>
+                </a:solidFill>
+                <a:latin typeface="Leelawadee UI"/>
+                <a:ea typeface="Leelawadee UI"/>
+                <a:cs typeface="Leelawadee UI"/>
+              </a:rPr>
+              <a:t>🎬 สลับไปหน้าจอสาธิตสด</a:t>
+            </a:r>
+          </a:p>
+        </p:txBody>
+      </p:sp>
+      <p:sp>
+        <p:nvSpPr>
+          <p:cNvPr id="5" name="TextBox 4"/>
           <p:cNvSpPr txBox="1"/>
           <p:nvPr/>
         </p:nvSpPr>
@@ -19007,7 +19868,7 @@
             <a:r>
               <a:rPr sz="3600" b="1">
                 <a:solidFill>
-                  <a:srgbClr val="1F5FA8"/>
+                  <a:srgbClr val="8A5400"/>
                 </a:solidFill>
                 <a:latin typeface="Leelawadee UI"/>
                 <a:ea typeface="Leelawadee UI"/>
@@ -19020,7 +19881,7 @@
       </p:sp>
       <p:sp>
         <p:nvSpPr>
-          <p:cNvPr id="3" name="TextBox 2"/>
+          <p:cNvPr id="6" name="TextBox 5"/>
           <p:cNvSpPr txBox="1"/>
           <p:nvPr/>
         </p:nvSpPr>
@@ -19057,7 +19918,7 @@
       </p:sp>
       <p:sp>
         <p:nvSpPr>
-          <p:cNvPr id="4" name="TextBox 3"/>
+          <p:cNvPr id="7" name="TextBox 6"/>
           <p:cNvSpPr txBox="1"/>
           <p:nvPr/>
         </p:nvSpPr>
@@ -19094,7 +19955,7 @@
       </p:sp>
       <p:sp>
         <p:nvSpPr>
-          <p:cNvPr id="5" name="TextBox 4"/>
+          <p:cNvPr id="8" name="TextBox 7"/>
           <p:cNvSpPr txBox="1"/>
           <p:nvPr/>
         </p:nvSpPr>
@@ -19131,7 +19992,7 @@
       </p:sp>
       <p:sp>
         <p:nvSpPr>
-          <p:cNvPr id="6" name="TextBox 5"/>
+          <p:cNvPr id="9" name="TextBox 8"/>
           <p:cNvSpPr txBox="1"/>
           <p:nvPr/>
         </p:nvSpPr>
@@ -19168,7 +20029,7 @@
       </p:sp>
       <p:sp>
         <p:nvSpPr>
-          <p:cNvPr id="7" name="TextBox 6"/>
+          <p:cNvPr id="10" name="TextBox 9"/>
           <p:cNvSpPr txBox="1"/>
           <p:nvPr/>
         </p:nvSpPr>
@@ -20763,7 +21624,130 @@
       <p:grpSpPr/>
       <p:sp>
         <p:nvSpPr>
-          <p:cNvPr id="2" name="TextBox 1"/>
+          <p:cNvPr id="2" name="Rectangle 1"/>
+          <p:cNvSpPr/>
+          <p:nvPr/>
+        </p:nvSpPr>
+        <p:spPr>
+          <a:xfrm>
+            <a:off x="0" y="0"/>
+            <a:ext cx="12191695" cy="6858000"/>
+          </a:xfrm>
+          <a:prstGeom prst="rect">
+            <a:avLst/>
+          </a:prstGeom>
+          <a:solidFill>
+            <a:srgbClr val="FFF3DF"/>
+          </a:solidFill>
+          <a:ln>
+            <a:noFill/>
+          </a:ln>
+        </p:spPr>
+        <p:style>
+          <a:lnRef idx="1">
+            <a:schemeClr val="accent1"/>
+          </a:lnRef>
+          <a:fillRef idx="3">
+            <a:schemeClr val="accent1"/>
+          </a:fillRef>
+          <a:effectRef idx="2">
+            <a:schemeClr val="accent1"/>
+          </a:effectRef>
+          <a:fontRef idx="minor">
+            <a:schemeClr val="lt1"/>
+          </a:fontRef>
+        </p:style>
+        <p:txBody>
+          <a:bodyPr rtlCol="0" anchor="ctr"/>
+          <a:lstStyle/>
+          <a:p>
+            <a:pPr algn="ctr"/>
+          </a:p>
+        </p:txBody>
+      </p:sp>
+      <p:sp>
+        <p:nvSpPr>
+          <p:cNvPr id="3" name="Rectangle 2"/>
+          <p:cNvSpPr/>
+          <p:nvPr/>
+        </p:nvSpPr>
+        <p:spPr>
+          <a:xfrm>
+            <a:off x="0" y="0"/>
+            <a:ext cx="146304" cy="6858000"/>
+          </a:xfrm>
+          <a:prstGeom prst="rect">
+            <a:avLst/>
+          </a:prstGeom>
+          <a:solidFill>
+            <a:srgbClr val="E0A02C"/>
+          </a:solidFill>
+          <a:ln>
+            <a:noFill/>
+          </a:ln>
+        </p:spPr>
+        <p:style>
+          <a:lnRef idx="1">
+            <a:schemeClr val="accent1"/>
+          </a:lnRef>
+          <a:fillRef idx="3">
+            <a:schemeClr val="accent1"/>
+          </a:fillRef>
+          <a:effectRef idx="2">
+            <a:schemeClr val="accent1"/>
+          </a:effectRef>
+          <a:fontRef idx="minor">
+            <a:schemeClr val="lt1"/>
+          </a:fontRef>
+        </p:style>
+        <p:txBody>
+          <a:bodyPr rtlCol="0" anchor="ctr"/>
+          <a:lstStyle/>
+          <a:p>
+            <a:pPr algn="ctr"/>
+          </a:p>
+        </p:txBody>
+      </p:sp>
+      <p:sp>
+        <p:nvSpPr>
+          <p:cNvPr id="4" name="TextBox 3"/>
+          <p:cNvSpPr txBox="1"/>
+          <p:nvPr/>
+        </p:nvSpPr>
+        <p:spPr>
+          <a:xfrm>
+            <a:off x="9082735" y="109728"/>
+            <a:ext cx="2834640" cy="384048"/>
+          </a:xfrm>
+          <a:prstGeom prst="rect">
+            <a:avLst/>
+          </a:prstGeom>
+          <a:noFill/>
+        </p:spPr>
+        <p:txBody>
+          <a:bodyPr wrap="square">
+            <a:spAutoFit/>
+          </a:bodyPr>
+          <a:lstStyle/>
+          <a:p>
+            <a:pPr algn="r"/>
+            <a:r>
+              <a:rPr sz="1400" b="1">
+                <a:solidFill>
+                  <a:srgbClr val="8A5400"/>
+                </a:solidFill>
+                <a:latin typeface="Leelawadee UI"/>
+                <a:ea typeface="Leelawadee UI"/>
+                <a:cs typeface="Leelawadee UI"/>
+              </a:rPr>
+              <a:t>🎬 สลับไปหน้าจอสาธิตสด</a:t>
+            </a:r>
+          </a:p>
+        </p:txBody>
+      </p:sp>
+      <p:sp>
+        <p:nvSpPr>
+          <p:cNvPr id="5" name="TextBox 4"/>
           <p:cNvSpPr txBox="1"/>
           <p:nvPr/>
         </p:nvSpPr>
@@ -20787,7 +21771,7 @@
             <a:r>
               <a:rPr sz="3600" b="1">
                 <a:solidFill>
-                  <a:srgbClr val="1F5FA8"/>
+                  <a:srgbClr val="8A5400"/>
                 </a:solidFill>
                 <a:latin typeface="Leelawadee UI"/>
                 <a:ea typeface="Leelawadee UI"/>
@@ -20800,7 +21784,7 @@
       </p:sp>
       <p:sp>
         <p:nvSpPr>
-          <p:cNvPr id="3" name="TextBox 2"/>
+          <p:cNvPr id="6" name="TextBox 5"/>
           <p:cNvSpPr txBox="1"/>
           <p:nvPr/>
         </p:nvSpPr>
@@ -20837,7 +21821,7 @@
       </p:sp>
       <p:sp>
         <p:nvSpPr>
-          <p:cNvPr id="4" name="TextBox 3"/>
+          <p:cNvPr id="7" name="TextBox 6"/>
           <p:cNvSpPr txBox="1"/>
           <p:nvPr/>
         </p:nvSpPr>
@@ -20874,7 +21858,7 @@
       </p:sp>
       <p:sp>
         <p:nvSpPr>
-          <p:cNvPr id="5" name="TextBox 4"/>
+          <p:cNvPr id="8" name="TextBox 7"/>
           <p:cNvSpPr txBox="1"/>
           <p:nvPr/>
         </p:nvSpPr>
@@ -20911,7 +21895,7 @@
       </p:sp>
       <p:sp>
         <p:nvSpPr>
-          <p:cNvPr id="6" name="TextBox 5"/>
+          <p:cNvPr id="9" name="TextBox 8"/>
           <p:cNvSpPr txBox="1"/>
           <p:nvPr/>
         </p:nvSpPr>

--- a/materials/week7/w7-slides.pptx
+++ b/materials/week7/w7-slides.pptx
@@ -568,7 +568,7 @@
           <a:lstStyle/>
           <a:p>
             <a:r>
-              <a:t>ทักชื่อคนที่เข้ามาก่อน 2–3 คน แล้วเปิดเลยว่า "สัปดาห์ที่แล้วระบบของกลุ่มคุณเริ่มมีความจำ แต่มันอ่านได้อย่างเดียว กรอกอะไรใหม่ยังไม่บันทึกจริง วันนี้เราทำให้ครบ แล้วส่งมันออกสู่โลกเลยครับ เที่ยงนี้ FixIt จะมี URL จริงที่ทุกคนเปิดตามได้"</a:t>
+              <a:t>ทักชื่อคนที่เข้ามาก่อน 2–3 คน แล้วเปิดเลยว่า "สัปดาห์ที่แล้วระบบของคุณเริ่มมีความจำ แต่มันอ่านได้อย่างเดียว กรอกอะไรใหม่ยังไม่บันทึกจริง วันนี้เราทำให้ครบ แล้วส่งมันออกสู่โลกเลยครับ เที่ยงนี้ FixIt จะมี URL จริงที่ทุกคนเปิดตามได้"</a:t>
             </a:r>
           </a:p>
         </p:txBody>
@@ -1758,7 +1758,7 @@
           <a:lstStyle/>
           <a:p>
             <a:r>
-              <a:t>ให้ห้องพิมพ์ 🎉 ในแชท · พูดว่า "นี่คือประโยคเกณฑ์ผ่านของสัปดาห์นี้ครับ บ่ายนี้ Checkpoint 2 ของกลุ่มคุณคือประโยคนี้เป๊ะ ๆ กับโครงงานของกลุ่มเอง"</a:t>
+              <a:t>ให้ห้องพิมพ์ 🎉 ในแชท · พูดว่า "นี่คือประโยคเกณฑ์ผ่านของสัปดาห์นี้ครับ บ่ายนี้ Checkpoint 2 ของคุณคือประโยคนี้เป๊ะ ๆ กับหัวข้อของตัวเอง"</a:t>
             </a:r>
           </a:p>
         </p:txBody>
@@ -1828,7 +1828,7 @@
           <a:lstStyle/>
           <a:p>
             <a:r>
-              <a:t>ถามห้องว่า "ในโครงงานของกลุ่มคุณ ตัว C คือปุ่มอะไร" ให้ตอบในแชทกลุ่มละ 1 คำตอบ · อ่านดัง ๆ 2–3 อัน แล้วประกาศพัก</a:t>
+              <a:t>ถามห้องว่า "ในหัวข้อของคุณ ตัว C คือปุ่มอะไร" ให้ตอบในแชทคนละ 1 คำตอบ · อ่านดัง ๆ 2–3 อัน แล้วประกาศพัก</a:t>
             </a:r>
           </a:p>
         </p:txBody>
@@ -1898,7 +1898,7 @@
           <a:lstStyle/>
           <a:p>
             <a:r>
-              <a:t>ประกาศเวลากลับให้ชัด ตั้งนาฬิกาจับเวลาแชร์บนจอ · พูดว่า "ครึ่งหลังคือเรื่องใหม่ทั้งหมด ล็อกอิน กุญแจ ทีม แล้วก็ออกออนไลน์ พักสมองจริง ๆ นะครับ"</a:t>
+              <a:t>ประกาศเวลากลับให้ชัด ตั้งนาฬิกาจับเวลาแชร์บนจอ · พูดว่า "ครึ่งหลังคือเรื่องใหม่ทั้งหมด ล็อกอิน กุญแจ แล้วก็ออกออนไลน์ พักสมองจริง ๆ นะครับ"</a:t>
             </a:r>
           </a:p>
         </p:txBody>
@@ -2038,7 +2038,7 @@
           <a:lstStyle/>
           <a:p>
             <a:r>
-              <a:t>หยิบ Persona ของ FixIt มาโยง "เดือนที่ 1 เราวาดไว้แล้วว่ามีผู้แจ้ง ช่างซ่อม ผู้ดูแล วันนี้สามคนนี้จะได้ล็อกอินเข้าระบบจริง" · ถามห้องว่าโครงงานของกลุ่มคุณมีผู้ใช้กี่แบบ ให้นึกไว้ในใจ</a:t>
+              <a:t>หยิบ Persona ของ FixIt มาโยง "เดือนที่ 1 เราวาดไว้แล้วว่ามีผู้แจ้ง ช่างซ่อม ผู้ดูแล วันนี้สามคนนี้จะได้ล็อกอินเข้าระบบจริง" · ถามห้องว่าหัวข้อของคุณมีผู้ใช้กี่แบบ ให้นึกไว้ในใจ</a:t>
             </a:r>
           </a:p>
         </p:txBody>
@@ -2108,7 +2108,7 @@
           <a:lstStyle/>
           <a:p>
             <a:r>
-              <a:t>หยุด 3 วินาที แล้วพูดว่า "ประโยคนี้คือความคิดเดียวของวันนี้ครับ เย็นนี้ระบบของกลุ่มคุณจะบันทึก แก้ ลบ ได้จริง รู้ว่าใครล็อกอินอยู่ และมี URL ที่คนอื่นเปิดได้"</a:t>
+              <a:t>หยุด 3 วินาที แล้วพูดว่า "ประโยคนี้คือความคิดเดียวของวันนี้ครับ เย็นนี้ระบบของคุณจะบันทึก แก้ ลบ ได้จริง รู้ว่าใครล็อกอินอยู่ และมี URL ที่คนอื่นเปิดได้"</a:t>
             </a:r>
           </a:p>
         </p:txBody>
@@ -2878,7 +2878,7 @@
           <a:lstStyle/>
           <a:p>
             <a:r>
-              <a:t>ชี้ข้อสองแล้วพูดว่า "ข้อนี้คือเกณฑ์ผ่านของสัปดาห์นี้ครับ ผมจะถามทุกกลุ่มตอนตรวจงานด้วยประโยคเดียว กรอก ปิด เปิดใหม่ ยังอยู่ไหม" · ย้ำว่าสี่ข้อนี้คือของจับต้องได้ ตอนบ่ายกลุ่มทำกับโครงงานตัวเอง</a:t>
+              <a:t>ชี้ข้อสองแล้วพูดว่า "ข้อนี้คือเกณฑ์ผ่านของสัปดาห์นี้ครับ ผมจะถามทุกคนตอนตรวจงานด้วยประโยคเดียว กรอก ปิด เปิดใหม่ ยังอยู่ไหม" · ย้ำว่าสี่ข้อนี้คือของจับต้องได้ ตอนบ่ายทำกับ LeaveEasy แล้วการบ้านทำกับหัวข้อตัวเอง</a:t>
             </a:r>
           </a:p>
         </p:txBody>
@@ -3158,7 +3158,7 @@
           <a:lstStyle/>
           <a:p>
             <a:r>
-              <a:t>พูดว่า "ช่วงนี้ 25 นาที และเป็นของใหม่จริงของวันนี้ครับ ที่ผ่านมากลุ่มคุณผลัดกันพิมพ์บนเครื่องเดียว บ่ายนี้เป็นครั้งแรกที่ทุกคนจะแก้ repo เดียวกันจากคนละเครื่อง ผมสอนตรงนี้เพราะอีกสองชั่วโมงคุณได้ใช้ทันที"</a:t>
+              <a:t>พูดว่า "ช่วงนี้ 25 นาที และเป็นของใหม่จริงของวันนี้ครับ บ่ายนี้เป็นครั้งแรกที่โค้ดของคุณจะไปอยู่บน GitHub และเป็นครั้งแรกที่โค้ดสองที่อาจไม่ตรงกัน ผมสอนตรงนี้เพราะอีกสองชั่วโมงคุณได้ใช้ทันที"</a:t>
             </a:r>
           </a:p>
         </p:txBody>
@@ -3228,7 +3228,7 @@
           <a:lstStyle/>
           <a:p>
             <a:r>
-              <a:t>ย้ำข้อสองหนัก ๆ "ผมเปิดประวัติ repo ดูได้ว่าใครพิมพ์บ้าง และผมดูทุกสัปดาห์ ไม่ใช่รอตอนจบ คนที่ไม่มี commit เลยจะตอบคำถามตอน Sprint Review ไม่ได้ และนั่นวัดเป็นรายบุคคล"</a:t>
+              <a:t>ย้ำข้อสองหนัก ๆ "ผมเปิดประวัติ repo ดูได้ว่าใครพิมพ์บ้าง และผมดูทุกสัปดาห์ ไม่ใช่รอตอนจบ" · ข้อสี่คือเหตุผลของช่วงนี้ — ตั้งแต่วันนี้โค้ดอยู่ทั้งในเครื่องและบน GitHub</a:t>
             </a:r>
           </a:p>
         </p:txBody>
@@ -3368,7 +3368,7 @@
           <a:lstStyle/>
           <a:p>
             <a:r>
-              <a:t>เปรียบว่า "GitHub เหมือนแฟ้มกลางของทีม ก่อนเริ่มงานต้องหยิบแฟ้มเวอร์ชันล่าสุดมาก่อน ทำเสร็จต้องเอาไปคืนแฟ้มกลาง ถ้าใครทำงานบนเวอร์ชันเก่า เดี๋ยวจะไปทับของเพื่อน"</a:t>
+              <a:t>เปรียบว่า "GitHub เหมือนแฟ้มกลางของโปรเจกต์ ก่อนเริ่มงานต้องหยิบแฟ้มเวอร์ชันล่าสุดมาก่อน ทำเสร็จต้องเอาไปคืนแฟ้มกลาง ถ้าใครทำงานบนเวอร์ชันเก่า เดี๋ยวจะไปทับของเพื่อน"</a:t>
             </a:r>
           </a:p>
         </p:txBody>
@@ -3438,7 +3438,7 @@
           <a:lstStyle/>
           <a:p>
             <a:r>
-              <a:t>อ่านออกเสียงทีละข้อ แล้วพูดว่า "สามข้อนี้กันปัญหาได้เกือบร้อยเปอร์เซ็นต์ครับ ปัญหางานชนกันเกิดจากการละเมิดข้อใดข้อหนึ่งในนี้เสมอ" · บอกว่าใบงานบ่ายนี้บังคับข้อ 1 ไว้ในทุกจุดหมุนคีย์บอร์ด</a:t>
+              <a:t>อ่านออกเสียงทีละข้อ แล้วพูดว่า "สามข้อนี้กันปัญหาได้เกือบร้อยเปอร์เซ็นต์ครับ ปัญหางานชนกันเกิดจากการละเมิดข้อใดข้อหนึ่งในนี้เสมอ" · บอกว่าบ่ายนี้จะให้ซ้อมทำให้ชนกันเองแล้วกู้ · และทักษะนี้คือของที่ Module 3 ใช้ตอนทำงานหลายคน</a:t>
             </a:r>
           </a:p>
         </p:txBody>
@@ -3508,7 +3508,7 @@
           <a:lstStyle/>
           <a:p>
             <a:r>
-              <a:t>ชี้แถบบนทีละกล่อง "สองคนแก้ไฟล์เดียวกันโดยไม่บอกกัน คนแรก push ผ่าน คนที่สอง push ถูกปฏิเสธ" · หยุดที่กล่องเข้ม "ตรงนี้คือจุดที่คนตกใจที่สุด เห็นคำว่า conflict แล้วคิดว่างานหาย" · ไล่แถบล่าง "แถบล่างคือบ่ายนี้ของกลุ่มคุณ ถ้าตามกติกาสามข้อ จะไม่เจอแถบบนเลย"</a:t>
+              <a:t>ชี้แถบบนทีละกล่อง "แก้บน GitHub ทีหนึ่ง แก้ในเครื่องอีกทีหนึ่ง พอ pull ลงมาก็ชนกัน" · หยุดที่กล่องเข้ม "ตรงนี้คือจุดที่คนตกใจที่สุด เห็นคำว่า conflict แล้วคิดว่างานหาย" · ไล่แถบล่าง "แถบล่างคือบ่ายนี้ของคุณ ถ้าตามกติกาสามข้อ จะไม่เจอแถบบนเลย"</a:t>
             </a:r>
           </a:p>
         </p:txBody>
@@ -3648,7 +3648,7 @@
           <a:lstStyle/>
           <a:p>
             <a:r>
-              <a:t>ไล่ทีละบรรทัด บอกว่า "วันนี้เรื่องเยอะที่สุดของเดือน แต่ทุกเรื่องต่อกันเป็นเส้นเดียว ทำระบบให้ครบ ใส่กุญแจ แล้วออกออนไลน์" · ชี้ดาวสองดวง "CRUD คือหัวใจ ส่วน Git หลายคนคือของใหม่จริงของวันนี้ เพราะบ่ายนี้ทั้งกลุ่มจะแก้ repo เดียวกันเป็นครั้งแรก"</a:t>
+              <a:t>ไล่ทีละบรรทัด บอกว่า "วันนี้เรื่องเยอะที่สุดของเดือน แต่ทุกเรื่องต่อกันเป็นเส้นเดียว ทำระบบให้ครบ ใส่กุญแจ แล้วออกออนไลน์" · ชี้ดาวสองดวง "CRUD คือหัวใจ ส่วน Git หลายคนคือของใหม่จริงของวันนี้ เพราะบ่ายนี้ทุกคนจะแก้ repo เดียวกันเป็นครั้งแรก"</a:t>
             </a:r>
           </a:p>
         </p:txBody>
@@ -4278,7 +4278,7 @@
           <a:lstStyle/>
           <a:p>
             <a:r>
-              <a:t>ให้ห้องพิมพ์ 🎉 ในแชท · พูดว่า "จากภาพนิ่งเมื่อสองสัปดาห์ก่อน ตอนนี้มันคือระบบจริงที่มีที่อยู่บนอินเทอร์เน็ต บ่ายนี้กลุ่มคุณจะได้ความรู้สึกนี้กับโครงงานของกลุ่มเอง แล้วแลก URL กับกลุ่มอื่นด้วย"</a:t>
+              <a:t>ให้ห้องพิมพ์ 🎉 ในแชท · พูดว่า "จากภาพนิ่งเมื่อสองสัปดาห์ก่อน ตอนนี้มันคือระบบจริงที่มีที่อยู่บนอินเทอร์เน็ต บ่ายนี้คุณจะได้ความรู้สึกนี้กับ LeaveEasy ของตัวเอง แล้วแลก URL กับเพื่อนด้วย"</a:t>
             </a:r>
           </a:p>
         </p:txBody>
@@ -4698,7 +4698,7 @@
           <a:lstStyle/>
           <a:p>
             <a:r>
-              <a:t>ชี้ทีละแถวแล้วถามคำถามประจำหลักสูตร "FixIt แจ้งซ่อมใหม่ LeaveEasy ยื่นใบลาใหม่ แล้วโครงงานของกลุ่มคุณ ตัว C คือปุ่มอะไร" ให้ทุกกลุ่มพิมพ์คำตอบในแชทก่อนพักเที่ยง · ย้ำว่าช่องขวาสุดกลุ่มเติมเองในใบงาน ห้ามลอกช่องกลาง</a:t>
+              <a:t>ชี้ทีละแถวแล้วถามคำถามประจำหลักสูตร "FixIt แจ้งซ่อมใหม่ LeaveEasy ยื่นใบลาใหม่ แล้วหัวข้อของคุณ ตัว C คือปุ่มอะไร" ให้ทุกคนพิมพ์คำตอบในแชทก่อนพักเที่ยง · ย้ำว่าช่องขวาสุดเติมเองในใบการบ้าน ห้ามลอกช่องกลาง</a:t>
             </a:r>
           </a:p>
         </p:txBody>
@@ -4768,7 +4768,7 @@
           <a:lstStyle/>
           <a:p>
             <a:r>
-              <a:t>ชี้แถว B แล้วพูดว่า "ถ้าเวลาไม่พอ ให้ B เสร็จเป็นอย่างน้อยครับ ลำดับตัดคือ B ก่อน C ก่อน D ส่วน deploy ยกไป Consult วันอาทิตย์ได้ แต่ห้าม deploy โดยไม่มีกฎขั้นต่ำเด็ดขาด" · ย้ำว่าบ่ายนี้ทำโครงงานของกลุ่มเอง มีเฉลย LeaveEasy กำกับทุกขั้นในใบงาน</a:t>
+              <a:t>ชี้แถว B แล้วพูดว่า "ถ้าเวลาไม่พอ ให้ B เสร็จเป็นอย่างน้อยครับ ลำดับตัดคือ B ก่อน C ก่อน D ส่วน deploy ยกไป Consult วันอาทิตย์ได้ แต่ห้าม deploy โดยไม่มีกฎขั้นต่ำเด็ดขาด" · ย้ำว่าบ่ายนี้ทุกคนทำ LeaveEasy เหมือนกัน แล้วการบ้านทำซ้ำกับหัวข้อของตัวเอง</a:t>
             </a:r>
           </a:p>
         </p:txBody>
@@ -4838,7 +4838,7 @@
           <a:lstStyle/>
           <a:p>
             <a:r>
-              <a:t>ชี้ข้อแรก "สัปดาห์นี้การหมุนคีย์บอร์ดคือการเปลี่ยนเครื่องจริง ๆ เพราะ repo อยู่บน GitHub แล้ว คนรับไม้ต้องดึงงานล่าสุดก่อนเสมอ นี่คือกติกาข้อ 1 ของทีมที่เพิ่งเรียน" · บอกว่าคิวถามกลางและธนาคารคำตอบสด ลิงก์อยู่ในแชทแล้ว</a:t>
+              <a:t>ชี้ข้อแรก "คนนำจอเปลี่ยนทุก Checkpoint แต่ทุกคนทำบนเครื่องตัวเองตลอด" · ย้ำ git pull ก่อนเริ่มงานทุกครั้ง เพราะ repo อยู่บน GitHub แล้ว · บอกว่าคิวถามกลางและธนาคารคำตอบสด ลิงก์อยู่ในแชทแล้ว</a:t>
             </a:r>
           </a:p>
         </p:txBody>
@@ -4908,7 +4908,7 @@
           <a:lstStyle/>
           <a:p>
             <a:r>
-              <a:t>ปิดคาบด้วยคำถามนี้ทุกสัปดาห์ ให้ตอบในแชท 1 บรรทัดก่อนไปพักเที่ยง เช่น "ตัว C ของกลุ่มผมคือปุ่มเพิ่มเมนูอาหาร" · บอกเวลากลับมา 13:00 ให้ชัด และให้เปิดใบงานอ่านล่วงหน้าระหว่างกินข้าวได้ ลิงก์อยู่ในแชทแล้ว</a:t>
+              <a:t>ปิดคาบด้วยคำถามนี้ทุกสัปดาห์ ให้ตอบในแชท 1 บรรทัดก่อนไปพักเที่ยง เช่น "ตัว C ของผมคือปุ่มเพิ่มเมนูอาหาร" · บอกเวลากลับมา 13:00 ให้ชัด และให้เปิดใบงานอ่านล่วงหน้าระหว่างกินข้าวได้ ลิงก์อยู่ในแชทแล้ว</a:t>
             </a:r>
           </a:p>
         </p:txBody>
@@ -5118,7 +5118,7 @@
           <a:lstStyle/>
           <a:p>
             <a:r>
-              <a:t>ชี้ข้อสองแล้วพูดว่า "แบบโฟลเดอร์บนกระดาษที่กลุ่มคุณวาดสัปดาห์ที่แล้ว วันนี้ได้ย้ายเข้าบ้านถาวรตรงนี้ AI จะได้สะกดชื่อช่องข้อมูลชุดเดียวกันทุกครั้ง" · ข้อสาม "API List คือรายการว่าระบบทำอะไรได้บ้าง เขียนไว้แล้วใน Tech Spec สัปดาห์ที่ 5 คัดมาวางได้เลย"</a:t>
+              <a:t>ชี้ข้อสองแล้วพูดว่า "แบบโฟลเดอร์บนกระดาษที่คุณวาดสัปดาห์ที่แล้ว วันนี้ได้ย้ายเข้าบ้านถาวรตรงนี้ AI จะได้สะกดชื่อช่องข้อมูลชุดเดียวกันทุกครั้ง" · ข้อสาม "API List คือรายการว่าระบบทำอะไรได้บ้าง เขียนไว้แล้วใน Tech Spec สัปดาห์ที่ 5 คัดมาวางได้เลย"</a:t>
             </a:r>
           </a:p>
         </p:txBody>
@@ -17552,7 +17552,7 @@
                 <a:ea typeface="Leelawadee UI"/>
                 <a:cs typeface="Leelawadee UI"/>
               </a:rPr>
-              <a:t>บ่ายนี้ทั้งกลุ่มแก้ repo เดียวกันเป็นครั้งแรก</a:t>
+              <a:t>บ่ายนี้โค้ดของคุณขึ้น GitHub เป็นครั้งแรก</a:t>
             </a:r>
           </a:p>
         </p:txBody>
@@ -17566,6 +17566,43 @@
         <p:spPr>
           <a:xfrm>
             <a:off x="822960" y="2075688"/>
+            <a:ext cx="10545775" cy="1029208"/>
+          </a:xfrm>
+          <a:prstGeom prst="rect">
+            <a:avLst/>
+          </a:prstGeom>
+          <a:noFill/>
+        </p:spPr>
+        <p:txBody>
+          <a:bodyPr wrap="square">
+            <a:spAutoFit/>
+          </a:bodyPr>
+          <a:lstStyle/>
+          <a:p>
+            <a:pPr algn="l"/>
+            <a:r>
+              <a:rPr sz="2600" b="0">
+                <a:solidFill>
+                  <a:srgbClr val="1A1A1A"/>
+                </a:solidFill>
+                <a:latin typeface="Leelawadee UI"/>
+                <a:ea typeface="Leelawadee UI"/>
+                <a:cs typeface="Leelawadee UI"/>
+              </a:rPr>
+              <a:t>• บ่ายนี้โค้ดของคุณจะขึ้น GitHub — ที่เก็บงานบนอินเทอร์เน็ต</a:t>
+            </a:r>
+          </a:p>
+        </p:txBody>
+      </p:sp>
+      <p:sp>
+        <p:nvSpPr>
+          <p:cNvPr id="4" name="TextBox 3"/>
+          <p:cNvSpPr txBox="1"/>
+          <p:nvPr/>
+        </p:nvSpPr>
+        <p:spPr>
+          <a:xfrm>
+            <a:off x="822960" y="3159760"/>
             <a:ext cx="10545775" cy="560324"/>
           </a:xfrm>
           <a:prstGeom prst="rect">
@@ -17589,44 +17626,7 @@
                 <a:ea typeface="Leelawadee UI"/>
                 <a:cs typeface="Leelawadee UI"/>
               </a:rPr>
-              <a:t>• บ่ายนี้โค้ดของกลุ่มจะขึ้น GitHub — repo กลางของทีม</a:t>
-            </a:r>
-          </a:p>
-        </p:txBody>
-      </p:sp>
-      <p:sp>
-        <p:nvSpPr>
-          <p:cNvPr id="4" name="TextBox 3"/>
-          <p:cNvSpPr txBox="1"/>
-          <p:nvPr/>
-        </p:nvSpPr>
-        <p:spPr>
-          <a:xfrm>
-            <a:off x="822960" y="2690876"/>
-            <a:ext cx="10545775" cy="1029208"/>
-          </a:xfrm>
-          <a:prstGeom prst="rect">
-            <a:avLst/>
-          </a:prstGeom>
-          <a:noFill/>
-        </p:spPr>
-        <p:txBody>
-          <a:bodyPr wrap="square">
-            <a:spAutoFit/>
-          </a:bodyPr>
-          <a:lstStyle/>
-          <a:p>
-            <a:pPr algn="l"/>
-            <a:r>
-              <a:rPr sz="2600" b="0">
-                <a:solidFill>
-                  <a:srgbClr val="1A1A1A"/>
-                </a:solidFill>
-                <a:latin typeface="Leelawadee UI"/>
-                <a:ea typeface="Leelawadee UI"/>
-                <a:cs typeface="Leelawadee UI"/>
-              </a:rPr>
-              <a:t>• 👤 ทุกคนต้อง commit ในชื่อตัวเอง — สัปดาห์นี้เริ่มนับจริง</a:t>
+              <a:t>• 👤 ทุกคน commit ในชื่อตัวเอง — สัปดาห์นี้เริ่มนับจริง</a:t>
             </a:r>
           </a:p>
         </p:txBody>
@@ -17663,7 +17663,7 @@
                 <a:ea typeface="Leelawadee UI"/>
                 <a:cs typeface="Leelawadee UI"/>
               </a:rPr>
-              <a:t>• ไม่มี commit เลยทั้ง Module = ไม่ผ่านรายบุคคล</a:t>
+              <a:t>• ไม่มี commit เลยทั้ง Module = ไม่ผ่าน</a:t>
             </a:r>
           </a:p>
         </p:txBody>
@@ -17700,7 +17700,7 @@
                 <a:ea typeface="Leelawadee UI"/>
                 <a:cs typeface="Leelawadee UI"/>
               </a:rPr>
-              <a:t>• ทำงานพร้อมกันได้ แต่ต้องมีกติกา</a:t>
+              <a:t>• โค้ดอยู่สองที่แล้ว — ต้องมีกติกากันไม่ให้ทับกัน</a:t>
             </a:r>
           </a:p>
         </p:txBody>
@@ -18300,7 +18300,7 @@
                 <a:ea typeface="Leelawadee UI"/>
                 <a:cs typeface="Leelawadee UI"/>
               </a:rPr>
-              <a:t>กติกา 3 ข้อของทีม — ท่องให้ขึ้นใจ</a:t>
+              <a:t>กติกา 3 ข้อส่วนกลาง — ท่องให้ขึ้นใจ</a:t>
             </a:r>
           </a:p>
         </p:txBody>
@@ -18374,7 +18374,7 @@
                 <a:ea typeface="Leelawadee UI"/>
                 <a:cs typeface="Leelawadee UI"/>
               </a:rPr>
-              <a:t>• 2️⃣ แบ่งกันคนละไฟล์ — ต่างคนต่างหน้า ต่างไฟล์</a:t>
+              <a:t>• 2️⃣ push ทุกครั้งที่งานเสร็จก้อนหนึ่ง — อย่าดองไว้</a:t>
             </a:r>
           </a:p>
         </p:txBody>
@@ -18411,7 +18411,7 @@
                 <a:ea typeface="Leelawadee UI"/>
                 <a:cs typeface="Leelawadee UI"/>
               </a:rPr>
-              <a:t>• 3️⃣ บอกกันก่อนแก้ไฟล์เดียวกัน — ทักในแชทกลุ่ม 1 บรรทัด</a:t>
+              <a:t>• 3️⃣ แก้ที่เดียว — อย่าแก้ทั้งบน GitHub และในเครื่องพร้อมกัน</a:t>
             </a:r>
           </a:p>
         </p:txBody>
@@ -18583,7 +18583,7 @@
                 <a:ea typeface="Leelawadee UI"/>
                 <a:cs typeface="Leelawadee UI"/>
               </a:rPr>
-              <a:t>❌ ต่างคนต่างแก้ไฟล์เดียวกัน</a:t>
+              <a:t>❌ แก้สองที่พร้อมกัน</a:t>
             </a:r>
           </a:p>
         </p:txBody>
@@ -18640,7 +18640,7 @@
                 <a:ea typeface="Leelawadee UI"/>
                 <a:cs typeface="Leelawadee UI"/>
               </a:rPr>
-              <a:t>แก้พร้อมกัน</a:t>
+              <a:t>แก้บน GitHub</a:t>
             </a:r>
           </a:p>
         </p:txBody>
@@ -18741,7 +18741,7 @@
                 <a:ea typeface="Leelawadee UI"/>
                 <a:cs typeface="Leelawadee UI"/>
               </a:rPr>
-              <a:t>push ชนกัน</a:t>
+              <a:t>แก้ในเครื่อง</a:t>
             </a:r>
           </a:p>
         </p:txBody>
@@ -18842,7 +18842,7 @@
                 <a:ea typeface="Leelawadee UI"/>
                 <a:cs typeface="Leelawadee UI"/>
               </a:rPr>
-              <a:t>งานทับกัน</a:t>
+              <a:t>pull แล้วชน</a:t>
             </a:r>
           </a:p>
         </p:txBody>
@@ -19081,7 +19081,7 @@
                 <a:ea typeface="Leelawadee UI"/>
                 <a:cs typeface="Leelawadee UI"/>
               </a:rPr>
-              <a:t>แบ่งคนละไฟล์</a:t>
+              <a:t>แก้ที่เดียว</a:t>
             </a:r>
           </a:p>
         </p:txBody>
@@ -19273,7 +19273,7 @@
                 <a:ea typeface="Leelawadee UI"/>
                 <a:cs typeface="Leelawadee UI"/>
               </a:rPr>
-              <a:t>เย็นนี้กลุ่มของคุณจะได้ 4 อย่างกลับไป</a:t>
+              <a:t>เย็นนี้คุณจะได้ 4 อย่างกลับไป</a:t>
             </a:r>
           </a:p>
         </p:txBody>
@@ -19421,7 +19421,7 @@
                 <a:ea typeface="Leelawadee UI"/>
                 <a:cs typeface="Leelawadee UI"/>
               </a:rPr>
-              <a:t>• 🌐 URL จริง ที่กลุ่มอื่นเปิดได้</a:t>
+              <a:t>• 🌐 URL จริง ที่เพื่อนเปิดได้</a:t>
             </a:r>
           </a:p>
         </p:txBody>
@@ -19948,7 +19948,7 @@
                 <a:ea typeface="Leelawadee UI"/>
                 <a:cs typeface="Leelawadee UI"/>
               </a:rPr>
-              <a:t>• สมมติเพื่อนร่วมทีมแก้ไฟล์บน GitHub</a:t>
+              <a:t>• สมมติว่ามีการแก้ไฟล์ไว้บน GitHub</a:t>
             </a:r>
           </a:p>
         </p:txBody>
@@ -20150,7 +20150,7 @@
                 <a:ea typeface="Leelawadee UI"/>
                 <a:cs typeface="Leelawadee UI"/>
               </a:rPr>
-              <a:t>• ท่องกติกา 3 ข้อของทีมได้</a:t>
+              <a:t>• ท่องกติกา 3 ข้อส่วนกลางได้</a:t>
             </a:r>
           </a:p>
         </p:txBody>
@@ -22911,7 +22911,7 @@
                 <a:ea typeface="Leelawadee UI"/>
                 <a:cs typeface="Leelawadee UI"/>
               </a:rPr>
-              <a:t>📦 สิ่งที่กลุ่มต้องส่งมอบสัปดาห์นี้</a:t>
+              <a:t>📦 สิ่งที่ต้องส่งมอบสัปดาห์นี้</a:t>
             </a:r>
           </a:p>
         </p:txBody>
@@ -23150,7 +23150,7 @@
                 <a:ea typeface="Leelawadee UI"/>
                 <a:cs typeface="Leelawadee UI"/>
               </a:rPr>
-              <a:t>ตารางเทียบ — แล้วของกลุ่มคุณล่ะ?</a:t>
+              <a:t>ตารางเทียบ — แล้วของคุณล่ะ?</a:t>
             </a:r>
           </a:p>
         </p:txBody>
@@ -23270,7 +23270,7 @@
                           <a:ea typeface="Leelawadee UI"/>
                           <a:cs typeface="Leelawadee UI"/>
                         </a:rPr>
-                        <a:t>👥 กลุ่มคุณ</a:t>
+                        <a:t>👥 คุณ</a:t>
                       </a:r>
                     </a:p>
                   </a:txBody>
@@ -23756,7 +23756,7 @@
         <p:spPr>
           <a:xfrm>
             <a:off x="822960" y="502920"/>
-            <a:ext cx="10545775" cy="804672"/>
+            <a:ext cx="10545775" cy="1408176"/>
           </a:xfrm>
           <a:prstGeom prst="rect">
             <a:avLst/>
@@ -23779,7 +23779,7 @@
                 <a:ea typeface="Leelawadee UI"/>
                 <a:cs typeface="Leelawadee UI"/>
               </a:rPr>
-              <a:t>Workshop บ่ายนี้ — 4 ส่วน 3 Checkpoint</a:t>
+              <a:t>Workshop บ่ายนี้ — LeaveEasy 4 ส่วน 4 Checkpoint</a:t>
             </a:r>
           </a:p>
         </p:txBody>
@@ -23793,7 +23793,7 @@
           <p:nvPr/>
         </p:nvGraphicFramePr>
         <p:xfrm>
-          <a:off x="822960" y="1472184"/>
+          <a:off x="822960" y="2075688"/>
           <a:ext cx="10545775" cy="2514600"/>
         </p:xfrm>
         <a:graphic>
@@ -23848,7 +23848,7 @@
                           <a:ea typeface="Leelawadee UI"/>
                           <a:cs typeface="Leelawadee UI"/>
                         </a:rPr>
-                        <a:t>ทำอะไร</a:t>
+                        <a:t>ทำอะไรกับ LeaveEasy</a:t>
                       </a:r>
                     </a:p>
                   </a:txBody>
@@ -23900,7 +23900,7 @@
                           <a:ea typeface="Leelawadee UI"/>
                           <a:cs typeface="Leelawadee UI"/>
                         </a:rPr>
-                        <a:t>A · 25 น.</a:t>
+                        <a:t>A · 30 น.</a:t>
                       </a:r>
                     </a:p>
                   </a:txBody>
@@ -23925,7 +23925,7 @@
                           <a:ea typeface="Leelawadee UI"/>
                           <a:cs typeface="Leelawadee UI"/>
                         </a:rPr>
-                        <a:t>CLAUDE.md + .gitignore ก่อน push + GitHub</a:t>
+                        <a:t>CLAUDE.md + .gitignore ก่อน push + ซ้อมงานชนกัน</a:t>
                       </a:r>
                     </a:p>
                   </a:txBody>
@@ -23977,7 +23977,7 @@
                           <a:ea typeface="Leelawadee UI"/>
                           <a:cs typeface="Leelawadee UI"/>
                         </a:rPr>
-                        <a:t>B · 55 น.</a:t>
+                        <a:t>B · 50 น.</a:t>
                       </a:r>
                     </a:p>
                   </a:txBody>
@@ -24002,7 +24002,7 @@
                           <a:ea typeface="Leelawadee UI"/>
                           <a:cs typeface="Leelawadee UI"/>
                         </a:rPr>
-                        <a:t>⭐ CRUD ครบ 4 ตัว + ตรวจก่อนบันทึก</a:t>
+                        <a:t>⭐ เพิ่ม แก้ ลบ + ตรวจก่อนบันทึก</a:t>
                       </a:r>
                     </a:p>
                   </a:txBody>
@@ -24054,7 +24054,7 @@
                           <a:ea typeface="Leelawadee UI"/>
                           <a:cs typeface="Leelawadee UI"/>
                         </a:rPr>
-                        <a:t>C · 35 น.</a:t>
+                        <a:t>C · 30 น.</a:t>
                       </a:r>
                     </a:p>
                   </a:txBody>
@@ -24104,7 +24104,7 @@
                           <a:ea typeface="Leelawadee UI"/>
                           <a:cs typeface="Leelawadee UI"/>
                         </a:rPr>
-                        <a:t>CP3 (ครึ่งแรก)</a:t>
+                        <a:t>CP3 ไม่ล็อกอินอ่านไม่ได้</a:t>
                       </a:r>
                     </a:p>
                   </a:txBody>
@@ -24156,7 +24156,7 @@
                           <a:ea typeface="Leelawadee UI"/>
                           <a:cs typeface="Leelawadee UI"/>
                         </a:rPr>
-                        <a:t>Deploy รวมกฎ + แลก URL กับกลุ่มอื่น</a:t>
+                        <a:t>Deploy รวมกฎ + แลก URL กับเพื่อน</a:t>
                       </a:r>
                     </a:p>
                   </a:txBody>
@@ -24181,7 +24181,7 @@
                           <a:ea typeface="Leelawadee UI"/>
                           <a:cs typeface="Leelawadee UI"/>
                         </a:rPr>
-                        <a:t>CP3 (ครบ)</a:t>
+                        <a:t>CP4 เพื่อนเปิดได้</a:t>
                       </a:r>
                     </a:p>
                   </a:txBody>
@@ -24282,7 +24282,7 @@
                 <a:ea typeface="Leelawadee UI"/>
                 <a:cs typeface="Leelawadee UI"/>
               </a:rPr>
-              <a:t>👥 กติกางานกลุ่มบ่ายนี้</a:t>
+              <a:t>👥 กติกาบ่ายนี้</a:t>
             </a:r>
           </a:p>
         </p:txBody>
@@ -24296,6 +24296,80 @@
         <p:spPr>
           <a:xfrm>
             <a:off x="822960" y="1472184"/>
+            <a:ext cx="10545775" cy="560324"/>
+          </a:xfrm>
+          <a:prstGeom prst="rect">
+            <a:avLst/>
+          </a:prstGeom>
+          <a:noFill/>
+        </p:spPr>
+        <p:txBody>
+          <a:bodyPr wrap="square">
+            <a:spAutoFit/>
+          </a:bodyPr>
+          <a:lstStyle/>
+          <a:p>
+            <a:pPr algn="l"/>
+            <a:r>
+              <a:rPr sz="2600" b="0">
+                <a:solidFill>
+                  <a:srgbClr val="1A1A1A"/>
+                </a:solidFill>
+                <a:latin typeface="Leelawadee UI"/>
+                <a:ea typeface="Leelawadee UI"/>
+                <a:cs typeface="Leelawadee UI"/>
+              </a:rPr>
+              <a:t>• 🖥️ สลับคนนำจอทุก Checkpoint — คนใหม่พิมพ์ชื่อในแชท</a:t>
+            </a:r>
+          </a:p>
+        </p:txBody>
+      </p:sp>
+      <p:sp>
+        <p:nvSpPr>
+          <p:cNvPr id="4" name="TextBox 3"/>
+          <p:cNvSpPr txBox="1"/>
+          <p:nvPr/>
+        </p:nvSpPr>
+        <p:spPr>
+          <a:xfrm>
+            <a:off x="822960" y="2087372"/>
+            <a:ext cx="10545775" cy="560324"/>
+          </a:xfrm>
+          <a:prstGeom prst="rect">
+            <a:avLst/>
+          </a:prstGeom>
+          <a:noFill/>
+        </p:spPr>
+        <p:txBody>
+          <a:bodyPr wrap="square">
+            <a:spAutoFit/>
+          </a:bodyPr>
+          <a:lstStyle/>
+          <a:p>
+            <a:pPr algn="l"/>
+            <a:r>
+              <a:rPr sz="2600" b="0">
+                <a:solidFill>
+                  <a:srgbClr val="1A1A1A"/>
+                </a:solidFill>
+                <a:latin typeface="Leelawadee UI"/>
+                <a:ea typeface="Leelawadee UI"/>
+                <a:cs typeface="Leelawadee UI"/>
+              </a:rPr>
+              <a:t>• 👤 ทุกคน commit ในชื่อตัวเอง — สัปดาห์นี้เริ่มนับจริง</a:t>
+            </a:r>
+          </a:p>
+        </p:txBody>
+      </p:sp>
+      <p:sp>
+        <p:nvSpPr>
+          <p:cNvPr id="5" name="TextBox 4"/>
+          <p:cNvSpPr txBox="1"/>
+          <p:nvPr/>
+        </p:nvSpPr>
+        <p:spPr>
+          <a:xfrm>
+            <a:off x="822960" y="2702560"/>
             <a:ext cx="10545775" cy="1029208"/>
           </a:xfrm>
           <a:prstGeom prst="rect">
@@ -24319,81 +24393,7 @@
                 <a:ea typeface="Leelawadee UI"/>
                 <a:cs typeface="Leelawadee UI"/>
               </a:rPr>
-              <a:t>• 🔄 หมุนคนคุมคีย์บอร์ดทุก Checkpoint — คนใหม่ git pull ก่อน</a:t>
-            </a:r>
-          </a:p>
-        </p:txBody>
-      </p:sp>
-      <p:sp>
-        <p:nvSpPr>
-          <p:cNvPr id="4" name="TextBox 3"/>
-          <p:cNvSpPr txBox="1"/>
-          <p:nvPr/>
-        </p:nvSpPr>
-        <p:spPr>
-          <a:xfrm>
-            <a:off x="822960" y="2556256"/>
-            <a:ext cx="10545775" cy="560324"/>
-          </a:xfrm>
-          <a:prstGeom prst="rect">
-            <a:avLst/>
-          </a:prstGeom>
-          <a:noFill/>
-        </p:spPr>
-        <p:txBody>
-          <a:bodyPr wrap="square">
-            <a:spAutoFit/>
-          </a:bodyPr>
-          <a:lstStyle/>
-          <a:p>
-            <a:pPr algn="l"/>
-            <a:r>
-              <a:rPr sz="2600" b="0">
-                <a:solidFill>
-                  <a:srgbClr val="1A1A1A"/>
-                </a:solidFill>
-                <a:latin typeface="Leelawadee UI"/>
-                <a:ea typeface="Leelawadee UI"/>
-                <a:cs typeface="Leelawadee UI"/>
-              </a:rPr>
-              <a:t>• 👤 ทุกคน commit ในชื่อตัวเอง — สัปดาห์นี้เริ่มนับจริง</a:t>
-            </a:r>
-          </a:p>
-        </p:txBody>
-      </p:sp>
-      <p:sp>
-        <p:nvSpPr>
-          <p:cNvPr id="5" name="TextBox 4"/>
-          <p:cNvSpPr txBox="1"/>
-          <p:nvPr/>
-        </p:nvSpPr>
-        <p:spPr>
-          <a:xfrm>
-            <a:off x="822960" y="3171444"/>
-            <a:ext cx="10545775" cy="560324"/>
-          </a:xfrm>
-          <a:prstGeom prst="rect">
-            <a:avLst/>
-          </a:prstGeom>
-          <a:noFill/>
-        </p:spPr>
-        <p:txBody>
-          <a:bodyPr wrap="square">
-            <a:spAutoFit/>
-          </a:bodyPr>
-          <a:lstStyle/>
-          <a:p>
-            <a:pPr algn="l"/>
-            <a:r>
-              <a:rPr sz="2600" b="0">
-                <a:solidFill>
-                  <a:srgbClr val="1A1A1A"/>
-                </a:solidFill>
-                <a:latin typeface="Leelawadee UI"/>
-                <a:ea typeface="Leelawadee UI"/>
-                <a:cs typeface="Leelawadee UI"/>
-              </a:rPr>
-              <a:t>• ❓ เรียก TA → คนที่ไม่ได้พิมพ์เป็นคนอธิบายปัญหา</a:t>
+              <a:t>• ⌨️ ทุกคนพิมพ์เองบนเครื่องตัวเอง ห้ามให้คนอื่นพิมพ์แทน</a:t>
             </a:r>
           </a:p>
         </p:txBody>
@@ -24521,7 +24521,7 @@
                 <a:ea typeface="Leelawadee UI"/>
                 <a:cs typeface="Leelawadee UI"/>
               </a:rPr>
-              <a:t>ขั้นตอนที่เห็นเช้านี้ — ในโครงงานของกลุ่มคุณคืออะไร?</a:t>
+              <a:t>ขั้นตอนที่เห็นเช้านี้ — ในหัวข้อของคุณคืออะไร?</a:t>
             </a:r>
           </a:p>
         </p:txBody>
@@ -24746,7 +24746,7 @@
                 <a:ea typeface="Leelawadee UI"/>
                 <a:cs typeface="Leelawadee UI"/>
               </a:rPr>
-              <a:t>ปัญหาที่ทุกกลุ่มเจอเมื่อสัปดาห์ที่แล้ว</a:t>
+              <a:t>ปัญหาที่ทุกคนเจอเมื่อสัปดาห์ที่แล้ว</a:t>
             </a:r>
           </a:p>
         </p:txBody>

--- a/materials/week7/w7-slides.pptx
+++ b/materials/week7/w7-slides.pptx
@@ -70,8 +70,6 @@
     <p:sldId id="318" r:id="rId70"/>
     <p:sldId id="319" r:id="rId71"/>
     <p:sldId id="320" r:id="rId72"/>
-    <p:sldId id="321" r:id="rId73"/>
-    <p:sldId id="322" r:id="rId74"/>
   </p:sldIdLst>
   <p:sldSz cx="12191695" cy="6858000" type="screen4x3"/>
   <p:notesSz cx="6858000" cy="9144000"/>
@@ -3158,7 +3156,7 @@
           <a:lstStyle/>
           <a:p>
             <a:r>
-              <a:t>พูดว่า "ช่วงนี้ 25 นาที และเป็นของใหม่จริงของวันนี้ครับ บ่ายนี้เป็นครั้งแรกที่โค้ดของคุณจะไปอยู่บน GitHub และเป็นครั้งแรกที่โค้ดสองที่อาจไม่ตรงกัน ผมสอนตรงนี้เพราะอีกสองชั่วโมงคุณได้ใช้ทันที"</a:t>
+              <a:t>พูดว่า "ช่วงนี้สั้นครับ 12 นาที เพราะคำสั่ง git เราให้ Claude จัดการให้หมด สิ่งที่ผมจะสอนคือสามอย่างที่ AI ทำแทนคุณไม่ได้" · บอกว่าบ่ายนี้เป็นครั้งแรกที่โค้ดของคุณไปอยู่บน GitHub</a:t>
             </a:r>
           </a:p>
         </p:txBody>
@@ -3228,7 +3226,7 @@
           <a:lstStyle/>
           <a:p>
             <a:r>
-              <a:t>ย้ำข้อสองหนัก ๆ "ผมเปิดประวัติ repo ดูได้ว่าใครพิมพ์บ้าง และผมดูทุกสัปดาห์ ไม่ใช่รอตอนจบ" · ข้อสี่คือเหตุผลของช่วงนี้ — ตั้งแต่วันนี้โค้ดอยู่ทั้งในเครื่องและบน GitHub</a:t>
+              <a:t>พูดว่า "คุณไม่ต้องจำคำสั่ง git สักตัวครับ พิมพ์บอก Claude เป็นภาษาไทยได้เลยว่าอยากทำอะไร" · ย้ำข้อสาม "ผมเปิดประวัติ repo ดูได้ว่าใครพิมพ์บ้าง และผมดูทุกสัปดาห์ ไม่ใช่รอตอนจบ"</a:t>
             </a:r>
           </a:p>
         </p:txBody>
@@ -3298,7 +3296,7 @@
           <a:lstStyle/>
           <a:p>
             <a:r>
-              <a:t>ย้ำคำแปล .gitignore = รายการไฟล์ที่ห้ามส่งขึ้นไป · พูดว่า "ทำ .gitignore ก่อน push เสมอ สลับลำดับไม่ได้ เพราะไฟล์ที่เคยขึ้นไปแล้ว ต่อให้ลบทีหลัง ก็มีคนคัดลอกไปได้ตั้งแต่วินาทีแรก" · เตือนล่วงหน้า "ถ้าเผลอ push คีย์ขึ้นไป ให้เพิกถอนคีย์ก่อน แล้วค่อยลบไฟล์ ลบอย่างเดียวไม่พอ"</a:t>
+              <a:t>อ่านทีละข้อช้า ๆ · ข้อ 1 "ทำอะไรสำเร็จหนึ่งอย่าง สั่ง commit ทันที นั่นคือหน้าที่คุณ" · ข้อ 2 จะขยายในสไลด์ถัดไป · ข้อ 3 "ไม่ต้องอ่านเครื่องหมายอะไรเป็น เห็นคำว่า conflict ก็ส่งให้ Claude"</a:t>
             </a:r>
           </a:p>
         </p:txBody>
@@ -3368,7 +3366,7 @@
           <a:lstStyle/>
           <a:p>
             <a:r>
-              <a:t>เปรียบว่า "GitHub เหมือนแฟ้มกลางของโปรเจกต์ ก่อนเริ่มงานต้องหยิบแฟ้มเวอร์ชันล่าสุดมาก่อน ทำเสร็จต้องเอาไปคืนแฟ้มกลาง ถ้าใครทำงานบนเวอร์ชันเก่า เดี๋ยวจะไปทับของเพื่อน"</a:t>
+              <a:t>ย้ำคำแปล .gitignore = รายการไฟล์ที่ห้ามส่งขึ้นไป · พูดว่า "ทำ .gitignore ก่อน push เสมอ สลับลำดับไม่ได้ เพราะไฟล์ที่เคยขึ้นไปแล้ว ต่อให้ลบทีหลัง ก็มีคนคัดลอกไปได้ตั้งแต่วินาทีแรก" · เล่าเคสจริงสั้น ๆ ว่าคีย์หลุดขึ้น repo สาธารณะเกิดขึ้นบ่อยมาก · เตือน "ถ้าเผลอ push คีย์ขึ้นไป ให้เพิกถอนคีย์ก่อน แล้วค่อยลบไฟล์ ลบอย่างเดียวไม่พอ"</a:t>
             </a:r>
           </a:p>
         </p:txBody>
@@ -3438,7 +3436,7 @@
           <a:lstStyle/>
           <a:p>
             <a:r>
-              <a:t>อ่านออกเสียงทีละข้อ แล้วพูดว่า "สามข้อนี้กันปัญหาได้เกือบร้อยเปอร์เซ็นต์ครับ ปัญหางานชนกันเกิดจากการละเมิดข้อใดข้อหนึ่งในนี้เสมอ" · บอกว่าบ่ายนี้จะให้ซ้อมทำให้ชนกันเองแล้วกู้ · และทักษะนี้คือของที่ Module 3 ใช้ตอนทำงานหลายคน</a:t>
+              <a:t>พูดตรง ๆ ว่า "ผมให้คุณยกคำสั่ง git ให้ AI ทำ แต่มีเงื่อนไขข้อเดียว — commit ก่อน" · ย้ำว่าเวลาสั่งให้ AI จัดการ git ให้ขอแผนก่อนเหมือนเดิม "จะทำอะไรบ้าง บอกผมก่อน"</a:t>
             </a:r>
           </a:p>
         </p:txBody>
@@ -3508,7 +3506,7 @@
           <a:lstStyle/>
           <a:p>
             <a:r>
-              <a:t>ชี้แถบบนทีละกล่อง "แก้บน GitHub ทีหนึ่ง แก้ในเครื่องอีกทีหนึ่ง พอ pull ลงมาก็ชนกัน" · หยุดที่กล่องเข้ม "ตรงนี้คือจุดที่คนตกใจที่สุด เห็นคำว่า conflict แล้วคิดว่างานหาย" · ไล่แถบล่าง "แถบล่างคือบ่ายนี้ของคุณ ถ้าตามกติกาสามข้อ จะไม่เจอแถบบนเลย"</a:t>
+              <a:t>สลับไปสาธิตตามสคริปต์บล็อก E — นี่คือจุดที่ตั้งใจให้พังจุดที่ 2 ห้ามตัด · ตอน push ถูกปฏิเสธให้พูดว่า "เห็นไหมครับ ผมเองก็เจอ ทีนี้มาดูกันว่ากู้ยังไงใน 3 นาที" · ตอนส่งให้ Claude ให้ชี้ว่า "ผมไม่ได้พิมพ์คำสั่ง git สักตัว ผมเล่าอาการให้มันฟังเฉย ๆ" · ย้ำปิดท้ายว่าไม่มีงานของใครหาย</a:t>
             </a:r>
           </a:p>
         </p:txBody>
@@ -3578,7 +3576,7 @@
           <a:lstStyle/>
           <a:p>
             <a:r>
-              <a:t>ย้ำข้อสุดท้ายหนักที่สุด "คำว่า conflict ฟังน่ากลัว แต่ความจริงคือ git เก็บของทั้งสองคนไว้ให้ครบ แล้วถามเราว่าจะเอาแบบไหน มันคือคำถาม ไม่ใช่ความเสียหาย" · แปลศัพท์ conflict = งานชนกัน สองคนแก้ที่เดียวกัน git เลือกเองไม่ได้</a:t>
+              <a:t>อ่านออกเสียงทั้งสี่ข้อ แล้วปิดด้วย "สังเกตนะครับ ไม่มีข้อไหนบอกให้คุณท่องคำสั่ง git เลย" · เชื่อมเข้าบ่าย — "ใบงานส่วน A บ่ายนี้ให้คุณ push ขึ้น GitHub แล้วซ้อมงานชนกันกับตัวเอง"</a:t>
             </a:r>
           </a:p>
         </p:txBody>
@@ -3648,7 +3646,7 @@
           <a:lstStyle/>
           <a:p>
             <a:r>
-              <a:t>ไล่ทีละบรรทัด บอกว่า "วันนี้เรื่องเยอะที่สุดของเดือน แต่ทุกเรื่องต่อกันเป็นเส้นเดียว ทำระบบให้ครบ ใส่กุญแจ แล้วออกออนไลน์" · ชี้ดาวสองดวง "CRUD คือหัวใจ ส่วน Git หลายคนคือของใหม่จริงของวันนี้ เพราะบ่ายนี้ทุกคนจะแก้ repo เดียวกันเป็นครั้งแรก"</a:t>
+              <a:t>ไล่ทีละบรรทัด บอกว่า "วันนี้เรื่องเยอะที่สุดของเดือน แต่ทุกเรื่องต่อกันเป็นเส้นเดียว ทำระบบให้ครบ ใส่กุญแจ แล้วออกออนไลน์" · ชี้ดาวสองดวง "CRUD คือหัวใจ ส่วน Git คือของใหม่จริงของวันนี้ เพราะบ่ายนี้โค้ดของคุณจะไปอยู่บน GitHub เป็นครั้งแรก"</a:t>
             </a:r>
           </a:p>
         </p:txBody>
@@ -3718,7 +3716,7 @@
           <a:lstStyle/>
           <a:p>
             <a:r>
-              <a:t>สลับไปสาธิตตามสคริปต์บล็อก E — นี่คือจุดที่ตั้งใจให้พังจุดที่ 2 ห้ามตัด · ตอน push ถูกปฏิเสธให้พูดว่า "เห็นไหมครับ ผมเองก็เจอ ทีนี้มาดูกันว่ากู้ยังไงใน 3 นาที" · จบแล้วทวนกติกา 3 ข้ออีกรอบ</a:t>
+              <a:t>พูดว่า "ครึ่งชั่วโมงสุดท้ายของเช้าครับ และเป็นนาทีที่ผมชอบที่สุดของทั้งเดือน ระบบที่อยู่ในเครื่องเราคนเดียวยังไม่นับว่าเป็นระบบ อีกสิบนาที FixIt จะมีที่อยู่จริงบนอินเทอร์เน็ต"</a:t>
             </a:r>
           </a:p>
         </p:txBody>
@@ -3788,7 +3786,7 @@
           <a:lstStyle/>
           <a:p>
             <a:r>
-              <a:t>ถามห้องว่า "ก่อนเริ่มงานทุกครั้ง พิมพ์คำสั่งอะไรก่อน" คำตอบที่ต้องการคือ git pull · ให้ตอบในแชทแล้วไปช่วงสุดท้ายของเช้า</a:t>
+              <a:t>ย้ำคำแปล Deploy = นำเว็บขึ้นออนไลน์ · Hosting = บริการที่ให้เว็บเรามีที่อยู่จริง · พูดว่า "จำคำว่า localhost จากสัปดาห์ที่แล้วได้ไหมครับ วันนี้เราจะเปลี่ยนจาก localhost เป็นที่อยู่ที่ส่งให้ใครก็ได้"</a:t>
             </a:r>
           </a:p>
         </p:txBody>
@@ -3858,7 +3856,7 @@
           <a:lstStyle/>
           <a:p>
             <a:r>
-              <a:t>พูดว่า "20 นาทีสุดท้ายของเช้าครับ และเป็นนาทีที่ผมชอบที่สุดของทั้งเดือน ระบบที่อยู่ในเครื่องเราคนเดียวยังไม่นับว่าเป็นระบบ อีกสิบนาที FixIt จะมีที่อยู่จริงบนอินเทอร์เน็ต"</a:t>
+              <a:t>ชี้ทีละกล่องจากซ้าย "โค้ดที่เสร็จแล้วในเครื่อง สั่ง deploy หนึ่งครั้ง มันจะถูกคัดลอกขึ้นไปวางบน Hosting" · หยุดที่กล่องเข้ม "ตั้งแต่วินาทีที่ของถึงกล่องนี้ เว็บเราไม่ได้อยู่ในเครื่องเราแล้ว ปิดคอมไปเลยก็ยังเปิดได้" · ปิดที่กล่องขวาสุด "และนั่นแปลว่าคนแปลกหน้าก็เปิดได้ด้วย เพราะฉะนั้นกฎเมื่อกี้ถึงต้องมาก่อน"</a:t>
             </a:r>
           </a:p>
         </p:txBody>
@@ -3928,7 +3926,7 @@
           <a:lstStyle/>
           <a:p>
             <a:r>
-              <a:t>ย้ำคำแปล Deploy = นำเว็บขึ้นออนไลน์ · Hosting = บริการที่ให้เว็บเรามีที่อยู่จริง · พูดว่า "จำคำว่า localhost จากสัปดาห์ที่แล้วได้ไหมครับ วันนี้เราจะเปลี่ยนจาก localhost เป็นที่อยู่ที่ส่งให้ใครก็ได้"</a:t>
+              <a:t>พูดว่า "จุดพลาดคลาสสิกคือเขียนกฎไว้ในเครื่องแล้วนึกว่าปลอดภัยแล้ว กฎทำงานเฉพาะฉบับที่อยู่บนเซิร์ฟเวอร์ครับ ใบงานบ่ายนี้จึงเขียนให้ deploy กฎพร้อมเว็บเสมอ"</a:t>
             </a:r>
           </a:p>
         </p:txBody>
@@ -3998,7 +3996,7 @@
           <a:lstStyle/>
           <a:p>
             <a:r>
-              <a:t>ชี้ทีละกล่องจากซ้าย "โค้ดที่เสร็จแล้วในเครื่อง สั่ง deploy หนึ่งครั้ง มันจะถูกคัดลอกขึ้นไปวางบน Hosting" · หยุดที่กล่องเข้ม "ตั้งแต่วินาทีที่ของถึงกล่องนี้ เว็บเราไม่ได้อยู่ในเครื่องเราแล้ว ปิดคอมไปเลยก็ยังเปิดได้" · ปิดที่กล่องขวาสุด "และนั่นแปลว่าคนแปลกหน้าก็เปิดได้ด้วย เพราะฉะนั้นกฎเมื่อกี้ถึงต้องมาก่อน"</a:t>
+              <a:t>พูดว่า "สองอาการนี้คืออันดับหนึ่งกับสองของบ่ายนี้ ผมบอกล่วงหน้าเลย ถ้าเว็บออนไลน์พังแต่ในเครื่องปกติ ให้เช็กสองข้อนี้ก่อนเสมอ" · ทวน index จากสัปดาห์ที่แล้ว "Firestore จะบอกเองว่าต้องสร้างสารบัญ พร้อมแนบลิงก์มาให้กด ไม่ต้องทำเอง"</a:t>
             </a:r>
           </a:p>
         </p:txBody>
@@ -4068,7 +4066,7 @@
           <a:lstStyle/>
           <a:p>
             <a:r>
-              <a:t>พูดว่า "จุดพลาดคลาสสิกคือเขียนกฎไว้ในเครื่องแล้วนึกว่าปลอดภัยแล้ว กฎทำงานเฉพาะฉบับที่อยู่บนเซิร์ฟเวอร์ครับ ใบงานบ่ายนี้จึงเขียนให้ deploy กฎพร้อมเว็บเสมอ"</a:t>
+              <a:t>สลับไปสาธิตตามสคริปต์บล็อก F — นี่คือฉากจำของเช้านี้ · ตอนวาง URL ในแชท ให้รอจนมีคนพิมพ์ว่าเปิดได้อย่างน้อย 5 คน แล้วค่อยไปต่อ อย่ารีบ นาทีนี้คือรางวัลของทั้งเช้า</a:t>
             </a:r>
           </a:p>
         </p:txBody>
@@ -4138,7 +4136,7 @@
           <a:lstStyle/>
           <a:p>
             <a:r>
-              <a:t>พูดว่า "สองอาการนี้คืออันดับหนึ่งกับสองของบ่ายนี้ ผมบอกล่วงหน้าเลย ถ้าเว็บออนไลน์พังแต่ในเครื่องปกติ ให้เช็กสองข้อนี้ก่อนเสมอ" · ทวน index จากสัปดาห์ที่แล้ว "Firestore จะบอกเองว่าต้องสร้างสารบัญ พร้อมแนบลิงก์มาให้กด ไม่ต้องทำเอง"</a:t>
+              <a:t>ให้ห้องพิมพ์ 🎉 ในแชท · พูดว่า "จากภาพนิ่งเมื่อสองสัปดาห์ก่อน ตอนนี้มันคือระบบจริงที่มีที่อยู่บนอินเทอร์เน็ต บ่ายนี้คุณจะได้ความรู้สึกนี้กับ LeaveEasy ของตัวเอง แล้วแลก URL กับเพื่อนด้วย"</a:t>
             </a:r>
           </a:p>
         </p:txBody>
@@ -4208,7 +4206,7 @@
           <a:lstStyle/>
           <a:p>
             <a:r>
-              <a:t>สลับไปสาธิตตามสคริปต์บล็อก F — นี่คือฉากจำของเช้านี้ · ตอนวาง URL ในแชท ให้รอจนมีคนพิมพ์ว่าเปิดได้อย่างน้อย 5 คน แล้วค่อยไปต่อ อย่ารีบ นาทีนี้คือรางวัลของทั้งเช้า</a:t>
+              <a:t>พูดเสียงหนักแน่น "ระบบออนไลน์แล้วจะมีคนอยากใส่ข้อมูลจริงทันที ห้ามนะครับ เหตุผลการลาจริง ชื่อลูกค้าจริง เบอร์โทรจริง ห้ามทั้งหมด จนกว่ากฎรายห้องจะปิดเรียบร้อยสัปดาห์หน้า นี่คือเรื่อง PDPA ที่เรียนกันไปเดือนที่ 1"</a:t>
             </a:r>
           </a:p>
         </p:txBody>
@@ -4278,7 +4276,7 @@
           <a:lstStyle/>
           <a:p>
             <a:r>
-              <a:t>ให้ห้องพิมพ์ 🎉 ในแชท · พูดว่า "จากภาพนิ่งเมื่อสองสัปดาห์ก่อน ตอนนี้มันคือระบบจริงที่มีที่อยู่บนอินเทอร์เน็ต บ่ายนี้คุณจะได้ความรู้สึกนี้กับ LeaveEasy ของตัวเอง แล้วแลก URL กับเพื่อนด้วย"</a:t>
+              <a:t>ถามห้องว่า "ออนไลน์แล้วเว็บพัง แต่ในเครื่องปกติ เช็กอะไรสองอย่าง" คำตอบ กฎยัง deploy ไหม กับ index สร้างหรือยัง · แล้วเข้าปิดคาบ</a:t>
             </a:r>
           </a:p>
         </p:txBody>
@@ -4348,7 +4346,7 @@
           <a:lstStyle/>
           <a:p>
             <a:r>
-              <a:t>พูดเสียงหนักแน่น "ระบบออนไลน์แล้วจะมีคนอยากใส่ข้อมูลจริงทันที ห้ามนะครับ เหตุผลการลาจริง ชื่อลูกค้าจริง เบอร์โทรจริง ห้ามทั้งหมด จนกว่ากฎรายห้องจะปิดเรียบร้อยสัปดาห์หน้า นี่คือเรื่อง PDPA ที่เรียนกันไปเดือนที่ 1"</a:t>
+              <a:t>บอกว่า "5 นาทีสุดท้าย มีของต้องส่งสัปดาห์นี้ ห้ามออกก่อนครับ" · เตรียมลิงก์ใบงาน คิวถาม ธนาคารคำตอบ วางในแชทตอนนี้</a:t>
             </a:r>
           </a:p>
         </p:txBody>
@@ -4488,7 +4486,7 @@
           <a:lstStyle/>
           <a:p>
             <a:r>
-              <a:t>ถามห้องว่า "ออนไลน์แล้วเว็บพัง แต่ในเครื่องปกติ เช็กอะไรสองอย่าง" คำตอบ กฎยัง deploy ไหม กับ index สร้างหรือยัง · แล้วเข้าปิดคาบ</a:t>
+              <a:t>อ่านออกเสียงทุกข้อ · ย้ำว่า "ผมตรวจ commit รายคนด้วยนะครับ สัปดาห์นี้ repo อยู่บน GitHub แล้ว ทุกคนต้องมีชื่อตัวเองในประวัติ" · deploy ยกไป Consult วันอาทิตย์ได้ถ้าไม่ทัน แต่สามข้อแรกต้องมี</a:t>
             </a:r>
           </a:p>
         </p:txBody>
@@ -4558,7 +4556,7 @@
           <a:lstStyle/>
           <a:p>
             <a:r>
-              <a:t>บอกว่า "5 นาทีสุดท้าย มีของต้องส่งสัปดาห์นี้ ห้ามออกก่อนครับ" · เตรียมลิงก์ใบงาน คิวถาม ธนาคารคำตอบ วางในแชทตอนนี้</a:t>
+              <a:t>ชี้ทีละแถวแล้วถามคำถามประจำหลักสูตร "FixIt แจ้งซ่อมใหม่ LeaveEasy ยื่นใบลาใหม่ แล้วหัวข้อของคุณ ตัว C คือปุ่มอะไร" ให้ทุกคนพิมพ์คำตอบในแชทก่อนพักเที่ยง · ย้ำว่าช่องขวาสุดเติมเองในใบการบ้าน ห้ามลอกช่องกลาง</a:t>
             </a:r>
           </a:p>
         </p:txBody>
@@ -4628,7 +4626,7 @@
           <a:lstStyle/>
           <a:p>
             <a:r>
-              <a:t>อ่านออกเสียงทุกข้อ · ย้ำว่า "ผมตรวจ commit รายคนด้วยนะครับ สัปดาห์นี้ repo อยู่บน GitHub แล้ว ทุกคนต้องมีชื่อตัวเองในประวัติ" · deploy ยกไป Consult วันอาทิตย์ได้ถ้าไม่ทัน แต่สามข้อแรกต้องมี</a:t>
+              <a:t>ชี้แถว B แล้วพูดว่า "ถ้าเวลาไม่พอ ให้ B เสร็จเป็นอย่างน้อยครับ ลำดับตัดคือ B ก่อน C ก่อน D ส่วน deploy ยกไป Consult วันอาทิตย์ได้ แต่ห้าม deploy โดยไม่มีกฎขั้นต่ำเด็ดขาด" · ย้ำว่าบ่ายนี้ทุกคนทำ LeaveEasy เหมือนกัน แล้วการบ้านทำซ้ำกับหัวข้อของตัวเอง</a:t>
             </a:r>
           </a:p>
         </p:txBody>
@@ -4698,7 +4696,7 @@
           <a:lstStyle/>
           <a:p>
             <a:r>
-              <a:t>ชี้ทีละแถวแล้วถามคำถามประจำหลักสูตร "FixIt แจ้งซ่อมใหม่ LeaveEasy ยื่นใบลาใหม่ แล้วหัวข้อของคุณ ตัว C คือปุ่มอะไร" ให้ทุกคนพิมพ์คำตอบในแชทก่อนพักเที่ยง · ย้ำว่าช่องขวาสุดเติมเองในใบการบ้าน ห้ามลอกช่องกลาง</a:t>
+              <a:t>ชี้ข้อแรก "คนนำจอเปลี่ยนทุก Checkpoint แต่ทุกคนทำบนเครื่องตัวเองตลอด" · ย้ำ git pull ก่อนเริ่มงานทุกครั้ง เพราะ repo อยู่บน GitHub แล้ว · บอกว่าคิวถามกลางและธนาคารคำตอบสด ลิงก์อยู่ในแชทแล้ว</a:t>
             </a:r>
           </a:p>
         </p:txBody>
@@ -4724,146 +4722,6 @@
 </file>
 
 <file path=ppt/notesSlides/notesSlide64.xml><?xml version="1.0" encoding="utf-8"?>
-<p:notes xmlns:a="http://schemas.openxmlformats.org/drawingml/2006/main" xmlns:p="http://schemas.openxmlformats.org/presentationml/2006/main" xmlns:r="http://schemas.openxmlformats.org/officeDocument/2006/relationships">
-  <p:cSld>
-    <p:spTree>
-      <p:nvGrpSpPr>
-        <p:cNvPr id="1" name=""/>
-        <p:cNvGrpSpPr/>
-        <p:nvPr/>
-      </p:nvGrpSpPr>
-      <p:grpSpPr>
-        <a:xfrm>
-          <a:off x="0" y="0"/>
-          <a:ext cx="0" cy="0"/>
-          <a:chOff x="0" y="0"/>
-          <a:chExt cx="0" cy="0"/>
-        </a:xfrm>
-      </p:grpSpPr>
-      <p:sp>
-        <p:nvSpPr>
-          <p:cNvPr id="2" name="Slide Image Placeholder 1"/>
-          <p:cNvSpPr>
-            <a:spLocks noGrp="1"/>
-          </p:cNvSpPr>
-          <p:nvPr>
-            <p:ph type="sldImg" idx="2"/>
-          </p:nvPr>
-        </p:nvSpPr>
-        <p:spPr/>
-      </p:sp>
-      <p:sp>
-        <p:nvSpPr>
-          <p:cNvPr id="3" name="Notes Placeholder 2"/>
-          <p:cNvSpPr>
-            <a:spLocks noGrp="1"/>
-          </p:cNvSpPr>
-          <p:nvPr>
-            <p:ph type="body" idx="3" sz="quarter"/>
-          </p:nvPr>
-        </p:nvSpPr>
-        <p:spPr/>
-        <p:txBody>
-          <a:bodyPr/>
-          <a:lstStyle/>
-          <a:p>
-            <a:r>
-              <a:t>ชี้แถว B แล้วพูดว่า "ถ้าเวลาไม่พอ ให้ B เสร็จเป็นอย่างน้อยครับ ลำดับตัดคือ B ก่อน C ก่อน D ส่วน deploy ยกไป Consult วันอาทิตย์ได้ แต่ห้าม deploy โดยไม่มีกฎขั้นต่ำเด็ดขาด" · ย้ำว่าบ่ายนี้ทุกคนทำ LeaveEasy เหมือนกัน แล้วการบ้านทำซ้ำกับหัวข้อของตัวเอง</a:t>
-            </a:r>
-          </a:p>
-        </p:txBody>
-      </p:sp>
-      <p:sp>
-        <p:nvSpPr>
-          <p:cNvPr id="4" name="Slide Number Placeholder 3"/>
-          <p:cNvSpPr>
-            <a:spLocks noGrp="1"/>
-          </p:cNvSpPr>
-          <p:nvPr>
-            <p:ph type="sldNum" idx="5" sz="quarter"/>
-          </p:nvPr>
-        </p:nvSpPr>
-        <p:spPr/>
-      </p:sp>
-    </p:spTree>
-  </p:cSld>
-  <p:clrMapOvr>
-    <a:masterClrMapping/>
-  </p:clrMapOvr>
-</p:notes>
-</file>
-
-<file path=ppt/notesSlides/notesSlide65.xml><?xml version="1.0" encoding="utf-8"?>
-<p:notes xmlns:a="http://schemas.openxmlformats.org/drawingml/2006/main" xmlns:p="http://schemas.openxmlformats.org/presentationml/2006/main" xmlns:r="http://schemas.openxmlformats.org/officeDocument/2006/relationships">
-  <p:cSld>
-    <p:spTree>
-      <p:nvGrpSpPr>
-        <p:cNvPr id="1" name=""/>
-        <p:cNvGrpSpPr/>
-        <p:nvPr/>
-      </p:nvGrpSpPr>
-      <p:grpSpPr>
-        <a:xfrm>
-          <a:off x="0" y="0"/>
-          <a:ext cx="0" cy="0"/>
-          <a:chOff x="0" y="0"/>
-          <a:chExt cx="0" cy="0"/>
-        </a:xfrm>
-      </p:grpSpPr>
-      <p:sp>
-        <p:nvSpPr>
-          <p:cNvPr id="2" name="Slide Image Placeholder 1"/>
-          <p:cNvSpPr>
-            <a:spLocks noGrp="1"/>
-          </p:cNvSpPr>
-          <p:nvPr>
-            <p:ph type="sldImg" idx="2"/>
-          </p:nvPr>
-        </p:nvSpPr>
-        <p:spPr/>
-      </p:sp>
-      <p:sp>
-        <p:nvSpPr>
-          <p:cNvPr id="3" name="Notes Placeholder 2"/>
-          <p:cNvSpPr>
-            <a:spLocks noGrp="1"/>
-          </p:cNvSpPr>
-          <p:nvPr>
-            <p:ph type="body" idx="3" sz="quarter"/>
-          </p:nvPr>
-        </p:nvSpPr>
-        <p:spPr/>
-        <p:txBody>
-          <a:bodyPr/>
-          <a:lstStyle/>
-          <a:p>
-            <a:r>
-              <a:t>ชี้ข้อแรก "คนนำจอเปลี่ยนทุก Checkpoint แต่ทุกคนทำบนเครื่องตัวเองตลอด" · ย้ำ git pull ก่อนเริ่มงานทุกครั้ง เพราะ repo อยู่บน GitHub แล้ว · บอกว่าคิวถามกลางและธนาคารคำตอบสด ลิงก์อยู่ในแชทแล้ว</a:t>
-            </a:r>
-          </a:p>
-        </p:txBody>
-      </p:sp>
-      <p:sp>
-        <p:nvSpPr>
-          <p:cNvPr id="4" name="Slide Number Placeholder 3"/>
-          <p:cNvSpPr>
-            <a:spLocks noGrp="1"/>
-          </p:cNvSpPr>
-          <p:nvPr>
-            <p:ph type="sldNum" idx="5" sz="quarter"/>
-          </p:nvPr>
-        </p:nvSpPr>
-        <p:spPr/>
-      </p:sp>
-    </p:spTree>
-  </p:cSld>
-  <p:clrMapOvr>
-    <a:masterClrMapping/>
-  </p:clrMapOvr>
-</p:notes>
-</file>
-
-<file path=ppt/notesSlides/notesSlide66.xml><?xml version="1.0" encoding="utf-8"?>
 <p:notes xmlns:a="http://schemas.openxmlformats.org/drawingml/2006/main" xmlns:p="http://schemas.openxmlformats.org/presentationml/2006/main" xmlns:r="http://schemas.openxmlformats.org/officeDocument/2006/relationships">
   <p:cSld>
     <p:spTree>
@@ -17461,7 +17319,7 @@
                 <a:ea typeface="Leelawadee UI"/>
                 <a:cs typeface="Leelawadee UI"/>
               </a:rPr>
-              <a:t>ช่วงที่ 5 — 👥 Git หลายคนบน repo เดียว ⭐ ⏱ 11:10–11:35</a:t>
+              <a:t>ช่วงที่ 5 — 👥 Git เมื่อโค้ดอยู่สองที่ ⭐ ⏱ 11:10–11:22</a:t>
             </a:r>
           </a:p>
         </p:txBody>
@@ -17626,7 +17484,7 @@
                 <a:ea typeface="Leelawadee UI"/>
                 <a:cs typeface="Leelawadee UI"/>
               </a:rPr>
-              <a:t>• 👤 ทุกคน commit ในชื่อตัวเอง — สัปดาห์นี้เริ่มนับจริง</a:t>
+              <a:t>• 🤖 คำสั่ง git ทั้งหมด ให้ Claude ทำให้ — ไม่ต้องท่อง</a:t>
             </a:r>
           </a:p>
         </p:txBody>
@@ -17640,6 +17498,43 @@
         <p:spPr>
           <a:xfrm>
             <a:off x="822960" y="3774948"/>
+            <a:ext cx="10545775" cy="1029208"/>
+          </a:xfrm>
+          <a:prstGeom prst="rect">
+            <a:avLst/>
+          </a:prstGeom>
+          <a:noFill/>
+        </p:spPr>
+        <p:txBody>
+          <a:bodyPr wrap="square">
+            <a:spAutoFit/>
+          </a:bodyPr>
+          <a:lstStyle/>
+          <a:p>
+            <a:pPr algn="l"/>
+            <a:r>
+              <a:rPr sz="2600" b="0">
+                <a:solidFill>
+                  <a:srgbClr val="1A1A1A"/>
+                </a:solidFill>
+                <a:latin typeface="Leelawadee UI"/>
+                <a:ea typeface="Leelawadee UI"/>
+                <a:cs typeface="Leelawadee UI"/>
+              </a:rPr>
+              <a:t>• 👤 แต่ commit ต้องเป็นชื่อคุณ — สัปดาห์นี้เริ่มนับจริง</a:t>
+            </a:r>
+          </a:p>
+        </p:txBody>
+      </p:sp>
+      <p:sp>
+        <p:nvSpPr>
+          <p:cNvPr id="6" name="TextBox 5"/>
+          <p:cNvSpPr txBox="1"/>
+          <p:nvPr/>
+        </p:nvSpPr>
+        <p:spPr>
+          <a:xfrm>
+            <a:off x="822960" y="4859020"/>
             <a:ext cx="10545775" cy="560324"/>
           </a:xfrm>
           <a:prstGeom prst="rect">
@@ -17664,43 +17559,6 @@
                 <a:cs typeface="Leelawadee UI"/>
               </a:rPr>
               <a:t>• ไม่มี commit เลยทั้ง Module = ไม่ผ่าน</a:t>
-            </a:r>
-          </a:p>
-        </p:txBody>
-      </p:sp>
-      <p:sp>
-        <p:nvSpPr>
-          <p:cNvPr id="6" name="TextBox 5"/>
-          <p:cNvSpPr txBox="1"/>
-          <p:nvPr/>
-        </p:nvSpPr>
-        <p:spPr>
-          <a:xfrm>
-            <a:off x="822960" y="4390136"/>
-            <a:ext cx="10545775" cy="560324"/>
-          </a:xfrm>
-          <a:prstGeom prst="rect">
-            <a:avLst/>
-          </a:prstGeom>
-          <a:noFill/>
-        </p:spPr>
-        <p:txBody>
-          <a:bodyPr wrap="square">
-            <a:spAutoFit/>
-          </a:bodyPr>
-          <a:lstStyle/>
-          <a:p>
-            <a:pPr algn="l"/>
-            <a:r>
-              <a:rPr sz="2600" b="0">
-                <a:solidFill>
-                  <a:srgbClr val="1A1A1A"/>
-                </a:solidFill>
-                <a:latin typeface="Leelawadee UI"/>
-                <a:ea typeface="Leelawadee UI"/>
-                <a:cs typeface="Leelawadee UI"/>
-              </a:rPr>
-              <a:t>• โค้ดอยู่สองที่แล้ว — ต้องมีกติกากันไม่ให้ทับกัน</a:t>
             </a:r>
           </a:p>
         </p:txBody>
@@ -17768,7 +17626,7 @@
         <p:spPr>
           <a:xfrm>
             <a:off x="822960" y="502920"/>
-            <a:ext cx="10545775" cy="1408176"/>
+            <a:ext cx="10545775" cy="804672"/>
           </a:xfrm>
           <a:prstGeom prst="rect">
             <a:avLst/>
@@ -17791,7 +17649,7 @@
                 <a:ea typeface="Leelawadee UI"/>
                 <a:cs typeface="Leelawadee UI"/>
               </a:rPr>
-              <a:t>ก่อน push ครั้งแรก — .gitignore ต้องมาก่อน</a:t>
+              <a:t>3 อย่างที่ AI ทำแทนคุณไม่ได้</a:t>
             </a:r>
           </a:p>
         </p:txBody>
@@ -17804,8 +17662,8 @@
         </p:nvSpPr>
         <p:spPr>
           <a:xfrm>
-            <a:off x="822960" y="2075688"/>
-            <a:ext cx="10545775" cy="560324"/>
+            <a:off x="822960" y="1472184"/>
+            <a:ext cx="10545775" cy="1029208"/>
           </a:xfrm>
           <a:prstGeom prst="rect">
             <a:avLst/>
@@ -17828,7 +17686,7 @@
                 <a:ea typeface="Leelawadee UI"/>
                 <a:cs typeface="Leelawadee UI"/>
               </a:rPr>
-              <a:t>• .gitignore = รายการไฟล์ที่ห้ามส่งขึ้น GitHub</a:t>
+              <a:t>• 1️⃣ บอกว่าเมื่อไรควร commit — AI ไม่รู้ว่าตรงไหนคือ "ใช้ได้แล้ว"</a:t>
             </a:r>
           </a:p>
         </p:txBody>
@@ -17841,8 +17699,8 @@
         </p:nvSpPr>
         <p:spPr>
           <a:xfrm>
-            <a:off x="822960" y="2690876"/>
-            <a:ext cx="10545775" cy="560324"/>
+            <a:off x="822960" y="2556256"/>
+            <a:ext cx="10545775" cy="1029208"/>
           </a:xfrm>
           <a:prstGeom prst="rect">
             <a:avLst/>
@@ -17865,7 +17723,7 @@
                 <a:ea typeface="Leelawadee UI"/>
                 <a:cs typeface="Leelawadee UI"/>
               </a:rPr>
-              <a:t>• ต้องกัน node_modules และไฟล์คีย์ทุกชนิด</a:t>
+              <a:t>• 2️⃣ .gitignore ก่อน push — เป็นการตัดสินใจ ไม่ใช่คำสั่ง</a:t>
             </a:r>
           </a:p>
         </p:txBody>
@@ -17878,8 +17736,8 @@
         </p:nvSpPr>
         <p:spPr>
           <a:xfrm>
-            <a:off x="822960" y="3306064"/>
-            <a:ext cx="10545775" cy="560324"/>
+            <a:off x="822960" y="3640328"/>
+            <a:ext cx="10545775" cy="1029208"/>
           </a:xfrm>
           <a:prstGeom prst="rect">
             <a:avLst/>
@@ -17902,7 +17760,7 @@
                 <a:ea typeface="Leelawadee UI"/>
                 <a:cs typeface="Leelawadee UI"/>
               </a:rPr>
-              <a:t>• ให้ AI สร้าง → เราตรวจด้วย git status ว่ากันได้จริง</a:t>
+              <a:t>• 3️⃣ สังเกตว่าตอนนี้งานชนกันแล้ว — แล้วส่งให้ Claude แก้</a:t>
             </a:r>
           </a:p>
         </p:txBody>
@@ -17910,43 +17768,6 @@
       <p:sp>
         <p:nvSpPr>
           <p:cNvPr id="6" name="TextBox 5"/>
-          <p:cNvSpPr txBox="1"/>
-          <p:nvPr/>
-        </p:nvSpPr>
-        <p:spPr>
-          <a:xfrm>
-            <a:off x="822960" y="3921252"/>
-            <a:ext cx="10545775" cy="1029208"/>
-          </a:xfrm>
-          <a:prstGeom prst="rect">
-            <a:avLst/>
-          </a:prstGeom>
-          <a:noFill/>
-        </p:spPr>
-        <p:txBody>
-          <a:bodyPr wrap="square">
-            <a:spAutoFit/>
-          </a:bodyPr>
-          <a:lstStyle/>
-          <a:p>
-            <a:pPr algn="l"/>
-            <a:r>
-              <a:rPr sz="2600" b="0">
-                <a:solidFill>
-                  <a:srgbClr val="1A1A1A"/>
-                </a:solidFill>
-                <a:latin typeface="Leelawadee UI"/>
-                <a:ea typeface="Leelawadee UI"/>
-                <a:cs typeface="Leelawadee UI"/>
-              </a:rPr>
-              <a:t>• ลำดับสลับไม่ได้ — ของที่ขึ้นไปแล้ว มีคนคัดลอกได้ทันที</a:t>
-            </a:r>
-          </a:p>
-        </p:txBody>
-      </p:sp>
-      <p:sp>
-        <p:nvSpPr>
-          <p:cNvPr id="7" name="TextBox 6"/>
           <p:cNvSpPr txBox="1"/>
           <p:nvPr/>
         </p:nvSpPr>
@@ -18007,7 +17828,7 @@
         <p:spPr>
           <a:xfrm>
             <a:off x="822960" y="502920"/>
-            <a:ext cx="10545775" cy="804672"/>
+            <a:ext cx="10545775" cy="1408176"/>
           </a:xfrm>
           <a:prstGeom prst="rect">
             <a:avLst/>
@@ -18030,88 +17851,94 @@
                 <a:ea typeface="Leelawadee UI"/>
                 <a:cs typeface="Leelawadee UI"/>
               </a:rPr>
-              <a:t>push / pull — ส่งขึ้น กับ ดึงลง</a:t>
-            </a:r>
-          </a:p>
-        </p:txBody>
-      </p:sp>
-      <p:sp>
-        <p:nvSpPr>
-          <p:cNvPr id="3" name="Rectangle 2"/>
-          <p:cNvSpPr/>
-          <p:nvPr/>
-        </p:nvSpPr>
-        <p:spPr>
-          <a:xfrm>
-            <a:off x="822960" y="1472184"/>
-            <a:ext cx="10545775" cy="987552"/>
-          </a:xfrm>
-          <a:prstGeom prst="rect">
-            <a:avLst/>
-          </a:prstGeom>
-          <a:solidFill>
-            <a:srgbClr val="F2F4F7"/>
-          </a:solidFill>
-          <a:ln>
-            <a:noFill/>
-          </a:ln>
-        </p:spPr>
-        <p:style>
-          <a:lnRef idx="1">
-            <a:schemeClr val="accent1"/>
-          </a:lnRef>
-          <a:fillRef idx="3">
-            <a:schemeClr val="accent1"/>
-          </a:fillRef>
-          <a:effectRef idx="2">
-            <a:schemeClr val="accent1"/>
-          </a:effectRef>
-          <a:fontRef idx="minor">
-            <a:schemeClr val="lt1"/>
-          </a:fontRef>
-        </p:style>
-        <p:txBody>
-          <a:bodyPr rtlCol="0" anchor="ctr" wrap="none" lIns="228600" tIns="137160"/>
+              <a:t>ก่อน push ครั้งแรก — .gitignore ต้องมาก่อน</a:t>
+            </a:r>
+          </a:p>
+        </p:txBody>
+      </p:sp>
+      <p:sp>
+        <p:nvSpPr>
+          <p:cNvPr id="3" name="TextBox 2"/>
+          <p:cNvSpPr txBox="1"/>
+          <p:nvPr/>
+        </p:nvSpPr>
+        <p:spPr>
+          <a:xfrm>
+            <a:off x="822960" y="2075688"/>
+            <a:ext cx="10545775" cy="560324"/>
+          </a:xfrm>
+          <a:prstGeom prst="rect">
+            <a:avLst/>
+          </a:prstGeom>
+          <a:noFill/>
+        </p:spPr>
+        <p:txBody>
+          <a:bodyPr wrap="square">
+            <a:spAutoFit/>
+          </a:bodyPr>
           <a:lstStyle/>
           <a:p>
             <a:pPr algn="l"/>
             <a:r>
-              <a:rPr sz="1800" b="0">
+              <a:rPr sz="2600" b="0">
                 <a:solidFill>
                   <a:srgbClr val="1A1A1A"/>
                 </a:solidFill>
-                <a:latin typeface="Consolas"/>
-                <a:ea typeface="Consolas"/>
-                <a:cs typeface="Consolas"/>
-              </a:rPr>
-              <a:t>git pull     ดึงงานล่าสุดจาก GitHub ลงเครื่องเรา</a:t>
-            </a:r>
-          </a:p>
+                <a:latin typeface="Leelawadee UI"/>
+                <a:ea typeface="Leelawadee UI"/>
+                <a:cs typeface="Leelawadee UI"/>
+              </a:rPr>
+              <a:t>• .gitignore = รายการไฟล์ที่ห้ามส่งขึ้น GitHub</a:t>
+            </a:r>
+          </a:p>
+        </p:txBody>
+      </p:sp>
+      <p:sp>
+        <p:nvSpPr>
+          <p:cNvPr id="4" name="TextBox 3"/>
+          <p:cNvSpPr txBox="1"/>
+          <p:nvPr/>
+        </p:nvSpPr>
+        <p:spPr>
+          <a:xfrm>
+            <a:off x="822960" y="2690876"/>
+            <a:ext cx="10545775" cy="560324"/>
+          </a:xfrm>
+          <a:prstGeom prst="rect">
+            <a:avLst/>
+          </a:prstGeom>
+          <a:noFill/>
+        </p:spPr>
+        <p:txBody>
+          <a:bodyPr wrap="square">
+            <a:spAutoFit/>
+          </a:bodyPr>
+          <a:lstStyle/>
           <a:p>
             <a:pPr algn="l"/>
             <a:r>
-              <a:rPr sz="1800" b="0">
+              <a:rPr sz="2600" b="0">
                 <a:solidFill>
                   <a:srgbClr val="1A1A1A"/>
                 </a:solidFill>
-                <a:latin typeface="Consolas"/>
-                <a:ea typeface="Consolas"/>
-                <a:cs typeface="Consolas"/>
-              </a:rPr>
-              <a:t>git push     ส่งงานจากเครื่องเราขึ้น GitHub</a:t>
-            </a:r>
-          </a:p>
-        </p:txBody>
-      </p:sp>
-      <p:sp>
-        <p:nvSpPr>
-          <p:cNvPr id="4" name="TextBox 3"/>
-          <p:cNvSpPr txBox="1"/>
-          <p:nvPr/>
-        </p:nvSpPr>
-        <p:spPr>
-          <a:xfrm>
-            <a:off x="822960" y="2642616"/>
+                <a:latin typeface="Leelawadee UI"/>
+                <a:ea typeface="Leelawadee UI"/>
+                <a:cs typeface="Leelawadee UI"/>
+              </a:rPr>
+              <a:t>• ต้องกัน node_modules และไฟล์คีย์ทุกชนิด</a:t>
+            </a:r>
+          </a:p>
+        </p:txBody>
+      </p:sp>
+      <p:sp>
+        <p:nvSpPr>
+          <p:cNvPr id="5" name="TextBox 4"/>
+          <p:cNvSpPr txBox="1"/>
+          <p:nvPr/>
+        </p:nvSpPr>
+        <p:spPr>
+          <a:xfrm>
+            <a:off x="822960" y="3306064"/>
             <a:ext cx="10545775" cy="560324"/>
           </a:xfrm>
           <a:prstGeom prst="rect">
@@ -18135,21 +17962,21 @@
                 <a:ea typeface="Leelawadee UI"/>
                 <a:cs typeface="Leelawadee UI"/>
               </a:rPr>
-              <a:t>• pull = ดึงลง ก่อนเริ่มงานทุกครั้ง</a:t>
-            </a:r>
-          </a:p>
-        </p:txBody>
-      </p:sp>
-      <p:sp>
-        <p:nvSpPr>
-          <p:cNvPr id="5" name="TextBox 4"/>
-          <p:cNvSpPr txBox="1"/>
-          <p:nvPr/>
-        </p:nvSpPr>
-        <p:spPr>
-          <a:xfrm>
-            <a:off x="822960" y="3257804"/>
-            <a:ext cx="10545775" cy="560324"/>
+              <a:t>• ให้ AI สร้าง → เราตรวจด้วย git status ว่ากันได้จริง</a:t>
+            </a:r>
+          </a:p>
+        </p:txBody>
+      </p:sp>
+      <p:sp>
+        <p:nvSpPr>
+          <p:cNvPr id="6" name="TextBox 5"/>
+          <p:cNvSpPr txBox="1"/>
+          <p:nvPr/>
+        </p:nvSpPr>
+        <p:spPr>
+          <a:xfrm>
+            <a:off x="822960" y="3921252"/>
+            <a:ext cx="10545775" cy="1029208"/>
           </a:xfrm>
           <a:prstGeom prst="rect">
             <a:avLst/>
@@ -18172,44 +17999,7 @@
                 <a:ea typeface="Leelawadee UI"/>
                 <a:cs typeface="Leelawadee UI"/>
               </a:rPr>
-              <a:t>• push = ส่งขึ้น หลัง commit ทุกครั้งที่งานเสร็จ</a:t>
-            </a:r>
-          </a:p>
-        </p:txBody>
-      </p:sp>
-      <p:sp>
-        <p:nvSpPr>
-          <p:cNvPr id="6" name="TextBox 5"/>
-          <p:cNvSpPr txBox="1"/>
-          <p:nvPr/>
-        </p:nvSpPr>
-        <p:spPr>
-          <a:xfrm>
-            <a:off x="822960" y="3872992"/>
-            <a:ext cx="10545775" cy="560324"/>
-          </a:xfrm>
-          <a:prstGeom prst="rect">
-            <a:avLst/>
-          </a:prstGeom>
-          <a:noFill/>
-        </p:spPr>
-        <p:txBody>
-          <a:bodyPr wrap="square">
-            <a:spAutoFit/>
-          </a:bodyPr>
-          <a:lstStyle/>
-          <a:p>
-            <a:pPr algn="l"/>
-            <a:r>
-              <a:rPr sz="2600" b="0">
-                <a:solidFill>
-                  <a:srgbClr val="1A1A1A"/>
-                </a:solidFill>
-                <a:latin typeface="Leelawadee UI"/>
-                <a:ea typeface="Leelawadee UI"/>
-                <a:cs typeface="Leelawadee UI"/>
-              </a:rPr>
-              <a:t>• งานล่าสุดอยู่บน GitHub — เครื่องใครก็ตามอาจล้าหลัง</a:t>
+              <a:t>• ลำดับสลับไม่ได้ — ของที่ขึ้นไปแล้ว มีคนคัดลอกได้ทันที</a:t>
             </a:r>
           </a:p>
         </p:txBody>
@@ -18300,7 +18090,7 @@
                 <a:ea typeface="Leelawadee UI"/>
                 <a:cs typeface="Leelawadee UI"/>
               </a:rPr>
-              <a:t>กติกา 3 ข้อส่วนกลาง — ท่องให้ขึ้นใจ</a:t>
+              <a:t>ก่อนให้ AI แตะ git — commit ก่อนเสมอ</a:t>
             </a:r>
           </a:p>
         </p:txBody>
@@ -18337,7 +18127,7 @@
                 <a:ea typeface="Leelawadee UI"/>
                 <a:cs typeface="Leelawadee UI"/>
               </a:rPr>
-              <a:t>• 1️⃣ ดึงก่อนเริ่มเสมอ — git pull ทุกครั้งก่อนแตะงาน</a:t>
+              <a:t>• งานที่ commit แล้ว เอากลับมาได้เสมอ</a:t>
             </a:r>
           </a:p>
         </p:txBody>
@@ -18374,7 +18164,7 @@
                 <a:ea typeface="Leelawadee UI"/>
                 <a:cs typeface="Leelawadee UI"/>
               </a:rPr>
-              <a:t>• 2️⃣ push ทุกครั้งที่งานเสร็จก้อนหนึ่ง — อย่าดองไว้</a:t>
+              <a:t>• งานที่ ยังไม่ commit หายแล้วหายเลย</a:t>
             </a:r>
           </a:p>
         </p:txBody>
@@ -18388,7 +18178,7 @@
         <p:spPr>
           <a:xfrm>
             <a:off x="822960" y="2702560"/>
-            <a:ext cx="10545775" cy="1029208"/>
+            <a:ext cx="10545775" cy="560324"/>
           </a:xfrm>
           <a:prstGeom prst="rect">
             <a:avLst/>
@@ -18411,7 +18201,7 @@
                 <a:ea typeface="Leelawadee UI"/>
                 <a:cs typeface="Leelawadee UI"/>
               </a:rPr>
-              <a:t>• 3️⃣ แก้ที่เดียว — อย่าแก้ทั้งบน GitHub และในเครื่องพร้อมกัน</a:t>
+              <a:t>• AI สั่ง git ผิดได้ — commit คือตาข่ายรองรับ</a:t>
             </a:r>
           </a:p>
         </p:txBody>
@@ -18419,6 +18209,43 @@
       <p:sp>
         <p:nvSpPr>
           <p:cNvPr id="6" name="TextBox 5"/>
+          <p:cNvSpPr txBox="1"/>
+          <p:nvPr/>
+        </p:nvSpPr>
+        <p:spPr>
+          <a:xfrm>
+            <a:off x="822960" y="3317748"/>
+            <a:ext cx="10545775" cy="560324"/>
+          </a:xfrm>
+          <a:prstGeom prst="rect">
+            <a:avLst/>
+          </a:prstGeom>
+          <a:noFill/>
+        </p:spPr>
+        <p:txBody>
+          <a:bodyPr wrap="square">
+            <a:spAutoFit/>
+          </a:bodyPr>
+          <a:lstStyle/>
+          <a:p>
+            <a:pPr algn="l"/>
+            <a:r>
+              <a:rPr sz="2600" b="0">
+                <a:solidFill>
+                  <a:srgbClr val="1A1A1A"/>
+                </a:solidFill>
+                <a:latin typeface="Leelawadee UI"/>
+                <a:ea typeface="Leelawadee UI"/>
+                <a:cs typeface="Leelawadee UI"/>
+              </a:rPr>
+              <a:t>• วงจร 4 จังหวะเดิม ใช้กับ git ด้วย</a:t>
+            </a:r>
+          </a:p>
+        </p:txBody>
+      </p:sp>
+      <p:sp>
+        <p:nvSpPr>
+          <p:cNvPr id="7" name="TextBox 6"/>
           <p:cNvSpPr txBox="1"/>
           <p:nvPr/>
         </p:nvSpPr>
@@ -18472,64 +18299,24 @@
       <p:grpSpPr/>
       <p:sp>
         <p:nvSpPr>
-          <p:cNvPr id="2" name="TextBox 1"/>
-          <p:cNvSpPr txBox="1"/>
-          <p:nvPr/>
-        </p:nvSpPr>
-        <p:spPr>
-          <a:xfrm>
-            <a:off x="822960" y="502920"/>
-            <a:ext cx="10545775" cy="804672"/>
-          </a:xfrm>
-          <a:prstGeom prst="rect">
-            <a:avLst/>
-          </a:prstGeom>
-          <a:noFill/>
-        </p:spPr>
-        <p:txBody>
-          <a:bodyPr wrap="square">
-            <a:spAutoFit/>
-          </a:bodyPr>
-          <a:lstStyle/>
-          <a:p>
-            <a:pPr algn="l"/>
-            <a:r>
-              <a:rPr sz="3600" b="1">
-                <a:solidFill>
-                  <a:srgbClr val="1F5FA8"/>
-                </a:solidFill>
-                <a:latin typeface="Leelawadee UI"/>
-                <a:ea typeface="Leelawadee UI"/>
-                <a:cs typeface="Leelawadee UI"/>
-              </a:rPr>
-              <a:t>ถ้าไม่มีกติกา จะเกิดอะไร</a:t>
-            </a:r>
-          </a:p>
-        </p:txBody>
-      </p:sp>
-      <p:sp>
-        <p:nvSpPr>
-          <p:cNvPr id="3" name="Rounded Rectangle 2"/>
+          <p:cNvPr id="2" name="Rectangle 1"/>
           <p:cNvSpPr/>
           <p:nvPr/>
         </p:nvSpPr>
         <p:spPr>
           <a:xfrm>
-            <a:off x="822960" y="1563624"/>
-            <a:ext cx="10545775" cy="1508760"/>
-          </a:xfrm>
-          <a:prstGeom prst="roundRect">
+            <a:off x="0" y="0"/>
+            <a:ext cx="12191695" cy="6858000"/>
+          </a:xfrm>
+          <a:prstGeom prst="rect">
             <a:avLst/>
           </a:prstGeom>
           <a:solidFill>
-            <a:srgbClr val="FDECEC"/>
+            <a:srgbClr val="FFF3DF"/>
           </a:solidFill>
-          <a:ln w="19050">
-            <a:solidFill>
-              <a:srgbClr val="D9534F"/>
-            </a:solidFill>
+          <a:ln>
+            <a:noFill/>
           </a:ln>
-          <a:effectLst/>
         </p:spPr>
         <p:style>
           <a:lnRef idx="1">
@@ -18548,69 +18335,31 @@
         <p:txBody>
           <a:bodyPr rtlCol="0" anchor="ctr"/>
           <a:lstStyle/>
-          <a:p/>
-        </p:txBody>
-      </p:sp>
-      <p:sp>
-        <p:nvSpPr>
-          <p:cNvPr id="4" name="TextBox 3"/>
-          <p:cNvSpPr txBox="1"/>
-          <p:nvPr/>
-        </p:nvSpPr>
-        <p:spPr>
-          <a:xfrm>
-            <a:off x="987552" y="1636776"/>
-            <a:ext cx="10216591" cy="310896"/>
-          </a:xfrm>
-          <a:prstGeom prst="rect">
-            <a:avLst/>
-          </a:prstGeom>
-          <a:noFill/>
-        </p:spPr>
-        <p:txBody>
-          <a:bodyPr wrap="square">
-            <a:spAutoFit/>
-          </a:bodyPr>
-          <a:lstStyle/>
-          <a:p>
-            <a:pPr algn="l"/>
-            <a:r>
-              <a:rPr sz="1500" b="1">
-                <a:solidFill>
-                  <a:srgbClr val="D9534F"/>
-                </a:solidFill>
-                <a:latin typeface="Leelawadee UI"/>
-                <a:ea typeface="Leelawadee UI"/>
-                <a:cs typeface="Leelawadee UI"/>
-              </a:rPr>
-              <a:t>❌ แก้สองที่พร้อมกัน</a:t>
-            </a:r>
-          </a:p>
-        </p:txBody>
-      </p:sp>
-      <p:sp>
-        <p:nvSpPr>
-          <p:cNvPr id="5" name="Rounded Rectangle 4"/>
+          <a:p>
+            <a:pPr algn="ctr"/>
+          </a:p>
+        </p:txBody>
+      </p:sp>
+      <p:sp>
+        <p:nvSpPr>
+          <p:cNvPr id="3" name="Rectangle 2"/>
           <p:cNvSpPr/>
           <p:nvPr/>
         </p:nvSpPr>
         <p:spPr>
           <a:xfrm>
-            <a:off x="1078992" y="1984248"/>
-            <a:ext cx="3088538" cy="996696"/>
-          </a:xfrm>
-          <a:prstGeom prst="roundRect">
+            <a:off x="0" y="0"/>
+            <a:ext cx="146304" cy="6858000"/>
+          </a:xfrm>
+          <a:prstGeom prst="rect">
             <a:avLst/>
           </a:prstGeom>
           <a:solidFill>
-            <a:srgbClr val="E8EFF7"/>
+            <a:srgbClr val="E0A02C"/>
           </a:solidFill>
-          <a:ln w="15875">
-            <a:solidFill>
-              <a:srgbClr val="9CB5D1"/>
-            </a:solidFill>
+          <a:ln>
+            <a:noFill/>
           </a:ln>
-          <a:effectLst/>
         </p:spPr>
         <p:style>
           <a:lnRef idx="1">
@@ -18627,12 +18376,112 @@
           </a:fontRef>
         </p:style>
         <p:txBody>
-          <a:bodyPr rtlCol="0" anchor="ctr" wrap="square" lIns="54864" rIns="54864" tIns="27432" bIns="27432"/>
+          <a:bodyPr rtlCol="0" anchor="ctr"/>
           <a:lstStyle/>
           <a:p>
             <a:pPr algn="ctr"/>
-            <a:r>
-              <a:rPr sz="1300" b="0">
+          </a:p>
+        </p:txBody>
+      </p:sp>
+      <p:sp>
+        <p:nvSpPr>
+          <p:cNvPr id="4" name="TextBox 3"/>
+          <p:cNvSpPr txBox="1"/>
+          <p:nvPr/>
+        </p:nvSpPr>
+        <p:spPr>
+          <a:xfrm>
+            <a:off x="9082735" y="109728"/>
+            <a:ext cx="2834640" cy="384048"/>
+          </a:xfrm>
+          <a:prstGeom prst="rect">
+            <a:avLst/>
+          </a:prstGeom>
+          <a:noFill/>
+        </p:spPr>
+        <p:txBody>
+          <a:bodyPr wrap="square">
+            <a:spAutoFit/>
+          </a:bodyPr>
+          <a:lstStyle/>
+          <a:p>
+            <a:pPr algn="r"/>
+            <a:r>
+              <a:rPr sz="1400" b="1">
+                <a:solidFill>
+                  <a:srgbClr val="8A5400"/>
+                </a:solidFill>
+                <a:latin typeface="Leelawadee UI"/>
+                <a:ea typeface="Leelawadee UI"/>
+                <a:cs typeface="Leelawadee UI"/>
+              </a:rPr>
+              <a:t>🎬 สลับไปหน้าจอสาธิตสด</a:t>
+            </a:r>
+          </a:p>
+        </p:txBody>
+      </p:sp>
+      <p:sp>
+        <p:nvSpPr>
+          <p:cNvPr id="5" name="TextBox 4"/>
+          <p:cNvSpPr txBox="1"/>
+          <p:nvPr/>
+        </p:nvSpPr>
+        <p:spPr>
+          <a:xfrm>
+            <a:off x="822960" y="502920"/>
+            <a:ext cx="10545775" cy="1408176"/>
+          </a:xfrm>
+          <a:prstGeom prst="rect">
+            <a:avLst/>
+          </a:prstGeom>
+          <a:noFill/>
+        </p:spPr>
+        <p:txBody>
+          <a:bodyPr wrap="square">
+            <a:spAutoFit/>
+          </a:bodyPr>
+          <a:lstStyle/>
+          <a:p>
+            <a:pPr algn="l"/>
+            <a:r>
+              <a:rPr sz="3600" b="1">
+                <a:solidFill>
+                  <a:srgbClr val="8A5400"/>
+                </a:solidFill>
+                <a:latin typeface="Leelawadee UI"/>
+                <a:ea typeface="Leelawadee UI"/>
+                <a:cs typeface="Leelawadee UI"/>
+              </a:rPr>
+              <a:t>🎬💥 สาธิต — push ขึ้น GitHub แล้วทำให้งานชนกัน ⏱ 11 นาที</a:t>
+            </a:r>
+          </a:p>
+        </p:txBody>
+      </p:sp>
+      <p:sp>
+        <p:nvSpPr>
+          <p:cNvPr id="6" name="TextBox 5"/>
+          <p:cNvSpPr txBox="1"/>
+          <p:nvPr/>
+        </p:nvSpPr>
+        <p:spPr>
+          <a:xfrm>
+            <a:off x="822960" y="2075688"/>
+            <a:ext cx="10545775" cy="1029208"/>
+          </a:xfrm>
+          <a:prstGeom prst="rect">
+            <a:avLst/>
+          </a:prstGeom>
+          <a:noFill/>
+        </p:spPr>
+        <p:txBody>
+          <a:bodyPr wrap="square">
+            <a:spAutoFit/>
+          </a:bodyPr>
+          <a:lstStyle/>
+          <a:p>
+            <a:pPr algn="l"/>
+            <a:r>
+              <a:rPr sz="2600" b="0">
                 <a:solidFill>
                   <a:srgbClr val="1A1A1A"/>
                 </a:solidFill>
@@ -18640,100 +18489,36 @@
                 <a:ea typeface="Leelawadee UI"/>
                 <a:cs typeface="Leelawadee UI"/>
               </a:rPr>
-              <a:t>แก้บน GitHub</a:t>
-            </a:r>
-          </a:p>
-        </p:txBody>
-      </p:sp>
-      <p:sp>
-        <p:nvSpPr>
-          <p:cNvPr id="6" name="Right Arrow 5"/>
-          <p:cNvSpPr/>
-          <p:nvPr/>
-        </p:nvSpPr>
-        <p:spPr>
-          <a:xfrm>
-            <a:off x="4213615" y="2333092"/>
-            <a:ext cx="291876" cy="299008"/>
-          </a:xfrm>
-          <a:prstGeom prst="rightArrow">
-            <a:avLst/>
-          </a:prstGeom>
-          <a:solidFill>
-            <a:srgbClr val="7A91A8"/>
-          </a:solidFill>
-          <a:ln>
-            <a:noFill/>
-          </a:ln>
-          <a:effectLst/>
-        </p:spPr>
-        <p:style>
-          <a:lnRef idx="1">
-            <a:schemeClr val="accent1"/>
-          </a:lnRef>
-          <a:fillRef idx="3">
-            <a:schemeClr val="accent1"/>
-          </a:fillRef>
-          <a:effectRef idx="2">
-            <a:schemeClr val="accent1"/>
-          </a:effectRef>
-          <a:fontRef idx="minor">
-            <a:schemeClr val="lt1"/>
-          </a:fontRef>
-        </p:style>
-        <p:txBody>
-          <a:bodyPr rtlCol="0" anchor="ctr"/>
-          <a:lstStyle/>
-          <a:p>
-            <a:pPr algn="ctr"/>
-          </a:p>
-        </p:txBody>
-      </p:sp>
-      <p:sp>
-        <p:nvSpPr>
-          <p:cNvPr id="7" name="Rounded Rectangle 6"/>
-          <p:cNvSpPr/>
-          <p:nvPr/>
-        </p:nvSpPr>
-        <p:spPr>
-          <a:xfrm>
-            <a:off x="4551578" y="1984248"/>
-            <a:ext cx="3088538" cy="996696"/>
-          </a:xfrm>
-          <a:prstGeom prst="roundRect">
-            <a:avLst/>
-          </a:prstGeom>
-          <a:solidFill>
-            <a:srgbClr val="E8EFF7"/>
-          </a:solidFill>
-          <a:ln w="15875">
-            <a:solidFill>
-              <a:srgbClr val="9CB5D1"/>
-            </a:solidFill>
-          </a:ln>
-          <a:effectLst/>
-        </p:spPr>
-        <p:style>
-          <a:lnRef idx="1">
-            <a:schemeClr val="accent1"/>
-          </a:lnRef>
-          <a:fillRef idx="3">
-            <a:schemeClr val="accent1"/>
-          </a:fillRef>
-          <a:effectRef idx="2">
-            <a:schemeClr val="accent1"/>
-          </a:effectRef>
-          <a:fontRef idx="minor">
-            <a:schemeClr val="lt1"/>
-          </a:fontRef>
-        </p:style>
-        <p:txBody>
-          <a:bodyPr rtlCol="0" anchor="ctr" wrap="square" lIns="54864" rIns="54864" tIns="27432" bIns="27432"/>
-          <a:lstStyle/>
-          <a:p>
-            <a:pPr algn="ctr"/>
-            <a:r>
-              <a:rPr sz="1300" b="0">
+              <a:t>• .gitignore → ตรวจ git status → push → กวาดตาดูหน้า repo</a:t>
+            </a:r>
+          </a:p>
+        </p:txBody>
+      </p:sp>
+      <p:sp>
+        <p:nvSpPr>
+          <p:cNvPr id="7" name="TextBox 6"/>
+          <p:cNvSpPr txBox="1"/>
+          <p:nvPr/>
+        </p:nvSpPr>
+        <p:spPr>
+          <a:xfrm>
+            <a:off x="822960" y="3159760"/>
+            <a:ext cx="10545775" cy="560324"/>
+          </a:xfrm>
+          <a:prstGeom prst="rect">
+            <a:avLst/>
+          </a:prstGeom>
+          <a:noFill/>
+        </p:spPr>
+        <p:txBody>
+          <a:bodyPr wrap="square">
+            <a:spAutoFit/>
+          </a:bodyPr>
+          <a:lstStyle/>
+          <a:p>
+            <a:pPr algn="l"/>
+            <a:r>
+              <a:rPr sz="2600" b="0">
                 <a:solidFill>
                   <a:srgbClr val="1A1A1A"/>
                 </a:solidFill>
@@ -18741,166 +18526,21 @@
                 <a:ea typeface="Leelawadee UI"/>
                 <a:cs typeface="Leelawadee UI"/>
               </a:rPr>
-              <a:t>แก้ในเครื่อง</a:t>
-            </a:r>
-          </a:p>
-        </p:txBody>
-      </p:sp>
-      <p:sp>
-        <p:nvSpPr>
-          <p:cNvPr id="8" name="Right Arrow 7"/>
-          <p:cNvSpPr/>
-          <p:nvPr/>
-        </p:nvSpPr>
-        <p:spPr>
-          <a:xfrm>
-            <a:off x="7686201" y="2333092"/>
-            <a:ext cx="291876" cy="299008"/>
-          </a:xfrm>
-          <a:prstGeom prst="rightArrow">
-            <a:avLst/>
-          </a:prstGeom>
-          <a:solidFill>
-            <a:srgbClr val="7A91A8"/>
-          </a:solidFill>
-          <a:ln>
-            <a:noFill/>
-          </a:ln>
-          <a:effectLst/>
-        </p:spPr>
-        <p:style>
-          <a:lnRef idx="1">
-            <a:schemeClr val="accent1"/>
-          </a:lnRef>
-          <a:fillRef idx="3">
-            <a:schemeClr val="accent1"/>
-          </a:fillRef>
-          <a:effectRef idx="2">
-            <a:schemeClr val="accent1"/>
-          </a:effectRef>
-          <a:fontRef idx="minor">
-            <a:schemeClr val="lt1"/>
-          </a:fontRef>
-        </p:style>
-        <p:txBody>
-          <a:bodyPr rtlCol="0" anchor="ctr"/>
-          <a:lstStyle/>
-          <a:p>
-            <a:pPr algn="ctr"/>
-          </a:p>
-        </p:txBody>
-      </p:sp>
-      <p:sp>
-        <p:nvSpPr>
-          <p:cNvPr id="9" name="Rounded Rectangle 8"/>
-          <p:cNvSpPr/>
-          <p:nvPr/>
-        </p:nvSpPr>
-        <p:spPr>
-          <a:xfrm>
-            <a:off x="8024164" y="1984248"/>
-            <a:ext cx="3088538" cy="996696"/>
-          </a:xfrm>
-          <a:prstGeom prst="roundRect">
-            <a:avLst/>
-          </a:prstGeom>
-          <a:solidFill>
-            <a:srgbClr val="1F5FA8"/>
-          </a:solidFill>
-          <a:ln w="15875">
-            <a:solidFill>
-              <a:srgbClr val="9CB5D1"/>
-            </a:solidFill>
-          </a:ln>
-          <a:effectLst/>
-        </p:spPr>
-        <p:style>
-          <a:lnRef idx="1">
-            <a:schemeClr val="accent1"/>
-          </a:lnRef>
-          <a:fillRef idx="3">
-            <a:schemeClr val="accent1"/>
-          </a:fillRef>
-          <a:effectRef idx="2">
-            <a:schemeClr val="accent1"/>
-          </a:effectRef>
-          <a:fontRef idx="minor">
-            <a:schemeClr val="lt1"/>
-          </a:fontRef>
-        </p:style>
-        <p:txBody>
-          <a:bodyPr rtlCol="0" anchor="ctr" wrap="square" lIns="54864" rIns="54864" tIns="27432" bIns="27432"/>
-          <a:lstStyle/>
-          <a:p>
-            <a:pPr algn="ctr"/>
-            <a:r>
-              <a:rPr sz="1300" b="1">
-                <a:solidFill>
-                  <a:srgbClr val="FFFFFF"/>
-                </a:solidFill>
-                <a:latin typeface="Leelawadee UI"/>
-                <a:ea typeface="Leelawadee UI"/>
-                <a:cs typeface="Leelawadee UI"/>
-              </a:rPr>
-              <a:t>pull แล้วชน</a:t>
-            </a:r>
-          </a:p>
-        </p:txBody>
-      </p:sp>
-      <p:sp>
-        <p:nvSpPr>
-          <p:cNvPr id="10" name="Rounded Rectangle 9"/>
-          <p:cNvSpPr/>
-          <p:nvPr/>
-        </p:nvSpPr>
-        <p:spPr>
-          <a:xfrm>
-            <a:off x="822960" y="3273552"/>
-            <a:ext cx="10545775" cy="1508760"/>
-          </a:xfrm>
-          <a:prstGeom prst="roundRect">
-            <a:avLst/>
-          </a:prstGeom>
-          <a:solidFill>
-            <a:srgbClr val="EAF6EC"/>
-          </a:solidFill>
-          <a:ln w="19050">
-            <a:solidFill>
-              <a:srgbClr val="3F9B54"/>
-            </a:solidFill>
-          </a:ln>
-          <a:effectLst/>
-        </p:spPr>
-        <p:style>
-          <a:lnRef idx="1">
-            <a:schemeClr val="accent1"/>
-          </a:lnRef>
-          <a:fillRef idx="3">
-            <a:schemeClr val="accent1"/>
-          </a:fillRef>
-          <a:effectRef idx="2">
-            <a:schemeClr val="accent1"/>
-          </a:effectRef>
-          <a:fontRef idx="minor">
-            <a:schemeClr val="lt1"/>
-          </a:fontRef>
-        </p:style>
-        <p:txBody>
-          <a:bodyPr rtlCol="0" anchor="ctr"/>
-          <a:lstStyle/>
-          <a:p/>
-        </p:txBody>
-      </p:sp>
-      <p:sp>
-        <p:nvSpPr>
-          <p:cNvPr id="11" name="TextBox 10"/>
-          <p:cNvSpPr txBox="1"/>
-          <p:nvPr/>
-        </p:nvSpPr>
-        <p:spPr>
-          <a:xfrm>
-            <a:off x="987552" y="3346704"/>
-            <a:ext cx="10216591" cy="310896"/>
+              <a:t>• สมมติว่ามีการแก้ไฟล์ไว้บน GitHub</a:t>
+            </a:r>
+          </a:p>
+        </p:txBody>
+      </p:sp>
+      <p:sp>
+        <p:nvSpPr>
+          <p:cNvPr id="8" name="TextBox 7"/>
+          <p:cNvSpPr txBox="1"/>
+          <p:nvPr/>
+        </p:nvSpPr>
+        <p:spPr>
+          <a:xfrm>
+            <a:off x="822960" y="3774948"/>
+            <a:ext cx="10545775" cy="560324"/>
           </a:xfrm>
           <a:prstGeom prst="rect">
             <a:avLst/>
@@ -18915,64 +18555,7 @@
           <a:p>
             <a:pPr algn="l"/>
             <a:r>
-              <a:rPr sz="1500" b="1">
-                <a:solidFill>
-                  <a:srgbClr val="3F9B54"/>
-                </a:solidFill>
-                <a:latin typeface="Leelawadee UI"/>
-                <a:ea typeface="Leelawadee UI"/>
-                <a:cs typeface="Leelawadee UI"/>
-              </a:rPr>
-              <a:t>✅ ใช้กติกา 3 ข้อ</a:t>
-            </a:r>
-          </a:p>
-        </p:txBody>
-      </p:sp>
-      <p:sp>
-        <p:nvSpPr>
-          <p:cNvPr id="12" name="Rounded Rectangle 11"/>
-          <p:cNvSpPr/>
-          <p:nvPr/>
-        </p:nvSpPr>
-        <p:spPr>
-          <a:xfrm>
-            <a:off x="1078992" y="3694176"/>
-            <a:ext cx="3088538" cy="996696"/>
-          </a:xfrm>
-          <a:prstGeom prst="roundRect">
-            <a:avLst/>
-          </a:prstGeom>
-          <a:solidFill>
-            <a:srgbClr val="E8EFF7"/>
-          </a:solidFill>
-          <a:ln w="15875">
-            <a:solidFill>
-              <a:srgbClr val="9CB5D1"/>
-            </a:solidFill>
-          </a:ln>
-          <a:effectLst/>
-        </p:spPr>
-        <p:style>
-          <a:lnRef idx="1">
-            <a:schemeClr val="accent1"/>
-          </a:lnRef>
-          <a:fillRef idx="3">
-            <a:schemeClr val="accent1"/>
-          </a:fillRef>
-          <a:effectRef idx="2">
-            <a:schemeClr val="accent1"/>
-          </a:effectRef>
-          <a:fontRef idx="minor">
-            <a:schemeClr val="lt1"/>
-          </a:fontRef>
-        </p:style>
-        <p:txBody>
-          <a:bodyPr rtlCol="0" anchor="ctr" wrap="square" lIns="54864" rIns="54864" tIns="27432" bIns="27432"/>
-          <a:lstStyle/>
-          <a:p>
-            <a:pPr algn="ctr"/>
-            <a:r>
-              <a:rPr sz="1300" b="0">
+              <a:rPr sz="2600" b="0">
                 <a:solidFill>
                   <a:srgbClr val="1A1A1A"/>
                 </a:solidFill>
@@ -18980,100 +18563,36 @@
                 <a:ea typeface="Leelawadee UI"/>
                 <a:cs typeface="Leelawadee UI"/>
               </a:rPr>
-              <a:t>ดึงก่อนเริ่ม</a:t>
-            </a:r>
-          </a:p>
-        </p:txBody>
-      </p:sp>
-      <p:sp>
-        <p:nvSpPr>
-          <p:cNvPr id="13" name="Right Arrow 12"/>
-          <p:cNvSpPr/>
-          <p:nvPr/>
-        </p:nvSpPr>
-        <p:spPr>
-          <a:xfrm>
-            <a:off x="4213615" y="4043020"/>
-            <a:ext cx="291876" cy="299008"/>
-          </a:xfrm>
-          <a:prstGeom prst="rightArrow">
-            <a:avLst/>
-          </a:prstGeom>
-          <a:solidFill>
-            <a:srgbClr val="7A91A8"/>
-          </a:solidFill>
-          <a:ln>
-            <a:noFill/>
-          </a:ln>
-          <a:effectLst/>
-        </p:spPr>
-        <p:style>
-          <a:lnRef idx="1">
-            <a:schemeClr val="accent1"/>
-          </a:lnRef>
-          <a:fillRef idx="3">
-            <a:schemeClr val="accent1"/>
-          </a:fillRef>
-          <a:effectRef idx="2">
-            <a:schemeClr val="accent1"/>
-          </a:effectRef>
-          <a:fontRef idx="minor">
-            <a:schemeClr val="lt1"/>
-          </a:fontRef>
-        </p:style>
-        <p:txBody>
-          <a:bodyPr rtlCol="0" anchor="ctr"/>
-          <a:lstStyle/>
-          <a:p>
-            <a:pPr algn="ctr"/>
-          </a:p>
-        </p:txBody>
-      </p:sp>
-      <p:sp>
-        <p:nvSpPr>
-          <p:cNvPr id="14" name="Rounded Rectangle 13"/>
-          <p:cNvSpPr/>
-          <p:nvPr/>
-        </p:nvSpPr>
-        <p:spPr>
-          <a:xfrm>
-            <a:off x="4551578" y="3694176"/>
-            <a:ext cx="3088538" cy="996696"/>
-          </a:xfrm>
-          <a:prstGeom prst="roundRect">
-            <a:avLst/>
-          </a:prstGeom>
-          <a:solidFill>
-            <a:srgbClr val="E8EFF7"/>
-          </a:solidFill>
-          <a:ln w="15875">
-            <a:solidFill>
-              <a:srgbClr val="9CB5D1"/>
-            </a:solidFill>
-          </a:ln>
-          <a:effectLst/>
-        </p:spPr>
-        <p:style>
-          <a:lnRef idx="1">
-            <a:schemeClr val="accent1"/>
-          </a:lnRef>
-          <a:fillRef idx="3">
-            <a:schemeClr val="accent1"/>
-          </a:fillRef>
-          <a:effectRef idx="2">
-            <a:schemeClr val="accent1"/>
-          </a:effectRef>
-          <a:fontRef idx="minor">
-            <a:schemeClr val="lt1"/>
-          </a:fontRef>
-        </p:style>
-        <p:txBody>
-          <a:bodyPr rtlCol="0" anchor="ctr" wrap="square" lIns="54864" rIns="54864" tIns="27432" bIns="27432"/>
-          <a:lstStyle/>
-          <a:p>
-            <a:pPr algn="ctr"/>
-            <a:r>
-              <a:rPr sz="1300" b="0">
+              <a:t>• เราแก้ไฟล์เดียวกันในเครื่อง → push → ถูกปฏิเสธ</a:t>
+            </a:r>
+          </a:p>
+        </p:txBody>
+      </p:sp>
+      <p:sp>
+        <p:nvSpPr>
+          <p:cNvPr id="9" name="TextBox 8"/>
+          <p:cNvSpPr txBox="1"/>
+          <p:nvPr/>
+        </p:nvSpPr>
+        <p:spPr>
+          <a:xfrm>
+            <a:off x="822960" y="4390136"/>
+            <a:ext cx="10545775" cy="560324"/>
+          </a:xfrm>
+          <a:prstGeom prst="rect">
+            <a:avLst/>
+          </a:prstGeom>
+          <a:noFill/>
+        </p:spPr>
+        <p:txBody>
+          <a:bodyPr wrap="square">
+            <a:spAutoFit/>
+          </a:bodyPr>
+          <a:lstStyle/>
+          <a:p>
+            <a:pPr algn="l"/>
+            <a:r>
+              <a:rPr sz="2600" b="0">
                 <a:solidFill>
                   <a:srgbClr val="1A1A1A"/>
                 </a:solidFill>
@@ -19081,115 +18600,14 @@
                 <a:ea typeface="Leelawadee UI"/>
                 <a:cs typeface="Leelawadee UI"/>
               </a:rPr>
-              <a:t>แก้ที่เดียว</a:t>
-            </a:r>
-          </a:p>
-        </p:txBody>
-      </p:sp>
-      <p:sp>
-        <p:nvSpPr>
-          <p:cNvPr id="15" name="Right Arrow 14"/>
-          <p:cNvSpPr/>
-          <p:nvPr/>
-        </p:nvSpPr>
-        <p:spPr>
-          <a:xfrm>
-            <a:off x="7686201" y="4043020"/>
-            <a:ext cx="291876" cy="299008"/>
-          </a:xfrm>
-          <a:prstGeom prst="rightArrow">
-            <a:avLst/>
-          </a:prstGeom>
-          <a:solidFill>
-            <a:srgbClr val="7A91A8"/>
-          </a:solidFill>
-          <a:ln>
-            <a:noFill/>
-          </a:ln>
-          <a:effectLst/>
-        </p:spPr>
-        <p:style>
-          <a:lnRef idx="1">
-            <a:schemeClr val="accent1"/>
-          </a:lnRef>
-          <a:fillRef idx="3">
-            <a:schemeClr val="accent1"/>
-          </a:fillRef>
-          <a:effectRef idx="2">
-            <a:schemeClr val="accent1"/>
-          </a:effectRef>
-          <a:fontRef idx="minor">
-            <a:schemeClr val="lt1"/>
-          </a:fontRef>
-        </p:style>
-        <p:txBody>
-          <a:bodyPr rtlCol="0" anchor="ctr"/>
-          <a:lstStyle/>
-          <a:p>
-            <a:pPr algn="ctr"/>
-          </a:p>
-        </p:txBody>
-      </p:sp>
-      <p:sp>
-        <p:nvSpPr>
-          <p:cNvPr id="16" name="Rounded Rectangle 15"/>
-          <p:cNvSpPr/>
-          <p:nvPr/>
-        </p:nvSpPr>
-        <p:spPr>
-          <a:xfrm>
-            <a:off x="8024164" y="3694176"/>
-            <a:ext cx="3088538" cy="996696"/>
-          </a:xfrm>
-          <a:prstGeom prst="roundRect">
-            <a:avLst/>
-          </a:prstGeom>
-          <a:solidFill>
-            <a:srgbClr val="E8EFF7"/>
-          </a:solidFill>
-          <a:ln w="15875">
-            <a:solidFill>
-              <a:srgbClr val="9CB5D1"/>
-            </a:solidFill>
-          </a:ln>
-          <a:effectLst/>
-        </p:spPr>
-        <p:style>
-          <a:lnRef idx="1">
-            <a:schemeClr val="accent1"/>
-          </a:lnRef>
-          <a:fillRef idx="3">
-            <a:schemeClr val="accent1"/>
-          </a:fillRef>
-          <a:effectRef idx="2">
-            <a:schemeClr val="accent1"/>
-          </a:effectRef>
-          <a:fontRef idx="minor">
-            <a:schemeClr val="lt1"/>
-          </a:fontRef>
-        </p:style>
-        <p:txBody>
-          <a:bodyPr rtlCol="0" anchor="ctr" wrap="square" lIns="54864" rIns="54864" tIns="27432" bIns="27432"/>
-          <a:lstStyle/>
-          <a:p>
-            <a:pPr algn="ctr"/>
-            <a:r>
-              <a:rPr sz="1300" b="0">
-                <a:solidFill>
-                  <a:srgbClr val="1A1A1A"/>
-                </a:solidFill>
-                <a:latin typeface="Leelawadee UI"/>
-                <a:ea typeface="Leelawadee UI"/>
-                <a:cs typeface="Leelawadee UI"/>
-              </a:rPr>
-              <a:t>push ผ่าน</a:t>
-            </a:r>
-          </a:p>
-        </p:txBody>
-      </p:sp>
-      <p:sp>
-        <p:nvSpPr>
-          <p:cNvPr id="17" name="TextBox 16"/>
+              <a:t>• ส่งให้ Claude → มันรวมให้ → push ผ่าน</a:t>
+            </a:r>
+          </a:p>
+        </p:txBody>
+      </p:sp>
+      <p:sp>
+        <p:nvSpPr>
+          <p:cNvPr id="10" name="TextBox 9"/>
           <p:cNvSpPr txBox="1"/>
           <p:nvPr/>
         </p:nvSpPr>
@@ -19512,7 +18930,7 @@
                 <a:ea typeface="Leelawadee UI"/>
                 <a:cs typeface="Leelawadee UI"/>
               </a:rPr>
-              <a:t>งานชนกัน (conflict) — หน้าตาเป็นแบบนี้</a:t>
+              <a:t>✅ ช่วงที่ 5 คุณต้องได้อะไรกลับไป</a:t>
             </a:r>
           </a:p>
         </p:txBody>
@@ -19549,7 +18967,7 @@
                 <a:ea typeface="Leelawadee UI"/>
                 <a:cs typeface="Leelawadee UI"/>
               </a:rPr>
-              <a:t>• push ถูกปฏิเสธ → ให้ pull ก่อน</a:t>
+              <a:t>• รู้ว่าคำสั่ง git ทั้งหมด ให้ Claude ทำให้ได้</a:t>
             </a:r>
           </a:p>
         </p:txBody>
@@ -19586,7 +19004,7 @@
                 <a:ea typeface="Leelawadee UI"/>
                 <a:cs typeface="Leelawadee UI"/>
               </a:rPr>
-              <a:t>• pull แล้วมีไฟล์ที่ขึ้นเครื่องหมาย &lt;&lt;&lt;&lt;&lt;&lt;&lt;</a:t>
+              <a:t>• ท่อง 3 อย่างที่ AI ทำแทนไม่ได้</a:t>
             </a:r>
           </a:p>
         </p:txBody>
@@ -19623,7 +19041,7 @@
                 <a:ea typeface="Leelawadee UI"/>
                 <a:cs typeface="Leelawadee UI"/>
               </a:rPr>
-              <a:t>• แปลว่า git ถามเราว่า จะเก็บของใคร</a:t>
+              <a:t>• รู้ว่า commit ก่อนให้ AI แตะ git เสมอ</a:t>
             </a:r>
           </a:p>
         </p:txBody>
@@ -19660,7 +19078,7 @@
                 <a:ea typeface="Leelawadee UI"/>
                 <a:cs typeface="Leelawadee UI"/>
               </a:rPr>
-              <a:t>• ไม่มีงานของใครหาย — ทั้งสองเวอร์ชันอยู่ในไฟล์นั้น</a:t>
+              <a:t>• รู้ว่างานชนกันไม่ใช่งานหาย — กู้ได้เสมอ</a:t>
             </a:r>
           </a:p>
         </p:txBody>
@@ -19734,7 +19152,7 @@
             <a:avLst/>
           </a:prstGeom>
           <a:solidFill>
-            <a:srgbClr val="FFF3DF"/>
+            <a:srgbClr val="1F5FA8"/>
           </a:solidFill>
           <a:ln>
             <a:noFill/>
@@ -19764,272 +19182,44 @@
       </p:sp>
       <p:sp>
         <p:nvSpPr>
-          <p:cNvPr id="3" name="Rectangle 2"/>
-          <p:cNvSpPr/>
-          <p:nvPr/>
-        </p:nvSpPr>
-        <p:spPr>
-          <a:xfrm>
-            <a:off x="0" y="0"/>
-            <a:ext cx="146304" cy="6858000"/>
-          </a:xfrm>
-          <a:prstGeom prst="rect">
-            <a:avLst/>
-          </a:prstGeom>
-          <a:solidFill>
-            <a:srgbClr val="E0A02C"/>
-          </a:solidFill>
-          <a:ln>
-            <a:noFill/>
-          </a:ln>
-        </p:spPr>
-        <p:style>
-          <a:lnRef idx="1">
-            <a:schemeClr val="accent1"/>
-          </a:lnRef>
-          <a:fillRef idx="3">
-            <a:schemeClr val="accent1"/>
-          </a:fillRef>
-          <a:effectRef idx="2">
-            <a:schemeClr val="accent1"/>
-          </a:effectRef>
-          <a:fontRef idx="minor">
-            <a:schemeClr val="lt1"/>
-          </a:fontRef>
-        </p:style>
-        <p:txBody>
-          <a:bodyPr rtlCol="0" anchor="ctr"/>
+          <p:cNvPr id="3" name="TextBox 2"/>
+          <p:cNvSpPr txBox="1"/>
+          <p:nvPr/>
+        </p:nvSpPr>
+        <p:spPr>
+          <a:xfrm>
+            <a:off x="822960" y="2743200"/>
+            <a:ext cx="10545775" cy="1463040"/>
+          </a:xfrm>
+          <a:prstGeom prst="rect">
+            <a:avLst/>
+          </a:prstGeom>
+          <a:noFill/>
+        </p:spPr>
+        <p:txBody>
+          <a:bodyPr wrap="square" anchor="ctr">
+            <a:spAutoFit/>
+          </a:bodyPr>
           <a:lstStyle/>
           <a:p>
             <a:pPr algn="ctr"/>
+            <a:r>
+              <a:rPr sz="4000" b="1">
+                <a:solidFill>
+                  <a:srgbClr val="FFFFFF"/>
+                </a:solidFill>
+                <a:latin typeface="Leelawadee UI"/>
+                <a:ea typeface="Leelawadee UI"/>
+                <a:cs typeface="Leelawadee UI"/>
+              </a:rPr>
+              <a:t>ช่วงที่ 6 — 🌐 Deploy ขึ้นออนไลน์ ⏱ 11:22–11:55</a:t>
+            </a:r>
           </a:p>
         </p:txBody>
       </p:sp>
       <p:sp>
         <p:nvSpPr>
           <p:cNvPr id="4" name="TextBox 3"/>
-          <p:cNvSpPr txBox="1"/>
-          <p:nvPr/>
-        </p:nvSpPr>
-        <p:spPr>
-          <a:xfrm>
-            <a:off x="9082735" y="109728"/>
-            <a:ext cx="2834640" cy="384048"/>
-          </a:xfrm>
-          <a:prstGeom prst="rect">
-            <a:avLst/>
-          </a:prstGeom>
-          <a:noFill/>
-        </p:spPr>
-        <p:txBody>
-          <a:bodyPr wrap="square">
-            <a:spAutoFit/>
-          </a:bodyPr>
-          <a:lstStyle/>
-          <a:p>
-            <a:pPr algn="r"/>
-            <a:r>
-              <a:rPr sz="1400" b="1">
-                <a:solidFill>
-                  <a:srgbClr val="8A5400"/>
-                </a:solidFill>
-                <a:latin typeface="Leelawadee UI"/>
-                <a:ea typeface="Leelawadee UI"/>
-                <a:cs typeface="Leelawadee UI"/>
-              </a:rPr>
-              <a:t>🎬 สลับไปหน้าจอสาธิตสด</a:t>
-            </a:r>
-          </a:p>
-        </p:txBody>
-      </p:sp>
-      <p:sp>
-        <p:nvSpPr>
-          <p:cNvPr id="5" name="TextBox 4"/>
-          <p:cNvSpPr txBox="1"/>
-          <p:nvPr/>
-        </p:nvSpPr>
-        <p:spPr>
-          <a:xfrm>
-            <a:off x="822960" y="502920"/>
-            <a:ext cx="10545775" cy="1408176"/>
-          </a:xfrm>
-          <a:prstGeom prst="rect">
-            <a:avLst/>
-          </a:prstGeom>
-          <a:noFill/>
-        </p:spPr>
-        <p:txBody>
-          <a:bodyPr wrap="square">
-            <a:spAutoFit/>
-          </a:bodyPr>
-          <a:lstStyle/>
-          <a:p>
-            <a:pPr algn="l"/>
-            <a:r>
-              <a:rPr sz="3600" b="1">
-                <a:solidFill>
-                  <a:srgbClr val="8A5400"/>
-                </a:solidFill>
-                <a:latin typeface="Leelawadee UI"/>
-                <a:ea typeface="Leelawadee UI"/>
-                <a:cs typeface="Leelawadee UI"/>
-              </a:rPr>
-              <a:t>🎬💥 สาธิต — push ขึ้น GitHub แล้วทำให้งานชนกัน ⏱ 11 นาที</a:t>
-            </a:r>
-          </a:p>
-        </p:txBody>
-      </p:sp>
-      <p:sp>
-        <p:nvSpPr>
-          <p:cNvPr id="6" name="TextBox 5"/>
-          <p:cNvSpPr txBox="1"/>
-          <p:nvPr/>
-        </p:nvSpPr>
-        <p:spPr>
-          <a:xfrm>
-            <a:off x="822960" y="2075688"/>
-            <a:ext cx="10545775" cy="1029208"/>
-          </a:xfrm>
-          <a:prstGeom prst="rect">
-            <a:avLst/>
-          </a:prstGeom>
-          <a:noFill/>
-        </p:spPr>
-        <p:txBody>
-          <a:bodyPr wrap="square">
-            <a:spAutoFit/>
-          </a:bodyPr>
-          <a:lstStyle/>
-          <a:p>
-            <a:pPr algn="l"/>
-            <a:r>
-              <a:rPr sz="2600" b="0">
-                <a:solidFill>
-                  <a:srgbClr val="1A1A1A"/>
-                </a:solidFill>
-                <a:latin typeface="Leelawadee UI"/>
-                <a:ea typeface="Leelawadee UI"/>
-                <a:cs typeface="Leelawadee UI"/>
-              </a:rPr>
-              <a:t>• .gitignore → ตรวจ git status → push → กวาดตาดูหน้า repo</a:t>
-            </a:r>
-          </a:p>
-        </p:txBody>
-      </p:sp>
-      <p:sp>
-        <p:nvSpPr>
-          <p:cNvPr id="7" name="TextBox 6"/>
-          <p:cNvSpPr txBox="1"/>
-          <p:nvPr/>
-        </p:nvSpPr>
-        <p:spPr>
-          <a:xfrm>
-            <a:off x="822960" y="3159760"/>
-            <a:ext cx="10545775" cy="560324"/>
-          </a:xfrm>
-          <a:prstGeom prst="rect">
-            <a:avLst/>
-          </a:prstGeom>
-          <a:noFill/>
-        </p:spPr>
-        <p:txBody>
-          <a:bodyPr wrap="square">
-            <a:spAutoFit/>
-          </a:bodyPr>
-          <a:lstStyle/>
-          <a:p>
-            <a:pPr algn="l"/>
-            <a:r>
-              <a:rPr sz="2600" b="0">
-                <a:solidFill>
-                  <a:srgbClr val="1A1A1A"/>
-                </a:solidFill>
-                <a:latin typeface="Leelawadee UI"/>
-                <a:ea typeface="Leelawadee UI"/>
-                <a:cs typeface="Leelawadee UI"/>
-              </a:rPr>
-              <a:t>• สมมติว่ามีการแก้ไฟล์ไว้บน GitHub</a:t>
-            </a:r>
-          </a:p>
-        </p:txBody>
-      </p:sp>
-      <p:sp>
-        <p:nvSpPr>
-          <p:cNvPr id="8" name="TextBox 7"/>
-          <p:cNvSpPr txBox="1"/>
-          <p:nvPr/>
-        </p:nvSpPr>
-        <p:spPr>
-          <a:xfrm>
-            <a:off x="822960" y="3774948"/>
-            <a:ext cx="10545775" cy="560324"/>
-          </a:xfrm>
-          <a:prstGeom prst="rect">
-            <a:avLst/>
-          </a:prstGeom>
-          <a:noFill/>
-        </p:spPr>
-        <p:txBody>
-          <a:bodyPr wrap="square">
-            <a:spAutoFit/>
-          </a:bodyPr>
-          <a:lstStyle/>
-          <a:p>
-            <a:pPr algn="l"/>
-            <a:r>
-              <a:rPr sz="2600" b="0">
-                <a:solidFill>
-                  <a:srgbClr val="1A1A1A"/>
-                </a:solidFill>
-                <a:latin typeface="Leelawadee UI"/>
-                <a:ea typeface="Leelawadee UI"/>
-                <a:cs typeface="Leelawadee UI"/>
-              </a:rPr>
-              <a:t>• เราแก้ไฟล์เดียวกันในเครื่อง → push → ถูกปฏิเสธ</a:t>
-            </a:r>
-          </a:p>
-        </p:txBody>
-      </p:sp>
-      <p:sp>
-        <p:nvSpPr>
-          <p:cNvPr id="9" name="TextBox 8"/>
-          <p:cNvSpPr txBox="1"/>
-          <p:nvPr/>
-        </p:nvSpPr>
-        <p:spPr>
-          <a:xfrm>
-            <a:off x="822960" y="4390136"/>
-            <a:ext cx="10545775" cy="1029208"/>
-          </a:xfrm>
-          <a:prstGeom prst="rect">
-            <a:avLst/>
-          </a:prstGeom>
-          <a:noFill/>
-        </p:spPr>
-        <p:txBody>
-          <a:bodyPr wrap="square">
-            <a:spAutoFit/>
-          </a:bodyPr>
-          <a:lstStyle/>
-          <a:p>
-            <a:pPr algn="l"/>
-            <a:r>
-              <a:rPr sz="2600" b="0">
-                <a:solidFill>
-                  <a:srgbClr val="1A1A1A"/>
-                </a:solidFill>
-                <a:latin typeface="Leelawadee UI"/>
-                <a:ea typeface="Leelawadee UI"/>
-                <a:cs typeface="Leelawadee UI"/>
-              </a:rPr>
-              <a:t>• pull → เจอเครื่องหมายชนกัน → ให้ Claude ช่วยรวม → push ผ่าน</a:t>
-            </a:r>
-          </a:p>
-        </p:txBody>
-      </p:sp>
-      <p:sp>
-        <p:nvSpPr>
-          <p:cNvPr id="10" name="TextBox 9"/>
           <p:cNvSpPr txBox="1"/>
           <p:nvPr/>
         </p:nvSpPr>
@@ -20090,7 +19280,7 @@
         <p:spPr>
           <a:xfrm>
             <a:off x="822960" y="502920"/>
-            <a:ext cx="10545775" cy="804672"/>
+            <a:ext cx="10545775" cy="1408176"/>
           </a:xfrm>
           <a:prstGeom prst="rect">
             <a:avLst/>
@@ -20113,7 +19303,7 @@
                 <a:ea typeface="Leelawadee UI"/>
                 <a:cs typeface="Leelawadee UI"/>
               </a:rPr>
-              <a:t>✅ ช่วงที่ 5 คุณต้องได้อะไรกลับไป</a:t>
+              <a:t>Deploy = นำเว็บขึ้นออนไลน์ให้คนอื่นเปิดได้</a:t>
             </a:r>
           </a:p>
         </p:txBody>
@@ -20126,7 +19316,44 @@
         </p:nvSpPr>
         <p:spPr>
           <a:xfrm>
-            <a:off x="822960" y="1472184"/>
+            <a:off x="822960" y="2075688"/>
+            <a:ext cx="10545775" cy="1029208"/>
+          </a:xfrm>
+          <a:prstGeom prst="rect">
+            <a:avLst/>
+          </a:prstGeom>
+          <a:noFill/>
+        </p:spPr>
+        <p:txBody>
+          <a:bodyPr wrap="square">
+            <a:spAutoFit/>
+          </a:bodyPr>
+          <a:lstStyle/>
+          <a:p>
+            <a:pPr algn="l"/>
+            <a:r>
+              <a:rPr sz="2600" b="0">
+                <a:solidFill>
+                  <a:srgbClr val="1A1A1A"/>
+                </a:solidFill>
+                <a:latin typeface="Leelawadee UI"/>
+                <a:ea typeface="Leelawadee UI"/>
+                <a:cs typeface="Leelawadee UI"/>
+              </a:rPr>
+              <a:t>• Deploy = ส่งเว็บจากเครื่องเราขึ้นไปอยู่บนอินเทอร์เน็ต</a:t>
+            </a:r>
+          </a:p>
+        </p:txBody>
+      </p:sp>
+      <p:sp>
+        <p:nvSpPr>
+          <p:cNvPr id="4" name="TextBox 3"/>
+          <p:cNvSpPr txBox="1"/>
+          <p:nvPr/>
+        </p:nvSpPr>
+        <p:spPr>
+          <a:xfrm>
+            <a:off x="822960" y="3159760"/>
             <a:ext cx="10545775" cy="560324"/>
           </a:xfrm>
           <a:prstGeom prst="rect">
@@ -20150,21 +19377,21 @@
                 <a:ea typeface="Leelawadee UI"/>
                 <a:cs typeface="Leelawadee UI"/>
               </a:rPr>
-              <a:t>• ท่องกติกา 3 ข้อส่วนกลางได้</a:t>
-            </a:r>
-          </a:p>
-        </p:txBody>
-      </p:sp>
-      <p:sp>
-        <p:nvSpPr>
-          <p:cNvPr id="4" name="TextBox 3"/>
-          <p:cNvSpPr txBox="1"/>
-          <p:nvPr/>
-        </p:nvSpPr>
-        <p:spPr>
-          <a:xfrm>
-            <a:off x="822960" y="2087372"/>
-            <a:ext cx="10545775" cy="560324"/>
+              <a:t>• ใช้ Firebase Hosting (บริการที่ทำให้เว็บเรามี URL)</a:t>
+            </a:r>
+          </a:p>
+        </p:txBody>
+      </p:sp>
+      <p:sp>
+        <p:nvSpPr>
+          <p:cNvPr id="5" name="TextBox 4"/>
+          <p:cNvSpPr txBox="1"/>
+          <p:nvPr/>
+        </p:nvSpPr>
+        <p:spPr>
+          <a:xfrm>
+            <a:off x="822960" y="3774948"/>
+            <a:ext cx="10545775" cy="1029208"/>
           </a:xfrm>
           <a:prstGeom prst="rect">
             <a:avLst/>
@@ -20187,21 +19414,21 @@
                 <a:ea typeface="Leelawadee UI"/>
                 <a:cs typeface="Leelawadee UI"/>
               </a:rPr>
-              <a:t>• บอกได้ว่า pull กับ push ต่างกันอย่างไร</a:t>
-            </a:r>
-          </a:p>
-        </p:txBody>
-      </p:sp>
-      <p:sp>
-        <p:nvSpPr>
-          <p:cNvPr id="5" name="TextBox 4"/>
-          <p:cNvSpPr txBox="1"/>
-          <p:nvPr/>
-        </p:nvSpPr>
-        <p:spPr>
-          <a:xfrm>
-            <a:off x="822960" y="2702560"/>
-            <a:ext cx="10545775" cy="560324"/>
+              <a:t>• localhost = ในเครื่องเราคนเดียว · URL จริง = ใครก็เปิดได้</a:t>
+            </a:r>
+          </a:p>
+        </p:txBody>
+      </p:sp>
+      <p:sp>
+        <p:nvSpPr>
+          <p:cNvPr id="6" name="TextBox 5"/>
+          <p:cNvSpPr txBox="1"/>
+          <p:nvPr/>
+        </p:nvSpPr>
+        <p:spPr>
+          <a:xfrm>
+            <a:off x="822960" y="4859020"/>
+            <a:ext cx="10545775" cy="1029208"/>
           </a:xfrm>
           <a:prstGeom prst="rect">
             <a:avLst/>
@@ -20224,44 +19451,7 @@
                 <a:ea typeface="Leelawadee UI"/>
                 <a:cs typeface="Leelawadee UI"/>
               </a:rPr>
-              <a:t>• รู้ว่างานชนกันไม่ใช่งานหาย — กู้ได้เสมอ</a:t>
-            </a:r>
-          </a:p>
-        </p:txBody>
-      </p:sp>
-      <p:sp>
-        <p:nvSpPr>
-          <p:cNvPr id="6" name="TextBox 5"/>
-          <p:cNvSpPr txBox="1"/>
-          <p:nvPr/>
-        </p:nvSpPr>
-        <p:spPr>
-          <a:xfrm>
-            <a:off x="822960" y="3317748"/>
-            <a:ext cx="10545775" cy="560324"/>
-          </a:xfrm>
-          <a:prstGeom prst="rect">
-            <a:avLst/>
-          </a:prstGeom>
-          <a:noFill/>
-        </p:spPr>
-        <p:txBody>
-          <a:bodyPr wrap="square">
-            <a:spAutoFit/>
-          </a:bodyPr>
-          <a:lstStyle/>
-          <a:p>
-            <a:pPr algn="l"/>
-            <a:r>
-              <a:rPr sz="2600" b="0">
-                <a:solidFill>
-                  <a:srgbClr val="1A1A1A"/>
-                </a:solidFill>
-                <a:latin typeface="Leelawadee UI"/>
-                <a:ea typeface="Leelawadee UI"/>
-                <a:cs typeface="Leelawadee UI"/>
-              </a:rPr>
-              <a:t>• รู้ว่าทุกคนต้องมี commit ชื่อตัวเองตั้งแต่บ่ายนี้</a:t>
+              <a:t>• ยังไม่สมบูรณ์ก็ deploy ได้ — ไม่ต้องรอเสร็จร้อยเปอร์เซ็นต์</a:t>
             </a:r>
           </a:p>
         </p:txBody>
@@ -20322,24 +19512,64 @@
       <p:grpSpPr/>
       <p:sp>
         <p:nvSpPr>
-          <p:cNvPr id="2" name="Rectangle 1"/>
+          <p:cNvPr id="2" name="TextBox 1"/>
+          <p:cNvSpPr txBox="1"/>
+          <p:nvPr/>
+        </p:nvSpPr>
+        <p:spPr>
+          <a:xfrm>
+            <a:off x="822960" y="502920"/>
+            <a:ext cx="10545775" cy="804672"/>
+          </a:xfrm>
+          <a:prstGeom prst="rect">
+            <a:avLst/>
+          </a:prstGeom>
+          <a:noFill/>
+        </p:spPr>
+        <p:txBody>
+          <a:bodyPr wrap="square">
+            <a:spAutoFit/>
+          </a:bodyPr>
+          <a:lstStyle/>
+          <a:p>
+            <a:pPr algn="l"/>
+            <a:r>
+              <a:rPr sz="3600" b="1">
+                <a:solidFill>
+                  <a:srgbClr val="1F5FA8"/>
+                </a:solidFill>
+                <a:latin typeface="Leelawadee UI"/>
+                <a:ea typeface="Leelawadee UI"/>
+                <a:cs typeface="Leelawadee UI"/>
+              </a:rPr>
+              <a:t>เส้นทางของการ deploy</a:t>
+            </a:r>
+          </a:p>
+        </p:txBody>
+      </p:sp>
+      <p:sp>
+        <p:nvSpPr>
+          <p:cNvPr id="3" name="Rounded Rectangle 2"/>
           <p:cNvSpPr/>
           <p:nvPr/>
         </p:nvSpPr>
         <p:spPr>
           <a:xfrm>
-            <a:off x="0" y="0"/>
-            <a:ext cx="12191695" cy="6858000"/>
-          </a:xfrm>
-          <a:prstGeom prst="rect">
+            <a:off x="822960" y="1563624"/>
+            <a:ext cx="2348407" cy="1051560"/>
+          </a:xfrm>
+          <a:prstGeom prst="roundRect">
             <a:avLst/>
           </a:prstGeom>
           <a:solidFill>
-            <a:srgbClr val="1F5FA8"/>
+            <a:srgbClr val="E8EFF7"/>
           </a:solidFill>
-          <a:ln>
-            <a:noFill/>
+          <a:ln w="15875">
+            <a:solidFill>
+              <a:srgbClr val="9CB5D1"/>
+            </a:solidFill>
           </a:ln>
+          <a:effectLst/>
         </p:spPr>
         <p:style>
           <a:lnRef idx="1">
@@ -20356,6 +19586,61 @@
           </a:fontRef>
         </p:style>
         <p:txBody>
+          <a:bodyPr rtlCol="0" anchor="ctr" wrap="square" lIns="54864" rIns="54864" tIns="27432" bIns="27432"/>
+          <a:lstStyle/>
+          <a:p>
+            <a:pPr algn="ctr"/>
+            <a:r>
+              <a:rPr sz="1400" b="0">
+                <a:solidFill>
+                  <a:srgbClr val="1A1A1A"/>
+                </a:solidFill>
+                <a:latin typeface="Leelawadee UI"/>
+                <a:ea typeface="Leelawadee UI"/>
+                <a:cs typeface="Leelawadee UI"/>
+              </a:rPr>
+              <a:t>โค้ดในเครื่องเรา</a:t>
+            </a:r>
+          </a:p>
+        </p:txBody>
+      </p:sp>
+      <p:sp>
+        <p:nvSpPr>
+          <p:cNvPr id="4" name="Right Arrow 3"/>
+          <p:cNvSpPr/>
+          <p:nvPr/>
+        </p:nvSpPr>
+        <p:spPr>
+          <a:xfrm>
+            <a:off x="3217452" y="1931670"/>
+            <a:ext cx="291876" cy="315468"/>
+          </a:xfrm>
+          <a:prstGeom prst="rightArrow">
+            <a:avLst/>
+          </a:prstGeom>
+          <a:solidFill>
+            <a:srgbClr val="7A91A8"/>
+          </a:solidFill>
+          <a:ln>
+            <a:noFill/>
+          </a:ln>
+          <a:effectLst/>
+        </p:spPr>
+        <p:style>
+          <a:lnRef idx="1">
+            <a:schemeClr val="accent1"/>
+          </a:lnRef>
+          <a:fillRef idx="3">
+            <a:schemeClr val="accent1"/>
+          </a:fillRef>
+          <a:effectRef idx="2">
+            <a:schemeClr val="accent1"/>
+          </a:effectRef>
+          <a:fontRef idx="minor">
+            <a:schemeClr val="lt1"/>
+          </a:fontRef>
+        </p:style>
+        <p:txBody>
           <a:bodyPr rtlCol="0" anchor="ctr"/>
           <a:lstStyle/>
           <a:p>
@@ -20365,29 +19650,150 @@
       </p:sp>
       <p:sp>
         <p:nvSpPr>
-          <p:cNvPr id="3" name="TextBox 2"/>
-          <p:cNvSpPr txBox="1"/>
-          <p:nvPr/>
-        </p:nvSpPr>
-        <p:spPr>
-          <a:xfrm>
-            <a:off x="822960" y="2743200"/>
-            <a:ext cx="10545775" cy="1463040"/>
-          </a:xfrm>
-          <a:prstGeom prst="rect">
-            <a:avLst/>
-          </a:prstGeom>
-          <a:noFill/>
-        </p:spPr>
-        <p:txBody>
-          <a:bodyPr wrap="square" anchor="ctr">
-            <a:spAutoFit/>
-          </a:bodyPr>
+          <p:cNvPr id="5" name="Rounded Rectangle 4"/>
+          <p:cNvSpPr/>
+          <p:nvPr/>
+        </p:nvSpPr>
+        <p:spPr>
+          <a:xfrm>
+            <a:off x="3555415" y="1563624"/>
+            <a:ext cx="2348407" cy="1051560"/>
+          </a:xfrm>
+          <a:prstGeom prst="roundRect">
+            <a:avLst/>
+          </a:prstGeom>
+          <a:solidFill>
+            <a:srgbClr val="E8EFF7"/>
+          </a:solidFill>
+          <a:ln w="15875">
+            <a:solidFill>
+              <a:srgbClr val="9CB5D1"/>
+            </a:solidFill>
+          </a:ln>
+          <a:effectLst/>
+        </p:spPr>
+        <p:style>
+          <a:lnRef idx="1">
+            <a:schemeClr val="accent1"/>
+          </a:lnRef>
+          <a:fillRef idx="3">
+            <a:schemeClr val="accent1"/>
+          </a:fillRef>
+          <a:effectRef idx="2">
+            <a:schemeClr val="accent1"/>
+          </a:effectRef>
+          <a:fontRef idx="minor">
+            <a:schemeClr val="lt1"/>
+          </a:fontRef>
+        </p:style>
+        <p:txBody>
+          <a:bodyPr rtlCol="0" anchor="ctr" wrap="square" lIns="54864" rIns="54864" tIns="27432" bIns="27432"/>
           <a:lstStyle/>
           <a:p>
             <a:pPr algn="ctr"/>
             <a:r>
-              <a:rPr sz="4000" b="1">
+              <a:rPr sz="1400" b="0">
+                <a:solidFill>
+                  <a:srgbClr val="1A1A1A"/>
+                </a:solidFill>
+                <a:latin typeface="Leelawadee UI"/>
+                <a:ea typeface="Leelawadee UI"/>
+                <a:cs typeface="Leelawadee UI"/>
+              </a:rPr>
+              <a:t>คำสั่ง deploy</a:t>
+            </a:r>
+          </a:p>
+        </p:txBody>
+      </p:sp>
+      <p:sp>
+        <p:nvSpPr>
+          <p:cNvPr id="6" name="Right Arrow 5"/>
+          <p:cNvSpPr/>
+          <p:nvPr/>
+        </p:nvSpPr>
+        <p:spPr>
+          <a:xfrm>
+            <a:off x="5949907" y="1931670"/>
+            <a:ext cx="291876" cy="315468"/>
+          </a:xfrm>
+          <a:prstGeom prst="rightArrow">
+            <a:avLst/>
+          </a:prstGeom>
+          <a:solidFill>
+            <a:srgbClr val="7A91A8"/>
+          </a:solidFill>
+          <a:ln>
+            <a:noFill/>
+          </a:ln>
+          <a:effectLst/>
+        </p:spPr>
+        <p:style>
+          <a:lnRef idx="1">
+            <a:schemeClr val="accent1"/>
+          </a:lnRef>
+          <a:fillRef idx="3">
+            <a:schemeClr val="accent1"/>
+          </a:fillRef>
+          <a:effectRef idx="2">
+            <a:schemeClr val="accent1"/>
+          </a:effectRef>
+          <a:fontRef idx="minor">
+            <a:schemeClr val="lt1"/>
+          </a:fontRef>
+        </p:style>
+        <p:txBody>
+          <a:bodyPr rtlCol="0" anchor="ctr"/>
+          <a:lstStyle/>
+          <a:p>
+            <a:pPr algn="ctr"/>
+          </a:p>
+        </p:txBody>
+      </p:sp>
+      <p:sp>
+        <p:nvSpPr>
+          <p:cNvPr id="7" name="Rounded Rectangle 6"/>
+          <p:cNvSpPr/>
+          <p:nvPr/>
+        </p:nvSpPr>
+        <p:spPr>
+          <a:xfrm>
+            <a:off x="6287870" y="1563624"/>
+            <a:ext cx="2348407" cy="1051560"/>
+          </a:xfrm>
+          <a:prstGeom prst="roundRect">
+            <a:avLst/>
+          </a:prstGeom>
+          <a:solidFill>
+            <a:srgbClr val="1F5FA8"/>
+          </a:solidFill>
+          <a:ln w="15875">
+            <a:solidFill>
+              <a:srgbClr val="9CB5D1"/>
+            </a:solidFill>
+          </a:ln>
+          <a:effectLst/>
+        </p:spPr>
+        <p:style>
+          <a:lnRef idx="1">
+            <a:schemeClr val="accent1"/>
+          </a:lnRef>
+          <a:fillRef idx="3">
+            <a:schemeClr val="accent1"/>
+          </a:fillRef>
+          <a:effectRef idx="2">
+            <a:schemeClr val="accent1"/>
+          </a:effectRef>
+          <a:fontRef idx="minor">
+            <a:schemeClr val="lt1"/>
+          </a:fontRef>
+        </p:style>
+        <p:txBody>
+          <a:bodyPr rtlCol="0" anchor="ctr" wrap="square" lIns="54864" rIns="54864" tIns="27432" bIns="27432"/>
+          <a:lstStyle/>
+          <a:p>
+            <a:pPr algn="ctr"/>
+            <a:r>
+              <a:rPr sz="1400" b="1">
                 <a:solidFill>
                   <a:srgbClr val="FFFFFF"/>
                 </a:solidFill>
@@ -20395,14 +19801,115 @@
                 <a:ea typeface="Leelawadee UI"/>
                 <a:cs typeface="Leelawadee UI"/>
               </a:rPr>
-              <a:t>ช่วงที่ 6 — 🌐 Deploy ขึ้นออนไลน์ ⏱ 11:35–11:55</a:t>
-            </a:r>
-          </a:p>
-        </p:txBody>
-      </p:sp>
-      <p:sp>
-        <p:nvSpPr>
-          <p:cNvPr id="4" name="TextBox 3"/>
+              <a:t>Hosting บนคลาวด์</a:t>
+            </a:r>
+          </a:p>
+        </p:txBody>
+      </p:sp>
+      <p:sp>
+        <p:nvSpPr>
+          <p:cNvPr id="8" name="Right Arrow 7"/>
+          <p:cNvSpPr/>
+          <p:nvPr/>
+        </p:nvSpPr>
+        <p:spPr>
+          <a:xfrm>
+            <a:off x="8682362" y="1931670"/>
+            <a:ext cx="291876" cy="315468"/>
+          </a:xfrm>
+          <a:prstGeom prst="rightArrow">
+            <a:avLst/>
+          </a:prstGeom>
+          <a:solidFill>
+            <a:srgbClr val="7A91A8"/>
+          </a:solidFill>
+          <a:ln>
+            <a:noFill/>
+          </a:ln>
+          <a:effectLst/>
+        </p:spPr>
+        <p:style>
+          <a:lnRef idx="1">
+            <a:schemeClr val="accent1"/>
+          </a:lnRef>
+          <a:fillRef idx="3">
+            <a:schemeClr val="accent1"/>
+          </a:fillRef>
+          <a:effectRef idx="2">
+            <a:schemeClr val="accent1"/>
+          </a:effectRef>
+          <a:fontRef idx="minor">
+            <a:schemeClr val="lt1"/>
+          </a:fontRef>
+        </p:style>
+        <p:txBody>
+          <a:bodyPr rtlCol="0" anchor="ctr"/>
+          <a:lstStyle/>
+          <a:p>
+            <a:pPr algn="ctr"/>
+          </a:p>
+        </p:txBody>
+      </p:sp>
+      <p:sp>
+        <p:nvSpPr>
+          <p:cNvPr id="9" name="Rounded Rectangle 8"/>
+          <p:cNvSpPr/>
+          <p:nvPr/>
+        </p:nvSpPr>
+        <p:spPr>
+          <a:xfrm>
+            <a:off x="9020325" y="1563624"/>
+            <a:ext cx="2348407" cy="1051560"/>
+          </a:xfrm>
+          <a:prstGeom prst="roundRect">
+            <a:avLst/>
+          </a:prstGeom>
+          <a:solidFill>
+            <a:srgbClr val="E8EFF7"/>
+          </a:solidFill>
+          <a:ln w="15875">
+            <a:solidFill>
+              <a:srgbClr val="9CB5D1"/>
+            </a:solidFill>
+          </a:ln>
+          <a:effectLst/>
+        </p:spPr>
+        <p:style>
+          <a:lnRef idx="1">
+            <a:schemeClr val="accent1"/>
+          </a:lnRef>
+          <a:fillRef idx="3">
+            <a:schemeClr val="accent1"/>
+          </a:fillRef>
+          <a:effectRef idx="2">
+            <a:schemeClr val="accent1"/>
+          </a:effectRef>
+          <a:fontRef idx="minor">
+            <a:schemeClr val="lt1"/>
+          </a:fontRef>
+        </p:style>
+        <p:txBody>
+          <a:bodyPr rtlCol="0" anchor="ctr" wrap="square" lIns="54864" rIns="54864" tIns="27432" bIns="27432"/>
+          <a:lstStyle/>
+          <a:p>
+            <a:pPr algn="ctr"/>
+            <a:r>
+              <a:rPr sz="1400" b="0">
+                <a:solidFill>
+                  <a:srgbClr val="1A1A1A"/>
+                </a:solidFill>
+                <a:latin typeface="Leelawadee UI"/>
+                <a:ea typeface="Leelawadee UI"/>
+                <a:cs typeface="Leelawadee UI"/>
+              </a:rPr>
+              <a:t>ใครก็เปิด URL ได้</a:t>
+            </a:r>
+          </a:p>
+        </p:txBody>
+      </p:sp>
+      <p:sp>
+        <p:nvSpPr>
+          <p:cNvPr id="10" name="TextBox 9"/>
           <p:cNvSpPr txBox="1"/>
           <p:nvPr/>
         </p:nvSpPr>
@@ -20486,7 +19993,7 @@
                 <a:ea typeface="Leelawadee UI"/>
                 <a:cs typeface="Leelawadee UI"/>
               </a:rPr>
-              <a:t>Deploy = นำเว็บขึ้นออนไลน์ให้คนอื่นเปิดได้</a:t>
+              <a:t>deploy เว็บอย่างเดียวไม่พอ — กฎต้องขึ้นด้วย</a:t>
             </a:r>
           </a:p>
         </p:txBody>
@@ -20500,6 +20007,43 @@
         <p:spPr>
           <a:xfrm>
             <a:off x="822960" y="2075688"/>
+            <a:ext cx="10545775" cy="560324"/>
+          </a:xfrm>
+          <a:prstGeom prst="rect">
+            <a:avLst/>
+          </a:prstGeom>
+          <a:noFill/>
+        </p:spPr>
+        <p:txBody>
+          <a:bodyPr wrap="square">
+            <a:spAutoFit/>
+          </a:bodyPr>
+          <a:lstStyle/>
+          <a:p>
+            <a:pPr algn="l"/>
+            <a:r>
+              <a:rPr sz="2600" b="0">
+                <a:solidFill>
+                  <a:srgbClr val="1A1A1A"/>
+                </a:solidFill>
+                <a:latin typeface="Leelawadee UI"/>
+                <a:ea typeface="Leelawadee UI"/>
+                <a:cs typeface="Leelawadee UI"/>
+              </a:rPr>
+              <a:t>• เว็บกับกฎ deploy แยกกันคนละส่วน</a:t>
+            </a:r>
+          </a:p>
+        </p:txBody>
+      </p:sp>
+      <p:sp>
+        <p:nvSpPr>
+          <p:cNvPr id="4" name="TextBox 3"/>
+          <p:cNvSpPr txBox="1"/>
+          <p:nvPr/>
+        </p:nvSpPr>
+        <p:spPr>
+          <a:xfrm>
+            <a:off x="822960" y="2690876"/>
             <a:ext cx="10545775" cy="1029208"/>
           </a:xfrm>
           <a:prstGeom prst="rect">
@@ -20523,20 +20067,20 @@
                 <a:ea typeface="Leelawadee UI"/>
                 <a:cs typeface="Leelawadee UI"/>
               </a:rPr>
-              <a:t>• Deploy = ส่งเว็บจากเครื่องเราขึ้นไปอยู่บนอินเทอร์เน็ต</a:t>
-            </a:r>
-          </a:p>
-        </p:txBody>
-      </p:sp>
-      <p:sp>
-        <p:nvSpPr>
-          <p:cNvPr id="4" name="TextBox 3"/>
-          <p:cNvSpPr txBox="1"/>
-          <p:nvPr/>
-        </p:nvSpPr>
-        <p:spPr>
-          <a:xfrm>
-            <a:off x="822960" y="3159760"/>
+              <a:t>• กฎที่เขียนไว้ในเครื่อง ยังไม่คุ้มครองของจริง จนกว่าจะ deploy</a:t>
+            </a:r>
+          </a:p>
+        </p:txBody>
+      </p:sp>
+      <p:sp>
+        <p:nvSpPr>
+          <p:cNvPr id="5" name="TextBox 4"/>
+          <p:cNvSpPr txBox="1"/>
+          <p:nvPr/>
+        </p:nvSpPr>
+        <p:spPr>
+          <a:xfrm>
+            <a:off x="822960" y="3774948"/>
             <a:ext cx="10545775" cy="560324"/>
           </a:xfrm>
           <a:prstGeom prst="rect">
@@ -20560,21 +20104,21 @@
                 <a:ea typeface="Leelawadee UI"/>
                 <a:cs typeface="Leelawadee UI"/>
               </a:rPr>
-              <a:t>• ใช้ Firebase Hosting (บริการที่ทำให้เว็บเรามี URL)</a:t>
-            </a:r>
-          </a:p>
-        </p:txBody>
-      </p:sp>
-      <p:sp>
-        <p:nvSpPr>
-          <p:cNvPr id="5" name="TextBox 4"/>
-          <p:cNvSpPr txBox="1"/>
-          <p:nvPr/>
-        </p:nvSpPr>
-        <p:spPr>
-          <a:xfrm>
-            <a:off x="822960" y="3774948"/>
-            <a:ext cx="10545775" cy="1029208"/>
+              <a:t>• 🚫 ห้ามออกออนไลน์โดยไม่มีกฎขั้นต่ำ — ไม่มีข้อยกเว้น</a:t>
+            </a:r>
+          </a:p>
+        </p:txBody>
+      </p:sp>
+      <p:sp>
+        <p:nvSpPr>
+          <p:cNvPr id="6" name="TextBox 5"/>
+          <p:cNvSpPr txBox="1"/>
+          <p:nvPr/>
+        </p:nvSpPr>
+        <p:spPr>
+          <a:xfrm>
+            <a:off x="822960" y="4390136"/>
+            <a:ext cx="10545775" cy="560324"/>
           </a:xfrm>
           <a:prstGeom prst="rect">
             <a:avLst/>
@@ -20597,44 +20141,7 @@
                 <a:ea typeface="Leelawadee UI"/>
                 <a:cs typeface="Leelawadee UI"/>
               </a:rPr>
-              <a:t>• localhost = ในเครื่องเราคนเดียว · URL จริง = ใครก็เปิดได้</a:t>
-            </a:r>
-          </a:p>
-        </p:txBody>
-      </p:sp>
-      <p:sp>
-        <p:nvSpPr>
-          <p:cNvPr id="6" name="TextBox 5"/>
-          <p:cNvSpPr txBox="1"/>
-          <p:nvPr/>
-        </p:nvSpPr>
-        <p:spPr>
-          <a:xfrm>
-            <a:off x="822960" y="4859020"/>
-            <a:ext cx="10545775" cy="1029208"/>
-          </a:xfrm>
-          <a:prstGeom prst="rect">
-            <a:avLst/>
-          </a:prstGeom>
-          <a:noFill/>
-        </p:spPr>
-        <p:txBody>
-          <a:bodyPr wrap="square">
-            <a:spAutoFit/>
-          </a:bodyPr>
-          <a:lstStyle/>
-          <a:p>
-            <a:pPr algn="l"/>
-            <a:r>
-              <a:rPr sz="2600" b="0">
-                <a:solidFill>
-                  <a:srgbClr val="1A1A1A"/>
-                </a:solidFill>
-                <a:latin typeface="Leelawadee UI"/>
-                <a:ea typeface="Leelawadee UI"/>
-                <a:cs typeface="Leelawadee UI"/>
-              </a:rPr>
-              <a:t>• ยังไม่สมบูรณ์ก็ deploy ได้ — ไม่ต้องรอเสร็จร้อยเปอร์เซ็นต์</a:t>
+              <a:t>• สั่ง AI ให้ deploy ทั้งเว็บและกฎในรอบเดียว</a:t>
             </a:r>
           </a:p>
         </p:txBody>
@@ -20725,56 +20232,36 @@
                 <a:ea typeface="Leelawadee UI"/>
                 <a:cs typeface="Leelawadee UI"/>
               </a:rPr>
-              <a:t>เส้นทางของการ deploy</a:t>
-            </a:r>
-          </a:p>
-        </p:txBody>
-      </p:sp>
-      <p:sp>
-        <p:nvSpPr>
-          <p:cNvPr id="3" name="Rounded Rectangle 2"/>
-          <p:cNvSpPr/>
-          <p:nvPr/>
-        </p:nvSpPr>
-        <p:spPr>
-          <a:xfrm>
-            <a:off x="822960" y="1563624"/>
-            <a:ext cx="2348407" cy="1051560"/>
-          </a:xfrm>
-          <a:prstGeom prst="roundRect">
-            <a:avLst/>
-          </a:prstGeom>
-          <a:solidFill>
-            <a:srgbClr val="E8EFF7"/>
-          </a:solidFill>
-          <a:ln w="15875">
-            <a:solidFill>
-              <a:srgbClr val="9CB5D1"/>
-            </a:solidFill>
-          </a:ln>
-          <a:effectLst/>
-        </p:spPr>
-        <p:style>
-          <a:lnRef idx="1">
-            <a:schemeClr val="accent1"/>
-          </a:lnRef>
-          <a:fillRef idx="3">
-            <a:schemeClr val="accent1"/>
-          </a:fillRef>
-          <a:effectRef idx="2">
-            <a:schemeClr val="accent1"/>
-          </a:effectRef>
-          <a:fontRef idx="minor">
-            <a:schemeClr val="lt1"/>
-          </a:fontRef>
-        </p:style>
-        <p:txBody>
-          <a:bodyPr rtlCol="0" anchor="ctr" wrap="square" lIns="54864" rIns="54864" tIns="27432" bIns="27432"/>
-          <a:lstStyle/>
-          <a:p>
-            <a:pPr algn="ctr"/>
-            <a:r>
-              <a:rPr sz="1400" b="0">
+              <a:t>ในเครื่องได้ ออนไลน์พัง — 2 สาเหตุหลัก</a:t>
+            </a:r>
+          </a:p>
+        </p:txBody>
+      </p:sp>
+      <p:sp>
+        <p:nvSpPr>
+          <p:cNvPr id="3" name="TextBox 2"/>
+          <p:cNvSpPr txBox="1"/>
+          <p:nvPr/>
+        </p:nvSpPr>
+        <p:spPr>
+          <a:xfrm>
+            <a:off x="822960" y="1472184"/>
+            <a:ext cx="10545775" cy="560324"/>
+          </a:xfrm>
+          <a:prstGeom prst="rect">
+            <a:avLst/>
+          </a:prstGeom>
+          <a:noFill/>
+        </p:spPr>
+        <p:txBody>
+          <a:bodyPr wrap="square">
+            <a:spAutoFit/>
+          </a:bodyPr>
+          <a:lstStyle/>
+          <a:p>
+            <a:pPr algn="l"/>
+            <a:r>
+              <a:rPr sz="2600" b="0">
                 <a:solidFill>
                   <a:srgbClr val="1A1A1A"/>
                 </a:solidFill>
@@ -20782,100 +20269,36 @@
                 <a:ea typeface="Leelawadee UI"/>
                 <a:cs typeface="Leelawadee UI"/>
               </a:rPr>
-              <a:t>โค้ดในเครื่องเรา</a:t>
-            </a:r>
-          </a:p>
-        </p:txBody>
-      </p:sp>
-      <p:sp>
-        <p:nvSpPr>
-          <p:cNvPr id="4" name="Right Arrow 3"/>
-          <p:cNvSpPr/>
-          <p:nvPr/>
-        </p:nvSpPr>
-        <p:spPr>
-          <a:xfrm>
-            <a:off x="3217452" y="1931670"/>
-            <a:ext cx="291876" cy="315468"/>
-          </a:xfrm>
-          <a:prstGeom prst="rightArrow">
-            <a:avLst/>
-          </a:prstGeom>
-          <a:solidFill>
-            <a:srgbClr val="7A91A8"/>
-          </a:solidFill>
-          <a:ln>
-            <a:noFill/>
-          </a:ln>
-          <a:effectLst/>
-        </p:spPr>
-        <p:style>
-          <a:lnRef idx="1">
-            <a:schemeClr val="accent1"/>
-          </a:lnRef>
-          <a:fillRef idx="3">
-            <a:schemeClr val="accent1"/>
-          </a:fillRef>
-          <a:effectRef idx="2">
-            <a:schemeClr val="accent1"/>
-          </a:effectRef>
-          <a:fontRef idx="minor">
-            <a:schemeClr val="lt1"/>
-          </a:fontRef>
-        </p:style>
-        <p:txBody>
-          <a:bodyPr rtlCol="0" anchor="ctr"/>
-          <a:lstStyle/>
-          <a:p>
-            <a:pPr algn="ctr"/>
-          </a:p>
-        </p:txBody>
-      </p:sp>
-      <p:sp>
-        <p:nvSpPr>
-          <p:cNvPr id="5" name="Rounded Rectangle 4"/>
-          <p:cNvSpPr/>
-          <p:nvPr/>
-        </p:nvSpPr>
-        <p:spPr>
-          <a:xfrm>
-            <a:off x="3555415" y="1563624"/>
-            <a:ext cx="2348407" cy="1051560"/>
-          </a:xfrm>
-          <a:prstGeom prst="roundRect">
-            <a:avLst/>
-          </a:prstGeom>
-          <a:solidFill>
-            <a:srgbClr val="E8EFF7"/>
-          </a:solidFill>
-          <a:ln w="15875">
-            <a:solidFill>
-              <a:srgbClr val="9CB5D1"/>
-            </a:solidFill>
-          </a:ln>
-          <a:effectLst/>
-        </p:spPr>
-        <p:style>
-          <a:lnRef idx="1">
-            <a:schemeClr val="accent1"/>
-          </a:lnRef>
-          <a:fillRef idx="3">
-            <a:schemeClr val="accent1"/>
-          </a:fillRef>
-          <a:effectRef idx="2">
-            <a:schemeClr val="accent1"/>
-          </a:effectRef>
-          <a:fontRef idx="minor">
-            <a:schemeClr val="lt1"/>
-          </a:fontRef>
-        </p:style>
-        <p:txBody>
-          <a:bodyPr rtlCol="0" anchor="ctr" wrap="square" lIns="54864" rIns="54864" tIns="27432" bIns="27432"/>
-          <a:lstStyle/>
-          <a:p>
-            <a:pPr algn="ctr"/>
-            <a:r>
-              <a:rPr sz="1400" b="0">
+              <a:t>• สาเหตุ 1: กฎยังไม่ deploy — ขึ้น permission denied</a:t>
+            </a:r>
+          </a:p>
+        </p:txBody>
+      </p:sp>
+      <p:sp>
+        <p:nvSpPr>
+          <p:cNvPr id="4" name="TextBox 3"/>
+          <p:cNvSpPr txBox="1"/>
+          <p:nvPr/>
+        </p:nvSpPr>
+        <p:spPr>
+          <a:xfrm>
+            <a:off x="822960" y="2087372"/>
+            <a:ext cx="10545775" cy="560324"/>
+          </a:xfrm>
+          <a:prstGeom prst="rect">
+            <a:avLst/>
+          </a:prstGeom>
+          <a:noFill/>
+        </p:spPr>
+        <p:txBody>
+          <a:bodyPr wrap="square">
+            <a:spAutoFit/>
+          </a:bodyPr>
+          <a:lstStyle/>
+          <a:p>
+            <a:pPr algn="l"/>
+            <a:r>
+              <a:rPr sz="2600" b="0">
                 <a:solidFill>
                   <a:srgbClr val="1A1A1A"/>
                 </a:solidFill>
@@ -20883,201 +20306,36 @@
                 <a:ea typeface="Leelawadee UI"/>
                 <a:cs typeface="Leelawadee UI"/>
               </a:rPr>
-              <a:t>คำสั่ง deploy</a:t>
-            </a:r>
-          </a:p>
-        </p:txBody>
-      </p:sp>
-      <p:sp>
-        <p:nvSpPr>
-          <p:cNvPr id="6" name="Right Arrow 5"/>
-          <p:cNvSpPr/>
-          <p:nvPr/>
-        </p:nvSpPr>
-        <p:spPr>
-          <a:xfrm>
-            <a:off x="5949907" y="1931670"/>
-            <a:ext cx="291876" cy="315468"/>
-          </a:xfrm>
-          <a:prstGeom prst="rightArrow">
-            <a:avLst/>
-          </a:prstGeom>
-          <a:solidFill>
-            <a:srgbClr val="7A91A8"/>
-          </a:solidFill>
-          <a:ln>
-            <a:noFill/>
-          </a:ln>
-          <a:effectLst/>
-        </p:spPr>
-        <p:style>
-          <a:lnRef idx="1">
-            <a:schemeClr val="accent1"/>
-          </a:lnRef>
-          <a:fillRef idx="3">
-            <a:schemeClr val="accent1"/>
-          </a:fillRef>
-          <a:effectRef idx="2">
-            <a:schemeClr val="accent1"/>
-          </a:effectRef>
-          <a:fontRef idx="minor">
-            <a:schemeClr val="lt1"/>
-          </a:fontRef>
-        </p:style>
-        <p:txBody>
-          <a:bodyPr rtlCol="0" anchor="ctr"/>
-          <a:lstStyle/>
-          <a:p>
-            <a:pPr algn="ctr"/>
-          </a:p>
-        </p:txBody>
-      </p:sp>
-      <p:sp>
-        <p:nvSpPr>
-          <p:cNvPr id="7" name="Rounded Rectangle 6"/>
-          <p:cNvSpPr/>
-          <p:nvPr/>
-        </p:nvSpPr>
-        <p:spPr>
-          <a:xfrm>
-            <a:off x="6287870" y="1563624"/>
-            <a:ext cx="2348407" cy="1051560"/>
-          </a:xfrm>
-          <a:prstGeom prst="roundRect">
-            <a:avLst/>
-          </a:prstGeom>
-          <a:solidFill>
-            <a:srgbClr val="1F5FA8"/>
-          </a:solidFill>
-          <a:ln w="15875">
-            <a:solidFill>
-              <a:srgbClr val="9CB5D1"/>
-            </a:solidFill>
-          </a:ln>
-          <a:effectLst/>
-        </p:spPr>
-        <p:style>
-          <a:lnRef idx="1">
-            <a:schemeClr val="accent1"/>
-          </a:lnRef>
-          <a:fillRef idx="3">
-            <a:schemeClr val="accent1"/>
-          </a:fillRef>
-          <a:effectRef idx="2">
-            <a:schemeClr val="accent1"/>
-          </a:effectRef>
-          <a:fontRef idx="minor">
-            <a:schemeClr val="lt1"/>
-          </a:fontRef>
-        </p:style>
-        <p:txBody>
-          <a:bodyPr rtlCol="0" anchor="ctr" wrap="square" lIns="54864" rIns="54864" tIns="27432" bIns="27432"/>
-          <a:lstStyle/>
-          <a:p>
-            <a:pPr algn="ctr"/>
-            <a:r>
-              <a:rPr sz="1400" b="1">
-                <a:solidFill>
-                  <a:srgbClr val="FFFFFF"/>
-                </a:solidFill>
-                <a:latin typeface="Leelawadee UI"/>
-                <a:ea typeface="Leelawadee UI"/>
-                <a:cs typeface="Leelawadee UI"/>
-              </a:rPr>
-              <a:t>Hosting บนคลาวด์</a:t>
-            </a:r>
-          </a:p>
-        </p:txBody>
-      </p:sp>
-      <p:sp>
-        <p:nvSpPr>
-          <p:cNvPr id="8" name="Right Arrow 7"/>
-          <p:cNvSpPr/>
-          <p:nvPr/>
-        </p:nvSpPr>
-        <p:spPr>
-          <a:xfrm>
-            <a:off x="8682362" y="1931670"/>
-            <a:ext cx="291876" cy="315468"/>
-          </a:xfrm>
-          <a:prstGeom prst="rightArrow">
-            <a:avLst/>
-          </a:prstGeom>
-          <a:solidFill>
-            <a:srgbClr val="7A91A8"/>
-          </a:solidFill>
-          <a:ln>
-            <a:noFill/>
-          </a:ln>
-          <a:effectLst/>
-        </p:spPr>
-        <p:style>
-          <a:lnRef idx="1">
-            <a:schemeClr val="accent1"/>
-          </a:lnRef>
-          <a:fillRef idx="3">
-            <a:schemeClr val="accent1"/>
-          </a:fillRef>
-          <a:effectRef idx="2">
-            <a:schemeClr val="accent1"/>
-          </a:effectRef>
-          <a:fontRef idx="minor">
-            <a:schemeClr val="lt1"/>
-          </a:fontRef>
-        </p:style>
-        <p:txBody>
-          <a:bodyPr rtlCol="0" anchor="ctr"/>
-          <a:lstStyle/>
-          <a:p>
-            <a:pPr algn="ctr"/>
-          </a:p>
-        </p:txBody>
-      </p:sp>
-      <p:sp>
-        <p:nvSpPr>
-          <p:cNvPr id="9" name="Rounded Rectangle 8"/>
-          <p:cNvSpPr/>
-          <p:nvPr/>
-        </p:nvSpPr>
-        <p:spPr>
-          <a:xfrm>
-            <a:off x="9020325" y="1563624"/>
-            <a:ext cx="2348407" cy="1051560"/>
-          </a:xfrm>
-          <a:prstGeom prst="roundRect">
-            <a:avLst/>
-          </a:prstGeom>
-          <a:solidFill>
-            <a:srgbClr val="E8EFF7"/>
-          </a:solidFill>
-          <a:ln w="15875">
-            <a:solidFill>
-              <a:srgbClr val="9CB5D1"/>
-            </a:solidFill>
-          </a:ln>
-          <a:effectLst/>
-        </p:spPr>
-        <p:style>
-          <a:lnRef idx="1">
-            <a:schemeClr val="accent1"/>
-          </a:lnRef>
-          <a:fillRef idx="3">
-            <a:schemeClr val="accent1"/>
-          </a:fillRef>
-          <a:effectRef idx="2">
-            <a:schemeClr val="accent1"/>
-          </a:effectRef>
-          <a:fontRef idx="minor">
-            <a:schemeClr val="lt1"/>
-          </a:fontRef>
-        </p:style>
-        <p:txBody>
-          <a:bodyPr rtlCol="0" anchor="ctr" wrap="square" lIns="54864" rIns="54864" tIns="27432" bIns="27432"/>
-          <a:lstStyle/>
-          <a:p>
-            <a:pPr algn="ctr"/>
-            <a:r>
-              <a:rPr sz="1400" b="0">
+              <a:t>• สาเหตุ 2: index (สารบัญช่วยค้น) ยังไม่สร้าง</a:t>
+            </a:r>
+          </a:p>
+        </p:txBody>
+      </p:sp>
+      <p:sp>
+        <p:nvSpPr>
+          <p:cNvPr id="5" name="TextBox 4"/>
+          <p:cNvSpPr txBox="1"/>
+          <p:nvPr/>
+        </p:nvSpPr>
+        <p:spPr>
+          <a:xfrm>
+            <a:off x="822960" y="2702560"/>
+            <a:ext cx="10545775" cy="1029208"/>
+          </a:xfrm>
+          <a:prstGeom prst="rect">
+            <a:avLst/>
+          </a:prstGeom>
+          <a:noFill/>
+        </p:spPr>
+        <p:txBody>
+          <a:bodyPr wrap="square">
+            <a:spAutoFit/>
+          </a:bodyPr>
+          <a:lstStyle/>
+          <a:p>
+            <a:pPr algn="l"/>
+            <a:r>
+              <a:rPr sz="2600" b="0">
                 <a:solidFill>
                   <a:srgbClr val="1A1A1A"/>
                 </a:solidFill>
@@ -21085,14 +20343,51 @@
                 <a:ea typeface="Leelawadee UI"/>
                 <a:cs typeface="Leelawadee UI"/>
               </a:rPr>
-              <a:t>ใครก็เปิด URL ได้</a:t>
-            </a:r>
-          </a:p>
-        </p:txBody>
-      </p:sp>
-      <p:sp>
-        <p:nvSpPr>
-          <p:cNvPr id="10" name="TextBox 9"/>
+              <a:t>• ทางแก้ index: อ่าน error → กดลิงก์ในข้อความ → กดสร้าง → รอ</a:t>
+            </a:r>
+          </a:p>
+        </p:txBody>
+      </p:sp>
+      <p:sp>
+        <p:nvSpPr>
+          <p:cNvPr id="6" name="TextBox 5"/>
+          <p:cNvSpPr txBox="1"/>
+          <p:nvPr/>
+        </p:nvSpPr>
+        <p:spPr>
+          <a:xfrm>
+            <a:off x="822960" y="3786632"/>
+            <a:ext cx="10545775" cy="560324"/>
+          </a:xfrm>
+          <a:prstGeom prst="rect">
+            <a:avLst/>
+          </a:prstGeom>
+          <a:noFill/>
+        </p:spPr>
+        <p:txBody>
+          <a:bodyPr wrap="square">
+            <a:spAutoFit/>
+          </a:bodyPr>
+          <a:lstStyle/>
+          <a:p>
+            <a:pPr algn="l"/>
+            <a:r>
+              <a:rPr sz="2600" b="0">
+                <a:solidFill>
+                  <a:srgbClr val="1A1A1A"/>
+                </a:solidFill>
+                <a:latin typeface="Leelawadee UI"/>
+                <a:ea typeface="Leelawadee UI"/>
+                <a:cs typeface="Leelawadee UI"/>
+              </a:rPr>
+              <a:t>• อ่าน error ให้จบบรรทัดก่อนตกใจ</a:t>
+            </a:r>
+          </a:p>
+        </p:txBody>
+      </p:sp>
+      <p:sp>
+        <p:nvSpPr>
+          <p:cNvPr id="7" name="TextBox 6"/>
           <p:cNvSpPr txBox="1"/>
           <p:nvPr/>
         </p:nvSpPr>
@@ -21146,7 +20441,130 @@
       <p:grpSpPr/>
       <p:sp>
         <p:nvSpPr>
-          <p:cNvPr id="2" name="TextBox 1"/>
+          <p:cNvPr id="2" name="Rectangle 1"/>
+          <p:cNvSpPr/>
+          <p:nvPr/>
+        </p:nvSpPr>
+        <p:spPr>
+          <a:xfrm>
+            <a:off x="0" y="0"/>
+            <a:ext cx="12191695" cy="6858000"/>
+          </a:xfrm>
+          <a:prstGeom prst="rect">
+            <a:avLst/>
+          </a:prstGeom>
+          <a:solidFill>
+            <a:srgbClr val="FFF3DF"/>
+          </a:solidFill>
+          <a:ln>
+            <a:noFill/>
+          </a:ln>
+        </p:spPr>
+        <p:style>
+          <a:lnRef idx="1">
+            <a:schemeClr val="accent1"/>
+          </a:lnRef>
+          <a:fillRef idx="3">
+            <a:schemeClr val="accent1"/>
+          </a:fillRef>
+          <a:effectRef idx="2">
+            <a:schemeClr val="accent1"/>
+          </a:effectRef>
+          <a:fontRef idx="minor">
+            <a:schemeClr val="lt1"/>
+          </a:fontRef>
+        </p:style>
+        <p:txBody>
+          <a:bodyPr rtlCol="0" anchor="ctr"/>
+          <a:lstStyle/>
+          <a:p>
+            <a:pPr algn="ctr"/>
+          </a:p>
+        </p:txBody>
+      </p:sp>
+      <p:sp>
+        <p:nvSpPr>
+          <p:cNvPr id="3" name="Rectangle 2"/>
+          <p:cNvSpPr/>
+          <p:nvPr/>
+        </p:nvSpPr>
+        <p:spPr>
+          <a:xfrm>
+            <a:off x="0" y="0"/>
+            <a:ext cx="146304" cy="6858000"/>
+          </a:xfrm>
+          <a:prstGeom prst="rect">
+            <a:avLst/>
+          </a:prstGeom>
+          <a:solidFill>
+            <a:srgbClr val="E0A02C"/>
+          </a:solidFill>
+          <a:ln>
+            <a:noFill/>
+          </a:ln>
+        </p:spPr>
+        <p:style>
+          <a:lnRef idx="1">
+            <a:schemeClr val="accent1"/>
+          </a:lnRef>
+          <a:fillRef idx="3">
+            <a:schemeClr val="accent1"/>
+          </a:fillRef>
+          <a:effectRef idx="2">
+            <a:schemeClr val="accent1"/>
+          </a:effectRef>
+          <a:fontRef idx="minor">
+            <a:schemeClr val="lt1"/>
+          </a:fontRef>
+        </p:style>
+        <p:txBody>
+          <a:bodyPr rtlCol="0" anchor="ctr"/>
+          <a:lstStyle/>
+          <a:p>
+            <a:pPr algn="ctr"/>
+          </a:p>
+        </p:txBody>
+      </p:sp>
+      <p:sp>
+        <p:nvSpPr>
+          <p:cNvPr id="4" name="TextBox 3"/>
+          <p:cNvSpPr txBox="1"/>
+          <p:nvPr/>
+        </p:nvSpPr>
+        <p:spPr>
+          <a:xfrm>
+            <a:off x="9082735" y="109728"/>
+            <a:ext cx="2834640" cy="384048"/>
+          </a:xfrm>
+          <a:prstGeom prst="rect">
+            <a:avLst/>
+          </a:prstGeom>
+          <a:noFill/>
+        </p:spPr>
+        <p:txBody>
+          <a:bodyPr wrap="square">
+            <a:spAutoFit/>
+          </a:bodyPr>
+          <a:lstStyle/>
+          <a:p>
+            <a:pPr algn="r"/>
+            <a:r>
+              <a:rPr sz="1400" b="1">
+                <a:solidFill>
+                  <a:srgbClr val="8A5400"/>
+                </a:solidFill>
+                <a:latin typeface="Leelawadee UI"/>
+                <a:ea typeface="Leelawadee UI"/>
+                <a:cs typeface="Leelawadee UI"/>
+              </a:rPr>
+              <a:t>🎬 สลับไปหน้าจอสาธิตสด</a:t>
+            </a:r>
+          </a:p>
+        </p:txBody>
+      </p:sp>
+      <p:sp>
+        <p:nvSpPr>
+          <p:cNvPr id="5" name="TextBox 4"/>
           <p:cNvSpPr txBox="1"/>
           <p:nvPr/>
         </p:nvSpPr>
@@ -21170,26 +20588,63 @@
             <a:r>
               <a:rPr sz="3600" b="1">
                 <a:solidFill>
-                  <a:srgbClr val="1F5FA8"/>
-                </a:solidFill>
-                <a:latin typeface="Leelawadee UI"/>
-                <a:ea typeface="Leelawadee UI"/>
-                <a:cs typeface="Leelawadee UI"/>
-              </a:rPr>
-              <a:t>deploy เว็บอย่างเดียวไม่พอ — กฎต้องขึ้นด้วย</a:t>
-            </a:r>
-          </a:p>
-        </p:txBody>
-      </p:sp>
-      <p:sp>
-        <p:nvSpPr>
-          <p:cNvPr id="3" name="TextBox 2"/>
+                  <a:srgbClr val="8A5400"/>
+                </a:solidFill>
+                <a:latin typeface="Leelawadee UI"/>
+                <a:ea typeface="Leelawadee UI"/>
+                <a:cs typeface="Leelawadee UI"/>
+              </a:rPr>
+              <a:t>🎬 สาธิต — FixIt ขึ้น URL จริง ต่อหน้าห้อง ⏱ 9 นาที</a:t>
+            </a:r>
+          </a:p>
+        </p:txBody>
+      </p:sp>
+      <p:sp>
+        <p:nvSpPr>
+          <p:cNvPr id="6" name="TextBox 5"/>
           <p:cNvSpPr txBox="1"/>
           <p:nvPr/>
         </p:nvSpPr>
         <p:spPr>
           <a:xfrm>
             <a:off x="822960" y="2075688"/>
+            <a:ext cx="10545775" cy="1029208"/>
+          </a:xfrm>
+          <a:prstGeom prst="rect">
+            <a:avLst/>
+          </a:prstGeom>
+          <a:noFill/>
+        </p:spPr>
+        <p:txBody>
+          <a:bodyPr wrap="square">
+            <a:spAutoFit/>
+          </a:bodyPr>
+          <a:lstStyle/>
+          <a:p>
+            <a:pPr algn="l"/>
+            <a:r>
+              <a:rPr sz="2600" b="0">
+                <a:solidFill>
+                  <a:srgbClr val="1A1A1A"/>
+                </a:solidFill>
+                <a:latin typeface="Leelawadee UI"/>
+                <a:ea typeface="Leelawadee UI"/>
+                <a:cs typeface="Leelawadee UI"/>
+              </a:rPr>
+              <a:t>• สั่ง deploy ทั้งเว็บและกฎ → รอ → เห็น Deploy complete</a:t>
+            </a:r>
+          </a:p>
+        </p:txBody>
+      </p:sp>
+      <p:sp>
+        <p:nvSpPr>
+          <p:cNvPr id="7" name="TextBox 6"/>
+          <p:cNvSpPr txBox="1"/>
+          <p:nvPr/>
+        </p:nvSpPr>
+        <p:spPr>
+          <a:xfrm>
+            <a:off x="822960" y="3159760"/>
             <a:ext cx="10545775" cy="560324"/>
           </a:xfrm>
           <a:prstGeom prst="rect">
@@ -21213,20 +20668,20 @@
                 <a:ea typeface="Leelawadee UI"/>
                 <a:cs typeface="Leelawadee UI"/>
               </a:rPr>
-              <a:t>• เว็บกับกฎ deploy แยกกันคนละส่วน</a:t>
-            </a:r>
-          </a:p>
-        </p:txBody>
-      </p:sp>
-      <p:sp>
-        <p:nvSpPr>
-          <p:cNvPr id="4" name="TextBox 3"/>
-          <p:cNvSpPr txBox="1"/>
-          <p:nvPr/>
-        </p:nvSpPr>
-        <p:spPr>
-          <a:xfrm>
-            <a:off x="822960" y="2690876"/>
+              <a:t>• วาง URL ในแชท — ทุกคนเปิดตามเดี๋ยวนี้เลย</a:t>
+            </a:r>
+          </a:p>
+        </p:txBody>
+      </p:sp>
+      <p:sp>
+        <p:nvSpPr>
+          <p:cNvPr id="8" name="TextBox 7"/>
+          <p:cNvSpPr txBox="1"/>
+          <p:nvPr/>
+        </p:nvSpPr>
+        <p:spPr>
+          <a:xfrm>
+            <a:off x="822960" y="3774948"/>
             <a:ext cx="10545775" cy="1029208"/>
           </a:xfrm>
           <a:prstGeom prst="rect">
@@ -21250,88 +20705,14 @@
                 <a:ea typeface="Leelawadee UI"/>
                 <a:cs typeface="Leelawadee UI"/>
               </a:rPr>
-              <a:t>• กฎที่เขียนไว้ในเครื่อง ยังไม่คุ้มครองของจริง จนกว่าจะ deploy</a:t>
-            </a:r>
-          </a:p>
-        </p:txBody>
-      </p:sp>
-      <p:sp>
-        <p:nvSpPr>
-          <p:cNvPr id="5" name="TextBox 4"/>
-          <p:cNvSpPr txBox="1"/>
-          <p:nvPr/>
-        </p:nvSpPr>
-        <p:spPr>
-          <a:xfrm>
-            <a:off x="822960" y="3774948"/>
-            <a:ext cx="10545775" cy="560324"/>
-          </a:xfrm>
-          <a:prstGeom prst="rect">
-            <a:avLst/>
-          </a:prstGeom>
-          <a:noFill/>
-        </p:spPr>
-        <p:txBody>
-          <a:bodyPr wrap="square">
-            <a:spAutoFit/>
-          </a:bodyPr>
-          <a:lstStyle/>
-          <a:p>
-            <a:pPr algn="l"/>
-            <a:r>
-              <a:rPr sz="2600" b="0">
-                <a:solidFill>
-                  <a:srgbClr val="1A1A1A"/>
-                </a:solidFill>
-                <a:latin typeface="Leelawadee UI"/>
-                <a:ea typeface="Leelawadee UI"/>
-                <a:cs typeface="Leelawadee UI"/>
-              </a:rPr>
-              <a:t>• 🚫 ห้ามออกออนไลน์โดยไม่มีกฎขั้นต่ำ — ไม่มีข้อยกเว้น</a:t>
-            </a:r>
-          </a:p>
-        </p:txBody>
-      </p:sp>
-      <p:sp>
-        <p:nvSpPr>
-          <p:cNvPr id="6" name="TextBox 5"/>
-          <p:cNvSpPr txBox="1"/>
-          <p:nvPr/>
-        </p:nvSpPr>
-        <p:spPr>
-          <a:xfrm>
-            <a:off x="822960" y="4390136"/>
-            <a:ext cx="10545775" cy="560324"/>
-          </a:xfrm>
-          <a:prstGeom prst="rect">
-            <a:avLst/>
-          </a:prstGeom>
-          <a:noFill/>
-        </p:spPr>
-        <p:txBody>
-          <a:bodyPr wrap="square">
-            <a:spAutoFit/>
-          </a:bodyPr>
-          <a:lstStyle/>
-          <a:p>
-            <a:pPr algn="l"/>
-            <a:r>
-              <a:rPr sz="2600" b="0">
-                <a:solidFill>
-                  <a:srgbClr val="1A1A1A"/>
-                </a:solidFill>
-                <a:latin typeface="Leelawadee UI"/>
-                <a:ea typeface="Leelawadee UI"/>
-                <a:cs typeface="Leelawadee UI"/>
-              </a:rPr>
-              <a:t>• สั่ง AI ให้ deploy ทั้งเว็บและกฎในรอบเดียว</a:t>
-            </a:r>
-          </a:p>
-        </p:txBody>
-      </p:sp>
-      <p:sp>
-        <p:nvSpPr>
-          <p:cNvPr id="7" name="TextBox 6"/>
+              <a:t>• เปิดจากมือถือผู้สอนให้ดูด้วย — ออนไลน์จริง ไม่ใช่ในเครื่อง</a:t>
+            </a:r>
+          </a:p>
+        </p:txBody>
+      </p:sp>
+      <p:sp>
+        <p:nvSpPr>
+          <p:cNvPr id="9" name="TextBox 8"/>
           <p:cNvSpPr txBox="1"/>
           <p:nvPr/>
         </p:nvSpPr>
@@ -21391,23 +20772,23 @@
         </p:nvSpPr>
         <p:spPr>
           <a:xfrm>
-            <a:off x="822960" y="502920"/>
-            <a:ext cx="10545775" cy="804672"/>
-          </a:xfrm>
-          <a:prstGeom prst="rect">
-            <a:avLst/>
-          </a:prstGeom>
-          <a:noFill/>
-        </p:spPr>
-        <p:txBody>
-          <a:bodyPr wrap="square">
-            <a:spAutoFit/>
-          </a:bodyPr>
-          <a:lstStyle/>
-          <a:p>
-            <a:pPr algn="l"/>
-            <a:r>
-              <a:rPr sz="3600" b="1">
+            <a:off x="822960" y="2011680"/>
+            <a:ext cx="10545775" cy="2743200"/>
+          </a:xfrm>
+          <a:prstGeom prst="rect">
+            <a:avLst/>
+          </a:prstGeom>
+          <a:noFill/>
+        </p:spPr>
+        <p:txBody>
+          <a:bodyPr wrap="square" anchor="ctr">
+            <a:spAutoFit/>
+          </a:bodyPr>
+          <a:lstStyle/>
+          <a:p>
+            <a:pPr algn="ctr"/>
+            <a:r>
+              <a:rPr sz="5400" b="1">
                 <a:solidFill>
                   <a:srgbClr val="1F5FA8"/>
                 </a:solidFill>
@@ -21415,7 +20796,7 @@
                 <a:ea typeface="Leelawadee UI"/>
                 <a:cs typeface="Leelawadee UI"/>
               </a:rPr>
-              <a:t>ในเครื่องได้ ออนไลน์พัง — 2 สาเหตุหลัก</a:t>
+              <a:t>ระบบของเราออนไลน์แล้ว</a:t>
             </a:r>
           </a:p>
         </p:txBody>
@@ -21423,154 +20804,6 @@
       <p:sp>
         <p:nvSpPr>
           <p:cNvPr id="3" name="TextBox 2"/>
-          <p:cNvSpPr txBox="1"/>
-          <p:nvPr/>
-        </p:nvSpPr>
-        <p:spPr>
-          <a:xfrm>
-            <a:off x="822960" y="1472184"/>
-            <a:ext cx="10545775" cy="560324"/>
-          </a:xfrm>
-          <a:prstGeom prst="rect">
-            <a:avLst/>
-          </a:prstGeom>
-          <a:noFill/>
-        </p:spPr>
-        <p:txBody>
-          <a:bodyPr wrap="square">
-            <a:spAutoFit/>
-          </a:bodyPr>
-          <a:lstStyle/>
-          <a:p>
-            <a:pPr algn="l"/>
-            <a:r>
-              <a:rPr sz="2600" b="0">
-                <a:solidFill>
-                  <a:srgbClr val="1A1A1A"/>
-                </a:solidFill>
-                <a:latin typeface="Leelawadee UI"/>
-                <a:ea typeface="Leelawadee UI"/>
-                <a:cs typeface="Leelawadee UI"/>
-              </a:rPr>
-              <a:t>• สาเหตุ 1: กฎยังไม่ deploy — ขึ้น permission denied</a:t>
-            </a:r>
-          </a:p>
-        </p:txBody>
-      </p:sp>
-      <p:sp>
-        <p:nvSpPr>
-          <p:cNvPr id="4" name="TextBox 3"/>
-          <p:cNvSpPr txBox="1"/>
-          <p:nvPr/>
-        </p:nvSpPr>
-        <p:spPr>
-          <a:xfrm>
-            <a:off x="822960" y="2087372"/>
-            <a:ext cx="10545775" cy="560324"/>
-          </a:xfrm>
-          <a:prstGeom prst="rect">
-            <a:avLst/>
-          </a:prstGeom>
-          <a:noFill/>
-        </p:spPr>
-        <p:txBody>
-          <a:bodyPr wrap="square">
-            <a:spAutoFit/>
-          </a:bodyPr>
-          <a:lstStyle/>
-          <a:p>
-            <a:pPr algn="l"/>
-            <a:r>
-              <a:rPr sz="2600" b="0">
-                <a:solidFill>
-                  <a:srgbClr val="1A1A1A"/>
-                </a:solidFill>
-                <a:latin typeface="Leelawadee UI"/>
-                <a:ea typeface="Leelawadee UI"/>
-                <a:cs typeface="Leelawadee UI"/>
-              </a:rPr>
-              <a:t>• สาเหตุ 2: index (สารบัญช่วยค้น) ยังไม่สร้าง</a:t>
-            </a:r>
-          </a:p>
-        </p:txBody>
-      </p:sp>
-      <p:sp>
-        <p:nvSpPr>
-          <p:cNvPr id="5" name="TextBox 4"/>
-          <p:cNvSpPr txBox="1"/>
-          <p:nvPr/>
-        </p:nvSpPr>
-        <p:spPr>
-          <a:xfrm>
-            <a:off x="822960" y="2702560"/>
-            <a:ext cx="10545775" cy="1029208"/>
-          </a:xfrm>
-          <a:prstGeom prst="rect">
-            <a:avLst/>
-          </a:prstGeom>
-          <a:noFill/>
-        </p:spPr>
-        <p:txBody>
-          <a:bodyPr wrap="square">
-            <a:spAutoFit/>
-          </a:bodyPr>
-          <a:lstStyle/>
-          <a:p>
-            <a:pPr algn="l"/>
-            <a:r>
-              <a:rPr sz="2600" b="0">
-                <a:solidFill>
-                  <a:srgbClr val="1A1A1A"/>
-                </a:solidFill>
-                <a:latin typeface="Leelawadee UI"/>
-                <a:ea typeface="Leelawadee UI"/>
-                <a:cs typeface="Leelawadee UI"/>
-              </a:rPr>
-              <a:t>• ทางแก้ index: อ่าน error → กดลิงก์ในข้อความ → กดสร้าง → รอ</a:t>
-            </a:r>
-          </a:p>
-        </p:txBody>
-      </p:sp>
-      <p:sp>
-        <p:nvSpPr>
-          <p:cNvPr id="6" name="TextBox 5"/>
-          <p:cNvSpPr txBox="1"/>
-          <p:nvPr/>
-        </p:nvSpPr>
-        <p:spPr>
-          <a:xfrm>
-            <a:off x="822960" y="3786632"/>
-            <a:ext cx="10545775" cy="560324"/>
-          </a:xfrm>
-          <a:prstGeom prst="rect">
-            <a:avLst/>
-          </a:prstGeom>
-          <a:noFill/>
-        </p:spPr>
-        <p:txBody>
-          <a:bodyPr wrap="square">
-            <a:spAutoFit/>
-          </a:bodyPr>
-          <a:lstStyle/>
-          <a:p>
-            <a:pPr algn="l"/>
-            <a:r>
-              <a:rPr sz="2600" b="0">
-                <a:solidFill>
-                  <a:srgbClr val="1A1A1A"/>
-                </a:solidFill>
-                <a:latin typeface="Leelawadee UI"/>
-                <a:ea typeface="Leelawadee UI"/>
-                <a:cs typeface="Leelawadee UI"/>
-              </a:rPr>
-              <a:t>• อ่าน error ให้จบบรรทัดก่อนตกใจ</a:t>
-            </a:r>
-          </a:p>
-        </p:txBody>
-      </p:sp>
-      <p:sp>
-        <p:nvSpPr>
-          <p:cNvPr id="7" name="TextBox 6"/>
           <p:cNvSpPr txBox="1"/>
           <p:nvPr/>
         </p:nvSpPr>
@@ -21624,87 +20857,75 @@
       <p:grpSpPr/>
       <p:sp>
         <p:nvSpPr>
-          <p:cNvPr id="2" name="Rectangle 1"/>
-          <p:cNvSpPr/>
-          <p:nvPr/>
-        </p:nvSpPr>
-        <p:spPr>
-          <a:xfrm>
-            <a:off x="0" y="0"/>
-            <a:ext cx="12191695" cy="6858000"/>
-          </a:xfrm>
-          <a:prstGeom prst="rect">
-            <a:avLst/>
-          </a:prstGeom>
-          <a:solidFill>
-            <a:srgbClr val="FFF3DF"/>
-          </a:solidFill>
-          <a:ln>
-            <a:noFill/>
-          </a:ln>
-        </p:spPr>
-        <p:style>
-          <a:lnRef idx="1">
-            <a:schemeClr val="accent1"/>
-          </a:lnRef>
-          <a:fillRef idx="3">
-            <a:schemeClr val="accent1"/>
-          </a:fillRef>
-          <a:effectRef idx="2">
-            <a:schemeClr val="accent1"/>
-          </a:effectRef>
-          <a:fontRef idx="minor">
-            <a:schemeClr val="lt1"/>
-          </a:fontRef>
-        </p:style>
-        <p:txBody>
-          <a:bodyPr rtlCol="0" anchor="ctr"/>
-          <a:lstStyle/>
-          <a:p>
-            <a:pPr algn="ctr"/>
-          </a:p>
-        </p:txBody>
-      </p:sp>
-      <p:sp>
-        <p:nvSpPr>
-          <p:cNvPr id="3" name="Rectangle 2"/>
-          <p:cNvSpPr/>
-          <p:nvPr/>
-        </p:nvSpPr>
-        <p:spPr>
-          <a:xfrm>
-            <a:off x="0" y="0"/>
-            <a:ext cx="146304" cy="6858000"/>
-          </a:xfrm>
-          <a:prstGeom prst="rect">
-            <a:avLst/>
-          </a:prstGeom>
-          <a:solidFill>
-            <a:srgbClr val="E0A02C"/>
-          </a:solidFill>
-          <a:ln>
-            <a:noFill/>
-          </a:ln>
-        </p:spPr>
-        <p:style>
-          <a:lnRef idx="1">
-            <a:schemeClr val="accent1"/>
-          </a:lnRef>
-          <a:fillRef idx="3">
-            <a:schemeClr val="accent1"/>
-          </a:fillRef>
-          <a:effectRef idx="2">
-            <a:schemeClr val="accent1"/>
-          </a:effectRef>
-          <a:fontRef idx="minor">
-            <a:schemeClr val="lt1"/>
-          </a:fontRef>
-        </p:style>
-        <p:txBody>
-          <a:bodyPr rtlCol="0" anchor="ctr"/>
-          <a:lstStyle/>
-          <a:p>
-            <a:pPr algn="ctr"/>
+          <p:cNvPr id="2" name="TextBox 1"/>
+          <p:cNvSpPr txBox="1"/>
+          <p:nvPr/>
+        </p:nvSpPr>
+        <p:spPr>
+          <a:xfrm>
+            <a:off x="822960" y="502920"/>
+            <a:ext cx="10545775" cy="804672"/>
+          </a:xfrm>
+          <a:prstGeom prst="rect">
+            <a:avLst/>
+          </a:prstGeom>
+          <a:noFill/>
+        </p:spPr>
+        <p:txBody>
+          <a:bodyPr wrap="square">
+            <a:spAutoFit/>
+          </a:bodyPr>
+          <a:lstStyle/>
+          <a:p>
+            <a:pPr algn="l"/>
+            <a:r>
+              <a:rPr sz="3600" b="1">
+                <a:solidFill>
+                  <a:srgbClr val="1F5FA8"/>
+                </a:solidFill>
+                <a:latin typeface="Leelawadee UI"/>
+                <a:ea typeface="Leelawadee UI"/>
+                <a:cs typeface="Leelawadee UI"/>
+              </a:rPr>
+              <a:t>⚠️ ออนไลน์แล้ว แต่ยังห้ามใส่ข้อมูลจริง</a:t>
+            </a:r>
+          </a:p>
+        </p:txBody>
+      </p:sp>
+      <p:sp>
+        <p:nvSpPr>
+          <p:cNvPr id="3" name="TextBox 2"/>
+          <p:cNvSpPr txBox="1"/>
+          <p:nvPr/>
+        </p:nvSpPr>
+        <p:spPr>
+          <a:xfrm>
+            <a:off x="822960" y="1472184"/>
+            <a:ext cx="10545775" cy="560324"/>
+          </a:xfrm>
+          <a:prstGeom prst="rect">
+            <a:avLst/>
+          </a:prstGeom>
+          <a:noFill/>
+        </p:spPr>
+        <p:txBody>
+          <a:bodyPr wrap="square">
+            <a:spAutoFit/>
+          </a:bodyPr>
+          <a:lstStyle/>
+          <a:p>
+            <a:pPr algn="l"/>
+            <a:r>
+              <a:rPr sz="2600" b="0">
+                <a:solidFill>
+                  <a:srgbClr val="1A1A1A"/>
+                </a:solidFill>
+                <a:latin typeface="Leelawadee UI"/>
+                <a:ea typeface="Leelawadee UI"/>
+                <a:cs typeface="Leelawadee UI"/>
+              </a:rPr>
+              <a:t>• กุญแจวันนี้กันได้เฉพาะคนไม่ล็อกอิน</a:t>
+            </a:r>
           </a:p>
         </p:txBody>
       </p:sp>
@@ -21716,31 +20937,31 @@
         </p:nvSpPr>
         <p:spPr>
           <a:xfrm>
-            <a:off x="9082735" y="109728"/>
-            <a:ext cx="2834640" cy="384048"/>
-          </a:xfrm>
-          <a:prstGeom prst="rect">
-            <a:avLst/>
-          </a:prstGeom>
-          <a:noFill/>
-        </p:spPr>
-        <p:txBody>
-          <a:bodyPr wrap="square">
-            <a:spAutoFit/>
-          </a:bodyPr>
-          <a:lstStyle/>
-          <a:p>
-            <a:pPr algn="r"/>
-            <a:r>
-              <a:rPr sz="1400" b="1">
-                <a:solidFill>
-                  <a:srgbClr val="8A5400"/>
-                </a:solidFill>
-                <a:latin typeface="Leelawadee UI"/>
-                <a:ea typeface="Leelawadee UI"/>
-                <a:cs typeface="Leelawadee UI"/>
-              </a:rPr>
-              <a:t>🎬 สลับไปหน้าจอสาธิตสด</a:t>
+            <a:off x="822960" y="2087372"/>
+            <a:ext cx="10545775" cy="560324"/>
+          </a:xfrm>
+          <a:prstGeom prst="rect">
+            <a:avLst/>
+          </a:prstGeom>
+          <a:noFill/>
+        </p:spPr>
+        <p:txBody>
+          <a:bodyPr wrap="square">
+            <a:spAutoFit/>
+          </a:bodyPr>
+          <a:lstStyle/>
+          <a:p>
+            <a:pPr algn="l"/>
+            <a:r>
+              <a:rPr sz="2600" b="0">
+                <a:solidFill>
+                  <a:srgbClr val="1A1A1A"/>
+                </a:solidFill>
+                <a:latin typeface="Leelawadee UI"/>
+                <a:ea typeface="Leelawadee UI"/>
+                <a:cs typeface="Leelawadee UI"/>
+              </a:rPr>
+              <a:t>• ใครสมัครบัญชีใหม่ ก็ยังอ่านได้หมด</a:t>
             </a:r>
           </a:p>
         </p:txBody>
@@ -21753,8 +20974,8 @@
         </p:nvSpPr>
         <p:spPr>
           <a:xfrm>
-            <a:off x="822960" y="502920"/>
-            <a:ext cx="10545775" cy="1408176"/>
+            <a:off x="822960" y="2702560"/>
+            <a:ext cx="10545775" cy="1029208"/>
           </a:xfrm>
           <a:prstGeom prst="rect">
             <a:avLst/>
@@ -21769,15 +20990,15 @@
           <a:p>
             <a:pPr algn="l"/>
             <a:r>
-              <a:rPr sz="3600" b="1">
-                <a:solidFill>
-                  <a:srgbClr val="8A5400"/>
-                </a:solidFill>
-                <a:latin typeface="Leelawadee UI"/>
-                <a:ea typeface="Leelawadee UI"/>
-                <a:cs typeface="Leelawadee UI"/>
-              </a:rPr>
-              <a:t>🎬 สาธิต — FixIt ขึ้น URL จริง ต่อหน้าห้อง ⏱ 9 นาที</a:t>
+              <a:rPr sz="2600" b="0">
+                <a:solidFill>
+                  <a:srgbClr val="1A1A1A"/>
+                </a:solidFill>
+                <a:latin typeface="Leelawadee UI"/>
+                <a:ea typeface="Leelawadee UI"/>
+                <a:cs typeface="Leelawadee UI"/>
+              </a:rPr>
+              <a:t>• กฎรายห้องปิดสัปดาห์หน้า — ก่อนนั้นใช้ชื่อสมมติเท่านั้น</a:t>
             </a:r>
           </a:p>
         </p:txBody>
@@ -21790,8 +21011,8 @@
         </p:nvSpPr>
         <p:spPr>
           <a:xfrm>
-            <a:off x="822960" y="2075688"/>
-            <a:ext cx="10545775" cy="1029208"/>
+            <a:off x="822960" y="3786632"/>
+            <a:ext cx="10545775" cy="560324"/>
           </a:xfrm>
           <a:prstGeom prst="rect">
             <a:avLst/>
@@ -21814,7 +21035,7 @@
                 <a:ea typeface="Leelawadee UI"/>
                 <a:cs typeface="Leelawadee UI"/>
               </a:rPr>
-              <a:t>• สั่ง deploy ทั้งเว็บและกฎ → รอ → เห็น Deploy complete</a:t>
+              <a:t>• สมชาย สมหญิง สมศรี คือเพื่อนของเราทั้งเดือน</a:t>
             </a:r>
           </a:p>
         </p:txBody>
@@ -21822,80 +21043,6 @@
       <p:sp>
         <p:nvSpPr>
           <p:cNvPr id="7" name="TextBox 6"/>
-          <p:cNvSpPr txBox="1"/>
-          <p:nvPr/>
-        </p:nvSpPr>
-        <p:spPr>
-          <a:xfrm>
-            <a:off x="822960" y="3159760"/>
-            <a:ext cx="10545775" cy="560324"/>
-          </a:xfrm>
-          <a:prstGeom prst="rect">
-            <a:avLst/>
-          </a:prstGeom>
-          <a:noFill/>
-        </p:spPr>
-        <p:txBody>
-          <a:bodyPr wrap="square">
-            <a:spAutoFit/>
-          </a:bodyPr>
-          <a:lstStyle/>
-          <a:p>
-            <a:pPr algn="l"/>
-            <a:r>
-              <a:rPr sz="2600" b="0">
-                <a:solidFill>
-                  <a:srgbClr val="1A1A1A"/>
-                </a:solidFill>
-                <a:latin typeface="Leelawadee UI"/>
-                <a:ea typeface="Leelawadee UI"/>
-                <a:cs typeface="Leelawadee UI"/>
-              </a:rPr>
-              <a:t>• วาง URL ในแชท — ทุกคนเปิดตามเดี๋ยวนี้เลย</a:t>
-            </a:r>
-          </a:p>
-        </p:txBody>
-      </p:sp>
-      <p:sp>
-        <p:nvSpPr>
-          <p:cNvPr id="8" name="TextBox 7"/>
-          <p:cNvSpPr txBox="1"/>
-          <p:nvPr/>
-        </p:nvSpPr>
-        <p:spPr>
-          <a:xfrm>
-            <a:off x="822960" y="3774948"/>
-            <a:ext cx="10545775" cy="1029208"/>
-          </a:xfrm>
-          <a:prstGeom prst="rect">
-            <a:avLst/>
-          </a:prstGeom>
-          <a:noFill/>
-        </p:spPr>
-        <p:txBody>
-          <a:bodyPr wrap="square">
-            <a:spAutoFit/>
-          </a:bodyPr>
-          <a:lstStyle/>
-          <a:p>
-            <a:pPr algn="l"/>
-            <a:r>
-              <a:rPr sz="2600" b="0">
-                <a:solidFill>
-                  <a:srgbClr val="1A1A1A"/>
-                </a:solidFill>
-                <a:latin typeface="Leelawadee UI"/>
-                <a:ea typeface="Leelawadee UI"/>
-                <a:cs typeface="Leelawadee UI"/>
-              </a:rPr>
-              <a:t>• เปิดจากมือถือผู้สอนให้ดูด้วย — ออนไลน์จริง ไม่ใช่ในเครื่อง</a:t>
-            </a:r>
-          </a:p>
-        </p:txBody>
-      </p:sp>
-      <p:sp>
-        <p:nvSpPr>
-          <p:cNvPr id="9" name="TextBox 8"/>
           <p:cNvSpPr txBox="1"/>
           <p:nvPr/>
         </p:nvSpPr>
@@ -21955,23 +21102,23 @@
         </p:nvSpPr>
         <p:spPr>
           <a:xfrm>
-            <a:off x="822960" y="2011680"/>
-            <a:ext cx="10545775" cy="2743200"/>
-          </a:xfrm>
-          <a:prstGeom prst="rect">
-            <a:avLst/>
-          </a:prstGeom>
-          <a:noFill/>
-        </p:spPr>
-        <p:txBody>
-          <a:bodyPr wrap="square" anchor="ctr">
-            <a:spAutoFit/>
-          </a:bodyPr>
-          <a:lstStyle/>
-          <a:p>
-            <a:pPr algn="ctr"/>
-            <a:r>
-              <a:rPr sz="5400" b="1">
+            <a:off x="822960" y="502920"/>
+            <a:ext cx="10545775" cy="804672"/>
+          </a:xfrm>
+          <a:prstGeom prst="rect">
+            <a:avLst/>
+          </a:prstGeom>
+          <a:noFill/>
+        </p:spPr>
+        <p:txBody>
+          <a:bodyPr wrap="square">
+            <a:spAutoFit/>
+          </a:bodyPr>
+          <a:lstStyle/>
+          <a:p>
+            <a:pPr algn="l"/>
+            <a:r>
+              <a:rPr sz="3600" b="1">
                 <a:solidFill>
                   <a:srgbClr val="1F5FA8"/>
                 </a:solidFill>
@@ -21979,7 +21126,7 @@
                 <a:ea typeface="Leelawadee UI"/>
                 <a:cs typeface="Leelawadee UI"/>
               </a:rPr>
-              <a:t>ระบบของเราออนไลน์แล้ว</a:t>
+              <a:t>✅ ช่วงที่ 6 คุณต้องได้อะไรกลับไป</a:t>
             </a:r>
           </a:p>
         </p:txBody>
@@ -21987,6 +21134,154 @@
       <p:sp>
         <p:nvSpPr>
           <p:cNvPr id="3" name="TextBox 2"/>
+          <p:cNvSpPr txBox="1"/>
+          <p:nvPr/>
+        </p:nvSpPr>
+        <p:spPr>
+          <a:xfrm>
+            <a:off x="822960" y="1472184"/>
+            <a:ext cx="10545775" cy="560324"/>
+          </a:xfrm>
+          <a:prstGeom prst="rect">
+            <a:avLst/>
+          </a:prstGeom>
+          <a:noFill/>
+        </p:spPr>
+        <p:txBody>
+          <a:bodyPr wrap="square">
+            <a:spAutoFit/>
+          </a:bodyPr>
+          <a:lstStyle/>
+          <a:p>
+            <a:pPr algn="l"/>
+            <a:r>
+              <a:rPr sz="2600" b="0">
+                <a:solidFill>
+                  <a:srgbClr val="1A1A1A"/>
+                </a:solidFill>
+                <a:latin typeface="Leelawadee UI"/>
+                <a:ea typeface="Leelawadee UI"/>
+                <a:cs typeface="Leelawadee UI"/>
+              </a:rPr>
+              <a:t>• บอกได้ว่า deploy คืออะไร ต่างจาก localhost อย่างไร</a:t>
+            </a:r>
+          </a:p>
+        </p:txBody>
+      </p:sp>
+      <p:sp>
+        <p:nvSpPr>
+          <p:cNvPr id="4" name="TextBox 3"/>
+          <p:cNvSpPr txBox="1"/>
+          <p:nvPr/>
+        </p:nvSpPr>
+        <p:spPr>
+          <a:xfrm>
+            <a:off x="822960" y="2087372"/>
+            <a:ext cx="10545775" cy="560324"/>
+          </a:xfrm>
+          <a:prstGeom prst="rect">
+            <a:avLst/>
+          </a:prstGeom>
+          <a:noFill/>
+        </p:spPr>
+        <p:txBody>
+          <a:bodyPr wrap="square">
+            <a:spAutoFit/>
+          </a:bodyPr>
+          <a:lstStyle/>
+          <a:p>
+            <a:pPr algn="l"/>
+            <a:r>
+              <a:rPr sz="2600" b="0">
+                <a:solidFill>
+                  <a:srgbClr val="1A1A1A"/>
+                </a:solidFill>
+                <a:latin typeface="Leelawadee UI"/>
+                <a:ea typeface="Leelawadee UI"/>
+                <a:cs typeface="Leelawadee UI"/>
+              </a:rPr>
+              <a:t>• รู้ว่าต้อง deploy กฎพร้อมเว็บเสมอ</a:t>
+            </a:r>
+          </a:p>
+        </p:txBody>
+      </p:sp>
+      <p:sp>
+        <p:nvSpPr>
+          <p:cNvPr id="5" name="TextBox 4"/>
+          <p:cNvSpPr txBox="1"/>
+          <p:nvPr/>
+        </p:nvSpPr>
+        <p:spPr>
+          <a:xfrm>
+            <a:off x="822960" y="2702560"/>
+            <a:ext cx="10545775" cy="560324"/>
+          </a:xfrm>
+          <a:prstGeom prst="rect">
+            <a:avLst/>
+          </a:prstGeom>
+          <a:noFill/>
+        </p:spPr>
+        <p:txBody>
+          <a:bodyPr wrap="square">
+            <a:spAutoFit/>
+          </a:bodyPr>
+          <a:lstStyle/>
+          <a:p>
+            <a:pPr algn="l"/>
+            <a:r>
+              <a:rPr sz="2600" b="0">
+                <a:solidFill>
+                  <a:srgbClr val="1A1A1A"/>
+                </a:solidFill>
+                <a:latin typeface="Leelawadee UI"/>
+                <a:ea typeface="Leelawadee UI"/>
+                <a:cs typeface="Leelawadee UI"/>
+              </a:rPr>
+              <a:t>• รู้ 2 สาเหตุหลักของ "ในเครื่องได้ ออนไลน์พัง"</a:t>
+            </a:r>
+          </a:p>
+        </p:txBody>
+      </p:sp>
+      <p:sp>
+        <p:nvSpPr>
+          <p:cNvPr id="6" name="TextBox 5"/>
+          <p:cNvSpPr txBox="1"/>
+          <p:nvPr/>
+        </p:nvSpPr>
+        <p:spPr>
+          <a:xfrm>
+            <a:off x="822960" y="3317748"/>
+            <a:ext cx="10545775" cy="560324"/>
+          </a:xfrm>
+          <a:prstGeom prst="rect">
+            <a:avLst/>
+          </a:prstGeom>
+          <a:noFill/>
+        </p:spPr>
+        <p:txBody>
+          <a:bodyPr wrap="square">
+            <a:spAutoFit/>
+          </a:bodyPr>
+          <a:lstStyle/>
+          <a:p>
+            <a:pPr algn="l"/>
+            <a:r>
+              <a:rPr sz="2600" b="0">
+                <a:solidFill>
+                  <a:srgbClr val="1A1A1A"/>
+                </a:solidFill>
+                <a:latin typeface="Leelawadee UI"/>
+                <a:ea typeface="Leelawadee UI"/>
+                <a:cs typeface="Leelawadee UI"/>
+              </a:rPr>
+              <a:t>• รู้ว่าห้ามใส่ข้อมูลจริงจนกว่ากฎรายห้องจะปิด</a:t>
+            </a:r>
+          </a:p>
+        </p:txBody>
+      </p:sp>
+      <p:sp>
+        <p:nvSpPr>
+          <p:cNvPr id="7" name="TextBox 6"/>
           <p:cNvSpPr txBox="1"/>
           <p:nvPr/>
         </p:nvSpPr>
@@ -22194,7 +21489,7 @@
                 <a:ea typeface="Consolas"/>
                 <a:cs typeface="Consolas"/>
               </a:rPr>
-              <a:t>11:10  Git หลายคนบน repo เดียว ⭐ ของใหม่จริง</a:t>
+              <a:t>11:10  Git เมื่อโค้ดอยู่สองที่ ⭐ ของใหม่จริง</a:t>
             </a:r>
           </a:p>
           <a:p>
@@ -22208,7 +21503,7 @@
                 <a:ea typeface="Consolas"/>
                 <a:cs typeface="Consolas"/>
               </a:rPr>
-              <a:t>11:35  Deploy — จบเช้าด้วย URL จริง</a:t>
+              <a:t>11:22  Deploy — จบเช้าด้วย URL จริง</a:t>
             </a:r>
           </a:p>
         </p:txBody>
@@ -22269,38 +21564,44 @@
       <p:grpSpPr/>
       <p:sp>
         <p:nvSpPr>
-          <p:cNvPr id="2" name="TextBox 1"/>
-          <p:cNvSpPr txBox="1"/>
-          <p:nvPr/>
-        </p:nvSpPr>
-        <p:spPr>
-          <a:xfrm>
-            <a:off x="822960" y="502920"/>
-            <a:ext cx="10545775" cy="804672"/>
-          </a:xfrm>
-          <a:prstGeom prst="rect">
-            <a:avLst/>
-          </a:prstGeom>
-          <a:noFill/>
-        </p:spPr>
-        <p:txBody>
-          <a:bodyPr wrap="square">
-            <a:spAutoFit/>
-          </a:bodyPr>
-          <a:lstStyle/>
-          <a:p>
-            <a:pPr algn="l"/>
-            <a:r>
-              <a:rPr sz="3600" b="1">
-                <a:solidFill>
-                  <a:srgbClr val="1F5FA8"/>
-                </a:solidFill>
-                <a:latin typeface="Leelawadee UI"/>
-                <a:ea typeface="Leelawadee UI"/>
-                <a:cs typeface="Leelawadee UI"/>
-              </a:rPr>
-              <a:t>⚠️ ออนไลน์แล้ว แต่ยังห้ามใส่ข้อมูลจริง</a:t>
-            </a:r>
+          <p:cNvPr id="2" name="Rectangle 1"/>
+          <p:cNvSpPr/>
+          <p:nvPr/>
+        </p:nvSpPr>
+        <p:spPr>
+          <a:xfrm>
+            <a:off x="0" y="0"/>
+            <a:ext cx="12191695" cy="6858000"/>
+          </a:xfrm>
+          <a:prstGeom prst="rect">
+            <a:avLst/>
+          </a:prstGeom>
+          <a:solidFill>
+            <a:srgbClr val="1F5FA8"/>
+          </a:solidFill>
+          <a:ln>
+            <a:noFill/>
+          </a:ln>
+        </p:spPr>
+        <p:style>
+          <a:lnRef idx="1">
+            <a:schemeClr val="accent1"/>
+          </a:lnRef>
+          <a:fillRef idx="3">
+            <a:schemeClr val="accent1"/>
+          </a:fillRef>
+          <a:effectRef idx="2">
+            <a:schemeClr val="accent1"/>
+          </a:effectRef>
+          <a:fontRef idx="minor">
+            <a:schemeClr val="lt1"/>
+          </a:fontRef>
+        </p:style>
+        <p:txBody>
+          <a:bodyPr rtlCol="0" anchor="ctr"/>
+          <a:lstStyle/>
+          <a:p>
+            <a:pPr algn="ctr"/>
           </a:p>
         </p:txBody>
       </p:sp>
@@ -22312,31 +21613,31 @@
         </p:nvSpPr>
         <p:spPr>
           <a:xfrm>
-            <a:off x="822960" y="1472184"/>
-            <a:ext cx="10545775" cy="560324"/>
-          </a:xfrm>
-          <a:prstGeom prst="rect">
-            <a:avLst/>
-          </a:prstGeom>
-          <a:noFill/>
-        </p:spPr>
-        <p:txBody>
-          <a:bodyPr wrap="square">
-            <a:spAutoFit/>
-          </a:bodyPr>
-          <a:lstStyle/>
-          <a:p>
-            <a:pPr algn="l"/>
-            <a:r>
-              <a:rPr sz="2600" b="0">
-                <a:solidFill>
-                  <a:srgbClr val="1A1A1A"/>
-                </a:solidFill>
-                <a:latin typeface="Leelawadee UI"/>
-                <a:ea typeface="Leelawadee UI"/>
-                <a:cs typeface="Leelawadee UI"/>
-              </a:rPr>
-              <a:t>• กุญแจวันนี้กันได้เฉพาะคนไม่ล็อกอิน</a:t>
+            <a:off x="822960" y="2743200"/>
+            <a:ext cx="10545775" cy="1463040"/>
+          </a:xfrm>
+          <a:prstGeom prst="rect">
+            <a:avLst/>
+          </a:prstGeom>
+          <a:noFill/>
+        </p:spPr>
+        <p:txBody>
+          <a:bodyPr wrap="square" anchor="ctr">
+            <a:spAutoFit/>
+          </a:bodyPr>
+          <a:lstStyle/>
+          <a:p>
+            <a:pPr algn="ctr"/>
+            <a:r>
+              <a:rPr sz="4000" b="1">
+                <a:solidFill>
+                  <a:srgbClr val="FFFFFF"/>
+                </a:solidFill>
+                <a:latin typeface="Leelawadee UI"/>
+                <a:ea typeface="Leelawadee UI"/>
+                <a:cs typeface="Leelawadee UI"/>
+              </a:rPr>
+              <a:t>ปิดคาบ ⏱ 11:55–12:00</a:t>
             </a:r>
           </a:p>
         </p:txBody>
@@ -22344,117 +21645,6 @@
       <p:sp>
         <p:nvSpPr>
           <p:cNvPr id="4" name="TextBox 3"/>
-          <p:cNvSpPr txBox="1"/>
-          <p:nvPr/>
-        </p:nvSpPr>
-        <p:spPr>
-          <a:xfrm>
-            <a:off x="822960" y="2087372"/>
-            <a:ext cx="10545775" cy="560324"/>
-          </a:xfrm>
-          <a:prstGeom prst="rect">
-            <a:avLst/>
-          </a:prstGeom>
-          <a:noFill/>
-        </p:spPr>
-        <p:txBody>
-          <a:bodyPr wrap="square">
-            <a:spAutoFit/>
-          </a:bodyPr>
-          <a:lstStyle/>
-          <a:p>
-            <a:pPr algn="l"/>
-            <a:r>
-              <a:rPr sz="2600" b="0">
-                <a:solidFill>
-                  <a:srgbClr val="1A1A1A"/>
-                </a:solidFill>
-                <a:latin typeface="Leelawadee UI"/>
-                <a:ea typeface="Leelawadee UI"/>
-                <a:cs typeface="Leelawadee UI"/>
-              </a:rPr>
-              <a:t>• ใครสมัครบัญชีใหม่ ก็ยังอ่านได้หมด</a:t>
-            </a:r>
-          </a:p>
-        </p:txBody>
-      </p:sp>
-      <p:sp>
-        <p:nvSpPr>
-          <p:cNvPr id="5" name="TextBox 4"/>
-          <p:cNvSpPr txBox="1"/>
-          <p:nvPr/>
-        </p:nvSpPr>
-        <p:spPr>
-          <a:xfrm>
-            <a:off x="822960" y="2702560"/>
-            <a:ext cx="10545775" cy="1029208"/>
-          </a:xfrm>
-          <a:prstGeom prst="rect">
-            <a:avLst/>
-          </a:prstGeom>
-          <a:noFill/>
-        </p:spPr>
-        <p:txBody>
-          <a:bodyPr wrap="square">
-            <a:spAutoFit/>
-          </a:bodyPr>
-          <a:lstStyle/>
-          <a:p>
-            <a:pPr algn="l"/>
-            <a:r>
-              <a:rPr sz="2600" b="0">
-                <a:solidFill>
-                  <a:srgbClr val="1A1A1A"/>
-                </a:solidFill>
-                <a:latin typeface="Leelawadee UI"/>
-                <a:ea typeface="Leelawadee UI"/>
-                <a:cs typeface="Leelawadee UI"/>
-              </a:rPr>
-              <a:t>• กฎรายห้องปิดสัปดาห์หน้า — ก่อนนั้นใช้ชื่อสมมติเท่านั้น</a:t>
-            </a:r>
-          </a:p>
-        </p:txBody>
-      </p:sp>
-      <p:sp>
-        <p:nvSpPr>
-          <p:cNvPr id="6" name="TextBox 5"/>
-          <p:cNvSpPr txBox="1"/>
-          <p:nvPr/>
-        </p:nvSpPr>
-        <p:spPr>
-          <a:xfrm>
-            <a:off x="822960" y="3786632"/>
-            <a:ext cx="10545775" cy="560324"/>
-          </a:xfrm>
-          <a:prstGeom prst="rect">
-            <a:avLst/>
-          </a:prstGeom>
-          <a:noFill/>
-        </p:spPr>
-        <p:txBody>
-          <a:bodyPr wrap="square">
-            <a:spAutoFit/>
-          </a:bodyPr>
-          <a:lstStyle/>
-          <a:p>
-            <a:pPr algn="l"/>
-            <a:r>
-              <a:rPr sz="2600" b="0">
-                <a:solidFill>
-                  <a:srgbClr val="1A1A1A"/>
-                </a:solidFill>
-                <a:latin typeface="Leelawadee UI"/>
-                <a:ea typeface="Leelawadee UI"/>
-                <a:cs typeface="Leelawadee UI"/>
-              </a:rPr>
-              <a:t>• สมชาย สมหญิง สมศรี คือเพื่อนของเราทั้งเดือน</a:t>
-            </a:r>
-          </a:p>
-        </p:txBody>
-      </p:sp>
-      <p:sp>
-        <p:nvSpPr>
-          <p:cNvPr id="7" name="TextBox 6"/>
           <p:cNvSpPr txBox="1"/>
           <p:nvPr/>
         </p:nvSpPr>
@@ -22538,7 +21728,7 @@
                 <a:ea typeface="Leelawadee UI"/>
                 <a:cs typeface="Leelawadee UI"/>
               </a:rPr>
-              <a:t>✅ ช่วงที่ 6 คุณต้องได้อะไรกลับไป</a:t>
+              <a:t>📦 สิ่งที่ต้องส่งมอบสัปดาห์นี้</a:t>
             </a:r>
           </a:p>
         </p:txBody>
@@ -22575,7 +21765,7 @@
                 <a:ea typeface="Leelawadee UI"/>
                 <a:cs typeface="Leelawadee UI"/>
               </a:rPr>
-              <a:t>• บอกได้ว่า deploy คืออะไร ต่างจาก localhost อย่างไร</a:t>
+              <a:t>• [ ] repo บน GitHub ที่มี CLAUDE.md และไม่มีคีย์หลุด</a:t>
             </a:r>
           </a:p>
         </p:txBody>
@@ -22612,7 +21802,7 @@
                 <a:ea typeface="Leelawadee UI"/>
                 <a:cs typeface="Leelawadee UI"/>
               </a:rPr>
-              <a:t>• รู้ว่าต้อง deploy กฎพร้อมเว็บเสมอ</a:t>
+              <a:t>• [ ] ⭐ CRUD ครบ — กรอก → ปิด → เปิดใหม่ → ยังอยู่</a:t>
             </a:r>
           </a:p>
         </p:txBody>
@@ -22649,7 +21839,7 @@
                 <a:ea typeface="Leelawadee UI"/>
                 <a:cs typeface="Leelawadee UI"/>
               </a:rPr>
-              <a:t>• รู้ 2 สาเหตุหลักของ "ในเครื่องได้ ออนไลน์พัง"</a:t>
+              <a:t>• [ ] ล็อกอินได้ + ไม่ล็อกอินอ่านไม่ได้ + URL ออนไลน์</a:t>
             </a:r>
           </a:p>
         </p:txBody>
@@ -22663,7 +21853,7 @@
         <p:spPr>
           <a:xfrm>
             <a:off x="822960" y="3317748"/>
-            <a:ext cx="10545775" cy="560324"/>
+            <a:ext cx="10545775" cy="1029208"/>
           </a:xfrm>
           <a:prstGeom prst="rect">
             <a:avLst/>
@@ -22686,7 +21876,7 @@
                 <a:ea typeface="Leelawadee UI"/>
                 <a:cs typeface="Leelawadee UI"/>
               </a:rPr>
-              <a:t>• รู้ว่าห้ามใส่ข้อมูลจริงจนกว่ากฎรายห้องจะปิด</a:t>
+              <a:t>• 📤 ส่งผ่าน Google Classroom แนบลิงก์ · ศุกร์ 11 ก.ย. 23:59</a:t>
             </a:r>
           </a:p>
         </p:txBody>
@@ -22736,379 +21926,6 @@
 </file>
 
 <file path=ppt/slides/slide62.xml><?xml version="1.0" encoding="utf-8"?>
-<p:sld xmlns:a="http://schemas.openxmlformats.org/drawingml/2006/main" xmlns:p="http://schemas.openxmlformats.org/presentationml/2006/main" xmlns:r="http://schemas.openxmlformats.org/officeDocument/2006/relationships">
-  <p:cSld>
-    <p:spTree>
-      <p:nvGrpSpPr>
-        <p:cNvPr id="1" name=""/>
-        <p:cNvGrpSpPr/>
-        <p:nvPr/>
-      </p:nvGrpSpPr>
-      <p:grpSpPr/>
-      <p:sp>
-        <p:nvSpPr>
-          <p:cNvPr id="2" name="Rectangle 1"/>
-          <p:cNvSpPr/>
-          <p:nvPr/>
-        </p:nvSpPr>
-        <p:spPr>
-          <a:xfrm>
-            <a:off x="0" y="0"/>
-            <a:ext cx="12191695" cy="6858000"/>
-          </a:xfrm>
-          <a:prstGeom prst="rect">
-            <a:avLst/>
-          </a:prstGeom>
-          <a:solidFill>
-            <a:srgbClr val="1F5FA8"/>
-          </a:solidFill>
-          <a:ln>
-            <a:noFill/>
-          </a:ln>
-        </p:spPr>
-        <p:style>
-          <a:lnRef idx="1">
-            <a:schemeClr val="accent1"/>
-          </a:lnRef>
-          <a:fillRef idx="3">
-            <a:schemeClr val="accent1"/>
-          </a:fillRef>
-          <a:effectRef idx="2">
-            <a:schemeClr val="accent1"/>
-          </a:effectRef>
-          <a:fontRef idx="minor">
-            <a:schemeClr val="lt1"/>
-          </a:fontRef>
-        </p:style>
-        <p:txBody>
-          <a:bodyPr rtlCol="0" anchor="ctr"/>
-          <a:lstStyle/>
-          <a:p>
-            <a:pPr algn="ctr"/>
-          </a:p>
-        </p:txBody>
-      </p:sp>
-      <p:sp>
-        <p:nvSpPr>
-          <p:cNvPr id="3" name="TextBox 2"/>
-          <p:cNvSpPr txBox="1"/>
-          <p:nvPr/>
-        </p:nvSpPr>
-        <p:spPr>
-          <a:xfrm>
-            <a:off x="822960" y="2743200"/>
-            <a:ext cx="10545775" cy="1463040"/>
-          </a:xfrm>
-          <a:prstGeom prst="rect">
-            <a:avLst/>
-          </a:prstGeom>
-          <a:noFill/>
-        </p:spPr>
-        <p:txBody>
-          <a:bodyPr wrap="square" anchor="ctr">
-            <a:spAutoFit/>
-          </a:bodyPr>
-          <a:lstStyle/>
-          <a:p>
-            <a:pPr algn="ctr"/>
-            <a:r>
-              <a:rPr sz="4000" b="1">
-                <a:solidFill>
-                  <a:srgbClr val="FFFFFF"/>
-                </a:solidFill>
-                <a:latin typeface="Leelawadee UI"/>
-                <a:ea typeface="Leelawadee UI"/>
-                <a:cs typeface="Leelawadee UI"/>
-              </a:rPr>
-              <a:t>ปิดคาบ ⏱ 11:55–12:00</a:t>
-            </a:r>
-          </a:p>
-        </p:txBody>
-      </p:sp>
-      <p:sp>
-        <p:nvSpPr>
-          <p:cNvPr id="4" name="TextBox 3"/>
-          <p:cNvSpPr txBox="1"/>
-          <p:nvPr/>
-        </p:nvSpPr>
-        <p:spPr>
-          <a:xfrm>
-            <a:off x="822960" y="6355080"/>
-            <a:ext cx="10545775" cy="320040"/>
-          </a:xfrm>
-          <a:prstGeom prst="rect">
-            <a:avLst/>
-          </a:prstGeom>
-          <a:noFill/>
-        </p:spPr>
-        <p:txBody>
-          <a:bodyPr wrap="square">
-            <a:spAutoFit/>
-          </a:bodyPr>
-          <a:lstStyle/>
-          <a:p>
-            <a:r>
-              <a:rPr sz="1200" b="0">
-                <a:solidFill>
-                  <a:srgbClr val="6B6B6B"/>
-                </a:solidFill>
-                <a:latin typeface="Leelawadee UI"/>
-                <a:ea typeface="Leelawadee UI"/>
-                <a:cs typeface="Leelawadee UI"/>
-              </a:rPr>
-              <a:t>RAISE 2 · เดือนที่ 2 · สัปดาห์ที่ 7          62</a:t>
-            </a:r>
-          </a:p>
-        </p:txBody>
-      </p:sp>
-    </p:spTree>
-  </p:cSld>
-  <p:clrMapOvr>
-    <a:masterClrMapping/>
-  </p:clrMapOvr>
-</p:sld>
-</file>
-
-<file path=ppt/slides/slide63.xml><?xml version="1.0" encoding="utf-8"?>
-<p:sld xmlns:a="http://schemas.openxmlformats.org/drawingml/2006/main" xmlns:p="http://schemas.openxmlformats.org/presentationml/2006/main" xmlns:r="http://schemas.openxmlformats.org/officeDocument/2006/relationships">
-  <p:cSld>
-    <p:spTree>
-      <p:nvGrpSpPr>
-        <p:cNvPr id="1" name=""/>
-        <p:cNvGrpSpPr/>
-        <p:nvPr/>
-      </p:nvGrpSpPr>
-      <p:grpSpPr/>
-      <p:sp>
-        <p:nvSpPr>
-          <p:cNvPr id="2" name="TextBox 1"/>
-          <p:cNvSpPr txBox="1"/>
-          <p:nvPr/>
-        </p:nvSpPr>
-        <p:spPr>
-          <a:xfrm>
-            <a:off x="822960" y="502920"/>
-            <a:ext cx="10545775" cy="804672"/>
-          </a:xfrm>
-          <a:prstGeom prst="rect">
-            <a:avLst/>
-          </a:prstGeom>
-          <a:noFill/>
-        </p:spPr>
-        <p:txBody>
-          <a:bodyPr wrap="square">
-            <a:spAutoFit/>
-          </a:bodyPr>
-          <a:lstStyle/>
-          <a:p>
-            <a:pPr algn="l"/>
-            <a:r>
-              <a:rPr sz="3600" b="1">
-                <a:solidFill>
-                  <a:srgbClr val="1F5FA8"/>
-                </a:solidFill>
-                <a:latin typeface="Leelawadee UI"/>
-                <a:ea typeface="Leelawadee UI"/>
-                <a:cs typeface="Leelawadee UI"/>
-              </a:rPr>
-              <a:t>📦 สิ่งที่ต้องส่งมอบสัปดาห์นี้</a:t>
-            </a:r>
-          </a:p>
-        </p:txBody>
-      </p:sp>
-      <p:sp>
-        <p:nvSpPr>
-          <p:cNvPr id="3" name="TextBox 2"/>
-          <p:cNvSpPr txBox="1"/>
-          <p:nvPr/>
-        </p:nvSpPr>
-        <p:spPr>
-          <a:xfrm>
-            <a:off x="822960" y="1472184"/>
-            <a:ext cx="10545775" cy="560324"/>
-          </a:xfrm>
-          <a:prstGeom prst="rect">
-            <a:avLst/>
-          </a:prstGeom>
-          <a:noFill/>
-        </p:spPr>
-        <p:txBody>
-          <a:bodyPr wrap="square">
-            <a:spAutoFit/>
-          </a:bodyPr>
-          <a:lstStyle/>
-          <a:p>
-            <a:pPr algn="l"/>
-            <a:r>
-              <a:rPr sz="2600" b="0">
-                <a:solidFill>
-                  <a:srgbClr val="1A1A1A"/>
-                </a:solidFill>
-                <a:latin typeface="Leelawadee UI"/>
-                <a:ea typeface="Leelawadee UI"/>
-                <a:cs typeface="Leelawadee UI"/>
-              </a:rPr>
-              <a:t>• [ ] repo บน GitHub ที่มี CLAUDE.md และไม่มีคีย์หลุด</a:t>
-            </a:r>
-          </a:p>
-        </p:txBody>
-      </p:sp>
-      <p:sp>
-        <p:nvSpPr>
-          <p:cNvPr id="4" name="TextBox 3"/>
-          <p:cNvSpPr txBox="1"/>
-          <p:nvPr/>
-        </p:nvSpPr>
-        <p:spPr>
-          <a:xfrm>
-            <a:off x="822960" y="2087372"/>
-            <a:ext cx="10545775" cy="560324"/>
-          </a:xfrm>
-          <a:prstGeom prst="rect">
-            <a:avLst/>
-          </a:prstGeom>
-          <a:noFill/>
-        </p:spPr>
-        <p:txBody>
-          <a:bodyPr wrap="square">
-            <a:spAutoFit/>
-          </a:bodyPr>
-          <a:lstStyle/>
-          <a:p>
-            <a:pPr algn="l"/>
-            <a:r>
-              <a:rPr sz="2600" b="0">
-                <a:solidFill>
-                  <a:srgbClr val="1A1A1A"/>
-                </a:solidFill>
-                <a:latin typeface="Leelawadee UI"/>
-                <a:ea typeface="Leelawadee UI"/>
-                <a:cs typeface="Leelawadee UI"/>
-              </a:rPr>
-              <a:t>• [ ] ⭐ CRUD ครบ — กรอก → ปิด → เปิดใหม่ → ยังอยู่</a:t>
-            </a:r>
-          </a:p>
-        </p:txBody>
-      </p:sp>
-      <p:sp>
-        <p:nvSpPr>
-          <p:cNvPr id="5" name="TextBox 4"/>
-          <p:cNvSpPr txBox="1"/>
-          <p:nvPr/>
-        </p:nvSpPr>
-        <p:spPr>
-          <a:xfrm>
-            <a:off x="822960" y="2702560"/>
-            <a:ext cx="10545775" cy="560324"/>
-          </a:xfrm>
-          <a:prstGeom prst="rect">
-            <a:avLst/>
-          </a:prstGeom>
-          <a:noFill/>
-        </p:spPr>
-        <p:txBody>
-          <a:bodyPr wrap="square">
-            <a:spAutoFit/>
-          </a:bodyPr>
-          <a:lstStyle/>
-          <a:p>
-            <a:pPr algn="l"/>
-            <a:r>
-              <a:rPr sz="2600" b="0">
-                <a:solidFill>
-                  <a:srgbClr val="1A1A1A"/>
-                </a:solidFill>
-                <a:latin typeface="Leelawadee UI"/>
-                <a:ea typeface="Leelawadee UI"/>
-                <a:cs typeface="Leelawadee UI"/>
-              </a:rPr>
-              <a:t>• [ ] ล็อกอินได้ + ไม่ล็อกอินอ่านไม่ได้ + URL ออนไลน์</a:t>
-            </a:r>
-          </a:p>
-        </p:txBody>
-      </p:sp>
-      <p:sp>
-        <p:nvSpPr>
-          <p:cNvPr id="6" name="TextBox 5"/>
-          <p:cNvSpPr txBox="1"/>
-          <p:nvPr/>
-        </p:nvSpPr>
-        <p:spPr>
-          <a:xfrm>
-            <a:off x="822960" y="3317748"/>
-            <a:ext cx="10545775" cy="1029208"/>
-          </a:xfrm>
-          <a:prstGeom prst="rect">
-            <a:avLst/>
-          </a:prstGeom>
-          <a:noFill/>
-        </p:spPr>
-        <p:txBody>
-          <a:bodyPr wrap="square">
-            <a:spAutoFit/>
-          </a:bodyPr>
-          <a:lstStyle/>
-          <a:p>
-            <a:pPr algn="l"/>
-            <a:r>
-              <a:rPr sz="2600" b="0">
-                <a:solidFill>
-                  <a:srgbClr val="1A1A1A"/>
-                </a:solidFill>
-                <a:latin typeface="Leelawadee UI"/>
-                <a:ea typeface="Leelawadee UI"/>
-                <a:cs typeface="Leelawadee UI"/>
-              </a:rPr>
-              <a:t>• 📤 ส่งผ่าน Google Classroom แนบลิงก์ · ศุกร์ 11 ก.ย. 23:59</a:t>
-            </a:r>
-          </a:p>
-        </p:txBody>
-      </p:sp>
-      <p:sp>
-        <p:nvSpPr>
-          <p:cNvPr id="7" name="TextBox 6"/>
-          <p:cNvSpPr txBox="1"/>
-          <p:nvPr/>
-        </p:nvSpPr>
-        <p:spPr>
-          <a:xfrm>
-            <a:off x="822960" y="6355080"/>
-            <a:ext cx="10545775" cy="320040"/>
-          </a:xfrm>
-          <a:prstGeom prst="rect">
-            <a:avLst/>
-          </a:prstGeom>
-          <a:noFill/>
-        </p:spPr>
-        <p:txBody>
-          <a:bodyPr wrap="square">
-            <a:spAutoFit/>
-          </a:bodyPr>
-          <a:lstStyle/>
-          <a:p>
-            <a:r>
-              <a:rPr sz="1200" b="0">
-                <a:solidFill>
-                  <a:srgbClr val="6B6B6B"/>
-                </a:solidFill>
-                <a:latin typeface="Leelawadee UI"/>
-                <a:ea typeface="Leelawadee UI"/>
-                <a:cs typeface="Leelawadee UI"/>
-              </a:rPr>
-              <a:t>RAISE 2 · เดือนที่ 2 · สัปดาห์ที่ 7          63</a:t>
-            </a:r>
-          </a:p>
-        </p:txBody>
-      </p:sp>
-    </p:spTree>
-  </p:cSld>
-  <p:clrMapOvr>
-    <a:masterClrMapping/>
-  </p:clrMapOvr>
-</p:sld>
-</file>
-
-<file path=ppt/slides/slide64.xml><?xml version="1.0" encoding="utf-8"?>
 <p:sld xmlns:a="http://schemas.openxmlformats.org/drawingml/2006/main" xmlns:p="http://schemas.openxmlformats.org/presentationml/2006/main" xmlns:r="http://schemas.openxmlformats.org/officeDocument/2006/relationships">
   <p:cSld>
     <p:spTree>
@@ -23724,7 +22541,7 @@
                 <a:ea typeface="Leelawadee UI"/>
                 <a:cs typeface="Leelawadee UI"/>
               </a:rPr>
-              <a:t>RAISE 2 · เดือนที่ 2 · สัปดาห์ที่ 7          64</a:t>
+              <a:t>RAISE 2 · เดือนที่ 2 · สัปดาห์ที่ 7          62</a:t>
             </a:r>
           </a:p>
         </p:txBody>
@@ -23737,7 +22554,7 @@
 </p:sld>
 </file>
 
-<file path=ppt/slides/slide65.xml><?xml version="1.0" encoding="utf-8"?>
+<file path=ppt/slides/slide63.xml><?xml version="1.0" encoding="utf-8"?>
 <p:sld xmlns:a="http://schemas.openxmlformats.org/drawingml/2006/main" xmlns:p="http://schemas.openxmlformats.org/presentationml/2006/main" xmlns:r="http://schemas.openxmlformats.org/officeDocument/2006/relationships">
   <p:cSld>
     <p:spTree>
@@ -24227,7 +23044,7 @@
                 <a:ea typeface="Leelawadee UI"/>
                 <a:cs typeface="Leelawadee UI"/>
               </a:rPr>
-              <a:t>RAISE 2 · เดือนที่ 2 · สัปดาห์ที่ 7          65</a:t>
+              <a:t>RAISE 2 · เดือนที่ 2 · สัปดาห์ที่ 7          63</a:t>
             </a:r>
           </a:p>
         </p:txBody>
@@ -24240,7 +23057,7 @@
 </p:sld>
 </file>
 
-<file path=ppt/slides/slide66.xml><?xml version="1.0" encoding="utf-8"?>
+<file path=ppt/slides/slide64.xml><?xml version="1.0" encoding="utf-8"?>
 <p:sld xmlns:a="http://schemas.openxmlformats.org/drawingml/2006/main" xmlns:p="http://schemas.openxmlformats.org/presentationml/2006/main" xmlns:r="http://schemas.openxmlformats.org/officeDocument/2006/relationships">
   <p:cSld>
     <p:spTree>
@@ -24466,7 +23283,7 @@
                 <a:ea typeface="Leelawadee UI"/>
                 <a:cs typeface="Leelawadee UI"/>
               </a:rPr>
-              <a:t>RAISE 2 · เดือนที่ 2 · สัปดาห์ที่ 7          66</a:t>
+              <a:t>RAISE 2 · เดือนที่ 2 · สัปดาห์ที่ 7          64</a:t>
             </a:r>
           </a:p>
         </p:txBody>
@@ -24479,7 +23296,7 @@
 </p:sld>
 </file>
 
-<file path=ppt/slides/slide67.xml><?xml version="1.0" encoding="utf-8"?>
+<file path=ppt/slides/slide65.xml><?xml version="1.0" encoding="utf-8"?>
 <p:sld xmlns:a="http://schemas.openxmlformats.org/drawingml/2006/main" xmlns:p="http://schemas.openxmlformats.org/presentationml/2006/main" xmlns:r="http://schemas.openxmlformats.org/officeDocument/2006/relationships">
   <p:cSld>
     <p:spTree>
@@ -24557,7 +23374,7 @@
                 <a:ea typeface="Leelawadee UI"/>
                 <a:cs typeface="Leelawadee UI"/>
               </a:rPr>
-              <a:t>RAISE 2 · เดือนที่ 2 · สัปดาห์ที่ 7          67</a:t>
+              <a:t>RAISE 2 · เดือนที่ 2 · สัปดาห์ที่ 7          65</a:t>
             </a:r>
           </a:p>
         </p:txBody>

--- a/materials/week7/w7-slides.pptx
+++ b/materials/week7/w7-slides.pptx
@@ -706,7 +706,7 @@
           <a:lstStyle/>
           <a:p>
             <a:r>
-              <a:t>สลับไปสาธิตตามสคริปต์บล็อก A · ก่อนสลับพูดว่า "ดูสามอย่างครับ ผมพิมพ์อะไร ร่างที่ได้ขาดอะไร แล้วผมบอกมันว่ายังไง" · ห้ามข้ามจังหวะอ่านออกเสียง เพราะนั่นคือสิ่งเดียวที่ผู้เรียนต้องเลียนแบบตอนบ่าย</a:t>
+              <a:t>📍 สคริปต์สาธิต: w7-demo-fixit.md → บล็อก A (ขั้นที่ 1) · จบแล้วกลับเข้าสไลด์หน้า 13 · ก่อนสลับพูดว่า "ดูสามอย่างครับ ผมพิมพ์อะไร ร่างที่ได้ขาดอะไร แล้วผมบอกมันว่ายังไง" · ห้ามข้ามจังหวะอ่านออกเสียง เพราะนั่นคือสิ่งเดียวที่ผู้เรียนต้องเลียนแบบตอนบ่าย</a:t>
             </a:r>
           </a:p>
         </p:txBody>
@@ -1266,7 +1266,7 @@
           <a:lstStyle/>
           <a:p>
             <a:r>
-              <a:t>สลับไปสาธิตตามสคริปต์บล็อก B ขั้นที่ 2 · จุดที่ต้องให้เห็นชัดคือแผนของ AI ขาดเรื่องบันทึกชื่อจดซ้ำ แล้วเราจับได้ตอนอ่านแผน ไม่ใช่ตอนหน้าจอพัง</a:t>
+              <a:t>📍 สคริปต์สาธิต: w7-demo-fixit.md → บล็อก B (ขั้นที่ 2) · จบแล้วกลับเข้าสไลด์หน้า 21 · จุดที่ต้องให้เห็นชัดคือแผนของ AI ขาดเรื่องบันทึกชื่อจดซ้ำ แล้วเราจับได้ตอนอ่านแผน ไม่ใช่ตอนหน้าจอพัง</a:t>
             </a:r>
           </a:p>
         </p:txBody>
@@ -1546,7 +1546,7 @@
           <a:lstStyle/>
           <a:p>
             <a:r>
-              <a:t>สลับไปสาธิตตามสคริปต์บล็อก B ขั้นที่ 3–4 · ทุกครั้งที่ Console เปลี่ยน ให้พูดออกเสียงว่าเห็นอะไรเปลี่ยน อย่าให้ผู้เรียนเดาเอง · ตอนลบ ให้ชี้หน้าต่างยืนยันค้างไว้ 5 วินาทีก่อนกด</a:t>
+              <a:t>📍 สคริปต์สาธิต: w7-demo-fixit.md → บล็อก B (ขั้นที่ 3–4) · จบแล้วกลับเข้าสไลด์หน้า 24 · ทุกครั้งที่ Console เปลี่ยน ให้พูดออกเสียงว่าเห็นอะไรเปลี่ยน อย่าให้ผู้เรียนเดาเอง · ตอนลบ ให้ชี้หน้าต่างยืนยันค้างไว้ 5 วินาทีก่อนกด</a:t>
             </a:r>
           </a:p>
         </p:txBody>
@@ -1686,7 +1686,7 @@
           <a:lstStyle/>
           <a:p>
             <a:r>
-              <a:t>สลับไปสาธิตตามสคริปต์บล็อก B ขั้นที่ 5 · ปิดเบราว์เซอร์ให้เห็นชัด ๆ ทั้งหน้าต่าง เพราะผู้เรียนต้องเห็นว่ามันหายไปจริงแล้วกลับมาจริง</a:t>
+              <a:t>📍 สคริปต์สาธิต: w7-demo-fixit.md → บล็อก B (ขั้นที่ 5) · จบแล้วกลับเข้าสไลด์หน้า 26 · ปิดเบราว์เซอร์ให้เห็นชัด ๆ ทั้งหน้าต่าง เพราะผู้เรียนต้องเห็นว่ามันหายไปจริงแล้วกลับมาจริง</a:t>
             </a:r>
           </a:p>
         </p:txBody>
@@ -2456,7 +2456,7 @@
           <a:lstStyle/>
           <a:p>
             <a:r>
-              <a:t>สลับไปสาธิตตามสคริปต์บล็อก C · จุดที่ห้ามตัดคือตอนเทียบแผนกับเช็กลิสต์ 5 ข้อแล้วเจอข้อที่ขาด · ใช้อีเมลสมมติเท่านั้น เช่น somchai@example.com</a:t>
+              <a:t>📍 สคริปต์สาธิต: w7-demo-fixit.md → บล็อก C (ขั้นที่ 6) · จบแล้วกลับเข้าสไลด์หน้า 36 · จุดที่ห้ามตัดคือตอนเทียบแผนกับเช็กลิสต์ 5 ข้อแล้วเจอข้อที่ขาด · ใช้อีเมลสมมติเท่านั้น เช่น somchai@example.com</a:t>
             </a:r>
           </a:p>
         </p:txBody>
@@ -3016,7 +3016,7 @@
           <a:lstStyle/>
           <a:p>
             <a:r>
-              <a:t>สลับไปสาธิตตามสคริปต์บล็อก D — นี่คือจุดที่ตั้งใจให้พังจุดที่ 1 ของวันนี้ ห้ามตัด · ตอนพังให้พูดว่า "เห็นไหมครับ ผมเองก็เจอ ครึ่งห้องจะเจอแบบนี้ตอนบ่าย มันไม่ใช่กฎผิด มันคือหน้าเว็บใจร้อน อ่านข้อมูลก่อนที่ระบบจะรู้ว่าเราล็อกอินแล้ว"</a:t>
+              <a:t>📍 สคริปต์สาธิต: w7-demo-fixit.md → บล็อก D (ขั้นที่ 7) · จบแล้วกลับเข้าสไลด์หน้า 43 · นี่คือจุดที่ตั้งใจให้พังจุดที่ 1 ของวันนี้ ห้ามตัด · ตอนพังให้พูดว่า "เห็นไหมครับ ผมเองก็เจอ ครึ่งห้องจะเจอแบบนี้ตอนบ่าย มันไม่ใช่กฎผิด มันคือหน้าเว็บใจร้อน อ่านข้อมูลก่อนที่ระบบจะรู้ว่าเราล็อกอินแล้ว"</a:t>
             </a:r>
           </a:p>
         </p:txBody>
@@ -3506,7 +3506,7 @@
           <a:lstStyle/>
           <a:p>
             <a:r>
-              <a:t>สลับไปสาธิตตามสคริปต์บล็อก E — นี่คือจุดที่ตั้งใจให้พังจุดที่ 2 ห้ามตัด · ตอน push ถูกปฏิเสธให้พูดว่า "เห็นไหมครับ ผมเองก็เจอ ทีนี้มาดูกันว่ากู้ยังไงใน 3 นาที" · ตอนส่งให้ Claude ให้ชี้ว่า "ผมไม่ได้พิมพ์คำสั่ง git สักตัว ผมเล่าอาการให้มันฟังเฉย ๆ" · ย้ำปิดท้ายว่าไม่มีงานของใครหาย</a:t>
+              <a:t>📍 สคริปต์สาธิต: w7-demo-fixit.md → บล็อก E (ขั้นที่ 8–9) · จบแล้วกลับเข้าสไลด์หน้า 50 · นี่คือจุดที่ตั้งใจให้พังจุดที่ 2 ห้ามตัด · ตอน push ถูกปฏิเสธให้พูดว่า "เห็นไหมครับ ผมเองก็เจอ ทีนี้มาดูกันว่ากู้ยังไงใน 3 นาที" · ตอนส่งให้ Claude ให้ชี้ว่า "ผมไม่ได้พิมพ์คำสั่ง git สักตัว ผมเล่าอาการให้มันฟังเฉย ๆ" · ย้ำปิดท้ายว่าไม่มีงานของใครหาย</a:t>
             </a:r>
           </a:p>
         </p:txBody>
@@ -4066,7 +4066,7 @@
           <a:lstStyle/>
           <a:p>
             <a:r>
-              <a:t>สลับไปสาธิตตามสคริปต์บล็อก F — นี่คือฉากจำของเช้านี้ · ตอนวาง URL ในแชท ให้รอจนมีคนพิมพ์ว่าเปิดได้อย่างน้อย 5 คน แล้วค่อยไปต่อ อย่ารีบ นาทีนี้คือรางวัลของทั้งเช้า</a:t>
+              <a:t>📍 สคริปต์สาธิต: w7-demo-fixit.md → บล็อก F (ขั้นที่ 10) · จบแล้วกลับเข้าสไลด์หน้า 57 · นี่คือฉากจำของเช้านี้ · ตอนวาง URL ในแชท ให้รอจนมีคนพิมพ์ว่าเปิดได้อย่างน้อย 5 คน แล้วค่อยไปต่อ อย่ารีบ นาทีนี้คือรางวัลของทั้งเช้า</a:t>
             </a:r>
           </a:p>
         </p:txBody>
@@ -4486,7 +4486,7 @@
           <a:lstStyle/>
           <a:p>
             <a:r>
-              <a:t>อ่านออกเสียงทุกข้อ · ย้ำว่า "ผมตรวจ commit รายคนด้วยนะครับ สัปดาห์นี้ repo อยู่บน GitHub แล้ว ทุกคนต้องมีชื่อตัวเองในประวัติ" · deploy ยกไป Consult วันอาทิตย์ได้ถ้าไม่ทัน แต่สามข้อแรกต้องมี</a:t>
+              <a:t>อ่านออกเสียงทุกข้อ · ย้ำว่าส่ง URL repo กับ URL เว็บออนไลน์ อย่างเดียว ไม่ต้องแนบไฟล์ ผู้สอนเปิด GitHub ตรวจเอง · "ผมตรวจ commit รายคนด้วยนะครับ ทุกคนต้องมีชื่อตัวเองในประวัติ" · deploy ยกไป Consult วันอาทิตย์ได้ถ้าไม่ทัน แต่สามข้อแรกต้องมี</a:t>
             </a:r>
           </a:p>
         </p:txBody>
@@ -21876,7 +21876,7 @@
                 <a:ea typeface="Leelawadee UI"/>
                 <a:cs typeface="Leelawadee UI"/>
               </a:rPr>
-              <a:t>• 📤 ส่งผ่าน Google Classroom แนบลิงก์ · ศุกร์ 11 ก.ย. 23:59</a:t>
+              <a:t>• 📤 ใบงาน (LeaveEasy) ภายในจันทร์ 7 ก.ย. · 🏠 การบ้าน (หัวข้อคุณ) ภายในศุกร์ 11 ก.ย.</a:t>
             </a:r>
           </a:p>
         </p:txBody>

--- a/materials/week7/w7-slides.pptx
+++ b/materials/week7/w7-slides.pptx
@@ -2526,7 +2526,7 @@
           <a:lstStyle/>
           <a:p>
             <a:r>
-              <a:t>พูดช้า ๆ ชัด ๆ "ระวังความเข้าใจผิดข้อนี้ที่สุดครับ ล็อกอินทำให้ระบบรู้ว่าใครเป็นใคร แต่ประตูข้อมูลยังเปิดอยู่เหมือนเดิม คนที่รู้ที่อยู่ตู้ก็ยังอ่านได้ การปิดประตูคือหน้าที่ของกฎ ซึ่งเป็นเรื่องถัดไปเดี๋ยวนี้เลย"</a:t>
+              <a:t>พูดช้า ๆ ชัด ๆ "ระวังความเข้าใจผิดข้อนี้ที่สุดครับ ล็อกอินทำให้ระบบรู้ว่าใครเป็นใคร แต่ประตูข้อมูลยังเปิดอยู่เหมือนเดิม คนที่รู้ที่อยู่คลังก็ยังอ่านได้ การปิดประตูคือหน้าที่ของกฎ ซึ่งเป็นเรื่องถัดไปเดี๋ยวนี้เลย"</a:t>
             </a:r>
           </a:p>
         </p:txBody>
@@ -2736,7 +2736,7 @@
           <a:lstStyle/>
           <a:p>
             <a:r>
-              <a:t>ย้ำคำแปล Security Rules = กฎที่บอกว่าใครเปิดข้อมูลอะไรได้ เปรียบเป็นยามเฝ้าประตูตู้ · พูดว่า "กฎละเอียดรายห้องเป็นเรื่องใหญ่ของสัปดาห์หน้า วันนี้เราใส่กุญแจประตูหน้าบ้านหนึ่งดอกก่อน ต้องล็อกอินก่อนถึงเข้าบ้านได้"</a:t>
+              <a:t>ย้ำคำแปล Security Rules = กฎที่บอกว่าใครเปิดข้อมูลอะไรได้ เปรียบเป็นยามเฝ้าประตูคลัง · พูดว่า "กฎละเอียดรายห้องเป็นเรื่องใหญ่ของสัปดาห์หน้า วันนี้เราใส่กุญแจประตูหน้าบ้านหนึ่งดอกก่อน ต้องล็อกอินก่อนถึงเข้าบ้านได้"</a:t>
             </a:r>
           </a:p>
         </p:txBody>
@@ -15924,7 +15924,7 @@
                 <a:ea typeface="Leelawadee UI"/>
                 <a:cs typeface="Leelawadee UI"/>
               </a:rPr>
-              <a:t>• โหมดทดสอบ = ตู้ที่ไม่ล็อกกุญแจ ใครรู้ที่อยู่ก็เปิดได้</a:t>
+              <a:t>• โหมดทดสอบ = คลังที่ไม่ล็อกกุญแจ ใครรู้ที่อยู่ก็เปิดได้</a:t>
             </a:r>
           </a:p>
         </p:txBody>
@@ -15961,7 +15961,7 @@
                 <a:ea typeface="Leelawadee UI"/>
                 <a:cs typeface="Leelawadee UI"/>
               </a:rPr>
-              <a:t>• อีกครึ่งชั่วโมง ที่อยู่ตู้จะเป็นสาธารณะ</a:t>
+              <a:t>• อีกครึ่งชั่วโมง ที่อยู่คลังจะเป็นสาธารณะ</a:t>
             </a:r>
           </a:p>
         </p:txBody>

--- a/materials/week7/w7-slides.pptx
+++ b/materials/week7/w7-slides.pptx
@@ -17902,6 +17902,43 @@
         <p:spPr>
           <a:xfrm>
             <a:off x="822960" y="2690876"/>
+            <a:ext cx="10545775" cy="1029208"/>
+          </a:xfrm>
+          <a:prstGeom prst="rect">
+            <a:avLst/>
+          </a:prstGeom>
+          <a:noFill/>
+        </p:spPr>
+        <p:txBody>
+          <a:bodyPr wrap="square">
+            <a:spAutoFit/>
+          </a:bodyPr>
+          <a:lstStyle/>
+          <a:p>
+            <a:pPr algn="l"/>
+            <a:r>
+              <a:rPr sz="2600" b="0">
+                <a:solidFill>
+                  <a:srgbClr val="1A1A1A"/>
+                </a:solidFill>
+                <a:latin typeface="Leelawadee UI"/>
+                <a:ea typeface="Leelawadee UI"/>
+                <a:cs typeface="Leelawadee UI"/>
+              </a:rPr>
+              <a:t>• ต้องกัน โฟลเดอร์ที่เครื่องมือสร้างเอง และไฟล์คีย์ทุกชนิด</a:t>
+            </a:r>
+          </a:p>
+        </p:txBody>
+      </p:sp>
+      <p:sp>
+        <p:nvSpPr>
+          <p:cNvPr id="5" name="TextBox 4"/>
+          <p:cNvSpPr txBox="1"/>
+          <p:nvPr/>
+        </p:nvSpPr>
+        <p:spPr>
+          <a:xfrm>
+            <a:off x="822960" y="3774948"/>
             <a:ext cx="10545775" cy="560324"/>
           </a:xfrm>
           <a:prstGeom prst="rect">
@@ -17925,43 +17962,6 @@
                 <a:ea typeface="Leelawadee UI"/>
                 <a:cs typeface="Leelawadee UI"/>
               </a:rPr>
-              <a:t>• ต้องกัน node_modules และไฟล์คีย์ทุกชนิด</a:t>
-            </a:r>
-          </a:p>
-        </p:txBody>
-      </p:sp>
-      <p:sp>
-        <p:nvSpPr>
-          <p:cNvPr id="5" name="TextBox 4"/>
-          <p:cNvSpPr txBox="1"/>
-          <p:nvPr/>
-        </p:nvSpPr>
-        <p:spPr>
-          <a:xfrm>
-            <a:off x="822960" y="3306064"/>
-            <a:ext cx="10545775" cy="560324"/>
-          </a:xfrm>
-          <a:prstGeom prst="rect">
-            <a:avLst/>
-          </a:prstGeom>
-          <a:noFill/>
-        </p:spPr>
-        <p:txBody>
-          <a:bodyPr wrap="square">
-            <a:spAutoFit/>
-          </a:bodyPr>
-          <a:lstStyle/>
-          <a:p>
-            <a:pPr algn="l"/>
-            <a:r>
-              <a:rPr sz="2600" b="0">
-                <a:solidFill>
-                  <a:srgbClr val="1A1A1A"/>
-                </a:solidFill>
-                <a:latin typeface="Leelawadee UI"/>
-                <a:ea typeface="Leelawadee UI"/>
-                <a:cs typeface="Leelawadee UI"/>
-              </a:rPr>
               <a:t>• ให้ AI สร้าง → เราตรวจด้วย git status ว่ากันได้จริง</a:t>
             </a:r>
           </a:p>
@@ -17975,7 +17975,7 @@
         </p:nvSpPr>
         <p:spPr>
           <a:xfrm>
-            <a:off x="822960" y="3921252"/>
+            <a:off x="822960" y="4390136"/>
             <a:ext cx="10545775" cy="1029208"/>
           </a:xfrm>
           <a:prstGeom prst="rect">

--- a/materials/week7/w7-slides.pptx
+++ b/materials/week7/w7-slides.pptx
@@ -4696,7 +4696,7 @@
           <a:lstStyle/>
           <a:p>
             <a:r>
-              <a:t>ชี้ข้อแรก "คนนำจอเปลี่ยนทุก Checkpoint แต่ทุกคนทำบนเครื่องตัวเองตลอด" · ย้ำ git pull ก่อนเริ่มงานทุกครั้ง เพราะ repo อยู่บน GitHub แล้ว · บอกว่าคิวถามกลางและธนาคารคำตอบสด ลิงก์อยู่ในแชทแล้ว</a:t>
+              <a:t>ชี้ข้อแรก "คนนำจอเปลี่ยนทุก Checkpoint แต่ทุกคนทำบนเครื่องตัวเองตลอด" · ย้ำว่าก่อนเริ่มงานทุกครั้ง ให้พิมพ์บอก Claude ว่า "ช่วยดึงงานล่าสุดจาก GitHub ลงมาก่อน" เพราะ repo อยู่บน GitHub แล้ว · บอกว่าคิวถามกลางและธนาคารคำตอบสด ลิงก์อยู่ในแชทแล้ว</a:t>
             </a:r>
           </a:p>
         </p:txBody>
@@ -17939,7 +17939,7 @@
         <p:spPr>
           <a:xfrm>
             <a:off x="822960" y="3774948"/>
-            <a:ext cx="10545775" cy="560324"/>
+            <a:ext cx="10545775" cy="1029208"/>
           </a:xfrm>
           <a:prstGeom prst="rect">
             <a:avLst/>
@@ -17962,7 +17962,7 @@
                 <a:ea typeface="Leelawadee UI"/>
                 <a:cs typeface="Leelawadee UI"/>
               </a:rPr>
-              <a:t>• ให้ AI สร้าง → เราตรวจด้วย git status ว่ากันได้จริง</a:t>
+              <a:t>• ให้ AI สร้าง → สั่งให้มันแสดงรายการไฟล์ที่จะส่งขึ้นแล้วเราอ่านเอง</a:t>
             </a:r>
           </a:p>
         </p:txBody>
@@ -17975,7 +17975,7 @@
         </p:nvSpPr>
         <p:spPr>
           <a:xfrm>
-            <a:off x="822960" y="4390136"/>
+            <a:off x="822960" y="4859020"/>
             <a:ext cx="10545775" cy="1029208"/>
           </a:xfrm>
           <a:prstGeom prst="rect">
@@ -18489,7 +18489,7 @@
                 <a:ea typeface="Leelawadee UI"/>
                 <a:cs typeface="Leelawadee UI"/>
               </a:rPr>
-              <a:t>• .gitignore → ตรวจ git status → push → กวาดตาดูหน้า repo</a:t>
+              <a:t>• .gitignore → อ่านรายการไฟล์ที่จะส่งขึ้น → push → กวาดตาดูหน้า repo</a:t>
             </a:r>
           </a:p>
         </p:txBody>

--- a/materials/week7/w7-slides.pptx
+++ b/materials/week7/w7-slides.pptx
@@ -4696,7 +4696,7 @@
           <a:lstStyle/>
           <a:p>
             <a:r>
-              <a:t>ชี้ข้อแรก "คนนำจอเปลี่ยนทุก Checkpoint แต่ทุกคนทำบนเครื่องตัวเองตลอด" · ย้ำว่าก่อนเริ่มงานทุกครั้ง ให้พิมพ์บอก Claude ว่า "ช่วยดึงงานล่าสุดจาก GitHub ลงมาก่อน" เพราะ repo อยู่บน GitHub แล้ว · บอกว่าคิวถามกลางและธนาคารคำตอบสด ลิงก์อยู่ในแชทแล้ว</a:t>
+              <a:t>ชี้ข้อแรก "คนนำจอเปลี่ยนทุก Checkpoint แต่ทุกคนทำบนเครื่องตัวเองตลอด" · ย้ำว่าก่อนเริ่มงานทุกครั้ง ให้พิมพ์บอก Claude ว่า "ช่วยดึงงานล่าสุดจาก GitHub ลงมาก่อน" เพราะ repo อยู่บน GitHub แล้ว · วางลิงก์ตารางห้องย่อยในแชทก่อนพักเที่ยง · บอกว่าคิวถามกลางและธนาคารคำตอบสด ลิงก์อยู่ในแชทแล้ว</a:t>
             </a:r>
           </a:p>
         </p:txBody>
@@ -23136,7 +23136,7 @@
                 <a:ea typeface="Leelawadee UI"/>
                 <a:cs typeface="Leelawadee UI"/>
               </a:rPr>
-              <a:t>• 🖥️ สลับคนนำจอทุก Checkpoint — คนใหม่พิมพ์ชื่อในแชท</a:t>
+              <a:t>• 🔗 เช็กว่าคุณอยู่ห้องย่อยไหน — ตารางห้องย่อยอยู่ในแชท</a:t>
             </a:r>
           </a:p>
         </p:txBody>
@@ -23173,6 +23173,43 @@
                 <a:ea typeface="Leelawadee UI"/>
                 <a:cs typeface="Leelawadee UI"/>
               </a:rPr>
+              <a:t>• 🖥️ สลับคนนำจอทุก Checkpoint — คนใหม่พิมพ์ชื่อในแชท</a:t>
+            </a:r>
+          </a:p>
+        </p:txBody>
+      </p:sp>
+      <p:sp>
+        <p:nvSpPr>
+          <p:cNvPr id="5" name="TextBox 4"/>
+          <p:cNvSpPr txBox="1"/>
+          <p:nvPr/>
+        </p:nvSpPr>
+        <p:spPr>
+          <a:xfrm>
+            <a:off x="822960" y="2702560"/>
+            <a:ext cx="10545775" cy="560324"/>
+          </a:xfrm>
+          <a:prstGeom prst="rect">
+            <a:avLst/>
+          </a:prstGeom>
+          <a:noFill/>
+        </p:spPr>
+        <p:txBody>
+          <a:bodyPr wrap="square">
+            <a:spAutoFit/>
+          </a:bodyPr>
+          <a:lstStyle/>
+          <a:p>
+            <a:pPr algn="l"/>
+            <a:r>
+              <a:rPr sz="2600" b="0">
+                <a:solidFill>
+                  <a:srgbClr val="1A1A1A"/>
+                </a:solidFill>
+                <a:latin typeface="Leelawadee UI"/>
+                <a:ea typeface="Leelawadee UI"/>
+                <a:cs typeface="Leelawadee UI"/>
+              </a:rPr>
               <a:t>• 👤 ทุกคน commit ในชื่อตัวเอง — สัปดาห์นี้เริ่มนับจริง</a:t>
             </a:r>
           </a:p>
@@ -23180,13 +23217,13 @@
       </p:sp>
       <p:sp>
         <p:nvSpPr>
-          <p:cNvPr id="5" name="TextBox 4"/>
-          <p:cNvSpPr txBox="1"/>
-          <p:nvPr/>
-        </p:nvSpPr>
-        <p:spPr>
-          <a:xfrm>
-            <a:off x="822960" y="2702560"/>
+          <p:cNvPr id="6" name="TextBox 5"/>
+          <p:cNvSpPr txBox="1"/>
+          <p:nvPr/>
+        </p:nvSpPr>
+        <p:spPr>
+          <a:xfrm>
+            <a:off x="822960" y="3317748"/>
             <a:ext cx="10545775" cy="1029208"/>
           </a:xfrm>
           <a:prstGeom prst="rect">
@@ -23217,13 +23254,13 @@
       </p:sp>
       <p:sp>
         <p:nvSpPr>
-          <p:cNvPr id="6" name="TextBox 5"/>
-          <p:cNvSpPr txBox="1"/>
-          <p:nvPr/>
-        </p:nvSpPr>
-        <p:spPr>
-          <a:xfrm>
-            <a:off x="822960" y="3786632"/>
+          <p:cNvPr id="7" name="TextBox 6"/>
+          <p:cNvSpPr txBox="1"/>
+          <p:nvPr/>
+        </p:nvSpPr>
+        <p:spPr>
+          <a:xfrm>
+            <a:off x="822960" y="4401820"/>
             <a:ext cx="10545775" cy="1029208"/>
           </a:xfrm>
           <a:prstGeom prst="rect">
@@ -23254,7 +23291,7 @@
       </p:sp>
       <p:sp>
         <p:nvSpPr>
-          <p:cNvPr id="7" name="TextBox 6"/>
+          <p:cNvPr id="8" name="TextBox 7"/>
           <p:cNvSpPr txBox="1"/>
           <p:nvPr/>
         </p:nvSpPr>

--- a/materials/week7/w7-slides.pptx
+++ b/materials/week7/w7-slides.pptx
@@ -3576,7 +3576,7 @@
           <a:lstStyle/>
           <a:p>
             <a:r>
-              <a:t>อ่านออกเสียงทั้งสี่ข้อ แล้วปิดด้วย "สังเกตนะครับ ไม่มีข้อไหนบอกให้คุณท่องคำสั่ง git เลย" · เชื่อมเข้าบ่าย — "ใบงานส่วน A บ่ายนี้ให้คุณ push ขึ้น GitHub แล้วซ้อมงานชนกันกับตัวเอง"</a:t>
+              <a:t>อ่านออกเสียงทั้งสี่ข้อ แล้วปิดด้วย "สังเกตนะครับ ไม่มีข้อไหนบอกให้คุณท่องคำสั่ง git เลย" · เชื่อมเข้าบ่าย — "ใบงานส่วน A บ่ายนี้ให้คุณทำ CLAUDE.md แล้ว push ขึ้น GitHub · ส่วนงานชนกันไม่ต้องซ้อมเอง วันไหนเจอคำว่า conflict ให้ส่งให้ Claude แบบที่เพิ่งเห็น"</a:t>
             </a:r>
           </a:p>
         </p:txBody>
@@ -4626,7 +4626,7 @@
           <a:lstStyle/>
           <a:p>
             <a:r>
-              <a:t>ชี้แถว B แล้วพูดว่า "ถ้าเวลาไม่พอ ให้ B เสร็จเป็นอย่างน้อยครับ ลำดับตัดคือ B ก่อน C ก่อน D ส่วน deploy ยกไป Consult วันอาทิตย์ได้ แต่ห้าม deploy โดยไม่มีกฎขั้นต่ำเด็ดขาด" · ย้ำว่าบ่ายนี้ทุกคนทำ LeaveEasy เหมือนกัน แล้วการบ้านทำซ้ำกับหัวข้อของตัวเอง</a:t>
+              <a:t>บอกก่อนว่า "ใบงานวันนี้ออกแบบให้เสร็จใน 2 ชั่วโมง เวลาที่เหลือคือเวลาสำรอง ไม่ใช่งานเพิ่ม" · ชี้แถว B แล้วพูดว่า "ถ้าเวลาไม่พอ ให้ B เสร็จเป็นอย่างน้อยครับ ลำดับตัดคือ B ก่อน C ก่อน D ส่วน deploy ยกไป Consult วันอาทิตย์ได้ แต่ห้าม deploy โดยไม่มีกฎขั้นต่ำเด็ดขาด" · ย้ำว่าบ่ายนี้ทุกคนทำ LeaveEasy เหมือนกัน แล้วการบ้านทำซ้ำกับหัวข้อของตัวเอง</a:t>
             </a:r>
           </a:p>
         </p:txBody>
@@ -22717,7 +22717,7 @@
                           <a:ea typeface="Leelawadee UI"/>
                           <a:cs typeface="Leelawadee UI"/>
                         </a:rPr>
-                        <a:t>A · 30 น.</a:t>
+                        <a:t>A · 20 น.</a:t>
                       </a:r>
                     </a:p>
                   </a:txBody>
@@ -22742,7 +22742,7 @@
                           <a:ea typeface="Leelawadee UI"/>
                           <a:cs typeface="Leelawadee UI"/>
                         </a:rPr>
-                        <a:t>CLAUDE.md + .gitignore ก่อน push + ซ้อมงานชนกัน</a:t>
+                        <a:t>CLAUDE.md + .gitignore ก่อน push</a:t>
                       </a:r>
                     </a:p>
                   </a:txBody>
@@ -22794,7 +22794,7 @@
                           <a:ea typeface="Leelawadee UI"/>
                           <a:cs typeface="Leelawadee UI"/>
                         </a:rPr>
-                        <a:t>B · 50 น.</a:t>
+                        <a:t>B · 40 น.</a:t>
                       </a:r>
                     </a:p>
                   </a:txBody>
@@ -22871,7 +22871,7 @@
                           <a:ea typeface="Leelawadee UI"/>
                           <a:cs typeface="Leelawadee UI"/>
                         </a:rPr>
-                        <a:t>C · 30 น.</a:t>
+                        <a:t>C · 28 น.</a:t>
                       </a:r>
                     </a:p>
                   </a:txBody>
@@ -22948,7 +22948,7 @@
                           <a:ea typeface="Leelawadee UI"/>
                           <a:cs typeface="Leelawadee UI"/>
                         </a:rPr>
-                        <a:t>D · 25 น.</a:t>
+                        <a:t>D · 20 น.</a:t>
                       </a:r>
                     </a:p>
                   </a:txBody>

--- a/materials/week7/w7-slides.pptx
+++ b/materials/week7/w7-slides.pptx
@@ -70,6 +70,9 @@
     <p:sldId id="318" r:id="rId70"/>
     <p:sldId id="319" r:id="rId71"/>
     <p:sldId id="320" r:id="rId72"/>
+    <p:sldId id="321" r:id="rId73"/>
+    <p:sldId id="322" r:id="rId74"/>
+    <p:sldId id="323" r:id="rId75"/>
   </p:sldIdLst>
   <p:sldSz cx="12191695" cy="6858000" type="screen4x3"/>
   <p:notesSz cx="6858000" cy="9144000"/>
@@ -2596,7 +2599,7 @@
           <a:lstStyle/>
           <a:p>
             <a:r>
-              <a:t>ถามข้อสุดท้ายกับห้องตรง ๆ "ล็อกอินแล้ว ทำไมยังไม่ปลอดภัยครับ" คำตอบที่ต้องการ เพราะยังไม่มีกฎปิดข้อมูล ใครก็ยังอ่านได้ · แล้วพูดว่า "งั้นไปใส่กุญแจกันเลย"</a:t>
+              <a:t>พูดว่า "คำนี้ฟังดูใหญ่ แต่จริง ๆ คือตารางสามช่องที่คุณเขียนได้ใน 5 นาทีครับ" · โยงกลับ Module 1 — "บทบาทในตารางนี้มาจาก Persona ที่คุณทำไว้แล้ว ไม่ต้องคิดใหม่" · ย้ำว่าเขียนตารางก่อนเสมอ เพราะจังหวะที่ 3 ของเราคือการอ่านแล้วเทียบกับตารางนี้</a:t>
             </a:r>
           </a:p>
         </p:txBody>
@@ -2666,7 +2669,7 @@
           <a:lstStyle/>
           <a:p>
             <a:r>
-              <a:t>พูดว่า "15 นาทีนี้สั้นแต่ห้ามข้ามเด็ดขาดครับ เพราะอีกครึ่งชั่วโมงเราจะเอาระบบขึ้นออนไลน์ และห้ามออกออนไลน์ทั้งที่ประตูยังเปิด"</a:t>
+              <a:t>อ่านทีละแถวออกเสียง · ชี้แถวแรกแล้วถามห้องว่า "ผู้แจ้งกดปุ่มเปลี่ยนสถานะได้ไหมครับ" · ย้ำว่าช่อง ทำไม่ได้ สำคัญกว่าช่องทำได้ เพราะเป็นสิ่งที่ AI เดาเองไม่ได้ · ปิดด้วยคำถามประจำหลักสูตร "LeaveEasy มีพนักงาน หัวหน้า ฝ่ายบุคคล — แล้วระบบของคุณมีกี่บทบาท"</a:t>
             </a:r>
           </a:p>
         </p:txBody>
@@ -2736,7 +2739,7 @@
           <a:lstStyle/>
           <a:p>
             <a:r>
-              <a:t>ย้ำคำแปล Security Rules = กฎที่บอกว่าใครเปิดข้อมูลอะไรได้ เปรียบเป็นยามเฝ้าประตูคลัง · พูดว่า "กฎละเอียดรายห้องเป็นเรื่องใหญ่ของสัปดาห์หน้า วันนี้เราใส่กุญแจประตูหน้าบ้านหนึ่งดอกก่อน ต้องล็อกอินก่อนถึงเข้าบ้านได้"</a:t>
+              <a:t>ย้ำข้อสุดท้ายให้หนัก — "ซ่อนปุ่มกันคนกดผิดได้ครับ แต่กันคนที่ตั้งใจจะเข้าไม่ได้ เพราะเขาไม่ต้องผ่านหน้าเว็บของเรา · สัปดาห์หน้าเราจะเอาตารางใบเดียวกันนี้ไปเขียนเป็นกฎที่คลังข้อมูล ตารางที่คุณเขียนวันนี้จึงใช้ต่อได้เลย ไม่ต้องเขียนใหม่"</a:t>
             </a:r>
           </a:p>
         </p:txBody>
@@ -2806,7 +2809,7 @@
           <a:lstStyle/>
           <a:p>
             <a:r>
-              <a:t>พูดว่า "เราไม่เรียนไวยากรณ์ของกฎในวันนี้ เราใช้หลักเดิม ให้ AI เขียน แล้วเราอ่านและชี้บรรทัดที่เป็นใจความให้ได้ ตอนสาธิตผมจะชี้ให้ดูว่าบรรทัดไหน" · เตือนว่ากฎที่เขียนแล้วยังอยู่ในเครื่อง ต้อง deploy ขึ้นไปถึงจะทำงาน</a:t>
+              <a:t>ถามข้อสุดท้ายกับห้องตรง ๆ "ล็อกอินแล้ว ทำไมยังไม่ปลอดภัยครับ" คำตอบที่ต้องการ เพราะยังไม่มีกฎปิดข้อมูล ใครก็ยังอ่านได้ · แล้วพูดว่า "งั้นไปใส่กุญแจกันเลย"</a:t>
             </a:r>
           </a:p>
         </p:txBody>
@@ -2946,7 +2949,7 @@
           <a:lstStyle/>
           <a:p>
             <a:r>
-              <a:t>พูดว่า "กฎที่ไม่ได้ทดสอบ ถือว่ายังไม่มีกฎครับ วิธีทดสอบตรงไปตรงมาที่สุดคือแกล้งเป็นคนแปลกหน้าเอง หน้าต่างไม่ระบุตัวตนคือหน้าต่างที่ไม่มีการล็อกอินติดมา" · บอกว่าตอนบ่าย Checkpoint 3 ใช้การทดสอบแบบนี้เป๊ะ ๆ</a:t>
+              <a:t>พูดว่า "15 นาทีนี้สั้นแต่ห้ามข้ามเด็ดขาดครับ เพราะอีกครึ่งชั่วโมงเราจะเอาระบบขึ้นออนไลน์ และห้ามออกออนไลน์ทั้งที่ประตูยังเปิด"</a:t>
             </a:r>
           </a:p>
         </p:txBody>
@@ -3016,7 +3019,7 @@
           <a:lstStyle/>
           <a:p>
             <a:r>
-              <a:t>📍 สคริปต์สาธิต: w7-demo-fixit.md → บล็อก D (ขั้นที่ 7) · จบแล้วกลับเข้าสไลด์หน้า 43 · นี่คือจุดที่ตั้งใจให้พังจุดที่ 1 ของวันนี้ ห้ามตัด · ตอนพังให้พูดว่า "เห็นไหมครับ ผมเองก็เจอ ครึ่งห้องจะเจอแบบนี้ตอนบ่าย มันไม่ใช่กฎผิด มันคือหน้าเว็บใจร้อน อ่านข้อมูลก่อนที่ระบบจะรู้ว่าเราล็อกอินแล้ว"</a:t>
+              <a:t>ย้ำคำแปล Security Rules = กฎที่บอกว่าใครเปิดข้อมูลอะไรได้ เปรียบเป็นยามเฝ้าประตูคลัง · พูดว่า "กฎละเอียดรายห้องเป็นเรื่องใหญ่ของสัปดาห์หน้า วันนี้เราใส่กุญแจประตูหน้าบ้านหนึ่งดอกก่อน ต้องล็อกอินก่อนถึงเข้าบ้านได้"</a:t>
             </a:r>
           </a:p>
         </p:txBody>
@@ -3086,7 +3089,7 @@
           <a:lstStyle/>
           <a:p>
             <a:r>
-              <a:t>พูดตรง ๆ "อย่าเพิ่งวางใจนะครับ กุญแจดอกนี้กันได้เฉพาะคนที่ไม่ล็อกอิน แต่ใครสมัครบัญชีใหม่ก็เดินเข้ามาอ่านได้หมด สัปดาห์หน้าเราจะปิดรายห้อง ใครเห็นได้เฉพาะของตัวเอง ระหว่างนี้จึงห้ามใส่ข้อมูลจริงของใครลงระบบเด็ดขาด"</a:t>
+              <a:t>พูดว่า "เราไม่เรียนไวยากรณ์ของกฎในวันนี้ เราใช้หลักเดิม ให้ AI เขียน แล้วเราอ่านและชี้บรรทัดที่เป็นใจความให้ได้ ตอนสาธิตผมจะชี้ให้ดูว่าบรรทัดไหน" · เตือนว่ากฎที่เขียนแล้วยังอยู่ในเครื่อง ต้อง deploy ขึ้นไปถึงจะทำงาน</a:t>
             </a:r>
           </a:p>
         </p:txBody>
@@ -3156,7 +3159,7 @@
           <a:lstStyle/>
           <a:p>
             <a:r>
-              <a:t>พูดว่า "ช่วงนี้สั้นครับ 12 นาที เพราะคำสั่ง git เราให้ Claude จัดการให้หมด สิ่งที่ผมจะสอนคือสามอย่างที่ AI ทำแทนคุณไม่ได้" · บอกว่าบ่ายนี้เป็นครั้งแรกที่โค้ดของคุณไปอยู่บน GitHub</a:t>
+              <a:t>พูดว่า "กฎที่ไม่ได้ทดสอบ ถือว่ายังไม่มีกฎครับ วิธีทดสอบตรงไปตรงมาที่สุดคือแกล้งเป็นคนแปลกหน้าเอง หน้าต่างไม่ระบุตัวตนคือหน้าต่างที่ไม่มีการล็อกอินติดมา" · บอกว่าตอนบ่าย Checkpoint 3 ใช้การทดสอบแบบนี้เป๊ะ ๆ</a:t>
             </a:r>
           </a:p>
         </p:txBody>
@@ -3226,7 +3229,7 @@
           <a:lstStyle/>
           <a:p>
             <a:r>
-              <a:t>พูดว่า "คุณไม่ต้องจำคำสั่ง git สักตัวครับ พิมพ์บอก Claude เป็นภาษาไทยได้เลยว่าอยากทำอะไร" · ย้ำข้อสาม "ผมเปิดประวัติ repo ดูได้ว่าใครพิมพ์บ้าง และผมดูทุกสัปดาห์ ไม่ใช่รอตอนจบ"</a:t>
+              <a:t>📍 สคริปต์สาธิต: w7-demo-fixit.md → บล็อก D (ขั้นที่ 7) · จบแล้วกลับเข้าสไลด์หน้า 43 · นี่คือจุดที่ตั้งใจให้พังจุดที่ 1 ของวันนี้ ห้ามตัด · ตอนพังให้พูดว่า "เห็นไหมครับ ผมเองก็เจอ ครึ่งห้องจะเจอแบบนี้ตอนบ่าย มันไม่ใช่กฎผิด มันคือหน้าเว็บใจร้อน อ่านข้อมูลก่อนที่ระบบจะรู้ว่าเราล็อกอินแล้ว"</a:t>
             </a:r>
           </a:p>
         </p:txBody>
@@ -3296,7 +3299,7 @@
           <a:lstStyle/>
           <a:p>
             <a:r>
-              <a:t>อ่านทีละข้อช้า ๆ · ข้อ 1 "ทำอะไรสำเร็จหนึ่งอย่าง สั่ง commit ทันที นั่นคือหน้าที่คุณ" · ข้อ 2 จะขยายในสไลด์ถัดไป · ข้อ 3 "ไม่ต้องอ่านเครื่องหมายอะไรเป็น เห็นคำว่า conflict ก็ส่งให้ Claude"</a:t>
+              <a:t>พูดตรง ๆ "อย่าเพิ่งวางใจนะครับ กุญแจดอกนี้กันได้เฉพาะคนที่ไม่ล็อกอิน แต่ใครสมัครบัญชีใหม่ก็เดินเข้ามาอ่านได้หมด สัปดาห์หน้าเราจะปิดรายห้อง ใครเห็นได้เฉพาะของตัวเอง ระหว่างนี้จึงห้ามใส่ข้อมูลจริงของใครลงระบบเด็ดขาด"</a:t>
             </a:r>
           </a:p>
         </p:txBody>
@@ -3366,7 +3369,7 @@
           <a:lstStyle/>
           <a:p>
             <a:r>
-              <a:t>ย้ำคำแปล .gitignore = รายการไฟล์ที่ห้ามส่งขึ้นไป · พูดว่า "ทำ .gitignore ก่อน push เสมอ สลับลำดับไม่ได้ เพราะไฟล์ที่เคยขึ้นไปแล้ว ต่อให้ลบทีหลัง ก็มีคนคัดลอกไปได้ตั้งแต่วินาทีแรก" · เล่าเคสจริงสั้น ๆ ว่าคีย์หลุดขึ้น repo สาธารณะเกิดขึ้นบ่อยมาก · เตือน "ถ้าเผลอ push คีย์ขึ้นไป ให้เพิกถอนคีย์ก่อน แล้วค่อยลบไฟล์ ลบอย่างเดียวไม่พอ"</a:t>
+              <a:t>พูดว่า "ช่วงนี้สั้นครับ 12 นาที เพราะคำสั่ง git เราให้ Claude จัดการให้หมด สิ่งที่ผมจะสอนคือสามอย่างที่ AI ทำแทนคุณไม่ได้" · บอกว่าบ่ายนี้เป็นครั้งแรกที่โค้ดของคุณไปอยู่บน GitHub</a:t>
             </a:r>
           </a:p>
         </p:txBody>
@@ -3436,7 +3439,7 @@
           <a:lstStyle/>
           <a:p>
             <a:r>
-              <a:t>พูดตรง ๆ ว่า "ผมให้คุณยกคำสั่ง git ให้ AI ทำ แต่มีเงื่อนไขข้อเดียว — commit ก่อน" · ย้ำว่าเวลาสั่งให้ AI จัดการ git ให้ขอแผนก่อนเหมือนเดิม "จะทำอะไรบ้าง บอกผมก่อน"</a:t>
+              <a:t>พูดว่า "คุณไม่ต้องจำคำสั่ง git สักตัวครับ พิมพ์บอก Claude เป็นภาษาไทยได้เลยว่าอยากทำอะไร" · ย้ำข้อสาม "ผมเปิดประวัติ repo ดูได้ว่าใครพิมพ์บ้าง และผมดูทุกสัปดาห์ ไม่ใช่รอตอนจบ"</a:t>
             </a:r>
           </a:p>
         </p:txBody>
@@ -3506,7 +3509,7 @@
           <a:lstStyle/>
           <a:p>
             <a:r>
-              <a:t>📍 สคริปต์สาธิต: w7-demo-fixit.md → บล็อก E (ขั้นที่ 8–9) · จบแล้วกลับเข้าสไลด์หน้า 50 · นี่คือจุดที่ตั้งใจให้พังจุดที่ 2 ห้ามตัด · ตอน push ถูกปฏิเสธให้พูดว่า "เห็นไหมครับ ผมเองก็เจอ ทีนี้มาดูกันว่ากู้ยังไงใน 3 นาที" · ตอนส่งให้ Claude ให้ชี้ว่า "ผมไม่ได้พิมพ์คำสั่ง git สักตัว ผมเล่าอาการให้มันฟังเฉย ๆ" · ย้ำปิดท้ายว่าไม่มีงานของใครหาย</a:t>
+              <a:t>อ่านทีละข้อช้า ๆ · ข้อ 1 "ทำอะไรสำเร็จหนึ่งอย่าง สั่ง commit ทันที นั่นคือหน้าที่คุณ" · ข้อ 2 จะขยายในสไลด์ถัดไป · ข้อ 3 "ไม่ต้องอ่านเครื่องหมายอะไรเป็น เห็นคำว่า conflict ก็ส่งให้ Claude"</a:t>
             </a:r>
           </a:p>
         </p:txBody>
@@ -3576,7 +3579,7 @@
           <a:lstStyle/>
           <a:p>
             <a:r>
-              <a:t>อ่านออกเสียงทั้งสี่ข้อ แล้วปิดด้วย "สังเกตนะครับ ไม่มีข้อไหนบอกให้คุณท่องคำสั่ง git เลย" · เชื่อมเข้าบ่าย — "ใบงานส่วน A บ่ายนี้ให้คุณทำ CLAUDE.md แล้ว push ขึ้น GitHub · ส่วนงานชนกันไม่ต้องซ้อมเอง วันไหนเจอคำว่า conflict ให้ส่งให้ Claude แบบที่เพิ่งเห็น"</a:t>
+              <a:t>ย้ำคำแปล .gitignore = รายการไฟล์ที่ห้ามส่งขึ้นไป · พูดว่า "ทำ .gitignore ก่อน push เสมอ สลับลำดับไม่ได้ เพราะไฟล์ที่เคยขึ้นไปแล้ว ต่อให้ลบทีหลัง ก็มีคนคัดลอกไปได้ตั้งแต่วินาทีแรก" · เล่าเคสจริงสั้น ๆ ว่าคีย์หลุดขึ้น repo สาธารณะเกิดขึ้นบ่อยมาก · เตือน "ถ้าเผลอ push คีย์ขึ้นไป ให้เพิกถอนคีย์ก่อน แล้วค่อยลบไฟล์ ลบอย่างเดียวไม่พอ"</a:t>
             </a:r>
           </a:p>
         </p:txBody>
@@ -3716,7 +3719,7 @@
           <a:lstStyle/>
           <a:p>
             <a:r>
-              <a:t>พูดว่า "ครึ่งชั่วโมงสุดท้ายของเช้าครับ และเป็นนาทีที่ผมชอบที่สุดของทั้งเดือน ระบบที่อยู่ในเครื่องเราคนเดียวยังไม่นับว่าเป็นระบบ อีกสิบนาที FixIt จะมีที่อยู่จริงบนอินเทอร์เน็ต"</a:t>
+              <a:t>พูดตรง ๆ ว่า "ผมให้คุณยกคำสั่ง git ให้ AI ทำ แต่มีเงื่อนไขข้อเดียว — commit ก่อน" · ย้ำว่าเวลาสั่งให้ AI จัดการ git ให้ขอแผนก่อนเหมือนเดิม "จะทำอะไรบ้าง บอกผมก่อน"</a:t>
             </a:r>
           </a:p>
         </p:txBody>
@@ -3786,7 +3789,7 @@
           <a:lstStyle/>
           <a:p>
             <a:r>
-              <a:t>ย้ำคำแปล Deploy = นำเว็บขึ้นออนไลน์ · Hosting = บริการที่ให้เว็บเรามีที่อยู่จริง · พูดว่า "จำคำว่า localhost จากสัปดาห์ที่แล้วได้ไหมครับ วันนี้เราจะเปลี่ยนจาก localhost เป็นที่อยู่ที่ส่งให้ใครก็ได้"</a:t>
+              <a:t>📍 สคริปต์สาธิต: w7-demo-fixit.md → บล็อก E (ขั้นที่ 8–9) · จบแล้วกลับเข้าสไลด์หน้า 50 · นี่คือจุดที่ตั้งใจให้พังจุดที่ 2 ห้ามตัด · ตอน push ถูกปฏิเสธให้พูดว่า "เห็นไหมครับ ผมเองก็เจอ ทีนี้มาดูกันว่ากู้ยังไงใน 3 นาที" · ตอนส่งให้ Claude ให้ชี้ว่า "ผมไม่ได้พิมพ์คำสั่ง git สักตัว ผมเล่าอาการให้มันฟังเฉย ๆ" · ย้ำปิดท้ายว่าไม่มีงานของใครหาย</a:t>
             </a:r>
           </a:p>
         </p:txBody>
@@ -3856,7 +3859,7 @@
           <a:lstStyle/>
           <a:p>
             <a:r>
-              <a:t>ชี้ทีละกล่องจากซ้าย "โค้ดที่เสร็จแล้วในเครื่อง สั่ง deploy หนึ่งครั้ง มันจะถูกคัดลอกขึ้นไปวางบน Hosting" · หยุดที่กล่องเข้ม "ตั้งแต่วินาทีที่ของถึงกล่องนี้ เว็บเราไม่ได้อยู่ในเครื่องเราแล้ว ปิดคอมไปเลยก็ยังเปิดได้" · ปิดที่กล่องขวาสุด "และนั่นแปลว่าคนแปลกหน้าก็เปิดได้ด้วย เพราะฉะนั้นกฎเมื่อกี้ถึงต้องมาก่อน"</a:t>
+              <a:t>อ่านออกเสียงทั้งสี่ข้อ แล้วปิดด้วย "สังเกตนะครับ ไม่มีข้อไหนบอกให้คุณท่องคำสั่ง git เลย" · เชื่อมเข้าบ่าย — "ใบงานส่วน A บ่ายนี้ให้คุณทำ CLAUDE.md แล้ว push ขึ้น GitHub · ส่วนงานชนกันไม่ต้องซ้อมเอง วันไหนเจอคำว่า conflict ให้ส่งให้ Claude แบบที่เพิ่งเห็น"</a:t>
             </a:r>
           </a:p>
         </p:txBody>
@@ -3926,7 +3929,7 @@
           <a:lstStyle/>
           <a:p>
             <a:r>
-              <a:t>พูดว่า "จุดพลาดคลาสสิกคือเขียนกฎไว้ในเครื่องแล้วนึกว่าปลอดภัยแล้ว กฎทำงานเฉพาะฉบับที่อยู่บนเซิร์ฟเวอร์ครับ ใบงานบ่ายนี้จึงเขียนให้ deploy กฎพร้อมเว็บเสมอ"</a:t>
+              <a:t>พูดว่า "ครึ่งชั่วโมงสุดท้ายของเช้าครับ และเป็นนาทีที่ผมชอบที่สุดของทั้งเดือน ระบบที่อยู่ในเครื่องเราคนเดียวยังไม่นับว่าเป็นระบบ อีกสิบนาที FixIt จะมีที่อยู่จริงบนอินเทอร์เน็ต"</a:t>
             </a:r>
           </a:p>
         </p:txBody>
@@ -3996,7 +3999,7 @@
           <a:lstStyle/>
           <a:p>
             <a:r>
-              <a:t>พูดว่า "สองอาการนี้คืออันดับหนึ่งกับสองของบ่ายนี้ ผมบอกล่วงหน้าเลย ถ้าเว็บออนไลน์พังแต่ในเครื่องปกติ ให้เช็กสองข้อนี้ก่อนเสมอ" · ทวน index จากสัปดาห์ที่แล้ว "Firestore จะบอกเองว่าต้องสร้างสารบัญ พร้อมแนบลิงก์มาให้กด ไม่ต้องทำเอง"</a:t>
+              <a:t>ย้ำคำแปล Deploy = นำเว็บขึ้นออนไลน์ · Hosting = บริการที่ให้เว็บเรามีที่อยู่จริง · พูดว่า "จำคำว่า localhost จากสัปดาห์ที่แล้วได้ไหมครับ วันนี้เราจะเปลี่ยนจาก localhost เป็นที่อยู่ที่ส่งให้ใครก็ได้"</a:t>
             </a:r>
           </a:p>
         </p:txBody>
@@ -4066,7 +4069,7 @@
           <a:lstStyle/>
           <a:p>
             <a:r>
-              <a:t>📍 สคริปต์สาธิต: w7-demo-fixit.md → บล็อก F (ขั้นที่ 10) · จบแล้วกลับเข้าสไลด์หน้า 57 · นี่คือฉากจำของเช้านี้ · ตอนวาง URL ในแชท ให้รอจนมีคนพิมพ์ว่าเปิดได้อย่างน้อย 5 คน แล้วค่อยไปต่อ อย่ารีบ นาทีนี้คือรางวัลของทั้งเช้า</a:t>
+              <a:t>ชี้ทีละกล่องจากซ้าย "โค้ดที่เสร็จแล้วในเครื่อง สั่ง deploy หนึ่งครั้ง มันจะถูกคัดลอกขึ้นไปวางบน Hosting" · หยุดที่กล่องเข้ม "ตั้งแต่วินาทีที่ของถึงกล่องนี้ เว็บเราไม่ได้อยู่ในเครื่องเราแล้ว ปิดคอมไปเลยก็ยังเปิดได้" · ปิดที่กล่องขวาสุด "และนั่นแปลว่าคนแปลกหน้าก็เปิดได้ด้วย เพราะฉะนั้นกฎเมื่อกี้ถึงต้องมาก่อน"</a:t>
             </a:r>
           </a:p>
         </p:txBody>
@@ -4136,7 +4139,7 @@
           <a:lstStyle/>
           <a:p>
             <a:r>
-              <a:t>ให้ห้องพิมพ์ 🎉 ในแชท · พูดว่า "จากภาพนิ่งเมื่อสองสัปดาห์ก่อน ตอนนี้มันคือระบบจริงที่มีที่อยู่บนอินเทอร์เน็ต บ่ายนี้คุณจะได้ความรู้สึกนี้กับ LeaveEasy ของตัวเอง แล้วแลก URL กับเพื่อนด้วย"</a:t>
+              <a:t>พูดว่า "จุดพลาดคลาสสิกคือเขียนกฎไว้ในเครื่องแล้วนึกว่าปลอดภัยแล้ว กฎทำงานเฉพาะฉบับที่อยู่บนเซิร์ฟเวอร์ครับ ใบงานบ่ายนี้จึงเขียนให้ deploy กฎพร้อมเว็บเสมอ"</a:t>
             </a:r>
           </a:p>
         </p:txBody>
@@ -4206,7 +4209,7 @@
           <a:lstStyle/>
           <a:p>
             <a:r>
-              <a:t>พูดเสียงหนักแน่น "ระบบออนไลน์แล้วจะมีคนอยากใส่ข้อมูลจริงทันที ห้ามนะครับ เหตุผลการลาจริง ชื่อลูกค้าจริง เบอร์โทรจริง ห้ามทั้งหมด จนกว่ากฎรายห้องจะปิดเรียบร้อยสัปดาห์หน้า นี่คือเรื่อง PDPA ที่เรียนกันไปเดือนที่ 1"</a:t>
+              <a:t>พูดว่า "สองอาการนี้คืออันดับหนึ่งกับสองของบ่ายนี้ ผมบอกล่วงหน้าเลย ถ้าเว็บออนไลน์พังแต่ในเครื่องปกติ ให้เช็กสองข้อนี้ก่อนเสมอ" · ทวน index จากสัปดาห์ที่แล้ว "Firestore จะบอกเองว่าต้องสร้างสารบัญ พร้อมแนบลิงก์มาให้กด ไม่ต้องทำเอง"</a:t>
             </a:r>
           </a:p>
         </p:txBody>
@@ -4276,7 +4279,7 @@
           <a:lstStyle/>
           <a:p>
             <a:r>
-              <a:t>ถามห้องว่า "ออนไลน์แล้วเว็บพัง แต่ในเครื่องปกติ เช็กอะไรสองอย่าง" คำตอบ กฎยัง deploy ไหม กับ index สร้างหรือยัง · แล้วเข้าปิดคาบ</a:t>
+              <a:t>📍 สคริปต์สาธิต: w7-demo-fixit.md → บล็อก F (ขั้นที่ 10) · จบแล้วกลับเข้าสไลด์หน้า 57 · นี่คือฉากจำของเช้านี้ · ตอนวาง URL ในแชท ให้รอจนมีคนพิมพ์ว่าเปิดได้อย่างน้อย 5 คน แล้วค่อยไปต่อ อย่ารีบ นาทีนี้คือรางวัลของทั้งเช้า</a:t>
             </a:r>
           </a:p>
         </p:txBody>
@@ -4346,7 +4349,7 @@
           <a:lstStyle/>
           <a:p>
             <a:r>
-              <a:t>บอกว่า "5 นาทีสุดท้าย มีของต้องส่งสัปดาห์นี้ ห้ามออกก่อนครับ" · เตรียมลิงก์ใบงาน คิวถาม ธนาคารคำตอบ วางในแชทตอนนี้</a:t>
+              <a:t>ให้ห้องพิมพ์ 🎉 ในแชท · พูดว่า "จากภาพนิ่งเมื่อสองสัปดาห์ก่อน ตอนนี้มันคือระบบจริงที่มีที่อยู่บนอินเทอร์เน็ต บ่ายนี้คุณจะได้ความรู้สึกนี้กับ LeaveEasy ของตัวเอง แล้วแลก URL กับเพื่อนด้วย"</a:t>
             </a:r>
           </a:p>
         </p:txBody>
@@ -4486,7 +4489,7 @@
           <a:lstStyle/>
           <a:p>
             <a:r>
-              <a:t>อ่านออกเสียงทุกข้อ · ย้ำว่าส่ง URL repo กับ URL เว็บออนไลน์ อย่างเดียว ไม่ต้องแนบไฟล์ ผู้สอนเปิด GitHub ตรวจเอง · "ผมตรวจ commit รายคนด้วยนะครับ ทุกคนต้องมีชื่อตัวเองในประวัติ" · deploy ยกไป Consult วันอาทิตย์ได้ถ้าไม่ทัน แต่สามข้อแรกต้องมี</a:t>
+              <a:t>พูดเสียงหนักแน่น "ระบบออนไลน์แล้วจะมีคนอยากใส่ข้อมูลจริงทันที ห้ามนะครับ เหตุผลการลาจริง ชื่อลูกค้าจริง เบอร์โทรจริง ห้ามทั้งหมด จนกว่ากฎรายห้องจะปิดเรียบร้อยสัปดาห์หน้า นี่คือเรื่อง PDPA ที่เรียนกันไปเดือนที่ 1"</a:t>
             </a:r>
           </a:p>
         </p:txBody>
@@ -4556,7 +4559,7 @@
           <a:lstStyle/>
           <a:p>
             <a:r>
-              <a:t>ชี้ทีละแถวแล้วถามคำถามประจำหลักสูตร "FixIt แจ้งซ่อมใหม่ LeaveEasy ยื่นใบลาใหม่ แล้วหัวข้อของคุณ ตัว C คือปุ่มอะไร" ให้ทุกคนพิมพ์คำตอบในแชทก่อนพักเที่ยง · ย้ำว่าช่องขวาสุดเติมเองในใบการบ้าน ห้ามลอกช่องกลาง</a:t>
+              <a:t>ถามห้องว่า "ออนไลน์แล้วเว็บพัง แต่ในเครื่องปกติ เช็กอะไรสองอย่าง" คำตอบ กฎยัง deploy ไหม กับ index สร้างหรือยัง · แล้วเข้าปิดคาบ</a:t>
             </a:r>
           </a:p>
         </p:txBody>
@@ -4626,7 +4629,7 @@
           <a:lstStyle/>
           <a:p>
             <a:r>
-              <a:t>บอกก่อนว่า "ใบงานวันนี้ออกแบบให้เสร็จใน 2 ชั่วโมง เวลาที่เหลือคือเวลาสำรอง ไม่ใช่งานเพิ่ม" · ชี้แถว B แล้วพูดว่า "ถ้าเวลาไม่พอ ให้ B เสร็จเป็นอย่างน้อยครับ ลำดับตัดคือ B ก่อน C ก่อน D ส่วน deploy ยกไป Consult วันอาทิตย์ได้ แต่ห้าม deploy โดยไม่มีกฎขั้นต่ำเด็ดขาด" · ย้ำว่าบ่ายนี้ทุกคนทำ LeaveEasy เหมือนกัน แล้วการบ้านทำซ้ำกับหัวข้อของตัวเอง</a:t>
+              <a:t>บอกว่า "5 นาทีสุดท้าย มีของต้องส่งสัปดาห์นี้ ห้ามออกก่อนครับ" · เตรียมลิงก์ใบงาน คิวถาม ธนาคารคำตอบ วางในแชทตอนนี้</a:t>
             </a:r>
           </a:p>
         </p:txBody>
@@ -4696,7 +4699,7 @@
           <a:lstStyle/>
           <a:p>
             <a:r>
-              <a:t>ชี้ข้อแรก "คนนำจอเปลี่ยนทุก Checkpoint แต่ทุกคนทำบนเครื่องตัวเองตลอด" · ย้ำว่าก่อนเริ่มงานทุกครั้ง ให้พิมพ์บอก Claude ว่า "ช่วยดึงงานล่าสุดจาก GitHub ลงมาก่อน" เพราะ repo อยู่บน GitHub แล้ว · วางลิงก์ตารางห้องย่อยในแชทก่อนพักเที่ยง · บอกว่าคิวถามกลางและธนาคารคำตอบสด ลิงก์อยู่ในแชทแล้ว</a:t>
+              <a:t>อ่านออกเสียงทุกข้อ · ย้ำว่าส่ง URL repo กับ URL เว็บออนไลน์ อย่างเดียว ไม่ต้องแนบไฟล์ ผู้สอนเปิด GitHub ตรวจเอง · "ผมตรวจ commit รายคนด้วยนะครับ ทุกคนต้องมีชื่อตัวเองในประวัติ" · deploy ยกไป Consult วันอาทิตย์ได้ถ้าไม่ทัน แต่สามข้อแรกต้องมี</a:t>
             </a:r>
           </a:p>
         </p:txBody>
@@ -4722,6 +4725,216 @@
 </file>
 
 <file path=ppt/notesSlides/notesSlide64.xml><?xml version="1.0" encoding="utf-8"?>
+<p:notes xmlns:a="http://schemas.openxmlformats.org/drawingml/2006/main" xmlns:p="http://schemas.openxmlformats.org/presentationml/2006/main" xmlns:r="http://schemas.openxmlformats.org/officeDocument/2006/relationships">
+  <p:cSld>
+    <p:spTree>
+      <p:nvGrpSpPr>
+        <p:cNvPr id="1" name=""/>
+        <p:cNvGrpSpPr/>
+        <p:nvPr/>
+      </p:nvGrpSpPr>
+      <p:grpSpPr>
+        <a:xfrm>
+          <a:off x="0" y="0"/>
+          <a:ext cx="0" cy="0"/>
+          <a:chOff x="0" y="0"/>
+          <a:chExt cx="0" cy="0"/>
+        </a:xfrm>
+      </p:grpSpPr>
+      <p:sp>
+        <p:nvSpPr>
+          <p:cNvPr id="2" name="Slide Image Placeholder 1"/>
+          <p:cNvSpPr>
+            <a:spLocks noGrp="1"/>
+          </p:cNvSpPr>
+          <p:nvPr>
+            <p:ph type="sldImg" idx="2"/>
+          </p:nvPr>
+        </p:nvSpPr>
+        <p:spPr/>
+      </p:sp>
+      <p:sp>
+        <p:nvSpPr>
+          <p:cNvPr id="3" name="Notes Placeholder 2"/>
+          <p:cNvSpPr>
+            <a:spLocks noGrp="1"/>
+          </p:cNvSpPr>
+          <p:nvPr>
+            <p:ph type="body" idx="3" sz="quarter"/>
+          </p:nvPr>
+        </p:nvSpPr>
+        <p:spPr/>
+        <p:txBody>
+          <a:bodyPr/>
+          <a:lstStyle/>
+          <a:p>
+            <a:r>
+              <a:t>ชี้ทีละแถวแล้วถามคำถามประจำหลักสูตร "FixIt แจ้งซ่อมใหม่ LeaveEasy ยื่นใบลาใหม่ แล้วหัวข้อของคุณ ตัว C คือปุ่มอะไร" ให้ทุกคนพิมพ์คำตอบในแชทก่อนพักเที่ยง · ย้ำว่าช่องขวาสุดเติมเองในใบการบ้าน ห้ามลอกช่องกลาง</a:t>
+            </a:r>
+          </a:p>
+        </p:txBody>
+      </p:sp>
+      <p:sp>
+        <p:nvSpPr>
+          <p:cNvPr id="4" name="Slide Number Placeholder 3"/>
+          <p:cNvSpPr>
+            <a:spLocks noGrp="1"/>
+          </p:cNvSpPr>
+          <p:nvPr>
+            <p:ph type="sldNum" idx="5" sz="quarter"/>
+          </p:nvPr>
+        </p:nvSpPr>
+        <p:spPr/>
+      </p:sp>
+    </p:spTree>
+  </p:cSld>
+  <p:clrMapOvr>
+    <a:masterClrMapping/>
+  </p:clrMapOvr>
+</p:notes>
+</file>
+
+<file path=ppt/notesSlides/notesSlide65.xml><?xml version="1.0" encoding="utf-8"?>
+<p:notes xmlns:a="http://schemas.openxmlformats.org/drawingml/2006/main" xmlns:p="http://schemas.openxmlformats.org/presentationml/2006/main" xmlns:r="http://schemas.openxmlformats.org/officeDocument/2006/relationships">
+  <p:cSld>
+    <p:spTree>
+      <p:nvGrpSpPr>
+        <p:cNvPr id="1" name=""/>
+        <p:cNvGrpSpPr/>
+        <p:nvPr/>
+      </p:nvGrpSpPr>
+      <p:grpSpPr>
+        <a:xfrm>
+          <a:off x="0" y="0"/>
+          <a:ext cx="0" cy="0"/>
+          <a:chOff x="0" y="0"/>
+          <a:chExt cx="0" cy="0"/>
+        </a:xfrm>
+      </p:grpSpPr>
+      <p:sp>
+        <p:nvSpPr>
+          <p:cNvPr id="2" name="Slide Image Placeholder 1"/>
+          <p:cNvSpPr>
+            <a:spLocks noGrp="1"/>
+          </p:cNvSpPr>
+          <p:nvPr>
+            <p:ph type="sldImg" idx="2"/>
+          </p:nvPr>
+        </p:nvSpPr>
+        <p:spPr/>
+      </p:sp>
+      <p:sp>
+        <p:nvSpPr>
+          <p:cNvPr id="3" name="Notes Placeholder 2"/>
+          <p:cNvSpPr>
+            <a:spLocks noGrp="1"/>
+          </p:cNvSpPr>
+          <p:nvPr>
+            <p:ph type="body" idx="3" sz="quarter"/>
+          </p:nvPr>
+        </p:nvSpPr>
+        <p:spPr/>
+        <p:txBody>
+          <a:bodyPr/>
+          <a:lstStyle/>
+          <a:p>
+            <a:r>
+              <a:t>บอกก่อนว่า "ใบงานวันนี้ออกแบบให้เสร็จใน 2 ชั่วโมง เวลาที่เหลือคือเวลาสำรอง ไม่ใช่งานเพิ่ม" · ชี้แถว B แล้วพูดว่า "ถ้าเวลาไม่พอ ให้ B เสร็จเป็นอย่างน้อยครับ ลำดับตัดคือ B ก่อน C ก่อน D ส่วน deploy ยกไป Consult วันอาทิตย์ได้ แต่ห้าม deploy โดยไม่มีกฎขั้นต่ำเด็ดขาด" · ย้ำว่าบ่ายนี้ทุกคนทำ LeaveEasy เหมือนกัน แล้วการบ้านทำซ้ำกับหัวข้อของตัวเอง</a:t>
+            </a:r>
+          </a:p>
+        </p:txBody>
+      </p:sp>
+      <p:sp>
+        <p:nvSpPr>
+          <p:cNvPr id="4" name="Slide Number Placeholder 3"/>
+          <p:cNvSpPr>
+            <a:spLocks noGrp="1"/>
+          </p:cNvSpPr>
+          <p:nvPr>
+            <p:ph type="sldNum" idx="5" sz="quarter"/>
+          </p:nvPr>
+        </p:nvSpPr>
+        <p:spPr/>
+      </p:sp>
+    </p:spTree>
+  </p:cSld>
+  <p:clrMapOvr>
+    <a:masterClrMapping/>
+  </p:clrMapOvr>
+</p:notes>
+</file>
+
+<file path=ppt/notesSlides/notesSlide66.xml><?xml version="1.0" encoding="utf-8"?>
+<p:notes xmlns:a="http://schemas.openxmlformats.org/drawingml/2006/main" xmlns:p="http://schemas.openxmlformats.org/presentationml/2006/main" xmlns:r="http://schemas.openxmlformats.org/officeDocument/2006/relationships">
+  <p:cSld>
+    <p:spTree>
+      <p:nvGrpSpPr>
+        <p:cNvPr id="1" name=""/>
+        <p:cNvGrpSpPr/>
+        <p:nvPr/>
+      </p:nvGrpSpPr>
+      <p:grpSpPr>
+        <a:xfrm>
+          <a:off x="0" y="0"/>
+          <a:ext cx="0" cy="0"/>
+          <a:chOff x="0" y="0"/>
+          <a:chExt cx="0" cy="0"/>
+        </a:xfrm>
+      </p:grpSpPr>
+      <p:sp>
+        <p:nvSpPr>
+          <p:cNvPr id="2" name="Slide Image Placeholder 1"/>
+          <p:cNvSpPr>
+            <a:spLocks noGrp="1"/>
+          </p:cNvSpPr>
+          <p:nvPr>
+            <p:ph type="sldImg" idx="2"/>
+          </p:nvPr>
+        </p:nvSpPr>
+        <p:spPr/>
+      </p:sp>
+      <p:sp>
+        <p:nvSpPr>
+          <p:cNvPr id="3" name="Notes Placeholder 2"/>
+          <p:cNvSpPr>
+            <a:spLocks noGrp="1"/>
+          </p:cNvSpPr>
+          <p:nvPr>
+            <p:ph type="body" idx="3" sz="quarter"/>
+          </p:nvPr>
+        </p:nvSpPr>
+        <p:spPr/>
+        <p:txBody>
+          <a:bodyPr/>
+          <a:lstStyle/>
+          <a:p>
+            <a:r>
+              <a:t>ชี้ข้อแรก "คนนำจอเปลี่ยนทุก Checkpoint แต่ทุกคนทำบนเครื่องตัวเองตลอด" · ย้ำว่าก่อนเริ่มงานทุกครั้ง ให้พิมพ์บอก Claude ว่า "ช่วยดึงงานล่าสุดจาก GitHub ลงมาก่อน" เพราะ repo อยู่บน GitHub แล้ว · วางลิงก์ตารางห้องย่อยในแชทก่อนพักเที่ยง · บอกว่าคิวถามกลางและธนาคารคำตอบสด ลิงก์อยู่ในแชทแล้ว</a:t>
+            </a:r>
+          </a:p>
+        </p:txBody>
+      </p:sp>
+      <p:sp>
+        <p:nvSpPr>
+          <p:cNvPr id="4" name="Slide Number Placeholder 3"/>
+          <p:cNvSpPr>
+            <a:spLocks noGrp="1"/>
+          </p:cNvSpPr>
+          <p:nvPr>
+            <p:ph type="sldNum" idx="5" sz="quarter"/>
+          </p:nvPr>
+        </p:nvSpPr>
+        <p:spPr/>
+      </p:sp>
+    </p:spTree>
+  </p:cSld>
+  <p:clrMapOvr>
+    <a:masterClrMapping/>
+  </p:clrMapOvr>
+</p:notes>
+</file>
+
+<file path=ppt/notesSlides/notesSlide67.xml><?xml version="1.0" encoding="utf-8"?>
 <p:notes xmlns:a="http://schemas.openxmlformats.org/drawingml/2006/main" xmlns:p="http://schemas.openxmlformats.org/presentationml/2006/main" xmlns:r="http://schemas.openxmlformats.org/officeDocument/2006/relationships">
   <p:cSld>
     <p:spTree>
@@ -15514,7 +15727,7 @@
                 <a:ea typeface="Leelawadee UI"/>
                 <a:cs typeface="Leelawadee UI"/>
               </a:rPr>
-              <a:t>✅ ช่วงที่ 3 คุณต้องได้อะไรกลับไป</a:t>
+              <a:t>🧾 ACL — ตารางว่าใครทำอะไรได้</a:t>
             </a:r>
           </a:p>
         </p:txBody>
@@ -15551,7 +15764,7 @@
                 <a:ea typeface="Leelawadee UI"/>
                 <a:cs typeface="Leelawadee UI"/>
               </a:rPr>
-              <a:t>• บอกได้ว่า uid คืออะไร และไปอยู่ตรงไหนของข้อมูล</a:t>
+              <a:t>• ACL (Access Control List) = 📋 ตารางสิทธิ์</a:t>
             </a:r>
           </a:p>
         </p:txBody>
@@ -15588,7 +15801,7 @@
                 <a:ea typeface="Leelawadee UI"/>
                 <a:cs typeface="Leelawadee UI"/>
               </a:rPr>
-              <a:t>• ท่องเช็กลิสต์ตรวจแผนล็อกอิน 5 ข้อได้</a:t>
+              <a:t>• 3 ช่องเท่านั้น: บทบาท · ทำได้ · ทำไม่ได้</a:t>
             </a:r>
           </a:p>
         </p:txBody>
@@ -15625,7 +15838,7 @@
                 <a:ea typeface="Leelawadee UI"/>
                 <a:cs typeface="Leelawadee UI"/>
               </a:rPr>
-              <a:t>• อธิบายได้ว่าบทบาทมาจาก Persona เดือนที่ 1</a:t>
+              <a:t>• เขียนตารางนี้ ก่อน สั่ง AI จำกัดสิทธิ์</a:t>
             </a:r>
           </a:p>
         </p:txBody>
@@ -15662,7 +15875,7 @@
                 <a:ea typeface="Leelawadee UI"/>
                 <a:cs typeface="Leelawadee UI"/>
               </a:rPr>
-              <a:t>• ตอบได้ว่าล็อกอินแล้ว ทำไมยังไม่ปลอดภัย</a:t>
+              <a:t>• ไม่มีตาราง = สั่งไม่ได้ และตรวจไม่ได้ว่าถูกไหม</a:t>
             </a:r>
           </a:p>
         </p:txBody>
@@ -15723,84 +15936,376 @@
       <p:grpSpPr/>
       <p:sp>
         <p:nvSpPr>
-          <p:cNvPr id="2" name="Rectangle 1"/>
-          <p:cNvSpPr/>
-          <p:nvPr/>
-        </p:nvSpPr>
-        <p:spPr>
-          <a:xfrm>
-            <a:off x="0" y="0"/>
-            <a:ext cx="12191695" cy="6858000"/>
-          </a:xfrm>
-          <a:prstGeom prst="rect">
-            <a:avLst/>
-          </a:prstGeom>
-          <a:solidFill>
-            <a:srgbClr val="1F5FA8"/>
-          </a:solidFill>
-          <a:ln>
-            <a:noFill/>
-          </a:ln>
-        </p:spPr>
-        <p:style>
-          <a:lnRef idx="1">
-            <a:schemeClr val="accent1"/>
-          </a:lnRef>
-          <a:fillRef idx="3">
-            <a:schemeClr val="accent1"/>
-          </a:fillRef>
-          <a:effectRef idx="2">
-            <a:schemeClr val="accent1"/>
-          </a:effectRef>
-          <a:fontRef idx="minor">
-            <a:schemeClr val="lt1"/>
-          </a:fontRef>
-        </p:style>
-        <p:txBody>
-          <a:bodyPr rtlCol="0" anchor="ctr"/>
-          <a:lstStyle/>
-          <a:p>
-            <a:pPr algn="ctr"/>
-          </a:p>
-        </p:txBody>
-      </p:sp>
-      <p:sp>
-        <p:nvSpPr>
-          <p:cNvPr id="3" name="TextBox 2"/>
-          <p:cNvSpPr txBox="1"/>
-          <p:nvPr/>
-        </p:nvSpPr>
-        <p:spPr>
-          <a:xfrm>
-            <a:off x="822960" y="2743200"/>
-            <a:ext cx="10545775" cy="1463040"/>
-          </a:xfrm>
-          <a:prstGeom prst="rect">
-            <a:avLst/>
-          </a:prstGeom>
-          <a:noFill/>
-        </p:spPr>
-        <p:txBody>
-          <a:bodyPr wrap="square" anchor="ctr">
-            <a:spAutoFit/>
-          </a:bodyPr>
-          <a:lstStyle/>
-          <a:p>
-            <a:pPr algn="ctr"/>
-            <a:r>
-              <a:rPr sz="4000" b="1">
-                <a:solidFill>
-                  <a:srgbClr val="FFFFFF"/>
-                </a:solidFill>
-                <a:latin typeface="Leelawadee UI"/>
-                <a:ea typeface="Leelawadee UI"/>
-                <a:cs typeface="Leelawadee UI"/>
-              </a:rPr>
-              <a:t>ช่วงที่ 4 — 🔒 กุญแจประตูหน้าบ้าน ⏱ 10:55–11:10</a:t>
-            </a:r>
-          </a:p>
-        </p:txBody>
-      </p:sp>
+          <p:cNvPr id="2" name="TextBox 1"/>
+          <p:cNvSpPr txBox="1"/>
+          <p:nvPr/>
+        </p:nvSpPr>
+        <p:spPr>
+          <a:xfrm>
+            <a:off x="822960" y="502920"/>
+            <a:ext cx="10545775" cy="804672"/>
+          </a:xfrm>
+          <a:prstGeom prst="rect">
+            <a:avLst/>
+          </a:prstGeom>
+          <a:noFill/>
+        </p:spPr>
+        <p:txBody>
+          <a:bodyPr wrap="square">
+            <a:spAutoFit/>
+          </a:bodyPr>
+          <a:lstStyle/>
+          <a:p>
+            <a:pPr algn="l"/>
+            <a:r>
+              <a:rPr sz="3600" b="1">
+                <a:solidFill>
+                  <a:srgbClr val="1F5FA8"/>
+                </a:solidFill>
+                <a:latin typeface="Leelawadee UI"/>
+                <a:ea typeface="Leelawadee UI"/>
+                <a:cs typeface="Leelawadee UI"/>
+              </a:rPr>
+              <a:t>ACL ของ FixIt — 3 บทบาท</a:t>
+            </a:r>
+          </a:p>
+        </p:txBody>
+      </p:sp>
+      <p:graphicFrame>
+        <p:nvGraphicFramePr>
+          <p:cNvPr id="3" name="Table 2"/>
+          <p:cNvGraphicFramePr>
+            <a:graphicFrameLocks noGrp="1"/>
+          </p:cNvGraphicFramePr>
+          <p:nvPr/>
+        </p:nvGraphicFramePr>
+        <p:xfrm>
+          <a:off x="822960" y="1472184"/>
+          <a:ext cx="10545775" cy="2011680"/>
+        </p:xfrm>
+        <a:graphic>
+          <a:graphicData uri="http://schemas.openxmlformats.org/drawingml/2006/table">
+            <a:tbl>
+              <a:tblPr firstRow="1" bandRow="1">
+                <a:tableStyleId>{5C22544A-7EE6-4342-B048-85BDC9FD1C3A}</a:tableStyleId>
+              </a:tblPr>
+              <a:tblGrid>
+                <a:gridCol w="3515258"/>
+                <a:gridCol w="3515258"/>
+                <a:gridCol w="3515259"/>
+              </a:tblGrid>
+              <a:tr h="502920">
+                <a:tc>
+                  <a:txBody>
+                    <a:bodyPr/>
+                    <a:lstStyle/>
+                    <a:p>
+                      <a:pPr algn="l"/>
+                      <a:r>
+                        <a:rPr sz="1800" b="1">
+                          <a:solidFill>
+                            <a:srgbClr val="FFFFFF"/>
+                          </a:solidFill>
+                          <a:latin typeface="Leelawadee UI"/>
+                          <a:ea typeface="Leelawadee UI"/>
+                          <a:cs typeface="Leelawadee UI"/>
+                        </a:rPr>
+                        <a:t>บทบาท</a:t>
+                      </a:r>
+                    </a:p>
+                  </a:txBody>
+                  <a:tcPr marL="91440" marR="91440" marT="27432" marB="27432" anchor="ctr">
+                    <a:solidFill>
+                      <a:srgbClr val="1F5FA8"/>
+                    </a:solidFill>
+                  </a:tcPr>
+                </a:tc>
+                <a:tc>
+                  <a:txBody>
+                    <a:bodyPr/>
+                    <a:lstStyle/>
+                    <a:p>
+                      <a:pPr algn="l"/>
+                      <a:r>
+                        <a:rPr sz="1800" b="1">
+                          <a:solidFill>
+                            <a:srgbClr val="FFFFFF"/>
+                          </a:solidFill>
+                          <a:latin typeface="Leelawadee UI"/>
+                          <a:ea typeface="Leelawadee UI"/>
+                          <a:cs typeface="Leelawadee UI"/>
+                        </a:rPr>
+                        <a:t>ทำได้</a:t>
+                      </a:r>
+                    </a:p>
+                  </a:txBody>
+                  <a:tcPr marL="91440" marR="91440" marT="27432" marB="27432" anchor="ctr">
+                    <a:solidFill>
+                      <a:srgbClr val="1F5FA8"/>
+                    </a:solidFill>
+                  </a:tcPr>
+                </a:tc>
+                <a:tc>
+                  <a:txBody>
+                    <a:bodyPr/>
+                    <a:lstStyle/>
+                    <a:p>
+                      <a:pPr algn="l"/>
+                      <a:r>
+                        <a:rPr sz="1800" b="1">
+                          <a:solidFill>
+                            <a:srgbClr val="FFFFFF"/>
+                          </a:solidFill>
+                          <a:latin typeface="Leelawadee UI"/>
+                          <a:ea typeface="Leelawadee UI"/>
+                          <a:cs typeface="Leelawadee UI"/>
+                        </a:rPr>
+                        <a:t>ทำไม่ได้</a:t>
+                      </a:r>
+                    </a:p>
+                  </a:txBody>
+                  <a:tcPr marL="91440" marR="91440" marT="27432" marB="27432" anchor="ctr">
+                    <a:solidFill>
+                      <a:srgbClr val="1F5FA8"/>
+                    </a:solidFill>
+                  </a:tcPr>
+                </a:tc>
+              </a:tr>
+              <a:tr h="502920">
+                <a:tc>
+                  <a:txBody>
+                    <a:bodyPr/>
+                    <a:lstStyle/>
+                    <a:p>
+                      <a:pPr algn="l"/>
+                      <a:r>
+                        <a:rPr sz="1800" b="0">
+                          <a:solidFill>
+                            <a:srgbClr val="1A1A1A"/>
+                          </a:solidFill>
+                          <a:latin typeface="Leelawadee UI"/>
+                          <a:ea typeface="Leelawadee UI"/>
+                          <a:cs typeface="Leelawadee UI"/>
+                        </a:rPr>
+                        <a:t>🙋 ผู้แจ้ง</a:t>
+                      </a:r>
+                    </a:p>
+                  </a:txBody>
+                  <a:tcPr marL="91440" marR="91440" marT="27432" marB="27432" anchor="ctr">
+                    <a:solidFill>
+                      <a:srgbClr val="FFFFFF"/>
+                    </a:solidFill>
+                  </a:tcPr>
+                </a:tc>
+                <a:tc>
+                  <a:txBody>
+                    <a:bodyPr/>
+                    <a:lstStyle/>
+                    <a:p>
+                      <a:pPr algn="l"/>
+                      <a:r>
+                        <a:rPr sz="1800" b="0">
+                          <a:solidFill>
+                            <a:srgbClr val="1A1A1A"/>
+                          </a:solidFill>
+                          <a:latin typeface="Leelawadee UI"/>
+                          <a:ea typeface="Leelawadee UI"/>
+                          <a:cs typeface="Leelawadee UI"/>
+                        </a:rPr>
+                        <a:t>แจ้งซ่อม · ดูใบตัวเอง</a:t>
+                      </a:r>
+                    </a:p>
+                  </a:txBody>
+                  <a:tcPr marL="91440" marR="91440" marT="27432" marB="27432" anchor="ctr">
+                    <a:solidFill>
+                      <a:srgbClr val="FFFFFF"/>
+                    </a:solidFill>
+                  </a:tcPr>
+                </a:tc>
+                <a:tc>
+                  <a:txBody>
+                    <a:bodyPr/>
+                    <a:lstStyle/>
+                    <a:p>
+                      <a:pPr algn="l"/>
+                      <a:r>
+                        <a:rPr sz="1800" b="0">
+                          <a:solidFill>
+                            <a:srgbClr val="1A1A1A"/>
+                          </a:solidFill>
+                          <a:latin typeface="Leelawadee UI"/>
+                          <a:ea typeface="Leelawadee UI"/>
+                          <a:cs typeface="Leelawadee UI"/>
+                        </a:rPr>
+                        <a:t>เปลี่ยนสถานะ · ดูใบคนอื่น</a:t>
+                      </a:r>
+                    </a:p>
+                  </a:txBody>
+                  <a:tcPr marL="91440" marR="91440" marT="27432" marB="27432" anchor="ctr">
+                    <a:solidFill>
+                      <a:srgbClr val="FFFFFF"/>
+                    </a:solidFill>
+                  </a:tcPr>
+                </a:tc>
+              </a:tr>
+              <a:tr h="502920">
+                <a:tc>
+                  <a:txBody>
+                    <a:bodyPr/>
+                    <a:lstStyle/>
+                    <a:p>
+                      <a:pPr algn="l"/>
+                      <a:r>
+                        <a:rPr sz="1800" b="0">
+                          <a:solidFill>
+                            <a:srgbClr val="1A1A1A"/>
+                          </a:solidFill>
+                          <a:latin typeface="Leelawadee UI"/>
+                          <a:ea typeface="Leelawadee UI"/>
+                          <a:cs typeface="Leelawadee UI"/>
+                        </a:rPr>
+                        <a:t>🔧 ช่างซ่อม</a:t>
+                      </a:r>
+                    </a:p>
+                  </a:txBody>
+                  <a:tcPr marL="91440" marR="91440" marT="27432" marB="27432" anchor="ctr">
+                    <a:solidFill>
+                      <a:srgbClr val="F2F4F7"/>
+                    </a:solidFill>
+                  </a:tcPr>
+                </a:tc>
+                <a:tc>
+                  <a:txBody>
+                    <a:bodyPr/>
+                    <a:lstStyle/>
+                    <a:p>
+                      <a:pPr algn="l"/>
+                      <a:r>
+                        <a:rPr sz="1800" b="0">
+                          <a:solidFill>
+                            <a:srgbClr val="1A1A1A"/>
+                          </a:solidFill>
+                          <a:latin typeface="Leelawadee UI"/>
+                          <a:ea typeface="Leelawadee UI"/>
+                          <a:cs typeface="Leelawadee UI"/>
+                        </a:rPr>
+                        <a:t>ดูทุกใบ · เปลี่ยนสถานะ</a:t>
+                      </a:r>
+                    </a:p>
+                  </a:txBody>
+                  <a:tcPr marL="91440" marR="91440" marT="27432" marB="27432" anchor="ctr">
+                    <a:solidFill>
+                      <a:srgbClr val="F2F4F7"/>
+                    </a:solidFill>
+                  </a:tcPr>
+                </a:tc>
+                <a:tc>
+                  <a:txBody>
+                    <a:bodyPr/>
+                    <a:lstStyle/>
+                    <a:p>
+                      <a:pPr algn="l"/>
+                      <a:r>
+                        <a:rPr sz="1800" b="0">
+                          <a:solidFill>
+                            <a:srgbClr val="1A1A1A"/>
+                          </a:solidFill>
+                          <a:latin typeface="Leelawadee UI"/>
+                          <a:ea typeface="Leelawadee UI"/>
+                          <a:cs typeface="Leelawadee UI"/>
+                        </a:rPr>
+                        <a:t>ลบใบคนอื่น · แก้หมวดหมู่</a:t>
+                      </a:r>
+                    </a:p>
+                  </a:txBody>
+                  <a:tcPr marL="91440" marR="91440" marT="27432" marB="27432" anchor="ctr">
+                    <a:solidFill>
+                      <a:srgbClr val="F2F4F7"/>
+                    </a:solidFill>
+                  </a:tcPr>
+                </a:tc>
+              </a:tr>
+              <a:tr h="502920">
+                <a:tc>
+                  <a:txBody>
+                    <a:bodyPr/>
+                    <a:lstStyle/>
+                    <a:p>
+                      <a:pPr algn="l"/>
+                      <a:r>
+                        <a:rPr sz="1800" b="0">
+                          <a:solidFill>
+                            <a:srgbClr val="1A1A1A"/>
+                          </a:solidFill>
+                          <a:latin typeface="Leelawadee UI"/>
+                          <a:ea typeface="Leelawadee UI"/>
+                          <a:cs typeface="Leelawadee UI"/>
+                        </a:rPr>
+                        <a:t>🛠️ ผู้ดูแล</a:t>
+                      </a:r>
+                    </a:p>
+                  </a:txBody>
+                  <a:tcPr marL="91440" marR="91440" marT="27432" marB="27432" anchor="ctr">
+                    <a:solidFill>
+                      <a:srgbClr val="FFFFFF"/>
+                    </a:solidFill>
+                  </a:tcPr>
+                </a:tc>
+                <a:tc>
+                  <a:txBody>
+                    <a:bodyPr/>
+                    <a:lstStyle/>
+                    <a:p>
+                      <a:pPr algn="l"/>
+                      <a:r>
+                        <a:rPr sz="1800" b="0">
+                          <a:solidFill>
+                            <a:srgbClr val="1A1A1A"/>
+                          </a:solidFill>
+                          <a:latin typeface="Leelawadee UI"/>
+                          <a:ea typeface="Leelawadee UI"/>
+                          <a:cs typeface="Leelawadee UI"/>
+                        </a:rPr>
+                        <a:t>ทุกอย่าง + จัดการหมวดหมู่</a:t>
+                      </a:r>
+                    </a:p>
+                  </a:txBody>
+                  <a:tcPr marL="91440" marR="91440" marT="27432" marB="27432" anchor="ctr">
+                    <a:solidFill>
+                      <a:srgbClr val="FFFFFF"/>
+                    </a:solidFill>
+                  </a:tcPr>
+                </a:tc>
+                <a:tc>
+                  <a:txBody>
+                    <a:bodyPr/>
+                    <a:lstStyle/>
+                    <a:p>
+                      <a:pPr algn="l"/>
+                      <a:r>
+                        <a:rPr sz="1800" b="0">
+                          <a:solidFill>
+                            <a:srgbClr val="1A1A1A"/>
+                          </a:solidFill>
+                          <a:latin typeface="Leelawadee UI"/>
+                          <a:ea typeface="Leelawadee UI"/>
+                          <a:cs typeface="Leelawadee UI"/>
+                        </a:rPr>
+                        <a:t>—</a:t>
+                      </a:r>
+                    </a:p>
+                  </a:txBody>
+                  <a:tcPr marL="91440" marR="91440" marT="27432" marB="27432" anchor="ctr">
+                    <a:solidFill>
+                      <a:srgbClr val="FFFFFF"/>
+                    </a:solidFill>
+                  </a:tcPr>
+                </a:tc>
+              </a:tr>
+            </a:tbl>
+          </a:graphicData>
+        </a:graphic>
+      </p:graphicFrame>
       <p:sp>
         <p:nvSpPr>
           <p:cNvPr id="4" name="TextBox 3"/>
@@ -15864,7 +16369,7 @@
         <p:spPr>
           <a:xfrm>
             <a:off x="822960" y="502920"/>
-            <a:ext cx="10545775" cy="1408176"/>
+            <a:ext cx="10545775" cy="804672"/>
           </a:xfrm>
           <a:prstGeom prst="rect">
             <a:avLst/>
@@ -15887,21 +16392,109 @@
                 <a:ea typeface="Leelawadee UI"/>
                 <a:cs typeface="Leelawadee UI"/>
               </a:rPr>
-              <a:t>ก่อนออกออนไลน์ ต้องล็อกประตูอย่างน้อย 1 ชั้น</a:t>
-            </a:r>
-          </a:p>
-        </p:txBody>
-      </p:sp>
-      <p:sp>
-        <p:nvSpPr>
-          <p:cNvPr id="3" name="TextBox 2"/>
-          <p:cNvSpPr txBox="1"/>
-          <p:nvPr/>
-        </p:nvSpPr>
-        <p:spPr>
-          <a:xfrm>
-            <a:off x="822960" y="2075688"/>
-            <a:ext cx="10545775" cy="1029208"/>
+              <a:t>💬 สั่ง AI จำกัดสิทธิ์ตาม ACL</a:t>
+            </a:r>
+          </a:p>
+        </p:txBody>
+      </p:sp>
+      <p:sp>
+        <p:nvSpPr>
+          <p:cNvPr id="3" name="Rounded Rectangle 2"/>
+          <p:cNvSpPr/>
+          <p:nvPr/>
+        </p:nvSpPr>
+        <p:spPr>
+          <a:xfrm>
+            <a:off x="822960" y="1472184"/>
+            <a:ext cx="10545775" cy="1847088"/>
+          </a:xfrm>
+          <a:prstGeom prst="roundRect">
+            <a:avLst/>
+          </a:prstGeom>
+          <a:solidFill>
+            <a:srgbClr val="FFF7E6"/>
+          </a:solidFill>
+          <a:ln w="22225">
+            <a:solidFill>
+              <a:srgbClr val="E0A02C"/>
+            </a:solidFill>
+          </a:ln>
+          <a:effectLst/>
+        </p:spPr>
+        <p:style>
+          <a:lnRef idx="1">
+            <a:schemeClr val="accent1"/>
+          </a:lnRef>
+          <a:fillRef idx="3">
+            <a:schemeClr val="accent1"/>
+          </a:fillRef>
+          <a:effectRef idx="2">
+            <a:schemeClr val="accent1"/>
+          </a:effectRef>
+          <a:fontRef idx="minor">
+            <a:schemeClr val="lt1"/>
+          </a:fontRef>
+        </p:style>
+        <p:txBody>
+          <a:bodyPr rtlCol="0" anchor="ctr"/>
+          <a:lstStyle/>
+          <a:p/>
+        </p:txBody>
+      </p:sp>
+      <p:sp>
+        <p:nvSpPr>
+          <p:cNvPr id="4" name="Rounded Rectangle 3"/>
+          <p:cNvSpPr/>
+          <p:nvPr/>
+        </p:nvSpPr>
+        <p:spPr>
+          <a:xfrm>
+            <a:off x="822960" y="1472184"/>
+            <a:ext cx="100584" cy="1847088"/>
+          </a:xfrm>
+          <a:prstGeom prst="roundRect">
+            <a:avLst/>
+          </a:prstGeom>
+          <a:solidFill>
+            <a:srgbClr val="E0A02C"/>
+          </a:solidFill>
+          <a:ln>
+            <a:noFill/>
+          </a:ln>
+          <a:effectLst/>
+        </p:spPr>
+        <p:style>
+          <a:lnRef idx="1">
+            <a:schemeClr val="accent1"/>
+          </a:lnRef>
+          <a:fillRef idx="3">
+            <a:schemeClr val="accent1"/>
+          </a:fillRef>
+          <a:effectRef idx="2">
+            <a:schemeClr val="accent1"/>
+          </a:effectRef>
+          <a:fontRef idx="minor">
+            <a:schemeClr val="lt1"/>
+          </a:fontRef>
+        </p:style>
+        <p:txBody>
+          <a:bodyPr rtlCol="0" anchor="ctr"/>
+          <a:lstStyle/>
+          <a:p>
+            <a:pPr algn="ctr"/>
+          </a:p>
+        </p:txBody>
+      </p:sp>
+      <p:sp>
+        <p:nvSpPr>
+          <p:cNvPr id="5" name="TextBox 4"/>
+          <p:cNvSpPr txBox="1"/>
+          <p:nvPr/>
+        </p:nvSpPr>
+        <p:spPr>
+          <a:xfrm>
+            <a:off x="1097280" y="1527048"/>
+            <a:ext cx="10088575" cy="310896"/>
           </a:xfrm>
           <a:prstGeom prst="rect">
             <a:avLst/>
@@ -15916,6 +16509,120 @@
           <a:p>
             <a:pPr algn="l"/>
             <a:r>
+              <a:rPr sz="1400" b="1">
+                <a:solidFill>
+                  <a:srgbClr val="A86C0A"/>
+                </a:solidFill>
+                <a:latin typeface="Leelawadee UI"/>
+                <a:ea typeface="Leelawadee UI"/>
+                <a:cs typeface="Leelawadee UI"/>
+              </a:rPr>
+              <a:t>💬 พิมพ์แบบนี้</a:t>
+            </a:r>
+          </a:p>
+        </p:txBody>
+      </p:sp>
+      <p:sp>
+        <p:nvSpPr>
+          <p:cNvPr id="6" name="TextBox 5"/>
+          <p:cNvSpPr txBox="1"/>
+          <p:nvPr/>
+        </p:nvSpPr>
+        <p:spPr>
+          <a:xfrm>
+            <a:off x="1097280" y="1856232"/>
+            <a:ext cx="10088575" cy="1152144"/>
+          </a:xfrm>
+          <a:prstGeom prst="rect">
+            <a:avLst/>
+          </a:prstGeom>
+          <a:noFill/>
+        </p:spPr>
+        <p:txBody>
+          <a:bodyPr wrap="square">
+            <a:spAutoFit/>
+          </a:bodyPr>
+          <a:lstStyle/>
+          <a:p>
+            <a:pPr algn="l">
+              <a:spcAft>
+                <a:spcPts val="0"/>
+              </a:spcAft>
+            </a:pPr>
+            <a:r>
+              <a:rPr sz="2000" b="0">
+                <a:solidFill>
+                  <a:srgbClr val="1A1A1A"/>
+                </a:solidFill>
+                <a:latin typeface="Leelawadee UI"/>
+                <a:ea typeface="Leelawadee UI"/>
+                <a:cs typeface="Leelawadee UI"/>
+              </a:rPr>
+              <a:t>นี่คือตารางสิทธิ์ของระบบผม &lt;วางตาราง 3 แถว&gt;</a:t>
+            </a:r>
+          </a:p>
+          <a:p>
+            <a:pPr algn="l">
+              <a:spcAft>
+                <a:spcPts val="0"/>
+              </a:spcAft>
+            </a:pPr>
+            <a:r>
+              <a:rPr sz="2000" b="0">
+                <a:solidFill>
+                  <a:srgbClr val="1A1A1A"/>
+                </a:solidFill>
+                <a:latin typeface="Leelawadee UI"/>
+                <a:ea typeface="Leelawadee UI"/>
+                <a:cs typeface="Leelawadee UI"/>
+              </a:rPr>
+              <a:t>ช่วยจำกัดหน้าจอและปุ่มให้ตรงตามตารางนี้</a:t>
+            </a:r>
+          </a:p>
+          <a:p>
+            <a:pPr algn="l">
+              <a:spcAft>
+                <a:spcPts val="0"/>
+              </a:spcAft>
+            </a:pPr>
+            <a:r>
+              <a:rPr sz="2000" b="0">
+                <a:solidFill>
+                  <a:srgbClr val="1A1A1A"/>
+                </a:solidFill>
+                <a:latin typeface="Leelawadee UI"/>
+                <a:ea typeface="Leelawadee UI"/>
+                <a:cs typeface="Leelawadee UI"/>
+              </a:rPr>
+              <a:t>ขอดูแผนก่อน อย่าเพิ่งลงมือ</a:t>
+            </a:r>
+          </a:p>
+        </p:txBody>
+      </p:sp>
+      <p:sp>
+        <p:nvSpPr>
+          <p:cNvPr id="7" name="TextBox 6"/>
+          <p:cNvSpPr txBox="1"/>
+          <p:nvPr/>
+        </p:nvSpPr>
+        <p:spPr>
+          <a:xfrm>
+            <a:off x="822960" y="3520440"/>
+            <a:ext cx="10545775" cy="560324"/>
+          </a:xfrm>
+          <a:prstGeom prst="rect">
+            <a:avLst/>
+          </a:prstGeom>
+          <a:noFill/>
+        </p:spPr>
+        <p:txBody>
+          <a:bodyPr wrap="square">
+            <a:spAutoFit/>
+          </a:bodyPr>
+          <a:lstStyle/>
+          <a:p>
+            <a:pPr algn="l"/>
+            <a:r>
               <a:rPr sz="2600" b="0">
                 <a:solidFill>
                   <a:srgbClr val="1A1A1A"/>
@@ -15924,20 +16631,20 @@
                 <a:ea typeface="Leelawadee UI"/>
                 <a:cs typeface="Leelawadee UI"/>
               </a:rPr>
-              <a:t>• โหมดทดสอบ = คลังที่ไม่ล็อกกุญแจ ใครรู้ที่อยู่ก็เปิดได้</a:t>
-            </a:r>
-          </a:p>
-        </p:txBody>
-      </p:sp>
-      <p:sp>
-        <p:nvSpPr>
-          <p:cNvPr id="4" name="TextBox 3"/>
-          <p:cNvSpPr txBox="1"/>
-          <p:nvPr/>
-        </p:nvSpPr>
-        <p:spPr>
-          <a:xfrm>
-            <a:off x="822960" y="3159760"/>
+              <a:t>• ปุ่มที่บทบาทนั้นทำไม่ได้ → ซ่อนหรือกดไม่ได้</a:t>
+            </a:r>
+          </a:p>
+        </p:txBody>
+      </p:sp>
+      <p:sp>
+        <p:nvSpPr>
+          <p:cNvPr id="8" name="TextBox 7"/>
+          <p:cNvSpPr txBox="1"/>
+          <p:nvPr/>
+        </p:nvSpPr>
+        <p:spPr>
+          <a:xfrm>
+            <a:off x="822960" y="4135628"/>
             <a:ext cx="10545775" cy="560324"/>
           </a:xfrm>
           <a:prstGeom prst="rect">
@@ -15961,21 +16668,21 @@
                 <a:ea typeface="Leelawadee UI"/>
                 <a:cs typeface="Leelawadee UI"/>
               </a:rPr>
-              <a:t>• อีกครึ่งชั่วโมง ที่อยู่คลังจะเป็นสาธารณะ</a:t>
-            </a:r>
-          </a:p>
-        </p:txBody>
-      </p:sp>
-      <p:sp>
-        <p:nvSpPr>
-          <p:cNvPr id="5" name="TextBox 4"/>
-          <p:cNvSpPr txBox="1"/>
-          <p:nvPr/>
-        </p:nvSpPr>
-        <p:spPr>
-          <a:xfrm>
-            <a:off x="822960" y="3774948"/>
-            <a:ext cx="10545775" cy="1029208"/>
+              <a:t>• ⚠️ ซ่อนปุ่มยังไม่ใช่ความปลอดภัยจริง</a:t>
+            </a:r>
+          </a:p>
+        </p:txBody>
+      </p:sp>
+      <p:sp>
+        <p:nvSpPr>
+          <p:cNvPr id="9" name="TextBox 8"/>
+          <p:cNvSpPr txBox="1"/>
+          <p:nvPr/>
+        </p:nvSpPr>
+        <p:spPr>
+          <a:xfrm>
+            <a:off x="822960" y="4750816"/>
+            <a:ext cx="10545775" cy="560324"/>
           </a:xfrm>
           <a:prstGeom prst="rect">
             <a:avLst/>
@@ -15998,51 +16705,14 @@
                 <a:ea typeface="Leelawadee UI"/>
                 <a:cs typeface="Leelawadee UI"/>
               </a:rPr>
-              <a:t>• Security Rules = กฎที่บอกว่าใครเปิดอะไรได้ (ยามเฝ้าข้อมูล)</a:t>
-            </a:r>
-          </a:p>
-        </p:txBody>
-      </p:sp>
-      <p:sp>
-        <p:nvSpPr>
-          <p:cNvPr id="6" name="TextBox 5"/>
-          <p:cNvSpPr txBox="1"/>
-          <p:nvPr/>
-        </p:nvSpPr>
-        <p:spPr>
-          <a:xfrm>
-            <a:off x="822960" y="4859020"/>
-            <a:ext cx="10545775" cy="1029208"/>
-          </a:xfrm>
-          <a:prstGeom prst="rect">
-            <a:avLst/>
-          </a:prstGeom>
-          <a:noFill/>
-        </p:spPr>
-        <p:txBody>
-          <a:bodyPr wrap="square">
-            <a:spAutoFit/>
-          </a:bodyPr>
-          <a:lstStyle/>
-          <a:p>
-            <a:pPr algn="l"/>
-            <a:r>
-              <a:rPr sz="2600" b="0">
-                <a:solidFill>
-                  <a:srgbClr val="1A1A1A"/>
-                </a:solidFill>
-                <a:latin typeface="Leelawadee UI"/>
-                <a:ea typeface="Leelawadee UI"/>
-                <a:cs typeface="Leelawadee UI"/>
-              </a:rPr>
-              <a:t>• วันนี้ใส่กฎขั้นต่ำ 1 ข้อ: ต้องล็อกอินก่อน ถึงอ่าน/เขียนได้</a:t>
-            </a:r>
-          </a:p>
-        </p:txBody>
-      </p:sp>
-      <p:sp>
-        <p:nvSpPr>
-          <p:cNvPr id="7" name="TextBox 6"/>
+              <a:t>• ประตูจริงคือกฎที่คลัง — สัปดาห์หน้า</a:t>
+            </a:r>
+          </a:p>
+        </p:txBody>
+      </p:sp>
+      <p:sp>
+        <p:nvSpPr>
+          <p:cNvPr id="10" name="TextBox 9"/>
           <p:cNvSpPr txBox="1"/>
           <p:nvPr/>
         </p:nvSpPr>
@@ -16194,7 +16864,7 @@
         <p:spPr>
           <a:xfrm>
             <a:off x="822960" y="502920"/>
-            <a:ext cx="10545775" cy="1408176"/>
+            <a:ext cx="10545775" cy="804672"/>
           </a:xfrm>
           <a:prstGeom prst="rect">
             <a:avLst/>
@@ -16217,96 +16887,82 @@
                 <a:ea typeface="Leelawadee UI"/>
                 <a:cs typeface="Leelawadee UI"/>
               </a:rPr>
-              <a:t>AI เขียนกฎให้ — เราอ่านแล้วชี้บรรทัดสำคัญ</a:t>
-            </a:r>
-          </a:p>
-        </p:txBody>
-      </p:sp>
-      <p:sp>
-        <p:nvSpPr>
-          <p:cNvPr id="3" name="Rounded Rectangle 2"/>
-          <p:cNvSpPr/>
-          <p:nvPr/>
-        </p:nvSpPr>
-        <p:spPr>
-          <a:xfrm>
-            <a:off x="822960" y="2075688"/>
-            <a:ext cx="10545775" cy="1847088"/>
-          </a:xfrm>
-          <a:prstGeom prst="roundRect">
-            <a:avLst/>
-          </a:prstGeom>
-          <a:solidFill>
-            <a:srgbClr val="FFF7E6"/>
-          </a:solidFill>
-          <a:ln w="22225">
-            <a:solidFill>
-              <a:srgbClr val="E0A02C"/>
-            </a:solidFill>
-          </a:ln>
-          <a:effectLst/>
-        </p:spPr>
-        <p:style>
-          <a:lnRef idx="1">
-            <a:schemeClr val="accent1"/>
-          </a:lnRef>
-          <a:fillRef idx="3">
-            <a:schemeClr val="accent1"/>
-          </a:fillRef>
-          <a:effectRef idx="2">
-            <a:schemeClr val="accent1"/>
-          </a:effectRef>
-          <a:fontRef idx="minor">
-            <a:schemeClr val="lt1"/>
-          </a:fontRef>
-        </p:style>
-        <p:txBody>
-          <a:bodyPr rtlCol="0" anchor="ctr"/>
-          <a:lstStyle/>
-          <a:p/>
-        </p:txBody>
-      </p:sp>
-      <p:sp>
-        <p:nvSpPr>
-          <p:cNvPr id="4" name="Rounded Rectangle 3"/>
-          <p:cNvSpPr/>
-          <p:nvPr/>
-        </p:nvSpPr>
-        <p:spPr>
-          <a:xfrm>
-            <a:off x="822960" y="2075688"/>
-            <a:ext cx="100584" cy="1847088"/>
-          </a:xfrm>
-          <a:prstGeom prst="roundRect">
-            <a:avLst/>
-          </a:prstGeom>
-          <a:solidFill>
-            <a:srgbClr val="E0A02C"/>
-          </a:solidFill>
-          <a:ln>
-            <a:noFill/>
-          </a:ln>
-          <a:effectLst/>
-        </p:spPr>
-        <p:style>
-          <a:lnRef idx="1">
-            <a:schemeClr val="accent1"/>
-          </a:lnRef>
-          <a:fillRef idx="3">
-            <a:schemeClr val="accent1"/>
-          </a:fillRef>
-          <a:effectRef idx="2">
-            <a:schemeClr val="accent1"/>
-          </a:effectRef>
-          <a:fontRef idx="minor">
-            <a:schemeClr val="lt1"/>
-          </a:fontRef>
-        </p:style>
-        <p:txBody>
-          <a:bodyPr rtlCol="0" anchor="ctr"/>
-          <a:lstStyle/>
-          <a:p>
-            <a:pPr algn="ctr"/>
+              <a:t>✅ ช่วงที่ 3 คุณต้องได้อะไรกลับไป</a:t>
+            </a:r>
+          </a:p>
+        </p:txBody>
+      </p:sp>
+      <p:sp>
+        <p:nvSpPr>
+          <p:cNvPr id="3" name="TextBox 2"/>
+          <p:cNvSpPr txBox="1"/>
+          <p:nvPr/>
+        </p:nvSpPr>
+        <p:spPr>
+          <a:xfrm>
+            <a:off x="822960" y="1472184"/>
+            <a:ext cx="10545775" cy="560324"/>
+          </a:xfrm>
+          <a:prstGeom prst="rect">
+            <a:avLst/>
+          </a:prstGeom>
+          <a:noFill/>
+        </p:spPr>
+        <p:txBody>
+          <a:bodyPr wrap="square">
+            <a:spAutoFit/>
+          </a:bodyPr>
+          <a:lstStyle/>
+          <a:p>
+            <a:pPr algn="l"/>
+            <a:r>
+              <a:rPr sz="2600" b="0">
+                <a:solidFill>
+                  <a:srgbClr val="1A1A1A"/>
+                </a:solidFill>
+                <a:latin typeface="Leelawadee UI"/>
+                <a:ea typeface="Leelawadee UI"/>
+                <a:cs typeface="Leelawadee UI"/>
+              </a:rPr>
+              <a:t>• บอกได้ว่า uid คืออะไร และไปอยู่ตรงไหนของข้อมูล</a:t>
+            </a:r>
+          </a:p>
+        </p:txBody>
+      </p:sp>
+      <p:sp>
+        <p:nvSpPr>
+          <p:cNvPr id="4" name="TextBox 3"/>
+          <p:cNvSpPr txBox="1"/>
+          <p:nvPr/>
+        </p:nvSpPr>
+        <p:spPr>
+          <a:xfrm>
+            <a:off x="822960" y="2087372"/>
+            <a:ext cx="10545775" cy="560324"/>
+          </a:xfrm>
+          <a:prstGeom prst="rect">
+            <a:avLst/>
+          </a:prstGeom>
+          <a:noFill/>
+        </p:spPr>
+        <p:txBody>
+          <a:bodyPr wrap="square">
+            <a:spAutoFit/>
+          </a:bodyPr>
+          <a:lstStyle/>
+          <a:p>
+            <a:pPr algn="l"/>
+            <a:r>
+              <a:rPr sz="2600" b="0">
+                <a:solidFill>
+                  <a:srgbClr val="1A1A1A"/>
+                </a:solidFill>
+                <a:latin typeface="Leelawadee UI"/>
+                <a:ea typeface="Leelawadee UI"/>
+                <a:cs typeface="Leelawadee UI"/>
+              </a:rPr>
+              <a:t>• ท่องเช็กลิสต์ตรวจแผนล็อกอิน 5 ข้อได้</a:t>
+            </a:r>
           </a:p>
         </p:txBody>
       </p:sp>
@@ -16318,8 +16974,8 @@
         </p:nvSpPr>
         <p:spPr>
           <a:xfrm>
-            <a:off x="1097280" y="2130552"/>
-            <a:ext cx="10088575" cy="310896"/>
+            <a:off x="822960" y="2702560"/>
+            <a:ext cx="10545775" cy="560324"/>
           </a:xfrm>
           <a:prstGeom prst="rect">
             <a:avLst/>
@@ -16334,15 +16990,15 @@
           <a:p>
             <a:pPr algn="l"/>
             <a:r>
-              <a:rPr sz="1400" b="1">
-                <a:solidFill>
-                  <a:srgbClr val="A86C0A"/>
-                </a:solidFill>
-                <a:latin typeface="Leelawadee UI"/>
-                <a:ea typeface="Leelawadee UI"/>
-                <a:cs typeface="Leelawadee UI"/>
-              </a:rPr>
-              <a:t>💬 สั่งแบบนี้</a:t>
+              <a:rPr sz="2600" b="0">
+                <a:solidFill>
+                  <a:srgbClr val="1A1A1A"/>
+                </a:solidFill>
+                <a:latin typeface="Leelawadee UI"/>
+                <a:ea typeface="Leelawadee UI"/>
+                <a:cs typeface="Leelawadee UI"/>
+              </a:rPr>
+              <a:t>• เขียน ACL ของระบบตัวเองได้ 3 บทบาท</a:t>
             </a:r>
           </a:p>
         </p:txBody>
@@ -16355,27 +17011,23 @@
         </p:nvSpPr>
         <p:spPr>
           <a:xfrm>
-            <a:off x="1097280" y="2459736"/>
-            <a:ext cx="10088575" cy="1152144"/>
-          </a:xfrm>
-          <a:prstGeom prst="rect">
-            <a:avLst/>
-          </a:prstGeom>
-          <a:noFill/>
-        </p:spPr>
-        <p:txBody>
-          <a:bodyPr wrap="square">
-            <a:spAutoFit/>
-          </a:bodyPr>
-          <a:lstStyle/>
-          <a:p>
-            <a:pPr algn="l">
-              <a:spcAft>
-                <a:spcPts val="0"/>
-              </a:spcAft>
-            </a:pPr>
-            <a:r>
-              <a:rPr sz="2000" b="0">
+            <a:off x="822960" y="3317748"/>
+            <a:ext cx="10545775" cy="560324"/>
+          </a:xfrm>
+          <a:prstGeom prst="rect">
+            <a:avLst/>
+          </a:prstGeom>
+          <a:noFill/>
+        </p:spPr>
+        <p:txBody>
+          <a:bodyPr wrap="square">
+            <a:spAutoFit/>
+          </a:bodyPr>
+          <a:lstStyle/>
+          <a:p>
+            <a:pPr algn="l"/>
+            <a:r>
+              <a:rPr sz="2600" b="0">
                 <a:solidFill>
                   <a:srgbClr val="1A1A1A"/>
                 </a:solidFill>
@@ -16383,43 +17035,7 @@
                 <a:ea typeface="Leelawadee UI"/>
                 <a:cs typeface="Leelawadee UI"/>
               </a:rPr>
-              <a:t>ช่วยเขียน Security Rules ของ Firestore ให้ 1 ข้อ</a:t>
-            </a:r>
-          </a:p>
-          <a:p>
-            <a:pPr algn="l">
-              <a:spcAft>
-                <a:spcPts val="0"/>
-              </a:spcAft>
-            </a:pPr>
-            <a:r>
-              <a:rPr sz="2000" b="0">
-                <a:solidFill>
-                  <a:srgbClr val="1A1A1A"/>
-                </a:solidFill>
-                <a:latin typeface="Leelawadee UI"/>
-                <a:ea typeface="Leelawadee UI"/>
-                <a:cs typeface="Leelawadee UI"/>
-              </a:rPr>
-              <a:t>ต้องล็อกอินก่อน ถึงอ่านหรือเขียนได้ ทุกโฟลเดอร์</a:t>
-            </a:r>
-          </a:p>
-          <a:p>
-            <a:pPr algn="l">
-              <a:spcAft>
-                <a:spcPts val="0"/>
-              </a:spcAft>
-            </a:pPr>
-            <a:r>
-              <a:rPr sz="2000" b="0">
-                <a:solidFill>
-                  <a:srgbClr val="1A1A1A"/>
-                </a:solidFill>
-                <a:latin typeface="Leelawadee UI"/>
-                <a:ea typeface="Leelawadee UI"/>
-                <a:cs typeface="Leelawadee UI"/>
-              </a:rPr>
-              <a:t>เขียนเสร็จให้ผมอ่านก่อน แล้วบอกวิธี deploy กฎ</a:t>
+              <a:t>• ตอบได้ว่าล็อกอินแล้ว ทำไมยังไม่ปลอดภัย</a:t>
             </a:r>
           </a:p>
         </p:txBody>
@@ -16427,80 +17043,6 @@
       <p:sp>
         <p:nvSpPr>
           <p:cNvPr id="7" name="TextBox 6"/>
-          <p:cNvSpPr txBox="1"/>
-          <p:nvPr/>
-        </p:nvSpPr>
-        <p:spPr>
-          <a:xfrm>
-            <a:off x="822960" y="4123944"/>
-            <a:ext cx="10545775" cy="1029208"/>
-          </a:xfrm>
-          <a:prstGeom prst="rect">
-            <a:avLst/>
-          </a:prstGeom>
-          <a:noFill/>
-        </p:spPr>
-        <p:txBody>
-          <a:bodyPr wrap="square">
-            <a:spAutoFit/>
-          </a:bodyPr>
-          <a:lstStyle/>
-          <a:p>
-            <a:pPr algn="l"/>
-            <a:r>
-              <a:rPr sz="2600" b="0">
-                <a:solidFill>
-                  <a:srgbClr val="1A1A1A"/>
-                </a:solidFill>
-                <a:latin typeface="Leelawadee UI"/>
-                <a:ea typeface="Leelawadee UI"/>
-                <a:cs typeface="Leelawadee UI"/>
-              </a:rPr>
-              <a:t>• อ่านแล้วชี้ให้ได้ว่าบรรทัดไหนแปลว่า "ต้องล็อกอินก่อน"</a:t>
-            </a:r>
-          </a:p>
-        </p:txBody>
-      </p:sp>
-      <p:sp>
-        <p:nvSpPr>
-          <p:cNvPr id="8" name="TextBox 7"/>
-          <p:cNvSpPr txBox="1"/>
-          <p:nvPr/>
-        </p:nvSpPr>
-        <p:spPr>
-          <a:xfrm>
-            <a:off x="822960" y="5208016"/>
-            <a:ext cx="10545775" cy="560324"/>
-          </a:xfrm>
-          <a:prstGeom prst="rect">
-            <a:avLst/>
-          </a:prstGeom>
-          <a:noFill/>
-        </p:spPr>
-        <p:txBody>
-          <a:bodyPr wrap="square">
-            <a:spAutoFit/>
-          </a:bodyPr>
-          <a:lstStyle/>
-          <a:p>
-            <a:pPr algn="l"/>
-            <a:r>
-              <a:rPr sz="2600" b="0">
-                <a:solidFill>
-                  <a:srgbClr val="1A1A1A"/>
-                </a:solidFill>
-                <a:latin typeface="Leelawadee UI"/>
-                <a:ea typeface="Leelawadee UI"/>
-                <a:cs typeface="Leelawadee UI"/>
-              </a:rPr>
-              <a:t>• ไม่ต้องเข้าใจไวยากรณ์ทุกตัว — เข้าใจใจความพอ</a:t>
-            </a:r>
-          </a:p>
-        </p:txBody>
-      </p:sp>
-      <p:sp>
-        <p:nvSpPr>
-          <p:cNvPr id="9" name="TextBox 8"/>
           <p:cNvSpPr txBox="1"/>
           <p:nvPr/>
         </p:nvSpPr>
@@ -16554,38 +17096,44 @@
       <p:grpSpPr/>
       <p:sp>
         <p:nvSpPr>
-          <p:cNvPr id="2" name="TextBox 1"/>
-          <p:cNvSpPr txBox="1"/>
-          <p:nvPr/>
-        </p:nvSpPr>
-        <p:spPr>
-          <a:xfrm>
-            <a:off x="822960" y="502920"/>
-            <a:ext cx="10545775" cy="804672"/>
-          </a:xfrm>
-          <a:prstGeom prst="rect">
-            <a:avLst/>
-          </a:prstGeom>
-          <a:noFill/>
-        </p:spPr>
-        <p:txBody>
-          <a:bodyPr wrap="square">
-            <a:spAutoFit/>
-          </a:bodyPr>
-          <a:lstStyle/>
-          <a:p>
-            <a:pPr algn="l"/>
-            <a:r>
-              <a:rPr sz="3600" b="1">
-                <a:solidFill>
-                  <a:srgbClr val="1F5FA8"/>
-                </a:solidFill>
-                <a:latin typeface="Leelawadee UI"/>
-                <a:ea typeface="Leelawadee UI"/>
-                <a:cs typeface="Leelawadee UI"/>
-              </a:rPr>
-              <a:t>ทดสอบว่ากันได้จริง — หน้าต่างไม่ล็อกอิน</a:t>
-            </a:r>
+          <p:cNvPr id="2" name="Rectangle 1"/>
+          <p:cNvSpPr/>
+          <p:nvPr/>
+        </p:nvSpPr>
+        <p:spPr>
+          <a:xfrm>
+            <a:off x="0" y="0"/>
+            <a:ext cx="12191695" cy="6858000"/>
+          </a:xfrm>
+          <a:prstGeom prst="rect">
+            <a:avLst/>
+          </a:prstGeom>
+          <a:solidFill>
+            <a:srgbClr val="1F5FA8"/>
+          </a:solidFill>
+          <a:ln>
+            <a:noFill/>
+          </a:ln>
+        </p:spPr>
+        <p:style>
+          <a:lnRef idx="1">
+            <a:schemeClr val="accent1"/>
+          </a:lnRef>
+          <a:fillRef idx="3">
+            <a:schemeClr val="accent1"/>
+          </a:fillRef>
+          <a:effectRef idx="2">
+            <a:schemeClr val="accent1"/>
+          </a:effectRef>
+          <a:fontRef idx="minor">
+            <a:schemeClr val="lt1"/>
+          </a:fontRef>
+        </p:style>
+        <p:txBody>
+          <a:bodyPr rtlCol="0" anchor="ctr"/>
+          <a:lstStyle/>
+          <a:p>
+            <a:pPr algn="ctr"/>
           </a:p>
         </p:txBody>
       </p:sp>
@@ -16597,31 +17145,31 @@
         </p:nvSpPr>
         <p:spPr>
           <a:xfrm>
-            <a:off x="822960" y="1472184"/>
-            <a:ext cx="10545775" cy="560324"/>
-          </a:xfrm>
-          <a:prstGeom prst="rect">
-            <a:avLst/>
-          </a:prstGeom>
-          <a:noFill/>
-        </p:spPr>
-        <p:txBody>
-          <a:bodyPr wrap="square">
-            <a:spAutoFit/>
-          </a:bodyPr>
-          <a:lstStyle/>
-          <a:p>
-            <a:pPr algn="l"/>
-            <a:r>
-              <a:rPr sz="2600" b="0">
-                <a:solidFill>
-                  <a:srgbClr val="1A1A1A"/>
-                </a:solidFill>
-                <a:latin typeface="Leelawadee UI"/>
-                <a:ea typeface="Leelawadee UI"/>
-                <a:cs typeface="Leelawadee UI"/>
-              </a:rPr>
-              <a:t>• เปิดหน้าต่างไม่ระบุตัวตน (incognito) = คนแปลกหน้า</a:t>
+            <a:off x="822960" y="2743200"/>
+            <a:ext cx="10545775" cy="1463040"/>
+          </a:xfrm>
+          <a:prstGeom prst="rect">
+            <a:avLst/>
+          </a:prstGeom>
+          <a:noFill/>
+        </p:spPr>
+        <p:txBody>
+          <a:bodyPr wrap="square" anchor="ctr">
+            <a:spAutoFit/>
+          </a:bodyPr>
+          <a:lstStyle/>
+          <a:p>
+            <a:pPr algn="ctr"/>
+            <a:r>
+              <a:rPr sz="4000" b="1">
+                <a:solidFill>
+                  <a:srgbClr val="FFFFFF"/>
+                </a:solidFill>
+                <a:latin typeface="Leelawadee UI"/>
+                <a:ea typeface="Leelawadee UI"/>
+                <a:cs typeface="Leelawadee UI"/>
+              </a:rPr>
+              <a:t>ช่วงที่ 4 — 🔒 กุญแจประตูหน้าบ้าน ⏱ 10:55–11:10</a:t>
             </a:r>
           </a:p>
         </p:txBody>
@@ -16629,117 +17177,6 @@
       <p:sp>
         <p:nvSpPr>
           <p:cNvPr id="4" name="TextBox 3"/>
-          <p:cNvSpPr txBox="1"/>
-          <p:nvPr/>
-        </p:nvSpPr>
-        <p:spPr>
-          <a:xfrm>
-            <a:off x="822960" y="2087372"/>
-            <a:ext cx="10545775" cy="560324"/>
-          </a:xfrm>
-          <a:prstGeom prst="rect">
-            <a:avLst/>
-          </a:prstGeom>
-          <a:noFill/>
-        </p:spPr>
-        <p:txBody>
-          <a:bodyPr wrap="square">
-            <a:spAutoFit/>
-          </a:bodyPr>
-          <a:lstStyle/>
-          <a:p>
-            <a:pPr algn="l"/>
-            <a:r>
-              <a:rPr sz="2600" b="0">
-                <a:solidFill>
-                  <a:srgbClr val="1A1A1A"/>
-                </a:solidFill>
-                <a:latin typeface="Leelawadee UI"/>
-                <a:ea typeface="Leelawadee UI"/>
-                <a:cs typeface="Leelawadee UI"/>
-              </a:rPr>
-              <a:t>• ก่อนใส่กฎ: อ่านข้อมูลได้ ← นี่คือปัญหา</a:t>
-            </a:r>
-          </a:p>
-        </p:txBody>
-      </p:sp>
-      <p:sp>
-        <p:nvSpPr>
-          <p:cNvPr id="5" name="TextBox 4"/>
-          <p:cNvSpPr txBox="1"/>
-          <p:nvPr/>
-        </p:nvSpPr>
-        <p:spPr>
-          <a:xfrm>
-            <a:off x="822960" y="2702560"/>
-            <a:ext cx="10545775" cy="560324"/>
-          </a:xfrm>
-          <a:prstGeom prst="rect">
-            <a:avLst/>
-          </a:prstGeom>
-          <a:noFill/>
-        </p:spPr>
-        <p:txBody>
-          <a:bodyPr wrap="square">
-            <a:spAutoFit/>
-          </a:bodyPr>
-          <a:lstStyle/>
-          <a:p>
-            <a:pPr algn="l"/>
-            <a:r>
-              <a:rPr sz="2600" b="0">
-                <a:solidFill>
-                  <a:srgbClr val="1A1A1A"/>
-                </a:solidFill>
-                <a:latin typeface="Leelawadee UI"/>
-                <a:ea typeface="Leelawadee UI"/>
-                <a:cs typeface="Leelawadee UI"/>
-              </a:rPr>
-              <a:t>• หลังใส่กฎ: ต้องอ่านไม่ได้เลย</a:t>
-            </a:r>
-          </a:p>
-        </p:txBody>
-      </p:sp>
-      <p:sp>
-        <p:nvSpPr>
-          <p:cNvPr id="6" name="TextBox 5"/>
-          <p:cNvSpPr txBox="1"/>
-          <p:nvPr/>
-        </p:nvSpPr>
-        <p:spPr>
-          <a:xfrm>
-            <a:off x="822960" y="3317748"/>
-            <a:ext cx="10545775" cy="560324"/>
-          </a:xfrm>
-          <a:prstGeom prst="rect">
-            <a:avLst/>
-          </a:prstGeom>
-          <a:noFill/>
-        </p:spPr>
-        <p:txBody>
-          <a:bodyPr wrap="square">
-            <a:spAutoFit/>
-          </a:bodyPr>
-          <a:lstStyle/>
-          <a:p>
-            <a:pPr algn="l"/>
-            <a:r>
-              <a:rPr sz="2600" b="0">
-                <a:solidFill>
-                  <a:srgbClr val="1A1A1A"/>
-                </a:solidFill>
-                <a:latin typeface="Leelawadee UI"/>
-                <a:ea typeface="Leelawadee UI"/>
-                <a:cs typeface="Leelawadee UI"/>
-              </a:rPr>
-              <a:t>• ล็อกอินแล้วต้องใช้งานได้ปกติเหมือนเดิม</a:t>
-            </a:r>
-          </a:p>
-        </p:txBody>
-      </p:sp>
-      <p:sp>
-        <p:nvSpPr>
-          <p:cNvPr id="7" name="TextBox 6"/>
           <p:cNvSpPr txBox="1"/>
           <p:nvPr/>
         </p:nvSpPr>
@@ -16793,130 +17230,7 @@
       <p:grpSpPr/>
       <p:sp>
         <p:nvSpPr>
-          <p:cNvPr id="2" name="Rectangle 1"/>
-          <p:cNvSpPr/>
-          <p:nvPr/>
-        </p:nvSpPr>
-        <p:spPr>
-          <a:xfrm>
-            <a:off x="0" y="0"/>
-            <a:ext cx="12191695" cy="6858000"/>
-          </a:xfrm>
-          <a:prstGeom prst="rect">
-            <a:avLst/>
-          </a:prstGeom>
-          <a:solidFill>
-            <a:srgbClr val="FFF3DF"/>
-          </a:solidFill>
-          <a:ln>
-            <a:noFill/>
-          </a:ln>
-        </p:spPr>
-        <p:style>
-          <a:lnRef idx="1">
-            <a:schemeClr val="accent1"/>
-          </a:lnRef>
-          <a:fillRef idx="3">
-            <a:schemeClr val="accent1"/>
-          </a:fillRef>
-          <a:effectRef idx="2">
-            <a:schemeClr val="accent1"/>
-          </a:effectRef>
-          <a:fontRef idx="minor">
-            <a:schemeClr val="lt1"/>
-          </a:fontRef>
-        </p:style>
-        <p:txBody>
-          <a:bodyPr rtlCol="0" anchor="ctr"/>
-          <a:lstStyle/>
-          <a:p>
-            <a:pPr algn="ctr"/>
-          </a:p>
-        </p:txBody>
-      </p:sp>
-      <p:sp>
-        <p:nvSpPr>
-          <p:cNvPr id="3" name="Rectangle 2"/>
-          <p:cNvSpPr/>
-          <p:nvPr/>
-        </p:nvSpPr>
-        <p:spPr>
-          <a:xfrm>
-            <a:off x="0" y="0"/>
-            <a:ext cx="146304" cy="6858000"/>
-          </a:xfrm>
-          <a:prstGeom prst="rect">
-            <a:avLst/>
-          </a:prstGeom>
-          <a:solidFill>
-            <a:srgbClr val="E0A02C"/>
-          </a:solidFill>
-          <a:ln>
-            <a:noFill/>
-          </a:ln>
-        </p:spPr>
-        <p:style>
-          <a:lnRef idx="1">
-            <a:schemeClr val="accent1"/>
-          </a:lnRef>
-          <a:fillRef idx="3">
-            <a:schemeClr val="accent1"/>
-          </a:fillRef>
-          <a:effectRef idx="2">
-            <a:schemeClr val="accent1"/>
-          </a:effectRef>
-          <a:fontRef idx="minor">
-            <a:schemeClr val="lt1"/>
-          </a:fontRef>
-        </p:style>
-        <p:txBody>
-          <a:bodyPr rtlCol="0" anchor="ctr"/>
-          <a:lstStyle/>
-          <a:p>
-            <a:pPr algn="ctr"/>
-          </a:p>
-        </p:txBody>
-      </p:sp>
-      <p:sp>
-        <p:nvSpPr>
-          <p:cNvPr id="4" name="TextBox 3"/>
-          <p:cNvSpPr txBox="1"/>
-          <p:nvPr/>
-        </p:nvSpPr>
-        <p:spPr>
-          <a:xfrm>
-            <a:off x="9082735" y="109728"/>
-            <a:ext cx="2834640" cy="384048"/>
-          </a:xfrm>
-          <a:prstGeom prst="rect">
-            <a:avLst/>
-          </a:prstGeom>
-          <a:noFill/>
-        </p:spPr>
-        <p:txBody>
-          <a:bodyPr wrap="square">
-            <a:spAutoFit/>
-          </a:bodyPr>
-          <a:lstStyle/>
-          <a:p>
-            <a:pPr algn="r"/>
-            <a:r>
-              <a:rPr sz="1400" b="1">
-                <a:solidFill>
-                  <a:srgbClr val="8A5400"/>
-                </a:solidFill>
-                <a:latin typeface="Leelawadee UI"/>
-                <a:ea typeface="Leelawadee UI"/>
-                <a:cs typeface="Leelawadee UI"/>
-              </a:rPr>
-              <a:t>🎬 สลับไปหน้าจอสาธิตสด</a:t>
-            </a:r>
-          </a:p>
-        </p:txBody>
-      </p:sp>
-      <p:sp>
-        <p:nvSpPr>
-          <p:cNvPr id="5" name="TextBox 4"/>
+          <p:cNvPr id="2" name="TextBox 1"/>
           <p:cNvSpPr txBox="1"/>
           <p:nvPr/>
         </p:nvSpPr>
@@ -16940,20 +17254,20 @@
             <a:r>
               <a:rPr sz="3600" b="1">
                 <a:solidFill>
-                  <a:srgbClr val="8A5400"/>
-                </a:solidFill>
-                <a:latin typeface="Leelawadee UI"/>
-                <a:ea typeface="Leelawadee UI"/>
-                <a:cs typeface="Leelawadee UI"/>
-              </a:rPr>
-              <a:t>🎬💥 สาธิต — ใส่กฎ แล้วเจอ permission denied ⏱ 7 นาที</a:t>
-            </a:r>
-          </a:p>
-        </p:txBody>
-      </p:sp>
-      <p:sp>
-        <p:nvSpPr>
-          <p:cNvPr id="6" name="TextBox 5"/>
+                  <a:srgbClr val="1F5FA8"/>
+                </a:solidFill>
+                <a:latin typeface="Leelawadee UI"/>
+                <a:ea typeface="Leelawadee UI"/>
+                <a:cs typeface="Leelawadee UI"/>
+              </a:rPr>
+              <a:t>ก่อนออกออนไลน์ ต้องล็อกประตูอย่างน้อย 1 ชั้น</a:t>
+            </a:r>
+          </a:p>
+        </p:txBody>
+      </p:sp>
+      <p:sp>
+        <p:nvSpPr>
+          <p:cNvPr id="3" name="TextBox 2"/>
           <p:cNvSpPr txBox="1"/>
           <p:nvPr/>
         </p:nvSpPr>
@@ -16983,7 +17297,118 @@
                 <a:ea typeface="Leelawadee UI"/>
                 <a:cs typeface="Leelawadee UI"/>
               </a:rPr>
-              <a:t>• ใส่กฎ → deploy → รีเฟรช → หน้าหลักพังทั้งที่ล็อกอินอยู่</a:t>
+              <a:t>• โหมดทดสอบ = คลังที่ไม่ล็อกกุญแจ ใครรู้ที่อยู่ก็เปิดได้</a:t>
+            </a:r>
+          </a:p>
+        </p:txBody>
+      </p:sp>
+      <p:sp>
+        <p:nvSpPr>
+          <p:cNvPr id="4" name="TextBox 3"/>
+          <p:cNvSpPr txBox="1"/>
+          <p:nvPr/>
+        </p:nvSpPr>
+        <p:spPr>
+          <a:xfrm>
+            <a:off x="822960" y="3159760"/>
+            <a:ext cx="10545775" cy="560324"/>
+          </a:xfrm>
+          <a:prstGeom prst="rect">
+            <a:avLst/>
+          </a:prstGeom>
+          <a:noFill/>
+        </p:spPr>
+        <p:txBody>
+          <a:bodyPr wrap="square">
+            <a:spAutoFit/>
+          </a:bodyPr>
+          <a:lstStyle/>
+          <a:p>
+            <a:pPr algn="l"/>
+            <a:r>
+              <a:rPr sz="2600" b="0">
+                <a:solidFill>
+                  <a:srgbClr val="1A1A1A"/>
+                </a:solidFill>
+                <a:latin typeface="Leelawadee UI"/>
+                <a:ea typeface="Leelawadee UI"/>
+                <a:cs typeface="Leelawadee UI"/>
+              </a:rPr>
+              <a:t>• อีกครึ่งชั่วโมง ที่อยู่คลังจะเป็นสาธารณะ</a:t>
+            </a:r>
+          </a:p>
+        </p:txBody>
+      </p:sp>
+      <p:sp>
+        <p:nvSpPr>
+          <p:cNvPr id="5" name="TextBox 4"/>
+          <p:cNvSpPr txBox="1"/>
+          <p:nvPr/>
+        </p:nvSpPr>
+        <p:spPr>
+          <a:xfrm>
+            <a:off x="822960" y="3774948"/>
+            <a:ext cx="10545775" cy="1029208"/>
+          </a:xfrm>
+          <a:prstGeom prst="rect">
+            <a:avLst/>
+          </a:prstGeom>
+          <a:noFill/>
+        </p:spPr>
+        <p:txBody>
+          <a:bodyPr wrap="square">
+            <a:spAutoFit/>
+          </a:bodyPr>
+          <a:lstStyle/>
+          <a:p>
+            <a:pPr algn="l"/>
+            <a:r>
+              <a:rPr sz="2600" b="0">
+                <a:solidFill>
+                  <a:srgbClr val="1A1A1A"/>
+                </a:solidFill>
+                <a:latin typeface="Leelawadee UI"/>
+                <a:ea typeface="Leelawadee UI"/>
+                <a:cs typeface="Leelawadee UI"/>
+              </a:rPr>
+              <a:t>• Security Rules = กฎที่บอกว่าใครเปิดอะไรได้ (ยามเฝ้าข้อมูล)</a:t>
+            </a:r>
+          </a:p>
+        </p:txBody>
+      </p:sp>
+      <p:sp>
+        <p:nvSpPr>
+          <p:cNvPr id="6" name="TextBox 5"/>
+          <p:cNvSpPr txBox="1"/>
+          <p:nvPr/>
+        </p:nvSpPr>
+        <p:spPr>
+          <a:xfrm>
+            <a:off x="822960" y="4859020"/>
+            <a:ext cx="10545775" cy="1029208"/>
+          </a:xfrm>
+          <a:prstGeom prst="rect">
+            <a:avLst/>
+          </a:prstGeom>
+          <a:noFill/>
+        </p:spPr>
+        <p:txBody>
+          <a:bodyPr wrap="square">
+            <a:spAutoFit/>
+          </a:bodyPr>
+          <a:lstStyle/>
+          <a:p>
+            <a:pPr algn="l"/>
+            <a:r>
+              <a:rPr sz="2600" b="0">
+                <a:solidFill>
+                  <a:srgbClr val="1A1A1A"/>
+                </a:solidFill>
+                <a:latin typeface="Leelawadee UI"/>
+                <a:ea typeface="Leelawadee UI"/>
+                <a:cs typeface="Leelawadee UI"/>
+              </a:rPr>
+              <a:t>• วันนี้ใส่กฎขั้นต่ำ 1 ข้อ: ต้องล็อกอินก่อน ถึงอ่าน/เขียนได้</a:t>
             </a:r>
           </a:p>
         </p:txBody>
@@ -16991,117 +17416,6 @@
       <p:sp>
         <p:nvSpPr>
           <p:cNvPr id="7" name="TextBox 6"/>
-          <p:cNvSpPr txBox="1"/>
-          <p:nvPr/>
-        </p:nvSpPr>
-        <p:spPr>
-          <a:xfrm>
-            <a:off x="822960" y="3159760"/>
-            <a:ext cx="10545775" cy="1029208"/>
-          </a:xfrm>
-          <a:prstGeom prst="rect">
-            <a:avLst/>
-          </a:prstGeom>
-          <a:noFill/>
-        </p:spPr>
-        <p:txBody>
-          <a:bodyPr wrap="square">
-            <a:spAutoFit/>
-          </a:bodyPr>
-          <a:lstStyle/>
-          <a:p>
-            <a:pPr algn="l"/>
-            <a:r>
-              <a:rPr sz="2600" b="0">
-                <a:solidFill>
-                  <a:srgbClr val="1A1A1A"/>
-                </a:solidFill>
-                <a:latin typeface="Leelawadee UI"/>
-                <a:ea typeface="Leelawadee UI"/>
-                <a:cs typeface="Leelawadee UI"/>
-              </a:rPr>
-              <a:t>• อาการนี้ปกติมาก — หน้าเว็บอ่านข้อมูลก่อนสถานะล็อกอินพร้อม</a:t>
-            </a:r>
-          </a:p>
-        </p:txBody>
-      </p:sp>
-      <p:sp>
-        <p:nvSpPr>
-          <p:cNvPr id="8" name="TextBox 7"/>
-          <p:cNvSpPr txBox="1"/>
-          <p:nvPr/>
-        </p:nvSpPr>
-        <p:spPr>
-          <a:xfrm>
-            <a:off x="822960" y="4243832"/>
-            <a:ext cx="10545775" cy="560324"/>
-          </a:xfrm>
-          <a:prstGeom prst="rect">
-            <a:avLst/>
-          </a:prstGeom>
-          <a:noFill/>
-        </p:spPr>
-        <p:txBody>
-          <a:bodyPr wrap="square">
-            <a:spAutoFit/>
-          </a:bodyPr>
-          <a:lstStyle/>
-          <a:p>
-            <a:pPr algn="l"/>
-            <a:r>
-              <a:rPr sz="2600" b="0">
-                <a:solidFill>
-                  <a:srgbClr val="1A1A1A"/>
-                </a:solidFill>
-                <a:latin typeface="Leelawadee UI"/>
-                <a:ea typeface="Leelawadee UI"/>
-                <a:cs typeface="Leelawadee UI"/>
-              </a:rPr>
-              <a:t>• แก้: ให้รอสถานะล็อกอินพร้อมก่อน แล้วค่อยอ่าน</a:t>
-            </a:r>
-          </a:p>
-        </p:txBody>
-      </p:sp>
-      <p:sp>
-        <p:nvSpPr>
-          <p:cNvPr id="9" name="TextBox 8"/>
-          <p:cNvSpPr txBox="1"/>
-          <p:nvPr/>
-        </p:nvSpPr>
-        <p:spPr>
-          <a:xfrm>
-            <a:off x="822960" y="4859020"/>
-            <a:ext cx="10545775" cy="560324"/>
-          </a:xfrm>
-          <a:prstGeom prst="rect">
-            <a:avLst/>
-          </a:prstGeom>
-          <a:noFill/>
-        </p:spPr>
-        <p:txBody>
-          <a:bodyPr wrap="square">
-            <a:spAutoFit/>
-          </a:bodyPr>
-          <a:lstStyle/>
-          <a:p>
-            <a:pPr algn="l"/>
-            <a:r>
-              <a:rPr sz="2600" b="0">
-                <a:solidFill>
-                  <a:srgbClr val="1A1A1A"/>
-                </a:solidFill>
-                <a:latin typeface="Leelawadee UI"/>
-                <a:ea typeface="Leelawadee UI"/>
-                <a:cs typeface="Leelawadee UI"/>
-              </a:rPr>
-              <a:t>• ปิดท้าย: หน้าต่างไม่ล็อกอิน → อ่านไม่ได้จริง ✅</a:t>
-            </a:r>
-          </a:p>
-        </p:txBody>
-      </p:sp>
-      <p:sp>
-        <p:nvSpPr>
-          <p:cNvPr id="10" name="TextBox 9"/>
           <p:cNvSpPr txBox="1"/>
           <p:nvPr/>
         </p:nvSpPr>
@@ -17161,38 +17475,314 @@
         </p:nvSpPr>
         <p:spPr>
           <a:xfrm>
-            <a:off x="822960" y="2011680"/>
-            <a:ext cx="10545775" cy="2743200"/>
-          </a:xfrm>
-          <a:prstGeom prst="rect">
-            <a:avLst/>
-          </a:prstGeom>
-          <a:noFill/>
-        </p:spPr>
-        <p:txBody>
-          <a:bodyPr wrap="square" anchor="ctr">
-            <a:spAutoFit/>
-          </a:bodyPr>
+            <a:off x="822960" y="502920"/>
+            <a:ext cx="10545775" cy="1408176"/>
+          </a:xfrm>
+          <a:prstGeom prst="rect">
+            <a:avLst/>
+          </a:prstGeom>
+          <a:noFill/>
+        </p:spPr>
+        <p:txBody>
+          <a:bodyPr wrap="square">
+            <a:spAutoFit/>
+          </a:bodyPr>
+          <a:lstStyle/>
+          <a:p>
+            <a:pPr algn="l"/>
+            <a:r>
+              <a:rPr sz="3600" b="1">
+                <a:solidFill>
+                  <a:srgbClr val="1F5FA8"/>
+                </a:solidFill>
+                <a:latin typeface="Leelawadee UI"/>
+                <a:ea typeface="Leelawadee UI"/>
+                <a:cs typeface="Leelawadee UI"/>
+              </a:rPr>
+              <a:t>AI เขียนกฎให้ — เราอ่านแล้วชี้บรรทัดสำคัญ</a:t>
+            </a:r>
+          </a:p>
+        </p:txBody>
+      </p:sp>
+      <p:sp>
+        <p:nvSpPr>
+          <p:cNvPr id="3" name="Rounded Rectangle 2"/>
+          <p:cNvSpPr/>
+          <p:nvPr/>
+        </p:nvSpPr>
+        <p:spPr>
+          <a:xfrm>
+            <a:off x="822960" y="2075688"/>
+            <a:ext cx="10545775" cy="1847088"/>
+          </a:xfrm>
+          <a:prstGeom prst="roundRect">
+            <a:avLst/>
+          </a:prstGeom>
+          <a:solidFill>
+            <a:srgbClr val="FFF7E6"/>
+          </a:solidFill>
+          <a:ln w="22225">
+            <a:solidFill>
+              <a:srgbClr val="E0A02C"/>
+            </a:solidFill>
+          </a:ln>
+          <a:effectLst/>
+        </p:spPr>
+        <p:style>
+          <a:lnRef idx="1">
+            <a:schemeClr val="accent1"/>
+          </a:lnRef>
+          <a:fillRef idx="3">
+            <a:schemeClr val="accent1"/>
+          </a:fillRef>
+          <a:effectRef idx="2">
+            <a:schemeClr val="accent1"/>
+          </a:effectRef>
+          <a:fontRef idx="minor">
+            <a:schemeClr val="lt1"/>
+          </a:fontRef>
+        </p:style>
+        <p:txBody>
+          <a:bodyPr rtlCol="0" anchor="ctr"/>
+          <a:lstStyle/>
+          <a:p/>
+        </p:txBody>
+      </p:sp>
+      <p:sp>
+        <p:nvSpPr>
+          <p:cNvPr id="4" name="Rounded Rectangle 3"/>
+          <p:cNvSpPr/>
+          <p:nvPr/>
+        </p:nvSpPr>
+        <p:spPr>
+          <a:xfrm>
+            <a:off x="822960" y="2075688"/>
+            <a:ext cx="100584" cy="1847088"/>
+          </a:xfrm>
+          <a:prstGeom prst="roundRect">
+            <a:avLst/>
+          </a:prstGeom>
+          <a:solidFill>
+            <a:srgbClr val="E0A02C"/>
+          </a:solidFill>
+          <a:ln>
+            <a:noFill/>
+          </a:ln>
+          <a:effectLst/>
+        </p:spPr>
+        <p:style>
+          <a:lnRef idx="1">
+            <a:schemeClr val="accent1"/>
+          </a:lnRef>
+          <a:fillRef idx="3">
+            <a:schemeClr val="accent1"/>
+          </a:fillRef>
+          <a:effectRef idx="2">
+            <a:schemeClr val="accent1"/>
+          </a:effectRef>
+          <a:fontRef idx="minor">
+            <a:schemeClr val="lt1"/>
+          </a:fontRef>
+        </p:style>
+        <p:txBody>
+          <a:bodyPr rtlCol="0" anchor="ctr"/>
           <a:lstStyle/>
           <a:p>
             <a:pPr algn="ctr"/>
-            <a:r>
-              <a:rPr sz="5400" b="1">
-                <a:solidFill>
-                  <a:srgbClr val="1F5FA8"/>
-                </a:solidFill>
-                <a:latin typeface="Leelawadee UI"/>
-                <a:ea typeface="Leelawadee UI"/>
-                <a:cs typeface="Leelawadee UI"/>
-              </a:rPr>
-              <a:t>ยังไม่ปลอดภัยจริง — ใครสมัครก็เข้าได้</a:t>
-            </a:r>
-          </a:p>
-        </p:txBody>
-      </p:sp>
-      <p:sp>
-        <p:nvSpPr>
-          <p:cNvPr id="3" name="TextBox 2"/>
+          </a:p>
+        </p:txBody>
+      </p:sp>
+      <p:sp>
+        <p:nvSpPr>
+          <p:cNvPr id="5" name="TextBox 4"/>
+          <p:cNvSpPr txBox="1"/>
+          <p:nvPr/>
+        </p:nvSpPr>
+        <p:spPr>
+          <a:xfrm>
+            <a:off x="1097280" y="2130552"/>
+            <a:ext cx="10088575" cy="310896"/>
+          </a:xfrm>
+          <a:prstGeom prst="rect">
+            <a:avLst/>
+          </a:prstGeom>
+          <a:noFill/>
+        </p:spPr>
+        <p:txBody>
+          <a:bodyPr wrap="square">
+            <a:spAutoFit/>
+          </a:bodyPr>
+          <a:lstStyle/>
+          <a:p>
+            <a:pPr algn="l"/>
+            <a:r>
+              <a:rPr sz="1400" b="1">
+                <a:solidFill>
+                  <a:srgbClr val="A86C0A"/>
+                </a:solidFill>
+                <a:latin typeface="Leelawadee UI"/>
+                <a:ea typeface="Leelawadee UI"/>
+                <a:cs typeface="Leelawadee UI"/>
+              </a:rPr>
+              <a:t>💬 สั่งแบบนี้</a:t>
+            </a:r>
+          </a:p>
+        </p:txBody>
+      </p:sp>
+      <p:sp>
+        <p:nvSpPr>
+          <p:cNvPr id="6" name="TextBox 5"/>
+          <p:cNvSpPr txBox="1"/>
+          <p:nvPr/>
+        </p:nvSpPr>
+        <p:spPr>
+          <a:xfrm>
+            <a:off x="1097280" y="2459736"/>
+            <a:ext cx="10088575" cy="1152144"/>
+          </a:xfrm>
+          <a:prstGeom prst="rect">
+            <a:avLst/>
+          </a:prstGeom>
+          <a:noFill/>
+        </p:spPr>
+        <p:txBody>
+          <a:bodyPr wrap="square">
+            <a:spAutoFit/>
+          </a:bodyPr>
+          <a:lstStyle/>
+          <a:p>
+            <a:pPr algn="l">
+              <a:spcAft>
+                <a:spcPts val="0"/>
+              </a:spcAft>
+            </a:pPr>
+            <a:r>
+              <a:rPr sz="2000" b="0">
+                <a:solidFill>
+                  <a:srgbClr val="1A1A1A"/>
+                </a:solidFill>
+                <a:latin typeface="Leelawadee UI"/>
+                <a:ea typeface="Leelawadee UI"/>
+                <a:cs typeface="Leelawadee UI"/>
+              </a:rPr>
+              <a:t>ช่วยเขียน Security Rules ของ Firestore ให้ 1 ข้อ</a:t>
+            </a:r>
+          </a:p>
+          <a:p>
+            <a:pPr algn="l">
+              <a:spcAft>
+                <a:spcPts val="0"/>
+              </a:spcAft>
+            </a:pPr>
+            <a:r>
+              <a:rPr sz="2000" b="0">
+                <a:solidFill>
+                  <a:srgbClr val="1A1A1A"/>
+                </a:solidFill>
+                <a:latin typeface="Leelawadee UI"/>
+                <a:ea typeface="Leelawadee UI"/>
+                <a:cs typeface="Leelawadee UI"/>
+              </a:rPr>
+              <a:t>ต้องล็อกอินก่อน ถึงอ่านหรือเขียนได้ ทุกโฟลเดอร์</a:t>
+            </a:r>
+          </a:p>
+          <a:p>
+            <a:pPr algn="l">
+              <a:spcAft>
+                <a:spcPts val="0"/>
+              </a:spcAft>
+            </a:pPr>
+            <a:r>
+              <a:rPr sz="2000" b="0">
+                <a:solidFill>
+                  <a:srgbClr val="1A1A1A"/>
+                </a:solidFill>
+                <a:latin typeface="Leelawadee UI"/>
+                <a:ea typeface="Leelawadee UI"/>
+                <a:cs typeface="Leelawadee UI"/>
+              </a:rPr>
+              <a:t>เขียนเสร็จให้ผมอ่านก่อน แล้วบอกวิธี deploy กฎ</a:t>
+            </a:r>
+          </a:p>
+        </p:txBody>
+      </p:sp>
+      <p:sp>
+        <p:nvSpPr>
+          <p:cNvPr id="7" name="TextBox 6"/>
+          <p:cNvSpPr txBox="1"/>
+          <p:nvPr/>
+        </p:nvSpPr>
+        <p:spPr>
+          <a:xfrm>
+            <a:off x="822960" y="4123944"/>
+            <a:ext cx="10545775" cy="1029208"/>
+          </a:xfrm>
+          <a:prstGeom prst="rect">
+            <a:avLst/>
+          </a:prstGeom>
+          <a:noFill/>
+        </p:spPr>
+        <p:txBody>
+          <a:bodyPr wrap="square">
+            <a:spAutoFit/>
+          </a:bodyPr>
+          <a:lstStyle/>
+          <a:p>
+            <a:pPr algn="l"/>
+            <a:r>
+              <a:rPr sz="2600" b="0">
+                <a:solidFill>
+                  <a:srgbClr val="1A1A1A"/>
+                </a:solidFill>
+                <a:latin typeface="Leelawadee UI"/>
+                <a:ea typeface="Leelawadee UI"/>
+                <a:cs typeface="Leelawadee UI"/>
+              </a:rPr>
+              <a:t>• อ่านแล้วชี้ให้ได้ว่าบรรทัดไหนแปลว่า "ต้องล็อกอินก่อน"</a:t>
+            </a:r>
+          </a:p>
+        </p:txBody>
+      </p:sp>
+      <p:sp>
+        <p:nvSpPr>
+          <p:cNvPr id="8" name="TextBox 7"/>
+          <p:cNvSpPr txBox="1"/>
+          <p:nvPr/>
+        </p:nvSpPr>
+        <p:spPr>
+          <a:xfrm>
+            <a:off x="822960" y="5208016"/>
+            <a:ext cx="10545775" cy="560324"/>
+          </a:xfrm>
+          <a:prstGeom prst="rect">
+            <a:avLst/>
+          </a:prstGeom>
+          <a:noFill/>
+        </p:spPr>
+        <p:txBody>
+          <a:bodyPr wrap="square">
+            <a:spAutoFit/>
+          </a:bodyPr>
+          <a:lstStyle/>
+          <a:p>
+            <a:pPr algn="l"/>
+            <a:r>
+              <a:rPr sz="2600" b="0">
+                <a:solidFill>
+                  <a:srgbClr val="1A1A1A"/>
+                </a:solidFill>
+                <a:latin typeface="Leelawadee UI"/>
+                <a:ea typeface="Leelawadee UI"/>
+                <a:cs typeface="Leelawadee UI"/>
+              </a:rPr>
+              <a:t>• ไม่ต้องเข้าใจไวยากรณ์ทุกตัว — เข้าใจใจความพอ</a:t>
+            </a:r>
+          </a:p>
+        </p:txBody>
+      </p:sp>
+      <p:sp>
+        <p:nvSpPr>
+          <p:cNvPr id="9" name="TextBox 8"/>
           <p:cNvSpPr txBox="1"/>
           <p:nvPr/>
         </p:nvSpPr>
@@ -17246,44 +17836,38 @@
       <p:grpSpPr/>
       <p:sp>
         <p:nvSpPr>
-          <p:cNvPr id="2" name="Rectangle 1"/>
-          <p:cNvSpPr/>
-          <p:nvPr/>
-        </p:nvSpPr>
-        <p:spPr>
-          <a:xfrm>
-            <a:off x="0" y="0"/>
-            <a:ext cx="12191695" cy="6858000"/>
-          </a:xfrm>
-          <a:prstGeom prst="rect">
-            <a:avLst/>
-          </a:prstGeom>
-          <a:solidFill>
-            <a:srgbClr val="1F5FA8"/>
-          </a:solidFill>
-          <a:ln>
-            <a:noFill/>
-          </a:ln>
-        </p:spPr>
-        <p:style>
-          <a:lnRef idx="1">
-            <a:schemeClr val="accent1"/>
-          </a:lnRef>
-          <a:fillRef idx="3">
-            <a:schemeClr val="accent1"/>
-          </a:fillRef>
-          <a:effectRef idx="2">
-            <a:schemeClr val="accent1"/>
-          </a:effectRef>
-          <a:fontRef idx="minor">
-            <a:schemeClr val="lt1"/>
-          </a:fontRef>
-        </p:style>
-        <p:txBody>
-          <a:bodyPr rtlCol="0" anchor="ctr"/>
-          <a:lstStyle/>
-          <a:p>
-            <a:pPr algn="ctr"/>
+          <p:cNvPr id="2" name="TextBox 1"/>
+          <p:cNvSpPr txBox="1"/>
+          <p:nvPr/>
+        </p:nvSpPr>
+        <p:spPr>
+          <a:xfrm>
+            <a:off x="822960" y="502920"/>
+            <a:ext cx="10545775" cy="804672"/>
+          </a:xfrm>
+          <a:prstGeom prst="rect">
+            <a:avLst/>
+          </a:prstGeom>
+          <a:noFill/>
+        </p:spPr>
+        <p:txBody>
+          <a:bodyPr wrap="square">
+            <a:spAutoFit/>
+          </a:bodyPr>
+          <a:lstStyle/>
+          <a:p>
+            <a:pPr algn="l"/>
+            <a:r>
+              <a:rPr sz="3600" b="1">
+                <a:solidFill>
+                  <a:srgbClr val="1F5FA8"/>
+                </a:solidFill>
+                <a:latin typeface="Leelawadee UI"/>
+                <a:ea typeface="Leelawadee UI"/>
+                <a:cs typeface="Leelawadee UI"/>
+              </a:rPr>
+              <a:t>ทดสอบว่ากันได้จริง — หน้าต่างไม่ล็อกอิน</a:t>
+            </a:r>
           </a:p>
         </p:txBody>
       </p:sp>
@@ -17295,31 +17879,31 @@
         </p:nvSpPr>
         <p:spPr>
           <a:xfrm>
-            <a:off x="822960" y="2743200"/>
-            <a:ext cx="10545775" cy="1463040"/>
-          </a:xfrm>
-          <a:prstGeom prst="rect">
-            <a:avLst/>
-          </a:prstGeom>
-          <a:noFill/>
-        </p:spPr>
-        <p:txBody>
-          <a:bodyPr wrap="square" anchor="ctr">
-            <a:spAutoFit/>
-          </a:bodyPr>
-          <a:lstStyle/>
-          <a:p>
-            <a:pPr algn="ctr"/>
-            <a:r>
-              <a:rPr sz="4000" b="1">
-                <a:solidFill>
-                  <a:srgbClr val="FFFFFF"/>
-                </a:solidFill>
-                <a:latin typeface="Leelawadee UI"/>
-                <a:ea typeface="Leelawadee UI"/>
-                <a:cs typeface="Leelawadee UI"/>
-              </a:rPr>
-              <a:t>ช่วงที่ 5 — 👥 Git เมื่อโค้ดอยู่สองที่ ⭐ ⏱ 11:10–11:22</a:t>
+            <a:off x="822960" y="1472184"/>
+            <a:ext cx="10545775" cy="560324"/>
+          </a:xfrm>
+          <a:prstGeom prst="rect">
+            <a:avLst/>
+          </a:prstGeom>
+          <a:noFill/>
+        </p:spPr>
+        <p:txBody>
+          <a:bodyPr wrap="square">
+            <a:spAutoFit/>
+          </a:bodyPr>
+          <a:lstStyle/>
+          <a:p>
+            <a:pPr algn="l"/>
+            <a:r>
+              <a:rPr sz="2600" b="0">
+                <a:solidFill>
+                  <a:srgbClr val="1A1A1A"/>
+                </a:solidFill>
+                <a:latin typeface="Leelawadee UI"/>
+                <a:ea typeface="Leelawadee UI"/>
+                <a:cs typeface="Leelawadee UI"/>
+              </a:rPr>
+              <a:t>• เปิดหน้าต่างไม่ระบุตัวตน (incognito) = คนแปลกหน้า</a:t>
             </a:r>
           </a:p>
         </p:txBody>
@@ -17327,6 +17911,117 @@
       <p:sp>
         <p:nvSpPr>
           <p:cNvPr id="4" name="TextBox 3"/>
+          <p:cNvSpPr txBox="1"/>
+          <p:nvPr/>
+        </p:nvSpPr>
+        <p:spPr>
+          <a:xfrm>
+            <a:off x="822960" y="2087372"/>
+            <a:ext cx="10545775" cy="560324"/>
+          </a:xfrm>
+          <a:prstGeom prst="rect">
+            <a:avLst/>
+          </a:prstGeom>
+          <a:noFill/>
+        </p:spPr>
+        <p:txBody>
+          <a:bodyPr wrap="square">
+            <a:spAutoFit/>
+          </a:bodyPr>
+          <a:lstStyle/>
+          <a:p>
+            <a:pPr algn="l"/>
+            <a:r>
+              <a:rPr sz="2600" b="0">
+                <a:solidFill>
+                  <a:srgbClr val="1A1A1A"/>
+                </a:solidFill>
+                <a:latin typeface="Leelawadee UI"/>
+                <a:ea typeface="Leelawadee UI"/>
+                <a:cs typeface="Leelawadee UI"/>
+              </a:rPr>
+              <a:t>• ก่อนใส่กฎ: อ่านข้อมูลได้ ← นี่คือปัญหา</a:t>
+            </a:r>
+          </a:p>
+        </p:txBody>
+      </p:sp>
+      <p:sp>
+        <p:nvSpPr>
+          <p:cNvPr id="5" name="TextBox 4"/>
+          <p:cNvSpPr txBox="1"/>
+          <p:nvPr/>
+        </p:nvSpPr>
+        <p:spPr>
+          <a:xfrm>
+            <a:off x="822960" y="2702560"/>
+            <a:ext cx="10545775" cy="560324"/>
+          </a:xfrm>
+          <a:prstGeom prst="rect">
+            <a:avLst/>
+          </a:prstGeom>
+          <a:noFill/>
+        </p:spPr>
+        <p:txBody>
+          <a:bodyPr wrap="square">
+            <a:spAutoFit/>
+          </a:bodyPr>
+          <a:lstStyle/>
+          <a:p>
+            <a:pPr algn="l"/>
+            <a:r>
+              <a:rPr sz="2600" b="0">
+                <a:solidFill>
+                  <a:srgbClr val="1A1A1A"/>
+                </a:solidFill>
+                <a:latin typeface="Leelawadee UI"/>
+                <a:ea typeface="Leelawadee UI"/>
+                <a:cs typeface="Leelawadee UI"/>
+              </a:rPr>
+              <a:t>• หลังใส่กฎ: ต้องอ่านไม่ได้เลย</a:t>
+            </a:r>
+          </a:p>
+        </p:txBody>
+      </p:sp>
+      <p:sp>
+        <p:nvSpPr>
+          <p:cNvPr id="6" name="TextBox 5"/>
+          <p:cNvSpPr txBox="1"/>
+          <p:nvPr/>
+        </p:nvSpPr>
+        <p:spPr>
+          <a:xfrm>
+            <a:off x="822960" y="3317748"/>
+            <a:ext cx="10545775" cy="560324"/>
+          </a:xfrm>
+          <a:prstGeom prst="rect">
+            <a:avLst/>
+          </a:prstGeom>
+          <a:noFill/>
+        </p:spPr>
+        <p:txBody>
+          <a:bodyPr wrap="square">
+            <a:spAutoFit/>
+          </a:bodyPr>
+          <a:lstStyle/>
+          <a:p>
+            <a:pPr algn="l"/>
+            <a:r>
+              <a:rPr sz="2600" b="0">
+                <a:solidFill>
+                  <a:srgbClr val="1A1A1A"/>
+                </a:solidFill>
+                <a:latin typeface="Leelawadee UI"/>
+                <a:ea typeface="Leelawadee UI"/>
+                <a:cs typeface="Leelawadee UI"/>
+              </a:rPr>
+              <a:t>• ล็อกอินแล้วต้องใช้งานได้ปกติเหมือนเดิม</a:t>
+            </a:r>
+          </a:p>
+        </p:txBody>
+      </p:sp>
+      <p:sp>
+        <p:nvSpPr>
+          <p:cNvPr id="7" name="TextBox 6"/>
           <p:cNvSpPr txBox="1"/>
           <p:nvPr/>
         </p:nvSpPr>
@@ -17380,7 +18075,130 @@
       <p:grpSpPr/>
       <p:sp>
         <p:nvSpPr>
-          <p:cNvPr id="2" name="TextBox 1"/>
+          <p:cNvPr id="2" name="Rectangle 1"/>
+          <p:cNvSpPr/>
+          <p:nvPr/>
+        </p:nvSpPr>
+        <p:spPr>
+          <a:xfrm>
+            <a:off x="0" y="0"/>
+            <a:ext cx="12191695" cy="6858000"/>
+          </a:xfrm>
+          <a:prstGeom prst="rect">
+            <a:avLst/>
+          </a:prstGeom>
+          <a:solidFill>
+            <a:srgbClr val="FFF3DF"/>
+          </a:solidFill>
+          <a:ln>
+            <a:noFill/>
+          </a:ln>
+        </p:spPr>
+        <p:style>
+          <a:lnRef idx="1">
+            <a:schemeClr val="accent1"/>
+          </a:lnRef>
+          <a:fillRef idx="3">
+            <a:schemeClr val="accent1"/>
+          </a:fillRef>
+          <a:effectRef idx="2">
+            <a:schemeClr val="accent1"/>
+          </a:effectRef>
+          <a:fontRef idx="minor">
+            <a:schemeClr val="lt1"/>
+          </a:fontRef>
+        </p:style>
+        <p:txBody>
+          <a:bodyPr rtlCol="0" anchor="ctr"/>
+          <a:lstStyle/>
+          <a:p>
+            <a:pPr algn="ctr"/>
+          </a:p>
+        </p:txBody>
+      </p:sp>
+      <p:sp>
+        <p:nvSpPr>
+          <p:cNvPr id="3" name="Rectangle 2"/>
+          <p:cNvSpPr/>
+          <p:nvPr/>
+        </p:nvSpPr>
+        <p:spPr>
+          <a:xfrm>
+            <a:off x="0" y="0"/>
+            <a:ext cx="146304" cy="6858000"/>
+          </a:xfrm>
+          <a:prstGeom prst="rect">
+            <a:avLst/>
+          </a:prstGeom>
+          <a:solidFill>
+            <a:srgbClr val="E0A02C"/>
+          </a:solidFill>
+          <a:ln>
+            <a:noFill/>
+          </a:ln>
+        </p:spPr>
+        <p:style>
+          <a:lnRef idx="1">
+            <a:schemeClr val="accent1"/>
+          </a:lnRef>
+          <a:fillRef idx="3">
+            <a:schemeClr val="accent1"/>
+          </a:fillRef>
+          <a:effectRef idx="2">
+            <a:schemeClr val="accent1"/>
+          </a:effectRef>
+          <a:fontRef idx="minor">
+            <a:schemeClr val="lt1"/>
+          </a:fontRef>
+        </p:style>
+        <p:txBody>
+          <a:bodyPr rtlCol="0" anchor="ctr"/>
+          <a:lstStyle/>
+          <a:p>
+            <a:pPr algn="ctr"/>
+          </a:p>
+        </p:txBody>
+      </p:sp>
+      <p:sp>
+        <p:nvSpPr>
+          <p:cNvPr id="4" name="TextBox 3"/>
+          <p:cNvSpPr txBox="1"/>
+          <p:nvPr/>
+        </p:nvSpPr>
+        <p:spPr>
+          <a:xfrm>
+            <a:off x="9082735" y="109728"/>
+            <a:ext cx="2834640" cy="384048"/>
+          </a:xfrm>
+          <a:prstGeom prst="rect">
+            <a:avLst/>
+          </a:prstGeom>
+          <a:noFill/>
+        </p:spPr>
+        <p:txBody>
+          <a:bodyPr wrap="square">
+            <a:spAutoFit/>
+          </a:bodyPr>
+          <a:lstStyle/>
+          <a:p>
+            <a:pPr algn="r"/>
+            <a:r>
+              <a:rPr sz="1400" b="1">
+                <a:solidFill>
+                  <a:srgbClr val="8A5400"/>
+                </a:solidFill>
+                <a:latin typeface="Leelawadee UI"/>
+                <a:ea typeface="Leelawadee UI"/>
+                <a:cs typeface="Leelawadee UI"/>
+              </a:rPr>
+              <a:t>🎬 สลับไปหน้าจอสาธิตสด</a:t>
+            </a:r>
+          </a:p>
+        </p:txBody>
+      </p:sp>
+      <p:sp>
+        <p:nvSpPr>
+          <p:cNvPr id="5" name="TextBox 4"/>
           <p:cNvSpPr txBox="1"/>
           <p:nvPr/>
         </p:nvSpPr>
@@ -17404,20 +18222,20 @@
             <a:r>
               <a:rPr sz="3600" b="1">
                 <a:solidFill>
-                  <a:srgbClr val="1F5FA8"/>
-                </a:solidFill>
-                <a:latin typeface="Leelawadee UI"/>
-                <a:ea typeface="Leelawadee UI"/>
-                <a:cs typeface="Leelawadee UI"/>
-              </a:rPr>
-              <a:t>บ่ายนี้โค้ดของคุณขึ้น GitHub เป็นครั้งแรก</a:t>
-            </a:r>
-          </a:p>
-        </p:txBody>
-      </p:sp>
-      <p:sp>
-        <p:nvSpPr>
-          <p:cNvPr id="3" name="TextBox 2"/>
+                  <a:srgbClr val="8A5400"/>
+                </a:solidFill>
+                <a:latin typeface="Leelawadee UI"/>
+                <a:ea typeface="Leelawadee UI"/>
+                <a:cs typeface="Leelawadee UI"/>
+              </a:rPr>
+              <a:t>🎬💥 สาธิต — ใส่กฎ แล้วเจอ permission denied ⏱ 7 นาที</a:t>
+            </a:r>
+          </a:p>
+        </p:txBody>
+      </p:sp>
+      <p:sp>
+        <p:nvSpPr>
+          <p:cNvPr id="6" name="TextBox 5"/>
           <p:cNvSpPr txBox="1"/>
           <p:nvPr/>
         </p:nvSpPr>
@@ -17447,20 +18265,57 @@
                 <a:ea typeface="Leelawadee UI"/>
                 <a:cs typeface="Leelawadee UI"/>
               </a:rPr>
-              <a:t>• บ่ายนี้โค้ดของคุณจะขึ้น GitHub — ที่เก็บงานบนอินเทอร์เน็ต</a:t>
-            </a:r>
-          </a:p>
-        </p:txBody>
-      </p:sp>
-      <p:sp>
-        <p:nvSpPr>
-          <p:cNvPr id="4" name="TextBox 3"/>
+              <a:t>• ใส่กฎ → deploy → รีเฟรช → หน้าหลักพังทั้งที่ล็อกอินอยู่</a:t>
+            </a:r>
+          </a:p>
+        </p:txBody>
+      </p:sp>
+      <p:sp>
+        <p:nvSpPr>
+          <p:cNvPr id="7" name="TextBox 6"/>
           <p:cNvSpPr txBox="1"/>
           <p:nvPr/>
         </p:nvSpPr>
         <p:spPr>
           <a:xfrm>
             <a:off x="822960" y="3159760"/>
+            <a:ext cx="10545775" cy="1029208"/>
+          </a:xfrm>
+          <a:prstGeom prst="rect">
+            <a:avLst/>
+          </a:prstGeom>
+          <a:noFill/>
+        </p:spPr>
+        <p:txBody>
+          <a:bodyPr wrap="square">
+            <a:spAutoFit/>
+          </a:bodyPr>
+          <a:lstStyle/>
+          <a:p>
+            <a:pPr algn="l"/>
+            <a:r>
+              <a:rPr sz="2600" b="0">
+                <a:solidFill>
+                  <a:srgbClr val="1A1A1A"/>
+                </a:solidFill>
+                <a:latin typeface="Leelawadee UI"/>
+                <a:ea typeface="Leelawadee UI"/>
+                <a:cs typeface="Leelawadee UI"/>
+              </a:rPr>
+              <a:t>• อาการนี้ปกติมาก — หน้าเว็บอ่านข้อมูลก่อนสถานะล็อกอินพร้อม</a:t>
+            </a:r>
+          </a:p>
+        </p:txBody>
+      </p:sp>
+      <p:sp>
+        <p:nvSpPr>
+          <p:cNvPr id="8" name="TextBox 7"/>
+          <p:cNvSpPr txBox="1"/>
+          <p:nvPr/>
+        </p:nvSpPr>
+        <p:spPr>
+          <a:xfrm>
+            <a:off x="822960" y="4243832"/>
             <a:ext cx="10545775" cy="560324"/>
           </a:xfrm>
           <a:prstGeom prst="rect">
@@ -17484,51 +18339,14 @@
                 <a:ea typeface="Leelawadee UI"/>
                 <a:cs typeface="Leelawadee UI"/>
               </a:rPr>
-              <a:t>• 🤖 คำสั่ง git ทั้งหมด ให้ Claude ทำให้ — ไม่ต้องท่อง</a:t>
-            </a:r>
-          </a:p>
-        </p:txBody>
-      </p:sp>
-      <p:sp>
-        <p:nvSpPr>
-          <p:cNvPr id="5" name="TextBox 4"/>
-          <p:cNvSpPr txBox="1"/>
-          <p:nvPr/>
-        </p:nvSpPr>
-        <p:spPr>
-          <a:xfrm>
-            <a:off x="822960" y="3774948"/>
-            <a:ext cx="10545775" cy="1029208"/>
-          </a:xfrm>
-          <a:prstGeom prst="rect">
-            <a:avLst/>
-          </a:prstGeom>
-          <a:noFill/>
-        </p:spPr>
-        <p:txBody>
-          <a:bodyPr wrap="square">
-            <a:spAutoFit/>
-          </a:bodyPr>
-          <a:lstStyle/>
-          <a:p>
-            <a:pPr algn="l"/>
-            <a:r>
-              <a:rPr sz="2600" b="0">
-                <a:solidFill>
-                  <a:srgbClr val="1A1A1A"/>
-                </a:solidFill>
-                <a:latin typeface="Leelawadee UI"/>
-                <a:ea typeface="Leelawadee UI"/>
-                <a:cs typeface="Leelawadee UI"/>
-              </a:rPr>
-              <a:t>• 👤 แต่ commit ต้องเป็นชื่อคุณ — สัปดาห์นี้เริ่มนับจริง</a:t>
-            </a:r>
-          </a:p>
-        </p:txBody>
-      </p:sp>
-      <p:sp>
-        <p:nvSpPr>
-          <p:cNvPr id="6" name="TextBox 5"/>
+              <a:t>• แก้: ให้รอสถานะล็อกอินพร้อมก่อน แล้วค่อยอ่าน</a:t>
+            </a:r>
+          </a:p>
+        </p:txBody>
+      </p:sp>
+      <p:sp>
+        <p:nvSpPr>
+          <p:cNvPr id="9" name="TextBox 8"/>
           <p:cNvSpPr txBox="1"/>
           <p:nvPr/>
         </p:nvSpPr>
@@ -17558,14 +18376,14 @@
                 <a:ea typeface="Leelawadee UI"/>
                 <a:cs typeface="Leelawadee UI"/>
               </a:rPr>
-              <a:t>• ไม่มี commit เลยทั้ง Module = ไม่ผ่าน</a:t>
-            </a:r>
-          </a:p>
-        </p:txBody>
-      </p:sp>
-      <p:sp>
-        <p:nvSpPr>
-          <p:cNvPr id="7" name="TextBox 6"/>
+              <a:t>• ปิดท้าย: หน้าต่างไม่ล็อกอิน → อ่านไม่ได้จริง ✅</a:t>
+            </a:r>
+          </a:p>
+        </p:txBody>
+      </p:sp>
+      <p:sp>
+        <p:nvSpPr>
+          <p:cNvPr id="10" name="TextBox 9"/>
           <p:cNvSpPr txBox="1"/>
           <p:nvPr/>
         </p:nvSpPr>
@@ -17625,23 +18443,23 @@
         </p:nvSpPr>
         <p:spPr>
           <a:xfrm>
-            <a:off x="822960" y="502920"/>
-            <a:ext cx="10545775" cy="804672"/>
-          </a:xfrm>
-          <a:prstGeom prst="rect">
-            <a:avLst/>
-          </a:prstGeom>
-          <a:noFill/>
-        </p:spPr>
-        <p:txBody>
-          <a:bodyPr wrap="square">
-            <a:spAutoFit/>
-          </a:bodyPr>
-          <a:lstStyle/>
-          <a:p>
-            <a:pPr algn="l"/>
-            <a:r>
-              <a:rPr sz="3600" b="1">
+            <a:off x="822960" y="2011680"/>
+            <a:ext cx="10545775" cy="2743200"/>
+          </a:xfrm>
+          <a:prstGeom prst="rect">
+            <a:avLst/>
+          </a:prstGeom>
+          <a:noFill/>
+        </p:spPr>
+        <p:txBody>
+          <a:bodyPr wrap="square" anchor="ctr">
+            <a:spAutoFit/>
+          </a:bodyPr>
+          <a:lstStyle/>
+          <a:p>
+            <a:pPr algn="ctr"/>
+            <a:r>
+              <a:rPr sz="5400" b="1">
                 <a:solidFill>
                   <a:srgbClr val="1F5FA8"/>
                 </a:solidFill>
@@ -17649,7 +18467,7 @@
                 <a:ea typeface="Leelawadee UI"/>
                 <a:cs typeface="Leelawadee UI"/>
               </a:rPr>
-              <a:t>3 อย่างที่ AI ทำแทนคุณไม่ได้</a:t>
+              <a:t>ยังไม่ปลอดภัยจริง — ใครสมัครก็เข้าได้</a:t>
             </a:r>
           </a:p>
         </p:txBody>
@@ -17657,117 +18475,6 @@
       <p:sp>
         <p:nvSpPr>
           <p:cNvPr id="3" name="TextBox 2"/>
-          <p:cNvSpPr txBox="1"/>
-          <p:nvPr/>
-        </p:nvSpPr>
-        <p:spPr>
-          <a:xfrm>
-            <a:off x="822960" y="1472184"/>
-            <a:ext cx="10545775" cy="1029208"/>
-          </a:xfrm>
-          <a:prstGeom prst="rect">
-            <a:avLst/>
-          </a:prstGeom>
-          <a:noFill/>
-        </p:spPr>
-        <p:txBody>
-          <a:bodyPr wrap="square">
-            <a:spAutoFit/>
-          </a:bodyPr>
-          <a:lstStyle/>
-          <a:p>
-            <a:pPr algn="l"/>
-            <a:r>
-              <a:rPr sz="2600" b="0">
-                <a:solidFill>
-                  <a:srgbClr val="1A1A1A"/>
-                </a:solidFill>
-                <a:latin typeface="Leelawadee UI"/>
-                <a:ea typeface="Leelawadee UI"/>
-                <a:cs typeface="Leelawadee UI"/>
-              </a:rPr>
-              <a:t>• 1️⃣ บอกว่าเมื่อไรควร commit — AI ไม่รู้ว่าตรงไหนคือ "ใช้ได้แล้ว"</a:t>
-            </a:r>
-          </a:p>
-        </p:txBody>
-      </p:sp>
-      <p:sp>
-        <p:nvSpPr>
-          <p:cNvPr id="4" name="TextBox 3"/>
-          <p:cNvSpPr txBox="1"/>
-          <p:nvPr/>
-        </p:nvSpPr>
-        <p:spPr>
-          <a:xfrm>
-            <a:off x="822960" y="2556256"/>
-            <a:ext cx="10545775" cy="1029208"/>
-          </a:xfrm>
-          <a:prstGeom prst="rect">
-            <a:avLst/>
-          </a:prstGeom>
-          <a:noFill/>
-        </p:spPr>
-        <p:txBody>
-          <a:bodyPr wrap="square">
-            <a:spAutoFit/>
-          </a:bodyPr>
-          <a:lstStyle/>
-          <a:p>
-            <a:pPr algn="l"/>
-            <a:r>
-              <a:rPr sz="2600" b="0">
-                <a:solidFill>
-                  <a:srgbClr val="1A1A1A"/>
-                </a:solidFill>
-                <a:latin typeface="Leelawadee UI"/>
-                <a:ea typeface="Leelawadee UI"/>
-                <a:cs typeface="Leelawadee UI"/>
-              </a:rPr>
-              <a:t>• 2️⃣ .gitignore ก่อน push — เป็นการตัดสินใจ ไม่ใช่คำสั่ง</a:t>
-            </a:r>
-          </a:p>
-        </p:txBody>
-      </p:sp>
-      <p:sp>
-        <p:nvSpPr>
-          <p:cNvPr id="5" name="TextBox 4"/>
-          <p:cNvSpPr txBox="1"/>
-          <p:nvPr/>
-        </p:nvSpPr>
-        <p:spPr>
-          <a:xfrm>
-            <a:off x="822960" y="3640328"/>
-            <a:ext cx="10545775" cy="1029208"/>
-          </a:xfrm>
-          <a:prstGeom prst="rect">
-            <a:avLst/>
-          </a:prstGeom>
-          <a:noFill/>
-        </p:spPr>
-        <p:txBody>
-          <a:bodyPr wrap="square">
-            <a:spAutoFit/>
-          </a:bodyPr>
-          <a:lstStyle/>
-          <a:p>
-            <a:pPr algn="l"/>
-            <a:r>
-              <a:rPr sz="2600" b="0">
-                <a:solidFill>
-                  <a:srgbClr val="1A1A1A"/>
-                </a:solidFill>
-                <a:latin typeface="Leelawadee UI"/>
-                <a:ea typeface="Leelawadee UI"/>
-                <a:cs typeface="Leelawadee UI"/>
-              </a:rPr>
-              <a:t>• 3️⃣ สังเกตว่าตอนนี้งานชนกันแล้ว — แล้วส่งให้ Claude แก้</a:t>
-            </a:r>
-          </a:p>
-        </p:txBody>
-      </p:sp>
-      <p:sp>
-        <p:nvSpPr>
-          <p:cNvPr id="6" name="TextBox 5"/>
           <p:cNvSpPr txBox="1"/>
           <p:nvPr/>
         </p:nvSpPr>
@@ -17821,38 +18528,44 @@
       <p:grpSpPr/>
       <p:sp>
         <p:nvSpPr>
-          <p:cNvPr id="2" name="TextBox 1"/>
-          <p:cNvSpPr txBox="1"/>
-          <p:nvPr/>
-        </p:nvSpPr>
-        <p:spPr>
-          <a:xfrm>
-            <a:off x="822960" y="502920"/>
-            <a:ext cx="10545775" cy="1408176"/>
-          </a:xfrm>
-          <a:prstGeom prst="rect">
-            <a:avLst/>
-          </a:prstGeom>
-          <a:noFill/>
-        </p:spPr>
-        <p:txBody>
-          <a:bodyPr wrap="square">
-            <a:spAutoFit/>
-          </a:bodyPr>
-          <a:lstStyle/>
-          <a:p>
-            <a:pPr algn="l"/>
-            <a:r>
-              <a:rPr sz="3600" b="1">
-                <a:solidFill>
-                  <a:srgbClr val="1F5FA8"/>
-                </a:solidFill>
-                <a:latin typeface="Leelawadee UI"/>
-                <a:ea typeface="Leelawadee UI"/>
-                <a:cs typeface="Leelawadee UI"/>
-              </a:rPr>
-              <a:t>ก่อน push ครั้งแรก — .gitignore ต้องมาก่อน</a:t>
-            </a:r>
+          <p:cNvPr id="2" name="Rectangle 1"/>
+          <p:cNvSpPr/>
+          <p:nvPr/>
+        </p:nvSpPr>
+        <p:spPr>
+          <a:xfrm>
+            <a:off x="0" y="0"/>
+            <a:ext cx="12191695" cy="6858000"/>
+          </a:xfrm>
+          <a:prstGeom prst="rect">
+            <a:avLst/>
+          </a:prstGeom>
+          <a:solidFill>
+            <a:srgbClr val="1F5FA8"/>
+          </a:solidFill>
+          <a:ln>
+            <a:noFill/>
+          </a:ln>
+        </p:spPr>
+        <p:style>
+          <a:lnRef idx="1">
+            <a:schemeClr val="accent1"/>
+          </a:lnRef>
+          <a:fillRef idx="3">
+            <a:schemeClr val="accent1"/>
+          </a:fillRef>
+          <a:effectRef idx="2">
+            <a:schemeClr val="accent1"/>
+          </a:effectRef>
+          <a:fontRef idx="minor">
+            <a:schemeClr val="lt1"/>
+          </a:fontRef>
+        </p:style>
+        <p:txBody>
+          <a:bodyPr rtlCol="0" anchor="ctr"/>
+          <a:lstStyle/>
+          <a:p>
+            <a:pPr algn="ctr"/>
           </a:p>
         </p:txBody>
       </p:sp>
@@ -17864,31 +18577,31 @@
         </p:nvSpPr>
         <p:spPr>
           <a:xfrm>
-            <a:off x="822960" y="2075688"/>
-            <a:ext cx="10545775" cy="560324"/>
-          </a:xfrm>
-          <a:prstGeom prst="rect">
-            <a:avLst/>
-          </a:prstGeom>
-          <a:noFill/>
-        </p:spPr>
-        <p:txBody>
-          <a:bodyPr wrap="square">
-            <a:spAutoFit/>
-          </a:bodyPr>
-          <a:lstStyle/>
-          <a:p>
-            <a:pPr algn="l"/>
-            <a:r>
-              <a:rPr sz="2600" b="0">
-                <a:solidFill>
-                  <a:srgbClr val="1A1A1A"/>
-                </a:solidFill>
-                <a:latin typeface="Leelawadee UI"/>
-                <a:ea typeface="Leelawadee UI"/>
-                <a:cs typeface="Leelawadee UI"/>
-              </a:rPr>
-              <a:t>• .gitignore = รายการไฟล์ที่ห้ามส่งขึ้น GitHub</a:t>
+            <a:off x="822960" y="2743200"/>
+            <a:ext cx="10545775" cy="1463040"/>
+          </a:xfrm>
+          <a:prstGeom prst="rect">
+            <a:avLst/>
+          </a:prstGeom>
+          <a:noFill/>
+        </p:spPr>
+        <p:txBody>
+          <a:bodyPr wrap="square" anchor="ctr">
+            <a:spAutoFit/>
+          </a:bodyPr>
+          <a:lstStyle/>
+          <a:p>
+            <a:pPr algn="ctr"/>
+            <a:r>
+              <a:rPr sz="4000" b="1">
+                <a:solidFill>
+                  <a:srgbClr val="FFFFFF"/>
+                </a:solidFill>
+                <a:latin typeface="Leelawadee UI"/>
+                <a:ea typeface="Leelawadee UI"/>
+                <a:cs typeface="Leelawadee UI"/>
+              </a:rPr>
+              <a:t>ช่วงที่ 5 — 👥 Git เมื่อโค้ดอยู่สองที่ ⭐ ⏱ 11:10–11:22</a:t>
             </a:r>
           </a:p>
         </p:txBody>
@@ -17896,117 +18609,6 @@
       <p:sp>
         <p:nvSpPr>
           <p:cNvPr id="4" name="TextBox 3"/>
-          <p:cNvSpPr txBox="1"/>
-          <p:nvPr/>
-        </p:nvSpPr>
-        <p:spPr>
-          <a:xfrm>
-            <a:off x="822960" y="2690876"/>
-            <a:ext cx="10545775" cy="1029208"/>
-          </a:xfrm>
-          <a:prstGeom prst="rect">
-            <a:avLst/>
-          </a:prstGeom>
-          <a:noFill/>
-        </p:spPr>
-        <p:txBody>
-          <a:bodyPr wrap="square">
-            <a:spAutoFit/>
-          </a:bodyPr>
-          <a:lstStyle/>
-          <a:p>
-            <a:pPr algn="l"/>
-            <a:r>
-              <a:rPr sz="2600" b="0">
-                <a:solidFill>
-                  <a:srgbClr val="1A1A1A"/>
-                </a:solidFill>
-                <a:latin typeface="Leelawadee UI"/>
-                <a:ea typeface="Leelawadee UI"/>
-                <a:cs typeface="Leelawadee UI"/>
-              </a:rPr>
-              <a:t>• ต้องกัน โฟลเดอร์ที่เครื่องมือสร้างเอง และไฟล์คีย์ทุกชนิด</a:t>
-            </a:r>
-          </a:p>
-        </p:txBody>
-      </p:sp>
-      <p:sp>
-        <p:nvSpPr>
-          <p:cNvPr id="5" name="TextBox 4"/>
-          <p:cNvSpPr txBox="1"/>
-          <p:nvPr/>
-        </p:nvSpPr>
-        <p:spPr>
-          <a:xfrm>
-            <a:off x="822960" y="3774948"/>
-            <a:ext cx="10545775" cy="1029208"/>
-          </a:xfrm>
-          <a:prstGeom prst="rect">
-            <a:avLst/>
-          </a:prstGeom>
-          <a:noFill/>
-        </p:spPr>
-        <p:txBody>
-          <a:bodyPr wrap="square">
-            <a:spAutoFit/>
-          </a:bodyPr>
-          <a:lstStyle/>
-          <a:p>
-            <a:pPr algn="l"/>
-            <a:r>
-              <a:rPr sz="2600" b="0">
-                <a:solidFill>
-                  <a:srgbClr val="1A1A1A"/>
-                </a:solidFill>
-                <a:latin typeface="Leelawadee UI"/>
-                <a:ea typeface="Leelawadee UI"/>
-                <a:cs typeface="Leelawadee UI"/>
-              </a:rPr>
-              <a:t>• ให้ AI สร้าง → สั่งให้มันแสดงรายการไฟล์ที่จะส่งขึ้นแล้วเราอ่านเอง</a:t>
-            </a:r>
-          </a:p>
-        </p:txBody>
-      </p:sp>
-      <p:sp>
-        <p:nvSpPr>
-          <p:cNvPr id="6" name="TextBox 5"/>
-          <p:cNvSpPr txBox="1"/>
-          <p:nvPr/>
-        </p:nvSpPr>
-        <p:spPr>
-          <a:xfrm>
-            <a:off x="822960" y="4859020"/>
-            <a:ext cx="10545775" cy="1029208"/>
-          </a:xfrm>
-          <a:prstGeom prst="rect">
-            <a:avLst/>
-          </a:prstGeom>
-          <a:noFill/>
-        </p:spPr>
-        <p:txBody>
-          <a:bodyPr wrap="square">
-            <a:spAutoFit/>
-          </a:bodyPr>
-          <a:lstStyle/>
-          <a:p>
-            <a:pPr algn="l"/>
-            <a:r>
-              <a:rPr sz="2600" b="0">
-                <a:solidFill>
-                  <a:srgbClr val="1A1A1A"/>
-                </a:solidFill>
-                <a:latin typeface="Leelawadee UI"/>
-                <a:ea typeface="Leelawadee UI"/>
-                <a:cs typeface="Leelawadee UI"/>
-              </a:rPr>
-              <a:t>• ลำดับสลับไม่ได้ — ของที่ขึ้นไปแล้ว มีคนคัดลอกได้ทันที</a:t>
-            </a:r>
-          </a:p>
-        </p:txBody>
-      </p:sp>
-      <p:sp>
-        <p:nvSpPr>
-          <p:cNvPr id="7" name="TextBox 6"/>
           <p:cNvSpPr txBox="1"/>
           <p:nvPr/>
         </p:nvSpPr>
@@ -18067,7 +18669,7 @@
         <p:spPr>
           <a:xfrm>
             <a:off x="822960" y="502920"/>
-            <a:ext cx="10545775" cy="804672"/>
+            <a:ext cx="10545775" cy="1408176"/>
           </a:xfrm>
           <a:prstGeom prst="rect">
             <a:avLst/>
@@ -18090,7 +18692,7 @@
                 <a:ea typeface="Leelawadee UI"/>
                 <a:cs typeface="Leelawadee UI"/>
               </a:rPr>
-              <a:t>ก่อนให้ AI แตะ git — commit ก่อนเสมอ</a:t>
+              <a:t>บ่ายนี้โค้ดของคุณขึ้น GitHub เป็นครั้งแรก</a:t>
             </a:r>
           </a:p>
         </p:txBody>
@@ -18103,7 +18705,44 @@
         </p:nvSpPr>
         <p:spPr>
           <a:xfrm>
-            <a:off x="822960" y="1472184"/>
+            <a:off x="822960" y="2075688"/>
+            <a:ext cx="10545775" cy="1029208"/>
+          </a:xfrm>
+          <a:prstGeom prst="rect">
+            <a:avLst/>
+          </a:prstGeom>
+          <a:noFill/>
+        </p:spPr>
+        <p:txBody>
+          <a:bodyPr wrap="square">
+            <a:spAutoFit/>
+          </a:bodyPr>
+          <a:lstStyle/>
+          <a:p>
+            <a:pPr algn="l"/>
+            <a:r>
+              <a:rPr sz="2600" b="0">
+                <a:solidFill>
+                  <a:srgbClr val="1A1A1A"/>
+                </a:solidFill>
+                <a:latin typeface="Leelawadee UI"/>
+                <a:ea typeface="Leelawadee UI"/>
+                <a:cs typeface="Leelawadee UI"/>
+              </a:rPr>
+              <a:t>• บ่ายนี้โค้ดของคุณจะขึ้น GitHub — ที่เก็บงานบนอินเทอร์เน็ต</a:t>
+            </a:r>
+          </a:p>
+        </p:txBody>
+      </p:sp>
+      <p:sp>
+        <p:nvSpPr>
+          <p:cNvPr id="4" name="TextBox 3"/>
+          <p:cNvSpPr txBox="1"/>
+          <p:nvPr/>
+        </p:nvSpPr>
+        <p:spPr>
+          <a:xfrm>
+            <a:off x="822960" y="3159760"/>
             <a:ext cx="10545775" cy="560324"/>
           </a:xfrm>
           <a:prstGeom prst="rect">
@@ -18127,20 +18766,57 @@
                 <a:ea typeface="Leelawadee UI"/>
                 <a:cs typeface="Leelawadee UI"/>
               </a:rPr>
-              <a:t>• งานที่ commit แล้ว เอากลับมาได้เสมอ</a:t>
-            </a:r>
-          </a:p>
-        </p:txBody>
-      </p:sp>
-      <p:sp>
-        <p:nvSpPr>
-          <p:cNvPr id="4" name="TextBox 3"/>
-          <p:cNvSpPr txBox="1"/>
-          <p:nvPr/>
-        </p:nvSpPr>
-        <p:spPr>
-          <a:xfrm>
-            <a:off x="822960" y="2087372"/>
+              <a:t>• 🤖 คำสั่ง git ทั้งหมด ให้ Claude ทำให้ — ไม่ต้องท่อง</a:t>
+            </a:r>
+          </a:p>
+        </p:txBody>
+      </p:sp>
+      <p:sp>
+        <p:nvSpPr>
+          <p:cNvPr id="5" name="TextBox 4"/>
+          <p:cNvSpPr txBox="1"/>
+          <p:nvPr/>
+        </p:nvSpPr>
+        <p:spPr>
+          <a:xfrm>
+            <a:off x="822960" y="3774948"/>
+            <a:ext cx="10545775" cy="1029208"/>
+          </a:xfrm>
+          <a:prstGeom prst="rect">
+            <a:avLst/>
+          </a:prstGeom>
+          <a:noFill/>
+        </p:spPr>
+        <p:txBody>
+          <a:bodyPr wrap="square">
+            <a:spAutoFit/>
+          </a:bodyPr>
+          <a:lstStyle/>
+          <a:p>
+            <a:pPr algn="l"/>
+            <a:r>
+              <a:rPr sz="2600" b="0">
+                <a:solidFill>
+                  <a:srgbClr val="1A1A1A"/>
+                </a:solidFill>
+                <a:latin typeface="Leelawadee UI"/>
+                <a:ea typeface="Leelawadee UI"/>
+                <a:cs typeface="Leelawadee UI"/>
+              </a:rPr>
+              <a:t>• 👤 แต่ commit ต้องเป็นชื่อคุณ — สัปดาห์นี้เริ่มนับจริง</a:t>
+            </a:r>
+          </a:p>
+        </p:txBody>
+      </p:sp>
+      <p:sp>
+        <p:nvSpPr>
+          <p:cNvPr id="6" name="TextBox 5"/>
+          <p:cNvSpPr txBox="1"/>
+          <p:nvPr/>
+        </p:nvSpPr>
+        <p:spPr>
+          <a:xfrm>
+            <a:off x="822960" y="4859020"/>
             <a:ext cx="10545775" cy="560324"/>
           </a:xfrm>
           <a:prstGeom prst="rect">
@@ -18164,81 +18840,7 @@
                 <a:ea typeface="Leelawadee UI"/>
                 <a:cs typeface="Leelawadee UI"/>
               </a:rPr>
-              <a:t>• งานที่ ยังไม่ commit หายแล้วหายเลย</a:t>
-            </a:r>
-          </a:p>
-        </p:txBody>
-      </p:sp>
-      <p:sp>
-        <p:nvSpPr>
-          <p:cNvPr id="5" name="TextBox 4"/>
-          <p:cNvSpPr txBox="1"/>
-          <p:nvPr/>
-        </p:nvSpPr>
-        <p:spPr>
-          <a:xfrm>
-            <a:off x="822960" y="2702560"/>
-            <a:ext cx="10545775" cy="560324"/>
-          </a:xfrm>
-          <a:prstGeom prst="rect">
-            <a:avLst/>
-          </a:prstGeom>
-          <a:noFill/>
-        </p:spPr>
-        <p:txBody>
-          <a:bodyPr wrap="square">
-            <a:spAutoFit/>
-          </a:bodyPr>
-          <a:lstStyle/>
-          <a:p>
-            <a:pPr algn="l"/>
-            <a:r>
-              <a:rPr sz="2600" b="0">
-                <a:solidFill>
-                  <a:srgbClr val="1A1A1A"/>
-                </a:solidFill>
-                <a:latin typeface="Leelawadee UI"/>
-                <a:ea typeface="Leelawadee UI"/>
-                <a:cs typeface="Leelawadee UI"/>
-              </a:rPr>
-              <a:t>• AI สั่ง git ผิดได้ — commit คือตาข่ายรองรับ</a:t>
-            </a:r>
-          </a:p>
-        </p:txBody>
-      </p:sp>
-      <p:sp>
-        <p:nvSpPr>
-          <p:cNvPr id="6" name="TextBox 5"/>
-          <p:cNvSpPr txBox="1"/>
-          <p:nvPr/>
-        </p:nvSpPr>
-        <p:spPr>
-          <a:xfrm>
-            <a:off x="822960" y="3317748"/>
-            <a:ext cx="10545775" cy="560324"/>
-          </a:xfrm>
-          <a:prstGeom prst="rect">
-            <a:avLst/>
-          </a:prstGeom>
-          <a:noFill/>
-        </p:spPr>
-        <p:txBody>
-          <a:bodyPr wrap="square">
-            <a:spAutoFit/>
-          </a:bodyPr>
-          <a:lstStyle/>
-          <a:p>
-            <a:pPr algn="l"/>
-            <a:r>
-              <a:rPr sz="2600" b="0">
-                <a:solidFill>
-                  <a:srgbClr val="1A1A1A"/>
-                </a:solidFill>
-                <a:latin typeface="Leelawadee UI"/>
-                <a:ea typeface="Leelawadee UI"/>
-                <a:cs typeface="Leelawadee UI"/>
-              </a:rPr>
-              <a:t>• วงจร 4 จังหวะเดิม ใช้กับ git ด้วย</a:t>
+              <a:t>• ไม่มี commit เลยทั้ง Module = ไม่ผ่าน</a:t>
             </a:r>
           </a:p>
         </p:txBody>
@@ -18299,87 +18901,75 @@
       <p:grpSpPr/>
       <p:sp>
         <p:nvSpPr>
-          <p:cNvPr id="2" name="Rectangle 1"/>
-          <p:cNvSpPr/>
-          <p:nvPr/>
-        </p:nvSpPr>
-        <p:spPr>
-          <a:xfrm>
-            <a:off x="0" y="0"/>
-            <a:ext cx="12191695" cy="6858000"/>
-          </a:xfrm>
-          <a:prstGeom prst="rect">
-            <a:avLst/>
-          </a:prstGeom>
-          <a:solidFill>
-            <a:srgbClr val="FFF3DF"/>
-          </a:solidFill>
-          <a:ln>
-            <a:noFill/>
-          </a:ln>
-        </p:spPr>
-        <p:style>
-          <a:lnRef idx="1">
-            <a:schemeClr val="accent1"/>
-          </a:lnRef>
-          <a:fillRef idx="3">
-            <a:schemeClr val="accent1"/>
-          </a:fillRef>
-          <a:effectRef idx="2">
-            <a:schemeClr val="accent1"/>
-          </a:effectRef>
-          <a:fontRef idx="minor">
-            <a:schemeClr val="lt1"/>
-          </a:fontRef>
-        </p:style>
-        <p:txBody>
-          <a:bodyPr rtlCol="0" anchor="ctr"/>
-          <a:lstStyle/>
-          <a:p>
-            <a:pPr algn="ctr"/>
-          </a:p>
-        </p:txBody>
-      </p:sp>
-      <p:sp>
-        <p:nvSpPr>
-          <p:cNvPr id="3" name="Rectangle 2"/>
-          <p:cNvSpPr/>
-          <p:nvPr/>
-        </p:nvSpPr>
-        <p:spPr>
-          <a:xfrm>
-            <a:off x="0" y="0"/>
-            <a:ext cx="146304" cy="6858000"/>
-          </a:xfrm>
-          <a:prstGeom prst="rect">
-            <a:avLst/>
-          </a:prstGeom>
-          <a:solidFill>
-            <a:srgbClr val="E0A02C"/>
-          </a:solidFill>
-          <a:ln>
-            <a:noFill/>
-          </a:ln>
-        </p:spPr>
-        <p:style>
-          <a:lnRef idx="1">
-            <a:schemeClr val="accent1"/>
-          </a:lnRef>
-          <a:fillRef idx="3">
-            <a:schemeClr val="accent1"/>
-          </a:fillRef>
-          <a:effectRef idx="2">
-            <a:schemeClr val="accent1"/>
-          </a:effectRef>
-          <a:fontRef idx="minor">
-            <a:schemeClr val="lt1"/>
-          </a:fontRef>
-        </p:style>
-        <p:txBody>
-          <a:bodyPr rtlCol="0" anchor="ctr"/>
-          <a:lstStyle/>
-          <a:p>
-            <a:pPr algn="ctr"/>
+          <p:cNvPr id="2" name="TextBox 1"/>
+          <p:cNvSpPr txBox="1"/>
+          <p:nvPr/>
+        </p:nvSpPr>
+        <p:spPr>
+          <a:xfrm>
+            <a:off x="822960" y="502920"/>
+            <a:ext cx="10545775" cy="804672"/>
+          </a:xfrm>
+          <a:prstGeom prst="rect">
+            <a:avLst/>
+          </a:prstGeom>
+          <a:noFill/>
+        </p:spPr>
+        <p:txBody>
+          <a:bodyPr wrap="square">
+            <a:spAutoFit/>
+          </a:bodyPr>
+          <a:lstStyle/>
+          <a:p>
+            <a:pPr algn="l"/>
+            <a:r>
+              <a:rPr sz="3600" b="1">
+                <a:solidFill>
+                  <a:srgbClr val="1F5FA8"/>
+                </a:solidFill>
+                <a:latin typeface="Leelawadee UI"/>
+                <a:ea typeface="Leelawadee UI"/>
+                <a:cs typeface="Leelawadee UI"/>
+              </a:rPr>
+              <a:t>3 อย่างที่ AI ทำแทนคุณไม่ได้</a:t>
+            </a:r>
+          </a:p>
+        </p:txBody>
+      </p:sp>
+      <p:sp>
+        <p:nvSpPr>
+          <p:cNvPr id="3" name="TextBox 2"/>
+          <p:cNvSpPr txBox="1"/>
+          <p:nvPr/>
+        </p:nvSpPr>
+        <p:spPr>
+          <a:xfrm>
+            <a:off x="822960" y="1472184"/>
+            <a:ext cx="10545775" cy="1029208"/>
+          </a:xfrm>
+          <a:prstGeom prst="rect">
+            <a:avLst/>
+          </a:prstGeom>
+          <a:noFill/>
+        </p:spPr>
+        <p:txBody>
+          <a:bodyPr wrap="square">
+            <a:spAutoFit/>
+          </a:bodyPr>
+          <a:lstStyle/>
+          <a:p>
+            <a:pPr algn="l"/>
+            <a:r>
+              <a:rPr sz="2600" b="0">
+                <a:solidFill>
+                  <a:srgbClr val="1A1A1A"/>
+                </a:solidFill>
+                <a:latin typeface="Leelawadee UI"/>
+                <a:ea typeface="Leelawadee UI"/>
+                <a:cs typeface="Leelawadee UI"/>
+              </a:rPr>
+              <a:t>• 1️⃣ บอกว่าเมื่อไรควร commit — AI ไม่รู้ว่าตรงไหนคือ "ใช้ได้แล้ว"</a:t>
+            </a:r>
           </a:p>
         </p:txBody>
       </p:sp>
@@ -18391,31 +18981,31 @@
         </p:nvSpPr>
         <p:spPr>
           <a:xfrm>
-            <a:off x="9082735" y="109728"/>
-            <a:ext cx="2834640" cy="384048"/>
-          </a:xfrm>
-          <a:prstGeom prst="rect">
-            <a:avLst/>
-          </a:prstGeom>
-          <a:noFill/>
-        </p:spPr>
-        <p:txBody>
-          <a:bodyPr wrap="square">
-            <a:spAutoFit/>
-          </a:bodyPr>
-          <a:lstStyle/>
-          <a:p>
-            <a:pPr algn="r"/>
-            <a:r>
-              <a:rPr sz="1400" b="1">
-                <a:solidFill>
-                  <a:srgbClr val="8A5400"/>
-                </a:solidFill>
-                <a:latin typeface="Leelawadee UI"/>
-                <a:ea typeface="Leelawadee UI"/>
-                <a:cs typeface="Leelawadee UI"/>
-              </a:rPr>
-              <a:t>🎬 สลับไปหน้าจอสาธิตสด</a:t>
+            <a:off x="822960" y="2556256"/>
+            <a:ext cx="10545775" cy="1029208"/>
+          </a:xfrm>
+          <a:prstGeom prst="rect">
+            <a:avLst/>
+          </a:prstGeom>
+          <a:noFill/>
+        </p:spPr>
+        <p:txBody>
+          <a:bodyPr wrap="square">
+            <a:spAutoFit/>
+          </a:bodyPr>
+          <a:lstStyle/>
+          <a:p>
+            <a:pPr algn="l"/>
+            <a:r>
+              <a:rPr sz="2600" b="0">
+                <a:solidFill>
+                  <a:srgbClr val="1A1A1A"/>
+                </a:solidFill>
+                <a:latin typeface="Leelawadee UI"/>
+                <a:ea typeface="Leelawadee UI"/>
+                <a:cs typeface="Leelawadee UI"/>
+              </a:rPr>
+              <a:t>• 2️⃣ .gitignore ก่อน push — เป็นการตัดสินใจ ไม่ใช่คำสั่ง</a:t>
             </a:r>
           </a:p>
         </p:txBody>
@@ -18428,8 +19018,8 @@
         </p:nvSpPr>
         <p:spPr>
           <a:xfrm>
-            <a:off x="822960" y="502920"/>
-            <a:ext cx="10545775" cy="1408176"/>
+            <a:off x="822960" y="3640328"/>
+            <a:ext cx="10545775" cy="1029208"/>
           </a:xfrm>
           <a:prstGeom prst="rect">
             <a:avLst/>
@@ -18444,15 +19034,15 @@
           <a:p>
             <a:pPr algn="l"/>
             <a:r>
-              <a:rPr sz="3600" b="1">
-                <a:solidFill>
-                  <a:srgbClr val="8A5400"/>
-                </a:solidFill>
-                <a:latin typeface="Leelawadee UI"/>
-                <a:ea typeface="Leelawadee UI"/>
-                <a:cs typeface="Leelawadee UI"/>
-              </a:rPr>
-              <a:t>🎬💥 สาธิต — push ขึ้น GitHub แล้วทำให้งานชนกัน ⏱ 11 นาที</a:t>
+              <a:rPr sz="2600" b="0">
+                <a:solidFill>
+                  <a:srgbClr val="1A1A1A"/>
+                </a:solidFill>
+                <a:latin typeface="Leelawadee UI"/>
+                <a:ea typeface="Leelawadee UI"/>
+                <a:cs typeface="Leelawadee UI"/>
+              </a:rPr>
+              <a:t>• 3️⃣ สังเกตว่าตอนนี้งานชนกันแล้ว — แล้วส่งให้ Claude แก้</a:t>
             </a:r>
           </a:p>
         </p:txBody>
@@ -18460,154 +19050,6 @@
       <p:sp>
         <p:nvSpPr>
           <p:cNvPr id="6" name="TextBox 5"/>
-          <p:cNvSpPr txBox="1"/>
-          <p:nvPr/>
-        </p:nvSpPr>
-        <p:spPr>
-          <a:xfrm>
-            <a:off x="822960" y="2075688"/>
-            <a:ext cx="10545775" cy="1029208"/>
-          </a:xfrm>
-          <a:prstGeom prst="rect">
-            <a:avLst/>
-          </a:prstGeom>
-          <a:noFill/>
-        </p:spPr>
-        <p:txBody>
-          <a:bodyPr wrap="square">
-            <a:spAutoFit/>
-          </a:bodyPr>
-          <a:lstStyle/>
-          <a:p>
-            <a:pPr algn="l"/>
-            <a:r>
-              <a:rPr sz="2600" b="0">
-                <a:solidFill>
-                  <a:srgbClr val="1A1A1A"/>
-                </a:solidFill>
-                <a:latin typeface="Leelawadee UI"/>
-                <a:ea typeface="Leelawadee UI"/>
-                <a:cs typeface="Leelawadee UI"/>
-              </a:rPr>
-              <a:t>• .gitignore → อ่านรายการไฟล์ที่จะส่งขึ้น → push → กวาดตาดูหน้า repo</a:t>
-            </a:r>
-          </a:p>
-        </p:txBody>
-      </p:sp>
-      <p:sp>
-        <p:nvSpPr>
-          <p:cNvPr id="7" name="TextBox 6"/>
-          <p:cNvSpPr txBox="1"/>
-          <p:nvPr/>
-        </p:nvSpPr>
-        <p:spPr>
-          <a:xfrm>
-            <a:off x="822960" y="3159760"/>
-            <a:ext cx="10545775" cy="560324"/>
-          </a:xfrm>
-          <a:prstGeom prst="rect">
-            <a:avLst/>
-          </a:prstGeom>
-          <a:noFill/>
-        </p:spPr>
-        <p:txBody>
-          <a:bodyPr wrap="square">
-            <a:spAutoFit/>
-          </a:bodyPr>
-          <a:lstStyle/>
-          <a:p>
-            <a:pPr algn="l"/>
-            <a:r>
-              <a:rPr sz="2600" b="0">
-                <a:solidFill>
-                  <a:srgbClr val="1A1A1A"/>
-                </a:solidFill>
-                <a:latin typeface="Leelawadee UI"/>
-                <a:ea typeface="Leelawadee UI"/>
-                <a:cs typeface="Leelawadee UI"/>
-              </a:rPr>
-              <a:t>• สมมติว่ามีการแก้ไฟล์ไว้บน GitHub</a:t>
-            </a:r>
-          </a:p>
-        </p:txBody>
-      </p:sp>
-      <p:sp>
-        <p:nvSpPr>
-          <p:cNvPr id="8" name="TextBox 7"/>
-          <p:cNvSpPr txBox="1"/>
-          <p:nvPr/>
-        </p:nvSpPr>
-        <p:spPr>
-          <a:xfrm>
-            <a:off x="822960" y="3774948"/>
-            <a:ext cx="10545775" cy="560324"/>
-          </a:xfrm>
-          <a:prstGeom prst="rect">
-            <a:avLst/>
-          </a:prstGeom>
-          <a:noFill/>
-        </p:spPr>
-        <p:txBody>
-          <a:bodyPr wrap="square">
-            <a:spAutoFit/>
-          </a:bodyPr>
-          <a:lstStyle/>
-          <a:p>
-            <a:pPr algn="l"/>
-            <a:r>
-              <a:rPr sz="2600" b="0">
-                <a:solidFill>
-                  <a:srgbClr val="1A1A1A"/>
-                </a:solidFill>
-                <a:latin typeface="Leelawadee UI"/>
-                <a:ea typeface="Leelawadee UI"/>
-                <a:cs typeface="Leelawadee UI"/>
-              </a:rPr>
-              <a:t>• เราแก้ไฟล์เดียวกันในเครื่อง → push → ถูกปฏิเสธ</a:t>
-            </a:r>
-          </a:p>
-        </p:txBody>
-      </p:sp>
-      <p:sp>
-        <p:nvSpPr>
-          <p:cNvPr id="9" name="TextBox 8"/>
-          <p:cNvSpPr txBox="1"/>
-          <p:nvPr/>
-        </p:nvSpPr>
-        <p:spPr>
-          <a:xfrm>
-            <a:off x="822960" y="4390136"/>
-            <a:ext cx="10545775" cy="560324"/>
-          </a:xfrm>
-          <a:prstGeom prst="rect">
-            <a:avLst/>
-          </a:prstGeom>
-          <a:noFill/>
-        </p:spPr>
-        <p:txBody>
-          <a:bodyPr wrap="square">
-            <a:spAutoFit/>
-          </a:bodyPr>
-          <a:lstStyle/>
-          <a:p>
-            <a:pPr algn="l"/>
-            <a:r>
-              <a:rPr sz="2600" b="0">
-                <a:solidFill>
-                  <a:srgbClr val="1A1A1A"/>
-                </a:solidFill>
-                <a:latin typeface="Leelawadee UI"/>
-                <a:ea typeface="Leelawadee UI"/>
-                <a:cs typeface="Leelawadee UI"/>
-              </a:rPr>
-              <a:t>• ส่งให้ Claude → มันรวมให้ → push ผ่าน</a:t>
-            </a:r>
-          </a:p>
-        </p:txBody>
-      </p:sp>
-      <p:sp>
-        <p:nvSpPr>
-          <p:cNvPr id="10" name="TextBox 9"/>
           <p:cNvSpPr txBox="1"/>
           <p:nvPr/>
         </p:nvSpPr>
@@ -18907,7 +19349,7 @@
         <p:spPr>
           <a:xfrm>
             <a:off x="822960" y="502920"/>
-            <a:ext cx="10545775" cy="804672"/>
+            <a:ext cx="10545775" cy="1408176"/>
           </a:xfrm>
           <a:prstGeom prst="rect">
             <a:avLst/>
@@ -18930,7 +19372,7 @@
                 <a:ea typeface="Leelawadee UI"/>
                 <a:cs typeface="Leelawadee UI"/>
               </a:rPr>
-              <a:t>✅ ช่วงที่ 5 คุณต้องได้อะไรกลับไป</a:t>
+              <a:t>ก่อน push ครั้งแรก — .gitignore ต้องมาก่อน</a:t>
             </a:r>
           </a:p>
         </p:txBody>
@@ -18943,7 +19385,7 @@
         </p:nvSpPr>
         <p:spPr>
           <a:xfrm>
-            <a:off x="822960" y="1472184"/>
+            <a:off x="822960" y="2075688"/>
             <a:ext cx="10545775" cy="560324"/>
           </a:xfrm>
           <a:prstGeom prst="rect">
@@ -18967,7 +19409,7 @@
                 <a:ea typeface="Leelawadee UI"/>
                 <a:cs typeface="Leelawadee UI"/>
               </a:rPr>
-              <a:t>• รู้ว่าคำสั่ง git ทั้งหมด ให้ Claude ทำให้ได้</a:t>
+              <a:t>• .gitignore = รายการไฟล์ที่ห้ามส่งขึ้น GitHub</a:t>
             </a:r>
           </a:p>
         </p:txBody>
@@ -18980,8 +19422,8 @@
         </p:nvSpPr>
         <p:spPr>
           <a:xfrm>
-            <a:off x="822960" y="2087372"/>
-            <a:ext cx="10545775" cy="560324"/>
+            <a:off x="822960" y="2690876"/>
+            <a:ext cx="10545775" cy="1029208"/>
           </a:xfrm>
           <a:prstGeom prst="rect">
             <a:avLst/>
@@ -19004,7 +19446,7 @@
                 <a:ea typeface="Leelawadee UI"/>
                 <a:cs typeface="Leelawadee UI"/>
               </a:rPr>
-              <a:t>• ท่อง 3 อย่างที่ AI ทำแทนไม่ได้</a:t>
+              <a:t>• ต้องกัน โฟลเดอร์ที่เครื่องมือสร้างเอง และไฟล์คีย์ทุกชนิด</a:t>
             </a:r>
           </a:p>
         </p:txBody>
@@ -19017,8 +19459,8 @@
         </p:nvSpPr>
         <p:spPr>
           <a:xfrm>
-            <a:off x="822960" y="2702560"/>
-            <a:ext cx="10545775" cy="560324"/>
+            <a:off x="822960" y="3774948"/>
+            <a:ext cx="10545775" cy="1029208"/>
           </a:xfrm>
           <a:prstGeom prst="rect">
             <a:avLst/>
@@ -19041,7 +19483,7 @@
                 <a:ea typeface="Leelawadee UI"/>
                 <a:cs typeface="Leelawadee UI"/>
               </a:rPr>
-              <a:t>• รู้ว่า commit ก่อนให้ AI แตะ git เสมอ</a:t>
+              <a:t>• ให้ AI สร้าง → สั่งให้มันแสดงรายการไฟล์ที่จะส่งขึ้นแล้วเราอ่านเอง</a:t>
             </a:r>
           </a:p>
         </p:txBody>
@@ -19054,8 +19496,8 @@
         </p:nvSpPr>
         <p:spPr>
           <a:xfrm>
-            <a:off x="822960" y="3317748"/>
-            <a:ext cx="10545775" cy="560324"/>
+            <a:off x="822960" y="4859020"/>
+            <a:ext cx="10545775" cy="1029208"/>
           </a:xfrm>
           <a:prstGeom prst="rect">
             <a:avLst/>
@@ -19078,7 +19520,7 @@
                 <a:ea typeface="Leelawadee UI"/>
                 <a:cs typeface="Leelawadee UI"/>
               </a:rPr>
-              <a:t>• รู้ว่างานชนกันไม่ใช่งานหาย — กู้ได้เสมอ</a:t>
+              <a:t>• ลำดับสลับไม่ได้ — ของที่ขึ้นไปแล้ว มีคนคัดลอกได้ทันที</a:t>
             </a:r>
           </a:p>
         </p:txBody>
@@ -19139,44 +19581,38 @@
       <p:grpSpPr/>
       <p:sp>
         <p:nvSpPr>
-          <p:cNvPr id="2" name="Rectangle 1"/>
-          <p:cNvSpPr/>
-          <p:nvPr/>
-        </p:nvSpPr>
-        <p:spPr>
-          <a:xfrm>
-            <a:off x="0" y="0"/>
-            <a:ext cx="12191695" cy="6858000"/>
-          </a:xfrm>
-          <a:prstGeom prst="rect">
-            <a:avLst/>
-          </a:prstGeom>
-          <a:solidFill>
-            <a:srgbClr val="1F5FA8"/>
-          </a:solidFill>
-          <a:ln>
-            <a:noFill/>
-          </a:ln>
-        </p:spPr>
-        <p:style>
-          <a:lnRef idx="1">
-            <a:schemeClr val="accent1"/>
-          </a:lnRef>
-          <a:fillRef idx="3">
-            <a:schemeClr val="accent1"/>
-          </a:fillRef>
-          <a:effectRef idx="2">
-            <a:schemeClr val="accent1"/>
-          </a:effectRef>
-          <a:fontRef idx="minor">
-            <a:schemeClr val="lt1"/>
-          </a:fontRef>
-        </p:style>
-        <p:txBody>
-          <a:bodyPr rtlCol="0" anchor="ctr"/>
-          <a:lstStyle/>
-          <a:p>
-            <a:pPr algn="ctr"/>
+          <p:cNvPr id="2" name="TextBox 1"/>
+          <p:cNvSpPr txBox="1"/>
+          <p:nvPr/>
+        </p:nvSpPr>
+        <p:spPr>
+          <a:xfrm>
+            <a:off x="822960" y="502920"/>
+            <a:ext cx="10545775" cy="804672"/>
+          </a:xfrm>
+          <a:prstGeom prst="rect">
+            <a:avLst/>
+          </a:prstGeom>
+          <a:noFill/>
+        </p:spPr>
+        <p:txBody>
+          <a:bodyPr wrap="square">
+            <a:spAutoFit/>
+          </a:bodyPr>
+          <a:lstStyle/>
+          <a:p>
+            <a:pPr algn="l"/>
+            <a:r>
+              <a:rPr sz="3600" b="1">
+                <a:solidFill>
+                  <a:srgbClr val="1F5FA8"/>
+                </a:solidFill>
+                <a:latin typeface="Leelawadee UI"/>
+                <a:ea typeface="Leelawadee UI"/>
+                <a:cs typeface="Leelawadee UI"/>
+              </a:rPr>
+              <a:t>ก่อนให้ AI แตะ git — commit ก่อนเสมอ</a:t>
+            </a:r>
           </a:p>
         </p:txBody>
       </p:sp>
@@ -19188,31 +19624,31 @@
         </p:nvSpPr>
         <p:spPr>
           <a:xfrm>
-            <a:off x="822960" y="2743200"/>
-            <a:ext cx="10545775" cy="1463040"/>
-          </a:xfrm>
-          <a:prstGeom prst="rect">
-            <a:avLst/>
-          </a:prstGeom>
-          <a:noFill/>
-        </p:spPr>
-        <p:txBody>
-          <a:bodyPr wrap="square" anchor="ctr">
-            <a:spAutoFit/>
-          </a:bodyPr>
-          <a:lstStyle/>
-          <a:p>
-            <a:pPr algn="ctr"/>
-            <a:r>
-              <a:rPr sz="4000" b="1">
-                <a:solidFill>
-                  <a:srgbClr val="FFFFFF"/>
-                </a:solidFill>
-                <a:latin typeface="Leelawadee UI"/>
-                <a:ea typeface="Leelawadee UI"/>
-                <a:cs typeface="Leelawadee UI"/>
-              </a:rPr>
-              <a:t>ช่วงที่ 6 — 🌐 Deploy ขึ้นออนไลน์ ⏱ 11:22–11:55</a:t>
+            <a:off x="822960" y="1472184"/>
+            <a:ext cx="10545775" cy="560324"/>
+          </a:xfrm>
+          <a:prstGeom prst="rect">
+            <a:avLst/>
+          </a:prstGeom>
+          <a:noFill/>
+        </p:spPr>
+        <p:txBody>
+          <a:bodyPr wrap="square">
+            <a:spAutoFit/>
+          </a:bodyPr>
+          <a:lstStyle/>
+          <a:p>
+            <a:pPr algn="l"/>
+            <a:r>
+              <a:rPr sz="2600" b="0">
+                <a:solidFill>
+                  <a:srgbClr val="1A1A1A"/>
+                </a:solidFill>
+                <a:latin typeface="Leelawadee UI"/>
+                <a:ea typeface="Leelawadee UI"/>
+                <a:cs typeface="Leelawadee UI"/>
+              </a:rPr>
+              <a:t>• งานที่ commit แล้ว เอากลับมาได้เสมอ</a:t>
             </a:r>
           </a:p>
         </p:txBody>
@@ -19220,6 +19656,117 @@
       <p:sp>
         <p:nvSpPr>
           <p:cNvPr id="4" name="TextBox 3"/>
+          <p:cNvSpPr txBox="1"/>
+          <p:nvPr/>
+        </p:nvSpPr>
+        <p:spPr>
+          <a:xfrm>
+            <a:off x="822960" y="2087372"/>
+            <a:ext cx="10545775" cy="560324"/>
+          </a:xfrm>
+          <a:prstGeom prst="rect">
+            <a:avLst/>
+          </a:prstGeom>
+          <a:noFill/>
+        </p:spPr>
+        <p:txBody>
+          <a:bodyPr wrap="square">
+            <a:spAutoFit/>
+          </a:bodyPr>
+          <a:lstStyle/>
+          <a:p>
+            <a:pPr algn="l"/>
+            <a:r>
+              <a:rPr sz="2600" b="0">
+                <a:solidFill>
+                  <a:srgbClr val="1A1A1A"/>
+                </a:solidFill>
+                <a:latin typeface="Leelawadee UI"/>
+                <a:ea typeface="Leelawadee UI"/>
+                <a:cs typeface="Leelawadee UI"/>
+              </a:rPr>
+              <a:t>• งานที่ ยังไม่ commit หายแล้วหายเลย</a:t>
+            </a:r>
+          </a:p>
+        </p:txBody>
+      </p:sp>
+      <p:sp>
+        <p:nvSpPr>
+          <p:cNvPr id="5" name="TextBox 4"/>
+          <p:cNvSpPr txBox="1"/>
+          <p:nvPr/>
+        </p:nvSpPr>
+        <p:spPr>
+          <a:xfrm>
+            <a:off x="822960" y="2702560"/>
+            <a:ext cx="10545775" cy="560324"/>
+          </a:xfrm>
+          <a:prstGeom prst="rect">
+            <a:avLst/>
+          </a:prstGeom>
+          <a:noFill/>
+        </p:spPr>
+        <p:txBody>
+          <a:bodyPr wrap="square">
+            <a:spAutoFit/>
+          </a:bodyPr>
+          <a:lstStyle/>
+          <a:p>
+            <a:pPr algn="l"/>
+            <a:r>
+              <a:rPr sz="2600" b="0">
+                <a:solidFill>
+                  <a:srgbClr val="1A1A1A"/>
+                </a:solidFill>
+                <a:latin typeface="Leelawadee UI"/>
+                <a:ea typeface="Leelawadee UI"/>
+                <a:cs typeface="Leelawadee UI"/>
+              </a:rPr>
+              <a:t>• AI สั่ง git ผิดได้ — commit คือตาข่ายรองรับ</a:t>
+            </a:r>
+          </a:p>
+        </p:txBody>
+      </p:sp>
+      <p:sp>
+        <p:nvSpPr>
+          <p:cNvPr id="6" name="TextBox 5"/>
+          <p:cNvSpPr txBox="1"/>
+          <p:nvPr/>
+        </p:nvSpPr>
+        <p:spPr>
+          <a:xfrm>
+            <a:off x="822960" y="3317748"/>
+            <a:ext cx="10545775" cy="560324"/>
+          </a:xfrm>
+          <a:prstGeom prst="rect">
+            <a:avLst/>
+          </a:prstGeom>
+          <a:noFill/>
+        </p:spPr>
+        <p:txBody>
+          <a:bodyPr wrap="square">
+            <a:spAutoFit/>
+          </a:bodyPr>
+          <a:lstStyle/>
+          <a:p>
+            <a:pPr algn="l"/>
+            <a:r>
+              <a:rPr sz="2600" b="0">
+                <a:solidFill>
+                  <a:srgbClr val="1A1A1A"/>
+                </a:solidFill>
+                <a:latin typeface="Leelawadee UI"/>
+                <a:ea typeface="Leelawadee UI"/>
+                <a:cs typeface="Leelawadee UI"/>
+              </a:rPr>
+              <a:t>• วงจร 4 จังหวะเดิม ใช้กับ git ด้วย</a:t>
+            </a:r>
+          </a:p>
+        </p:txBody>
+      </p:sp>
+      <p:sp>
+        <p:nvSpPr>
+          <p:cNvPr id="7" name="TextBox 6"/>
           <p:cNvSpPr txBox="1"/>
           <p:nvPr/>
         </p:nvSpPr>
@@ -19273,7 +19820,130 @@
       <p:grpSpPr/>
       <p:sp>
         <p:nvSpPr>
-          <p:cNvPr id="2" name="TextBox 1"/>
+          <p:cNvPr id="2" name="Rectangle 1"/>
+          <p:cNvSpPr/>
+          <p:nvPr/>
+        </p:nvSpPr>
+        <p:spPr>
+          <a:xfrm>
+            <a:off x="0" y="0"/>
+            <a:ext cx="12191695" cy="6858000"/>
+          </a:xfrm>
+          <a:prstGeom prst="rect">
+            <a:avLst/>
+          </a:prstGeom>
+          <a:solidFill>
+            <a:srgbClr val="FFF3DF"/>
+          </a:solidFill>
+          <a:ln>
+            <a:noFill/>
+          </a:ln>
+        </p:spPr>
+        <p:style>
+          <a:lnRef idx="1">
+            <a:schemeClr val="accent1"/>
+          </a:lnRef>
+          <a:fillRef idx="3">
+            <a:schemeClr val="accent1"/>
+          </a:fillRef>
+          <a:effectRef idx="2">
+            <a:schemeClr val="accent1"/>
+          </a:effectRef>
+          <a:fontRef idx="minor">
+            <a:schemeClr val="lt1"/>
+          </a:fontRef>
+        </p:style>
+        <p:txBody>
+          <a:bodyPr rtlCol="0" anchor="ctr"/>
+          <a:lstStyle/>
+          <a:p>
+            <a:pPr algn="ctr"/>
+          </a:p>
+        </p:txBody>
+      </p:sp>
+      <p:sp>
+        <p:nvSpPr>
+          <p:cNvPr id="3" name="Rectangle 2"/>
+          <p:cNvSpPr/>
+          <p:nvPr/>
+        </p:nvSpPr>
+        <p:spPr>
+          <a:xfrm>
+            <a:off x="0" y="0"/>
+            <a:ext cx="146304" cy="6858000"/>
+          </a:xfrm>
+          <a:prstGeom prst="rect">
+            <a:avLst/>
+          </a:prstGeom>
+          <a:solidFill>
+            <a:srgbClr val="E0A02C"/>
+          </a:solidFill>
+          <a:ln>
+            <a:noFill/>
+          </a:ln>
+        </p:spPr>
+        <p:style>
+          <a:lnRef idx="1">
+            <a:schemeClr val="accent1"/>
+          </a:lnRef>
+          <a:fillRef idx="3">
+            <a:schemeClr val="accent1"/>
+          </a:fillRef>
+          <a:effectRef idx="2">
+            <a:schemeClr val="accent1"/>
+          </a:effectRef>
+          <a:fontRef idx="minor">
+            <a:schemeClr val="lt1"/>
+          </a:fontRef>
+        </p:style>
+        <p:txBody>
+          <a:bodyPr rtlCol="0" anchor="ctr"/>
+          <a:lstStyle/>
+          <a:p>
+            <a:pPr algn="ctr"/>
+          </a:p>
+        </p:txBody>
+      </p:sp>
+      <p:sp>
+        <p:nvSpPr>
+          <p:cNvPr id="4" name="TextBox 3"/>
+          <p:cNvSpPr txBox="1"/>
+          <p:nvPr/>
+        </p:nvSpPr>
+        <p:spPr>
+          <a:xfrm>
+            <a:off x="9082735" y="109728"/>
+            <a:ext cx="2834640" cy="384048"/>
+          </a:xfrm>
+          <a:prstGeom prst="rect">
+            <a:avLst/>
+          </a:prstGeom>
+          <a:noFill/>
+        </p:spPr>
+        <p:txBody>
+          <a:bodyPr wrap="square">
+            <a:spAutoFit/>
+          </a:bodyPr>
+          <a:lstStyle/>
+          <a:p>
+            <a:pPr algn="r"/>
+            <a:r>
+              <a:rPr sz="1400" b="1">
+                <a:solidFill>
+                  <a:srgbClr val="8A5400"/>
+                </a:solidFill>
+                <a:latin typeface="Leelawadee UI"/>
+                <a:ea typeface="Leelawadee UI"/>
+                <a:cs typeface="Leelawadee UI"/>
+              </a:rPr>
+              <a:t>🎬 สลับไปหน้าจอสาธิตสด</a:t>
+            </a:r>
+          </a:p>
+        </p:txBody>
+      </p:sp>
+      <p:sp>
+        <p:nvSpPr>
+          <p:cNvPr id="5" name="TextBox 4"/>
           <p:cNvSpPr txBox="1"/>
           <p:nvPr/>
         </p:nvSpPr>
@@ -19297,20 +19967,20 @@
             <a:r>
               <a:rPr sz="3600" b="1">
                 <a:solidFill>
-                  <a:srgbClr val="1F5FA8"/>
-                </a:solidFill>
-                <a:latin typeface="Leelawadee UI"/>
-                <a:ea typeface="Leelawadee UI"/>
-                <a:cs typeface="Leelawadee UI"/>
-              </a:rPr>
-              <a:t>Deploy = นำเว็บขึ้นออนไลน์ให้คนอื่นเปิดได้</a:t>
-            </a:r>
-          </a:p>
-        </p:txBody>
-      </p:sp>
-      <p:sp>
-        <p:nvSpPr>
-          <p:cNvPr id="3" name="TextBox 2"/>
+                  <a:srgbClr val="8A5400"/>
+                </a:solidFill>
+                <a:latin typeface="Leelawadee UI"/>
+                <a:ea typeface="Leelawadee UI"/>
+                <a:cs typeface="Leelawadee UI"/>
+              </a:rPr>
+              <a:t>🎬💥 สาธิต — push ขึ้น GitHub แล้วทำให้งานชนกัน ⏱ 11 นาที</a:t>
+            </a:r>
+          </a:p>
+        </p:txBody>
+      </p:sp>
+      <p:sp>
+        <p:nvSpPr>
+          <p:cNvPr id="6" name="TextBox 5"/>
           <p:cNvSpPr txBox="1"/>
           <p:nvPr/>
         </p:nvSpPr>
@@ -19340,14 +20010,14 @@
                 <a:ea typeface="Leelawadee UI"/>
                 <a:cs typeface="Leelawadee UI"/>
               </a:rPr>
-              <a:t>• Deploy = ส่งเว็บจากเครื่องเราขึ้นไปอยู่บนอินเทอร์เน็ต</a:t>
-            </a:r>
-          </a:p>
-        </p:txBody>
-      </p:sp>
-      <p:sp>
-        <p:nvSpPr>
-          <p:cNvPr id="4" name="TextBox 3"/>
+              <a:t>• .gitignore → อ่านรายการไฟล์ที่จะส่งขึ้น → push → กวาดตาดูหน้า repo</a:t>
+            </a:r>
+          </a:p>
+        </p:txBody>
+      </p:sp>
+      <p:sp>
+        <p:nvSpPr>
+          <p:cNvPr id="7" name="TextBox 6"/>
           <p:cNvSpPr txBox="1"/>
           <p:nvPr/>
         </p:nvSpPr>
@@ -19377,21 +20047,21 @@
                 <a:ea typeface="Leelawadee UI"/>
                 <a:cs typeface="Leelawadee UI"/>
               </a:rPr>
-              <a:t>• ใช้ Firebase Hosting (บริการที่ทำให้เว็บเรามี URL)</a:t>
-            </a:r>
-          </a:p>
-        </p:txBody>
-      </p:sp>
-      <p:sp>
-        <p:nvSpPr>
-          <p:cNvPr id="5" name="TextBox 4"/>
+              <a:t>• สมมติว่ามีการแก้ไฟล์ไว้บน GitHub</a:t>
+            </a:r>
+          </a:p>
+        </p:txBody>
+      </p:sp>
+      <p:sp>
+        <p:nvSpPr>
+          <p:cNvPr id="8" name="TextBox 7"/>
           <p:cNvSpPr txBox="1"/>
           <p:nvPr/>
         </p:nvSpPr>
         <p:spPr>
           <a:xfrm>
             <a:off x="822960" y="3774948"/>
-            <a:ext cx="10545775" cy="1029208"/>
+            <a:ext cx="10545775" cy="560324"/>
           </a:xfrm>
           <a:prstGeom prst="rect">
             <a:avLst/>
@@ -19414,21 +20084,21 @@
                 <a:ea typeface="Leelawadee UI"/>
                 <a:cs typeface="Leelawadee UI"/>
               </a:rPr>
-              <a:t>• localhost = ในเครื่องเราคนเดียว · URL จริง = ใครก็เปิดได้</a:t>
-            </a:r>
-          </a:p>
-        </p:txBody>
-      </p:sp>
-      <p:sp>
-        <p:nvSpPr>
-          <p:cNvPr id="6" name="TextBox 5"/>
-          <p:cNvSpPr txBox="1"/>
-          <p:nvPr/>
-        </p:nvSpPr>
-        <p:spPr>
-          <a:xfrm>
-            <a:off x="822960" y="4859020"/>
-            <a:ext cx="10545775" cy="1029208"/>
+              <a:t>• เราแก้ไฟล์เดียวกันในเครื่อง → push → ถูกปฏิเสธ</a:t>
+            </a:r>
+          </a:p>
+        </p:txBody>
+      </p:sp>
+      <p:sp>
+        <p:nvSpPr>
+          <p:cNvPr id="9" name="TextBox 8"/>
+          <p:cNvSpPr txBox="1"/>
+          <p:nvPr/>
+        </p:nvSpPr>
+        <p:spPr>
+          <a:xfrm>
+            <a:off x="822960" y="4390136"/>
+            <a:ext cx="10545775" cy="560324"/>
           </a:xfrm>
           <a:prstGeom prst="rect">
             <a:avLst/>
@@ -19451,14 +20121,14 @@
                 <a:ea typeface="Leelawadee UI"/>
                 <a:cs typeface="Leelawadee UI"/>
               </a:rPr>
-              <a:t>• ยังไม่สมบูรณ์ก็ deploy ได้ — ไม่ต้องรอเสร็จร้อยเปอร์เซ็นต์</a:t>
-            </a:r>
-          </a:p>
-        </p:txBody>
-      </p:sp>
-      <p:sp>
-        <p:nvSpPr>
-          <p:cNvPr id="7" name="TextBox 6"/>
+              <a:t>• ส่งให้ Claude → มันรวมให้ → push ผ่าน</a:t>
+            </a:r>
+          </a:p>
+        </p:txBody>
+      </p:sp>
+      <p:sp>
+        <p:nvSpPr>
+          <p:cNvPr id="10" name="TextBox 9"/>
           <p:cNvSpPr txBox="1"/>
           <p:nvPr/>
         </p:nvSpPr>
@@ -19542,56 +20212,36 @@
                 <a:ea typeface="Leelawadee UI"/>
                 <a:cs typeface="Leelawadee UI"/>
               </a:rPr>
-              <a:t>เส้นทางของการ deploy</a:t>
-            </a:r>
-          </a:p>
-        </p:txBody>
-      </p:sp>
-      <p:sp>
-        <p:nvSpPr>
-          <p:cNvPr id="3" name="Rounded Rectangle 2"/>
-          <p:cNvSpPr/>
-          <p:nvPr/>
-        </p:nvSpPr>
-        <p:spPr>
-          <a:xfrm>
-            <a:off x="822960" y="1563624"/>
-            <a:ext cx="2348407" cy="1051560"/>
-          </a:xfrm>
-          <a:prstGeom prst="roundRect">
-            <a:avLst/>
-          </a:prstGeom>
-          <a:solidFill>
-            <a:srgbClr val="E8EFF7"/>
-          </a:solidFill>
-          <a:ln w="15875">
-            <a:solidFill>
-              <a:srgbClr val="9CB5D1"/>
-            </a:solidFill>
-          </a:ln>
-          <a:effectLst/>
-        </p:spPr>
-        <p:style>
-          <a:lnRef idx="1">
-            <a:schemeClr val="accent1"/>
-          </a:lnRef>
-          <a:fillRef idx="3">
-            <a:schemeClr val="accent1"/>
-          </a:fillRef>
-          <a:effectRef idx="2">
-            <a:schemeClr val="accent1"/>
-          </a:effectRef>
-          <a:fontRef idx="minor">
-            <a:schemeClr val="lt1"/>
-          </a:fontRef>
-        </p:style>
-        <p:txBody>
-          <a:bodyPr rtlCol="0" anchor="ctr" wrap="square" lIns="54864" rIns="54864" tIns="27432" bIns="27432"/>
-          <a:lstStyle/>
-          <a:p>
-            <a:pPr algn="ctr"/>
-            <a:r>
-              <a:rPr sz="1400" b="0">
+              <a:t>✅ ช่วงที่ 5 คุณต้องได้อะไรกลับไป</a:t>
+            </a:r>
+          </a:p>
+        </p:txBody>
+      </p:sp>
+      <p:sp>
+        <p:nvSpPr>
+          <p:cNvPr id="3" name="TextBox 2"/>
+          <p:cNvSpPr txBox="1"/>
+          <p:nvPr/>
+        </p:nvSpPr>
+        <p:spPr>
+          <a:xfrm>
+            <a:off x="822960" y="1472184"/>
+            <a:ext cx="10545775" cy="560324"/>
+          </a:xfrm>
+          <a:prstGeom prst="rect">
+            <a:avLst/>
+          </a:prstGeom>
+          <a:noFill/>
+        </p:spPr>
+        <p:txBody>
+          <a:bodyPr wrap="square">
+            <a:spAutoFit/>
+          </a:bodyPr>
+          <a:lstStyle/>
+          <a:p>
+            <a:pPr algn="l"/>
+            <a:r>
+              <a:rPr sz="2600" b="0">
                 <a:solidFill>
                   <a:srgbClr val="1A1A1A"/>
                 </a:solidFill>
@@ -19599,100 +20249,36 @@
                 <a:ea typeface="Leelawadee UI"/>
                 <a:cs typeface="Leelawadee UI"/>
               </a:rPr>
-              <a:t>โค้ดในเครื่องเรา</a:t>
-            </a:r>
-          </a:p>
-        </p:txBody>
-      </p:sp>
-      <p:sp>
-        <p:nvSpPr>
-          <p:cNvPr id="4" name="Right Arrow 3"/>
-          <p:cNvSpPr/>
-          <p:nvPr/>
-        </p:nvSpPr>
-        <p:spPr>
-          <a:xfrm>
-            <a:off x="3217452" y="1931670"/>
-            <a:ext cx="291876" cy="315468"/>
-          </a:xfrm>
-          <a:prstGeom prst="rightArrow">
-            <a:avLst/>
-          </a:prstGeom>
-          <a:solidFill>
-            <a:srgbClr val="7A91A8"/>
-          </a:solidFill>
-          <a:ln>
-            <a:noFill/>
-          </a:ln>
-          <a:effectLst/>
-        </p:spPr>
-        <p:style>
-          <a:lnRef idx="1">
-            <a:schemeClr val="accent1"/>
-          </a:lnRef>
-          <a:fillRef idx="3">
-            <a:schemeClr val="accent1"/>
-          </a:fillRef>
-          <a:effectRef idx="2">
-            <a:schemeClr val="accent1"/>
-          </a:effectRef>
-          <a:fontRef idx="minor">
-            <a:schemeClr val="lt1"/>
-          </a:fontRef>
-        </p:style>
-        <p:txBody>
-          <a:bodyPr rtlCol="0" anchor="ctr"/>
-          <a:lstStyle/>
-          <a:p>
-            <a:pPr algn="ctr"/>
-          </a:p>
-        </p:txBody>
-      </p:sp>
-      <p:sp>
-        <p:nvSpPr>
-          <p:cNvPr id="5" name="Rounded Rectangle 4"/>
-          <p:cNvSpPr/>
-          <p:nvPr/>
-        </p:nvSpPr>
-        <p:spPr>
-          <a:xfrm>
-            <a:off x="3555415" y="1563624"/>
-            <a:ext cx="2348407" cy="1051560"/>
-          </a:xfrm>
-          <a:prstGeom prst="roundRect">
-            <a:avLst/>
-          </a:prstGeom>
-          <a:solidFill>
-            <a:srgbClr val="E8EFF7"/>
-          </a:solidFill>
-          <a:ln w="15875">
-            <a:solidFill>
-              <a:srgbClr val="9CB5D1"/>
-            </a:solidFill>
-          </a:ln>
-          <a:effectLst/>
-        </p:spPr>
-        <p:style>
-          <a:lnRef idx="1">
-            <a:schemeClr val="accent1"/>
-          </a:lnRef>
-          <a:fillRef idx="3">
-            <a:schemeClr val="accent1"/>
-          </a:fillRef>
-          <a:effectRef idx="2">
-            <a:schemeClr val="accent1"/>
-          </a:effectRef>
-          <a:fontRef idx="minor">
-            <a:schemeClr val="lt1"/>
-          </a:fontRef>
-        </p:style>
-        <p:txBody>
-          <a:bodyPr rtlCol="0" anchor="ctr" wrap="square" lIns="54864" rIns="54864" tIns="27432" bIns="27432"/>
-          <a:lstStyle/>
-          <a:p>
-            <a:pPr algn="ctr"/>
-            <a:r>
-              <a:rPr sz="1400" b="0">
+              <a:t>• รู้ว่าคำสั่ง git ทั้งหมด ให้ Claude ทำให้ได้</a:t>
+            </a:r>
+          </a:p>
+        </p:txBody>
+      </p:sp>
+      <p:sp>
+        <p:nvSpPr>
+          <p:cNvPr id="4" name="TextBox 3"/>
+          <p:cNvSpPr txBox="1"/>
+          <p:nvPr/>
+        </p:nvSpPr>
+        <p:spPr>
+          <a:xfrm>
+            <a:off x="822960" y="2087372"/>
+            <a:ext cx="10545775" cy="560324"/>
+          </a:xfrm>
+          <a:prstGeom prst="rect">
+            <a:avLst/>
+          </a:prstGeom>
+          <a:noFill/>
+        </p:spPr>
+        <p:txBody>
+          <a:bodyPr wrap="square">
+            <a:spAutoFit/>
+          </a:bodyPr>
+          <a:lstStyle/>
+          <a:p>
+            <a:pPr algn="l"/>
+            <a:r>
+              <a:rPr sz="2600" b="0">
                 <a:solidFill>
                   <a:srgbClr val="1A1A1A"/>
                 </a:solidFill>
@@ -19700,201 +20286,36 @@
                 <a:ea typeface="Leelawadee UI"/>
                 <a:cs typeface="Leelawadee UI"/>
               </a:rPr>
-              <a:t>คำสั่ง deploy</a:t>
-            </a:r>
-          </a:p>
-        </p:txBody>
-      </p:sp>
-      <p:sp>
-        <p:nvSpPr>
-          <p:cNvPr id="6" name="Right Arrow 5"/>
-          <p:cNvSpPr/>
-          <p:nvPr/>
-        </p:nvSpPr>
-        <p:spPr>
-          <a:xfrm>
-            <a:off x="5949907" y="1931670"/>
-            <a:ext cx="291876" cy="315468"/>
-          </a:xfrm>
-          <a:prstGeom prst="rightArrow">
-            <a:avLst/>
-          </a:prstGeom>
-          <a:solidFill>
-            <a:srgbClr val="7A91A8"/>
-          </a:solidFill>
-          <a:ln>
-            <a:noFill/>
-          </a:ln>
-          <a:effectLst/>
-        </p:spPr>
-        <p:style>
-          <a:lnRef idx="1">
-            <a:schemeClr val="accent1"/>
-          </a:lnRef>
-          <a:fillRef idx="3">
-            <a:schemeClr val="accent1"/>
-          </a:fillRef>
-          <a:effectRef idx="2">
-            <a:schemeClr val="accent1"/>
-          </a:effectRef>
-          <a:fontRef idx="minor">
-            <a:schemeClr val="lt1"/>
-          </a:fontRef>
-        </p:style>
-        <p:txBody>
-          <a:bodyPr rtlCol="0" anchor="ctr"/>
-          <a:lstStyle/>
-          <a:p>
-            <a:pPr algn="ctr"/>
-          </a:p>
-        </p:txBody>
-      </p:sp>
-      <p:sp>
-        <p:nvSpPr>
-          <p:cNvPr id="7" name="Rounded Rectangle 6"/>
-          <p:cNvSpPr/>
-          <p:nvPr/>
-        </p:nvSpPr>
-        <p:spPr>
-          <a:xfrm>
-            <a:off x="6287870" y="1563624"/>
-            <a:ext cx="2348407" cy="1051560"/>
-          </a:xfrm>
-          <a:prstGeom prst="roundRect">
-            <a:avLst/>
-          </a:prstGeom>
-          <a:solidFill>
-            <a:srgbClr val="1F5FA8"/>
-          </a:solidFill>
-          <a:ln w="15875">
-            <a:solidFill>
-              <a:srgbClr val="9CB5D1"/>
-            </a:solidFill>
-          </a:ln>
-          <a:effectLst/>
-        </p:spPr>
-        <p:style>
-          <a:lnRef idx="1">
-            <a:schemeClr val="accent1"/>
-          </a:lnRef>
-          <a:fillRef idx="3">
-            <a:schemeClr val="accent1"/>
-          </a:fillRef>
-          <a:effectRef idx="2">
-            <a:schemeClr val="accent1"/>
-          </a:effectRef>
-          <a:fontRef idx="minor">
-            <a:schemeClr val="lt1"/>
-          </a:fontRef>
-        </p:style>
-        <p:txBody>
-          <a:bodyPr rtlCol="0" anchor="ctr" wrap="square" lIns="54864" rIns="54864" tIns="27432" bIns="27432"/>
-          <a:lstStyle/>
-          <a:p>
-            <a:pPr algn="ctr"/>
-            <a:r>
-              <a:rPr sz="1400" b="1">
-                <a:solidFill>
-                  <a:srgbClr val="FFFFFF"/>
-                </a:solidFill>
-                <a:latin typeface="Leelawadee UI"/>
-                <a:ea typeface="Leelawadee UI"/>
-                <a:cs typeface="Leelawadee UI"/>
-              </a:rPr>
-              <a:t>Hosting บนคลาวด์</a:t>
-            </a:r>
-          </a:p>
-        </p:txBody>
-      </p:sp>
-      <p:sp>
-        <p:nvSpPr>
-          <p:cNvPr id="8" name="Right Arrow 7"/>
-          <p:cNvSpPr/>
-          <p:nvPr/>
-        </p:nvSpPr>
-        <p:spPr>
-          <a:xfrm>
-            <a:off x="8682362" y="1931670"/>
-            <a:ext cx="291876" cy="315468"/>
-          </a:xfrm>
-          <a:prstGeom prst="rightArrow">
-            <a:avLst/>
-          </a:prstGeom>
-          <a:solidFill>
-            <a:srgbClr val="7A91A8"/>
-          </a:solidFill>
-          <a:ln>
-            <a:noFill/>
-          </a:ln>
-          <a:effectLst/>
-        </p:spPr>
-        <p:style>
-          <a:lnRef idx="1">
-            <a:schemeClr val="accent1"/>
-          </a:lnRef>
-          <a:fillRef idx="3">
-            <a:schemeClr val="accent1"/>
-          </a:fillRef>
-          <a:effectRef idx="2">
-            <a:schemeClr val="accent1"/>
-          </a:effectRef>
-          <a:fontRef idx="minor">
-            <a:schemeClr val="lt1"/>
-          </a:fontRef>
-        </p:style>
-        <p:txBody>
-          <a:bodyPr rtlCol="0" anchor="ctr"/>
-          <a:lstStyle/>
-          <a:p>
-            <a:pPr algn="ctr"/>
-          </a:p>
-        </p:txBody>
-      </p:sp>
-      <p:sp>
-        <p:nvSpPr>
-          <p:cNvPr id="9" name="Rounded Rectangle 8"/>
-          <p:cNvSpPr/>
-          <p:nvPr/>
-        </p:nvSpPr>
-        <p:spPr>
-          <a:xfrm>
-            <a:off x="9020325" y="1563624"/>
-            <a:ext cx="2348407" cy="1051560"/>
-          </a:xfrm>
-          <a:prstGeom prst="roundRect">
-            <a:avLst/>
-          </a:prstGeom>
-          <a:solidFill>
-            <a:srgbClr val="E8EFF7"/>
-          </a:solidFill>
-          <a:ln w="15875">
-            <a:solidFill>
-              <a:srgbClr val="9CB5D1"/>
-            </a:solidFill>
-          </a:ln>
-          <a:effectLst/>
-        </p:spPr>
-        <p:style>
-          <a:lnRef idx="1">
-            <a:schemeClr val="accent1"/>
-          </a:lnRef>
-          <a:fillRef idx="3">
-            <a:schemeClr val="accent1"/>
-          </a:fillRef>
-          <a:effectRef idx="2">
-            <a:schemeClr val="accent1"/>
-          </a:effectRef>
-          <a:fontRef idx="minor">
-            <a:schemeClr val="lt1"/>
-          </a:fontRef>
-        </p:style>
-        <p:txBody>
-          <a:bodyPr rtlCol="0" anchor="ctr" wrap="square" lIns="54864" rIns="54864" tIns="27432" bIns="27432"/>
-          <a:lstStyle/>
-          <a:p>
-            <a:pPr algn="ctr"/>
-            <a:r>
-              <a:rPr sz="1400" b="0">
+              <a:t>• ท่อง 3 อย่างที่ AI ทำแทนไม่ได้</a:t>
+            </a:r>
+          </a:p>
+        </p:txBody>
+      </p:sp>
+      <p:sp>
+        <p:nvSpPr>
+          <p:cNvPr id="5" name="TextBox 4"/>
+          <p:cNvSpPr txBox="1"/>
+          <p:nvPr/>
+        </p:nvSpPr>
+        <p:spPr>
+          <a:xfrm>
+            <a:off x="822960" y="2702560"/>
+            <a:ext cx="10545775" cy="560324"/>
+          </a:xfrm>
+          <a:prstGeom prst="rect">
+            <a:avLst/>
+          </a:prstGeom>
+          <a:noFill/>
+        </p:spPr>
+        <p:txBody>
+          <a:bodyPr wrap="square">
+            <a:spAutoFit/>
+          </a:bodyPr>
+          <a:lstStyle/>
+          <a:p>
+            <a:pPr algn="l"/>
+            <a:r>
+              <a:rPr sz="2600" b="0">
                 <a:solidFill>
                   <a:srgbClr val="1A1A1A"/>
                 </a:solidFill>
@@ -19902,14 +20323,51 @@
                 <a:ea typeface="Leelawadee UI"/>
                 <a:cs typeface="Leelawadee UI"/>
               </a:rPr>
-              <a:t>ใครก็เปิด URL ได้</a:t>
-            </a:r>
-          </a:p>
-        </p:txBody>
-      </p:sp>
-      <p:sp>
-        <p:nvSpPr>
-          <p:cNvPr id="10" name="TextBox 9"/>
+              <a:t>• รู้ว่า commit ก่อนให้ AI แตะ git เสมอ</a:t>
+            </a:r>
+          </a:p>
+        </p:txBody>
+      </p:sp>
+      <p:sp>
+        <p:nvSpPr>
+          <p:cNvPr id="6" name="TextBox 5"/>
+          <p:cNvSpPr txBox="1"/>
+          <p:nvPr/>
+        </p:nvSpPr>
+        <p:spPr>
+          <a:xfrm>
+            <a:off x="822960" y="3317748"/>
+            <a:ext cx="10545775" cy="560324"/>
+          </a:xfrm>
+          <a:prstGeom prst="rect">
+            <a:avLst/>
+          </a:prstGeom>
+          <a:noFill/>
+        </p:spPr>
+        <p:txBody>
+          <a:bodyPr wrap="square">
+            <a:spAutoFit/>
+          </a:bodyPr>
+          <a:lstStyle/>
+          <a:p>
+            <a:pPr algn="l"/>
+            <a:r>
+              <a:rPr sz="2600" b="0">
+                <a:solidFill>
+                  <a:srgbClr val="1A1A1A"/>
+                </a:solidFill>
+                <a:latin typeface="Leelawadee UI"/>
+                <a:ea typeface="Leelawadee UI"/>
+                <a:cs typeface="Leelawadee UI"/>
+              </a:rPr>
+              <a:t>• รู้ว่างานชนกันไม่ใช่งานหาย — กู้ได้เสมอ</a:t>
+            </a:r>
+          </a:p>
+        </p:txBody>
+      </p:sp>
+      <p:sp>
+        <p:nvSpPr>
+          <p:cNvPr id="7" name="TextBox 6"/>
           <p:cNvSpPr txBox="1"/>
           <p:nvPr/>
         </p:nvSpPr>
@@ -19963,38 +20421,44 @@
       <p:grpSpPr/>
       <p:sp>
         <p:nvSpPr>
-          <p:cNvPr id="2" name="TextBox 1"/>
-          <p:cNvSpPr txBox="1"/>
-          <p:nvPr/>
-        </p:nvSpPr>
-        <p:spPr>
-          <a:xfrm>
-            <a:off x="822960" y="502920"/>
-            <a:ext cx="10545775" cy="1408176"/>
-          </a:xfrm>
-          <a:prstGeom prst="rect">
-            <a:avLst/>
-          </a:prstGeom>
-          <a:noFill/>
-        </p:spPr>
-        <p:txBody>
-          <a:bodyPr wrap="square">
-            <a:spAutoFit/>
-          </a:bodyPr>
-          <a:lstStyle/>
-          <a:p>
-            <a:pPr algn="l"/>
-            <a:r>
-              <a:rPr sz="3600" b="1">
-                <a:solidFill>
-                  <a:srgbClr val="1F5FA8"/>
-                </a:solidFill>
-                <a:latin typeface="Leelawadee UI"/>
-                <a:ea typeface="Leelawadee UI"/>
-                <a:cs typeface="Leelawadee UI"/>
-              </a:rPr>
-              <a:t>deploy เว็บอย่างเดียวไม่พอ — กฎต้องขึ้นด้วย</a:t>
-            </a:r>
+          <p:cNvPr id="2" name="Rectangle 1"/>
+          <p:cNvSpPr/>
+          <p:nvPr/>
+        </p:nvSpPr>
+        <p:spPr>
+          <a:xfrm>
+            <a:off x="0" y="0"/>
+            <a:ext cx="12191695" cy="6858000"/>
+          </a:xfrm>
+          <a:prstGeom prst="rect">
+            <a:avLst/>
+          </a:prstGeom>
+          <a:solidFill>
+            <a:srgbClr val="1F5FA8"/>
+          </a:solidFill>
+          <a:ln>
+            <a:noFill/>
+          </a:ln>
+        </p:spPr>
+        <p:style>
+          <a:lnRef idx="1">
+            <a:schemeClr val="accent1"/>
+          </a:lnRef>
+          <a:fillRef idx="3">
+            <a:schemeClr val="accent1"/>
+          </a:fillRef>
+          <a:effectRef idx="2">
+            <a:schemeClr val="accent1"/>
+          </a:effectRef>
+          <a:fontRef idx="minor">
+            <a:schemeClr val="lt1"/>
+          </a:fontRef>
+        </p:style>
+        <p:txBody>
+          <a:bodyPr rtlCol="0" anchor="ctr"/>
+          <a:lstStyle/>
+          <a:p>
+            <a:pPr algn="ctr"/>
           </a:p>
         </p:txBody>
       </p:sp>
@@ -20006,31 +20470,31 @@
         </p:nvSpPr>
         <p:spPr>
           <a:xfrm>
-            <a:off x="822960" y="2075688"/>
-            <a:ext cx="10545775" cy="560324"/>
-          </a:xfrm>
-          <a:prstGeom prst="rect">
-            <a:avLst/>
-          </a:prstGeom>
-          <a:noFill/>
-        </p:spPr>
-        <p:txBody>
-          <a:bodyPr wrap="square">
-            <a:spAutoFit/>
-          </a:bodyPr>
-          <a:lstStyle/>
-          <a:p>
-            <a:pPr algn="l"/>
-            <a:r>
-              <a:rPr sz="2600" b="0">
-                <a:solidFill>
-                  <a:srgbClr val="1A1A1A"/>
-                </a:solidFill>
-                <a:latin typeface="Leelawadee UI"/>
-                <a:ea typeface="Leelawadee UI"/>
-                <a:cs typeface="Leelawadee UI"/>
-              </a:rPr>
-              <a:t>• เว็บกับกฎ deploy แยกกันคนละส่วน</a:t>
+            <a:off x="822960" y="2743200"/>
+            <a:ext cx="10545775" cy="1463040"/>
+          </a:xfrm>
+          <a:prstGeom prst="rect">
+            <a:avLst/>
+          </a:prstGeom>
+          <a:noFill/>
+        </p:spPr>
+        <p:txBody>
+          <a:bodyPr wrap="square" anchor="ctr">
+            <a:spAutoFit/>
+          </a:bodyPr>
+          <a:lstStyle/>
+          <a:p>
+            <a:pPr algn="ctr"/>
+            <a:r>
+              <a:rPr sz="4000" b="1">
+                <a:solidFill>
+                  <a:srgbClr val="FFFFFF"/>
+                </a:solidFill>
+                <a:latin typeface="Leelawadee UI"/>
+                <a:ea typeface="Leelawadee UI"/>
+                <a:cs typeface="Leelawadee UI"/>
+              </a:rPr>
+              <a:t>ช่วงที่ 6 — 🌐 Deploy ขึ้นออนไลน์ ⏱ 11:22–11:55</a:t>
             </a:r>
           </a:p>
         </p:txBody>
@@ -20038,117 +20502,6 @@
       <p:sp>
         <p:nvSpPr>
           <p:cNvPr id="4" name="TextBox 3"/>
-          <p:cNvSpPr txBox="1"/>
-          <p:nvPr/>
-        </p:nvSpPr>
-        <p:spPr>
-          <a:xfrm>
-            <a:off x="822960" y="2690876"/>
-            <a:ext cx="10545775" cy="1029208"/>
-          </a:xfrm>
-          <a:prstGeom prst="rect">
-            <a:avLst/>
-          </a:prstGeom>
-          <a:noFill/>
-        </p:spPr>
-        <p:txBody>
-          <a:bodyPr wrap="square">
-            <a:spAutoFit/>
-          </a:bodyPr>
-          <a:lstStyle/>
-          <a:p>
-            <a:pPr algn="l"/>
-            <a:r>
-              <a:rPr sz="2600" b="0">
-                <a:solidFill>
-                  <a:srgbClr val="1A1A1A"/>
-                </a:solidFill>
-                <a:latin typeface="Leelawadee UI"/>
-                <a:ea typeface="Leelawadee UI"/>
-                <a:cs typeface="Leelawadee UI"/>
-              </a:rPr>
-              <a:t>• กฎที่เขียนไว้ในเครื่อง ยังไม่คุ้มครองของจริง จนกว่าจะ deploy</a:t>
-            </a:r>
-          </a:p>
-        </p:txBody>
-      </p:sp>
-      <p:sp>
-        <p:nvSpPr>
-          <p:cNvPr id="5" name="TextBox 4"/>
-          <p:cNvSpPr txBox="1"/>
-          <p:nvPr/>
-        </p:nvSpPr>
-        <p:spPr>
-          <a:xfrm>
-            <a:off x="822960" y="3774948"/>
-            <a:ext cx="10545775" cy="560324"/>
-          </a:xfrm>
-          <a:prstGeom prst="rect">
-            <a:avLst/>
-          </a:prstGeom>
-          <a:noFill/>
-        </p:spPr>
-        <p:txBody>
-          <a:bodyPr wrap="square">
-            <a:spAutoFit/>
-          </a:bodyPr>
-          <a:lstStyle/>
-          <a:p>
-            <a:pPr algn="l"/>
-            <a:r>
-              <a:rPr sz="2600" b="0">
-                <a:solidFill>
-                  <a:srgbClr val="1A1A1A"/>
-                </a:solidFill>
-                <a:latin typeface="Leelawadee UI"/>
-                <a:ea typeface="Leelawadee UI"/>
-                <a:cs typeface="Leelawadee UI"/>
-              </a:rPr>
-              <a:t>• 🚫 ห้ามออกออนไลน์โดยไม่มีกฎขั้นต่ำ — ไม่มีข้อยกเว้น</a:t>
-            </a:r>
-          </a:p>
-        </p:txBody>
-      </p:sp>
-      <p:sp>
-        <p:nvSpPr>
-          <p:cNvPr id="6" name="TextBox 5"/>
-          <p:cNvSpPr txBox="1"/>
-          <p:nvPr/>
-        </p:nvSpPr>
-        <p:spPr>
-          <a:xfrm>
-            <a:off x="822960" y="4390136"/>
-            <a:ext cx="10545775" cy="560324"/>
-          </a:xfrm>
-          <a:prstGeom prst="rect">
-            <a:avLst/>
-          </a:prstGeom>
-          <a:noFill/>
-        </p:spPr>
-        <p:txBody>
-          <a:bodyPr wrap="square">
-            <a:spAutoFit/>
-          </a:bodyPr>
-          <a:lstStyle/>
-          <a:p>
-            <a:pPr algn="l"/>
-            <a:r>
-              <a:rPr sz="2600" b="0">
-                <a:solidFill>
-                  <a:srgbClr val="1A1A1A"/>
-                </a:solidFill>
-                <a:latin typeface="Leelawadee UI"/>
-                <a:ea typeface="Leelawadee UI"/>
-                <a:cs typeface="Leelawadee UI"/>
-              </a:rPr>
-              <a:t>• สั่ง AI ให้ deploy ทั้งเว็บและกฎในรอบเดียว</a:t>
-            </a:r>
-          </a:p>
-        </p:txBody>
-      </p:sp>
-      <p:sp>
-        <p:nvSpPr>
-          <p:cNvPr id="7" name="TextBox 6"/>
           <p:cNvSpPr txBox="1"/>
           <p:nvPr/>
         </p:nvSpPr>
@@ -20209,7 +20562,7 @@
         <p:spPr>
           <a:xfrm>
             <a:off x="822960" y="502920"/>
-            <a:ext cx="10545775" cy="804672"/>
+            <a:ext cx="10545775" cy="1408176"/>
           </a:xfrm>
           <a:prstGeom prst="rect">
             <a:avLst/>
@@ -20232,7 +20585,7 @@
                 <a:ea typeface="Leelawadee UI"/>
                 <a:cs typeface="Leelawadee UI"/>
               </a:rPr>
-              <a:t>ในเครื่องได้ ออนไลน์พัง — 2 สาเหตุหลัก</a:t>
+              <a:t>Deploy = นำเว็บขึ้นออนไลน์ให้คนอื่นเปิดได้</a:t>
             </a:r>
           </a:p>
         </p:txBody>
@@ -20245,7 +20598,44 @@
         </p:nvSpPr>
         <p:spPr>
           <a:xfrm>
-            <a:off x="822960" y="1472184"/>
+            <a:off x="822960" y="2075688"/>
+            <a:ext cx="10545775" cy="1029208"/>
+          </a:xfrm>
+          <a:prstGeom prst="rect">
+            <a:avLst/>
+          </a:prstGeom>
+          <a:noFill/>
+        </p:spPr>
+        <p:txBody>
+          <a:bodyPr wrap="square">
+            <a:spAutoFit/>
+          </a:bodyPr>
+          <a:lstStyle/>
+          <a:p>
+            <a:pPr algn="l"/>
+            <a:r>
+              <a:rPr sz="2600" b="0">
+                <a:solidFill>
+                  <a:srgbClr val="1A1A1A"/>
+                </a:solidFill>
+                <a:latin typeface="Leelawadee UI"/>
+                <a:ea typeface="Leelawadee UI"/>
+                <a:cs typeface="Leelawadee UI"/>
+              </a:rPr>
+              <a:t>• Deploy = ส่งเว็บจากเครื่องเราขึ้นไปอยู่บนอินเทอร์เน็ต</a:t>
+            </a:r>
+          </a:p>
+        </p:txBody>
+      </p:sp>
+      <p:sp>
+        <p:nvSpPr>
+          <p:cNvPr id="4" name="TextBox 3"/>
+          <p:cNvSpPr txBox="1"/>
+          <p:nvPr/>
+        </p:nvSpPr>
+        <p:spPr>
+          <a:xfrm>
+            <a:off x="822960" y="3159760"/>
             <a:ext cx="10545775" cy="560324"/>
           </a:xfrm>
           <a:prstGeom prst="rect">
@@ -20269,21 +20659,21 @@
                 <a:ea typeface="Leelawadee UI"/>
                 <a:cs typeface="Leelawadee UI"/>
               </a:rPr>
-              <a:t>• สาเหตุ 1: กฎยังไม่ deploy — ขึ้น permission denied</a:t>
-            </a:r>
-          </a:p>
-        </p:txBody>
-      </p:sp>
-      <p:sp>
-        <p:nvSpPr>
-          <p:cNvPr id="4" name="TextBox 3"/>
-          <p:cNvSpPr txBox="1"/>
-          <p:nvPr/>
-        </p:nvSpPr>
-        <p:spPr>
-          <a:xfrm>
-            <a:off x="822960" y="2087372"/>
-            <a:ext cx="10545775" cy="560324"/>
+              <a:t>• ใช้ Firebase Hosting (บริการที่ทำให้เว็บเรามี URL)</a:t>
+            </a:r>
+          </a:p>
+        </p:txBody>
+      </p:sp>
+      <p:sp>
+        <p:nvSpPr>
+          <p:cNvPr id="5" name="TextBox 4"/>
+          <p:cNvSpPr txBox="1"/>
+          <p:nvPr/>
+        </p:nvSpPr>
+        <p:spPr>
+          <a:xfrm>
+            <a:off x="822960" y="3774948"/>
+            <a:ext cx="10545775" cy="1029208"/>
           </a:xfrm>
           <a:prstGeom prst="rect">
             <a:avLst/>
@@ -20306,20 +20696,20 @@
                 <a:ea typeface="Leelawadee UI"/>
                 <a:cs typeface="Leelawadee UI"/>
               </a:rPr>
-              <a:t>• สาเหตุ 2: index (สารบัญช่วยค้น) ยังไม่สร้าง</a:t>
-            </a:r>
-          </a:p>
-        </p:txBody>
-      </p:sp>
-      <p:sp>
-        <p:nvSpPr>
-          <p:cNvPr id="5" name="TextBox 4"/>
-          <p:cNvSpPr txBox="1"/>
-          <p:nvPr/>
-        </p:nvSpPr>
-        <p:spPr>
-          <a:xfrm>
-            <a:off x="822960" y="2702560"/>
+              <a:t>• localhost = ในเครื่องเราคนเดียว · URL จริง = ใครก็เปิดได้</a:t>
+            </a:r>
+          </a:p>
+        </p:txBody>
+      </p:sp>
+      <p:sp>
+        <p:nvSpPr>
+          <p:cNvPr id="6" name="TextBox 5"/>
+          <p:cNvSpPr txBox="1"/>
+          <p:nvPr/>
+        </p:nvSpPr>
+        <p:spPr>
+          <a:xfrm>
+            <a:off x="822960" y="4859020"/>
             <a:ext cx="10545775" cy="1029208"/>
           </a:xfrm>
           <a:prstGeom prst="rect">
@@ -20343,44 +20733,7 @@
                 <a:ea typeface="Leelawadee UI"/>
                 <a:cs typeface="Leelawadee UI"/>
               </a:rPr>
-              <a:t>• ทางแก้ index: อ่าน error → กดลิงก์ในข้อความ → กดสร้าง → รอ</a:t>
-            </a:r>
-          </a:p>
-        </p:txBody>
-      </p:sp>
-      <p:sp>
-        <p:nvSpPr>
-          <p:cNvPr id="6" name="TextBox 5"/>
-          <p:cNvSpPr txBox="1"/>
-          <p:nvPr/>
-        </p:nvSpPr>
-        <p:spPr>
-          <a:xfrm>
-            <a:off x="822960" y="3786632"/>
-            <a:ext cx="10545775" cy="560324"/>
-          </a:xfrm>
-          <a:prstGeom prst="rect">
-            <a:avLst/>
-          </a:prstGeom>
-          <a:noFill/>
-        </p:spPr>
-        <p:txBody>
-          <a:bodyPr wrap="square">
-            <a:spAutoFit/>
-          </a:bodyPr>
-          <a:lstStyle/>
-          <a:p>
-            <a:pPr algn="l"/>
-            <a:r>
-              <a:rPr sz="2600" b="0">
-                <a:solidFill>
-                  <a:srgbClr val="1A1A1A"/>
-                </a:solidFill>
-                <a:latin typeface="Leelawadee UI"/>
-                <a:ea typeface="Leelawadee UI"/>
-                <a:cs typeface="Leelawadee UI"/>
-              </a:rPr>
-              <a:t>• อ่าน error ให้จบบรรทัดก่อนตกใจ</a:t>
+              <a:t>• ยังไม่สมบูรณ์ก็ deploy ได้ — ไม่ต้องรอเสร็จร้อยเปอร์เซ็นต์</a:t>
             </a:r>
           </a:p>
         </p:txBody>
@@ -20441,24 +20794,64 @@
       <p:grpSpPr/>
       <p:sp>
         <p:nvSpPr>
-          <p:cNvPr id="2" name="Rectangle 1"/>
+          <p:cNvPr id="2" name="TextBox 1"/>
+          <p:cNvSpPr txBox="1"/>
+          <p:nvPr/>
+        </p:nvSpPr>
+        <p:spPr>
+          <a:xfrm>
+            <a:off x="822960" y="502920"/>
+            <a:ext cx="10545775" cy="804672"/>
+          </a:xfrm>
+          <a:prstGeom prst="rect">
+            <a:avLst/>
+          </a:prstGeom>
+          <a:noFill/>
+        </p:spPr>
+        <p:txBody>
+          <a:bodyPr wrap="square">
+            <a:spAutoFit/>
+          </a:bodyPr>
+          <a:lstStyle/>
+          <a:p>
+            <a:pPr algn="l"/>
+            <a:r>
+              <a:rPr sz="3600" b="1">
+                <a:solidFill>
+                  <a:srgbClr val="1F5FA8"/>
+                </a:solidFill>
+                <a:latin typeface="Leelawadee UI"/>
+                <a:ea typeface="Leelawadee UI"/>
+                <a:cs typeface="Leelawadee UI"/>
+              </a:rPr>
+              <a:t>เส้นทางของการ deploy</a:t>
+            </a:r>
+          </a:p>
+        </p:txBody>
+      </p:sp>
+      <p:sp>
+        <p:nvSpPr>
+          <p:cNvPr id="3" name="Rounded Rectangle 2"/>
           <p:cNvSpPr/>
           <p:nvPr/>
         </p:nvSpPr>
         <p:spPr>
           <a:xfrm>
-            <a:off x="0" y="0"/>
-            <a:ext cx="12191695" cy="6858000"/>
-          </a:xfrm>
-          <a:prstGeom prst="rect">
+            <a:off x="822960" y="1563624"/>
+            <a:ext cx="2348407" cy="1051560"/>
+          </a:xfrm>
+          <a:prstGeom prst="roundRect">
             <a:avLst/>
           </a:prstGeom>
           <a:solidFill>
-            <a:srgbClr val="FFF3DF"/>
+            <a:srgbClr val="E8EFF7"/>
           </a:solidFill>
-          <a:ln>
-            <a:noFill/>
+          <a:ln w="15875">
+            <a:solidFill>
+              <a:srgbClr val="9CB5D1"/>
+            </a:solidFill>
           </a:ln>
+          <a:effectLst/>
         </p:spPr>
         <p:style>
           <a:lnRef idx="1">
@@ -20475,33 +20868,45 @@
           </a:fontRef>
         </p:style>
         <p:txBody>
-          <a:bodyPr rtlCol="0" anchor="ctr"/>
+          <a:bodyPr rtlCol="0" anchor="ctr" wrap="square" lIns="54864" rIns="54864" tIns="27432" bIns="27432"/>
           <a:lstStyle/>
           <a:p>
             <a:pPr algn="ctr"/>
-          </a:p>
-        </p:txBody>
-      </p:sp>
-      <p:sp>
-        <p:nvSpPr>
-          <p:cNvPr id="3" name="Rectangle 2"/>
+            <a:r>
+              <a:rPr sz="1400" b="0">
+                <a:solidFill>
+                  <a:srgbClr val="1A1A1A"/>
+                </a:solidFill>
+                <a:latin typeface="Leelawadee UI"/>
+                <a:ea typeface="Leelawadee UI"/>
+                <a:cs typeface="Leelawadee UI"/>
+              </a:rPr>
+              <a:t>โค้ดในเครื่องเรา</a:t>
+            </a:r>
+          </a:p>
+        </p:txBody>
+      </p:sp>
+      <p:sp>
+        <p:nvSpPr>
+          <p:cNvPr id="4" name="Right Arrow 3"/>
           <p:cNvSpPr/>
           <p:nvPr/>
         </p:nvSpPr>
         <p:spPr>
           <a:xfrm>
-            <a:off x="0" y="0"/>
-            <a:ext cx="146304" cy="6858000"/>
-          </a:xfrm>
-          <a:prstGeom prst="rect">
+            <a:off x="3217452" y="1931670"/>
+            <a:ext cx="291876" cy="315468"/>
+          </a:xfrm>
+          <a:prstGeom prst="rightArrow">
             <a:avLst/>
           </a:prstGeom>
           <a:solidFill>
-            <a:srgbClr val="E0A02C"/>
+            <a:srgbClr val="7A91A8"/>
           </a:solidFill>
           <a:ln>
             <a:noFill/>
           </a:ln>
+          <a:effectLst/>
         </p:spPr>
         <p:style>
           <a:lnRef idx="1">
@@ -20527,103 +20932,251 @@
       </p:sp>
       <p:sp>
         <p:nvSpPr>
-          <p:cNvPr id="4" name="TextBox 3"/>
-          <p:cNvSpPr txBox="1"/>
-          <p:nvPr/>
-        </p:nvSpPr>
-        <p:spPr>
-          <a:xfrm>
-            <a:off x="9082735" y="109728"/>
-            <a:ext cx="2834640" cy="384048"/>
-          </a:xfrm>
-          <a:prstGeom prst="rect">
-            <a:avLst/>
-          </a:prstGeom>
-          <a:noFill/>
-        </p:spPr>
-        <p:txBody>
-          <a:bodyPr wrap="square">
-            <a:spAutoFit/>
-          </a:bodyPr>
-          <a:lstStyle/>
-          <a:p>
-            <a:pPr algn="r"/>
+          <p:cNvPr id="5" name="Rounded Rectangle 4"/>
+          <p:cNvSpPr/>
+          <p:nvPr/>
+        </p:nvSpPr>
+        <p:spPr>
+          <a:xfrm>
+            <a:off x="3555415" y="1563624"/>
+            <a:ext cx="2348407" cy="1051560"/>
+          </a:xfrm>
+          <a:prstGeom prst="roundRect">
+            <a:avLst/>
+          </a:prstGeom>
+          <a:solidFill>
+            <a:srgbClr val="E8EFF7"/>
+          </a:solidFill>
+          <a:ln w="15875">
+            <a:solidFill>
+              <a:srgbClr val="9CB5D1"/>
+            </a:solidFill>
+          </a:ln>
+          <a:effectLst/>
+        </p:spPr>
+        <p:style>
+          <a:lnRef idx="1">
+            <a:schemeClr val="accent1"/>
+          </a:lnRef>
+          <a:fillRef idx="3">
+            <a:schemeClr val="accent1"/>
+          </a:fillRef>
+          <a:effectRef idx="2">
+            <a:schemeClr val="accent1"/>
+          </a:effectRef>
+          <a:fontRef idx="minor">
+            <a:schemeClr val="lt1"/>
+          </a:fontRef>
+        </p:style>
+        <p:txBody>
+          <a:bodyPr rtlCol="0" anchor="ctr" wrap="square" lIns="54864" rIns="54864" tIns="27432" bIns="27432"/>
+          <a:lstStyle/>
+          <a:p>
+            <a:pPr algn="ctr"/>
+            <a:r>
+              <a:rPr sz="1400" b="0">
+                <a:solidFill>
+                  <a:srgbClr val="1A1A1A"/>
+                </a:solidFill>
+                <a:latin typeface="Leelawadee UI"/>
+                <a:ea typeface="Leelawadee UI"/>
+                <a:cs typeface="Leelawadee UI"/>
+              </a:rPr>
+              <a:t>คำสั่ง deploy</a:t>
+            </a:r>
+          </a:p>
+        </p:txBody>
+      </p:sp>
+      <p:sp>
+        <p:nvSpPr>
+          <p:cNvPr id="6" name="Right Arrow 5"/>
+          <p:cNvSpPr/>
+          <p:nvPr/>
+        </p:nvSpPr>
+        <p:spPr>
+          <a:xfrm>
+            <a:off x="5949907" y="1931670"/>
+            <a:ext cx="291876" cy="315468"/>
+          </a:xfrm>
+          <a:prstGeom prst="rightArrow">
+            <a:avLst/>
+          </a:prstGeom>
+          <a:solidFill>
+            <a:srgbClr val="7A91A8"/>
+          </a:solidFill>
+          <a:ln>
+            <a:noFill/>
+          </a:ln>
+          <a:effectLst/>
+        </p:spPr>
+        <p:style>
+          <a:lnRef idx="1">
+            <a:schemeClr val="accent1"/>
+          </a:lnRef>
+          <a:fillRef idx="3">
+            <a:schemeClr val="accent1"/>
+          </a:fillRef>
+          <a:effectRef idx="2">
+            <a:schemeClr val="accent1"/>
+          </a:effectRef>
+          <a:fontRef idx="minor">
+            <a:schemeClr val="lt1"/>
+          </a:fontRef>
+        </p:style>
+        <p:txBody>
+          <a:bodyPr rtlCol="0" anchor="ctr"/>
+          <a:lstStyle/>
+          <a:p>
+            <a:pPr algn="ctr"/>
+          </a:p>
+        </p:txBody>
+      </p:sp>
+      <p:sp>
+        <p:nvSpPr>
+          <p:cNvPr id="7" name="Rounded Rectangle 6"/>
+          <p:cNvSpPr/>
+          <p:nvPr/>
+        </p:nvSpPr>
+        <p:spPr>
+          <a:xfrm>
+            <a:off x="6287870" y="1563624"/>
+            <a:ext cx="2348407" cy="1051560"/>
+          </a:xfrm>
+          <a:prstGeom prst="roundRect">
+            <a:avLst/>
+          </a:prstGeom>
+          <a:solidFill>
+            <a:srgbClr val="1F5FA8"/>
+          </a:solidFill>
+          <a:ln w="15875">
+            <a:solidFill>
+              <a:srgbClr val="9CB5D1"/>
+            </a:solidFill>
+          </a:ln>
+          <a:effectLst/>
+        </p:spPr>
+        <p:style>
+          <a:lnRef idx="1">
+            <a:schemeClr val="accent1"/>
+          </a:lnRef>
+          <a:fillRef idx="3">
+            <a:schemeClr val="accent1"/>
+          </a:fillRef>
+          <a:effectRef idx="2">
+            <a:schemeClr val="accent1"/>
+          </a:effectRef>
+          <a:fontRef idx="minor">
+            <a:schemeClr val="lt1"/>
+          </a:fontRef>
+        </p:style>
+        <p:txBody>
+          <a:bodyPr rtlCol="0" anchor="ctr" wrap="square" lIns="54864" rIns="54864" tIns="27432" bIns="27432"/>
+          <a:lstStyle/>
+          <a:p>
+            <a:pPr algn="ctr"/>
             <a:r>
               <a:rPr sz="1400" b="1">
                 <a:solidFill>
-                  <a:srgbClr val="8A5400"/>
-                </a:solidFill>
-                <a:latin typeface="Leelawadee UI"/>
-                <a:ea typeface="Leelawadee UI"/>
-                <a:cs typeface="Leelawadee UI"/>
-              </a:rPr>
-              <a:t>🎬 สลับไปหน้าจอสาธิตสด</a:t>
-            </a:r>
-          </a:p>
-        </p:txBody>
-      </p:sp>
-      <p:sp>
-        <p:nvSpPr>
-          <p:cNvPr id="5" name="TextBox 4"/>
-          <p:cNvSpPr txBox="1"/>
-          <p:nvPr/>
-        </p:nvSpPr>
-        <p:spPr>
-          <a:xfrm>
-            <a:off x="822960" y="502920"/>
-            <a:ext cx="10545775" cy="1408176"/>
-          </a:xfrm>
-          <a:prstGeom prst="rect">
-            <a:avLst/>
-          </a:prstGeom>
-          <a:noFill/>
-        </p:spPr>
-        <p:txBody>
-          <a:bodyPr wrap="square">
-            <a:spAutoFit/>
-          </a:bodyPr>
-          <a:lstStyle/>
-          <a:p>
-            <a:pPr algn="l"/>
-            <a:r>
-              <a:rPr sz="3600" b="1">
-                <a:solidFill>
-                  <a:srgbClr val="8A5400"/>
-                </a:solidFill>
-                <a:latin typeface="Leelawadee UI"/>
-                <a:ea typeface="Leelawadee UI"/>
-                <a:cs typeface="Leelawadee UI"/>
-              </a:rPr>
-              <a:t>🎬 สาธิต — FixIt ขึ้น URL จริง ต่อหน้าห้อง ⏱ 9 นาที</a:t>
-            </a:r>
-          </a:p>
-        </p:txBody>
-      </p:sp>
-      <p:sp>
-        <p:nvSpPr>
-          <p:cNvPr id="6" name="TextBox 5"/>
-          <p:cNvSpPr txBox="1"/>
-          <p:nvPr/>
-        </p:nvSpPr>
-        <p:spPr>
-          <a:xfrm>
-            <a:off x="822960" y="2075688"/>
-            <a:ext cx="10545775" cy="1029208"/>
-          </a:xfrm>
-          <a:prstGeom prst="rect">
-            <a:avLst/>
-          </a:prstGeom>
-          <a:noFill/>
-        </p:spPr>
-        <p:txBody>
-          <a:bodyPr wrap="square">
-            <a:spAutoFit/>
-          </a:bodyPr>
-          <a:lstStyle/>
-          <a:p>
-            <a:pPr algn="l"/>
-            <a:r>
-              <a:rPr sz="2600" b="0">
+                  <a:srgbClr val="FFFFFF"/>
+                </a:solidFill>
+                <a:latin typeface="Leelawadee UI"/>
+                <a:ea typeface="Leelawadee UI"/>
+                <a:cs typeface="Leelawadee UI"/>
+              </a:rPr>
+              <a:t>Hosting บนคลาวด์</a:t>
+            </a:r>
+          </a:p>
+        </p:txBody>
+      </p:sp>
+      <p:sp>
+        <p:nvSpPr>
+          <p:cNvPr id="8" name="Right Arrow 7"/>
+          <p:cNvSpPr/>
+          <p:nvPr/>
+        </p:nvSpPr>
+        <p:spPr>
+          <a:xfrm>
+            <a:off x="8682362" y="1931670"/>
+            <a:ext cx="291876" cy="315468"/>
+          </a:xfrm>
+          <a:prstGeom prst="rightArrow">
+            <a:avLst/>
+          </a:prstGeom>
+          <a:solidFill>
+            <a:srgbClr val="7A91A8"/>
+          </a:solidFill>
+          <a:ln>
+            <a:noFill/>
+          </a:ln>
+          <a:effectLst/>
+        </p:spPr>
+        <p:style>
+          <a:lnRef idx="1">
+            <a:schemeClr val="accent1"/>
+          </a:lnRef>
+          <a:fillRef idx="3">
+            <a:schemeClr val="accent1"/>
+          </a:fillRef>
+          <a:effectRef idx="2">
+            <a:schemeClr val="accent1"/>
+          </a:effectRef>
+          <a:fontRef idx="minor">
+            <a:schemeClr val="lt1"/>
+          </a:fontRef>
+        </p:style>
+        <p:txBody>
+          <a:bodyPr rtlCol="0" anchor="ctr"/>
+          <a:lstStyle/>
+          <a:p>
+            <a:pPr algn="ctr"/>
+          </a:p>
+        </p:txBody>
+      </p:sp>
+      <p:sp>
+        <p:nvSpPr>
+          <p:cNvPr id="9" name="Rounded Rectangle 8"/>
+          <p:cNvSpPr/>
+          <p:nvPr/>
+        </p:nvSpPr>
+        <p:spPr>
+          <a:xfrm>
+            <a:off x="9020325" y="1563624"/>
+            <a:ext cx="2348407" cy="1051560"/>
+          </a:xfrm>
+          <a:prstGeom prst="roundRect">
+            <a:avLst/>
+          </a:prstGeom>
+          <a:solidFill>
+            <a:srgbClr val="E8EFF7"/>
+          </a:solidFill>
+          <a:ln w="15875">
+            <a:solidFill>
+              <a:srgbClr val="9CB5D1"/>
+            </a:solidFill>
+          </a:ln>
+          <a:effectLst/>
+        </p:spPr>
+        <p:style>
+          <a:lnRef idx="1">
+            <a:schemeClr val="accent1"/>
+          </a:lnRef>
+          <a:fillRef idx="3">
+            <a:schemeClr val="accent1"/>
+          </a:fillRef>
+          <a:effectRef idx="2">
+            <a:schemeClr val="accent1"/>
+          </a:effectRef>
+          <a:fontRef idx="minor">
+            <a:schemeClr val="lt1"/>
+          </a:fontRef>
+        </p:style>
+        <p:txBody>
+          <a:bodyPr rtlCol="0" anchor="ctr" wrap="square" lIns="54864" rIns="54864" tIns="27432" bIns="27432"/>
+          <a:lstStyle/>
+          <a:p>
+            <a:pPr algn="ctr"/>
+            <a:r>
+              <a:rPr sz="1400" b="0">
                 <a:solidFill>
                   <a:srgbClr val="1A1A1A"/>
                 </a:solidFill>
@@ -20631,88 +21184,14 @@
                 <a:ea typeface="Leelawadee UI"/>
                 <a:cs typeface="Leelawadee UI"/>
               </a:rPr>
-              <a:t>• สั่ง deploy ทั้งเว็บและกฎ → รอ → เห็น Deploy complete</a:t>
-            </a:r>
-          </a:p>
-        </p:txBody>
-      </p:sp>
-      <p:sp>
-        <p:nvSpPr>
-          <p:cNvPr id="7" name="TextBox 6"/>
-          <p:cNvSpPr txBox="1"/>
-          <p:nvPr/>
-        </p:nvSpPr>
-        <p:spPr>
-          <a:xfrm>
-            <a:off x="822960" y="3159760"/>
-            <a:ext cx="10545775" cy="560324"/>
-          </a:xfrm>
-          <a:prstGeom prst="rect">
-            <a:avLst/>
-          </a:prstGeom>
-          <a:noFill/>
-        </p:spPr>
-        <p:txBody>
-          <a:bodyPr wrap="square">
-            <a:spAutoFit/>
-          </a:bodyPr>
-          <a:lstStyle/>
-          <a:p>
-            <a:pPr algn="l"/>
-            <a:r>
-              <a:rPr sz="2600" b="0">
-                <a:solidFill>
-                  <a:srgbClr val="1A1A1A"/>
-                </a:solidFill>
-                <a:latin typeface="Leelawadee UI"/>
-                <a:ea typeface="Leelawadee UI"/>
-                <a:cs typeface="Leelawadee UI"/>
-              </a:rPr>
-              <a:t>• วาง URL ในแชท — ทุกคนเปิดตามเดี๋ยวนี้เลย</a:t>
-            </a:r>
-          </a:p>
-        </p:txBody>
-      </p:sp>
-      <p:sp>
-        <p:nvSpPr>
-          <p:cNvPr id="8" name="TextBox 7"/>
-          <p:cNvSpPr txBox="1"/>
-          <p:nvPr/>
-        </p:nvSpPr>
-        <p:spPr>
-          <a:xfrm>
-            <a:off x="822960" y="3774948"/>
-            <a:ext cx="10545775" cy="1029208"/>
-          </a:xfrm>
-          <a:prstGeom prst="rect">
-            <a:avLst/>
-          </a:prstGeom>
-          <a:noFill/>
-        </p:spPr>
-        <p:txBody>
-          <a:bodyPr wrap="square">
-            <a:spAutoFit/>
-          </a:bodyPr>
-          <a:lstStyle/>
-          <a:p>
-            <a:pPr algn="l"/>
-            <a:r>
-              <a:rPr sz="2600" b="0">
-                <a:solidFill>
-                  <a:srgbClr val="1A1A1A"/>
-                </a:solidFill>
-                <a:latin typeface="Leelawadee UI"/>
-                <a:ea typeface="Leelawadee UI"/>
-                <a:cs typeface="Leelawadee UI"/>
-              </a:rPr>
-              <a:t>• เปิดจากมือถือผู้สอนให้ดูด้วย — ออนไลน์จริง ไม่ใช่ในเครื่อง</a:t>
-            </a:r>
-          </a:p>
-        </p:txBody>
-      </p:sp>
-      <p:sp>
-        <p:nvSpPr>
-          <p:cNvPr id="9" name="TextBox 8"/>
+              <a:t>ใครก็เปิด URL ได้</a:t>
+            </a:r>
+          </a:p>
+        </p:txBody>
+      </p:sp>
+      <p:sp>
+        <p:nvSpPr>
+          <p:cNvPr id="10" name="TextBox 9"/>
           <p:cNvSpPr txBox="1"/>
           <p:nvPr/>
         </p:nvSpPr>
@@ -20772,23 +21251,23 @@
         </p:nvSpPr>
         <p:spPr>
           <a:xfrm>
-            <a:off x="822960" y="2011680"/>
-            <a:ext cx="10545775" cy="2743200"/>
-          </a:xfrm>
-          <a:prstGeom prst="rect">
-            <a:avLst/>
-          </a:prstGeom>
-          <a:noFill/>
-        </p:spPr>
-        <p:txBody>
-          <a:bodyPr wrap="square" anchor="ctr">
-            <a:spAutoFit/>
-          </a:bodyPr>
-          <a:lstStyle/>
-          <a:p>
-            <a:pPr algn="ctr"/>
-            <a:r>
-              <a:rPr sz="5400" b="1">
+            <a:off x="822960" y="502920"/>
+            <a:ext cx="10545775" cy="1408176"/>
+          </a:xfrm>
+          <a:prstGeom prst="rect">
+            <a:avLst/>
+          </a:prstGeom>
+          <a:noFill/>
+        </p:spPr>
+        <p:txBody>
+          <a:bodyPr wrap="square">
+            <a:spAutoFit/>
+          </a:bodyPr>
+          <a:lstStyle/>
+          <a:p>
+            <a:pPr algn="l"/>
+            <a:r>
+              <a:rPr sz="3600" b="1">
                 <a:solidFill>
                   <a:srgbClr val="1F5FA8"/>
                 </a:solidFill>
@@ -20796,7 +21275,7 @@
                 <a:ea typeface="Leelawadee UI"/>
                 <a:cs typeface="Leelawadee UI"/>
               </a:rPr>
-              <a:t>ระบบของเราออนไลน์แล้ว</a:t>
+              <a:t>deploy เว็บอย่างเดียวไม่พอ — กฎต้องขึ้นด้วย</a:t>
             </a:r>
           </a:p>
         </p:txBody>
@@ -20804,6 +21283,154 @@
       <p:sp>
         <p:nvSpPr>
           <p:cNvPr id="3" name="TextBox 2"/>
+          <p:cNvSpPr txBox="1"/>
+          <p:nvPr/>
+        </p:nvSpPr>
+        <p:spPr>
+          <a:xfrm>
+            <a:off x="822960" y="2075688"/>
+            <a:ext cx="10545775" cy="560324"/>
+          </a:xfrm>
+          <a:prstGeom prst="rect">
+            <a:avLst/>
+          </a:prstGeom>
+          <a:noFill/>
+        </p:spPr>
+        <p:txBody>
+          <a:bodyPr wrap="square">
+            <a:spAutoFit/>
+          </a:bodyPr>
+          <a:lstStyle/>
+          <a:p>
+            <a:pPr algn="l"/>
+            <a:r>
+              <a:rPr sz="2600" b="0">
+                <a:solidFill>
+                  <a:srgbClr val="1A1A1A"/>
+                </a:solidFill>
+                <a:latin typeface="Leelawadee UI"/>
+                <a:ea typeface="Leelawadee UI"/>
+                <a:cs typeface="Leelawadee UI"/>
+              </a:rPr>
+              <a:t>• เว็บกับกฎ deploy แยกกันคนละส่วน</a:t>
+            </a:r>
+          </a:p>
+        </p:txBody>
+      </p:sp>
+      <p:sp>
+        <p:nvSpPr>
+          <p:cNvPr id="4" name="TextBox 3"/>
+          <p:cNvSpPr txBox="1"/>
+          <p:nvPr/>
+        </p:nvSpPr>
+        <p:spPr>
+          <a:xfrm>
+            <a:off x="822960" y="2690876"/>
+            <a:ext cx="10545775" cy="1029208"/>
+          </a:xfrm>
+          <a:prstGeom prst="rect">
+            <a:avLst/>
+          </a:prstGeom>
+          <a:noFill/>
+        </p:spPr>
+        <p:txBody>
+          <a:bodyPr wrap="square">
+            <a:spAutoFit/>
+          </a:bodyPr>
+          <a:lstStyle/>
+          <a:p>
+            <a:pPr algn="l"/>
+            <a:r>
+              <a:rPr sz="2600" b="0">
+                <a:solidFill>
+                  <a:srgbClr val="1A1A1A"/>
+                </a:solidFill>
+                <a:latin typeface="Leelawadee UI"/>
+                <a:ea typeface="Leelawadee UI"/>
+                <a:cs typeface="Leelawadee UI"/>
+              </a:rPr>
+              <a:t>• กฎที่เขียนไว้ในเครื่อง ยังไม่คุ้มครองของจริง จนกว่าจะ deploy</a:t>
+            </a:r>
+          </a:p>
+        </p:txBody>
+      </p:sp>
+      <p:sp>
+        <p:nvSpPr>
+          <p:cNvPr id="5" name="TextBox 4"/>
+          <p:cNvSpPr txBox="1"/>
+          <p:nvPr/>
+        </p:nvSpPr>
+        <p:spPr>
+          <a:xfrm>
+            <a:off x="822960" y="3774948"/>
+            <a:ext cx="10545775" cy="560324"/>
+          </a:xfrm>
+          <a:prstGeom prst="rect">
+            <a:avLst/>
+          </a:prstGeom>
+          <a:noFill/>
+        </p:spPr>
+        <p:txBody>
+          <a:bodyPr wrap="square">
+            <a:spAutoFit/>
+          </a:bodyPr>
+          <a:lstStyle/>
+          <a:p>
+            <a:pPr algn="l"/>
+            <a:r>
+              <a:rPr sz="2600" b="0">
+                <a:solidFill>
+                  <a:srgbClr val="1A1A1A"/>
+                </a:solidFill>
+                <a:latin typeface="Leelawadee UI"/>
+                <a:ea typeface="Leelawadee UI"/>
+                <a:cs typeface="Leelawadee UI"/>
+              </a:rPr>
+              <a:t>• 🚫 ห้ามออกออนไลน์โดยไม่มีกฎขั้นต่ำ — ไม่มีข้อยกเว้น</a:t>
+            </a:r>
+          </a:p>
+        </p:txBody>
+      </p:sp>
+      <p:sp>
+        <p:nvSpPr>
+          <p:cNvPr id="6" name="TextBox 5"/>
+          <p:cNvSpPr txBox="1"/>
+          <p:nvPr/>
+        </p:nvSpPr>
+        <p:spPr>
+          <a:xfrm>
+            <a:off x="822960" y="4390136"/>
+            <a:ext cx="10545775" cy="560324"/>
+          </a:xfrm>
+          <a:prstGeom prst="rect">
+            <a:avLst/>
+          </a:prstGeom>
+          <a:noFill/>
+        </p:spPr>
+        <p:txBody>
+          <a:bodyPr wrap="square">
+            <a:spAutoFit/>
+          </a:bodyPr>
+          <a:lstStyle/>
+          <a:p>
+            <a:pPr algn="l"/>
+            <a:r>
+              <a:rPr sz="2600" b="0">
+                <a:solidFill>
+                  <a:srgbClr val="1A1A1A"/>
+                </a:solidFill>
+                <a:latin typeface="Leelawadee UI"/>
+                <a:ea typeface="Leelawadee UI"/>
+                <a:cs typeface="Leelawadee UI"/>
+              </a:rPr>
+              <a:t>• สั่ง AI ให้ deploy ทั้งเว็บและกฎในรอบเดียว</a:t>
+            </a:r>
+          </a:p>
+        </p:txBody>
+      </p:sp>
+      <p:sp>
+        <p:nvSpPr>
+          <p:cNvPr id="7" name="TextBox 6"/>
           <p:cNvSpPr txBox="1"/>
           <p:nvPr/>
         </p:nvSpPr>
@@ -20887,7 +21514,7 @@
                 <a:ea typeface="Leelawadee UI"/>
                 <a:cs typeface="Leelawadee UI"/>
               </a:rPr>
-              <a:t>⚠️ ออนไลน์แล้ว แต่ยังห้ามใส่ข้อมูลจริง</a:t>
+              <a:t>ในเครื่องได้ ออนไลน์พัง — 2 สาเหตุหลัก</a:t>
             </a:r>
           </a:p>
         </p:txBody>
@@ -20924,7 +21551,7 @@
                 <a:ea typeface="Leelawadee UI"/>
                 <a:cs typeface="Leelawadee UI"/>
               </a:rPr>
-              <a:t>• กุญแจวันนี้กันได้เฉพาะคนไม่ล็อกอิน</a:t>
+              <a:t>• สาเหตุ 1: กฎยังไม่ deploy — ขึ้น permission denied</a:t>
             </a:r>
           </a:p>
         </p:txBody>
@@ -20961,7 +21588,7 @@
                 <a:ea typeface="Leelawadee UI"/>
                 <a:cs typeface="Leelawadee UI"/>
               </a:rPr>
-              <a:t>• ใครสมัครบัญชีใหม่ ก็ยังอ่านได้หมด</a:t>
+              <a:t>• สาเหตุ 2: index (สารบัญช่วยค้น) ยังไม่สร้าง</a:t>
             </a:r>
           </a:p>
         </p:txBody>
@@ -20998,7 +21625,7 @@
                 <a:ea typeface="Leelawadee UI"/>
                 <a:cs typeface="Leelawadee UI"/>
               </a:rPr>
-              <a:t>• กฎรายห้องปิดสัปดาห์หน้า — ก่อนนั้นใช้ชื่อสมมติเท่านั้น</a:t>
+              <a:t>• ทางแก้ index: อ่าน error → กดลิงก์ในข้อความ → กดสร้าง → รอ</a:t>
             </a:r>
           </a:p>
         </p:txBody>
@@ -21035,7 +21662,7 @@
                 <a:ea typeface="Leelawadee UI"/>
                 <a:cs typeface="Leelawadee UI"/>
               </a:rPr>
-              <a:t>• สมชาย สมหญิง สมศรี คือเพื่อนของเราทั้งเดือน</a:t>
+              <a:t>• อ่าน error ให้จบบรรทัดก่อนตกใจ</a:t>
             </a:r>
           </a:p>
         </p:txBody>
@@ -21096,14 +21723,137 @@
       <p:grpSpPr/>
       <p:sp>
         <p:nvSpPr>
-          <p:cNvPr id="2" name="TextBox 1"/>
+          <p:cNvPr id="2" name="Rectangle 1"/>
+          <p:cNvSpPr/>
+          <p:nvPr/>
+        </p:nvSpPr>
+        <p:spPr>
+          <a:xfrm>
+            <a:off x="0" y="0"/>
+            <a:ext cx="12191695" cy="6858000"/>
+          </a:xfrm>
+          <a:prstGeom prst="rect">
+            <a:avLst/>
+          </a:prstGeom>
+          <a:solidFill>
+            <a:srgbClr val="FFF3DF"/>
+          </a:solidFill>
+          <a:ln>
+            <a:noFill/>
+          </a:ln>
+        </p:spPr>
+        <p:style>
+          <a:lnRef idx="1">
+            <a:schemeClr val="accent1"/>
+          </a:lnRef>
+          <a:fillRef idx="3">
+            <a:schemeClr val="accent1"/>
+          </a:fillRef>
+          <a:effectRef idx="2">
+            <a:schemeClr val="accent1"/>
+          </a:effectRef>
+          <a:fontRef idx="minor">
+            <a:schemeClr val="lt1"/>
+          </a:fontRef>
+        </p:style>
+        <p:txBody>
+          <a:bodyPr rtlCol="0" anchor="ctr"/>
+          <a:lstStyle/>
+          <a:p>
+            <a:pPr algn="ctr"/>
+          </a:p>
+        </p:txBody>
+      </p:sp>
+      <p:sp>
+        <p:nvSpPr>
+          <p:cNvPr id="3" name="Rectangle 2"/>
+          <p:cNvSpPr/>
+          <p:nvPr/>
+        </p:nvSpPr>
+        <p:spPr>
+          <a:xfrm>
+            <a:off x="0" y="0"/>
+            <a:ext cx="146304" cy="6858000"/>
+          </a:xfrm>
+          <a:prstGeom prst="rect">
+            <a:avLst/>
+          </a:prstGeom>
+          <a:solidFill>
+            <a:srgbClr val="E0A02C"/>
+          </a:solidFill>
+          <a:ln>
+            <a:noFill/>
+          </a:ln>
+        </p:spPr>
+        <p:style>
+          <a:lnRef idx="1">
+            <a:schemeClr val="accent1"/>
+          </a:lnRef>
+          <a:fillRef idx="3">
+            <a:schemeClr val="accent1"/>
+          </a:fillRef>
+          <a:effectRef idx="2">
+            <a:schemeClr val="accent1"/>
+          </a:effectRef>
+          <a:fontRef idx="minor">
+            <a:schemeClr val="lt1"/>
+          </a:fontRef>
+        </p:style>
+        <p:txBody>
+          <a:bodyPr rtlCol="0" anchor="ctr"/>
+          <a:lstStyle/>
+          <a:p>
+            <a:pPr algn="ctr"/>
+          </a:p>
+        </p:txBody>
+      </p:sp>
+      <p:sp>
+        <p:nvSpPr>
+          <p:cNvPr id="4" name="TextBox 3"/>
+          <p:cNvSpPr txBox="1"/>
+          <p:nvPr/>
+        </p:nvSpPr>
+        <p:spPr>
+          <a:xfrm>
+            <a:off x="9082735" y="109728"/>
+            <a:ext cx="2834640" cy="384048"/>
+          </a:xfrm>
+          <a:prstGeom prst="rect">
+            <a:avLst/>
+          </a:prstGeom>
+          <a:noFill/>
+        </p:spPr>
+        <p:txBody>
+          <a:bodyPr wrap="square">
+            <a:spAutoFit/>
+          </a:bodyPr>
+          <a:lstStyle/>
+          <a:p>
+            <a:pPr algn="r"/>
+            <a:r>
+              <a:rPr sz="1400" b="1">
+                <a:solidFill>
+                  <a:srgbClr val="8A5400"/>
+                </a:solidFill>
+                <a:latin typeface="Leelawadee UI"/>
+                <a:ea typeface="Leelawadee UI"/>
+                <a:cs typeface="Leelawadee UI"/>
+              </a:rPr>
+              <a:t>🎬 สลับไปหน้าจอสาธิตสด</a:t>
+            </a:r>
+          </a:p>
+        </p:txBody>
+      </p:sp>
+      <p:sp>
+        <p:nvSpPr>
+          <p:cNvPr id="5" name="TextBox 4"/>
           <p:cNvSpPr txBox="1"/>
           <p:nvPr/>
         </p:nvSpPr>
         <p:spPr>
           <a:xfrm>
             <a:off x="822960" y="502920"/>
-            <a:ext cx="10545775" cy="804672"/>
+            <a:ext cx="10545775" cy="1408176"/>
           </a:xfrm>
           <a:prstGeom prst="rect">
             <a:avLst/>
@@ -21120,26 +21870,63 @@
             <a:r>
               <a:rPr sz="3600" b="1">
                 <a:solidFill>
-                  <a:srgbClr val="1F5FA8"/>
-                </a:solidFill>
-                <a:latin typeface="Leelawadee UI"/>
-                <a:ea typeface="Leelawadee UI"/>
-                <a:cs typeface="Leelawadee UI"/>
-              </a:rPr>
-              <a:t>✅ ช่วงที่ 6 คุณต้องได้อะไรกลับไป</a:t>
-            </a:r>
-          </a:p>
-        </p:txBody>
-      </p:sp>
-      <p:sp>
-        <p:nvSpPr>
-          <p:cNvPr id="3" name="TextBox 2"/>
-          <p:cNvSpPr txBox="1"/>
-          <p:nvPr/>
-        </p:nvSpPr>
-        <p:spPr>
-          <a:xfrm>
-            <a:off x="822960" y="1472184"/>
+                  <a:srgbClr val="8A5400"/>
+                </a:solidFill>
+                <a:latin typeface="Leelawadee UI"/>
+                <a:ea typeface="Leelawadee UI"/>
+                <a:cs typeface="Leelawadee UI"/>
+              </a:rPr>
+              <a:t>🎬 สาธิต — FixIt ขึ้น URL จริง ต่อหน้าห้อง ⏱ 9 นาที</a:t>
+            </a:r>
+          </a:p>
+        </p:txBody>
+      </p:sp>
+      <p:sp>
+        <p:nvSpPr>
+          <p:cNvPr id="6" name="TextBox 5"/>
+          <p:cNvSpPr txBox="1"/>
+          <p:nvPr/>
+        </p:nvSpPr>
+        <p:spPr>
+          <a:xfrm>
+            <a:off x="822960" y="2075688"/>
+            <a:ext cx="10545775" cy="1029208"/>
+          </a:xfrm>
+          <a:prstGeom prst="rect">
+            <a:avLst/>
+          </a:prstGeom>
+          <a:noFill/>
+        </p:spPr>
+        <p:txBody>
+          <a:bodyPr wrap="square">
+            <a:spAutoFit/>
+          </a:bodyPr>
+          <a:lstStyle/>
+          <a:p>
+            <a:pPr algn="l"/>
+            <a:r>
+              <a:rPr sz="2600" b="0">
+                <a:solidFill>
+                  <a:srgbClr val="1A1A1A"/>
+                </a:solidFill>
+                <a:latin typeface="Leelawadee UI"/>
+                <a:ea typeface="Leelawadee UI"/>
+                <a:cs typeface="Leelawadee UI"/>
+              </a:rPr>
+              <a:t>• สั่ง deploy ทั้งเว็บและกฎ → รอ → เห็น Deploy complete</a:t>
+            </a:r>
+          </a:p>
+        </p:txBody>
+      </p:sp>
+      <p:sp>
+        <p:nvSpPr>
+          <p:cNvPr id="7" name="TextBox 6"/>
+          <p:cNvSpPr txBox="1"/>
+          <p:nvPr/>
+        </p:nvSpPr>
+        <p:spPr>
+          <a:xfrm>
+            <a:off x="822960" y="3159760"/>
             <a:ext cx="10545775" cy="560324"/>
           </a:xfrm>
           <a:prstGeom prst="rect">
@@ -21163,21 +21950,21 @@
                 <a:ea typeface="Leelawadee UI"/>
                 <a:cs typeface="Leelawadee UI"/>
               </a:rPr>
-              <a:t>• บอกได้ว่า deploy คืออะไร ต่างจาก localhost อย่างไร</a:t>
-            </a:r>
-          </a:p>
-        </p:txBody>
-      </p:sp>
-      <p:sp>
-        <p:nvSpPr>
-          <p:cNvPr id="4" name="TextBox 3"/>
-          <p:cNvSpPr txBox="1"/>
-          <p:nvPr/>
-        </p:nvSpPr>
-        <p:spPr>
-          <a:xfrm>
-            <a:off x="822960" y="2087372"/>
-            <a:ext cx="10545775" cy="560324"/>
+              <a:t>• วาง URL ในแชท — ทุกคนเปิดตามเดี๋ยวนี้เลย</a:t>
+            </a:r>
+          </a:p>
+        </p:txBody>
+      </p:sp>
+      <p:sp>
+        <p:nvSpPr>
+          <p:cNvPr id="8" name="TextBox 7"/>
+          <p:cNvSpPr txBox="1"/>
+          <p:nvPr/>
+        </p:nvSpPr>
+        <p:spPr>
+          <a:xfrm>
+            <a:off x="822960" y="3774948"/>
+            <a:ext cx="10545775" cy="1029208"/>
           </a:xfrm>
           <a:prstGeom prst="rect">
             <a:avLst/>
@@ -21200,88 +21987,14 @@
                 <a:ea typeface="Leelawadee UI"/>
                 <a:cs typeface="Leelawadee UI"/>
               </a:rPr>
-              <a:t>• รู้ว่าต้อง deploy กฎพร้อมเว็บเสมอ</a:t>
-            </a:r>
-          </a:p>
-        </p:txBody>
-      </p:sp>
-      <p:sp>
-        <p:nvSpPr>
-          <p:cNvPr id="5" name="TextBox 4"/>
-          <p:cNvSpPr txBox="1"/>
-          <p:nvPr/>
-        </p:nvSpPr>
-        <p:spPr>
-          <a:xfrm>
-            <a:off x="822960" y="2702560"/>
-            <a:ext cx="10545775" cy="560324"/>
-          </a:xfrm>
-          <a:prstGeom prst="rect">
-            <a:avLst/>
-          </a:prstGeom>
-          <a:noFill/>
-        </p:spPr>
-        <p:txBody>
-          <a:bodyPr wrap="square">
-            <a:spAutoFit/>
-          </a:bodyPr>
-          <a:lstStyle/>
-          <a:p>
-            <a:pPr algn="l"/>
-            <a:r>
-              <a:rPr sz="2600" b="0">
-                <a:solidFill>
-                  <a:srgbClr val="1A1A1A"/>
-                </a:solidFill>
-                <a:latin typeface="Leelawadee UI"/>
-                <a:ea typeface="Leelawadee UI"/>
-                <a:cs typeface="Leelawadee UI"/>
-              </a:rPr>
-              <a:t>• รู้ 2 สาเหตุหลักของ "ในเครื่องได้ ออนไลน์พัง"</a:t>
-            </a:r>
-          </a:p>
-        </p:txBody>
-      </p:sp>
-      <p:sp>
-        <p:nvSpPr>
-          <p:cNvPr id="6" name="TextBox 5"/>
-          <p:cNvSpPr txBox="1"/>
-          <p:nvPr/>
-        </p:nvSpPr>
-        <p:spPr>
-          <a:xfrm>
-            <a:off x="822960" y="3317748"/>
-            <a:ext cx="10545775" cy="560324"/>
-          </a:xfrm>
-          <a:prstGeom prst="rect">
-            <a:avLst/>
-          </a:prstGeom>
-          <a:noFill/>
-        </p:spPr>
-        <p:txBody>
-          <a:bodyPr wrap="square">
-            <a:spAutoFit/>
-          </a:bodyPr>
-          <a:lstStyle/>
-          <a:p>
-            <a:pPr algn="l"/>
-            <a:r>
-              <a:rPr sz="2600" b="0">
-                <a:solidFill>
-                  <a:srgbClr val="1A1A1A"/>
-                </a:solidFill>
-                <a:latin typeface="Leelawadee UI"/>
-                <a:ea typeface="Leelawadee UI"/>
-                <a:cs typeface="Leelawadee UI"/>
-              </a:rPr>
-              <a:t>• รู้ว่าห้ามใส่ข้อมูลจริงจนกว่ากฎรายห้องจะปิด</a:t>
-            </a:r>
-          </a:p>
-        </p:txBody>
-      </p:sp>
-      <p:sp>
-        <p:nvSpPr>
-          <p:cNvPr id="7" name="TextBox 6"/>
+              <a:t>• เปิดจากมือถือผู้สอนให้ดูด้วย — ออนไลน์จริง ไม่ใช่ในเครื่อง</a:t>
+            </a:r>
+          </a:p>
+        </p:txBody>
+      </p:sp>
+      <p:sp>
+        <p:nvSpPr>
+          <p:cNvPr id="9" name="TextBox 8"/>
           <p:cNvSpPr txBox="1"/>
           <p:nvPr/>
         </p:nvSpPr>
@@ -21564,87 +22277,44 @@
       <p:grpSpPr/>
       <p:sp>
         <p:nvSpPr>
-          <p:cNvPr id="2" name="Rectangle 1"/>
-          <p:cNvSpPr/>
-          <p:nvPr/>
-        </p:nvSpPr>
-        <p:spPr>
-          <a:xfrm>
-            <a:off x="0" y="0"/>
-            <a:ext cx="12191695" cy="6858000"/>
-          </a:xfrm>
-          <a:prstGeom prst="rect">
-            <a:avLst/>
-          </a:prstGeom>
-          <a:solidFill>
-            <a:srgbClr val="1F5FA8"/>
-          </a:solidFill>
-          <a:ln>
-            <a:noFill/>
-          </a:ln>
-        </p:spPr>
-        <p:style>
-          <a:lnRef idx="1">
-            <a:schemeClr val="accent1"/>
-          </a:lnRef>
-          <a:fillRef idx="3">
-            <a:schemeClr val="accent1"/>
-          </a:fillRef>
-          <a:effectRef idx="2">
-            <a:schemeClr val="accent1"/>
-          </a:effectRef>
-          <a:fontRef idx="minor">
-            <a:schemeClr val="lt1"/>
-          </a:fontRef>
-        </p:style>
-        <p:txBody>
-          <a:bodyPr rtlCol="0" anchor="ctr"/>
+          <p:cNvPr id="2" name="TextBox 1"/>
+          <p:cNvSpPr txBox="1"/>
+          <p:nvPr/>
+        </p:nvSpPr>
+        <p:spPr>
+          <a:xfrm>
+            <a:off x="822960" y="2011680"/>
+            <a:ext cx="10545775" cy="2743200"/>
+          </a:xfrm>
+          <a:prstGeom prst="rect">
+            <a:avLst/>
+          </a:prstGeom>
+          <a:noFill/>
+        </p:spPr>
+        <p:txBody>
+          <a:bodyPr wrap="square" anchor="ctr">
+            <a:spAutoFit/>
+          </a:bodyPr>
           <a:lstStyle/>
           <a:p>
             <a:pPr algn="ctr"/>
+            <a:r>
+              <a:rPr sz="5400" b="1">
+                <a:solidFill>
+                  <a:srgbClr val="1F5FA8"/>
+                </a:solidFill>
+                <a:latin typeface="Leelawadee UI"/>
+                <a:ea typeface="Leelawadee UI"/>
+                <a:cs typeface="Leelawadee UI"/>
+              </a:rPr>
+              <a:t>ระบบของเราออนไลน์แล้ว</a:t>
+            </a:r>
           </a:p>
         </p:txBody>
       </p:sp>
       <p:sp>
         <p:nvSpPr>
           <p:cNvPr id="3" name="TextBox 2"/>
-          <p:cNvSpPr txBox="1"/>
-          <p:nvPr/>
-        </p:nvSpPr>
-        <p:spPr>
-          <a:xfrm>
-            <a:off x="822960" y="2743200"/>
-            <a:ext cx="10545775" cy="1463040"/>
-          </a:xfrm>
-          <a:prstGeom prst="rect">
-            <a:avLst/>
-          </a:prstGeom>
-          <a:noFill/>
-        </p:spPr>
-        <p:txBody>
-          <a:bodyPr wrap="square" anchor="ctr">
-            <a:spAutoFit/>
-          </a:bodyPr>
-          <a:lstStyle/>
-          <a:p>
-            <a:pPr algn="ctr"/>
-            <a:r>
-              <a:rPr sz="4000" b="1">
-                <a:solidFill>
-                  <a:srgbClr val="FFFFFF"/>
-                </a:solidFill>
-                <a:latin typeface="Leelawadee UI"/>
-                <a:ea typeface="Leelawadee UI"/>
-                <a:cs typeface="Leelawadee UI"/>
-              </a:rPr>
-              <a:t>ปิดคาบ ⏱ 11:55–12:00</a:t>
-            </a:r>
-          </a:p>
-        </p:txBody>
-      </p:sp>
-      <p:sp>
-        <p:nvSpPr>
-          <p:cNvPr id="4" name="TextBox 3"/>
           <p:cNvSpPr txBox="1"/>
           <p:nvPr/>
         </p:nvSpPr>
@@ -21728,7 +22398,7 @@
                 <a:ea typeface="Leelawadee UI"/>
                 <a:cs typeface="Leelawadee UI"/>
               </a:rPr>
-              <a:t>📦 สิ่งที่ต้องส่งมอบสัปดาห์นี้</a:t>
+              <a:t>⚠️ ออนไลน์แล้ว แต่ยังห้ามใส่ข้อมูลจริง</a:t>
             </a:r>
           </a:p>
         </p:txBody>
@@ -21765,7 +22435,7 @@
                 <a:ea typeface="Leelawadee UI"/>
                 <a:cs typeface="Leelawadee UI"/>
               </a:rPr>
-              <a:t>• [ ] repo บน GitHub ที่มี CLAUDE.md และไม่มีคีย์หลุด</a:t>
+              <a:t>• กุญแจวันนี้กันได้เฉพาะคนไม่ล็อกอิน</a:t>
             </a:r>
           </a:p>
         </p:txBody>
@@ -21802,7 +22472,7 @@
                 <a:ea typeface="Leelawadee UI"/>
                 <a:cs typeface="Leelawadee UI"/>
               </a:rPr>
-              <a:t>• [ ] ⭐ CRUD ครบ — กรอก → ปิด → เปิดใหม่ → ยังอยู่</a:t>
+              <a:t>• ใครสมัครบัญชีใหม่ ก็ยังอ่านได้หมด</a:t>
             </a:r>
           </a:p>
         </p:txBody>
@@ -21816,6 +22486,43 @@
         <p:spPr>
           <a:xfrm>
             <a:off x="822960" y="2702560"/>
+            <a:ext cx="10545775" cy="1029208"/>
+          </a:xfrm>
+          <a:prstGeom prst="rect">
+            <a:avLst/>
+          </a:prstGeom>
+          <a:noFill/>
+        </p:spPr>
+        <p:txBody>
+          <a:bodyPr wrap="square">
+            <a:spAutoFit/>
+          </a:bodyPr>
+          <a:lstStyle/>
+          <a:p>
+            <a:pPr algn="l"/>
+            <a:r>
+              <a:rPr sz="2600" b="0">
+                <a:solidFill>
+                  <a:srgbClr val="1A1A1A"/>
+                </a:solidFill>
+                <a:latin typeface="Leelawadee UI"/>
+                <a:ea typeface="Leelawadee UI"/>
+                <a:cs typeface="Leelawadee UI"/>
+              </a:rPr>
+              <a:t>• กฎรายห้องปิดสัปดาห์หน้า — ก่อนนั้นใช้ชื่อสมมติเท่านั้น</a:t>
+            </a:r>
+          </a:p>
+        </p:txBody>
+      </p:sp>
+      <p:sp>
+        <p:nvSpPr>
+          <p:cNvPr id="6" name="TextBox 5"/>
+          <p:cNvSpPr txBox="1"/>
+          <p:nvPr/>
+        </p:nvSpPr>
+        <p:spPr>
+          <a:xfrm>
+            <a:off x="822960" y="3786632"/>
             <a:ext cx="10545775" cy="560324"/>
           </a:xfrm>
           <a:prstGeom prst="rect">
@@ -21839,44 +22546,7 @@
                 <a:ea typeface="Leelawadee UI"/>
                 <a:cs typeface="Leelawadee UI"/>
               </a:rPr>
-              <a:t>• [ ] ล็อกอินได้ + ไม่ล็อกอินอ่านไม่ได้ + URL ออนไลน์</a:t>
-            </a:r>
-          </a:p>
-        </p:txBody>
-      </p:sp>
-      <p:sp>
-        <p:nvSpPr>
-          <p:cNvPr id="6" name="TextBox 5"/>
-          <p:cNvSpPr txBox="1"/>
-          <p:nvPr/>
-        </p:nvSpPr>
-        <p:spPr>
-          <a:xfrm>
-            <a:off x="822960" y="3317748"/>
-            <a:ext cx="10545775" cy="1029208"/>
-          </a:xfrm>
-          <a:prstGeom prst="rect">
-            <a:avLst/>
-          </a:prstGeom>
-          <a:noFill/>
-        </p:spPr>
-        <p:txBody>
-          <a:bodyPr wrap="square">
-            <a:spAutoFit/>
-          </a:bodyPr>
-          <a:lstStyle/>
-          <a:p>
-            <a:pPr algn="l"/>
-            <a:r>
-              <a:rPr sz="2600" b="0">
-                <a:solidFill>
-                  <a:srgbClr val="1A1A1A"/>
-                </a:solidFill>
-                <a:latin typeface="Leelawadee UI"/>
-                <a:ea typeface="Leelawadee UI"/>
-                <a:cs typeface="Leelawadee UI"/>
-              </a:rPr>
-              <a:t>• 📤 ใบงาน (LeaveEasy) ภายในจันทร์ 7 ก.ย. · 🏠 การบ้าน (หัวข้อคุณ) ภายในศุกร์ 11 ก.ย.</a:t>
+              <a:t>• สมชาย สมหญิง สมศรี คือเพื่อนของเราทั้งเดือน</a:t>
             </a:r>
           </a:p>
         </p:txBody>
@@ -21926,6 +22596,618 @@
 </file>
 
 <file path=ppt/slides/slide62.xml><?xml version="1.0" encoding="utf-8"?>
+<p:sld xmlns:a="http://schemas.openxmlformats.org/drawingml/2006/main" xmlns:p="http://schemas.openxmlformats.org/presentationml/2006/main" xmlns:r="http://schemas.openxmlformats.org/officeDocument/2006/relationships">
+  <p:cSld>
+    <p:spTree>
+      <p:nvGrpSpPr>
+        <p:cNvPr id="1" name=""/>
+        <p:cNvGrpSpPr/>
+        <p:nvPr/>
+      </p:nvGrpSpPr>
+      <p:grpSpPr/>
+      <p:sp>
+        <p:nvSpPr>
+          <p:cNvPr id="2" name="TextBox 1"/>
+          <p:cNvSpPr txBox="1"/>
+          <p:nvPr/>
+        </p:nvSpPr>
+        <p:spPr>
+          <a:xfrm>
+            <a:off x="822960" y="502920"/>
+            <a:ext cx="10545775" cy="804672"/>
+          </a:xfrm>
+          <a:prstGeom prst="rect">
+            <a:avLst/>
+          </a:prstGeom>
+          <a:noFill/>
+        </p:spPr>
+        <p:txBody>
+          <a:bodyPr wrap="square">
+            <a:spAutoFit/>
+          </a:bodyPr>
+          <a:lstStyle/>
+          <a:p>
+            <a:pPr algn="l"/>
+            <a:r>
+              <a:rPr sz="3600" b="1">
+                <a:solidFill>
+                  <a:srgbClr val="1F5FA8"/>
+                </a:solidFill>
+                <a:latin typeface="Leelawadee UI"/>
+                <a:ea typeface="Leelawadee UI"/>
+                <a:cs typeface="Leelawadee UI"/>
+              </a:rPr>
+              <a:t>✅ ช่วงที่ 6 คุณต้องได้อะไรกลับไป</a:t>
+            </a:r>
+          </a:p>
+        </p:txBody>
+      </p:sp>
+      <p:sp>
+        <p:nvSpPr>
+          <p:cNvPr id="3" name="TextBox 2"/>
+          <p:cNvSpPr txBox="1"/>
+          <p:nvPr/>
+        </p:nvSpPr>
+        <p:spPr>
+          <a:xfrm>
+            <a:off x="822960" y="1472184"/>
+            <a:ext cx="10545775" cy="560324"/>
+          </a:xfrm>
+          <a:prstGeom prst="rect">
+            <a:avLst/>
+          </a:prstGeom>
+          <a:noFill/>
+        </p:spPr>
+        <p:txBody>
+          <a:bodyPr wrap="square">
+            <a:spAutoFit/>
+          </a:bodyPr>
+          <a:lstStyle/>
+          <a:p>
+            <a:pPr algn="l"/>
+            <a:r>
+              <a:rPr sz="2600" b="0">
+                <a:solidFill>
+                  <a:srgbClr val="1A1A1A"/>
+                </a:solidFill>
+                <a:latin typeface="Leelawadee UI"/>
+                <a:ea typeface="Leelawadee UI"/>
+                <a:cs typeface="Leelawadee UI"/>
+              </a:rPr>
+              <a:t>• บอกได้ว่า deploy คืออะไร ต่างจาก localhost อย่างไร</a:t>
+            </a:r>
+          </a:p>
+        </p:txBody>
+      </p:sp>
+      <p:sp>
+        <p:nvSpPr>
+          <p:cNvPr id="4" name="TextBox 3"/>
+          <p:cNvSpPr txBox="1"/>
+          <p:nvPr/>
+        </p:nvSpPr>
+        <p:spPr>
+          <a:xfrm>
+            <a:off x="822960" y="2087372"/>
+            <a:ext cx="10545775" cy="560324"/>
+          </a:xfrm>
+          <a:prstGeom prst="rect">
+            <a:avLst/>
+          </a:prstGeom>
+          <a:noFill/>
+        </p:spPr>
+        <p:txBody>
+          <a:bodyPr wrap="square">
+            <a:spAutoFit/>
+          </a:bodyPr>
+          <a:lstStyle/>
+          <a:p>
+            <a:pPr algn="l"/>
+            <a:r>
+              <a:rPr sz="2600" b="0">
+                <a:solidFill>
+                  <a:srgbClr val="1A1A1A"/>
+                </a:solidFill>
+                <a:latin typeface="Leelawadee UI"/>
+                <a:ea typeface="Leelawadee UI"/>
+                <a:cs typeface="Leelawadee UI"/>
+              </a:rPr>
+              <a:t>• รู้ว่าต้อง deploy กฎพร้อมเว็บเสมอ</a:t>
+            </a:r>
+          </a:p>
+        </p:txBody>
+      </p:sp>
+      <p:sp>
+        <p:nvSpPr>
+          <p:cNvPr id="5" name="TextBox 4"/>
+          <p:cNvSpPr txBox="1"/>
+          <p:nvPr/>
+        </p:nvSpPr>
+        <p:spPr>
+          <a:xfrm>
+            <a:off x="822960" y="2702560"/>
+            <a:ext cx="10545775" cy="560324"/>
+          </a:xfrm>
+          <a:prstGeom prst="rect">
+            <a:avLst/>
+          </a:prstGeom>
+          <a:noFill/>
+        </p:spPr>
+        <p:txBody>
+          <a:bodyPr wrap="square">
+            <a:spAutoFit/>
+          </a:bodyPr>
+          <a:lstStyle/>
+          <a:p>
+            <a:pPr algn="l"/>
+            <a:r>
+              <a:rPr sz="2600" b="0">
+                <a:solidFill>
+                  <a:srgbClr val="1A1A1A"/>
+                </a:solidFill>
+                <a:latin typeface="Leelawadee UI"/>
+                <a:ea typeface="Leelawadee UI"/>
+                <a:cs typeface="Leelawadee UI"/>
+              </a:rPr>
+              <a:t>• รู้ 2 สาเหตุหลักของ "ในเครื่องได้ ออนไลน์พัง"</a:t>
+            </a:r>
+          </a:p>
+        </p:txBody>
+      </p:sp>
+      <p:sp>
+        <p:nvSpPr>
+          <p:cNvPr id="6" name="TextBox 5"/>
+          <p:cNvSpPr txBox="1"/>
+          <p:nvPr/>
+        </p:nvSpPr>
+        <p:spPr>
+          <a:xfrm>
+            <a:off x="822960" y="3317748"/>
+            <a:ext cx="10545775" cy="560324"/>
+          </a:xfrm>
+          <a:prstGeom prst="rect">
+            <a:avLst/>
+          </a:prstGeom>
+          <a:noFill/>
+        </p:spPr>
+        <p:txBody>
+          <a:bodyPr wrap="square">
+            <a:spAutoFit/>
+          </a:bodyPr>
+          <a:lstStyle/>
+          <a:p>
+            <a:pPr algn="l"/>
+            <a:r>
+              <a:rPr sz="2600" b="0">
+                <a:solidFill>
+                  <a:srgbClr val="1A1A1A"/>
+                </a:solidFill>
+                <a:latin typeface="Leelawadee UI"/>
+                <a:ea typeface="Leelawadee UI"/>
+                <a:cs typeface="Leelawadee UI"/>
+              </a:rPr>
+              <a:t>• รู้ว่าห้ามใส่ข้อมูลจริงจนกว่ากฎรายห้องจะปิด</a:t>
+            </a:r>
+          </a:p>
+        </p:txBody>
+      </p:sp>
+      <p:sp>
+        <p:nvSpPr>
+          <p:cNvPr id="7" name="TextBox 6"/>
+          <p:cNvSpPr txBox="1"/>
+          <p:nvPr/>
+        </p:nvSpPr>
+        <p:spPr>
+          <a:xfrm>
+            <a:off x="822960" y="6355080"/>
+            <a:ext cx="10545775" cy="320040"/>
+          </a:xfrm>
+          <a:prstGeom prst="rect">
+            <a:avLst/>
+          </a:prstGeom>
+          <a:noFill/>
+        </p:spPr>
+        <p:txBody>
+          <a:bodyPr wrap="square">
+            <a:spAutoFit/>
+          </a:bodyPr>
+          <a:lstStyle/>
+          <a:p>
+            <a:r>
+              <a:rPr sz="1200" b="0">
+                <a:solidFill>
+                  <a:srgbClr val="6B6B6B"/>
+                </a:solidFill>
+                <a:latin typeface="Leelawadee UI"/>
+                <a:ea typeface="Leelawadee UI"/>
+                <a:cs typeface="Leelawadee UI"/>
+              </a:rPr>
+              <a:t>RAISE 2 · เดือนที่ 2 · สัปดาห์ที่ 7          62</a:t>
+            </a:r>
+          </a:p>
+        </p:txBody>
+      </p:sp>
+    </p:spTree>
+  </p:cSld>
+  <p:clrMapOvr>
+    <a:masterClrMapping/>
+  </p:clrMapOvr>
+</p:sld>
+</file>
+
+<file path=ppt/slides/slide63.xml><?xml version="1.0" encoding="utf-8"?>
+<p:sld xmlns:a="http://schemas.openxmlformats.org/drawingml/2006/main" xmlns:p="http://schemas.openxmlformats.org/presentationml/2006/main" xmlns:r="http://schemas.openxmlformats.org/officeDocument/2006/relationships">
+  <p:cSld>
+    <p:spTree>
+      <p:nvGrpSpPr>
+        <p:cNvPr id="1" name=""/>
+        <p:cNvGrpSpPr/>
+        <p:nvPr/>
+      </p:nvGrpSpPr>
+      <p:grpSpPr/>
+      <p:sp>
+        <p:nvSpPr>
+          <p:cNvPr id="2" name="Rectangle 1"/>
+          <p:cNvSpPr/>
+          <p:nvPr/>
+        </p:nvSpPr>
+        <p:spPr>
+          <a:xfrm>
+            <a:off x="0" y="0"/>
+            <a:ext cx="12191695" cy="6858000"/>
+          </a:xfrm>
+          <a:prstGeom prst="rect">
+            <a:avLst/>
+          </a:prstGeom>
+          <a:solidFill>
+            <a:srgbClr val="1F5FA8"/>
+          </a:solidFill>
+          <a:ln>
+            <a:noFill/>
+          </a:ln>
+        </p:spPr>
+        <p:style>
+          <a:lnRef idx="1">
+            <a:schemeClr val="accent1"/>
+          </a:lnRef>
+          <a:fillRef idx="3">
+            <a:schemeClr val="accent1"/>
+          </a:fillRef>
+          <a:effectRef idx="2">
+            <a:schemeClr val="accent1"/>
+          </a:effectRef>
+          <a:fontRef idx="minor">
+            <a:schemeClr val="lt1"/>
+          </a:fontRef>
+        </p:style>
+        <p:txBody>
+          <a:bodyPr rtlCol="0" anchor="ctr"/>
+          <a:lstStyle/>
+          <a:p>
+            <a:pPr algn="ctr"/>
+          </a:p>
+        </p:txBody>
+      </p:sp>
+      <p:sp>
+        <p:nvSpPr>
+          <p:cNvPr id="3" name="TextBox 2"/>
+          <p:cNvSpPr txBox="1"/>
+          <p:nvPr/>
+        </p:nvSpPr>
+        <p:spPr>
+          <a:xfrm>
+            <a:off x="822960" y="2743200"/>
+            <a:ext cx="10545775" cy="1463040"/>
+          </a:xfrm>
+          <a:prstGeom prst="rect">
+            <a:avLst/>
+          </a:prstGeom>
+          <a:noFill/>
+        </p:spPr>
+        <p:txBody>
+          <a:bodyPr wrap="square" anchor="ctr">
+            <a:spAutoFit/>
+          </a:bodyPr>
+          <a:lstStyle/>
+          <a:p>
+            <a:pPr algn="ctr"/>
+            <a:r>
+              <a:rPr sz="4000" b="1">
+                <a:solidFill>
+                  <a:srgbClr val="FFFFFF"/>
+                </a:solidFill>
+                <a:latin typeface="Leelawadee UI"/>
+                <a:ea typeface="Leelawadee UI"/>
+                <a:cs typeface="Leelawadee UI"/>
+              </a:rPr>
+              <a:t>ปิดคาบ ⏱ 11:55–12:00</a:t>
+            </a:r>
+          </a:p>
+        </p:txBody>
+      </p:sp>
+      <p:sp>
+        <p:nvSpPr>
+          <p:cNvPr id="4" name="TextBox 3"/>
+          <p:cNvSpPr txBox="1"/>
+          <p:nvPr/>
+        </p:nvSpPr>
+        <p:spPr>
+          <a:xfrm>
+            <a:off x="822960" y="6355080"/>
+            <a:ext cx="10545775" cy="320040"/>
+          </a:xfrm>
+          <a:prstGeom prst="rect">
+            <a:avLst/>
+          </a:prstGeom>
+          <a:noFill/>
+        </p:spPr>
+        <p:txBody>
+          <a:bodyPr wrap="square">
+            <a:spAutoFit/>
+          </a:bodyPr>
+          <a:lstStyle/>
+          <a:p>
+            <a:r>
+              <a:rPr sz="1200" b="0">
+                <a:solidFill>
+                  <a:srgbClr val="6B6B6B"/>
+                </a:solidFill>
+                <a:latin typeface="Leelawadee UI"/>
+                <a:ea typeface="Leelawadee UI"/>
+                <a:cs typeface="Leelawadee UI"/>
+              </a:rPr>
+              <a:t>RAISE 2 · เดือนที่ 2 · สัปดาห์ที่ 7          63</a:t>
+            </a:r>
+          </a:p>
+        </p:txBody>
+      </p:sp>
+    </p:spTree>
+  </p:cSld>
+  <p:clrMapOvr>
+    <a:masterClrMapping/>
+  </p:clrMapOvr>
+</p:sld>
+</file>
+
+<file path=ppt/slides/slide64.xml><?xml version="1.0" encoding="utf-8"?>
+<p:sld xmlns:a="http://schemas.openxmlformats.org/drawingml/2006/main" xmlns:p="http://schemas.openxmlformats.org/presentationml/2006/main" xmlns:r="http://schemas.openxmlformats.org/officeDocument/2006/relationships">
+  <p:cSld>
+    <p:spTree>
+      <p:nvGrpSpPr>
+        <p:cNvPr id="1" name=""/>
+        <p:cNvGrpSpPr/>
+        <p:nvPr/>
+      </p:nvGrpSpPr>
+      <p:grpSpPr/>
+      <p:sp>
+        <p:nvSpPr>
+          <p:cNvPr id="2" name="TextBox 1"/>
+          <p:cNvSpPr txBox="1"/>
+          <p:nvPr/>
+        </p:nvSpPr>
+        <p:spPr>
+          <a:xfrm>
+            <a:off x="822960" y="502920"/>
+            <a:ext cx="10545775" cy="804672"/>
+          </a:xfrm>
+          <a:prstGeom prst="rect">
+            <a:avLst/>
+          </a:prstGeom>
+          <a:noFill/>
+        </p:spPr>
+        <p:txBody>
+          <a:bodyPr wrap="square">
+            <a:spAutoFit/>
+          </a:bodyPr>
+          <a:lstStyle/>
+          <a:p>
+            <a:pPr algn="l"/>
+            <a:r>
+              <a:rPr sz="3600" b="1">
+                <a:solidFill>
+                  <a:srgbClr val="1F5FA8"/>
+                </a:solidFill>
+                <a:latin typeface="Leelawadee UI"/>
+                <a:ea typeface="Leelawadee UI"/>
+                <a:cs typeface="Leelawadee UI"/>
+              </a:rPr>
+              <a:t>📦 สิ่งที่ต้องส่งมอบสัปดาห์นี้</a:t>
+            </a:r>
+          </a:p>
+        </p:txBody>
+      </p:sp>
+      <p:sp>
+        <p:nvSpPr>
+          <p:cNvPr id="3" name="TextBox 2"/>
+          <p:cNvSpPr txBox="1"/>
+          <p:nvPr/>
+        </p:nvSpPr>
+        <p:spPr>
+          <a:xfrm>
+            <a:off x="822960" y="1472184"/>
+            <a:ext cx="10545775" cy="560324"/>
+          </a:xfrm>
+          <a:prstGeom prst="rect">
+            <a:avLst/>
+          </a:prstGeom>
+          <a:noFill/>
+        </p:spPr>
+        <p:txBody>
+          <a:bodyPr wrap="square">
+            <a:spAutoFit/>
+          </a:bodyPr>
+          <a:lstStyle/>
+          <a:p>
+            <a:pPr algn="l"/>
+            <a:r>
+              <a:rPr sz="2600" b="0">
+                <a:solidFill>
+                  <a:srgbClr val="1A1A1A"/>
+                </a:solidFill>
+                <a:latin typeface="Leelawadee UI"/>
+                <a:ea typeface="Leelawadee UI"/>
+                <a:cs typeface="Leelawadee UI"/>
+              </a:rPr>
+              <a:t>• [ ] repo บน GitHub ที่มี CLAUDE.md และไม่มีคีย์หลุด</a:t>
+            </a:r>
+          </a:p>
+        </p:txBody>
+      </p:sp>
+      <p:sp>
+        <p:nvSpPr>
+          <p:cNvPr id="4" name="TextBox 3"/>
+          <p:cNvSpPr txBox="1"/>
+          <p:nvPr/>
+        </p:nvSpPr>
+        <p:spPr>
+          <a:xfrm>
+            <a:off x="822960" y="2087372"/>
+            <a:ext cx="10545775" cy="560324"/>
+          </a:xfrm>
+          <a:prstGeom prst="rect">
+            <a:avLst/>
+          </a:prstGeom>
+          <a:noFill/>
+        </p:spPr>
+        <p:txBody>
+          <a:bodyPr wrap="square">
+            <a:spAutoFit/>
+          </a:bodyPr>
+          <a:lstStyle/>
+          <a:p>
+            <a:pPr algn="l"/>
+            <a:r>
+              <a:rPr sz="2600" b="0">
+                <a:solidFill>
+                  <a:srgbClr val="1A1A1A"/>
+                </a:solidFill>
+                <a:latin typeface="Leelawadee UI"/>
+                <a:ea typeface="Leelawadee UI"/>
+                <a:cs typeface="Leelawadee UI"/>
+              </a:rPr>
+              <a:t>• [ ] ⭐ CRUD ครบ — กรอก → ปิด → เปิดใหม่ → ยังอยู่</a:t>
+            </a:r>
+          </a:p>
+        </p:txBody>
+      </p:sp>
+      <p:sp>
+        <p:nvSpPr>
+          <p:cNvPr id="5" name="TextBox 4"/>
+          <p:cNvSpPr txBox="1"/>
+          <p:nvPr/>
+        </p:nvSpPr>
+        <p:spPr>
+          <a:xfrm>
+            <a:off x="822960" y="2702560"/>
+            <a:ext cx="10545775" cy="560324"/>
+          </a:xfrm>
+          <a:prstGeom prst="rect">
+            <a:avLst/>
+          </a:prstGeom>
+          <a:noFill/>
+        </p:spPr>
+        <p:txBody>
+          <a:bodyPr wrap="square">
+            <a:spAutoFit/>
+          </a:bodyPr>
+          <a:lstStyle/>
+          <a:p>
+            <a:pPr algn="l"/>
+            <a:r>
+              <a:rPr sz="2600" b="0">
+                <a:solidFill>
+                  <a:srgbClr val="1A1A1A"/>
+                </a:solidFill>
+                <a:latin typeface="Leelawadee UI"/>
+                <a:ea typeface="Leelawadee UI"/>
+                <a:cs typeface="Leelawadee UI"/>
+              </a:rPr>
+              <a:t>• [ ] ล็อกอินได้ + ไม่ล็อกอินอ่านไม่ได้ + URL ออนไลน์</a:t>
+            </a:r>
+          </a:p>
+        </p:txBody>
+      </p:sp>
+      <p:sp>
+        <p:nvSpPr>
+          <p:cNvPr id="6" name="TextBox 5"/>
+          <p:cNvSpPr txBox="1"/>
+          <p:nvPr/>
+        </p:nvSpPr>
+        <p:spPr>
+          <a:xfrm>
+            <a:off x="822960" y="3317748"/>
+            <a:ext cx="10545775" cy="1029208"/>
+          </a:xfrm>
+          <a:prstGeom prst="rect">
+            <a:avLst/>
+          </a:prstGeom>
+          <a:noFill/>
+        </p:spPr>
+        <p:txBody>
+          <a:bodyPr wrap="square">
+            <a:spAutoFit/>
+          </a:bodyPr>
+          <a:lstStyle/>
+          <a:p>
+            <a:pPr algn="l"/>
+            <a:r>
+              <a:rPr sz="2600" b="0">
+                <a:solidFill>
+                  <a:srgbClr val="1A1A1A"/>
+                </a:solidFill>
+                <a:latin typeface="Leelawadee UI"/>
+                <a:ea typeface="Leelawadee UI"/>
+                <a:cs typeface="Leelawadee UI"/>
+              </a:rPr>
+              <a:t>• 📤 ใบงาน (LeaveEasy) ภายในจันทร์ 7 ก.ย. · 🏠 การบ้าน (หัวข้อคุณ) ภายในศุกร์ 11 ก.ย.</a:t>
+            </a:r>
+          </a:p>
+        </p:txBody>
+      </p:sp>
+      <p:sp>
+        <p:nvSpPr>
+          <p:cNvPr id="7" name="TextBox 6"/>
+          <p:cNvSpPr txBox="1"/>
+          <p:nvPr/>
+        </p:nvSpPr>
+        <p:spPr>
+          <a:xfrm>
+            <a:off x="822960" y="6355080"/>
+            <a:ext cx="10545775" cy="320040"/>
+          </a:xfrm>
+          <a:prstGeom prst="rect">
+            <a:avLst/>
+          </a:prstGeom>
+          <a:noFill/>
+        </p:spPr>
+        <p:txBody>
+          <a:bodyPr wrap="square">
+            <a:spAutoFit/>
+          </a:bodyPr>
+          <a:lstStyle/>
+          <a:p>
+            <a:r>
+              <a:rPr sz="1200" b="0">
+                <a:solidFill>
+                  <a:srgbClr val="6B6B6B"/>
+                </a:solidFill>
+                <a:latin typeface="Leelawadee UI"/>
+                <a:ea typeface="Leelawadee UI"/>
+                <a:cs typeface="Leelawadee UI"/>
+              </a:rPr>
+              <a:t>RAISE 2 · เดือนที่ 2 · สัปดาห์ที่ 7          64</a:t>
+            </a:r>
+          </a:p>
+        </p:txBody>
+      </p:sp>
+    </p:spTree>
+  </p:cSld>
+  <p:clrMapOvr>
+    <a:masterClrMapping/>
+  </p:clrMapOvr>
+</p:sld>
+</file>
+
+<file path=ppt/slides/slide65.xml><?xml version="1.0" encoding="utf-8"?>
 <p:sld xmlns:a="http://schemas.openxmlformats.org/drawingml/2006/main" xmlns:p="http://schemas.openxmlformats.org/presentationml/2006/main" xmlns:r="http://schemas.openxmlformats.org/officeDocument/2006/relationships">
   <p:cSld>
     <p:spTree>
@@ -22541,7 +23823,7 @@
                 <a:ea typeface="Leelawadee UI"/>
                 <a:cs typeface="Leelawadee UI"/>
               </a:rPr>
-              <a:t>RAISE 2 · เดือนที่ 2 · สัปดาห์ที่ 7          62</a:t>
+              <a:t>RAISE 2 · เดือนที่ 2 · สัปดาห์ที่ 7          65</a:t>
             </a:r>
           </a:p>
         </p:txBody>
@@ -22554,7 +23836,7 @@
 </p:sld>
 </file>
 
-<file path=ppt/slides/slide63.xml><?xml version="1.0" encoding="utf-8"?>
+<file path=ppt/slides/slide66.xml><?xml version="1.0" encoding="utf-8"?>
 <p:sld xmlns:a="http://schemas.openxmlformats.org/drawingml/2006/main" xmlns:p="http://schemas.openxmlformats.org/presentationml/2006/main" xmlns:r="http://schemas.openxmlformats.org/officeDocument/2006/relationships">
   <p:cSld>
     <p:spTree>
@@ -23044,7 +24326,7 @@
                 <a:ea typeface="Leelawadee UI"/>
                 <a:cs typeface="Leelawadee UI"/>
               </a:rPr>
-              <a:t>RAISE 2 · เดือนที่ 2 · สัปดาห์ที่ 7          63</a:t>
+              <a:t>RAISE 2 · เดือนที่ 2 · สัปดาห์ที่ 7          66</a:t>
             </a:r>
           </a:p>
         </p:txBody>
@@ -23057,7 +24339,7 @@
 </p:sld>
 </file>
 
-<file path=ppt/slides/slide64.xml><?xml version="1.0" encoding="utf-8"?>
+<file path=ppt/slides/slide67.xml><?xml version="1.0" encoding="utf-8"?>
 <p:sld xmlns:a="http://schemas.openxmlformats.org/drawingml/2006/main" xmlns:p="http://schemas.openxmlformats.org/presentationml/2006/main" xmlns:r="http://schemas.openxmlformats.org/officeDocument/2006/relationships">
   <p:cSld>
     <p:spTree>
@@ -23320,7 +24602,7 @@
                 <a:ea typeface="Leelawadee UI"/>
                 <a:cs typeface="Leelawadee UI"/>
               </a:rPr>
-              <a:t>RAISE 2 · เดือนที่ 2 · สัปดาห์ที่ 7          64</a:t>
+              <a:t>RAISE 2 · เดือนที่ 2 · สัปดาห์ที่ 7          67</a:t>
             </a:r>
           </a:p>
         </p:txBody>
@@ -23333,7 +24615,7 @@
 </p:sld>
 </file>
 
-<file path=ppt/slides/slide65.xml><?xml version="1.0" encoding="utf-8"?>
+<file path=ppt/slides/slide68.xml><?xml version="1.0" encoding="utf-8"?>
 <p:sld xmlns:a="http://schemas.openxmlformats.org/drawingml/2006/main" xmlns:p="http://schemas.openxmlformats.org/presentationml/2006/main" xmlns:r="http://schemas.openxmlformats.org/officeDocument/2006/relationships">
   <p:cSld>
     <p:spTree>
@@ -23411,7 +24693,7 @@
                 <a:ea typeface="Leelawadee UI"/>
                 <a:cs typeface="Leelawadee UI"/>
               </a:rPr>
-              <a:t>RAISE 2 · เดือนที่ 2 · สัปดาห์ที่ 7          65</a:t>
+              <a:t>RAISE 2 · เดือนที่ 2 · สัปดาห์ที่ 7          68</a:t>
             </a:r>
           </a:p>
         </p:txBody>

--- a/materials/week7/w7-slides.pptx
+++ b/materials/week7/w7-slides.pptx
@@ -72,7 +72,6 @@
     <p:sldId id="320" r:id="rId72"/>
     <p:sldId id="321" r:id="rId73"/>
     <p:sldId id="322" r:id="rId74"/>
-    <p:sldId id="323" r:id="rId75"/>
   </p:sldIdLst>
   <p:sldSz cx="12191695" cy="6858000" type="screen4x3"/>
   <p:notesSz cx="6858000" cy="9144000"/>
@@ -2739,7 +2738,7 @@
           <a:lstStyle/>
           <a:p>
             <a:r>
-              <a:t>ย้ำข้อสุดท้ายให้หนัก — "ซ่อนปุ่มกันคนกดผิดได้ครับ แต่กันคนที่ตั้งใจจะเข้าไม่ได้ เพราะเขาไม่ต้องผ่านหน้าเว็บของเรา · สัปดาห์หน้าเราจะเอาตารางใบเดียวกันนี้ไปเขียนเป็นกฎที่คลังข้อมูล ตารางที่คุณเขียนวันนี้จึงใช้ต่อได้เลย ไม่ต้องเขียนใหม่"</a:t>
+              <a:t>ย้ำว่า "คุณไม่ต้องพิมพ์ตารางเองครับ เล่าให้มันฟังสามบรรทัด แล้วอ่านสิ่งที่มันร่างมา" · บอกว่าร่างของ AI มักเว้นช่อง ทำไม่ได้ ว่าง ซึ่งเป็นช่องสำคัญที่สุด ให้สั่งเติมแล้วบันทึกทับ · ปิดด้วยข้อสุดท้ายให้หนัก — "ซ่อนปุ่มกันคนกดผิดได้ แต่กันคนที่ตั้งใจไม่ได้ เพราะเขาไม่ต้องผ่านหน้าเว็บเรา · สัปดาห์หน้าเราเอาไฟล์ ACL.md ใบเดียวกันนี้ไปเขียนเป็นกฎที่คลังข้อมูล เขียนวันนี้ครั้งเดียวใช้ต่อได้เลย"</a:t>
             </a:r>
           </a:p>
         </p:txBody>
@@ -3789,7 +3788,7 @@
           <a:lstStyle/>
           <a:p>
             <a:r>
-              <a:t>📍 สคริปต์สาธิต: w7-demo-fixit.md → บล็อก E (ขั้นที่ 8–9) · จบแล้วกลับเข้าสไลด์หน้า 50 · นี่คือจุดที่ตั้งใจให้พังจุดที่ 2 ห้ามตัด · ตอน push ถูกปฏิเสธให้พูดว่า "เห็นไหมครับ ผมเองก็เจอ ทีนี้มาดูกันว่ากู้ยังไงใน 3 นาที" · ตอนส่งให้ Claude ให้ชี้ว่า "ผมไม่ได้พิมพ์คำสั่ง git สักตัว ผมเล่าอาการให้มันฟังเฉย ๆ" · ย้ำปิดท้ายว่าไม่มีงานของใครหาย</a:t>
+              <a:t>อ่านออกเสียงทั้งสี่ข้อ แล้วปิดด้วย "สังเกตนะครับ ไม่มีข้อไหนบอกให้คุณท่องคำสั่ง git เลย" · เชื่อมเข้าบ่าย — "ใบงานส่วน A บ่ายนี้ให้คุณทำ CLAUDE.md แล้ว push ขึ้น GitHub · ส่วนงานชนกันไม่ต้องซ้อมเอง วันไหนเจอคำว่า conflict ให้ commit ก่อนแล้วส่งอาการให้ Claude ตามที่เล่าไปเมื่อกี้"</a:t>
             </a:r>
           </a:p>
         </p:txBody>
@@ -3859,7 +3858,7 @@
           <a:lstStyle/>
           <a:p>
             <a:r>
-              <a:t>อ่านออกเสียงทั้งสี่ข้อ แล้วปิดด้วย "สังเกตนะครับ ไม่มีข้อไหนบอกให้คุณท่องคำสั่ง git เลย" · เชื่อมเข้าบ่าย — "ใบงานส่วน A บ่ายนี้ให้คุณทำ CLAUDE.md แล้ว push ขึ้น GitHub · ส่วนงานชนกันไม่ต้องซ้อมเอง วันไหนเจอคำว่า conflict ให้ส่งให้ Claude แบบที่เพิ่งเห็น"</a:t>
+              <a:t>พูดว่า "ครึ่งชั่วโมงสุดท้ายของเช้าครับ และเป็นนาทีที่ผมชอบที่สุดของทั้งเดือน ระบบที่อยู่ในเครื่องเราคนเดียวยังไม่นับว่าเป็นระบบ อีกสิบนาที FixIt จะมีที่อยู่จริงบนอินเทอร์เน็ต"</a:t>
             </a:r>
           </a:p>
         </p:txBody>
@@ -3929,7 +3928,7 @@
           <a:lstStyle/>
           <a:p>
             <a:r>
-              <a:t>พูดว่า "ครึ่งชั่วโมงสุดท้ายของเช้าครับ และเป็นนาทีที่ผมชอบที่สุดของทั้งเดือน ระบบที่อยู่ในเครื่องเราคนเดียวยังไม่นับว่าเป็นระบบ อีกสิบนาที FixIt จะมีที่อยู่จริงบนอินเทอร์เน็ต"</a:t>
+              <a:t>ย้ำคำแปล Deploy = นำเว็บขึ้นออนไลน์ · Hosting = บริการที่ให้เว็บเรามีที่อยู่จริง · พูดว่า "จำคำว่า localhost จากสัปดาห์ที่แล้วได้ไหมครับ วันนี้เราจะเปลี่ยนจาก localhost เป็นที่อยู่ที่ส่งให้ใครก็ได้"</a:t>
             </a:r>
           </a:p>
         </p:txBody>
@@ -3999,7 +3998,7 @@
           <a:lstStyle/>
           <a:p>
             <a:r>
-              <a:t>ย้ำคำแปล Deploy = นำเว็บขึ้นออนไลน์ · Hosting = บริการที่ให้เว็บเรามีที่อยู่จริง · พูดว่า "จำคำว่า localhost จากสัปดาห์ที่แล้วได้ไหมครับ วันนี้เราจะเปลี่ยนจาก localhost เป็นที่อยู่ที่ส่งให้ใครก็ได้"</a:t>
+              <a:t>ชี้ทีละกล่องจากซ้าย "โค้ดที่เสร็จแล้วในเครื่อง สั่ง deploy หนึ่งครั้ง มันจะถูกคัดลอกขึ้นไปวางบน Hosting" · หยุดที่กล่องเข้ม "ตั้งแต่วินาทีที่ของถึงกล่องนี้ เว็บเราไม่ได้อยู่ในเครื่องเราแล้ว ปิดคอมไปเลยก็ยังเปิดได้" · ปิดที่กล่องขวาสุด "และนั่นแปลว่าคนแปลกหน้าก็เปิดได้ด้วย เพราะฉะนั้นกฎเมื่อกี้ถึงต้องมาก่อน"</a:t>
             </a:r>
           </a:p>
         </p:txBody>
@@ -4069,7 +4068,7 @@
           <a:lstStyle/>
           <a:p>
             <a:r>
-              <a:t>ชี้ทีละกล่องจากซ้าย "โค้ดที่เสร็จแล้วในเครื่อง สั่ง deploy หนึ่งครั้ง มันจะถูกคัดลอกขึ้นไปวางบน Hosting" · หยุดที่กล่องเข้ม "ตั้งแต่วินาทีที่ของถึงกล่องนี้ เว็บเราไม่ได้อยู่ในเครื่องเราแล้ว ปิดคอมไปเลยก็ยังเปิดได้" · ปิดที่กล่องขวาสุด "และนั่นแปลว่าคนแปลกหน้าก็เปิดได้ด้วย เพราะฉะนั้นกฎเมื่อกี้ถึงต้องมาก่อน"</a:t>
+              <a:t>พูดว่า "จุดพลาดคลาสสิกคือเขียนกฎไว้ในเครื่องแล้วนึกว่าปลอดภัยแล้ว กฎทำงานเฉพาะฉบับที่อยู่บนเซิร์ฟเวอร์ครับ ใบงานบ่ายนี้จึงเขียนให้ deploy กฎพร้อมเว็บเสมอ"</a:t>
             </a:r>
           </a:p>
         </p:txBody>
@@ -4139,7 +4138,7 @@
           <a:lstStyle/>
           <a:p>
             <a:r>
-              <a:t>พูดว่า "จุดพลาดคลาสสิกคือเขียนกฎไว้ในเครื่องแล้วนึกว่าปลอดภัยแล้ว กฎทำงานเฉพาะฉบับที่อยู่บนเซิร์ฟเวอร์ครับ ใบงานบ่ายนี้จึงเขียนให้ deploy กฎพร้อมเว็บเสมอ"</a:t>
+              <a:t>พูดว่า "สองอาการนี้คืออันดับหนึ่งกับสองของบ่ายนี้ ผมบอกล่วงหน้าเลย ถ้าเว็บออนไลน์พังแต่ในเครื่องปกติ ให้เช็กสองข้อนี้ก่อนเสมอ" · ทวน index จากสัปดาห์ที่แล้ว "Firestore จะบอกเองว่าต้องสร้างสารบัญ พร้อมแนบลิงก์มาให้กด ไม่ต้องทำเอง"</a:t>
             </a:r>
           </a:p>
         </p:txBody>
@@ -4209,7 +4208,7 @@
           <a:lstStyle/>
           <a:p>
             <a:r>
-              <a:t>พูดว่า "สองอาการนี้คืออันดับหนึ่งกับสองของบ่ายนี้ ผมบอกล่วงหน้าเลย ถ้าเว็บออนไลน์พังแต่ในเครื่องปกติ ให้เช็กสองข้อนี้ก่อนเสมอ" · ทวน index จากสัปดาห์ที่แล้ว "Firestore จะบอกเองว่าต้องสร้างสารบัญ พร้อมแนบลิงก์มาให้กด ไม่ต้องทำเอง"</a:t>
+              <a:t>📍 สคริปต์สาธิต: w7-demo-fixit.md → บล็อก F (ขั้นที่ 10) · จบแล้วกลับเข้าสไลด์หน้า 57 · นี่คือฉากจำของเช้านี้ · ตอนวาง URL ในแชท ให้รอจนมีคนพิมพ์ว่าเปิดได้อย่างน้อย 5 คน แล้วค่อยไปต่อ อย่ารีบ นาทีนี้คือรางวัลของทั้งเช้า</a:t>
             </a:r>
           </a:p>
         </p:txBody>
@@ -4279,7 +4278,7 @@
           <a:lstStyle/>
           <a:p>
             <a:r>
-              <a:t>📍 สคริปต์สาธิต: w7-demo-fixit.md → บล็อก F (ขั้นที่ 10) · จบแล้วกลับเข้าสไลด์หน้า 57 · นี่คือฉากจำของเช้านี้ · ตอนวาง URL ในแชท ให้รอจนมีคนพิมพ์ว่าเปิดได้อย่างน้อย 5 คน แล้วค่อยไปต่อ อย่ารีบ นาทีนี้คือรางวัลของทั้งเช้า</a:t>
+              <a:t>ให้ห้องพิมพ์ 🎉 ในแชท · พูดว่า "จากภาพนิ่งเมื่อสองสัปดาห์ก่อน ตอนนี้มันคือระบบจริงที่มีที่อยู่บนอินเทอร์เน็ต บ่ายนี้คุณจะได้ความรู้สึกนี้กับ LeaveEasy ของตัวเอง แล้วแลก URL กับเพื่อนด้วย"</a:t>
             </a:r>
           </a:p>
         </p:txBody>
@@ -4349,7 +4348,7 @@
           <a:lstStyle/>
           <a:p>
             <a:r>
-              <a:t>ให้ห้องพิมพ์ 🎉 ในแชท · พูดว่า "จากภาพนิ่งเมื่อสองสัปดาห์ก่อน ตอนนี้มันคือระบบจริงที่มีที่อยู่บนอินเทอร์เน็ต บ่ายนี้คุณจะได้ความรู้สึกนี้กับ LeaveEasy ของตัวเอง แล้วแลก URL กับเพื่อนด้วย"</a:t>
+              <a:t>พูดเสียงหนักแน่น "ระบบออนไลน์แล้วจะมีคนอยากใส่ข้อมูลจริงทันที ห้ามนะครับ เหตุผลการลาจริง ชื่อลูกค้าจริง เบอร์โทรจริง ห้ามทั้งหมด จนกว่ากฎรายห้องจะปิดเรียบร้อยสัปดาห์หน้า นี่คือเรื่อง PDPA ที่เรียนกันไปเดือนที่ 1"</a:t>
             </a:r>
           </a:p>
         </p:txBody>
@@ -4489,7 +4488,7 @@
           <a:lstStyle/>
           <a:p>
             <a:r>
-              <a:t>พูดเสียงหนักแน่น "ระบบออนไลน์แล้วจะมีคนอยากใส่ข้อมูลจริงทันที ห้ามนะครับ เหตุผลการลาจริง ชื่อลูกค้าจริง เบอร์โทรจริง ห้ามทั้งหมด จนกว่ากฎรายห้องจะปิดเรียบร้อยสัปดาห์หน้า นี่คือเรื่อง PDPA ที่เรียนกันไปเดือนที่ 1"</a:t>
+              <a:t>ถามห้องว่า "ออนไลน์แล้วเว็บพัง แต่ในเครื่องปกติ เช็กอะไรสองอย่าง" คำตอบ กฎยัง deploy ไหม กับ index สร้างหรือยัง · แล้วเข้าปิดคาบ</a:t>
             </a:r>
           </a:p>
         </p:txBody>
@@ -4559,7 +4558,7 @@
           <a:lstStyle/>
           <a:p>
             <a:r>
-              <a:t>ถามห้องว่า "ออนไลน์แล้วเว็บพัง แต่ในเครื่องปกติ เช็กอะไรสองอย่าง" คำตอบ กฎยัง deploy ไหม กับ index สร้างหรือยัง · แล้วเข้าปิดคาบ</a:t>
+              <a:t>บอกว่า "5 นาทีสุดท้าย มีของต้องส่งสัปดาห์นี้ ห้ามออกก่อนครับ" · เตรียมลิงก์ใบงาน คิวถาม ธนาคารคำตอบ วางในแชทตอนนี้</a:t>
             </a:r>
           </a:p>
         </p:txBody>
@@ -4629,7 +4628,7 @@
           <a:lstStyle/>
           <a:p>
             <a:r>
-              <a:t>บอกว่า "5 นาทีสุดท้าย มีของต้องส่งสัปดาห์นี้ ห้ามออกก่อนครับ" · เตรียมลิงก์ใบงาน คิวถาม ธนาคารคำตอบ วางในแชทตอนนี้</a:t>
+              <a:t>อ่านออกเสียงทุกข้อ · ย้ำว่าส่ง URL repo กับ URL เว็บออนไลน์ อย่างเดียว ไม่ต้องแนบไฟล์ ผู้สอนเปิด GitHub ตรวจเอง · "ผมตรวจ commit รายคนด้วยนะครับ ทุกคนต้องมีชื่อตัวเองในประวัติ" · deploy ยกไป Consult วันอาทิตย์ได้ถ้าไม่ทัน แต่สามข้อแรกต้องมี</a:t>
             </a:r>
           </a:p>
         </p:txBody>
@@ -4699,7 +4698,7 @@
           <a:lstStyle/>
           <a:p>
             <a:r>
-              <a:t>อ่านออกเสียงทุกข้อ · ย้ำว่าส่ง URL repo กับ URL เว็บออนไลน์ อย่างเดียว ไม่ต้องแนบไฟล์ ผู้สอนเปิด GitHub ตรวจเอง · "ผมตรวจ commit รายคนด้วยนะครับ ทุกคนต้องมีชื่อตัวเองในประวัติ" · deploy ยกไป Consult วันอาทิตย์ได้ถ้าไม่ทัน แต่สามข้อแรกต้องมี</a:t>
+              <a:t>ชี้ทีละแถวแล้วถามคำถามประจำหลักสูตร "FixIt แจ้งซ่อมใหม่ LeaveEasy ยื่นใบลาใหม่ แล้วหัวข้อของคุณ ตัว C คือปุ่มอะไร" ให้ทุกคนพิมพ์คำตอบในแชทก่อนพักเที่ยง · ย้ำว่าช่องขวาสุดเติมเองในใบการบ้าน ห้ามลอกช่องกลาง</a:t>
             </a:r>
           </a:p>
         </p:txBody>
@@ -4769,7 +4768,7 @@
           <a:lstStyle/>
           <a:p>
             <a:r>
-              <a:t>ชี้ทีละแถวแล้วถามคำถามประจำหลักสูตร "FixIt แจ้งซ่อมใหม่ LeaveEasy ยื่นใบลาใหม่ แล้วหัวข้อของคุณ ตัว C คือปุ่มอะไร" ให้ทุกคนพิมพ์คำตอบในแชทก่อนพักเที่ยง · ย้ำว่าช่องขวาสุดเติมเองในใบการบ้าน ห้ามลอกช่องกลาง</a:t>
+              <a:t>บอกก่อนว่า "ใบงานวันนี้ออกแบบให้เสร็จใน 2 ชั่วโมง เวลาที่เหลือคือเวลาสำรอง ไม่ใช่งานเพิ่ม" · ชี้แถว B แล้วพูดว่า "ถ้าเวลาไม่พอ ให้ B เสร็จเป็นอย่างน้อยครับ ลำดับตัดคือ B ก่อน C ก่อน D ส่วน deploy ยกไป Consult วันอาทิตย์ได้ แต่ห้าม deploy โดยไม่มีกฎขั้นต่ำเด็ดขาด" · ย้ำว่าบ่ายนี้ทุกคนทำ LeaveEasy เหมือนกัน แล้วการบ้านทำซ้ำกับหัวข้อของตัวเอง</a:t>
             </a:r>
           </a:p>
         </p:txBody>
@@ -4839,7 +4838,7 @@
           <a:lstStyle/>
           <a:p>
             <a:r>
-              <a:t>บอกก่อนว่า "ใบงานวันนี้ออกแบบให้เสร็จใน 2 ชั่วโมง เวลาที่เหลือคือเวลาสำรอง ไม่ใช่งานเพิ่ม" · ชี้แถว B แล้วพูดว่า "ถ้าเวลาไม่พอ ให้ B เสร็จเป็นอย่างน้อยครับ ลำดับตัดคือ B ก่อน C ก่อน D ส่วน deploy ยกไป Consult วันอาทิตย์ได้ แต่ห้าม deploy โดยไม่มีกฎขั้นต่ำเด็ดขาด" · ย้ำว่าบ่ายนี้ทุกคนทำ LeaveEasy เหมือนกัน แล้วการบ้านทำซ้ำกับหัวข้อของตัวเอง</a:t>
+              <a:t>ชี้ข้อแรก "คนนำจอเปลี่ยนทุก Checkpoint แต่ทุกคนทำบนเครื่องตัวเองตลอด" · ย้ำว่าก่อนเริ่มงานทุกครั้ง ให้พิมพ์บอก Claude ว่า "ช่วยดึงงานล่าสุดจาก GitHub ลงมาก่อน" เพราะ repo อยู่บน GitHub แล้ว · วางลิงก์ตารางห้องย่อยในแชทก่อนพักเที่ยง · บอกว่าคิวถามกลางและธนาคารคำตอบสด ลิงก์อยู่ในแชทแล้ว</a:t>
             </a:r>
           </a:p>
         </p:txBody>
@@ -4865,76 +4864,6 @@
 </file>
 
 <file path=ppt/notesSlides/notesSlide66.xml><?xml version="1.0" encoding="utf-8"?>
-<p:notes xmlns:a="http://schemas.openxmlformats.org/drawingml/2006/main" xmlns:p="http://schemas.openxmlformats.org/presentationml/2006/main" xmlns:r="http://schemas.openxmlformats.org/officeDocument/2006/relationships">
-  <p:cSld>
-    <p:spTree>
-      <p:nvGrpSpPr>
-        <p:cNvPr id="1" name=""/>
-        <p:cNvGrpSpPr/>
-        <p:nvPr/>
-      </p:nvGrpSpPr>
-      <p:grpSpPr>
-        <a:xfrm>
-          <a:off x="0" y="0"/>
-          <a:ext cx="0" cy="0"/>
-          <a:chOff x="0" y="0"/>
-          <a:chExt cx="0" cy="0"/>
-        </a:xfrm>
-      </p:grpSpPr>
-      <p:sp>
-        <p:nvSpPr>
-          <p:cNvPr id="2" name="Slide Image Placeholder 1"/>
-          <p:cNvSpPr>
-            <a:spLocks noGrp="1"/>
-          </p:cNvSpPr>
-          <p:nvPr>
-            <p:ph type="sldImg" idx="2"/>
-          </p:nvPr>
-        </p:nvSpPr>
-        <p:spPr/>
-      </p:sp>
-      <p:sp>
-        <p:nvSpPr>
-          <p:cNvPr id="3" name="Notes Placeholder 2"/>
-          <p:cNvSpPr>
-            <a:spLocks noGrp="1"/>
-          </p:cNvSpPr>
-          <p:nvPr>
-            <p:ph type="body" idx="3" sz="quarter"/>
-          </p:nvPr>
-        </p:nvSpPr>
-        <p:spPr/>
-        <p:txBody>
-          <a:bodyPr/>
-          <a:lstStyle/>
-          <a:p>
-            <a:r>
-              <a:t>ชี้ข้อแรก "คนนำจอเปลี่ยนทุก Checkpoint แต่ทุกคนทำบนเครื่องตัวเองตลอด" · ย้ำว่าก่อนเริ่มงานทุกครั้ง ให้พิมพ์บอก Claude ว่า "ช่วยดึงงานล่าสุดจาก GitHub ลงมาก่อน" เพราะ repo อยู่บน GitHub แล้ว · วางลิงก์ตารางห้องย่อยในแชทก่อนพักเที่ยง · บอกว่าคิวถามกลางและธนาคารคำตอบสด ลิงก์อยู่ในแชทแล้ว</a:t>
-            </a:r>
-          </a:p>
-        </p:txBody>
-      </p:sp>
-      <p:sp>
-        <p:nvSpPr>
-          <p:cNvPr id="4" name="Slide Number Placeholder 3"/>
-          <p:cNvSpPr>
-            <a:spLocks noGrp="1"/>
-          </p:cNvSpPr>
-          <p:nvPr>
-            <p:ph type="sldNum" idx="5" sz="quarter"/>
-          </p:nvPr>
-        </p:nvSpPr>
-        <p:spPr/>
-      </p:sp>
-    </p:spTree>
-  </p:cSld>
-  <p:clrMapOvr>
-    <a:masterClrMapping/>
-  </p:clrMapOvr>
-</p:notes>
-</file>
-
-<file path=ppt/notesSlides/notesSlide67.xml><?xml version="1.0" encoding="utf-8"?>
 <p:notes xmlns:a="http://schemas.openxmlformats.org/drawingml/2006/main" xmlns:p="http://schemas.openxmlformats.org/presentationml/2006/main" xmlns:r="http://schemas.openxmlformats.org/officeDocument/2006/relationships">
   <p:cSld>
     <p:spTree>
@@ -16392,7 +16321,7 @@
                 <a:ea typeface="Leelawadee UI"/>
                 <a:cs typeface="Leelawadee UI"/>
               </a:rPr>
-              <a:t>💬 สั่ง AI จำกัดสิทธิ์ตาม ACL</a:t>
+              <a:t>💬 ให้ AI ร่าง ACL.md — เราอ่านตรวจ</a:t>
             </a:r>
           </a:p>
         </p:txBody>
@@ -16558,7 +16487,7 @@
                 <a:ea typeface="Leelawadee UI"/>
                 <a:cs typeface="Leelawadee UI"/>
               </a:rPr>
-              <a:t>นี่คือตารางสิทธิ์ของระบบผม &lt;วางตาราง 3 แถว&gt;</a:t>
+              <a:t>FixIt มีผู้ใช้ 3 บทบาท ผู้แจ้งแจ้งซ่อม ช่างซ่อมแก้งาน</a:t>
             </a:r>
           </a:p>
           <a:p>
@@ -16576,7 +16505,7 @@
                 <a:ea typeface="Leelawadee UI"/>
                 <a:cs typeface="Leelawadee UI"/>
               </a:rPr>
-              <a:t>ช่วยจำกัดหน้าจอและปุ่มให้ตรงตามตารางนี้</a:t>
+              <a:t>ผู้ดูแลจัดการหมวดหมู่</a:t>
             </a:r>
           </a:p>
           <a:p>
@@ -16594,7 +16523,7 @@
                 <a:ea typeface="Leelawadee UI"/>
                 <a:cs typeface="Leelawadee UI"/>
               </a:rPr>
-              <a:t>ขอดูแผนก่อน อย่าเพิ่งลงมือ</a:t>
+              <a:t>ช่วยร่างตารางสิทธิ์เป็นไฟล์ ACL.md ให้ผม บทบาท ทำได้ ทำไม่ได้</a:t>
             </a:r>
           </a:p>
         </p:txBody>
@@ -16631,7 +16560,7 @@
                 <a:ea typeface="Leelawadee UI"/>
                 <a:cs typeface="Leelawadee UI"/>
               </a:rPr>
-              <a:t>• ปุ่มที่บทบาทนั้นทำไม่ได้ → ซ่อนหรือกดไม่ได้</a:t>
+              <a:t>• ⭐ อ่านแล้วเช็ก ช่อง "ทำไม่ได้" ครบทุกแถวไหม</a:t>
             </a:r>
           </a:p>
         </p:txBody>
@@ -16668,7 +16597,7 @@
                 <a:ea typeface="Leelawadee UI"/>
                 <a:cs typeface="Leelawadee UI"/>
               </a:rPr>
-              <a:t>• ⚠️ ซ่อนปุ่มยังไม่ใช่ความปลอดภัยจริง</a:t>
+              <a:t>• ครบแล้วสั่ง "อ่าน ACL.md แล้วจำกัดปุ่มตามตาราง"</a:t>
             </a:r>
           </a:p>
         </p:txBody>
@@ -16705,7 +16634,7 @@
                 <a:ea typeface="Leelawadee UI"/>
                 <a:cs typeface="Leelawadee UI"/>
               </a:rPr>
-              <a:t>• ประตูจริงคือกฎที่คลัง — สัปดาห์หน้า</a:t>
+              <a:t>• ⚠️ ซ่อนปุ่ม ยังไม่ใช่ ความปลอดภัยจริง</a:t>
             </a:r>
           </a:p>
         </p:txBody>
@@ -19820,87 +19749,75 @@
       <p:grpSpPr/>
       <p:sp>
         <p:nvSpPr>
-          <p:cNvPr id="2" name="Rectangle 1"/>
-          <p:cNvSpPr/>
-          <p:nvPr/>
-        </p:nvSpPr>
-        <p:spPr>
-          <a:xfrm>
-            <a:off x="0" y="0"/>
-            <a:ext cx="12191695" cy="6858000"/>
-          </a:xfrm>
-          <a:prstGeom prst="rect">
-            <a:avLst/>
-          </a:prstGeom>
-          <a:solidFill>
-            <a:srgbClr val="FFF3DF"/>
-          </a:solidFill>
-          <a:ln>
-            <a:noFill/>
-          </a:ln>
-        </p:spPr>
-        <p:style>
-          <a:lnRef idx="1">
-            <a:schemeClr val="accent1"/>
-          </a:lnRef>
-          <a:fillRef idx="3">
-            <a:schemeClr val="accent1"/>
-          </a:fillRef>
-          <a:effectRef idx="2">
-            <a:schemeClr val="accent1"/>
-          </a:effectRef>
-          <a:fontRef idx="minor">
-            <a:schemeClr val="lt1"/>
-          </a:fontRef>
-        </p:style>
-        <p:txBody>
-          <a:bodyPr rtlCol="0" anchor="ctr"/>
-          <a:lstStyle/>
-          <a:p>
-            <a:pPr algn="ctr"/>
-          </a:p>
-        </p:txBody>
-      </p:sp>
-      <p:sp>
-        <p:nvSpPr>
-          <p:cNvPr id="3" name="Rectangle 2"/>
-          <p:cNvSpPr/>
-          <p:nvPr/>
-        </p:nvSpPr>
-        <p:spPr>
-          <a:xfrm>
-            <a:off x="0" y="0"/>
-            <a:ext cx="146304" cy="6858000"/>
-          </a:xfrm>
-          <a:prstGeom prst="rect">
-            <a:avLst/>
-          </a:prstGeom>
-          <a:solidFill>
-            <a:srgbClr val="E0A02C"/>
-          </a:solidFill>
-          <a:ln>
-            <a:noFill/>
-          </a:ln>
-        </p:spPr>
-        <p:style>
-          <a:lnRef idx="1">
-            <a:schemeClr val="accent1"/>
-          </a:lnRef>
-          <a:fillRef idx="3">
-            <a:schemeClr val="accent1"/>
-          </a:fillRef>
-          <a:effectRef idx="2">
-            <a:schemeClr val="accent1"/>
-          </a:effectRef>
-          <a:fontRef idx="minor">
-            <a:schemeClr val="lt1"/>
-          </a:fontRef>
-        </p:style>
-        <p:txBody>
-          <a:bodyPr rtlCol="0" anchor="ctr"/>
-          <a:lstStyle/>
-          <a:p>
-            <a:pPr algn="ctr"/>
+          <p:cNvPr id="2" name="TextBox 1"/>
+          <p:cNvSpPr txBox="1"/>
+          <p:nvPr/>
+        </p:nvSpPr>
+        <p:spPr>
+          <a:xfrm>
+            <a:off x="822960" y="502920"/>
+            <a:ext cx="10545775" cy="804672"/>
+          </a:xfrm>
+          <a:prstGeom prst="rect">
+            <a:avLst/>
+          </a:prstGeom>
+          <a:noFill/>
+        </p:spPr>
+        <p:txBody>
+          <a:bodyPr wrap="square">
+            <a:spAutoFit/>
+          </a:bodyPr>
+          <a:lstStyle/>
+          <a:p>
+            <a:pPr algn="l"/>
+            <a:r>
+              <a:rPr sz="3600" b="1">
+                <a:solidFill>
+                  <a:srgbClr val="1F5FA8"/>
+                </a:solidFill>
+                <a:latin typeface="Leelawadee UI"/>
+                <a:ea typeface="Leelawadee UI"/>
+                <a:cs typeface="Leelawadee UI"/>
+              </a:rPr>
+              <a:t>✅ ช่วงที่ 5 คุณต้องได้อะไรกลับไป</a:t>
+            </a:r>
+          </a:p>
+        </p:txBody>
+      </p:sp>
+      <p:sp>
+        <p:nvSpPr>
+          <p:cNvPr id="3" name="TextBox 2"/>
+          <p:cNvSpPr txBox="1"/>
+          <p:nvPr/>
+        </p:nvSpPr>
+        <p:spPr>
+          <a:xfrm>
+            <a:off x="822960" y="1472184"/>
+            <a:ext cx="10545775" cy="560324"/>
+          </a:xfrm>
+          <a:prstGeom prst="rect">
+            <a:avLst/>
+          </a:prstGeom>
+          <a:noFill/>
+        </p:spPr>
+        <p:txBody>
+          <a:bodyPr wrap="square">
+            <a:spAutoFit/>
+          </a:bodyPr>
+          <a:lstStyle/>
+          <a:p>
+            <a:pPr algn="l"/>
+            <a:r>
+              <a:rPr sz="2600" b="0">
+                <a:solidFill>
+                  <a:srgbClr val="1A1A1A"/>
+                </a:solidFill>
+                <a:latin typeface="Leelawadee UI"/>
+                <a:ea typeface="Leelawadee UI"/>
+                <a:cs typeface="Leelawadee UI"/>
+              </a:rPr>
+              <a:t>• รู้ว่าคำสั่ง git ทั้งหมด ให้ Claude ทำให้ได้</a:t>
+            </a:r>
           </a:p>
         </p:txBody>
       </p:sp>
@@ -19912,31 +19829,31 @@
         </p:nvSpPr>
         <p:spPr>
           <a:xfrm>
-            <a:off x="9082735" y="109728"/>
-            <a:ext cx="2834640" cy="384048"/>
-          </a:xfrm>
-          <a:prstGeom prst="rect">
-            <a:avLst/>
-          </a:prstGeom>
-          <a:noFill/>
-        </p:spPr>
-        <p:txBody>
-          <a:bodyPr wrap="square">
-            <a:spAutoFit/>
-          </a:bodyPr>
-          <a:lstStyle/>
-          <a:p>
-            <a:pPr algn="r"/>
-            <a:r>
-              <a:rPr sz="1400" b="1">
-                <a:solidFill>
-                  <a:srgbClr val="8A5400"/>
-                </a:solidFill>
-                <a:latin typeface="Leelawadee UI"/>
-                <a:ea typeface="Leelawadee UI"/>
-                <a:cs typeface="Leelawadee UI"/>
-              </a:rPr>
-              <a:t>🎬 สลับไปหน้าจอสาธิตสด</a:t>
+            <a:off x="822960" y="2087372"/>
+            <a:ext cx="10545775" cy="560324"/>
+          </a:xfrm>
+          <a:prstGeom prst="rect">
+            <a:avLst/>
+          </a:prstGeom>
+          <a:noFill/>
+        </p:spPr>
+        <p:txBody>
+          <a:bodyPr wrap="square">
+            <a:spAutoFit/>
+          </a:bodyPr>
+          <a:lstStyle/>
+          <a:p>
+            <a:pPr algn="l"/>
+            <a:r>
+              <a:rPr sz="2600" b="0">
+                <a:solidFill>
+                  <a:srgbClr val="1A1A1A"/>
+                </a:solidFill>
+                <a:latin typeface="Leelawadee UI"/>
+                <a:ea typeface="Leelawadee UI"/>
+                <a:cs typeface="Leelawadee UI"/>
+              </a:rPr>
+              <a:t>• ท่อง 3 อย่างที่ AI ทำแทนไม่ได้</a:t>
             </a:r>
           </a:p>
         </p:txBody>
@@ -19949,8 +19866,8 @@
         </p:nvSpPr>
         <p:spPr>
           <a:xfrm>
-            <a:off x="822960" y="502920"/>
-            <a:ext cx="10545775" cy="1408176"/>
+            <a:off x="822960" y="2702560"/>
+            <a:ext cx="10545775" cy="560324"/>
           </a:xfrm>
           <a:prstGeom prst="rect">
             <a:avLst/>
@@ -19965,15 +19882,15 @@
           <a:p>
             <a:pPr algn="l"/>
             <a:r>
-              <a:rPr sz="3600" b="1">
-                <a:solidFill>
-                  <a:srgbClr val="8A5400"/>
-                </a:solidFill>
-                <a:latin typeface="Leelawadee UI"/>
-                <a:ea typeface="Leelawadee UI"/>
-                <a:cs typeface="Leelawadee UI"/>
-              </a:rPr>
-              <a:t>🎬💥 สาธิต — push ขึ้น GitHub แล้วทำให้งานชนกัน ⏱ 11 นาที</a:t>
+              <a:rPr sz="2600" b="0">
+                <a:solidFill>
+                  <a:srgbClr val="1A1A1A"/>
+                </a:solidFill>
+                <a:latin typeface="Leelawadee UI"/>
+                <a:ea typeface="Leelawadee UI"/>
+                <a:cs typeface="Leelawadee UI"/>
+              </a:rPr>
+              <a:t>• รู้ว่า commit ก่อนให้ AI แตะ git เสมอ</a:t>
             </a:r>
           </a:p>
         </p:txBody>
@@ -19986,8 +19903,8 @@
         </p:nvSpPr>
         <p:spPr>
           <a:xfrm>
-            <a:off x="822960" y="2075688"/>
-            <a:ext cx="10545775" cy="1029208"/>
+            <a:off x="822960" y="3317748"/>
+            <a:ext cx="10545775" cy="560324"/>
           </a:xfrm>
           <a:prstGeom prst="rect">
             <a:avLst/>
@@ -20010,7 +19927,7 @@
                 <a:ea typeface="Leelawadee UI"/>
                 <a:cs typeface="Leelawadee UI"/>
               </a:rPr>
-              <a:t>• .gitignore → อ่านรายการไฟล์ที่จะส่งขึ้น → push → กวาดตาดูหน้า repo</a:t>
+              <a:t>• รู้ว่างานชนกันไม่ใช่งานหาย — กู้ได้เสมอ</a:t>
             </a:r>
           </a:p>
         </p:txBody>
@@ -20018,117 +19935,6 @@
       <p:sp>
         <p:nvSpPr>
           <p:cNvPr id="7" name="TextBox 6"/>
-          <p:cNvSpPr txBox="1"/>
-          <p:nvPr/>
-        </p:nvSpPr>
-        <p:spPr>
-          <a:xfrm>
-            <a:off x="822960" y="3159760"/>
-            <a:ext cx="10545775" cy="560324"/>
-          </a:xfrm>
-          <a:prstGeom prst="rect">
-            <a:avLst/>
-          </a:prstGeom>
-          <a:noFill/>
-        </p:spPr>
-        <p:txBody>
-          <a:bodyPr wrap="square">
-            <a:spAutoFit/>
-          </a:bodyPr>
-          <a:lstStyle/>
-          <a:p>
-            <a:pPr algn="l"/>
-            <a:r>
-              <a:rPr sz="2600" b="0">
-                <a:solidFill>
-                  <a:srgbClr val="1A1A1A"/>
-                </a:solidFill>
-                <a:latin typeface="Leelawadee UI"/>
-                <a:ea typeface="Leelawadee UI"/>
-                <a:cs typeface="Leelawadee UI"/>
-              </a:rPr>
-              <a:t>• สมมติว่ามีการแก้ไฟล์ไว้บน GitHub</a:t>
-            </a:r>
-          </a:p>
-        </p:txBody>
-      </p:sp>
-      <p:sp>
-        <p:nvSpPr>
-          <p:cNvPr id="8" name="TextBox 7"/>
-          <p:cNvSpPr txBox="1"/>
-          <p:nvPr/>
-        </p:nvSpPr>
-        <p:spPr>
-          <a:xfrm>
-            <a:off x="822960" y="3774948"/>
-            <a:ext cx="10545775" cy="560324"/>
-          </a:xfrm>
-          <a:prstGeom prst="rect">
-            <a:avLst/>
-          </a:prstGeom>
-          <a:noFill/>
-        </p:spPr>
-        <p:txBody>
-          <a:bodyPr wrap="square">
-            <a:spAutoFit/>
-          </a:bodyPr>
-          <a:lstStyle/>
-          <a:p>
-            <a:pPr algn="l"/>
-            <a:r>
-              <a:rPr sz="2600" b="0">
-                <a:solidFill>
-                  <a:srgbClr val="1A1A1A"/>
-                </a:solidFill>
-                <a:latin typeface="Leelawadee UI"/>
-                <a:ea typeface="Leelawadee UI"/>
-                <a:cs typeface="Leelawadee UI"/>
-              </a:rPr>
-              <a:t>• เราแก้ไฟล์เดียวกันในเครื่อง → push → ถูกปฏิเสธ</a:t>
-            </a:r>
-          </a:p>
-        </p:txBody>
-      </p:sp>
-      <p:sp>
-        <p:nvSpPr>
-          <p:cNvPr id="9" name="TextBox 8"/>
-          <p:cNvSpPr txBox="1"/>
-          <p:nvPr/>
-        </p:nvSpPr>
-        <p:spPr>
-          <a:xfrm>
-            <a:off x="822960" y="4390136"/>
-            <a:ext cx="10545775" cy="560324"/>
-          </a:xfrm>
-          <a:prstGeom prst="rect">
-            <a:avLst/>
-          </a:prstGeom>
-          <a:noFill/>
-        </p:spPr>
-        <p:txBody>
-          <a:bodyPr wrap="square">
-            <a:spAutoFit/>
-          </a:bodyPr>
-          <a:lstStyle/>
-          <a:p>
-            <a:pPr algn="l"/>
-            <a:r>
-              <a:rPr sz="2600" b="0">
-                <a:solidFill>
-                  <a:srgbClr val="1A1A1A"/>
-                </a:solidFill>
-                <a:latin typeface="Leelawadee UI"/>
-                <a:ea typeface="Leelawadee UI"/>
-                <a:cs typeface="Leelawadee UI"/>
-              </a:rPr>
-              <a:t>• ส่งให้ Claude → มันรวมให้ → push ผ่าน</a:t>
-            </a:r>
-          </a:p>
-        </p:txBody>
-      </p:sp>
-      <p:sp>
-        <p:nvSpPr>
-          <p:cNvPr id="10" name="TextBox 9"/>
           <p:cNvSpPr txBox="1"/>
           <p:nvPr/>
         </p:nvSpPr>
@@ -20182,38 +19988,44 @@
       <p:grpSpPr/>
       <p:sp>
         <p:nvSpPr>
-          <p:cNvPr id="2" name="TextBox 1"/>
-          <p:cNvSpPr txBox="1"/>
-          <p:nvPr/>
-        </p:nvSpPr>
-        <p:spPr>
-          <a:xfrm>
-            <a:off x="822960" y="502920"/>
-            <a:ext cx="10545775" cy="804672"/>
-          </a:xfrm>
-          <a:prstGeom prst="rect">
-            <a:avLst/>
-          </a:prstGeom>
-          <a:noFill/>
-        </p:spPr>
-        <p:txBody>
-          <a:bodyPr wrap="square">
-            <a:spAutoFit/>
-          </a:bodyPr>
-          <a:lstStyle/>
-          <a:p>
-            <a:pPr algn="l"/>
-            <a:r>
-              <a:rPr sz="3600" b="1">
-                <a:solidFill>
-                  <a:srgbClr val="1F5FA8"/>
-                </a:solidFill>
-                <a:latin typeface="Leelawadee UI"/>
-                <a:ea typeface="Leelawadee UI"/>
-                <a:cs typeface="Leelawadee UI"/>
-              </a:rPr>
-              <a:t>✅ ช่วงที่ 5 คุณต้องได้อะไรกลับไป</a:t>
-            </a:r>
+          <p:cNvPr id="2" name="Rectangle 1"/>
+          <p:cNvSpPr/>
+          <p:nvPr/>
+        </p:nvSpPr>
+        <p:spPr>
+          <a:xfrm>
+            <a:off x="0" y="0"/>
+            <a:ext cx="12191695" cy="6858000"/>
+          </a:xfrm>
+          <a:prstGeom prst="rect">
+            <a:avLst/>
+          </a:prstGeom>
+          <a:solidFill>
+            <a:srgbClr val="1F5FA8"/>
+          </a:solidFill>
+          <a:ln>
+            <a:noFill/>
+          </a:ln>
+        </p:spPr>
+        <p:style>
+          <a:lnRef idx="1">
+            <a:schemeClr val="accent1"/>
+          </a:lnRef>
+          <a:fillRef idx="3">
+            <a:schemeClr val="accent1"/>
+          </a:fillRef>
+          <a:effectRef idx="2">
+            <a:schemeClr val="accent1"/>
+          </a:effectRef>
+          <a:fontRef idx="minor">
+            <a:schemeClr val="lt1"/>
+          </a:fontRef>
+        </p:style>
+        <p:txBody>
+          <a:bodyPr rtlCol="0" anchor="ctr"/>
+          <a:lstStyle/>
+          <a:p>
+            <a:pPr algn="ctr"/>
           </a:p>
         </p:txBody>
       </p:sp>
@@ -20225,31 +20037,31 @@
         </p:nvSpPr>
         <p:spPr>
           <a:xfrm>
-            <a:off x="822960" y="1472184"/>
-            <a:ext cx="10545775" cy="560324"/>
-          </a:xfrm>
-          <a:prstGeom prst="rect">
-            <a:avLst/>
-          </a:prstGeom>
-          <a:noFill/>
-        </p:spPr>
-        <p:txBody>
-          <a:bodyPr wrap="square">
-            <a:spAutoFit/>
-          </a:bodyPr>
-          <a:lstStyle/>
-          <a:p>
-            <a:pPr algn="l"/>
-            <a:r>
-              <a:rPr sz="2600" b="0">
-                <a:solidFill>
-                  <a:srgbClr val="1A1A1A"/>
-                </a:solidFill>
-                <a:latin typeface="Leelawadee UI"/>
-                <a:ea typeface="Leelawadee UI"/>
-                <a:cs typeface="Leelawadee UI"/>
-              </a:rPr>
-              <a:t>• รู้ว่าคำสั่ง git ทั้งหมด ให้ Claude ทำให้ได้</a:t>
+            <a:off x="822960" y="2743200"/>
+            <a:ext cx="10545775" cy="1463040"/>
+          </a:xfrm>
+          <a:prstGeom prst="rect">
+            <a:avLst/>
+          </a:prstGeom>
+          <a:noFill/>
+        </p:spPr>
+        <p:txBody>
+          <a:bodyPr wrap="square" anchor="ctr">
+            <a:spAutoFit/>
+          </a:bodyPr>
+          <a:lstStyle/>
+          <a:p>
+            <a:pPr algn="ctr"/>
+            <a:r>
+              <a:rPr sz="4000" b="1">
+                <a:solidFill>
+                  <a:srgbClr val="FFFFFF"/>
+                </a:solidFill>
+                <a:latin typeface="Leelawadee UI"/>
+                <a:ea typeface="Leelawadee UI"/>
+                <a:cs typeface="Leelawadee UI"/>
+              </a:rPr>
+              <a:t>ช่วงที่ 6 — 🌐 Deploy ขึ้นออนไลน์ ⏱ 11:22–11:55</a:t>
             </a:r>
           </a:p>
         </p:txBody>
@@ -20257,117 +20069,6 @@
       <p:sp>
         <p:nvSpPr>
           <p:cNvPr id="4" name="TextBox 3"/>
-          <p:cNvSpPr txBox="1"/>
-          <p:nvPr/>
-        </p:nvSpPr>
-        <p:spPr>
-          <a:xfrm>
-            <a:off x="822960" y="2087372"/>
-            <a:ext cx="10545775" cy="560324"/>
-          </a:xfrm>
-          <a:prstGeom prst="rect">
-            <a:avLst/>
-          </a:prstGeom>
-          <a:noFill/>
-        </p:spPr>
-        <p:txBody>
-          <a:bodyPr wrap="square">
-            <a:spAutoFit/>
-          </a:bodyPr>
-          <a:lstStyle/>
-          <a:p>
-            <a:pPr algn="l"/>
-            <a:r>
-              <a:rPr sz="2600" b="0">
-                <a:solidFill>
-                  <a:srgbClr val="1A1A1A"/>
-                </a:solidFill>
-                <a:latin typeface="Leelawadee UI"/>
-                <a:ea typeface="Leelawadee UI"/>
-                <a:cs typeface="Leelawadee UI"/>
-              </a:rPr>
-              <a:t>• ท่อง 3 อย่างที่ AI ทำแทนไม่ได้</a:t>
-            </a:r>
-          </a:p>
-        </p:txBody>
-      </p:sp>
-      <p:sp>
-        <p:nvSpPr>
-          <p:cNvPr id="5" name="TextBox 4"/>
-          <p:cNvSpPr txBox="1"/>
-          <p:nvPr/>
-        </p:nvSpPr>
-        <p:spPr>
-          <a:xfrm>
-            <a:off x="822960" y="2702560"/>
-            <a:ext cx="10545775" cy="560324"/>
-          </a:xfrm>
-          <a:prstGeom prst="rect">
-            <a:avLst/>
-          </a:prstGeom>
-          <a:noFill/>
-        </p:spPr>
-        <p:txBody>
-          <a:bodyPr wrap="square">
-            <a:spAutoFit/>
-          </a:bodyPr>
-          <a:lstStyle/>
-          <a:p>
-            <a:pPr algn="l"/>
-            <a:r>
-              <a:rPr sz="2600" b="0">
-                <a:solidFill>
-                  <a:srgbClr val="1A1A1A"/>
-                </a:solidFill>
-                <a:latin typeface="Leelawadee UI"/>
-                <a:ea typeface="Leelawadee UI"/>
-                <a:cs typeface="Leelawadee UI"/>
-              </a:rPr>
-              <a:t>• รู้ว่า commit ก่อนให้ AI แตะ git เสมอ</a:t>
-            </a:r>
-          </a:p>
-        </p:txBody>
-      </p:sp>
-      <p:sp>
-        <p:nvSpPr>
-          <p:cNvPr id="6" name="TextBox 5"/>
-          <p:cNvSpPr txBox="1"/>
-          <p:nvPr/>
-        </p:nvSpPr>
-        <p:spPr>
-          <a:xfrm>
-            <a:off x="822960" y="3317748"/>
-            <a:ext cx="10545775" cy="560324"/>
-          </a:xfrm>
-          <a:prstGeom prst="rect">
-            <a:avLst/>
-          </a:prstGeom>
-          <a:noFill/>
-        </p:spPr>
-        <p:txBody>
-          <a:bodyPr wrap="square">
-            <a:spAutoFit/>
-          </a:bodyPr>
-          <a:lstStyle/>
-          <a:p>
-            <a:pPr algn="l"/>
-            <a:r>
-              <a:rPr sz="2600" b="0">
-                <a:solidFill>
-                  <a:srgbClr val="1A1A1A"/>
-                </a:solidFill>
-                <a:latin typeface="Leelawadee UI"/>
-                <a:ea typeface="Leelawadee UI"/>
-                <a:cs typeface="Leelawadee UI"/>
-              </a:rPr>
-              <a:t>• รู้ว่างานชนกันไม่ใช่งานหาย — กู้ได้เสมอ</a:t>
-            </a:r>
-          </a:p>
-        </p:txBody>
-      </p:sp>
-      <p:sp>
-        <p:nvSpPr>
-          <p:cNvPr id="7" name="TextBox 6"/>
           <p:cNvSpPr txBox="1"/>
           <p:nvPr/>
         </p:nvSpPr>
@@ -20421,44 +20122,38 @@
       <p:grpSpPr/>
       <p:sp>
         <p:nvSpPr>
-          <p:cNvPr id="2" name="Rectangle 1"/>
-          <p:cNvSpPr/>
-          <p:nvPr/>
-        </p:nvSpPr>
-        <p:spPr>
-          <a:xfrm>
-            <a:off x="0" y="0"/>
-            <a:ext cx="12191695" cy="6858000"/>
-          </a:xfrm>
-          <a:prstGeom prst="rect">
-            <a:avLst/>
-          </a:prstGeom>
-          <a:solidFill>
-            <a:srgbClr val="1F5FA8"/>
-          </a:solidFill>
-          <a:ln>
-            <a:noFill/>
-          </a:ln>
-        </p:spPr>
-        <p:style>
-          <a:lnRef idx="1">
-            <a:schemeClr val="accent1"/>
-          </a:lnRef>
-          <a:fillRef idx="3">
-            <a:schemeClr val="accent1"/>
-          </a:fillRef>
-          <a:effectRef idx="2">
-            <a:schemeClr val="accent1"/>
-          </a:effectRef>
-          <a:fontRef idx="minor">
-            <a:schemeClr val="lt1"/>
-          </a:fontRef>
-        </p:style>
-        <p:txBody>
-          <a:bodyPr rtlCol="0" anchor="ctr"/>
-          <a:lstStyle/>
-          <a:p>
-            <a:pPr algn="ctr"/>
+          <p:cNvPr id="2" name="TextBox 1"/>
+          <p:cNvSpPr txBox="1"/>
+          <p:nvPr/>
+        </p:nvSpPr>
+        <p:spPr>
+          <a:xfrm>
+            <a:off x="822960" y="502920"/>
+            <a:ext cx="10545775" cy="1408176"/>
+          </a:xfrm>
+          <a:prstGeom prst="rect">
+            <a:avLst/>
+          </a:prstGeom>
+          <a:noFill/>
+        </p:spPr>
+        <p:txBody>
+          <a:bodyPr wrap="square">
+            <a:spAutoFit/>
+          </a:bodyPr>
+          <a:lstStyle/>
+          <a:p>
+            <a:pPr algn="l"/>
+            <a:r>
+              <a:rPr sz="3600" b="1">
+                <a:solidFill>
+                  <a:srgbClr val="1F5FA8"/>
+                </a:solidFill>
+                <a:latin typeface="Leelawadee UI"/>
+                <a:ea typeface="Leelawadee UI"/>
+                <a:cs typeface="Leelawadee UI"/>
+              </a:rPr>
+              <a:t>Deploy = นำเว็บขึ้นออนไลน์ให้คนอื่นเปิดได้</a:t>
+            </a:r>
           </a:p>
         </p:txBody>
       </p:sp>
@@ -20470,31 +20165,31 @@
         </p:nvSpPr>
         <p:spPr>
           <a:xfrm>
-            <a:off x="822960" y="2743200"/>
-            <a:ext cx="10545775" cy="1463040"/>
-          </a:xfrm>
-          <a:prstGeom prst="rect">
-            <a:avLst/>
-          </a:prstGeom>
-          <a:noFill/>
-        </p:spPr>
-        <p:txBody>
-          <a:bodyPr wrap="square" anchor="ctr">
-            <a:spAutoFit/>
-          </a:bodyPr>
-          <a:lstStyle/>
-          <a:p>
-            <a:pPr algn="ctr"/>
-            <a:r>
-              <a:rPr sz="4000" b="1">
-                <a:solidFill>
-                  <a:srgbClr val="FFFFFF"/>
-                </a:solidFill>
-                <a:latin typeface="Leelawadee UI"/>
-                <a:ea typeface="Leelawadee UI"/>
-                <a:cs typeface="Leelawadee UI"/>
-              </a:rPr>
-              <a:t>ช่วงที่ 6 — 🌐 Deploy ขึ้นออนไลน์ ⏱ 11:22–11:55</a:t>
+            <a:off x="822960" y="2075688"/>
+            <a:ext cx="10545775" cy="1029208"/>
+          </a:xfrm>
+          <a:prstGeom prst="rect">
+            <a:avLst/>
+          </a:prstGeom>
+          <a:noFill/>
+        </p:spPr>
+        <p:txBody>
+          <a:bodyPr wrap="square">
+            <a:spAutoFit/>
+          </a:bodyPr>
+          <a:lstStyle/>
+          <a:p>
+            <a:pPr algn="l"/>
+            <a:r>
+              <a:rPr sz="2600" b="0">
+                <a:solidFill>
+                  <a:srgbClr val="1A1A1A"/>
+                </a:solidFill>
+                <a:latin typeface="Leelawadee UI"/>
+                <a:ea typeface="Leelawadee UI"/>
+                <a:cs typeface="Leelawadee UI"/>
+              </a:rPr>
+              <a:t>• Deploy = ส่งเว็บจากเครื่องเราขึ้นไปอยู่บนอินเทอร์เน็ต</a:t>
             </a:r>
           </a:p>
         </p:txBody>
@@ -20502,6 +20197,117 @@
       <p:sp>
         <p:nvSpPr>
           <p:cNvPr id="4" name="TextBox 3"/>
+          <p:cNvSpPr txBox="1"/>
+          <p:nvPr/>
+        </p:nvSpPr>
+        <p:spPr>
+          <a:xfrm>
+            <a:off x="822960" y="3159760"/>
+            <a:ext cx="10545775" cy="560324"/>
+          </a:xfrm>
+          <a:prstGeom prst="rect">
+            <a:avLst/>
+          </a:prstGeom>
+          <a:noFill/>
+        </p:spPr>
+        <p:txBody>
+          <a:bodyPr wrap="square">
+            <a:spAutoFit/>
+          </a:bodyPr>
+          <a:lstStyle/>
+          <a:p>
+            <a:pPr algn="l"/>
+            <a:r>
+              <a:rPr sz="2600" b="0">
+                <a:solidFill>
+                  <a:srgbClr val="1A1A1A"/>
+                </a:solidFill>
+                <a:latin typeface="Leelawadee UI"/>
+                <a:ea typeface="Leelawadee UI"/>
+                <a:cs typeface="Leelawadee UI"/>
+              </a:rPr>
+              <a:t>• ใช้ Firebase Hosting (บริการที่ทำให้เว็บเรามี URL)</a:t>
+            </a:r>
+          </a:p>
+        </p:txBody>
+      </p:sp>
+      <p:sp>
+        <p:nvSpPr>
+          <p:cNvPr id="5" name="TextBox 4"/>
+          <p:cNvSpPr txBox="1"/>
+          <p:nvPr/>
+        </p:nvSpPr>
+        <p:spPr>
+          <a:xfrm>
+            <a:off x="822960" y="3774948"/>
+            <a:ext cx="10545775" cy="1029208"/>
+          </a:xfrm>
+          <a:prstGeom prst="rect">
+            <a:avLst/>
+          </a:prstGeom>
+          <a:noFill/>
+        </p:spPr>
+        <p:txBody>
+          <a:bodyPr wrap="square">
+            <a:spAutoFit/>
+          </a:bodyPr>
+          <a:lstStyle/>
+          <a:p>
+            <a:pPr algn="l"/>
+            <a:r>
+              <a:rPr sz="2600" b="0">
+                <a:solidFill>
+                  <a:srgbClr val="1A1A1A"/>
+                </a:solidFill>
+                <a:latin typeface="Leelawadee UI"/>
+                <a:ea typeface="Leelawadee UI"/>
+                <a:cs typeface="Leelawadee UI"/>
+              </a:rPr>
+              <a:t>• localhost = ในเครื่องเราคนเดียว · URL จริง = ใครก็เปิดได้</a:t>
+            </a:r>
+          </a:p>
+        </p:txBody>
+      </p:sp>
+      <p:sp>
+        <p:nvSpPr>
+          <p:cNvPr id="6" name="TextBox 5"/>
+          <p:cNvSpPr txBox="1"/>
+          <p:nvPr/>
+        </p:nvSpPr>
+        <p:spPr>
+          <a:xfrm>
+            <a:off x="822960" y="4859020"/>
+            <a:ext cx="10545775" cy="1029208"/>
+          </a:xfrm>
+          <a:prstGeom prst="rect">
+            <a:avLst/>
+          </a:prstGeom>
+          <a:noFill/>
+        </p:spPr>
+        <p:txBody>
+          <a:bodyPr wrap="square">
+            <a:spAutoFit/>
+          </a:bodyPr>
+          <a:lstStyle/>
+          <a:p>
+            <a:pPr algn="l"/>
+            <a:r>
+              <a:rPr sz="2600" b="0">
+                <a:solidFill>
+                  <a:srgbClr val="1A1A1A"/>
+                </a:solidFill>
+                <a:latin typeface="Leelawadee UI"/>
+                <a:ea typeface="Leelawadee UI"/>
+                <a:cs typeface="Leelawadee UI"/>
+              </a:rPr>
+              <a:t>• ยังไม่สมบูรณ์ก็ deploy ได้ — ไม่ต้องรอเสร็จร้อยเปอร์เซ็นต์</a:t>
+            </a:r>
+          </a:p>
+        </p:txBody>
+      </p:sp>
+      <p:sp>
+        <p:nvSpPr>
+          <p:cNvPr id="7" name="TextBox 6"/>
           <p:cNvSpPr txBox="1"/>
           <p:nvPr/>
         </p:nvSpPr>
@@ -20562,7 +20368,7 @@
         <p:spPr>
           <a:xfrm>
             <a:off x="822960" y="502920"/>
-            <a:ext cx="10545775" cy="1408176"/>
+            <a:ext cx="10545775" cy="804672"/>
           </a:xfrm>
           <a:prstGeom prst="rect">
             <a:avLst/>
@@ -20585,36 +20391,56 @@
                 <a:ea typeface="Leelawadee UI"/>
                 <a:cs typeface="Leelawadee UI"/>
               </a:rPr>
-              <a:t>Deploy = นำเว็บขึ้นออนไลน์ให้คนอื่นเปิดได้</a:t>
-            </a:r>
-          </a:p>
-        </p:txBody>
-      </p:sp>
-      <p:sp>
-        <p:nvSpPr>
-          <p:cNvPr id="3" name="TextBox 2"/>
-          <p:cNvSpPr txBox="1"/>
-          <p:nvPr/>
-        </p:nvSpPr>
-        <p:spPr>
-          <a:xfrm>
-            <a:off x="822960" y="2075688"/>
-            <a:ext cx="10545775" cy="1029208"/>
-          </a:xfrm>
-          <a:prstGeom prst="rect">
-            <a:avLst/>
-          </a:prstGeom>
-          <a:noFill/>
-        </p:spPr>
-        <p:txBody>
-          <a:bodyPr wrap="square">
-            <a:spAutoFit/>
-          </a:bodyPr>
-          <a:lstStyle/>
-          <a:p>
-            <a:pPr algn="l"/>
-            <a:r>
-              <a:rPr sz="2600" b="0">
+              <a:t>เส้นทางของการ deploy</a:t>
+            </a:r>
+          </a:p>
+        </p:txBody>
+      </p:sp>
+      <p:sp>
+        <p:nvSpPr>
+          <p:cNvPr id="3" name="Rounded Rectangle 2"/>
+          <p:cNvSpPr/>
+          <p:nvPr/>
+        </p:nvSpPr>
+        <p:spPr>
+          <a:xfrm>
+            <a:off x="822960" y="1563624"/>
+            <a:ext cx="2348407" cy="1051560"/>
+          </a:xfrm>
+          <a:prstGeom prst="roundRect">
+            <a:avLst/>
+          </a:prstGeom>
+          <a:solidFill>
+            <a:srgbClr val="E8EFF7"/>
+          </a:solidFill>
+          <a:ln w="15875">
+            <a:solidFill>
+              <a:srgbClr val="9CB5D1"/>
+            </a:solidFill>
+          </a:ln>
+          <a:effectLst/>
+        </p:spPr>
+        <p:style>
+          <a:lnRef idx="1">
+            <a:schemeClr val="accent1"/>
+          </a:lnRef>
+          <a:fillRef idx="3">
+            <a:schemeClr val="accent1"/>
+          </a:fillRef>
+          <a:effectRef idx="2">
+            <a:schemeClr val="accent1"/>
+          </a:effectRef>
+          <a:fontRef idx="minor">
+            <a:schemeClr val="lt1"/>
+          </a:fontRef>
+        </p:style>
+        <p:txBody>
+          <a:bodyPr rtlCol="0" anchor="ctr" wrap="square" lIns="54864" rIns="54864" tIns="27432" bIns="27432"/>
+          <a:lstStyle/>
+          <a:p>
+            <a:pPr algn="ctr"/>
+            <a:r>
+              <a:rPr sz="1400" b="0">
                 <a:solidFill>
                   <a:srgbClr val="1A1A1A"/>
                 </a:solidFill>
@@ -20622,36 +20448,100 @@
                 <a:ea typeface="Leelawadee UI"/>
                 <a:cs typeface="Leelawadee UI"/>
               </a:rPr>
-              <a:t>• Deploy = ส่งเว็บจากเครื่องเราขึ้นไปอยู่บนอินเทอร์เน็ต</a:t>
-            </a:r>
-          </a:p>
-        </p:txBody>
-      </p:sp>
-      <p:sp>
-        <p:nvSpPr>
-          <p:cNvPr id="4" name="TextBox 3"/>
-          <p:cNvSpPr txBox="1"/>
-          <p:nvPr/>
-        </p:nvSpPr>
-        <p:spPr>
-          <a:xfrm>
-            <a:off x="822960" y="3159760"/>
-            <a:ext cx="10545775" cy="560324"/>
-          </a:xfrm>
-          <a:prstGeom prst="rect">
-            <a:avLst/>
-          </a:prstGeom>
-          <a:noFill/>
-        </p:spPr>
-        <p:txBody>
-          <a:bodyPr wrap="square">
-            <a:spAutoFit/>
-          </a:bodyPr>
-          <a:lstStyle/>
-          <a:p>
-            <a:pPr algn="l"/>
-            <a:r>
-              <a:rPr sz="2600" b="0">
+              <a:t>โค้ดในเครื่องเรา</a:t>
+            </a:r>
+          </a:p>
+        </p:txBody>
+      </p:sp>
+      <p:sp>
+        <p:nvSpPr>
+          <p:cNvPr id="4" name="Right Arrow 3"/>
+          <p:cNvSpPr/>
+          <p:nvPr/>
+        </p:nvSpPr>
+        <p:spPr>
+          <a:xfrm>
+            <a:off x="3217452" y="1931670"/>
+            <a:ext cx="291876" cy="315468"/>
+          </a:xfrm>
+          <a:prstGeom prst="rightArrow">
+            <a:avLst/>
+          </a:prstGeom>
+          <a:solidFill>
+            <a:srgbClr val="7A91A8"/>
+          </a:solidFill>
+          <a:ln>
+            <a:noFill/>
+          </a:ln>
+          <a:effectLst/>
+        </p:spPr>
+        <p:style>
+          <a:lnRef idx="1">
+            <a:schemeClr val="accent1"/>
+          </a:lnRef>
+          <a:fillRef idx="3">
+            <a:schemeClr val="accent1"/>
+          </a:fillRef>
+          <a:effectRef idx="2">
+            <a:schemeClr val="accent1"/>
+          </a:effectRef>
+          <a:fontRef idx="minor">
+            <a:schemeClr val="lt1"/>
+          </a:fontRef>
+        </p:style>
+        <p:txBody>
+          <a:bodyPr rtlCol="0" anchor="ctr"/>
+          <a:lstStyle/>
+          <a:p>
+            <a:pPr algn="ctr"/>
+          </a:p>
+        </p:txBody>
+      </p:sp>
+      <p:sp>
+        <p:nvSpPr>
+          <p:cNvPr id="5" name="Rounded Rectangle 4"/>
+          <p:cNvSpPr/>
+          <p:nvPr/>
+        </p:nvSpPr>
+        <p:spPr>
+          <a:xfrm>
+            <a:off x="3555415" y="1563624"/>
+            <a:ext cx="2348407" cy="1051560"/>
+          </a:xfrm>
+          <a:prstGeom prst="roundRect">
+            <a:avLst/>
+          </a:prstGeom>
+          <a:solidFill>
+            <a:srgbClr val="E8EFF7"/>
+          </a:solidFill>
+          <a:ln w="15875">
+            <a:solidFill>
+              <a:srgbClr val="9CB5D1"/>
+            </a:solidFill>
+          </a:ln>
+          <a:effectLst/>
+        </p:spPr>
+        <p:style>
+          <a:lnRef idx="1">
+            <a:schemeClr val="accent1"/>
+          </a:lnRef>
+          <a:fillRef idx="3">
+            <a:schemeClr val="accent1"/>
+          </a:fillRef>
+          <a:effectRef idx="2">
+            <a:schemeClr val="accent1"/>
+          </a:effectRef>
+          <a:fontRef idx="minor">
+            <a:schemeClr val="lt1"/>
+          </a:fontRef>
+        </p:style>
+        <p:txBody>
+          <a:bodyPr rtlCol="0" anchor="ctr" wrap="square" lIns="54864" rIns="54864" tIns="27432" bIns="27432"/>
+          <a:lstStyle/>
+          <a:p>
+            <a:pPr algn="ctr"/>
+            <a:r>
+              <a:rPr sz="1400" b="0">
                 <a:solidFill>
                   <a:srgbClr val="1A1A1A"/>
                 </a:solidFill>
@@ -20659,36 +20549,201 @@
                 <a:ea typeface="Leelawadee UI"/>
                 <a:cs typeface="Leelawadee UI"/>
               </a:rPr>
-              <a:t>• ใช้ Firebase Hosting (บริการที่ทำให้เว็บเรามี URL)</a:t>
-            </a:r>
-          </a:p>
-        </p:txBody>
-      </p:sp>
-      <p:sp>
-        <p:nvSpPr>
-          <p:cNvPr id="5" name="TextBox 4"/>
-          <p:cNvSpPr txBox="1"/>
-          <p:nvPr/>
-        </p:nvSpPr>
-        <p:spPr>
-          <a:xfrm>
-            <a:off x="822960" y="3774948"/>
-            <a:ext cx="10545775" cy="1029208"/>
-          </a:xfrm>
-          <a:prstGeom prst="rect">
-            <a:avLst/>
-          </a:prstGeom>
-          <a:noFill/>
-        </p:spPr>
-        <p:txBody>
-          <a:bodyPr wrap="square">
-            <a:spAutoFit/>
-          </a:bodyPr>
-          <a:lstStyle/>
-          <a:p>
-            <a:pPr algn="l"/>
-            <a:r>
-              <a:rPr sz="2600" b="0">
+              <a:t>คำสั่ง deploy</a:t>
+            </a:r>
+          </a:p>
+        </p:txBody>
+      </p:sp>
+      <p:sp>
+        <p:nvSpPr>
+          <p:cNvPr id="6" name="Right Arrow 5"/>
+          <p:cNvSpPr/>
+          <p:nvPr/>
+        </p:nvSpPr>
+        <p:spPr>
+          <a:xfrm>
+            <a:off x="5949907" y="1931670"/>
+            <a:ext cx="291876" cy="315468"/>
+          </a:xfrm>
+          <a:prstGeom prst="rightArrow">
+            <a:avLst/>
+          </a:prstGeom>
+          <a:solidFill>
+            <a:srgbClr val="7A91A8"/>
+          </a:solidFill>
+          <a:ln>
+            <a:noFill/>
+          </a:ln>
+          <a:effectLst/>
+        </p:spPr>
+        <p:style>
+          <a:lnRef idx="1">
+            <a:schemeClr val="accent1"/>
+          </a:lnRef>
+          <a:fillRef idx="3">
+            <a:schemeClr val="accent1"/>
+          </a:fillRef>
+          <a:effectRef idx="2">
+            <a:schemeClr val="accent1"/>
+          </a:effectRef>
+          <a:fontRef idx="minor">
+            <a:schemeClr val="lt1"/>
+          </a:fontRef>
+        </p:style>
+        <p:txBody>
+          <a:bodyPr rtlCol="0" anchor="ctr"/>
+          <a:lstStyle/>
+          <a:p>
+            <a:pPr algn="ctr"/>
+          </a:p>
+        </p:txBody>
+      </p:sp>
+      <p:sp>
+        <p:nvSpPr>
+          <p:cNvPr id="7" name="Rounded Rectangle 6"/>
+          <p:cNvSpPr/>
+          <p:nvPr/>
+        </p:nvSpPr>
+        <p:spPr>
+          <a:xfrm>
+            <a:off x="6287870" y="1563624"/>
+            <a:ext cx="2348407" cy="1051560"/>
+          </a:xfrm>
+          <a:prstGeom prst="roundRect">
+            <a:avLst/>
+          </a:prstGeom>
+          <a:solidFill>
+            <a:srgbClr val="1F5FA8"/>
+          </a:solidFill>
+          <a:ln w="15875">
+            <a:solidFill>
+              <a:srgbClr val="9CB5D1"/>
+            </a:solidFill>
+          </a:ln>
+          <a:effectLst/>
+        </p:spPr>
+        <p:style>
+          <a:lnRef idx="1">
+            <a:schemeClr val="accent1"/>
+          </a:lnRef>
+          <a:fillRef idx="3">
+            <a:schemeClr val="accent1"/>
+          </a:fillRef>
+          <a:effectRef idx="2">
+            <a:schemeClr val="accent1"/>
+          </a:effectRef>
+          <a:fontRef idx="minor">
+            <a:schemeClr val="lt1"/>
+          </a:fontRef>
+        </p:style>
+        <p:txBody>
+          <a:bodyPr rtlCol="0" anchor="ctr" wrap="square" lIns="54864" rIns="54864" tIns="27432" bIns="27432"/>
+          <a:lstStyle/>
+          <a:p>
+            <a:pPr algn="ctr"/>
+            <a:r>
+              <a:rPr sz="1400" b="1">
+                <a:solidFill>
+                  <a:srgbClr val="FFFFFF"/>
+                </a:solidFill>
+                <a:latin typeface="Leelawadee UI"/>
+                <a:ea typeface="Leelawadee UI"/>
+                <a:cs typeface="Leelawadee UI"/>
+              </a:rPr>
+              <a:t>Hosting บนคลาวด์</a:t>
+            </a:r>
+          </a:p>
+        </p:txBody>
+      </p:sp>
+      <p:sp>
+        <p:nvSpPr>
+          <p:cNvPr id="8" name="Right Arrow 7"/>
+          <p:cNvSpPr/>
+          <p:nvPr/>
+        </p:nvSpPr>
+        <p:spPr>
+          <a:xfrm>
+            <a:off x="8682362" y="1931670"/>
+            <a:ext cx="291876" cy="315468"/>
+          </a:xfrm>
+          <a:prstGeom prst="rightArrow">
+            <a:avLst/>
+          </a:prstGeom>
+          <a:solidFill>
+            <a:srgbClr val="7A91A8"/>
+          </a:solidFill>
+          <a:ln>
+            <a:noFill/>
+          </a:ln>
+          <a:effectLst/>
+        </p:spPr>
+        <p:style>
+          <a:lnRef idx="1">
+            <a:schemeClr val="accent1"/>
+          </a:lnRef>
+          <a:fillRef idx="3">
+            <a:schemeClr val="accent1"/>
+          </a:fillRef>
+          <a:effectRef idx="2">
+            <a:schemeClr val="accent1"/>
+          </a:effectRef>
+          <a:fontRef idx="minor">
+            <a:schemeClr val="lt1"/>
+          </a:fontRef>
+        </p:style>
+        <p:txBody>
+          <a:bodyPr rtlCol="0" anchor="ctr"/>
+          <a:lstStyle/>
+          <a:p>
+            <a:pPr algn="ctr"/>
+          </a:p>
+        </p:txBody>
+      </p:sp>
+      <p:sp>
+        <p:nvSpPr>
+          <p:cNvPr id="9" name="Rounded Rectangle 8"/>
+          <p:cNvSpPr/>
+          <p:nvPr/>
+        </p:nvSpPr>
+        <p:spPr>
+          <a:xfrm>
+            <a:off x="9020325" y="1563624"/>
+            <a:ext cx="2348407" cy="1051560"/>
+          </a:xfrm>
+          <a:prstGeom prst="roundRect">
+            <a:avLst/>
+          </a:prstGeom>
+          <a:solidFill>
+            <a:srgbClr val="E8EFF7"/>
+          </a:solidFill>
+          <a:ln w="15875">
+            <a:solidFill>
+              <a:srgbClr val="9CB5D1"/>
+            </a:solidFill>
+          </a:ln>
+          <a:effectLst/>
+        </p:spPr>
+        <p:style>
+          <a:lnRef idx="1">
+            <a:schemeClr val="accent1"/>
+          </a:lnRef>
+          <a:fillRef idx="3">
+            <a:schemeClr val="accent1"/>
+          </a:fillRef>
+          <a:effectRef idx="2">
+            <a:schemeClr val="accent1"/>
+          </a:effectRef>
+          <a:fontRef idx="minor">
+            <a:schemeClr val="lt1"/>
+          </a:fontRef>
+        </p:style>
+        <p:txBody>
+          <a:bodyPr rtlCol="0" anchor="ctr" wrap="square" lIns="54864" rIns="54864" tIns="27432" bIns="27432"/>
+          <a:lstStyle/>
+          <a:p>
+            <a:pPr algn="ctr"/>
+            <a:r>
+              <a:rPr sz="1400" b="0">
                 <a:solidFill>
                   <a:srgbClr val="1A1A1A"/>
                 </a:solidFill>
@@ -20696,51 +20751,14 @@
                 <a:ea typeface="Leelawadee UI"/>
                 <a:cs typeface="Leelawadee UI"/>
               </a:rPr>
-              <a:t>• localhost = ในเครื่องเราคนเดียว · URL จริง = ใครก็เปิดได้</a:t>
-            </a:r>
-          </a:p>
-        </p:txBody>
-      </p:sp>
-      <p:sp>
-        <p:nvSpPr>
-          <p:cNvPr id="6" name="TextBox 5"/>
-          <p:cNvSpPr txBox="1"/>
-          <p:nvPr/>
-        </p:nvSpPr>
-        <p:spPr>
-          <a:xfrm>
-            <a:off x="822960" y="4859020"/>
-            <a:ext cx="10545775" cy="1029208"/>
-          </a:xfrm>
-          <a:prstGeom prst="rect">
-            <a:avLst/>
-          </a:prstGeom>
-          <a:noFill/>
-        </p:spPr>
-        <p:txBody>
-          <a:bodyPr wrap="square">
-            <a:spAutoFit/>
-          </a:bodyPr>
-          <a:lstStyle/>
-          <a:p>
-            <a:pPr algn="l"/>
-            <a:r>
-              <a:rPr sz="2600" b="0">
-                <a:solidFill>
-                  <a:srgbClr val="1A1A1A"/>
-                </a:solidFill>
-                <a:latin typeface="Leelawadee UI"/>
-                <a:ea typeface="Leelawadee UI"/>
-                <a:cs typeface="Leelawadee UI"/>
-              </a:rPr>
-              <a:t>• ยังไม่สมบูรณ์ก็ deploy ได้ — ไม่ต้องรอเสร็จร้อยเปอร์เซ็นต์</a:t>
-            </a:r>
-          </a:p>
-        </p:txBody>
-      </p:sp>
-      <p:sp>
-        <p:nvSpPr>
-          <p:cNvPr id="7" name="TextBox 6"/>
+              <a:t>ใครก็เปิด URL ได้</a:t>
+            </a:r>
+          </a:p>
+        </p:txBody>
+      </p:sp>
+      <p:sp>
+        <p:nvSpPr>
+          <p:cNvPr id="10" name="TextBox 9"/>
           <p:cNvSpPr txBox="1"/>
           <p:nvPr/>
         </p:nvSpPr>
@@ -20801,7 +20819,7 @@
         <p:spPr>
           <a:xfrm>
             <a:off x="822960" y="502920"/>
-            <a:ext cx="10545775" cy="804672"/>
+            <a:ext cx="10545775" cy="1408176"/>
           </a:xfrm>
           <a:prstGeom prst="rect">
             <a:avLst/>
@@ -20824,56 +20842,36 @@
                 <a:ea typeface="Leelawadee UI"/>
                 <a:cs typeface="Leelawadee UI"/>
               </a:rPr>
-              <a:t>เส้นทางของการ deploy</a:t>
-            </a:r>
-          </a:p>
-        </p:txBody>
-      </p:sp>
-      <p:sp>
-        <p:nvSpPr>
-          <p:cNvPr id="3" name="Rounded Rectangle 2"/>
-          <p:cNvSpPr/>
-          <p:nvPr/>
-        </p:nvSpPr>
-        <p:spPr>
-          <a:xfrm>
-            <a:off x="822960" y="1563624"/>
-            <a:ext cx="2348407" cy="1051560"/>
-          </a:xfrm>
-          <a:prstGeom prst="roundRect">
-            <a:avLst/>
-          </a:prstGeom>
-          <a:solidFill>
-            <a:srgbClr val="E8EFF7"/>
-          </a:solidFill>
-          <a:ln w="15875">
-            <a:solidFill>
-              <a:srgbClr val="9CB5D1"/>
-            </a:solidFill>
-          </a:ln>
-          <a:effectLst/>
-        </p:spPr>
-        <p:style>
-          <a:lnRef idx="1">
-            <a:schemeClr val="accent1"/>
-          </a:lnRef>
-          <a:fillRef idx="3">
-            <a:schemeClr val="accent1"/>
-          </a:fillRef>
-          <a:effectRef idx="2">
-            <a:schemeClr val="accent1"/>
-          </a:effectRef>
-          <a:fontRef idx="minor">
-            <a:schemeClr val="lt1"/>
-          </a:fontRef>
-        </p:style>
-        <p:txBody>
-          <a:bodyPr rtlCol="0" anchor="ctr" wrap="square" lIns="54864" rIns="54864" tIns="27432" bIns="27432"/>
-          <a:lstStyle/>
-          <a:p>
-            <a:pPr algn="ctr"/>
-            <a:r>
-              <a:rPr sz="1400" b="0">
+              <a:t>deploy เว็บอย่างเดียวไม่พอ — กฎต้องขึ้นด้วย</a:t>
+            </a:r>
+          </a:p>
+        </p:txBody>
+      </p:sp>
+      <p:sp>
+        <p:nvSpPr>
+          <p:cNvPr id="3" name="TextBox 2"/>
+          <p:cNvSpPr txBox="1"/>
+          <p:nvPr/>
+        </p:nvSpPr>
+        <p:spPr>
+          <a:xfrm>
+            <a:off x="822960" y="2075688"/>
+            <a:ext cx="10545775" cy="560324"/>
+          </a:xfrm>
+          <a:prstGeom prst="rect">
+            <a:avLst/>
+          </a:prstGeom>
+          <a:noFill/>
+        </p:spPr>
+        <p:txBody>
+          <a:bodyPr wrap="square">
+            <a:spAutoFit/>
+          </a:bodyPr>
+          <a:lstStyle/>
+          <a:p>
+            <a:pPr algn="l"/>
+            <a:r>
+              <a:rPr sz="2600" b="0">
                 <a:solidFill>
                   <a:srgbClr val="1A1A1A"/>
                 </a:solidFill>
@@ -20881,100 +20879,36 @@
                 <a:ea typeface="Leelawadee UI"/>
                 <a:cs typeface="Leelawadee UI"/>
               </a:rPr>
-              <a:t>โค้ดในเครื่องเรา</a:t>
-            </a:r>
-          </a:p>
-        </p:txBody>
-      </p:sp>
-      <p:sp>
-        <p:nvSpPr>
-          <p:cNvPr id="4" name="Right Arrow 3"/>
-          <p:cNvSpPr/>
-          <p:nvPr/>
-        </p:nvSpPr>
-        <p:spPr>
-          <a:xfrm>
-            <a:off x="3217452" y="1931670"/>
-            <a:ext cx="291876" cy="315468"/>
-          </a:xfrm>
-          <a:prstGeom prst="rightArrow">
-            <a:avLst/>
-          </a:prstGeom>
-          <a:solidFill>
-            <a:srgbClr val="7A91A8"/>
-          </a:solidFill>
-          <a:ln>
-            <a:noFill/>
-          </a:ln>
-          <a:effectLst/>
-        </p:spPr>
-        <p:style>
-          <a:lnRef idx="1">
-            <a:schemeClr val="accent1"/>
-          </a:lnRef>
-          <a:fillRef idx="3">
-            <a:schemeClr val="accent1"/>
-          </a:fillRef>
-          <a:effectRef idx="2">
-            <a:schemeClr val="accent1"/>
-          </a:effectRef>
-          <a:fontRef idx="minor">
-            <a:schemeClr val="lt1"/>
-          </a:fontRef>
-        </p:style>
-        <p:txBody>
-          <a:bodyPr rtlCol="0" anchor="ctr"/>
-          <a:lstStyle/>
-          <a:p>
-            <a:pPr algn="ctr"/>
-          </a:p>
-        </p:txBody>
-      </p:sp>
-      <p:sp>
-        <p:nvSpPr>
-          <p:cNvPr id="5" name="Rounded Rectangle 4"/>
-          <p:cNvSpPr/>
-          <p:nvPr/>
-        </p:nvSpPr>
-        <p:spPr>
-          <a:xfrm>
-            <a:off x="3555415" y="1563624"/>
-            <a:ext cx="2348407" cy="1051560"/>
-          </a:xfrm>
-          <a:prstGeom prst="roundRect">
-            <a:avLst/>
-          </a:prstGeom>
-          <a:solidFill>
-            <a:srgbClr val="E8EFF7"/>
-          </a:solidFill>
-          <a:ln w="15875">
-            <a:solidFill>
-              <a:srgbClr val="9CB5D1"/>
-            </a:solidFill>
-          </a:ln>
-          <a:effectLst/>
-        </p:spPr>
-        <p:style>
-          <a:lnRef idx="1">
-            <a:schemeClr val="accent1"/>
-          </a:lnRef>
-          <a:fillRef idx="3">
-            <a:schemeClr val="accent1"/>
-          </a:fillRef>
-          <a:effectRef idx="2">
-            <a:schemeClr val="accent1"/>
-          </a:effectRef>
-          <a:fontRef idx="minor">
-            <a:schemeClr val="lt1"/>
-          </a:fontRef>
-        </p:style>
-        <p:txBody>
-          <a:bodyPr rtlCol="0" anchor="ctr" wrap="square" lIns="54864" rIns="54864" tIns="27432" bIns="27432"/>
-          <a:lstStyle/>
-          <a:p>
-            <a:pPr algn="ctr"/>
-            <a:r>
-              <a:rPr sz="1400" b="0">
+              <a:t>• เว็บกับกฎ deploy แยกกันคนละส่วน</a:t>
+            </a:r>
+          </a:p>
+        </p:txBody>
+      </p:sp>
+      <p:sp>
+        <p:nvSpPr>
+          <p:cNvPr id="4" name="TextBox 3"/>
+          <p:cNvSpPr txBox="1"/>
+          <p:nvPr/>
+        </p:nvSpPr>
+        <p:spPr>
+          <a:xfrm>
+            <a:off x="822960" y="2690876"/>
+            <a:ext cx="10545775" cy="1029208"/>
+          </a:xfrm>
+          <a:prstGeom prst="rect">
+            <a:avLst/>
+          </a:prstGeom>
+          <a:noFill/>
+        </p:spPr>
+        <p:txBody>
+          <a:bodyPr wrap="square">
+            <a:spAutoFit/>
+          </a:bodyPr>
+          <a:lstStyle/>
+          <a:p>
+            <a:pPr algn="l"/>
+            <a:r>
+              <a:rPr sz="2600" b="0">
                 <a:solidFill>
                   <a:srgbClr val="1A1A1A"/>
                 </a:solidFill>
@@ -20982,201 +20916,36 @@
                 <a:ea typeface="Leelawadee UI"/>
                 <a:cs typeface="Leelawadee UI"/>
               </a:rPr>
-              <a:t>คำสั่ง deploy</a:t>
-            </a:r>
-          </a:p>
-        </p:txBody>
-      </p:sp>
-      <p:sp>
-        <p:nvSpPr>
-          <p:cNvPr id="6" name="Right Arrow 5"/>
-          <p:cNvSpPr/>
-          <p:nvPr/>
-        </p:nvSpPr>
-        <p:spPr>
-          <a:xfrm>
-            <a:off x="5949907" y="1931670"/>
-            <a:ext cx="291876" cy="315468"/>
-          </a:xfrm>
-          <a:prstGeom prst="rightArrow">
-            <a:avLst/>
-          </a:prstGeom>
-          <a:solidFill>
-            <a:srgbClr val="7A91A8"/>
-          </a:solidFill>
-          <a:ln>
-            <a:noFill/>
-          </a:ln>
-          <a:effectLst/>
-        </p:spPr>
-        <p:style>
-          <a:lnRef idx="1">
-            <a:schemeClr val="accent1"/>
-          </a:lnRef>
-          <a:fillRef idx="3">
-            <a:schemeClr val="accent1"/>
-          </a:fillRef>
-          <a:effectRef idx="2">
-            <a:schemeClr val="accent1"/>
-          </a:effectRef>
-          <a:fontRef idx="minor">
-            <a:schemeClr val="lt1"/>
-          </a:fontRef>
-        </p:style>
-        <p:txBody>
-          <a:bodyPr rtlCol="0" anchor="ctr"/>
-          <a:lstStyle/>
-          <a:p>
-            <a:pPr algn="ctr"/>
-          </a:p>
-        </p:txBody>
-      </p:sp>
-      <p:sp>
-        <p:nvSpPr>
-          <p:cNvPr id="7" name="Rounded Rectangle 6"/>
-          <p:cNvSpPr/>
-          <p:nvPr/>
-        </p:nvSpPr>
-        <p:spPr>
-          <a:xfrm>
-            <a:off x="6287870" y="1563624"/>
-            <a:ext cx="2348407" cy="1051560"/>
-          </a:xfrm>
-          <a:prstGeom prst="roundRect">
-            <a:avLst/>
-          </a:prstGeom>
-          <a:solidFill>
-            <a:srgbClr val="1F5FA8"/>
-          </a:solidFill>
-          <a:ln w="15875">
-            <a:solidFill>
-              <a:srgbClr val="9CB5D1"/>
-            </a:solidFill>
-          </a:ln>
-          <a:effectLst/>
-        </p:spPr>
-        <p:style>
-          <a:lnRef idx="1">
-            <a:schemeClr val="accent1"/>
-          </a:lnRef>
-          <a:fillRef idx="3">
-            <a:schemeClr val="accent1"/>
-          </a:fillRef>
-          <a:effectRef idx="2">
-            <a:schemeClr val="accent1"/>
-          </a:effectRef>
-          <a:fontRef idx="minor">
-            <a:schemeClr val="lt1"/>
-          </a:fontRef>
-        </p:style>
-        <p:txBody>
-          <a:bodyPr rtlCol="0" anchor="ctr" wrap="square" lIns="54864" rIns="54864" tIns="27432" bIns="27432"/>
-          <a:lstStyle/>
-          <a:p>
-            <a:pPr algn="ctr"/>
-            <a:r>
-              <a:rPr sz="1400" b="1">
-                <a:solidFill>
-                  <a:srgbClr val="FFFFFF"/>
-                </a:solidFill>
-                <a:latin typeface="Leelawadee UI"/>
-                <a:ea typeface="Leelawadee UI"/>
-                <a:cs typeface="Leelawadee UI"/>
-              </a:rPr>
-              <a:t>Hosting บนคลาวด์</a:t>
-            </a:r>
-          </a:p>
-        </p:txBody>
-      </p:sp>
-      <p:sp>
-        <p:nvSpPr>
-          <p:cNvPr id="8" name="Right Arrow 7"/>
-          <p:cNvSpPr/>
-          <p:nvPr/>
-        </p:nvSpPr>
-        <p:spPr>
-          <a:xfrm>
-            <a:off x="8682362" y="1931670"/>
-            <a:ext cx="291876" cy="315468"/>
-          </a:xfrm>
-          <a:prstGeom prst="rightArrow">
-            <a:avLst/>
-          </a:prstGeom>
-          <a:solidFill>
-            <a:srgbClr val="7A91A8"/>
-          </a:solidFill>
-          <a:ln>
-            <a:noFill/>
-          </a:ln>
-          <a:effectLst/>
-        </p:spPr>
-        <p:style>
-          <a:lnRef idx="1">
-            <a:schemeClr val="accent1"/>
-          </a:lnRef>
-          <a:fillRef idx="3">
-            <a:schemeClr val="accent1"/>
-          </a:fillRef>
-          <a:effectRef idx="2">
-            <a:schemeClr val="accent1"/>
-          </a:effectRef>
-          <a:fontRef idx="minor">
-            <a:schemeClr val="lt1"/>
-          </a:fontRef>
-        </p:style>
-        <p:txBody>
-          <a:bodyPr rtlCol="0" anchor="ctr"/>
-          <a:lstStyle/>
-          <a:p>
-            <a:pPr algn="ctr"/>
-          </a:p>
-        </p:txBody>
-      </p:sp>
-      <p:sp>
-        <p:nvSpPr>
-          <p:cNvPr id="9" name="Rounded Rectangle 8"/>
-          <p:cNvSpPr/>
-          <p:nvPr/>
-        </p:nvSpPr>
-        <p:spPr>
-          <a:xfrm>
-            <a:off x="9020325" y="1563624"/>
-            <a:ext cx="2348407" cy="1051560"/>
-          </a:xfrm>
-          <a:prstGeom prst="roundRect">
-            <a:avLst/>
-          </a:prstGeom>
-          <a:solidFill>
-            <a:srgbClr val="E8EFF7"/>
-          </a:solidFill>
-          <a:ln w="15875">
-            <a:solidFill>
-              <a:srgbClr val="9CB5D1"/>
-            </a:solidFill>
-          </a:ln>
-          <a:effectLst/>
-        </p:spPr>
-        <p:style>
-          <a:lnRef idx="1">
-            <a:schemeClr val="accent1"/>
-          </a:lnRef>
-          <a:fillRef idx="3">
-            <a:schemeClr val="accent1"/>
-          </a:fillRef>
-          <a:effectRef idx="2">
-            <a:schemeClr val="accent1"/>
-          </a:effectRef>
-          <a:fontRef idx="minor">
-            <a:schemeClr val="lt1"/>
-          </a:fontRef>
-        </p:style>
-        <p:txBody>
-          <a:bodyPr rtlCol="0" anchor="ctr" wrap="square" lIns="54864" rIns="54864" tIns="27432" bIns="27432"/>
-          <a:lstStyle/>
-          <a:p>
-            <a:pPr algn="ctr"/>
-            <a:r>
-              <a:rPr sz="1400" b="0">
+              <a:t>• กฎที่เขียนไว้ในเครื่อง ยังไม่คุ้มครองของจริง จนกว่าจะ deploy</a:t>
+            </a:r>
+          </a:p>
+        </p:txBody>
+      </p:sp>
+      <p:sp>
+        <p:nvSpPr>
+          <p:cNvPr id="5" name="TextBox 4"/>
+          <p:cNvSpPr txBox="1"/>
+          <p:nvPr/>
+        </p:nvSpPr>
+        <p:spPr>
+          <a:xfrm>
+            <a:off x="822960" y="3774948"/>
+            <a:ext cx="10545775" cy="560324"/>
+          </a:xfrm>
+          <a:prstGeom prst="rect">
+            <a:avLst/>
+          </a:prstGeom>
+          <a:noFill/>
+        </p:spPr>
+        <p:txBody>
+          <a:bodyPr wrap="square">
+            <a:spAutoFit/>
+          </a:bodyPr>
+          <a:lstStyle/>
+          <a:p>
+            <a:pPr algn="l"/>
+            <a:r>
+              <a:rPr sz="2600" b="0">
                 <a:solidFill>
                   <a:srgbClr val="1A1A1A"/>
                 </a:solidFill>
@@ -21184,14 +20953,51 @@
                 <a:ea typeface="Leelawadee UI"/>
                 <a:cs typeface="Leelawadee UI"/>
               </a:rPr>
-              <a:t>ใครก็เปิด URL ได้</a:t>
-            </a:r>
-          </a:p>
-        </p:txBody>
-      </p:sp>
-      <p:sp>
-        <p:nvSpPr>
-          <p:cNvPr id="10" name="TextBox 9"/>
+              <a:t>• 🚫 ห้ามออกออนไลน์โดยไม่มีกฎขั้นต่ำ — ไม่มีข้อยกเว้น</a:t>
+            </a:r>
+          </a:p>
+        </p:txBody>
+      </p:sp>
+      <p:sp>
+        <p:nvSpPr>
+          <p:cNvPr id="6" name="TextBox 5"/>
+          <p:cNvSpPr txBox="1"/>
+          <p:nvPr/>
+        </p:nvSpPr>
+        <p:spPr>
+          <a:xfrm>
+            <a:off x="822960" y="4390136"/>
+            <a:ext cx="10545775" cy="560324"/>
+          </a:xfrm>
+          <a:prstGeom prst="rect">
+            <a:avLst/>
+          </a:prstGeom>
+          <a:noFill/>
+        </p:spPr>
+        <p:txBody>
+          <a:bodyPr wrap="square">
+            <a:spAutoFit/>
+          </a:bodyPr>
+          <a:lstStyle/>
+          <a:p>
+            <a:pPr algn="l"/>
+            <a:r>
+              <a:rPr sz="2600" b="0">
+                <a:solidFill>
+                  <a:srgbClr val="1A1A1A"/>
+                </a:solidFill>
+                <a:latin typeface="Leelawadee UI"/>
+                <a:ea typeface="Leelawadee UI"/>
+                <a:cs typeface="Leelawadee UI"/>
+              </a:rPr>
+              <a:t>• สั่ง AI ให้ deploy ทั้งเว็บและกฎในรอบเดียว</a:t>
+            </a:r>
+          </a:p>
+        </p:txBody>
+      </p:sp>
+      <p:sp>
+        <p:nvSpPr>
+          <p:cNvPr id="7" name="TextBox 6"/>
           <p:cNvSpPr txBox="1"/>
           <p:nvPr/>
         </p:nvSpPr>
@@ -21252,7 +21058,7 @@
         <p:spPr>
           <a:xfrm>
             <a:off x="822960" y="502920"/>
-            <a:ext cx="10545775" cy="1408176"/>
+            <a:ext cx="10545775" cy="804672"/>
           </a:xfrm>
           <a:prstGeom prst="rect">
             <a:avLst/>
@@ -21275,7 +21081,7 @@
                 <a:ea typeface="Leelawadee UI"/>
                 <a:cs typeface="Leelawadee UI"/>
               </a:rPr>
-              <a:t>deploy เว็บอย่างเดียวไม่พอ — กฎต้องขึ้นด้วย</a:t>
+              <a:t>ในเครื่องได้ ออนไลน์พัง — 2 สาเหตุหลัก</a:t>
             </a:r>
           </a:p>
         </p:txBody>
@@ -21288,7 +21094,7 @@
         </p:nvSpPr>
         <p:spPr>
           <a:xfrm>
-            <a:off x="822960" y="2075688"/>
+            <a:off x="822960" y="1472184"/>
             <a:ext cx="10545775" cy="560324"/>
           </a:xfrm>
           <a:prstGeom prst="rect">
@@ -21312,7 +21118,7 @@
                 <a:ea typeface="Leelawadee UI"/>
                 <a:cs typeface="Leelawadee UI"/>
               </a:rPr>
-              <a:t>• เว็บกับกฎ deploy แยกกันคนละส่วน</a:t>
+              <a:t>• สาเหตุ 1: กฎยังไม่ deploy — ขึ้น permission denied</a:t>
             </a:r>
           </a:p>
         </p:txBody>
@@ -21325,7 +21131,44 @@
         </p:nvSpPr>
         <p:spPr>
           <a:xfrm>
-            <a:off x="822960" y="2690876"/>
+            <a:off x="822960" y="2087372"/>
+            <a:ext cx="10545775" cy="560324"/>
+          </a:xfrm>
+          <a:prstGeom prst="rect">
+            <a:avLst/>
+          </a:prstGeom>
+          <a:noFill/>
+        </p:spPr>
+        <p:txBody>
+          <a:bodyPr wrap="square">
+            <a:spAutoFit/>
+          </a:bodyPr>
+          <a:lstStyle/>
+          <a:p>
+            <a:pPr algn="l"/>
+            <a:r>
+              <a:rPr sz="2600" b="0">
+                <a:solidFill>
+                  <a:srgbClr val="1A1A1A"/>
+                </a:solidFill>
+                <a:latin typeface="Leelawadee UI"/>
+                <a:ea typeface="Leelawadee UI"/>
+                <a:cs typeface="Leelawadee UI"/>
+              </a:rPr>
+              <a:t>• สาเหตุ 2: index (สารบัญช่วยค้น) ยังไม่สร้าง</a:t>
+            </a:r>
+          </a:p>
+        </p:txBody>
+      </p:sp>
+      <p:sp>
+        <p:nvSpPr>
+          <p:cNvPr id="5" name="TextBox 4"/>
+          <p:cNvSpPr txBox="1"/>
+          <p:nvPr/>
+        </p:nvSpPr>
+        <p:spPr>
+          <a:xfrm>
+            <a:off x="822960" y="2702560"/>
             <a:ext cx="10545775" cy="1029208"/>
           </a:xfrm>
           <a:prstGeom prst="rect">
@@ -21349,20 +21192,20 @@
                 <a:ea typeface="Leelawadee UI"/>
                 <a:cs typeface="Leelawadee UI"/>
               </a:rPr>
-              <a:t>• กฎที่เขียนไว้ในเครื่อง ยังไม่คุ้มครองของจริง จนกว่าจะ deploy</a:t>
-            </a:r>
-          </a:p>
-        </p:txBody>
-      </p:sp>
-      <p:sp>
-        <p:nvSpPr>
-          <p:cNvPr id="5" name="TextBox 4"/>
-          <p:cNvSpPr txBox="1"/>
-          <p:nvPr/>
-        </p:nvSpPr>
-        <p:spPr>
-          <a:xfrm>
-            <a:off x="822960" y="3774948"/>
+              <a:t>• ทางแก้ index: อ่าน error → กดลิงก์ในข้อความ → กดสร้าง → รอ</a:t>
+            </a:r>
+          </a:p>
+        </p:txBody>
+      </p:sp>
+      <p:sp>
+        <p:nvSpPr>
+          <p:cNvPr id="6" name="TextBox 5"/>
+          <p:cNvSpPr txBox="1"/>
+          <p:nvPr/>
+        </p:nvSpPr>
+        <p:spPr>
+          <a:xfrm>
+            <a:off x="822960" y="3786632"/>
             <a:ext cx="10545775" cy="560324"/>
           </a:xfrm>
           <a:prstGeom prst="rect">
@@ -21386,44 +21229,7 @@
                 <a:ea typeface="Leelawadee UI"/>
                 <a:cs typeface="Leelawadee UI"/>
               </a:rPr>
-              <a:t>• 🚫 ห้ามออกออนไลน์โดยไม่มีกฎขั้นต่ำ — ไม่มีข้อยกเว้น</a:t>
-            </a:r>
-          </a:p>
-        </p:txBody>
-      </p:sp>
-      <p:sp>
-        <p:nvSpPr>
-          <p:cNvPr id="6" name="TextBox 5"/>
-          <p:cNvSpPr txBox="1"/>
-          <p:nvPr/>
-        </p:nvSpPr>
-        <p:spPr>
-          <a:xfrm>
-            <a:off x="822960" y="4390136"/>
-            <a:ext cx="10545775" cy="560324"/>
-          </a:xfrm>
-          <a:prstGeom prst="rect">
-            <a:avLst/>
-          </a:prstGeom>
-          <a:noFill/>
-        </p:spPr>
-        <p:txBody>
-          <a:bodyPr wrap="square">
-            <a:spAutoFit/>
-          </a:bodyPr>
-          <a:lstStyle/>
-          <a:p>
-            <a:pPr algn="l"/>
-            <a:r>
-              <a:rPr sz="2600" b="0">
-                <a:solidFill>
-                  <a:srgbClr val="1A1A1A"/>
-                </a:solidFill>
-                <a:latin typeface="Leelawadee UI"/>
-                <a:ea typeface="Leelawadee UI"/>
-                <a:cs typeface="Leelawadee UI"/>
-              </a:rPr>
-              <a:t>• สั่ง AI ให้ deploy ทั้งเว็บและกฎในรอบเดียว</a:t>
+              <a:t>• อ่าน error ให้จบบรรทัดก่อนตกใจ</a:t>
             </a:r>
           </a:p>
         </p:txBody>
@@ -21484,14 +21290,137 @@
       <p:grpSpPr/>
       <p:sp>
         <p:nvSpPr>
-          <p:cNvPr id="2" name="TextBox 1"/>
+          <p:cNvPr id="2" name="Rectangle 1"/>
+          <p:cNvSpPr/>
+          <p:nvPr/>
+        </p:nvSpPr>
+        <p:spPr>
+          <a:xfrm>
+            <a:off x="0" y="0"/>
+            <a:ext cx="12191695" cy="6858000"/>
+          </a:xfrm>
+          <a:prstGeom prst="rect">
+            <a:avLst/>
+          </a:prstGeom>
+          <a:solidFill>
+            <a:srgbClr val="FFF3DF"/>
+          </a:solidFill>
+          <a:ln>
+            <a:noFill/>
+          </a:ln>
+        </p:spPr>
+        <p:style>
+          <a:lnRef idx="1">
+            <a:schemeClr val="accent1"/>
+          </a:lnRef>
+          <a:fillRef idx="3">
+            <a:schemeClr val="accent1"/>
+          </a:fillRef>
+          <a:effectRef idx="2">
+            <a:schemeClr val="accent1"/>
+          </a:effectRef>
+          <a:fontRef idx="minor">
+            <a:schemeClr val="lt1"/>
+          </a:fontRef>
+        </p:style>
+        <p:txBody>
+          <a:bodyPr rtlCol="0" anchor="ctr"/>
+          <a:lstStyle/>
+          <a:p>
+            <a:pPr algn="ctr"/>
+          </a:p>
+        </p:txBody>
+      </p:sp>
+      <p:sp>
+        <p:nvSpPr>
+          <p:cNvPr id="3" name="Rectangle 2"/>
+          <p:cNvSpPr/>
+          <p:nvPr/>
+        </p:nvSpPr>
+        <p:spPr>
+          <a:xfrm>
+            <a:off x="0" y="0"/>
+            <a:ext cx="146304" cy="6858000"/>
+          </a:xfrm>
+          <a:prstGeom prst="rect">
+            <a:avLst/>
+          </a:prstGeom>
+          <a:solidFill>
+            <a:srgbClr val="E0A02C"/>
+          </a:solidFill>
+          <a:ln>
+            <a:noFill/>
+          </a:ln>
+        </p:spPr>
+        <p:style>
+          <a:lnRef idx="1">
+            <a:schemeClr val="accent1"/>
+          </a:lnRef>
+          <a:fillRef idx="3">
+            <a:schemeClr val="accent1"/>
+          </a:fillRef>
+          <a:effectRef idx="2">
+            <a:schemeClr val="accent1"/>
+          </a:effectRef>
+          <a:fontRef idx="minor">
+            <a:schemeClr val="lt1"/>
+          </a:fontRef>
+        </p:style>
+        <p:txBody>
+          <a:bodyPr rtlCol="0" anchor="ctr"/>
+          <a:lstStyle/>
+          <a:p>
+            <a:pPr algn="ctr"/>
+          </a:p>
+        </p:txBody>
+      </p:sp>
+      <p:sp>
+        <p:nvSpPr>
+          <p:cNvPr id="4" name="TextBox 3"/>
+          <p:cNvSpPr txBox="1"/>
+          <p:nvPr/>
+        </p:nvSpPr>
+        <p:spPr>
+          <a:xfrm>
+            <a:off x="9082735" y="109728"/>
+            <a:ext cx="2834640" cy="384048"/>
+          </a:xfrm>
+          <a:prstGeom prst="rect">
+            <a:avLst/>
+          </a:prstGeom>
+          <a:noFill/>
+        </p:spPr>
+        <p:txBody>
+          <a:bodyPr wrap="square">
+            <a:spAutoFit/>
+          </a:bodyPr>
+          <a:lstStyle/>
+          <a:p>
+            <a:pPr algn="r"/>
+            <a:r>
+              <a:rPr sz="1400" b="1">
+                <a:solidFill>
+                  <a:srgbClr val="8A5400"/>
+                </a:solidFill>
+                <a:latin typeface="Leelawadee UI"/>
+                <a:ea typeface="Leelawadee UI"/>
+                <a:cs typeface="Leelawadee UI"/>
+              </a:rPr>
+              <a:t>🎬 สลับไปหน้าจอสาธิตสด</a:t>
+            </a:r>
+          </a:p>
+        </p:txBody>
+      </p:sp>
+      <p:sp>
+        <p:nvSpPr>
+          <p:cNvPr id="5" name="TextBox 4"/>
           <p:cNvSpPr txBox="1"/>
           <p:nvPr/>
         </p:nvSpPr>
         <p:spPr>
           <a:xfrm>
             <a:off x="822960" y="502920"/>
-            <a:ext cx="10545775" cy="804672"/>
+            <a:ext cx="10545775" cy="1408176"/>
           </a:xfrm>
           <a:prstGeom prst="rect">
             <a:avLst/>
@@ -21508,26 +21437,63 @@
             <a:r>
               <a:rPr sz="3600" b="1">
                 <a:solidFill>
-                  <a:srgbClr val="1F5FA8"/>
-                </a:solidFill>
-                <a:latin typeface="Leelawadee UI"/>
-                <a:ea typeface="Leelawadee UI"/>
-                <a:cs typeface="Leelawadee UI"/>
-              </a:rPr>
-              <a:t>ในเครื่องได้ ออนไลน์พัง — 2 สาเหตุหลัก</a:t>
-            </a:r>
-          </a:p>
-        </p:txBody>
-      </p:sp>
-      <p:sp>
-        <p:nvSpPr>
-          <p:cNvPr id="3" name="TextBox 2"/>
-          <p:cNvSpPr txBox="1"/>
-          <p:nvPr/>
-        </p:nvSpPr>
-        <p:spPr>
-          <a:xfrm>
-            <a:off x="822960" y="1472184"/>
+                  <a:srgbClr val="8A5400"/>
+                </a:solidFill>
+                <a:latin typeface="Leelawadee UI"/>
+                <a:ea typeface="Leelawadee UI"/>
+                <a:cs typeface="Leelawadee UI"/>
+              </a:rPr>
+              <a:t>🎬 สาธิต — FixIt ขึ้น URL จริง ต่อหน้าห้อง ⏱ 9 นาที</a:t>
+            </a:r>
+          </a:p>
+        </p:txBody>
+      </p:sp>
+      <p:sp>
+        <p:nvSpPr>
+          <p:cNvPr id="6" name="TextBox 5"/>
+          <p:cNvSpPr txBox="1"/>
+          <p:nvPr/>
+        </p:nvSpPr>
+        <p:spPr>
+          <a:xfrm>
+            <a:off x="822960" y="2075688"/>
+            <a:ext cx="10545775" cy="1029208"/>
+          </a:xfrm>
+          <a:prstGeom prst="rect">
+            <a:avLst/>
+          </a:prstGeom>
+          <a:noFill/>
+        </p:spPr>
+        <p:txBody>
+          <a:bodyPr wrap="square">
+            <a:spAutoFit/>
+          </a:bodyPr>
+          <a:lstStyle/>
+          <a:p>
+            <a:pPr algn="l"/>
+            <a:r>
+              <a:rPr sz="2600" b="0">
+                <a:solidFill>
+                  <a:srgbClr val="1A1A1A"/>
+                </a:solidFill>
+                <a:latin typeface="Leelawadee UI"/>
+                <a:ea typeface="Leelawadee UI"/>
+                <a:cs typeface="Leelawadee UI"/>
+              </a:rPr>
+              <a:t>• สั่ง deploy ทั้งเว็บและกฎ → รอ → เห็น Deploy complete</a:t>
+            </a:r>
+          </a:p>
+        </p:txBody>
+      </p:sp>
+      <p:sp>
+        <p:nvSpPr>
+          <p:cNvPr id="7" name="TextBox 6"/>
+          <p:cNvSpPr txBox="1"/>
+          <p:nvPr/>
+        </p:nvSpPr>
+        <p:spPr>
+          <a:xfrm>
+            <a:off x="822960" y="3159760"/>
             <a:ext cx="10545775" cy="560324"/>
           </a:xfrm>
           <a:prstGeom prst="rect">
@@ -21551,21 +21517,21 @@
                 <a:ea typeface="Leelawadee UI"/>
                 <a:cs typeface="Leelawadee UI"/>
               </a:rPr>
-              <a:t>• สาเหตุ 1: กฎยังไม่ deploy — ขึ้น permission denied</a:t>
-            </a:r>
-          </a:p>
-        </p:txBody>
-      </p:sp>
-      <p:sp>
-        <p:nvSpPr>
-          <p:cNvPr id="4" name="TextBox 3"/>
-          <p:cNvSpPr txBox="1"/>
-          <p:nvPr/>
-        </p:nvSpPr>
-        <p:spPr>
-          <a:xfrm>
-            <a:off x="822960" y="2087372"/>
-            <a:ext cx="10545775" cy="560324"/>
+              <a:t>• วาง URL ในแชท — ทุกคนเปิดตามเดี๋ยวนี้เลย</a:t>
+            </a:r>
+          </a:p>
+        </p:txBody>
+      </p:sp>
+      <p:sp>
+        <p:nvSpPr>
+          <p:cNvPr id="8" name="TextBox 7"/>
+          <p:cNvSpPr txBox="1"/>
+          <p:nvPr/>
+        </p:nvSpPr>
+        <p:spPr>
+          <a:xfrm>
+            <a:off x="822960" y="3774948"/>
+            <a:ext cx="10545775" cy="1029208"/>
           </a:xfrm>
           <a:prstGeom prst="rect">
             <a:avLst/>
@@ -21588,88 +21554,14 @@
                 <a:ea typeface="Leelawadee UI"/>
                 <a:cs typeface="Leelawadee UI"/>
               </a:rPr>
-              <a:t>• สาเหตุ 2: index (สารบัญช่วยค้น) ยังไม่สร้าง</a:t>
-            </a:r>
-          </a:p>
-        </p:txBody>
-      </p:sp>
-      <p:sp>
-        <p:nvSpPr>
-          <p:cNvPr id="5" name="TextBox 4"/>
-          <p:cNvSpPr txBox="1"/>
-          <p:nvPr/>
-        </p:nvSpPr>
-        <p:spPr>
-          <a:xfrm>
-            <a:off x="822960" y="2702560"/>
-            <a:ext cx="10545775" cy="1029208"/>
-          </a:xfrm>
-          <a:prstGeom prst="rect">
-            <a:avLst/>
-          </a:prstGeom>
-          <a:noFill/>
-        </p:spPr>
-        <p:txBody>
-          <a:bodyPr wrap="square">
-            <a:spAutoFit/>
-          </a:bodyPr>
-          <a:lstStyle/>
-          <a:p>
-            <a:pPr algn="l"/>
-            <a:r>
-              <a:rPr sz="2600" b="0">
-                <a:solidFill>
-                  <a:srgbClr val="1A1A1A"/>
-                </a:solidFill>
-                <a:latin typeface="Leelawadee UI"/>
-                <a:ea typeface="Leelawadee UI"/>
-                <a:cs typeface="Leelawadee UI"/>
-              </a:rPr>
-              <a:t>• ทางแก้ index: อ่าน error → กดลิงก์ในข้อความ → กดสร้าง → รอ</a:t>
-            </a:r>
-          </a:p>
-        </p:txBody>
-      </p:sp>
-      <p:sp>
-        <p:nvSpPr>
-          <p:cNvPr id="6" name="TextBox 5"/>
-          <p:cNvSpPr txBox="1"/>
-          <p:nvPr/>
-        </p:nvSpPr>
-        <p:spPr>
-          <a:xfrm>
-            <a:off x="822960" y="3786632"/>
-            <a:ext cx="10545775" cy="560324"/>
-          </a:xfrm>
-          <a:prstGeom prst="rect">
-            <a:avLst/>
-          </a:prstGeom>
-          <a:noFill/>
-        </p:spPr>
-        <p:txBody>
-          <a:bodyPr wrap="square">
-            <a:spAutoFit/>
-          </a:bodyPr>
-          <a:lstStyle/>
-          <a:p>
-            <a:pPr algn="l"/>
-            <a:r>
-              <a:rPr sz="2600" b="0">
-                <a:solidFill>
-                  <a:srgbClr val="1A1A1A"/>
-                </a:solidFill>
-                <a:latin typeface="Leelawadee UI"/>
-                <a:ea typeface="Leelawadee UI"/>
-                <a:cs typeface="Leelawadee UI"/>
-              </a:rPr>
-              <a:t>• อ่าน error ให้จบบรรทัดก่อนตกใจ</a:t>
-            </a:r>
-          </a:p>
-        </p:txBody>
-      </p:sp>
-      <p:sp>
-        <p:nvSpPr>
-          <p:cNvPr id="7" name="TextBox 6"/>
+              <a:t>• เปิดจากมือถือผู้สอนให้ดูด้วย — ออนไลน์จริง ไม่ใช่ในเครื่อง</a:t>
+            </a:r>
+          </a:p>
+        </p:txBody>
+      </p:sp>
+      <p:sp>
+        <p:nvSpPr>
+          <p:cNvPr id="9" name="TextBox 8"/>
           <p:cNvSpPr txBox="1"/>
           <p:nvPr/>
         </p:nvSpPr>
@@ -21723,278 +21615,44 @@
       <p:grpSpPr/>
       <p:sp>
         <p:nvSpPr>
-          <p:cNvPr id="2" name="Rectangle 1"/>
-          <p:cNvSpPr/>
-          <p:nvPr/>
-        </p:nvSpPr>
-        <p:spPr>
-          <a:xfrm>
-            <a:off x="0" y="0"/>
-            <a:ext cx="12191695" cy="6858000"/>
-          </a:xfrm>
-          <a:prstGeom prst="rect">
-            <a:avLst/>
-          </a:prstGeom>
-          <a:solidFill>
-            <a:srgbClr val="FFF3DF"/>
-          </a:solidFill>
-          <a:ln>
-            <a:noFill/>
-          </a:ln>
-        </p:spPr>
-        <p:style>
-          <a:lnRef idx="1">
-            <a:schemeClr val="accent1"/>
-          </a:lnRef>
-          <a:fillRef idx="3">
-            <a:schemeClr val="accent1"/>
-          </a:fillRef>
-          <a:effectRef idx="2">
-            <a:schemeClr val="accent1"/>
-          </a:effectRef>
-          <a:fontRef idx="minor">
-            <a:schemeClr val="lt1"/>
-          </a:fontRef>
-        </p:style>
-        <p:txBody>
-          <a:bodyPr rtlCol="0" anchor="ctr"/>
+          <p:cNvPr id="2" name="TextBox 1"/>
+          <p:cNvSpPr txBox="1"/>
+          <p:nvPr/>
+        </p:nvSpPr>
+        <p:spPr>
+          <a:xfrm>
+            <a:off x="822960" y="2011680"/>
+            <a:ext cx="10545775" cy="2743200"/>
+          </a:xfrm>
+          <a:prstGeom prst="rect">
+            <a:avLst/>
+          </a:prstGeom>
+          <a:noFill/>
+        </p:spPr>
+        <p:txBody>
+          <a:bodyPr wrap="square" anchor="ctr">
+            <a:spAutoFit/>
+          </a:bodyPr>
           <a:lstStyle/>
           <a:p>
             <a:pPr algn="ctr"/>
-          </a:p>
-        </p:txBody>
-      </p:sp>
-      <p:sp>
-        <p:nvSpPr>
-          <p:cNvPr id="3" name="Rectangle 2"/>
-          <p:cNvSpPr/>
-          <p:nvPr/>
-        </p:nvSpPr>
-        <p:spPr>
-          <a:xfrm>
-            <a:off x="0" y="0"/>
-            <a:ext cx="146304" cy="6858000"/>
-          </a:xfrm>
-          <a:prstGeom prst="rect">
-            <a:avLst/>
-          </a:prstGeom>
-          <a:solidFill>
-            <a:srgbClr val="E0A02C"/>
-          </a:solidFill>
-          <a:ln>
-            <a:noFill/>
-          </a:ln>
-        </p:spPr>
-        <p:style>
-          <a:lnRef idx="1">
-            <a:schemeClr val="accent1"/>
-          </a:lnRef>
-          <a:fillRef idx="3">
-            <a:schemeClr val="accent1"/>
-          </a:fillRef>
-          <a:effectRef idx="2">
-            <a:schemeClr val="accent1"/>
-          </a:effectRef>
-          <a:fontRef idx="minor">
-            <a:schemeClr val="lt1"/>
-          </a:fontRef>
-        </p:style>
-        <p:txBody>
-          <a:bodyPr rtlCol="0" anchor="ctr"/>
-          <a:lstStyle/>
-          <a:p>
-            <a:pPr algn="ctr"/>
-          </a:p>
-        </p:txBody>
-      </p:sp>
-      <p:sp>
-        <p:nvSpPr>
-          <p:cNvPr id="4" name="TextBox 3"/>
-          <p:cNvSpPr txBox="1"/>
-          <p:nvPr/>
-        </p:nvSpPr>
-        <p:spPr>
-          <a:xfrm>
-            <a:off x="9082735" y="109728"/>
-            <a:ext cx="2834640" cy="384048"/>
-          </a:xfrm>
-          <a:prstGeom prst="rect">
-            <a:avLst/>
-          </a:prstGeom>
-          <a:noFill/>
-        </p:spPr>
-        <p:txBody>
-          <a:bodyPr wrap="square">
-            <a:spAutoFit/>
-          </a:bodyPr>
-          <a:lstStyle/>
-          <a:p>
-            <a:pPr algn="r"/>
-            <a:r>
-              <a:rPr sz="1400" b="1">
-                <a:solidFill>
-                  <a:srgbClr val="8A5400"/>
-                </a:solidFill>
-                <a:latin typeface="Leelawadee UI"/>
-                <a:ea typeface="Leelawadee UI"/>
-                <a:cs typeface="Leelawadee UI"/>
-              </a:rPr>
-              <a:t>🎬 สลับไปหน้าจอสาธิตสด</a:t>
-            </a:r>
-          </a:p>
-        </p:txBody>
-      </p:sp>
-      <p:sp>
-        <p:nvSpPr>
-          <p:cNvPr id="5" name="TextBox 4"/>
-          <p:cNvSpPr txBox="1"/>
-          <p:nvPr/>
-        </p:nvSpPr>
-        <p:spPr>
-          <a:xfrm>
-            <a:off x="822960" y="502920"/>
-            <a:ext cx="10545775" cy="1408176"/>
-          </a:xfrm>
-          <a:prstGeom prst="rect">
-            <a:avLst/>
-          </a:prstGeom>
-          <a:noFill/>
-        </p:spPr>
-        <p:txBody>
-          <a:bodyPr wrap="square">
-            <a:spAutoFit/>
-          </a:bodyPr>
-          <a:lstStyle/>
-          <a:p>
-            <a:pPr algn="l"/>
-            <a:r>
-              <a:rPr sz="3600" b="1">
-                <a:solidFill>
-                  <a:srgbClr val="8A5400"/>
-                </a:solidFill>
-                <a:latin typeface="Leelawadee UI"/>
-                <a:ea typeface="Leelawadee UI"/>
-                <a:cs typeface="Leelawadee UI"/>
-              </a:rPr>
-              <a:t>🎬 สาธิต — FixIt ขึ้น URL จริง ต่อหน้าห้อง ⏱ 9 นาที</a:t>
-            </a:r>
-          </a:p>
-        </p:txBody>
-      </p:sp>
-      <p:sp>
-        <p:nvSpPr>
-          <p:cNvPr id="6" name="TextBox 5"/>
-          <p:cNvSpPr txBox="1"/>
-          <p:nvPr/>
-        </p:nvSpPr>
-        <p:spPr>
-          <a:xfrm>
-            <a:off x="822960" y="2075688"/>
-            <a:ext cx="10545775" cy="1029208"/>
-          </a:xfrm>
-          <a:prstGeom prst="rect">
-            <a:avLst/>
-          </a:prstGeom>
-          <a:noFill/>
-        </p:spPr>
-        <p:txBody>
-          <a:bodyPr wrap="square">
-            <a:spAutoFit/>
-          </a:bodyPr>
-          <a:lstStyle/>
-          <a:p>
-            <a:pPr algn="l"/>
-            <a:r>
-              <a:rPr sz="2600" b="0">
-                <a:solidFill>
-                  <a:srgbClr val="1A1A1A"/>
-                </a:solidFill>
-                <a:latin typeface="Leelawadee UI"/>
-                <a:ea typeface="Leelawadee UI"/>
-                <a:cs typeface="Leelawadee UI"/>
-              </a:rPr>
-              <a:t>• สั่ง deploy ทั้งเว็บและกฎ → รอ → เห็น Deploy complete</a:t>
-            </a:r>
-          </a:p>
-        </p:txBody>
-      </p:sp>
-      <p:sp>
-        <p:nvSpPr>
-          <p:cNvPr id="7" name="TextBox 6"/>
-          <p:cNvSpPr txBox="1"/>
-          <p:nvPr/>
-        </p:nvSpPr>
-        <p:spPr>
-          <a:xfrm>
-            <a:off x="822960" y="3159760"/>
-            <a:ext cx="10545775" cy="560324"/>
-          </a:xfrm>
-          <a:prstGeom prst="rect">
-            <a:avLst/>
-          </a:prstGeom>
-          <a:noFill/>
-        </p:spPr>
-        <p:txBody>
-          <a:bodyPr wrap="square">
-            <a:spAutoFit/>
-          </a:bodyPr>
-          <a:lstStyle/>
-          <a:p>
-            <a:pPr algn="l"/>
-            <a:r>
-              <a:rPr sz="2600" b="0">
-                <a:solidFill>
-                  <a:srgbClr val="1A1A1A"/>
-                </a:solidFill>
-                <a:latin typeface="Leelawadee UI"/>
-                <a:ea typeface="Leelawadee UI"/>
-                <a:cs typeface="Leelawadee UI"/>
-              </a:rPr>
-              <a:t>• วาง URL ในแชท — ทุกคนเปิดตามเดี๋ยวนี้เลย</a:t>
-            </a:r>
-          </a:p>
-        </p:txBody>
-      </p:sp>
-      <p:sp>
-        <p:nvSpPr>
-          <p:cNvPr id="8" name="TextBox 7"/>
-          <p:cNvSpPr txBox="1"/>
-          <p:nvPr/>
-        </p:nvSpPr>
-        <p:spPr>
-          <a:xfrm>
-            <a:off x="822960" y="3774948"/>
-            <a:ext cx="10545775" cy="1029208"/>
-          </a:xfrm>
-          <a:prstGeom prst="rect">
-            <a:avLst/>
-          </a:prstGeom>
-          <a:noFill/>
-        </p:spPr>
-        <p:txBody>
-          <a:bodyPr wrap="square">
-            <a:spAutoFit/>
-          </a:bodyPr>
-          <a:lstStyle/>
-          <a:p>
-            <a:pPr algn="l"/>
-            <a:r>
-              <a:rPr sz="2600" b="0">
-                <a:solidFill>
-                  <a:srgbClr val="1A1A1A"/>
-                </a:solidFill>
-                <a:latin typeface="Leelawadee UI"/>
-                <a:ea typeface="Leelawadee UI"/>
-                <a:cs typeface="Leelawadee UI"/>
-              </a:rPr>
-              <a:t>• เปิดจากมือถือผู้สอนให้ดูด้วย — ออนไลน์จริง ไม่ใช่ในเครื่อง</a:t>
-            </a:r>
-          </a:p>
-        </p:txBody>
-      </p:sp>
-      <p:sp>
-        <p:nvSpPr>
-          <p:cNvPr id="9" name="TextBox 8"/>
+            <a:r>
+              <a:rPr sz="5400" b="1">
+                <a:solidFill>
+                  <a:srgbClr val="1F5FA8"/>
+                </a:solidFill>
+                <a:latin typeface="Leelawadee UI"/>
+                <a:ea typeface="Leelawadee UI"/>
+                <a:cs typeface="Leelawadee UI"/>
+              </a:rPr>
+              <a:t>ระบบของเราออนไลน์แล้ว</a:t>
+            </a:r>
+          </a:p>
+        </p:txBody>
+      </p:sp>
+      <p:sp>
+        <p:nvSpPr>
+          <p:cNvPr id="3" name="TextBox 2"/>
           <p:cNvSpPr txBox="1"/>
           <p:nvPr/>
         </p:nvSpPr>
@@ -22283,23 +21941,23 @@
         </p:nvSpPr>
         <p:spPr>
           <a:xfrm>
-            <a:off x="822960" y="2011680"/>
-            <a:ext cx="10545775" cy="2743200"/>
-          </a:xfrm>
-          <a:prstGeom prst="rect">
-            <a:avLst/>
-          </a:prstGeom>
-          <a:noFill/>
-        </p:spPr>
-        <p:txBody>
-          <a:bodyPr wrap="square" anchor="ctr">
-            <a:spAutoFit/>
-          </a:bodyPr>
-          <a:lstStyle/>
-          <a:p>
-            <a:pPr algn="ctr"/>
-            <a:r>
-              <a:rPr sz="5400" b="1">
+            <a:off x="822960" y="502920"/>
+            <a:ext cx="10545775" cy="804672"/>
+          </a:xfrm>
+          <a:prstGeom prst="rect">
+            <a:avLst/>
+          </a:prstGeom>
+          <a:noFill/>
+        </p:spPr>
+        <p:txBody>
+          <a:bodyPr wrap="square">
+            <a:spAutoFit/>
+          </a:bodyPr>
+          <a:lstStyle/>
+          <a:p>
+            <a:pPr algn="l"/>
+            <a:r>
+              <a:rPr sz="3600" b="1">
                 <a:solidFill>
                   <a:srgbClr val="1F5FA8"/>
                 </a:solidFill>
@@ -22307,7 +21965,7 @@
                 <a:ea typeface="Leelawadee UI"/>
                 <a:cs typeface="Leelawadee UI"/>
               </a:rPr>
-              <a:t>ระบบของเราออนไลน์แล้ว</a:t>
+              <a:t>⚠️ ออนไลน์แล้ว แต่ยังห้ามใส่ข้อมูลจริง</a:t>
             </a:r>
           </a:p>
         </p:txBody>
@@ -22315,6 +21973,154 @@
       <p:sp>
         <p:nvSpPr>
           <p:cNvPr id="3" name="TextBox 2"/>
+          <p:cNvSpPr txBox="1"/>
+          <p:nvPr/>
+        </p:nvSpPr>
+        <p:spPr>
+          <a:xfrm>
+            <a:off x="822960" y="1472184"/>
+            <a:ext cx="10545775" cy="560324"/>
+          </a:xfrm>
+          <a:prstGeom prst="rect">
+            <a:avLst/>
+          </a:prstGeom>
+          <a:noFill/>
+        </p:spPr>
+        <p:txBody>
+          <a:bodyPr wrap="square">
+            <a:spAutoFit/>
+          </a:bodyPr>
+          <a:lstStyle/>
+          <a:p>
+            <a:pPr algn="l"/>
+            <a:r>
+              <a:rPr sz="2600" b="0">
+                <a:solidFill>
+                  <a:srgbClr val="1A1A1A"/>
+                </a:solidFill>
+                <a:latin typeface="Leelawadee UI"/>
+                <a:ea typeface="Leelawadee UI"/>
+                <a:cs typeface="Leelawadee UI"/>
+              </a:rPr>
+              <a:t>• กุญแจวันนี้กันได้เฉพาะคนไม่ล็อกอิน</a:t>
+            </a:r>
+          </a:p>
+        </p:txBody>
+      </p:sp>
+      <p:sp>
+        <p:nvSpPr>
+          <p:cNvPr id="4" name="TextBox 3"/>
+          <p:cNvSpPr txBox="1"/>
+          <p:nvPr/>
+        </p:nvSpPr>
+        <p:spPr>
+          <a:xfrm>
+            <a:off x="822960" y="2087372"/>
+            <a:ext cx="10545775" cy="560324"/>
+          </a:xfrm>
+          <a:prstGeom prst="rect">
+            <a:avLst/>
+          </a:prstGeom>
+          <a:noFill/>
+        </p:spPr>
+        <p:txBody>
+          <a:bodyPr wrap="square">
+            <a:spAutoFit/>
+          </a:bodyPr>
+          <a:lstStyle/>
+          <a:p>
+            <a:pPr algn="l"/>
+            <a:r>
+              <a:rPr sz="2600" b="0">
+                <a:solidFill>
+                  <a:srgbClr val="1A1A1A"/>
+                </a:solidFill>
+                <a:latin typeface="Leelawadee UI"/>
+                <a:ea typeface="Leelawadee UI"/>
+                <a:cs typeface="Leelawadee UI"/>
+              </a:rPr>
+              <a:t>• ใครสมัครบัญชีใหม่ ก็ยังอ่านได้หมด</a:t>
+            </a:r>
+          </a:p>
+        </p:txBody>
+      </p:sp>
+      <p:sp>
+        <p:nvSpPr>
+          <p:cNvPr id="5" name="TextBox 4"/>
+          <p:cNvSpPr txBox="1"/>
+          <p:nvPr/>
+        </p:nvSpPr>
+        <p:spPr>
+          <a:xfrm>
+            <a:off x="822960" y="2702560"/>
+            <a:ext cx="10545775" cy="1029208"/>
+          </a:xfrm>
+          <a:prstGeom prst="rect">
+            <a:avLst/>
+          </a:prstGeom>
+          <a:noFill/>
+        </p:spPr>
+        <p:txBody>
+          <a:bodyPr wrap="square">
+            <a:spAutoFit/>
+          </a:bodyPr>
+          <a:lstStyle/>
+          <a:p>
+            <a:pPr algn="l"/>
+            <a:r>
+              <a:rPr sz="2600" b="0">
+                <a:solidFill>
+                  <a:srgbClr val="1A1A1A"/>
+                </a:solidFill>
+                <a:latin typeface="Leelawadee UI"/>
+                <a:ea typeface="Leelawadee UI"/>
+                <a:cs typeface="Leelawadee UI"/>
+              </a:rPr>
+              <a:t>• กฎรายห้องปิดสัปดาห์หน้า — ก่อนนั้นใช้ชื่อสมมติเท่านั้น</a:t>
+            </a:r>
+          </a:p>
+        </p:txBody>
+      </p:sp>
+      <p:sp>
+        <p:nvSpPr>
+          <p:cNvPr id="6" name="TextBox 5"/>
+          <p:cNvSpPr txBox="1"/>
+          <p:nvPr/>
+        </p:nvSpPr>
+        <p:spPr>
+          <a:xfrm>
+            <a:off x="822960" y="3786632"/>
+            <a:ext cx="10545775" cy="560324"/>
+          </a:xfrm>
+          <a:prstGeom prst="rect">
+            <a:avLst/>
+          </a:prstGeom>
+          <a:noFill/>
+        </p:spPr>
+        <p:txBody>
+          <a:bodyPr wrap="square">
+            <a:spAutoFit/>
+          </a:bodyPr>
+          <a:lstStyle/>
+          <a:p>
+            <a:pPr algn="l"/>
+            <a:r>
+              <a:rPr sz="2600" b="0">
+                <a:solidFill>
+                  <a:srgbClr val="1A1A1A"/>
+                </a:solidFill>
+                <a:latin typeface="Leelawadee UI"/>
+                <a:ea typeface="Leelawadee UI"/>
+                <a:cs typeface="Leelawadee UI"/>
+              </a:rPr>
+              <a:t>• สมชาย สมหญิง สมศรี คือเพื่อนของเราทั้งเดือน</a:t>
+            </a:r>
+          </a:p>
+        </p:txBody>
+      </p:sp>
+      <p:sp>
+        <p:nvSpPr>
+          <p:cNvPr id="7" name="TextBox 6"/>
           <p:cNvSpPr txBox="1"/>
           <p:nvPr/>
         </p:nvSpPr>
@@ -22398,7 +22204,7 @@
                 <a:ea typeface="Leelawadee UI"/>
                 <a:cs typeface="Leelawadee UI"/>
               </a:rPr>
-              <a:t>⚠️ ออนไลน์แล้ว แต่ยังห้ามใส่ข้อมูลจริง</a:t>
+              <a:t>✅ ช่วงที่ 6 คุณต้องได้อะไรกลับไป</a:t>
             </a:r>
           </a:p>
         </p:txBody>
@@ -22435,7 +22241,7 @@
                 <a:ea typeface="Leelawadee UI"/>
                 <a:cs typeface="Leelawadee UI"/>
               </a:rPr>
-              <a:t>• กุญแจวันนี้กันได้เฉพาะคนไม่ล็อกอิน</a:t>
+              <a:t>• บอกได้ว่า deploy คืออะไร ต่างจาก localhost อย่างไร</a:t>
             </a:r>
           </a:p>
         </p:txBody>
@@ -22472,7 +22278,7 @@
                 <a:ea typeface="Leelawadee UI"/>
                 <a:cs typeface="Leelawadee UI"/>
               </a:rPr>
-              <a:t>• ใครสมัครบัญชีใหม่ ก็ยังอ่านได้หมด</a:t>
+              <a:t>• รู้ว่าต้อง deploy กฎพร้อมเว็บเสมอ</a:t>
             </a:r>
           </a:p>
         </p:txBody>
@@ -22486,7 +22292,7 @@
         <p:spPr>
           <a:xfrm>
             <a:off x="822960" y="2702560"/>
-            <a:ext cx="10545775" cy="1029208"/>
+            <a:ext cx="10545775" cy="560324"/>
           </a:xfrm>
           <a:prstGeom prst="rect">
             <a:avLst/>
@@ -22509,7 +22315,7 @@
                 <a:ea typeface="Leelawadee UI"/>
                 <a:cs typeface="Leelawadee UI"/>
               </a:rPr>
-              <a:t>• กฎรายห้องปิดสัปดาห์หน้า — ก่อนนั้นใช้ชื่อสมมติเท่านั้น</a:t>
+              <a:t>• รู้ 2 สาเหตุหลักของ "ในเครื่องได้ ออนไลน์พัง"</a:t>
             </a:r>
           </a:p>
         </p:txBody>
@@ -22522,7 +22328,7 @@
         </p:nvSpPr>
         <p:spPr>
           <a:xfrm>
-            <a:off x="822960" y="3786632"/>
+            <a:off x="822960" y="3317748"/>
             <a:ext cx="10545775" cy="560324"/>
           </a:xfrm>
           <a:prstGeom prst="rect">
@@ -22546,7 +22352,7 @@
                 <a:ea typeface="Leelawadee UI"/>
                 <a:cs typeface="Leelawadee UI"/>
               </a:rPr>
-              <a:t>• สมชาย สมหญิง สมศรี คือเพื่อนของเราทั้งเดือน</a:t>
+              <a:t>• รู้ว่าห้ามใส่ข้อมูลจริงจนกว่ากฎรายห้องจะปิด</a:t>
             </a:r>
           </a:p>
         </p:txBody>
@@ -22607,38 +22413,44 @@
       <p:grpSpPr/>
       <p:sp>
         <p:nvSpPr>
-          <p:cNvPr id="2" name="TextBox 1"/>
-          <p:cNvSpPr txBox="1"/>
-          <p:nvPr/>
-        </p:nvSpPr>
-        <p:spPr>
-          <a:xfrm>
-            <a:off x="822960" y="502920"/>
-            <a:ext cx="10545775" cy="804672"/>
-          </a:xfrm>
-          <a:prstGeom prst="rect">
-            <a:avLst/>
-          </a:prstGeom>
-          <a:noFill/>
-        </p:spPr>
-        <p:txBody>
-          <a:bodyPr wrap="square">
-            <a:spAutoFit/>
-          </a:bodyPr>
-          <a:lstStyle/>
-          <a:p>
-            <a:pPr algn="l"/>
-            <a:r>
-              <a:rPr sz="3600" b="1">
-                <a:solidFill>
-                  <a:srgbClr val="1F5FA8"/>
-                </a:solidFill>
-                <a:latin typeface="Leelawadee UI"/>
-                <a:ea typeface="Leelawadee UI"/>
-                <a:cs typeface="Leelawadee UI"/>
-              </a:rPr>
-              <a:t>✅ ช่วงที่ 6 คุณต้องได้อะไรกลับไป</a:t>
-            </a:r>
+          <p:cNvPr id="2" name="Rectangle 1"/>
+          <p:cNvSpPr/>
+          <p:nvPr/>
+        </p:nvSpPr>
+        <p:spPr>
+          <a:xfrm>
+            <a:off x="0" y="0"/>
+            <a:ext cx="12191695" cy="6858000"/>
+          </a:xfrm>
+          <a:prstGeom prst="rect">
+            <a:avLst/>
+          </a:prstGeom>
+          <a:solidFill>
+            <a:srgbClr val="1F5FA8"/>
+          </a:solidFill>
+          <a:ln>
+            <a:noFill/>
+          </a:ln>
+        </p:spPr>
+        <p:style>
+          <a:lnRef idx="1">
+            <a:schemeClr val="accent1"/>
+          </a:lnRef>
+          <a:fillRef idx="3">
+            <a:schemeClr val="accent1"/>
+          </a:fillRef>
+          <a:effectRef idx="2">
+            <a:schemeClr val="accent1"/>
+          </a:effectRef>
+          <a:fontRef idx="minor">
+            <a:schemeClr val="lt1"/>
+          </a:fontRef>
+        </p:style>
+        <p:txBody>
+          <a:bodyPr rtlCol="0" anchor="ctr"/>
+          <a:lstStyle/>
+          <a:p>
+            <a:pPr algn="ctr"/>
           </a:p>
         </p:txBody>
       </p:sp>
@@ -22650,31 +22462,31 @@
         </p:nvSpPr>
         <p:spPr>
           <a:xfrm>
-            <a:off x="822960" y="1472184"/>
-            <a:ext cx="10545775" cy="560324"/>
-          </a:xfrm>
-          <a:prstGeom prst="rect">
-            <a:avLst/>
-          </a:prstGeom>
-          <a:noFill/>
-        </p:spPr>
-        <p:txBody>
-          <a:bodyPr wrap="square">
-            <a:spAutoFit/>
-          </a:bodyPr>
-          <a:lstStyle/>
-          <a:p>
-            <a:pPr algn="l"/>
-            <a:r>
-              <a:rPr sz="2600" b="0">
-                <a:solidFill>
-                  <a:srgbClr val="1A1A1A"/>
-                </a:solidFill>
-                <a:latin typeface="Leelawadee UI"/>
-                <a:ea typeface="Leelawadee UI"/>
-                <a:cs typeface="Leelawadee UI"/>
-              </a:rPr>
-              <a:t>• บอกได้ว่า deploy คืออะไร ต่างจาก localhost อย่างไร</a:t>
+            <a:off x="822960" y="2743200"/>
+            <a:ext cx="10545775" cy="1463040"/>
+          </a:xfrm>
+          <a:prstGeom prst="rect">
+            <a:avLst/>
+          </a:prstGeom>
+          <a:noFill/>
+        </p:spPr>
+        <p:txBody>
+          <a:bodyPr wrap="square" anchor="ctr">
+            <a:spAutoFit/>
+          </a:bodyPr>
+          <a:lstStyle/>
+          <a:p>
+            <a:pPr algn="ctr"/>
+            <a:r>
+              <a:rPr sz="4000" b="1">
+                <a:solidFill>
+                  <a:srgbClr val="FFFFFF"/>
+                </a:solidFill>
+                <a:latin typeface="Leelawadee UI"/>
+                <a:ea typeface="Leelawadee UI"/>
+                <a:cs typeface="Leelawadee UI"/>
+              </a:rPr>
+              <a:t>ปิดคาบ ⏱ 11:55–12:00</a:t>
             </a:r>
           </a:p>
         </p:txBody>
@@ -22682,117 +22494,6 @@
       <p:sp>
         <p:nvSpPr>
           <p:cNvPr id="4" name="TextBox 3"/>
-          <p:cNvSpPr txBox="1"/>
-          <p:nvPr/>
-        </p:nvSpPr>
-        <p:spPr>
-          <a:xfrm>
-            <a:off x="822960" y="2087372"/>
-            <a:ext cx="10545775" cy="560324"/>
-          </a:xfrm>
-          <a:prstGeom prst="rect">
-            <a:avLst/>
-          </a:prstGeom>
-          <a:noFill/>
-        </p:spPr>
-        <p:txBody>
-          <a:bodyPr wrap="square">
-            <a:spAutoFit/>
-          </a:bodyPr>
-          <a:lstStyle/>
-          <a:p>
-            <a:pPr algn="l"/>
-            <a:r>
-              <a:rPr sz="2600" b="0">
-                <a:solidFill>
-                  <a:srgbClr val="1A1A1A"/>
-                </a:solidFill>
-                <a:latin typeface="Leelawadee UI"/>
-                <a:ea typeface="Leelawadee UI"/>
-                <a:cs typeface="Leelawadee UI"/>
-              </a:rPr>
-              <a:t>• รู้ว่าต้อง deploy กฎพร้อมเว็บเสมอ</a:t>
-            </a:r>
-          </a:p>
-        </p:txBody>
-      </p:sp>
-      <p:sp>
-        <p:nvSpPr>
-          <p:cNvPr id="5" name="TextBox 4"/>
-          <p:cNvSpPr txBox="1"/>
-          <p:nvPr/>
-        </p:nvSpPr>
-        <p:spPr>
-          <a:xfrm>
-            <a:off x="822960" y="2702560"/>
-            <a:ext cx="10545775" cy="560324"/>
-          </a:xfrm>
-          <a:prstGeom prst="rect">
-            <a:avLst/>
-          </a:prstGeom>
-          <a:noFill/>
-        </p:spPr>
-        <p:txBody>
-          <a:bodyPr wrap="square">
-            <a:spAutoFit/>
-          </a:bodyPr>
-          <a:lstStyle/>
-          <a:p>
-            <a:pPr algn="l"/>
-            <a:r>
-              <a:rPr sz="2600" b="0">
-                <a:solidFill>
-                  <a:srgbClr val="1A1A1A"/>
-                </a:solidFill>
-                <a:latin typeface="Leelawadee UI"/>
-                <a:ea typeface="Leelawadee UI"/>
-                <a:cs typeface="Leelawadee UI"/>
-              </a:rPr>
-              <a:t>• รู้ 2 สาเหตุหลักของ "ในเครื่องได้ ออนไลน์พัง"</a:t>
-            </a:r>
-          </a:p>
-        </p:txBody>
-      </p:sp>
-      <p:sp>
-        <p:nvSpPr>
-          <p:cNvPr id="6" name="TextBox 5"/>
-          <p:cNvSpPr txBox="1"/>
-          <p:nvPr/>
-        </p:nvSpPr>
-        <p:spPr>
-          <a:xfrm>
-            <a:off x="822960" y="3317748"/>
-            <a:ext cx="10545775" cy="560324"/>
-          </a:xfrm>
-          <a:prstGeom prst="rect">
-            <a:avLst/>
-          </a:prstGeom>
-          <a:noFill/>
-        </p:spPr>
-        <p:txBody>
-          <a:bodyPr wrap="square">
-            <a:spAutoFit/>
-          </a:bodyPr>
-          <a:lstStyle/>
-          <a:p>
-            <a:pPr algn="l"/>
-            <a:r>
-              <a:rPr sz="2600" b="0">
-                <a:solidFill>
-                  <a:srgbClr val="1A1A1A"/>
-                </a:solidFill>
-                <a:latin typeface="Leelawadee UI"/>
-                <a:ea typeface="Leelawadee UI"/>
-                <a:cs typeface="Leelawadee UI"/>
-              </a:rPr>
-              <a:t>• รู้ว่าห้ามใส่ข้อมูลจริงจนกว่ากฎรายห้องจะปิด</a:t>
-            </a:r>
-          </a:p>
-        </p:txBody>
-      </p:sp>
-      <p:sp>
-        <p:nvSpPr>
-          <p:cNvPr id="7" name="TextBox 6"/>
           <p:cNvSpPr txBox="1"/>
           <p:nvPr/>
         </p:nvSpPr>
@@ -22846,44 +22547,38 @@
       <p:grpSpPr/>
       <p:sp>
         <p:nvSpPr>
-          <p:cNvPr id="2" name="Rectangle 1"/>
-          <p:cNvSpPr/>
-          <p:nvPr/>
-        </p:nvSpPr>
-        <p:spPr>
-          <a:xfrm>
-            <a:off x="0" y="0"/>
-            <a:ext cx="12191695" cy="6858000"/>
-          </a:xfrm>
-          <a:prstGeom prst="rect">
-            <a:avLst/>
-          </a:prstGeom>
-          <a:solidFill>
-            <a:srgbClr val="1F5FA8"/>
-          </a:solidFill>
-          <a:ln>
-            <a:noFill/>
-          </a:ln>
-        </p:spPr>
-        <p:style>
-          <a:lnRef idx="1">
-            <a:schemeClr val="accent1"/>
-          </a:lnRef>
-          <a:fillRef idx="3">
-            <a:schemeClr val="accent1"/>
-          </a:fillRef>
-          <a:effectRef idx="2">
-            <a:schemeClr val="accent1"/>
-          </a:effectRef>
-          <a:fontRef idx="minor">
-            <a:schemeClr val="lt1"/>
-          </a:fontRef>
-        </p:style>
-        <p:txBody>
-          <a:bodyPr rtlCol="0" anchor="ctr"/>
-          <a:lstStyle/>
-          <a:p>
-            <a:pPr algn="ctr"/>
+          <p:cNvPr id="2" name="TextBox 1"/>
+          <p:cNvSpPr txBox="1"/>
+          <p:nvPr/>
+        </p:nvSpPr>
+        <p:spPr>
+          <a:xfrm>
+            <a:off x="822960" y="502920"/>
+            <a:ext cx="10545775" cy="804672"/>
+          </a:xfrm>
+          <a:prstGeom prst="rect">
+            <a:avLst/>
+          </a:prstGeom>
+          <a:noFill/>
+        </p:spPr>
+        <p:txBody>
+          <a:bodyPr wrap="square">
+            <a:spAutoFit/>
+          </a:bodyPr>
+          <a:lstStyle/>
+          <a:p>
+            <a:pPr algn="l"/>
+            <a:r>
+              <a:rPr sz="3600" b="1">
+                <a:solidFill>
+                  <a:srgbClr val="1F5FA8"/>
+                </a:solidFill>
+                <a:latin typeface="Leelawadee UI"/>
+                <a:ea typeface="Leelawadee UI"/>
+                <a:cs typeface="Leelawadee UI"/>
+              </a:rPr>
+              <a:t>📦 สิ่งที่ต้องส่งมอบสัปดาห์นี้</a:t>
+            </a:r>
           </a:p>
         </p:txBody>
       </p:sp>
@@ -22895,31 +22590,31 @@
         </p:nvSpPr>
         <p:spPr>
           <a:xfrm>
-            <a:off x="822960" y="2743200"/>
-            <a:ext cx="10545775" cy="1463040"/>
-          </a:xfrm>
-          <a:prstGeom prst="rect">
-            <a:avLst/>
-          </a:prstGeom>
-          <a:noFill/>
-        </p:spPr>
-        <p:txBody>
-          <a:bodyPr wrap="square" anchor="ctr">
-            <a:spAutoFit/>
-          </a:bodyPr>
-          <a:lstStyle/>
-          <a:p>
-            <a:pPr algn="ctr"/>
-            <a:r>
-              <a:rPr sz="4000" b="1">
-                <a:solidFill>
-                  <a:srgbClr val="FFFFFF"/>
-                </a:solidFill>
-                <a:latin typeface="Leelawadee UI"/>
-                <a:ea typeface="Leelawadee UI"/>
-                <a:cs typeface="Leelawadee UI"/>
-              </a:rPr>
-              <a:t>ปิดคาบ ⏱ 11:55–12:00</a:t>
+            <a:off x="822960" y="1472184"/>
+            <a:ext cx="10545775" cy="560324"/>
+          </a:xfrm>
+          <a:prstGeom prst="rect">
+            <a:avLst/>
+          </a:prstGeom>
+          <a:noFill/>
+        </p:spPr>
+        <p:txBody>
+          <a:bodyPr wrap="square">
+            <a:spAutoFit/>
+          </a:bodyPr>
+          <a:lstStyle/>
+          <a:p>
+            <a:pPr algn="l"/>
+            <a:r>
+              <a:rPr sz="2600" b="0">
+                <a:solidFill>
+                  <a:srgbClr val="1A1A1A"/>
+                </a:solidFill>
+                <a:latin typeface="Leelawadee UI"/>
+                <a:ea typeface="Leelawadee UI"/>
+                <a:cs typeface="Leelawadee UI"/>
+              </a:rPr>
+              <a:t>• [ ] repo บน GitHub ที่มี CLAUDE.md และไม่มีคีย์หลุด</a:t>
             </a:r>
           </a:p>
         </p:txBody>
@@ -22927,6 +22622,117 @@
       <p:sp>
         <p:nvSpPr>
           <p:cNvPr id="4" name="TextBox 3"/>
+          <p:cNvSpPr txBox="1"/>
+          <p:nvPr/>
+        </p:nvSpPr>
+        <p:spPr>
+          <a:xfrm>
+            <a:off x="822960" y="2087372"/>
+            <a:ext cx="10545775" cy="560324"/>
+          </a:xfrm>
+          <a:prstGeom prst="rect">
+            <a:avLst/>
+          </a:prstGeom>
+          <a:noFill/>
+        </p:spPr>
+        <p:txBody>
+          <a:bodyPr wrap="square">
+            <a:spAutoFit/>
+          </a:bodyPr>
+          <a:lstStyle/>
+          <a:p>
+            <a:pPr algn="l"/>
+            <a:r>
+              <a:rPr sz="2600" b="0">
+                <a:solidFill>
+                  <a:srgbClr val="1A1A1A"/>
+                </a:solidFill>
+                <a:latin typeface="Leelawadee UI"/>
+                <a:ea typeface="Leelawadee UI"/>
+                <a:cs typeface="Leelawadee UI"/>
+              </a:rPr>
+              <a:t>• [ ] ⭐ CRUD ครบ — กรอก → ปิด → เปิดใหม่ → ยังอยู่</a:t>
+            </a:r>
+          </a:p>
+        </p:txBody>
+      </p:sp>
+      <p:sp>
+        <p:nvSpPr>
+          <p:cNvPr id="5" name="TextBox 4"/>
+          <p:cNvSpPr txBox="1"/>
+          <p:nvPr/>
+        </p:nvSpPr>
+        <p:spPr>
+          <a:xfrm>
+            <a:off x="822960" y="2702560"/>
+            <a:ext cx="10545775" cy="560324"/>
+          </a:xfrm>
+          <a:prstGeom prst="rect">
+            <a:avLst/>
+          </a:prstGeom>
+          <a:noFill/>
+        </p:spPr>
+        <p:txBody>
+          <a:bodyPr wrap="square">
+            <a:spAutoFit/>
+          </a:bodyPr>
+          <a:lstStyle/>
+          <a:p>
+            <a:pPr algn="l"/>
+            <a:r>
+              <a:rPr sz="2600" b="0">
+                <a:solidFill>
+                  <a:srgbClr val="1A1A1A"/>
+                </a:solidFill>
+                <a:latin typeface="Leelawadee UI"/>
+                <a:ea typeface="Leelawadee UI"/>
+                <a:cs typeface="Leelawadee UI"/>
+              </a:rPr>
+              <a:t>• [ ] ล็อกอินได้ + ไม่ล็อกอินอ่านไม่ได้ + URL ออนไลน์</a:t>
+            </a:r>
+          </a:p>
+        </p:txBody>
+      </p:sp>
+      <p:sp>
+        <p:nvSpPr>
+          <p:cNvPr id="6" name="TextBox 5"/>
+          <p:cNvSpPr txBox="1"/>
+          <p:nvPr/>
+        </p:nvSpPr>
+        <p:spPr>
+          <a:xfrm>
+            <a:off x="822960" y="3317748"/>
+            <a:ext cx="10545775" cy="1029208"/>
+          </a:xfrm>
+          <a:prstGeom prst="rect">
+            <a:avLst/>
+          </a:prstGeom>
+          <a:noFill/>
+        </p:spPr>
+        <p:txBody>
+          <a:bodyPr wrap="square">
+            <a:spAutoFit/>
+          </a:bodyPr>
+          <a:lstStyle/>
+          <a:p>
+            <a:pPr algn="l"/>
+            <a:r>
+              <a:rPr sz="2600" b="0">
+                <a:solidFill>
+                  <a:srgbClr val="1A1A1A"/>
+                </a:solidFill>
+                <a:latin typeface="Leelawadee UI"/>
+                <a:ea typeface="Leelawadee UI"/>
+                <a:cs typeface="Leelawadee UI"/>
+              </a:rPr>
+              <a:t>• 📤 ใบงาน (LeaveEasy) ภายในจันทร์ 7 ก.ย. · 🏠 การบ้าน (หัวข้อคุณ) ภายในศุกร์ 11 ก.ย.</a:t>
+            </a:r>
+          </a:p>
+        </p:txBody>
+      </p:sp>
+      <p:sp>
+        <p:nvSpPr>
+          <p:cNvPr id="7" name="TextBox 6"/>
           <p:cNvSpPr txBox="1"/>
           <p:nvPr/>
         </p:nvSpPr>
@@ -22969,245 +22775,6 @@
 </file>
 
 <file path=ppt/slides/slide64.xml><?xml version="1.0" encoding="utf-8"?>
-<p:sld xmlns:a="http://schemas.openxmlformats.org/drawingml/2006/main" xmlns:p="http://schemas.openxmlformats.org/presentationml/2006/main" xmlns:r="http://schemas.openxmlformats.org/officeDocument/2006/relationships">
-  <p:cSld>
-    <p:spTree>
-      <p:nvGrpSpPr>
-        <p:cNvPr id="1" name=""/>
-        <p:cNvGrpSpPr/>
-        <p:nvPr/>
-      </p:nvGrpSpPr>
-      <p:grpSpPr/>
-      <p:sp>
-        <p:nvSpPr>
-          <p:cNvPr id="2" name="TextBox 1"/>
-          <p:cNvSpPr txBox="1"/>
-          <p:nvPr/>
-        </p:nvSpPr>
-        <p:spPr>
-          <a:xfrm>
-            <a:off x="822960" y="502920"/>
-            <a:ext cx="10545775" cy="804672"/>
-          </a:xfrm>
-          <a:prstGeom prst="rect">
-            <a:avLst/>
-          </a:prstGeom>
-          <a:noFill/>
-        </p:spPr>
-        <p:txBody>
-          <a:bodyPr wrap="square">
-            <a:spAutoFit/>
-          </a:bodyPr>
-          <a:lstStyle/>
-          <a:p>
-            <a:pPr algn="l"/>
-            <a:r>
-              <a:rPr sz="3600" b="1">
-                <a:solidFill>
-                  <a:srgbClr val="1F5FA8"/>
-                </a:solidFill>
-                <a:latin typeface="Leelawadee UI"/>
-                <a:ea typeface="Leelawadee UI"/>
-                <a:cs typeface="Leelawadee UI"/>
-              </a:rPr>
-              <a:t>📦 สิ่งที่ต้องส่งมอบสัปดาห์นี้</a:t>
-            </a:r>
-          </a:p>
-        </p:txBody>
-      </p:sp>
-      <p:sp>
-        <p:nvSpPr>
-          <p:cNvPr id="3" name="TextBox 2"/>
-          <p:cNvSpPr txBox="1"/>
-          <p:nvPr/>
-        </p:nvSpPr>
-        <p:spPr>
-          <a:xfrm>
-            <a:off x="822960" y="1472184"/>
-            <a:ext cx="10545775" cy="560324"/>
-          </a:xfrm>
-          <a:prstGeom prst="rect">
-            <a:avLst/>
-          </a:prstGeom>
-          <a:noFill/>
-        </p:spPr>
-        <p:txBody>
-          <a:bodyPr wrap="square">
-            <a:spAutoFit/>
-          </a:bodyPr>
-          <a:lstStyle/>
-          <a:p>
-            <a:pPr algn="l"/>
-            <a:r>
-              <a:rPr sz="2600" b="0">
-                <a:solidFill>
-                  <a:srgbClr val="1A1A1A"/>
-                </a:solidFill>
-                <a:latin typeface="Leelawadee UI"/>
-                <a:ea typeface="Leelawadee UI"/>
-                <a:cs typeface="Leelawadee UI"/>
-              </a:rPr>
-              <a:t>• [ ] repo บน GitHub ที่มี CLAUDE.md และไม่มีคีย์หลุด</a:t>
-            </a:r>
-          </a:p>
-        </p:txBody>
-      </p:sp>
-      <p:sp>
-        <p:nvSpPr>
-          <p:cNvPr id="4" name="TextBox 3"/>
-          <p:cNvSpPr txBox="1"/>
-          <p:nvPr/>
-        </p:nvSpPr>
-        <p:spPr>
-          <a:xfrm>
-            <a:off x="822960" y="2087372"/>
-            <a:ext cx="10545775" cy="560324"/>
-          </a:xfrm>
-          <a:prstGeom prst="rect">
-            <a:avLst/>
-          </a:prstGeom>
-          <a:noFill/>
-        </p:spPr>
-        <p:txBody>
-          <a:bodyPr wrap="square">
-            <a:spAutoFit/>
-          </a:bodyPr>
-          <a:lstStyle/>
-          <a:p>
-            <a:pPr algn="l"/>
-            <a:r>
-              <a:rPr sz="2600" b="0">
-                <a:solidFill>
-                  <a:srgbClr val="1A1A1A"/>
-                </a:solidFill>
-                <a:latin typeface="Leelawadee UI"/>
-                <a:ea typeface="Leelawadee UI"/>
-                <a:cs typeface="Leelawadee UI"/>
-              </a:rPr>
-              <a:t>• [ ] ⭐ CRUD ครบ — กรอก → ปิด → เปิดใหม่ → ยังอยู่</a:t>
-            </a:r>
-          </a:p>
-        </p:txBody>
-      </p:sp>
-      <p:sp>
-        <p:nvSpPr>
-          <p:cNvPr id="5" name="TextBox 4"/>
-          <p:cNvSpPr txBox="1"/>
-          <p:nvPr/>
-        </p:nvSpPr>
-        <p:spPr>
-          <a:xfrm>
-            <a:off x="822960" y="2702560"/>
-            <a:ext cx="10545775" cy="560324"/>
-          </a:xfrm>
-          <a:prstGeom prst="rect">
-            <a:avLst/>
-          </a:prstGeom>
-          <a:noFill/>
-        </p:spPr>
-        <p:txBody>
-          <a:bodyPr wrap="square">
-            <a:spAutoFit/>
-          </a:bodyPr>
-          <a:lstStyle/>
-          <a:p>
-            <a:pPr algn="l"/>
-            <a:r>
-              <a:rPr sz="2600" b="0">
-                <a:solidFill>
-                  <a:srgbClr val="1A1A1A"/>
-                </a:solidFill>
-                <a:latin typeface="Leelawadee UI"/>
-                <a:ea typeface="Leelawadee UI"/>
-                <a:cs typeface="Leelawadee UI"/>
-              </a:rPr>
-              <a:t>• [ ] ล็อกอินได้ + ไม่ล็อกอินอ่านไม่ได้ + URL ออนไลน์</a:t>
-            </a:r>
-          </a:p>
-        </p:txBody>
-      </p:sp>
-      <p:sp>
-        <p:nvSpPr>
-          <p:cNvPr id="6" name="TextBox 5"/>
-          <p:cNvSpPr txBox="1"/>
-          <p:nvPr/>
-        </p:nvSpPr>
-        <p:spPr>
-          <a:xfrm>
-            <a:off x="822960" y="3317748"/>
-            <a:ext cx="10545775" cy="1029208"/>
-          </a:xfrm>
-          <a:prstGeom prst="rect">
-            <a:avLst/>
-          </a:prstGeom>
-          <a:noFill/>
-        </p:spPr>
-        <p:txBody>
-          <a:bodyPr wrap="square">
-            <a:spAutoFit/>
-          </a:bodyPr>
-          <a:lstStyle/>
-          <a:p>
-            <a:pPr algn="l"/>
-            <a:r>
-              <a:rPr sz="2600" b="0">
-                <a:solidFill>
-                  <a:srgbClr val="1A1A1A"/>
-                </a:solidFill>
-                <a:latin typeface="Leelawadee UI"/>
-                <a:ea typeface="Leelawadee UI"/>
-                <a:cs typeface="Leelawadee UI"/>
-              </a:rPr>
-              <a:t>• 📤 ใบงาน (LeaveEasy) ภายในจันทร์ 7 ก.ย. · 🏠 การบ้าน (หัวข้อคุณ) ภายในศุกร์ 11 ก.ย.</a:t>
-            </a:r>
-          </a:p>
-        </p:txBody>
-      </p:sp>
-      <p:sp>
-        <p:nvSpPr>
-          <p:cNvPr id="7" name="TextBox 6"/>
-          <p:cNvSpPr txBox="1"/>
-          <p:nvPr/>
-        </p:nvSpPr>
-        <p:spPr>
-          <a:xfrm>
-            <a:off x="822960" y="6355080"/>
-            <a:ext cx="10545775" cy="320040"/>
-          </a:xfrm>
-          <a:prstGeom prst="rect">
-            <a:avLst/>
-          </a:prstGeom>
-          <a:noFill/>
-        </p:spPr>
-        <p:txBody>
-          <a:bodyPr wrap="square">
-            <a:spAutoFit/>
-          </a:bodyPr>
-          <a:lstStyle/>
-          <a:p>
-            <a:r>
-              <a:rPr sz="1200" b="0">
-                <a:solidFill>
-                  <a:srgbClr val="6B6B6B"/>
-                </a:solidFill>
-                <a:latin typeface="Leelawadee UI"/>
-                <a:ea typeface="Leelawadee UI"/>
-                <a:cs typeface="Leelawadee UI"/>
-              </a:rPr>
-              <a:t>RAISE 2 · เดือนที่ 2 · สัปดาห์ที่ 7          64</a:t>
-            </a:r>
-          </a:p>
-        </p:txBody>
-      </p:sp>
-    </p:spTree>
-  </p:cSld>
-  <p:clrMapOvr>
-    <a:masterClrMapping/>
-  </p:clrMapOvr>
-</p:sld>
-</file>
-
-<file path=ppt/slides/slide65.xml><?xml version="1.0" encoding="utf-8"?>
 <p:sld xmlns:a="http://schemas.openxmlformats.org/drawingml/2006/main" xmlns:p="http://schemas.openxmlformats.org/presentationml/2006/main" xmlns:r="http://schemas.openxmlformats.org/officeDocument/2006/relationships">
   <p:cSld>
     <p:spTree>
@@ -23823,7 +23390,7 @@
                 <a:ea typeface="Leelawadee UI"/>
                 <a:cs typeface="Leelawadee UI"/>
               </a:rPr>
-              <a:t>RAISE 2 · เดือนที่ 2 · สัปดาห์ที่ 7          65</a:t>
+              <a:t>RAISE 2 · เดือนที่ 2 · สัปดาห์ที่ 7          64</a:t>
             </a:r>
           </a:p>
         </p:txBody>
@@ -23836,7 +23403,7 @@
 </p:sld>
 </file>
 
-<file path=ppt/slides/slide66.xml><?xml version="1.0" encoding="utf-8"?>
+<file path=ppt/slides/slide65.xml><?xml version="1.0" encoding="utf-8"?>
 <p:sld xmlns:a="http://schemas.openxmlformats.org/drawingml/2006/main" xmlns:p="http://schemas.openxmlformats.org/presentationml/2006/main" xmlns:r="http://schemas.openxmlformats.org/officeDocument/2006/relationships">
   <p:cSld>
     <p:spTree>
@@ -24326,6 +23893,282 @@
                 <a:ea typeface="Leelawadee UI"/>
                 <a:cs typeface="Leelawadee UI"/>
               </a:rPr>
+              <a:t>RAISE 2 · เดือนที่ 2 · สัปดาห์ที่ 7          65</a:t>
+            </a:r>
+          </a:p>
+        </p:txBody>
+      </p:sp>
+    </p:spTree>
+  </p:cSld>
+  <p:clrMapOvr>
+    <a:masterClrMapping/>
+  </p:clrMapOvr>
+</p:sld>
+</file>
+
+<file path=ppt/slides/slide66.xml><?xml version="1.0" encoding="utf-8"?>
+<p:sld xmlns:a="http://schemas.openxmlformats.org/drawingml/2006/main" xmlns:p="http://schemas.openxmlformats.org/presentationml/2006/main" xmlns:r="http://schemas.openxmlformats.org/officeDocument/2006/relationships">
+  <p:cSld>
+    <p:spTree>
+      <p:nvGrpSpPr>
+        <p:cNvPr id="1" name=""/>
+        <p:cNvGrpSpPr/>
+        <p:nvPr/>
+      </p:nvGrpSpPr>
+      <p:grpSpPr/>
+      <p:sp>
+        <p:nvSpPr>
+          <p:cNvPr id="2" name="TextBox 1"/>
+          <p:cNvSpPr txBox="1"/>
+          <p:nvPr/>
+        </p:nvSpPr>
+        <p:spPr>
+          <a:xfrm>
+            <a:off x="822960" y="502920"/>
+            <a:ext cx="10545775" cy="804672"/>
+          </a:xfrm>
+          <a:prstGeom prst="rect">
+            <a:avLst/>
+          </a:prstGeom>
+          <a:noFill/>
+        </p:spPr>
+        <p:txBody>
+          <a:bodyPr wrap="square">
+            <a:spAutoFit/>
+          </a:bodyPr>
+          <a:lstStyle/>
+          <a:p>
+            <a:pPr algn="l"/>
+            <a:r>
+              <a:rPr sz="3600" b="1">
+                <a:solidFill>
+                  <a:srgbClr val="1F5FA8"/>
+                </a:solidFill>
+                <a:latin typeface="Leelawadee UI"/>
+                <a:ea typeface="Leelawadee UI"/>
+                <a:cs typeface="Leelawadee UI"/>
+              </a:rPr>
+              <a:t>👥 กติกาบ่ายนี้</a:t>
+            </a:r>
+          </a:p>
+        </p:txBody>
+      </p:sp>
+      <p:sp>
+        <p:nvSpPr>
+          <p:cNvPr id="3" name="TextBox 2"/>
+          <p:cNvSpPr txBox="1"/>
+          <p:nvPr/>
+        </p:nvSpPr>
+        <p:spPr>
+          <a:xfrm>
+            <a:off x="822960" y="1472184"/>
+            <a:ext cx="10545775" cy="560324"/>
+          </a:xfrm>
+          <a:prstGeom prst="rect">
+            <a:avLst/>
+          </a:prstGeom>
+          <a:noFill/>
+        </p:spPr>
+        <p:txBody>
+          <a:bodyPr wrap="square">
+            <a:spAutoFit/>
+          </a:bodyPr>
+          <a:lstStyle/>
+          <a:p>
+            <a:pPr algn="l"/>
+            <a:r>
+              <a:rPr sz="2600" b="0">
+                <a:solidFill>
+                  <a:srgbClr val="1A1A1A"/>
+                </a:solidFill>
+                <a:latin typeface="Leelawadee UI"/>
+                <a:ea typeface="Leelawadee UI"/>
+                <a:cs typeface="Leelawadee UI"/>
+              </a:rPr>
+              <a:t>• 🔗 เช็กว่าคุณอยู่ห้องย่อยไหน — ตารางห้องย่อยอยู่ในแชท</a:t>
+            </a:r>
+          </a:p>
+        </p:txBody>
+      </p:sp>
+      <p:sp>
+        <p:nvSpPr>
+          <p:cNvPr id="4" name="TextBox 3"/>
+          <p:cNvSpPr txBox="1"/>
+          <p:nvPr/>
+        </p:nvSpPr>
+        <p:spPr>
+          <a:xfrm>
+            <a:off x="822960" y="2087372"/>
+            <a:ext cx="10545775" cy="560324"/>
+          </a:xfrm>
+          <a:prstGeom prst="rect">
+            <a:avLst/>
+          </a:prstGeom>
+          <a:noFill/>
+        </p:spPr>
+        <p:txBody>
+          <a:bodyPr wrap="square">
+            <a:spAutoFit/>
+          </a:bodyPr>
+          <a:lstStyle/>
+          <a:p>
+            <a:pPr algn="l"/>
+            <a:r>
+              <a:rPr sz="2600" b="0">
+                <a:solidFill>
+                  <a:srgbClr val="1A1A1A"/>
+                </a:solidFill>
+                <a:latin typeface="Leelawadee UI"/>
+                <a:ea typeface="Leelawadee UI"/>
+                <a:cs typeface="Leelawadee UI"/>
+              </a:rPr>
+              <a:t>• 🖥️ สลับคนนำจอทุก Checkpoint — คนใหม่พิมพ์ชื่อในแชท</a:t>
+            </a:r>
+          </a:p>
+        </p:txBody>
+      </p:sp>
+      <p:sp>
+        <p:nvSpPr>
+          <p:cNvPr id="5" name="TextBox 4"/>
+          <p:cNvSpPr txBox="1"/>
+          <p:nvPr/>
+        </p:nvSpPr>
+        <p:spPr>
+          <a:xfrm>
+            <a:off x="822960" y="2702560"/>
+            <a:ext cx="10545775" cy="560324"/>
+          </a:xfrm>
+          <a:prstGeom prst="rect">
+            <a:avLst/>
+          </a:prstGeom>
+          <a:noFill/>
+        </p:spPr>
+        <p:txBody>
+          <a:bodyPr wrap="square">
+            <a:spAutoFit/>
+          </a:bodyPr>
+          <a:lstStyle/>
+          <a:p>
+            <a:pPr algn="l"/>
+            <a:r>
+              <a:rPr sz="2600" b="0">
+                <a:solidFill>
+                  <a:srgbClr val="1A1A1A"/>
+                </a:solidFill>
+                <a:latin typeface="Leelawadee UI"/>
+                <a:ea typeface="Leelawadee UI"/>
+                <a:cs typeface="Leelawadee UI"/>
+              </a:rPr>
+              <a:t>• 👤 ทุกคน commit ในชื่อตัวเอง — สัปดาห์นี้เริ่มนับจริง</a:t>
+            </a:r>
+          </a:p>
+        </p:txBody>
+      </p:sp>
+      <p:sp>
+        <p:nvSpPr>
+          <p:cNvPr id="6" name="TextBox 5"/>
+          <p:cNvSpPr txBox="1"/>
+          <p:nvPr/>
+        </p:nvSpPr>
+        <p:spPr>
+          <a:xfrm>
+            <a:off x="822960" y="3317748"/>
+            <a:ext cx="10545775" cy="1029208"/>
+          </a:xfrm>
+          <a:prstGeom prst="rect">
+            <a:avLst/>
+          </a:prstGeom>
+          <a:noFill/>
+        </p:spPr>
+        <p:txBody>
+          <a:bodyPr wrap="square">
+            <a:spAutoFit/>
+          </a:bodyPr>
+          <a:lstStyle/>
+          <a:p>
+            <a:pPr algn="l"/>
+            <a:r>
+              <a:rPr sz="2600" b="0">
+                <a:solidFill>
+                  <a:srgbClr val="1A1A1A"/>
+                </a:solidFill>
+                <a:latin typeface="Leelawadee UI"/>
+                <a:ea typeface="Leelawadee UI"/>
+                <a:cs typeface="Leelawadee UI"/>
+              </a:rPr>
+              <a:t>• ⌨️ ทุกคนพิมพ์เองบนเครื่องตัวเอง ห้ามให้คนอื่นพิมพ์แทน</a:t>
+            </a:r>
+          </a:p>
+        </p:txBody>
+      </p:sp>
+      <p:sp>
+        <p:nvSpPr>
+          <p:cNvPr id="7" name="TextBox 6"/>
+          <p:cNvSpPr txBox="1"/>
+          <p:nvPr/>
+        </p:nvSpPr>
+        <p:spPr>
+          <a:xfrm>
+            <a:off x="822960" y="4401820"/>
+            <a:ext cx="10545775" cy="1029208"/>
+          </a:xfrm>
+          <a:prstGeom prst="rect">
+            <a:avLst/>
+          </a:prstGeom>
+          <a:noFill/>
+        </p:spPr>
+        <p:txBody>
+          <a:bodyPr wrap="square">
+            <a:spAutoFit/>
+          </a:bodyPr>
+          <a:lstStyle/>
+          <a:p>
+            <a:pPr algn="l"/>
+            <a:r>
+              <a:rPr sz="2600" b="0">
+                <a:solidFill>
+                  <a:srgbClr val="1A1A1A"/>
+                </a:solidFill>
+                <a:latin typeface="Leelawadee UI"/>
+                <a:ea typeface="Leelawadee UI"/>
+                <a:cs typeface="Leelawadee UI"/>
+              </a:rPr>
+              <a:t>• 🚦 พิมพ์ 🟢 🟡 🔴 ในแชท + โพสต์ screenshot ทุก Checkpoint</a:t>
+            </a:r>
+          </a:p>
+        </p:txBody>
+      </p:sp>
+      <p:sp>
+        <p:nvSpPr>
+          <p:cNvPr id="8" name="TextBox 7"/>
+          <p:cNvSpPr txBox="1"/>
+          <p:nvPr/>
+        </p:nvSpPr>
+        <p:spPr>
+          <a:xfrm>
+            <a:off x="822960" y="6355080"/>
+            <a:ext cx="10545775" cy="320040"/>
+          </a:xfrm>
+          <a:prstGeom prst="rect">
+            <a:avLst/>
+          </a:prstGeom>
+          <a:noFill/>
+        </p:spPr>
+        <p:txBody>
+          <a:bodyPr wrap="square">
+            <a:spAutoFit/>
+          </a:bodyPr>
+          <a:lstStyle/>
+          <a:p>
+            <a:r>
+              <a:rPr sz="1200" b="0">
+                <a:solidFill>
+                  <a:srgbClr val="6B6B6B"/>
+                </a:solidFill>
+                <a:latin typeface="Leelawadee UI"/>
+                <a:ea typeface="Leelawadee UI"/>
+                <a:cs typeface="Leelawadee UI"/>
+              </a:rPr>
               <a:t>RAISE 2 · เดือนที่ 2 · สัปดาห์ที่ 7          66</a:t>
             </a:r>
           </a:p>
@@ -24357,23 +24200,23 @@
         </p:nvSpPr>
         <p:spPr>
           <a:xfrm>
-            <a:off x="822960" y="502920"/>
-            <a:ext cx="10545775" cy="804672"/>
-          </a:xfrm>
-          <a:prstGeom prst="rect">
-            <a:avLst/>
-          </a:prstGeom>
-          <a:noFill/>
-        </p:spPr>
-        <p:txBody>
-          <a:bodyPr wrap="square">
-            <a:spAutoFit/>
-          </a:bodyPr>
-          <a:lstStyle/>
-          <a:p>
-            <a:pPr algn="l"/>
-            <a:r>
-              <a:rPr sz="3600" b="1">
+            <a:off x="822960" y="2011680"/>
+            <a:ext cx="10545775" cy="2743200"/>
+          </a:xfrm>
+          <a:prstGeom prst="rect">
+            <a:avLst/>
+          </a:prstGeom>
+          <a:noFill/>
+        </p:spPr>
+        <p:txBody>
+          <a:bodyPr wrap="square" anchor="ctr">
+            <a:spAutoFit/>
+          </a:bodyPr>
+          <a:lstStyle/>
+          <a:p>
+            <a:pPr algn="ctr"/>
+            <a:r>
+              <a:rPr sz="5400" b="1">
                 <a:solidFill>
                   <a:srgbClr val="1F5FA8"/>
                 </a:solidFill>
@@ -24381,7 +24224,7 @@
                 <a:ea typeface="Leelawadee UI"/>
                 <a:cs typeface="Leelawadee UI"/>
               </a:rPr>
-              <a:t>👥 กติกาบ่ายนี้</a:t>
+              <a:t>ขั้นตอนที่เห็นเช้านี้ — ในหัวข้อของคุณคืออะไร?</a:t>
             </a:r>
           </a:p>
         </p:txBody>
@@ -24389,191 +24232,6 @@
       <p:sp>
         <p:nvSpPr>
           <p:cNvPr id="3" name="TextBox 2"/>
-          <p:cNvSpPr txBox="1"/>
-          <p:nvPr/>
-        </p:nvSpPr>
-        <p:spPr>
-          <a:xfrm>
-            <a:off x="822960" y="1472184"/>
-            <a:ext cx="10545775" cy="560324"/>
-          </a:xfrm>
-          <a:prstGeom prst="rect">
-            <a:avLst/>
-          </a:prstGeom>
-          <a:noFill/>
-        </p:spPr>
-        <p:txBody>
-          <a:bodyPr wrap="square">
-            <a:spAutoFit/>
-          </a:bodyPr>
-          <a:lstStyle/>
-          <a:p>
-            <a:pPr algn="l"/>
-            <a:r>
-              <a:rPr sz="2600" b="0">
-                <a:solidFill>
-                  <a:srgbClr val="1A1A1A"/>
-                </a:solidFill>
-                <a:latin typeface="Leelawadee UI"/>
-                <a:ea typeface="Leelawadee UI"/>
-                <a:cs typeface="Leelawadee UI"/>
-              </a:rPr>
-              <a:t>• 🔗 เช็กว่าคุณอยู่ห้องย่อยไหน — ตารางห้องย่อยอยู่ในแชท</a:t>
-            </a:r>
-          </a:p>
-        </p:txBody>
-      </p:sp>
-      <p:sp>
-        <p:nvSpPr>
-          <p:cNvPr id="4" name="TextBox 3"/>
-          <p:cNvSpPr txBox="1"/>
-          <p:nvPr/>
-        </p:nvSpPr>
-        <p:spPr>
-          <a:xfrm>
-            <a:off x="822960" y="2087372"/>
-            <a:ext cx="10545775" cy="560324"/>
-          </a:xfrm>
-          <a:prstGeom prst="rect">
-            <a:avLst/>
-          </a:prstGeom>
-          <a:noFill/>
-        </p:spPr>
-        <p:txBody>
-          <a:bodyPr wrap="square">
-            <a:spAutoFit/>
-          </a:bodyPr>
-          <a:lstStyle/>
-          <a:p>
-            <a:pPr algn="l"/>
-            <a:r>
-              <a:rPr sz="2600" b="0">
-                <a:solidFill>
-                  <a:srgbClr val="1A1A1A"/>
-                </a:solidFill>
-                <a:latin typeface="Leelawadee UI"/>
-                <a:ea typeface="Leelawadee UI"/>
-                <a:cs typeface="Leelawadee UI"/>
-              </a:rPr>
-              <a:t>• 🖥️ สลับคนนำจอทุก Checkpoint — คนใหม่พิมพ์ชื่อในแชท</a:t>
-            </a:r>
-          </a:p>
-        </p:txBody>
-      </p:sp>
-      <p:sp>
-        <p:nvSpPr>
-          <p:cNvPr id="5" name="TextBox 4"/>
-          <p:cNvSpPr txBox="1"/>
-          <p:nvPr/>
-        </p:nvSpPr>
-        <p:spPr>
-          <a:xfrm>
-            <a:off x="822960" y="2702560"/>
-            <a:ext cx="10545775" cy="560324"/>
-          </a:xfrm>
-          <a:prstGeom prst="rect">
-            <a:avLst/>
-          </a:prstGeom>
-          <a:noFill/>
-        </p:spPr>
-        <p:txBody>
-          <a:bodyPr wrap="square">
-            <a:spAutoFit/>
-          </a:bodyPr>
-          <a:lstStyle/>
-          <a:p>
-            <a:pPr algn="l"/>
-            <a:r>
-              <a:rPr sz="2600" b="0">
-                <a:solidFill>
-                  <a:srgbClr val="1A1A1A"/>
-                </a:solidFill>
-                <a:latin typeface="Leelawadee UI"/>
-                <a:ea typeface="Leelawadee UI"/>
-                <a:cs typeface="Leelawadee UI"/>
-              </a:rPr>
-              <a:t>• 👤 ทุกคน commit ในชื่อตัวเอง — สัปดาห์นี้เริ่มนับจริง</a:t>
-            </a:r>
-          </a:p>
-        </p:txBody>
-      </p:sp>
-      <p:sp>
-        <p:nvSpPr>
-          <p:cNvPr id="6" name="TextBox 5"/>
-          <p:cNvSpPr txBox="1"/>
-          <p:nvPr/>
-        </p:nvSpPr>
-        <p:spPr>
-          <a:xfrm>
-            <a:off x="822960" y="3317748"/>
-            <a:ext cx="10545775" cy="1029208"/>
-          </a:xfrm>
-          <a:prstGeom prst="rect">
-            <a:avLst/>
-          </a:prstGeom>
-          <a:noFill/>
-        </p:spPr>
-        <p:txBody>
-          <a:bodyPr wrap="square">
-            <a:spAutoFit/>
-          </a:bodyPr>
-          <a:lstStyle/>
-          <a:p>
-            <a:pPr algn="l"/>
-            <a:r>
-              <a:rPr sz="2600" b="0">
-                <a:solidFill>
-                  <a:srgbClr val="1A1A1A"/>
-                </a:solidFill>
-                <a:latin typeface="Leelawadee UI"/>
-                <a:ea typeface="Leelawadee UI"/>
-                <a:cs typeface="Leelawadee UI"/>
-              </a:rPr>
-              <a:t>• ⌨️ ทุกคนพิมพ์เองบนเครื่องตัวเอง ห้ามให้คนอื่นพิมพ์แทน</a:t>
-            </a:r>
-          </a:p>
-        </p:txBody>
-      </p:sp>
-      <p:sp>
-        <p:nvSpPr>
-          <p:cNvPr id="7" name="TextBox 6"/>
-          <p:cNvSpPr txBox="1"/>
-          <p:nvPr/>
-        </p:nvSpPr>
-        <p:spPr>
-          <a:xfrm>
-            <a:off x="822960" y="4401820"/>
-            <a:ext cx="10545775" cy="1029208"/>
-          </a:xfrm>
-          <a:prstGeom prst="rect">
-            <a:avLst/>
-          </a:prstGeom>
-          <a:noFill/>
-        </p:spPr>
-        <p:txBody>
-          <a:bodyPr wrap="square">
-            <a:spAutoFit/>
-          </a:bodyPr>
-          <a:lstStyle/>
-          <a:p>
-            <a:pPr algn="l"/>
-            <a:r>
-              <a:rPr sz="2600" b="0">
-                <a:solidFill>
-                  <a:srgbClr val="1A1A1A"/>
-                </a:solidFill>
-                <a:latin typeface="Leelawadee UI"/>
-                <a:ea typeface="Leelawadee UI"/>
-                <a:cs typeface="Leelawadee UI"/>
-              </a:rPr>
-              <a:t>• 🚦 พิมพ์ 🟢 🟡 🔴 ในแชท + โพสต์ screenshot ทุก Checkpoint</a:t>
-            </a:r>
-          </a:p>
-        </p:txBody>
-      </p:sp>
-      <p:sp>
-        <p:nvSpPr>
-          <p:cNvPr id="8" name="TextBox 7"/>
           <p:cNvSpPr txBox="1"/>
           <p:nvPr/>
         </p:nvSpPr>
@@ -24603,97 +24261,6 @@
                 <a:cs typeface="Leelawadee UI"/>
               </a:rPr>
               <a:t>RAISE 2 · เดือนที่ 2 · สัปดาห์ที่ 7          67</a:t>
-            </a:r>
-          </a:p>
-        </p:txBody>
-      </p:sp>
-    </p:spTree>
-  </p:cSld>
-  <p:clrMapOvr>
-    <a:masterClrMapping/>
-  </p:clrMapOvr>
-</p:sld>
-</file>
-
-<file path=ppt/slides/slide68.xml><?xml version="1.0" encoding="utf-8"?>
-<p:sld xmlns:a="http://schemas.openxmlformats.org/drawingml/2006/main" xmlns:p="http://schemas.openxmlformats.org/presentationml/2006/main" xmlns:r="http://schemas.openxmlformats.org/officeDocument/2006/relationships">
-  <p:cSld>
-    <p:spTree>
-      <p:nvGrpSpPr>
-        <p:cNvPr id="1" name=""/>
-        <p:cNvGrpSpPr/>
-        <p:nvPr/>
-      </p:nvGrpSpPr>
-      <p:grpSpPr/>
-      <p:sp>
-        <p:nvSpPr>
-          <p:cNvPr id="2" name="TextBox 1"/>
-          <p:cNvSpPr txBox="1"/>
-          <p:nvPr/>
-        </p:nvSpPr>
-        <p:spPr>
-          <a:xfrm>
-            <a:off x="822960" y="2011680"/>
-            <a:ext cx="10545775" cy="2743200"/>
-          </a:xfrm>
-          <a:prstGeom prst="rect">
-            <a:avLst/>
-          </a:prstGeom>
-          <a:noFill/>
-        </p:spPr>
-        <p:txBody>
-          <a:bodyPr wrap="square" anchor="ctr">
-            <a:spAutoFit/>
-          </a:bodyPr>
-          <a:lstStyle/>
-          <a:p>
-            <a:pPr algn="ctr"/>
-            <a:r>
-              <a:rPr sz="5400" b="1">
-                <a:solidFill>
-                  <a:srgbClr val="1F5FA8"/>
-                </a:solidFill>
-                <a:latin typeface="Leelawadee UI"/>
-                <a:ea typeface="Leelawadee UI"/>
-                <a:cs typeface="Leelawadee UI"/>
-              </a:rPr>
-              <a:t>ขั้นตอนที่เห็นเช้านี้ — ในหัวข้อของคุณคืออะไร?</a:t>
-            </a:r>
-          </a:p>
-        </p:txBody>
-      </p:sp>
-      <p:sp>
-        <p:nvSpPr>
-          <p:cNvPr id="3" name="TextBox 2"/>
-          <p:cNvSpPr txBox="1"/>
-          <p:nvPr/>
-        </p:nvSpPr>
-        <p:spPr>
-          <a:xfrm>
-            <a:off x="822960" y="6355080"/>
-            <a:ext cx="10545775" cy="320040"/>
-          </a:xfrm>
-          <a:prstGeom prst="rect">
-            <a:avLst/>
-          </a:prstGeom>
-          <a:noFill/>
-        </p:spPr>
-        <p:txBody>
-          <a:bodyPr wrap="square">
-            <a:spAutoFit/>
-          </a:bodyPr>
-          <a:lstStyle/>
-          <a:p>
-            <a:r>
-              <a:rPr sz="1200" b="0">
-                <a:solidFill>
-                  <a:srgbClr val="6B6B6B"/>
-                </a:solidFill>
-                <a:latin typeface="Leelawadee UI"/>
-                <a:ea typeface="Leelawadee UI"/>
-                <a:cs typeface="Leelawadee UI"/>
-              </a:rPr>
-              <a:t>RAISE 2 · เดือนที่ 2 · สัปดาห์ที่ 7          68</a:t>
             </a:r>
           </a:p>
         </p:txBody>

--- a/materials/week7/w7-slides.pptx
+++ b/materials/week7/w7-slides.pptx
@@ -3578,7 +3578,7 @@
           <a:lstStyle/>
           <a:p>
             <a:r>
-              <a:t>ย้ำคำแปล .gitignore = รายการไฟล์ที่ห้ามส่งขึ้นไป · พูดว่า "ทำ .gitignore ก่อน push เสมอ สลับลำดับไม่ได้ เพราะไฟล์ที่เคยขึ้นไปแล้ว ต่อให้ลบทีหลัง ก็มีคนคัดลอกไปได้ตั้งแต่วินาทีแรก" · เล่าเคสจริงสั้น ๆ ว่าคีย์หลุดขึ้น repo สาธารณะเกิดขึ้นบ่อยมาก · เตือน "ถ้าเผลอ push คีย์ขึ้นไป ให้เพิกถอนคีย์ก่อน แล้วค่อยลบไฟล์ ลบอย่างเดียวไม่พอ"</a:t>
+              <a:t>📍 สาธิตสดตรงนี้: w7-demo-fixit.md → บล็อก E (ขั้นที่ 8) 3 นาที แล้วเดินต่อไปสไลด์ ✅ ช่วงที่ 5 · ย้ำคำแปล .gitignore = รายการไฟล์ที่ห้ามส่งขึ้นไป · พูดว่า "ทำ .gitignore ก่อน push เสมอ สลับลำดับไม่ได้ เพราะไฟล์ที่เคยขึ้นไปแล้ว ต่อให้ลบทีหลัง ก็มีคนคัดลอกไปได้ตั้งแต่วินาทีแรก" · เล่าเคสจริงสั้น ๆ ว่าคีย์หลุดขึ้น repo สาธารณะเกิดขึ้นบ่อยมาก · เตือน "ถ้าเผลอ push คีย์ขึ้นไป ให้เพิกถอนคีย์ก่อน แล้วค่อยลบไฟล์ ลบอย่างเดียวไม่พอ"</a:t>
             </a:r>
           </a:p>
         </p:txBody>

--- a/materials/week7/w7-slides.pptx
+++ b/materials/week7/w7-slides.pptx
@@ -3018,7 +3018,7 @@
           <a:lstStyle/>
           <a:p>
             <a:r>
-              <a:t>ย้ำคำแปล Security Rules = กฎที่บอกว่าใครเปิดข้อมูลอะไรได้ เปรียบเป็นยามเฝ้าประตูคลัง · พูดว่า "กฎละเอียดรายห้องเป็นเรื่องใหญ่ของสัปดาห์หน้า วันนี้เราใส่กุญแจประตูหน้าบ้านหนึ่งดอกก่อน ต้องล็อกอินก่อนถึงเข้าบ้านได้"</a:t>
+              <a:t>ย้ำคำแปล Security Rules = กฎที่บอกว่าใครเปิดข้อมูลอะไรได้ เปรียบเป็นยามเฝ้าประตูคลัง · พูดว่า "กฎละเอียดรายห้องเป็นเรื่องใหญ่ของสัปดาห์หน้า วันนี้เราใส่กุญแจคลังข้อมูลหนึ่งดอกก่อน ต้องล็อกอินก่อนถึงเปิดคลังได้"</a:t>
             </a:r>
           </a:p>
         </p:txBody>
@@ -17098,7 +17098,7 @@
                 <a:ea typeface="Leelawadee UI"/>
                 <a:cs typeface="Leelawadee UI"/>
               </a:rPr>
-              <a:t>ช่วงที่ 4 — 🔒 กุญแจประตูหน้าบ้าน ⏱ 10:55–11:10</a:t>
+              <a:t>ช่วงที่ 4 — 🔒 กุญแจคลังข้อมูล ⏱ 10:55–11:10</a:t>
             </a:r>
           </a:p>
         </p:txBody>
@@ -21846,7 +21846,7 @@
                 <a:ea typeface="Consolas"/>
                 <a:cs typeface="Consolas"/>
               </a:rPr>
-              <a:t>10:55  กุญแจประตูหน้าบ้าน — กฎขั้นต่ำ 1 ข้อ</a:t>
+              <a:t>10:55  กุญแจคลังข้อมูล — กฎขั้นต่ำ 1 ข้อ</a:t>
             </a:r>
           </a:p>
           <a:p>
